--- a/Team05_PyCraft_PPT.pptx
+++ b/Team05_PyCraft_PPT.pptx
@@ -2,19 +2,15 @@
 <file path=META-INF/manifest.xml><?xml version="1.0" encoding="utf-8"?>
 <manifest:manifest xmlns:manifest="urn:oasis:names:tc:opendocument:xmlns:manifest:1.0" xmlns:loext="urn:org:documentfoundation:names:experimental:office:xmlns:loext:1.0" manifest:version="1.4">
   <manifest:file-entry manifest:full-path="/" manifest:version="1.4" manifest:media-type="application/vnd.oasis.opendocument.presentation"/>
-  <manifest:file-entry manifest:full-path="Object 1/meta.xml" manifest:media-type="text/xml"/>
-  <manifest:file-entry manifest:full-path="Object 1/styles.xml" manifest:media-type="text/xml"/>
-  <manifest:file-entry manifest:full-path="Object 1/content.xml" manifest:media-type="text/xml"/>
-  <manifest:file-entry manifest:full-path="Object 1/" manifest:media-type="application/vnd.oasis.opendocument.chart"/>
-  <manifest:file-entry manifest:full-path="Object 9/meta.xml" manifest:media-type="text/xml"/>
-  <manifest:file-entry manifest:full-path="Object 9/styles.xml" manifest:media-type="text/xml"/>
-  <manifest:file-entry manifest:full-path="Object 9/content.xml" manifest:media-type="text/xml"/>
-  <manifest:file-entry manifest:full-path="Object 9/" manifest:media-type="application/vnd.oasis.opendocument.chart"/>
   <manifest:file-entry manifest:full-path="Object 4/meta.xml" manifest:media-type="text/xml"/>
   <manifest:file-entry manifest:full-path="Object 4/styles.xml" manifest:media-type="text/xml"/>
   <manifest:file-entry manifest:full-path="Object 4/content.xml" manifest:media-type="text/xml"/>
   <manifest:file-entry manifest:full-path="Object 4/" manifest:media-type="application/vnd.oasis.opendocument.chart"/>
   <manifest:file-entry manifest:full-path="Configurations2/" manifest:media-type="application/vnd.sun.xml.ui.configuration"/>
+  <manifest:file-entry manifest:full-path="Object 1/meta.xml" manifest:media-type="text/xml"/>
+  <manifest:file-entry manifest:full-path="Object 1/styles.xml" manifest:media-type="text/xml"/>
+  <manifest:file-entry manifest:full-path="Object 1/content.xml" manifest:media-type="text/xml"/>
+  <manifest:file-entry manifest:full-path="Object 1/" manifest:media-type="application/vnd.oasis.opendocument.chart"/>
   <manifest:file-entry manifest:full-path="Object 2/meta.xml" manifest:media-type="text/xml"/>
   <manifest:file-entry manifest:full-path="Object 2/styles.xml" manifest:media-type="text/xml"/>
   <manifest:file-entry manifest:full-path="Object 2/content.xml" manifest:media-type="text/xml"/>
@@ -31,10 +27,19 @@
   <manifest:file-entry manifest:full-path="Object 6/styles.xml" manifest:media-type="text/xml"/>
   <manifest:file-entry manifest:full-path="Object 6/content.xml" manifest:media-type="text/xml"/>
   <manifest:file-entry manifest:full-path="Object 6/" manifest:media-type="application/vnd.oasis.opendocument.chart"/>
+  <manifest:file-entry manifest:full-path="settings.xml" manifest:media-type="text/xml"/>
+  <manifest:file-entry manifest:full-path="Object 7/meta.xml" manifest:media-type="text/xml"/>
+  <manifest:file-entry manifest:full-path="Object 7/styles.xml" manifest:media-type="text/xml"/>
+  <manifest:file-entry manifest:full-path="Object 7/content.xml" manifest:media-type="text/xml"/>
+  <manifest:file-entry manifest:full-path="Object 7/" manifest:media-type="application/vnd.oasis.opendocument.chart"/>
   <manifest:file-entry manifest:full-path="Object 8/meta.xml" manifest:media-type="text/xml"/>
   <manifest:file-entry manifest:full-path="Object 8/styles.xml" manifest:media-type="text/xml"/>
   <manifest:file-entry manifest:full-path="Object 8/content.xml" manifest:media-type="text/xml"/>
   <manifest:file-entry manifest:full-path="Object 8/" manifest:media-type="application/vnd.oasis.opendocument.chart"/>
+  <manifest:file-entry manifest:full-path="Object 9/meta.xml" manifest:media-type="text/xml"/>
+  <manifest:file-entry manifest:full-path="Object 9/styles.xml" manifest:media-type="text/xml"/>
+  <manifest:file-entry manifest:full-path="Object 9/content.xml" manifest:media-type="text/xml"/>
+  <manifest:file-entry manifest:full-path="Object 9/" manifest:media-type="application/vnd.oasis.opendocument.chart"/>
   <manifest:file-entry manifest:full-path="Object 10/meta.xml" manifest:media-type="text/xml"/>
   <manifest:file-entry manifest:full-path="Object 10/styles.xml" manifest:media-type="text/xml"/>
   <manifest:file-entry manifest:full-path="Object 10/content.xml" manifest:media-type="text/xml"/>
@@ -47,11 +52,6 @@
   <manifest:file-entry manifest:full-path="Object 12/styles.xml" manifest:media-type="text/xml"/>
   <manifest:file-entry manifest:full-path="Object 12/content.xml" manifest:media-type="text/xml"/>
   <manifest:file-entry manifest:full-path="Object 12/" manifest:media-type="application/vnd.oasis.opendocument.chart"/>
-  <manifest:file-entry manifest:full-path="settings.xml" manifest:media-type="text/xml"/>
-  <manifest:file-entry manifest:full-path="Object 7/meta.xml" manifest:media-type="text/xml"/>
-  <manifest:file-entry manifest:full-path="Object 7/styles.xml" manifest:media-type="text/xml"/>
-  <manifest:file-entry manifest:full-path="Object 7/content.xml" manifest:media-type="text/xml"/>
-  <manifest:file-entry manifest:full-path="Object 7/" manifest:media-type="application/vnd.oasis.opendocument.chart"/>
   <manifest:file-entry manifest:full-path="styles.xml" manifest:media-type="text/xml"/>
   <manifest:file-entry manifest:full-path="Pictures/10000000000007800000043826510E52.png" manifest:media-type="image/png"/>
   <manifest:file-entry manifest:full-path="Pictures/1000000100000640000005A06EE4E2BA.png" manifest:media-type="image/png"/>
@@ -70,7 +70,7 @@
 </file>
 
 <file path=Object 1/content.xml><?xml version="1.0" encoding="utf-8"?>
-<office:document-content xmlns:office="urn:oasis:names:tc:opendocument:xmlns:office:1.0" xmlns:ooo="http://openoffice.org/2004/office" xmlns:fo="urn:oasis:names:tc:opendocument:xmlns:xsl-fo-compatible:1.0" xmlns:xlink="http://www.w3.org/1999/xlink" xmlns:dc="http://purl.org/dc/elements/1.1/" xmlns:meta="urn:oasis:names:tc:opendocument:xmlns:meta:1.0" xmlns:style="urn:oasis:names:tc:opendocument:xmlns:style:1.0" xmlns:text="urn:oasis:names:tc:opendocument:xmlns:text:1.0" xmlns:rpt="http://openoffice.org/2005/report" xmlns:draw="urn:oasis:names:tc:opendocument:xmlns:drawing:1.0" xmlns:dr3d="urn:oasis:names:tc:opendocument:xmlns:dr3d:1.0" xmlns:svg="urn:oasis:names:tc:opendocument:xmlns:svg-compatible:1.0" xmlns:chart="urn:oasis:names:tc:opendocument:xmlns:chart:1.0" xmlns:table="urn:oasis:names:tc:opendocument:xmlns:table:1.0" xmlns:number="urn:oasis:names:tc:opendocument:xmlns:datastyle:1.0" xmlns:ooow="http://openoffice.org/2004/writer" xmlns:oooc="http://openoffice.org/2004/calc" xmlns:field="urn:openoffice:names:experimental:ooo-ms-interop:xmlns:field:1.0" xmlns:of="urn:oasis:names:tc:opendocument:xmlns:of:1.2" xmlns:xforms="http://www.w3.org/2002/xforms" xmlns:tableooo="http://openoffice.org/2009/table" xmlns:calcext="urn:org:documentfoundation:names:experimental:calc:xmlns:calcext:1.0" xmlns:drawooo="http://openoffice.org/2010/draw" xmlns:xhtml="http://www.w3.org/1999/xhtml" xmlns:loext="urn:org:documentfoundation:names:experimental:office:xmlns:loext:1.0" xmlns:math="http://www.w3.org/1998/Math/MathML" xmlns:form="urn:oasis:names:tc:opendocument:xmlns:form:1.0" xmlns:script="urn:oasis:names:tc:opendocument:xmlns:script:1.0" xmlns:dom="http://www.w3.org/2001/xml-events" xmlns:formx="urn:openoffice:names:experimental:ooxml-odf-interop:xmlns:form:1.0" xmlns:xsd="http://www.w3.org/2001/XMLSchema" xmlns:xsi="http://www.w3.org/2001/XMLSchema-instance" xmlns:grddl="http://www.w3.org/2003/g/data-view#" xmlns:css3t="http://www.w3.org/TR/css3-text/" xmlns:chartooo="http://openoffice.org/2010/chart" office:version="1.4">
+<office:document-content xmlns:office="urn:oasis:names:tc:opendocument:xmlns:office:1.0" xmlns:ooo="http://openoffice.org/2004/office" xmlns:fo="urn:oasis:names:tc:opendocument:xmlns:xsl-fo-compatible:1.0" xmlns:xlink="http://www.w3.org/1999/xlink" xmlns:dc="http://purl.org/dc/elements/1.1/" xmlns:meta="urn:oasis:names:tc:opendocument:xmlns:meta:1.0" xmlns:style="urn:oasis:names:tc:opendocument:xmlns:style:1.0" xmlns:text="urn:oasis:names:tc:opendocument:xmlns:text:1.0" xmlns:rpt="http://openoffice.org/2005/report" xmlns:draw="urn:oasis:names:tc:opendocument:xmlns:drawing:1.0" xmlns:dr3d="urn:oasis:names:tc:opendocument:xmlns:dr3d:1.0" xmlns:svg="urn:oasis:names:tc:opendocument:xmlns:svg-compatible:1.0" xmlns:chart="urn:oasis:names:tc:opendocument:xmlns:chart:1.0" xmlns:table="urn:oasis:names:tc:opendocument:xmlns:table:1.0" xmlns:number="urn:oasis:names:tc:opendocument:xmlns:datastyle:1.0" xmlns:ooow="http://openoffice.org/2004/writer" xmlns:oooc="http://openoffice.org/2004/calc" xmlns:of="urn:oasis:names:tc:opendocument:xmlns:of:1.2" xmlns:xforms="http://www.w3.org/2002/xforms" xmlns:tableooo="http://openoffice.org/2009/table" xmlns:calcext="urn:org:documentfoundation:names:experimental:calc:xmlns:calcext:1.0" xmlns:drawooo="http://openoffice.org/2010/draw" xmlns:xhtml="http://www.w3.org/1999/xhtml" xmlns:loext="urn:org:documentfoundation:names:experimental:office:xmlns:loext:1.0" xmlns:field="urn:openoffice:names:experimental:ooo-ms-interop:xmlns:field:1.0" xmlns:math="http://www.w3.org/1998/Math/MathML" xmlns:form="urn:oasis:names:tc:opendocument:xmlns:form:1.0" xmlns:script="urn:oasis:names:tc:opendocument:xmlns:script:1.0" xmlns:formx="urn:openoffice:names:experimental:ooxml-odf-interop:xmlns:form:1.0" xmlns:dom="http://www.w3.org/2001/xml-events" xmlns:xsd="http://www.w3.org/2001/XMLSchema" xmlns:xsi="http://www.w3.org/2001/XMLSchema-instance" xmlns:grddl="http://www.w3.org/2003/g/data-view#" xmlns:css3t="http://www.w3.org/TR/css3-text/" xmlns:chartooo="http://openoffice.org/2010/chart" office:version="1.4">
   <office:automatic-styles>
     <number:number-style style:name="N0">
       <number:number number:min-integer-digits="1"/>
@@ -91,7 +91,7 @@
       <style:text-properties fo:color="#1b2a30" style:text-position="0% 100%" fo:font-family="'Times New Roman'" fo:font-size="9pt" style:font-size-asian="9pt" style:font-size-complex="9pt"/>
     </style:style>
     <style:style style:name="ch4" style:family="chart">
-      <style:chart-properties chart:include-hidden-cells="false" chart:auto-position="true" chart:auto-size="true" chart:treat-empty-cells="ignore" loext:frequency-type="0" loext:bin-width="0" loext:bin-count="0" chart:data-label-number="value" chart:data-label-text="false" chart:data-label-symbol="false" chart:data-label-series="false"/>
+      <style:chart-properties chart:include-hidden-cells="false" chart:auto-position="true" chart:auto-size="true" chart:treat-empty-cells="ignore" chart:data-label-number="value" chart:data-label-text="false" chart:data-label-symbol="false" chart:data-label-series="false"/>
     </style:style>
     <style:style style:name="ch5" style:family="chart" style:data-style-name="N0">
       <style:chart-properties chart:display-label="true" chart:logarithmic="false" chart:reverse-direction="false" text:line-break="true" loext:try-staggering-first="false" chart:label-arrangement="side-by-side" chart:link-data-style-to-source="false" chart:axis-position="0" chart:axis-label-position="outside-start" chart:tick-mark-position="at-axis"/>
@@ -134,14 +134,14 @@
   <office:body>
     <office:chart>
       <chart:chart svg:width="11.682cm" svg:height="6.475cm" xlink:href="." xlink:type="simple" chart:class="chart:bar" chart:style-name="ch1">
-        <chart:title svg:x="2.492cm" svg:y="0.265cm" chart:style-name="ch2">
+        <chart:title svg:x="2.37cm" svg:y="0.265cm" chart:style-name="ch2">
           <text:p>
             <text:span text:style-name="T1">Age &amp; gender distribution (patients)</text:span>
           </text:p>
         </chart:title>
-        <chart:legend chart:legend-position="top" svg:x="4.547cm" svg:y="1.207cm" style:legend-expansion="wide" chart:style-name="ch3"/>
-        <chart:plot-area chart:style-name="ch4" svg:x="0.233cm" svg:y="1.907cm" svg:width="11.216cm" svg:height="4.439cm">
-          <chart:coordinate-region svg:x="0.233cm" svg:y="1.907cm" svg:width="11.216cm" svg:height="3.871cm"/>
+        <chart:legend chart:legend-position="top" svg:x="4.547cm" svg:y="1.255cm" style:legend-expansion="wide" chart:style-name="ch3"/>
+        <chart:plot-area chart:style-name="ch4" svg:x="0.233cm" svg:y="1.924cm" svg:width="11.216cm" svg:height="4.422cm">
+          <chart:coordinate-region svg:x="0.233cm" svg:y="1.924cm" svg:width="11.216cm" svg:height="3.854cm"/>
           <chart:axis chart:dimension="x" chart:name="primary-x" chart:style-name="ch5" chartooo:axis-type="auto">
             <chartooo:date-scale/>
             <chart:categories table:cell-range-address="local-table.$A$2:.$A$9"/>
@@ -276,24 +276,24 @@
 <file path=Object 1/meta.xml><?xml version="1.0" encoding="utf-8"?>
 <office:document-meta xmlns:office="urn:oasis:names:tc:opendocument:xmlns:office:1.0" xmlns:ooo="http://openoffice.org/2004/office" xmlns:xlink="http://www.w3.org/1999/xlink" xmlns:dc="http://purl.org/dc/elements/1.1/" xmlns:meta="urn:oasis:names:tc:opendocument:xmlns:meta:1.0" xmlns:grddl="http://www.w3.org/2003/g/data-view#" xmlns:chartooo="http://openoffice.org/2010/chart" office:version="1.4">
   <office:meta>
-    <meta:generator>LibreOffice/26.8.0.3$Windows_X86_64 LibreOffice_project/bce0998afefdbc355585ca324285661a2170ba77</meta:generator>
+    <meta:generator>LibreOffice/26.2.0.3$Windows_X86_64 LibreOffice_project/620$Build-3</meta:generator>
   </office:meta>
 </office:document-meta>
 </file>
 
 <file path=Object 1/styles.xml><?xml version="1.0" encoding="utf-8"?>
-<office:document-styles xmlns:office="urn:oasis:names:tc:opendocument:xmlns:office:1.0" xmlns:ooo="http://openoffice.org/2004/office" xmlns:fo="urn:oasis:names:tc:opendocument:xmlns:xsl-fo-compatible:1.0" xmlns:xlink="http://www.w3.org/1999/xlink" xmlns:style="urn:oasis:names:tc:opendocument:xmlns:style:1.0" xmlns:dc="http://purl.org/dc/elements/1.1/" xmlns:text="urn:oasis:names:tc:opendocument:xmlns:text:1.0" xmlns:rpt="http://openoffice.org/2005/report" xmlns:draw="urn:oasis:names:tc:opendocument:xmlns:drawing:1.0" xmlns:dr3d="urn:oasis:names:tc:opendocument:xmlns:dr3d:1.0" xmlns:svg="urn:oasis:names:tc:opendocument:xmlns:svg-compatible:1.0" xmlns:chart="urn:oasis:names:tc:opendocument:xmlns:chart:1.0" xmlns:table="urn:oasis:names:tc:opendocument:xmlns:table:1.0" xmlns:number="urn:oasis:names:tc:opendocument:xmlns:datastyle:1.0" xmlns:ooow="http://openoffice.org/2004/writer" xmlns:oooc="http://openoffice.org/2004/calc" xmlns:field="urn:openoffice:names:experimental:ooo-ms-interop:xmlns:field:1.0" xmlns:of="urn:oasis:names:tc:opendocument:xmlns:of:1.2" xmlns:tableooo="http://openoffice.org/2009/table" xmlns:calcext="urn:org:documentfoundation:names:experimental:calc:xmlns:calcext:1.0" xmlns:drawooo="http://openoffice.org/2010/draw" xmlns:xhtml="http://www.w3.org/1999/xhtml" xmlns:loext="urn:org:documentfoundation:names:experimental:office:xmlns:loext:1.0" xmlns:script="urn:oasis:names:tc:opendocument:xmlns:script:1.0" xmlns:css3t="http://www.w3.org/TR/css3-text/" xmlns:dom="http://www.w3.org/2001/xml-events" xmlns:grddl="http://www.w3.org/2003/g/data-view#" xmlns:chartooo="http://openoffice.org/2010/chart" office:version="1.4">
+<office:document-styles xmlns:office="urn:oasis:names:tc:opendocument:xmlns:office:1.0" xmlns:ooo="http://openoffice.org/2004/office" xmlns:fo="urn:oasis:names:tc:opendocument:xmlns:xsl-fo-compatible:1.0" xmlns:xlink="http://www.w3.org/1999/xlink" xmlns:style="urn:oasis:names:tc:opendocument:xmlns:style:1.0" xmlns:dc="http://purl.org/dc/elements/1.1/" xmlns:text="urn:oasis:names:tc:opendocument:xmlns:text:1.0" xmlns:rpt="http://openoffice.org/2005/report" xmlns:draw="urn:oasis:names:tc:opendocument:xmlns:drawing:1.0" xmlns:dr3d="urn:oasis:names:tc:opendocument:xmlns:dr3d:1.0" xmlns:svg="urn:oasis:names:tc:opendocument:xmlns:svg-compatible:1.0" xmlns:chart="urn:oasis:names:tc:opendocument:xmlns:chart:1.0" xmlns:table="urn:oasis:names:tc:opendocument:xmlns:table:1.0" xmlns:number="urn:oasis:names:tc:opendocument:xmlns:datastyle:1.0" xmlns:ooow="http://openoffice.org/2004/writer" xmlns:oooc="http://openoffice.org/2004/calc" xmlns:css3t="http://www.w3.org/TR/css3-text/" xmlns:of="urn:oasis:names:tc:opendocument:xmlns:of:1.2" xmlns:tableooo="http://openoffice.org/2009/table" xmlns:calcext="urn:org:documentfoundation:names:experimental:calc:xmlns:calcext:1.0" xmlns:drawooo="http://openoffice.org/2010/draw" xmlns:xhtml="http://www.w3.org/1999/xhtml" xmlns:loext="urn:org:documentfoundation:names:experimental:office:xmlns:loext:1.0" xmlns:grddl="http://www.w3.org/2003/g/data-view#" xmlns:field="urn:openoffice:names:experimental:ooo-ms-interop:xmlns:field:1.0" xmlns:script="urn:oasis:names:tc:opendocument:xmlns:script:1.0" xmlns:dom="http://www.w3.org/2001/xml-events" xmlns:chartooo="http://openoffice.org/2010/chart" office:version="1.4">
   <office:styles/>
 </office:document-styles>
 </file>
 
 <file path=Object 10/content.xml><?xml version="1.0" encoding="utf-8"?>
-<office:document-content xmlns:office="urn:oasis:names:tc:opendocument:xmlns:office:1.0" xmlns:ooo="http://openoffice.org/2004/office" xmlns:fo="urn:oasis:names:tc:opendocument:xmlns:xsl-fo-compatible:1.0" xmlns:xlink="http://www.w3.org/1999/xlink" xmlns:dc="http://purl.org/dc/elements/1.1/" xmlns:meta="urn:oasis:names:tc:opendocument:xmlns:meta:1.0" xmlns:style="urn:oasis:names:tc:opendocument:xmlns:style:1.0" xmlns:text="urn:oasis:names:tc:opendocument:xmlns:text:1.0" xmlns:rpt="http://openoffice.org/2005/report" xmlns:draw="urn:oasis:names:tc:opendocument:xmlns:drawing:1.0" xmlns:dr3d="urn:oasis:names:tc:opendocument:xmlns:dr3d:1.0" xmlns:svg="urn:oasis:names:tc:opendocument:xmlns:svg-compatible:1.0" xmlns:chart="urn:oasis:names:tc:opendocument:xmlns:chart:1.0" xmlns:table="urn:oasis:names:tc:opendocument:xmlns:table:1.0" xmlns:number="urn:oasis:names:tc:opendocument:xmlns:datastyle:1.0" xmlns:ooow="http://openoffice.org/2004/writer" xmlns:oooc="http://openoffice.org/2004/calc" xmlns:field="urn:openoffice:names:experimental:ooo-ms-interop:xmlns:field:1.0" xmlns:of="urn:oasis:names:tc:opendocument:xmlns:of:1.2" xmlns:xforms="http://www.w3.org/2002/xforms" xmlns:tableooo="http://openoffice.org/2009/table" xmlns:calcext="urn:org:documentfoundation:names:experimental:calc:xmlns:calcext:1.0" xmlns:drawooo="http://openoffice.org/2010/draw" xmlns:xhtml="http://www.w3.org/1999/xhtml" xmlns:loext="urn:org:documentfoundation:names:experimental:office:xmlns:loext:1.0" xmlns:math="http://www.w3.org/1998/Math/MathML" xmlns:form="urn:oasis:names:tc:opendocument:xmlns:form:1.0" xmlns:script="urn:oasis:names:tc:opendocument:xmlns:script:1.0" xmlns:dom="http://www.w3.org/2001/xml-events" xmlns:formx="urn:openoffice:names:experimental:ooxml-odf-interop:xmlns:form:1.0" xmlns:xsd="http://www.w3.org/2001/XMLSchema" xmlns:xsi="http://www.w3.org/2001/XMLSchema-instance" xmlns:grddl="http://www.w3.org/2003/g/data-view#" xmlns:css3t="http://www.w3.org/TR/css3-text/" xmlns:chartooo="http://openoffice.org/2010/chart" office:version="1.4">
+<office:document-content xmlns:office="urn:oasis:names:tc:opendocument:xmlns:office:1.0" xmlns:ooo="http://openoffice.org/2004/office" xmlns:fo="urn:oasis:names:tc:opendocument:xmlns:xsl-fo-compatible:1.0" xmlns:xlink="http://www.w3.org/1999/xlink" xmlns:dc="http://purl.org/dc/elements/1.1/" xmlns:meta="urn:oasis:names:tc:opendocument:xmlns:meta:1.0" xmlns:style="urn:oasis:names:tc:opendocument:xmlns:style:1.0" xmlns:text="urn:oasis:names:tc:opendocument:xmlns:text:1.0" xmlns:rpt="http://openoffice.org/2005/report" xmlns:draw="urn:oasis:names:tc:opendocument:xmlns:drawing:1.0" xmlns:dr3d="urn:oasis:names:tc:opendocument:xmlns:dr3d:1.0" xmlns:svg="urn:oasis:names:tc:opendocument:xmlns:svg-compatible:1.0" xmlns:chart="urn:oasis:names:tc:opendocument:xmlns:chart:1.0" xmlns:table="urn:oasis:names:tc:opendocument:xmlns:table:1.0" xmlns:number="urn:oasis:names:tc:opendocument:xmlns:datastyle:1.0" xmlns:ooow="http://openoffice.org/2004/writer" xmlns:oooc="http://openoffice.org/2004/calc" xmlns:of="urn:oasis:names:tc:opendocument:xmlns:of:1.2" xmlns:xforms="http://www.w3.org/2002/xforms" xmlns:tableooo="http://openoffice.org/2009/table" xmlns:calcext="urn:org:documentfoundation:names:experimental:calc:xmlns:calcext:1.0" xmlns:drawooo="http://openoffice.org/2010/draw" xmlns:xhtml="http://www.w3.org/1999/xhtml" xmlns:loext="urn:org:documentfoundation:names:experimental:office:xmlns:loext:1.0" xmlns:field="urn:openoffice:names:experimental:ooo-ms-interop:xmlns:field:1.0" xmlns:math="http://www.w3.org/1998/Math/MathML" xmlns:form="urn:oasis:names:tc:opendocument:xmlns:form:1.0" xmlns:script="urn:oasis:names:tc:opendocument:xmlns:script:1.0" xmlns:formx="urn:openoffice:names:experimental:ooxml-odf-interop:xmlns:form:1.0" xmlns:dom="http://www.w3.org/2001/xml-events" xmlns:xsd="http://www.w3.org/2001/XMLSchema" xmlns:xsi="http://www.w3.org/2001/XMLSchema-instance" xmlns:grddl="http://www.w3.org/2003/g/data-view#" xmlns:css3t="http://www.w3.org/TR/css3-text/" xmlns:chartooo="http://openoffice.org/2010/chart" office:version="1.4">
   <office:automatic-styles>
     <number:number-style style:name="N0">
       <number:number number:min-integer-digits="1"/>
     </number:number-style>
-    <number:number-style style:name="N119">
+    <number:number-style style:name="N129">
       <number:number number:decimal-places="1" number:min-decimal-places="1" number:min-integer-digits="1"/>
       <number:text>%</number:text>
     </number:number-style>
@@ -310,7 +310,7 @@
       <style:text-properties fo:color="#1b2a30" style:text-position="0% 100%" fo:font-family="'Times New Roman'" fo:font-size="9pt" style:font-size-asian="9pt" style:font-size-complex="9pt"/>
     </style:style>
     <style:style style:name="ch4" style:family="chart">
-      <style:chart-properties chart:include-hidden-cells="false" chart:auto-position="true" chart:auto-size="true" chart:treat-empty-cells="ignore" loext:frequency-type="0" loext:bin-width="0" loext:bin-count="0" chart:data-label-number="value" chart:data-label-text="false" chart:data-label-symbol="false" chart:data-label-series="false"/>
+      <style:chart-properties chart:include-hidden-cells="false" chart:auto-position="true" chart:auto-size="true" chart:treat-empty-cells="ignore" chart:data-label-number="value" chart:data-label-text="false" chart:data-label-symbol="false" chart:data-label-series="false"/>
     </style:style>
     <style:style style:name="ch5" style:family="chart" style:data-style-name="N0">
       <style:chart-properties chart:display-label="true" chart:logarithmic="false" chart:reverse-direction="false" text:line-break="true" loext:try-staggering-first="false" chart:label-arrangement="side-by-side" chart:link-data-style-to-source="false" chart:axis-position="0" chart:axis-label-position="outside-start" chart:tick-mark-position="at-axis"/>
@@ -322,7 +322,7 @@
       <style:graphic-properties draw:stroke="none" svg:stroke-width="0.035cm" svg:stroke-color="#b3b3b3"/>
       <style:text-properties fo:color="#5a6b72" style:text-position="0% 100%" fo:font-family="'Times New Roman'" fo:font-size="9pt" style:font-size-asian="9pt" style:font-size-complex="9pt"/>
     </style:style>
-    <style:style style:name="ch7" style:family="chart" style:data-style-name="N119">
+    <style:style style:name="ch7" style:family="chart" style:data-style-name="N129">
       <style:chart-properties chart:link-data-style-to-source="false" chart:data-label-number="value" chart:data-label-text="false" chart:data-label-symbol="false" chart:data-label-series="false" chart:label-position="outside" loext:custom-leader-lines="false">
         <chart:label-separator>
           <text:p>; </text:p>
@@ -331,7 +331,7 @@
       <style:graphic-properties draw:stroke="none" draw:fill-color="#4cc3b0" fo:wrap-option="wrap"/>
       <style:text-properties fo:color="#1b2a30" style:text-position="0% 100%" fo:font-family="'Times New Roman'" fo:font-size="9pt" style:font-size-asian="9pt" style:font-size-complex="9pt"/>
     </style:style>
-    <style:style style:name="ch8" style:family="chart" style:data-style-name="N119">
+    <style:style style:name="ch8" style:family="chart" style:data-style-name="N129">
       <style:chart-properties chart:link-data-style-to-source="false" chart:data-label-number="value" chart:data-label-text="false" chart:data-label-symbol="false" chart:data-label-series="false" chart:label-position="outside" loext:custom-leader-lines="false">
         <chart:label-separator>
           <text:p>; </text:p>
@@ -353,14 +353,14 @@
   <office:body>
     <office:chart>
       <chart:chart svg:width="11.428cm" svg:height="6.475cm" xlink:href="." xlink:type="simple" chart:class="chart:bar" chart:style-name="ch1">
-        <chart:title svg:x="2.403cm" svg:y="0.265cm" chart:style-name="ch2">
+        <chart:title svg:x="2.282cm" svg:y="0.265cm" chart:style-name="ch2">
           <text:p>
             <text:span text:style-name="T1">Leaving against medical advice (%)</text:span>
           </text:p>
         </chart:title>
-        <chart:legend chart:legend-position="top" svg:x="2.855cm" svg:y="1.207cm" style:legend-expansion="wide" chart:style-name="ch3"/>
-        <chart:plot-area chart:style-name="ch4" svg:x="0.228cm" svg:y="1.907cm" svg:width="10.972cm" svg:height="4.439cm">
-          <chart:coordinate-region svg:x="0.228cm" svg:y="1.907cm" svg:width="10.972cm" svg:height="3.819cm"/>
+        <chart:legend chart:legend-position="top" svg:x="2.855cm" svg:y="1.255cm" style:legend-expansion="wide" chart:style-name="ch3"/>
+        <chart:plot-area chart:style-name="ch4" svg:x="0.228cm" svg:y="1.924cm" svg:width="10.972cm" svg:height="4.422cm">
+          <chart:coordinate-region svg:x="0.228cm" svg:y="1.924cm" svg:width="10.972cm" svg:height="3.833cm"/>
           <chart:axis chart:dimension="x" chart:name="primary-x" chart:style-name="ch5" chartooo:axis-type="auto">
             <chartooo:date-scale/>
             <chart:categories table:cell-range-address="local-table.$A$2:.$A$4"/>
@@ -440,24 +440,24 @@
 <file path=Object 10/meta.xml><?xml version="1.0" encoding="utf-8"?>
 <office:document-meta xmlns:office="urn:oasis:names:tc:opendocument:xmlns:office:1.0" xmlns:ooo="http://openoffice.org/2004/office" xmlns:xlink="http://www.w3.org/1999/xlink" xmlns:dc="http://purl.org/dc/elements/1.1/" xmlns:meta="urn:oasis:names:tc:opendocument:xmlns:meta:1.0" xmlns:grddl="http://www.w3.org/2003/g/data-view#" xmlns:chartooo="http://openoffice.org/2010/chart" office:version="1.4">
   <office:meta>
-    <meta:generator>LibreOffice/26.8.0.3$Windows_X86_64 LibreOffice_project/bce0998afefdbc355585ca324285661a2170ba77</meta:generator>
+    <meta:generator>LibreOffice/26.2.0.3$Windows_X86_64 LibreOffice_project/620$Build-3</meta:generator>
   </office:meta>
 </office:document-meta>
 </file>
 
 <file path=Object 10/styles.xml><?xml version="1.0" encoding="utf-8"?>
-<office:document-styles xmlns:office="urn:oasis:names:tc:opendocument:xmlns:office:1.0" xmlns:ooo="http://openoffice.org/2004/office" xmlns:fo="urn:oasis:names:tc:opendocument:xmlns:xsl-fo-compatible:1.0" xmlns:xlink="http://www.w3.org/1999/xlink" xmlns:style="urn:oasis:names:tc:opendocument:xmlns:style:1.0" xmlns:dc="http://purl.org/dc/elements/1.1/" xmlns:text="urn:oasis:names:tc:opendocument:xmlns:text:1.0" xmlns:rpt="http://openoffice.org/2005/report" xmlns:draw="urn:oasis:names:tc:opendocument:xmlns:drawing:1.0" xmlns:dr3d="urn:oasis:names:tc:opendocument:xmlns:dr3d:1.0" xmlns:svg="urn:oasis:names:tc:opendocument:xmlns:svg-compatible:1.0" xmlns:chart="urn:oasis:names:tc:opendocument:xmlns:chart:1.0" xmlns:table="urn:oasis:names:tc:opendocument:xmlns:table:1.0" xmlns:number="urn:oasis:names:tc:opendocument:xmlns:datastyle:1.0" xmlns:ooow="http://openoffice.org/2004/writer" xmlns:oooc="http://openoffice.org/2004/calc" xmlns:field="urn:openoffice:names:experimental:ooo-ms-interop:xmlns:field:1.0" xmlns:of="urn:oasis:names:tc:opendocument:xmlns:of:1.2" xmlns:tableooo="http://openoffice.org/2009/table" xmlns:calcext="urn:org:documentfoundation:names:experimental:calc:xmlns:calcext:1.0" xmlns:drawooo="http://openoffice.org/2010/draw" xmlns:xhtml="http://www.w3.org/1999/xhtml" xmlns:loext="urn:org:documentfoundation:names:experimental:office:xmlns:loext:1.0" xmlns:script="urn:oasis:names:tc:opendocument:xmlns:script:1.0" xmlns:css3t="http://www.w3.org/TR/css3-text/" xmlns:dom="http://www.w3.org/2001/xml-events" xmlns:grddl="http://www.w3.org/2003/g/data-view#" xmlns:chartooo="http://openoffice.org/2010/chart" office:version="1.4">
+<office:document-styles xmlns:office="urn:oasis:names:tc:opendocument:xmlns:office:1.0" xmlns:ooo="http://openoffice.org/2004/office" xmlns:fo="urn:oasis:names:tc:opendocument:xmlns:xsl-fo-compatible:1.0" xmlns:xlink="http://www.w3.org/1999/xlink" xmlns:style="urn:oasis:names:tc:opendocument:xmlns:style:1.0" xmlns:dc="http://purl.org/dc/elements/1.1/" xmlns:text="urn:oasis:names:tc:opendocument:xmlns:text:1.0" xmlns:rpt="http://openoffice.org/2005/report" xmlns:draw="urn:oasis:names:tc:opendocument:xmlns:drawing:1.0" xmlns:dr3d="urn:oasis:names:tc:opendocument:xmlns:dr3d:1.0" xmlns:svg="urn:oasis:names:tc:opendocument:xmlns:svg-compatible:1.0" xmlns:chart="urn:oasis:names:tc:opendocument:xmlns:chart:1.0" xmlns:table="urn:oasis:names:tc:opendocument:xmlns:table:1.0" xmlns:number="urn:oasis:names:tc:opendocument:xmlns:datastyle:1.0" xmlns:ooow="http://openoffice.org/2004/writer" xmlns:oooc="http://openoffice.org/2004/calc" xmlns:css3t="http://www.w3.org/TR/css3-text/" xmlns:of="urn:oasis:names:tc:opendocument:xmlns:of:1.2" xmlns:tableooo="http://openoffice.org/2009/table" xmlns:calcext="urn:org:documentfoundation:names:experimental:calc:xmlns:calcext:1.0" xmlns:drawooo="http://openoffice.org/2010/draw" xmlns:xhtml="http://www.w3.org/1999/xhtml" xmlns:loext="urn:org:documentfoundation:names:experimental:office:xmlns:loext:1.0" xmlns:grddl="http://www.w3.org/2003/g/data-view#" xmlns:field="urn:openoffice:names:experimental:ooo-ms-interop:xmlns:field:1.0" xmlns:script="urn:oasis:names:tc:opendocument:xmlns:script:1.0" xmlns:dom="http://www.w3.org/2001/xml-events" xmlns:chartooo="http://openoffice.org/2010/chart" office:version="1.4">
   <office:styles/>
 </office:document-styles>
 </file>
 
 <file path=Object 11/content.xml><?xml version="1.0" encoding="utf-8"?>
-<office:document-content xmlns:office="urn:oasis:names:tc:opendocument:xmlns:office:1.0" xmlns:ooo="http://openoffice.org/2004/office" xmlns:fo="urn:oasis:names:tc:opendocument:xmlns:xsl-fo-compatible:1.0" xmlns:xlink="http://www.w3.org/1999/xlink" xmlns:dc="http://purl.org/dc/elements/1.1/" xmlns:meta="urn:oasis:names:tc:opendocument:xmlns:meta:1.0" xmlns:style="urn:oasis:names:tc:opendocument:xmlns:style:1.0" xmlns:text="urn:oasis:names:tc:opendocument:xmlns:text:1.0" xmlns:rpt="http://openoffice.org/2005/report" xmlns:draw="urn:oasis:names:tc:opendocument:xmlns:drawing:1.0" xmlns:dr3d="urn:oasis:names:tc:opendocument:xmlns:dr3d:1.0" xmlns:svg="urn:oasis:names:tc:opendocument:xmlns:svg-compatible:1.0" xmlns:chart="urn:oasis:names:tc:opendocument:xmlns:chart:1.0" xmlns:table="urn:oasis:names:tc:opendocument:xmlns:table:1.0" xmlns:number="urn:oasis:names:tc:opendocument:xmlns:datastyle:1.0" xmlns:ooow="http://openoffice.org/2004/writer" xmlns:oooc="http://openoffice.org/2004/calc" xmlns:field="urn:openoffice:names:experimental:ooo-ms-interop:xmlns:field:1.0" xmlns:of="urn:oasis:names:tc:opendocument:xmlns:of:1.2" xmlns:xforms="http://www.w3.org/2002/xforms" xmlns:tableooo="http://openoffice.org/2009/table" xmlns:calcext="urn:org:documentfoundation:names:experimental:calc:xmlns:calcext:1.0" xmlns:drawooo="http://openoffice.org/2010/draw" xmlns:xhtml="http://www.w3.org/1999/xhtml" xmlns:loext="urn:org:documentfoundation:names:experimental:office:xmlns:loext:1.0" xmlns:math="http://www.w3.org/1998/Math/MathML" xmlns:form="urn:oasis:names:tc:opendocument:xmlns:form:1.0" xmlns:script="urn:oasis:names:tc:opendocument:xmlns:script:1.0" xmlns:dom="http://www.w3.org/2001/xml-events" xmlns:formx="urn:openoffice:names:experimental:ooxml-odf-interop:xmlns:form:1.0" xmlns:xsd="http://www.w3.org/2001/XMLSchema" xmlns:xsi="http://www.w3.org/2001/XMLSchema-instance" xmlns:grddl="http://www.w3.org/2003/g/data-view#" xmlns:css3t="http://www.w3.org/TR/css3-text/" xmlns:chartooo="http://openoffice.org/2010/chart" office:version="1.4">
+<office:document-content xmlns:office="urn:oasis:names:tc:opendocument:xmlns:office:1.0" xmlns:ooo="http://openoffice.org/2004/office" xmlns:fo="urn:oasis:names:tc:opendocument:xmlns:xsl-fo-compatible:1.0" xmlns:xlink="http://www.w3.org/1999/xlink" xmlns:dc="http://purl.org/dc/elements/1.1/" xmlns:meta="urn:oasis:names:tc:opendocument:xmlns:meta:1.0" xmlns:style="urn:oasis:names:tc:opendocument:xmlns:style:1.0" xmlns:text="urn:oasis:names:tc:opendocument:xmlns:text:1.0" xmlns:rpt="http://openoffice.org/2005/report" xmlns:draw="urn:oasis:names:tc:opendocument:xmlns:drawing:1.0" xmlns:dr3d="urn:oasis:names:tc:opendocument:xmlns:dr3d:1.0" xmlns:svg="urn:oasis:names:tc:opendocument:xmlns:svg-compatible:1.0" xmlns:chart="urn:oasis:names:tc:opendocument:xmlns:chart:1.0" xmlns:table="urn:oasis:names:tc:opendocument:xmlns:table:1.0" xmlns:number="urn:oasis:names:tc:opendocument:xmlns:datastyle:1.0" xmlns:ooow="http://openoffice.org/2004/writer" xmlns:oooc="http://openoffice.org/2004/calc" xmlns:of="urn:oasis:names:tc:opendocument:xmlns:of:1.2" xmlns:xforms="http://www.w3.org/2002/xforms" xmlns:tableooo="http://openoffice.org/2009/table" xmlns:calcext="urn:org:documentfoundation:names:experimental:calc:xmlns:calcext:1.0" xmlns:drawooo="http://openoffice.org/2010/draw" xmlns:xhtml="http://www.w3.org/1999/xhtml" xmlns:loext="urn:org:documentfoundation:names:experimental:office:xmlns:loext:1.0" xmlns:field="urn:openoffice:names:experimental:ooo-ms-interop:xmlns:field:1.0" xmlns:math="http://www.w3.org/1998/Math/MathML" xmlns:form="urn:oasis:names:tc:opendocument:xmlns:form:1.0" xmlns:script="urn:oasis:names:tc:opendocument:xmlns:script:1.0" xmlns:formx="urn:openoffice:names:experimental:ooxml-odf-interop:xmlns:form:1.0" xmlns:dom="http://www.w3.org/2001/xml-events" xmlns:xsd="http://www.w3.org/2001/XMLSchema" xmlns:xsi="http://www.w3.org/2001/XMLSchema-instance" xmlns:grddl="http://www.w3.org/2003/g/data-view#" xmlns:css3t="http://www.w3.org/TR/css3-text/" xmlns:chartooo="http://openoffice.org/2010/chart" office:version="1.4">
   <office:automatic-styles>
     <number:number-style style:name="N0">
       <number:number number:min-integer-digits="1"/>
     </number:number-style>
-    <number:number-style style:name="N119">
+    <number:number-style style:name="N129">
       <number:number number:decimal-places="3" number:min-decimal-places="3" number:min-integer-digits="1"/>
     </number:number-style>
     <style:style style:name="ch1" style:family="chart">
@@ -468,7 +468,7 @@
       <style:text-properties fo:font-size="13pt" style:font-size-asian="13pt" style:font-size-complex="13pt"/>
     </style:style>
     <style:style style:name="ch3" style:family="chart">
-      <style:chart-properties chart:vertical="true" chart:include-hidden-cells="false" chart:auto-position="true" chart:auto-size="true" chart:treat-empty-cells="ignore" loext:frequency-type="0" loext:bin-width="0" loext:bin-count="0" chart:data-label-number="value" chart:data-label-text="false" chart:data-label-symbol="false" chart:data-label-series="false"/>
+      <style:chart-properties chart:vertical="true" chart:include-hidden-cells="false" chart:auto-position="true" chart:auto-size="true" chart:treat-empty-cells="ignore" chart:data-label-number="value" chart:data-label-text="false" chart:data-label-symbol="false" chart:data-label-series="false"/>
     </style:style>
     <style:style style:name="ch4" style:family="chart" style:data-style-name="N0">
       <style:chart-properties chart:display-label="true" chart:logarithmic="false" chart:reverse-direction="true" text:line-break="true" loext:try-staggering-first="false" chart:label-arrangement="side-by-side" chart:link-data-style-to-source="false" chart:axis-position="0" chart:tick-mark-position="at-axis"/>
@@ -480,7 +480,7 @@
       <style:graphic-properties draw:stroke="none" svg:stroke-width="0.035cm" svg:stroke-color="#b3b3b3"/>
       <style:text-properties fo:color="#5a6b72" style:text-position="0% 100%" fo:font-family="'Times New Roman'" fo:font-size="9pt" style:font-size-asian="9pt" style:font-size-complex="9pt"/>
     </style:style>
-    <style:style style:name="ch6" style:family="chart" style:data-style-name="N119">
+    <style:style style:name="ch6" style:family="chart" style:data-style-name="N129">
       <style:chart-properties chart:link-data-style-to-source="false" chart:data-label-number="value" chart:data-label-text="false" chart:data-label-symbol="false" chart:data-label-series="false" chart:label-position="outside" loext:custom-leader-lines="false">
         <chart:label-separator>
           <text:p>; </text:p>
@@ -491,18 +491,14 @@
     </style:style>
     <style:style style:name="ch7" style:family="chart">
       <style:chart-properties chart:solid-type="cuboid"/>
-      <style:graphic-properties/>
-      <style:text-properties/>
     </style:style>
     <style:style style:name="ch8" style:family="chart">
       <style:chart-properties chart:solid-type="cuboid"/>
       <style:graphic-properties draw:fill-color="#5fa8d3"/>
-      <style:text-properties/>
     </style:style>
     <style:style style:name="ch9" style:family="chart">
       <style:chart-properties chart:solid-type="cuboid"/>
       <style:graphic-properties draw:fill-color="#c5cdd1"/>
-      <style:text-properties/>
     </style:style>
     <style:style style:name="ch10" style:family="chart">
       <style:graphic-properties draw:fill="none" draw:fill-color="#d9d9d9"/>
@@ -517,13 +513,13 @@
   <office:body>
     <office:chart>
       <chart:chart svg:width="11.682cm" svg:height="6.475cm" xlink:href="." xlink:type="simple" chart:class="chart:bar" chart:style-name="ch1">
-        <chart:title svg:x="2.842cm" svg:y="0.265cm" chart:style-name="ch2">
+        <chart:title svg:x="2.732cm" svg:y="0.265cm" chart:style-name="ch2">
           <text:p>
             <text:span text:style-name="T1">Model leaderboard (ROC-AUC)</text:span>
           </text:p>
         </chart:title>
-        <chart:plot-area chart:style-name="ch3" svg:x="0.233cm" svg:y="1.151cm" svg:width="11.216cm" svg:height="5.195cm">
-          <chart:coordinate-region svg:x="3.666cm" svg:y="1.151cm" svg:width="7.783cm" svg:height="5.195cm"/>
+        <chart:plot-area chart:style-name="ch3" svg:x="0.233cm" svg:y="1.199cm" svg:width="11.216cm" svg:height="5.147cm">
+          <chart:coordinate-region svg:x="3.793cm" svg:y="1.199cm" svg:width="7.656cm" svg:height="5.147cm"/>
           <chart:axis chart:dimension="x" chart:name="primary-x" chart:style-name="ch4" chartooo:axis-type="auto">
             <chartooo:date-scale/>
             <chart:categories table:cell-range-address="local-table.$A$2:.$A$14"/>
@@ -671,24 +667,24 @@
 <file path=Object 11/meta.xml><?xml version="1.0" encoding="utf-8"?>
 <office:document-meta xmlns:office="urn:oasis:names:tc:opendocument:xmlns:office:1.0" xmlns:ooo="http://openoffice.org/2004/office" xmlns:xlink="http://www.w3.org/1999/xlink" xmlns:dc="http://purl.org/dc/elements/1.1/" xmlns:meta="urn:oasis:names:tc:opendocument:xmlns:meta:1.0" xmlns:grddl="http://www.w3.org/2003/g/data-view#" xmlns:chartooo="http://openoffice.org/2010/chart" office:version="1.4">
   <office:meta>
-    <meta:generator>LibreOffice/26.8.0.3$Windows_X86_64 LibreOffice_project/bce0998afefdbc355585ca324285661a2170ba77</meta:generator>
+    <meta:generator>LibreOffice/26.2.0.3$Windows_X86_64 LibreOffice_project/620$Build-3</meta:generator>
   </office:meta>
 </office:document-meta>
 </file>
 
 <file path=Object 11/styles.xml><?xml version="1.0" encoding="utf-8"?>
-<office:document-styles xmlns:office="urn:oasis:names:tc:opendocument:xmlns:office:1.0" xmlns:ooo="http://openoffice.org/2004/office" xmlns:fo="urn:oasis:names:tc:opendocument:xmlns:xsl-fo-compatible:1.0" xmlns:xlink="http://www.w3.org/1999/xlink" xmlns:style="urn:oasis:names:tc:opendocument:xmlns:style:1.0" xmlns:dc="http://purl.org/dc/elements/1.1/" xmlns:text="urn:oasis:names:tc:opendocument:xmlns:text:1.0" xmlns:rpt="http://openoffice.org/2005/report" xmlns:draw="urn:oasis:names:tc:opendocument:xmlns:drawing:1.0" xmlns:dr3d="urn:oasis:names:tc:opendocument:xmlns:dr3d:1.0" xmlns:svg="urn:oasis:names:tc:opendocument:xmlns:svg-compatible:1.0" xmlns:chart="urn:oasis:names:tc:opendocument:xmlns:chart:1.0" xmlns:table="urn:oasis:names:tc:opendocument:xmlns:table:1.0" xmlns:number="urn:oasis:names:tc:opendocument:xmlns:datastyle:1.0" xmlns:ooow="http://openoffice.org/2004/writer" xmlns:oooc="http://openoffice.org/2004/calc" xmlns:field="urn:openoffice:names:experimental:ooo-ms-interop:xmlns:field:1.0" xmlns:of="urn:oasis:names:tc:opendocument:xmlns:of:1.2" xmlns:tableooo="http://openoffice.org/2009/table" xmlns:calcext="urn:org:documentfoundation:names:experimental:calc:xmlns:calcext:1.0" xmlns:drawooo="http://openoffice.org/2010/draw" xmlns:xhtml="http://www.w3.org/1999/xhtml" xmlns:loext="urn:org:documentfoundation:names:experimental:office:xmlns:loext:1.0" xmlns:script="urn:oasis:names:tc:opendocument:xmlns:script:1.0" xmlns:css3t="http://www.w3.org/TR/css3-text/" xmlns:dom="http://www.w3.org/2001/xml-events" xmlns:grddl="http://www.w3.org/2003/g/data-view#" xmlns:chartooo="http://openoffice.org/2010/chart" office:version="1.4">
+<office:document-styles xmlns:office="urn:oasis:names:tc:opendocument:xmlns:office:1.0" xmlns:ooo="http://openoffice.org/2004/office" xmlns:fo="urn:oasis:names:tc:opendocument:xmlns:xsl-fo-compatible:1.0" xmlns:xlink="http://www.w3.org/1999/xlink" xmlns:style="urn:oasis:names:tc:opendocument:xmlns:style:1.0" xmlns:dc="http://purl.org/dc/elements/1.1/" xmlns:text="urn:oasis:names:tc:opendocument:xmlns:text:1.0" xmlns:rpt="http://openoffice.org/2005/report" xmlns:draw="urn:oasis:names:tc:opendocument:xmlns:drawing:1.0" xmlns:dr3d="urn:oasis:names:tc:opendocument:xmlns:dr3d:1.0" xmlns:svg="urn:oasis:names:tc:opendocument:xmlns:svg-compatible:1.0" xmlns:chart="urn:oasis:names:tc:opendocument:xmlns:chart:1.0" xmlns:table="urn:oasis:names:tc:opendocument:xmlns:table:1.0" xmlns:number="urn:oasis:names:tc:opendocument:xmlns:datastyle:1.0" xmlns:ooow="http://openoffice.org/2004/writer" xmlns:oooc="http://openoffice.org/2004/calc" xmlns:css3t="http://www.w3.org/TR/css3-text/" xmlns:of="urn:oasis:names:tc:opendocument:xmlns:of:1.2" xmlns:tableooo="http://openoffice.org/2009/table" xmlns:calcext="urn:org:documentfoundation:names:experimental:calc:xmlns:calcext:1.0" xmlns:drawooo="http://openoffice.org/2010/draw" xmlns:xhtml="http://www.w3.org/1999/xhtml" xmlns:loext="urn:org:documentfoundation:names:experimental:office:xmlns:loext:1.0" xmlns:grddl="http://www.w3.org/2003/g/data-view#" xmlns:field="urn:openoffice:names:experimental:ooo-ms-interop:xmlns:field:1.0" xmlns:script="urn:oasis:names:tc:opendocument:xmlns:script:1.0" xmlns:dom="http://www.w3.org/2001/xml-events" xmlns:chartooo="http://openoffice.org/2010/chart" office:version="1.4">
   <office:styles/>
 </office:document-styles>
 </file>
 
 <file path=Object 12/content.xml><?xml version="1.0" encoding="utf-8"?>
-<office:document-content xmlns:office="urn:oasis:names:tc:opendocument:xmlns:office:1.0" xmlns:ooo="http://openoffice.org/2004/office" xmlns:fo="urn:oasis:names:tc:opendocument:xmlns:xsl-fo-compatible:1.0" xmlns:xlink="http://www.w3.org/1999/xlink" xmlns:dc="http://purl.org/dc/elements/1.1/" xmlns:meta="urn:oasis:names:tc:opendocument:xmlns:meta:1.0" xmlns:style="urn:oasis:names:tc:opendocument:xmlns:style:1.0" xmlns:text="urn:oasis:names:tc:opendocument:xmlns:text:1.0" xmlns:rpt="http://openoffice.org/2005/report" xmlns:draw="urn:oasis:names:tc:opendocument:xmlns:drawing:1.0" xmlns:dr3d="urn:oasis:names:tc:opendocument:xmlns:dr3d:1.0" xmlns:svg="urn:oasis:names:tc:opendocument:xmlns:svg-compatible:1.0" xmlns:chart="urn:oasis:names:tc:opendocument:xmlns:chart:1.0" xmlns:table="urn:oasis:names:tc:opendocument:xmlns:table:1.0" xmlns:number="urn:oasis:names:tc:opendocument:xmlns:datastyle:1.0" xmlns:ooow="http://openoffice.org/2004/writer" xmlns:oooc="http://openoffice.org/2004/calc" xmlns:field="urn:openoffice:names:experimental:ooo-ms-interop:xmlns:field:1.0" xmlns:of="urn:oasis:names:tc:opendocument:xmlns:of:1.2" xmlns:xforms="http://www.w3.org/2002/xforms" xmlns:tableooo="http://openoffice.org/2009/table" xmlns:calcext="urn:org:documentfoundation:names:experimental:calc:xmlns:calcext:1.0" xmlns:drawooo="http://openoffice.org/2010/draw" xmlns:xhtml="http://www.w3.org/1999/xhtml" xmlns:loext="urn:org:documentfoundation:names:experimental:office:xmlns:loext:1.0" xmlns:math="http://www.w3.org/1998/Math/MathML" xmlns:form="urn:oasis:names:tc:opendocument:xmlns:form:1.0" xmlns:script="urn:oasis:names:tc:opendocument:xmlns:script:1.0" xmlns:dom="http://www.w3.org/2001/xml-events" xmlns:formx="urn:openoffice:names:experimental:ooxml-odf-interop:xmlns:form:1.0" xmlns:xsd="http://www.w3.org/2001/XMLSchema" xmlns:xsi="http://www.w3.org/2001/XMLSchema-instance" xmlns:grddl="http://www.w3.org/2003/g/data-view#" xmlns:css3t="http://www.w3.org/TR/css3-text/" xmlns:chartooo="http://openoffice.org/2010/chart" office:version="1.4">
+<office:document-content xmlns:office="urn:oasis:names:tc:opendocument:xmlns:office:1.0" xmlns:ooo="http://openoffice.org/2004/office" xmlns:fo="urn:oasis:names:tc:opendocument:xmlns:xsl-fo-compatible:1.0" xmlns:xlink="http://www.w3.org/1999/xlink" xmlns:dc="http://purl.org/dc/elements/1.1/" xmlns:meta="urn:oasis:names:tc:opendocument:xmlns:meta:1.0" xmlns:style="urn:oasis:names:tc:opendocument:xmlns:style:1.0" xmlns:text="urn:oasis:names:tc:opendocument:xmlns:text:1.0" xmlns:rpt="http://openoffice.org/2005/report" xmlns:draw="urn:oasis:names:tc:opendocument:xmlns:drawing:1.0" xmlns:dr3d="urn:oasis:names:tc:opendocument:xmlns:dr3d:1.0" xmlns:svg="urn:oasis:names:tc:opendocument:xmlns:svg-compatible:1.0" xmlns:chart="urn:oasis:names:tc:opendocument:xmlns:chart:1.0" xmlns:table="urn:oasis:names:tc:opendocument:xmlns:table:1.0" xmlns:number="urn:oasis:names:tc:opendocument:xmlns:datastyle:1.0" xmlns:ooow="http://openoffice.org/2004/writer" xmlns:oooc="http://openoffice.org/2004/calc" xmlns:of="urn:oasis:names:tc:opendocument:xmlns:of:1.2" xmlns:xforms="http://www.w3.org/2002/xforms" xmlns:tableooo="http://openoffice.org/2009/table" xmlns:calcext="urn:org:documentfoundation:names:experimental:calc:xmlns:calcext:1.0" xmlns:drawooo="http://openoffice.org/2010/draw" xmlns:xhtml="http://www.w3.org/1999/xhtml" xmlns:loext="urn:org:documentfoundation:names:experimental:office:xmlns:loext:1.0" xmlns:field="urn:openoffice:names:experimental:ooo-ms-interop:xmlns:field:1.0" xmlns:math="http://www.w3.org/1998/Math/MathML" xmlns:form="urn:oasis:names:tc:opendocument:xmlns:form:1.0" xmlns:script="urn:oasis:names:tc:opendocument:xmlns:script:1.0" xmlns:formx="urn:openoffice:names:experimental:ooxml-odf-interop:xmlns:form:1.0" xmlns:dom="http://www.w3.org/2001/xml-events" xmlns:xsd="http://www.w3.org/2001/XMLSchema" xmlns:xsi="http://www.w3.org/2001/XMLSchema-instance" xmlns:grddl="http://www.w3.org/2003/g/data-view#" xmlns:css3t="http://www.w3.org/TR/css3-text/" xmlns:chartooo="http://openoffice.org/2010/chart" office:version="1.4">
   <office:automatic-styles>
     <number:number-style style:name="N0">
       <number:number number:min-integer-digits="1"/>
     </number:number-style>
-    <number:number-style style:name="N119">
+    <number:number-style style:name="N129">
       <number:number number:decimal-places="1" number:min-decimal-places="1" number:min-integer-digits="1"/>
       <number:text>%</number:text>
     </number:number-style>
@@ -700,7 +696,7 @@
       <style:text-properties fo:font-size="13pt" style:font-size-asian="13pt" style:font-size-complex="13pt"/>
     </style:style>
     <style:style style:name="ch3" style:family="chart">
-      <style:chart-properties chart:include-hidden-cells="false" chart:auto-position="true" chart:auto-size="true" chart:treat-empty-cells="ignore" loext:frequency-type="0" loext:bin-width="0" loext:bin-count="0" chart:data-label-number="value" chart:data-label-text="false" chart:data-label-symbol="false" chart:data-label-series="false"/>
+      <style:chart-properties chart:include-hidden-cells="false" chart:auto-position="true" chart:auto-size="true" chart:treat-empty-cells="ignore" chart:data-label-number="value" chart:data-label-text="false" chart:data-label-symbol="false" chart:data-label-series="false"/>
     </style:style>
     <style:style style:name="ch4" style:family="chart" style:data-style-name="N0">
       <style:chart-properties chart:display-label="true" chart:logarithmic="false" chart:reverse-direction="false" text:line-break="true" loext:try-staggering-first="false" chart:label-arrangement="side-by-side" chart:link-data-style-to-source="false" chart:axis-position="0" chart:axis-label-position="outside-start" chart:tick-mark-position="at-axis"/>
@@ -712,7 +708,7 @@
       <style:graphic-properties draw:stroke="none" svg:stroke-width="0.035cm" svg:stroke-color="#b3b3b3"/>
       <style:text-properties fo:color="#5a6b72" style:text-position="0% 100%" fo:font-family="'Times New Roman'" fo:font-size="9pt" style:font-size-asian="9pt" style:font-size-complex="9pt"/>
     </style:style>
-    <style:style style:name="ch6" style:family="chart" style:data-style-name="N119">
+    <style:style style:name="ch6" style:family="chart" style:data-style-name="N129">
       <style:chart-properties chart:link-data-style-to-source="false" chart:data-label-number="value" chart:data-label-text="false" chart:data-label-symbol="false" chart:data-label-series="false" chart:label-position="outside" loext:custom-leader-lines="false">
         <chart:label-separator>
           <text:p>; </text:p>
@@ -723,33 +719,26 @@
     </style:style>
     <style:style style:name="ch7" style:family="chart">
       <style:chart-properties chart:solid-type="cuboid"/>
-      <style:graphic-properties/>
-      <style:text-properties/>
     </style:style>
     <style:style style:name="ch8" style:family="chart">
       <style:chart-properties chart:solid-type="cuboid"/>
       <style:graphic-properties draw:fill-color="#d3cceb"/>
-      <style:text-properties/>
     </style:style>
     <style:style style:name="ch9" style:family="chart">
       <style:chart-properties chart:solid-type="cuboid"/>
       <style:graphic-properties draw:fill-color="#bdb2e0"/>
-      <style:text-properties/>
     </style:style>
     <style:style style:name="ch10" style:family="chart">
       <style:chart-properties chart:solid-type="cuboid"/>
       <style:graphic-properties draw:fill-color="#a393d2"/>
-      <style:text-properties/>
     </style:style>
     <style:style style:name="ch11" style:family="chart">
       <style:chart-properties chart:solid-type="cuboid"/>
       <style:graphic-properties draw:fill-color="#8b79c4"/>
-      <style:text-properties/>
     </style:style>
     <style:style style:name="ch12" style:family="chart">
       <style:chart-properties chart:solid-type="cuboid"/>
       <style:graphic-properties draw:fill-color="#5e4f99"/>
-      <style:text-properties/>
     </style:style>
     <style:style style:name="ch13" style:family="chart">
       <style:graphic-properties draw:fill="none" draw:fill-color="#d9d9d9"/>
@@ -764,13 +753,13 @@
   <office:body>
     <office:chart>
       <chart:chart svg:width="11.428cm" svg:height="6.475cm" xlink:href="." xlink:type="simple" chart:class="chart:bar" chart:style-name="ch1">
-        <chart:title svg:x="1.498cm" svg:y="0.265cm" chart:style-name="ch2">
+        <chart:title svg:x="1.344cm" svg:y="0.265cm" chart:style-name="ch2">
           <text:p>
             <text:span text:style-name="T1">Observed 28-day death rate by risk decile (%)</text:span>
           </text:p>
         </chart:title>
-        <chart:plot-area chart:style-name="ch3" svg:x="0.228cm" svg:y="1.151cm" svg:width="10.972cm" svg:height="5.195cm">
-          <chart:coordinate-region svg:x="0.228cm" svg:y="1.151cm" svg:width="10.972cm" svg:height="4.548cm"/>
+        <chart:plot-area chart:style-name="ch3" svg:x="0.228cm" svg:y="1.199cm" svg:width="10.972cm" svg:height="5.147cm">
+          <chart:coordinate-region svg:x="0.228cm" svg:y="1.199cm" svg:width="10.972cm" svg:height="4.494cm"/>
           <chart:axis chart:dimension="x" chart:name="primary-x" chart:style-name="ch4" chartooo:axis-type="auto">
             <chartooo:date-scale/>
             <chart:categories table:cell-range-address="local-table.$A$2:.$A$11"/>
@@ -896,24 +885,24 @@
 <file path=Object 12/meta.xml><?xml version="1.0" encoding="utf-8"?>
 <office:document-meta xmlns:office="urn:oasis:names:tc:opendocument:xmlns:office:1.0" xmlns:ooo="http://openoffice.org/2004/office" xmlns:xlink="http://www.w3.org/1999/xlink" xmlns:dc="http://purl.org/dc/elements/1.1/" xmlns:meta="urn:oasis:names:tc:opendocument:xmlns:meta:1.0" xmlns:grddl="http://www.w3.org/2003/g/data-view#" xmlns:chartooo="http://openoffice.org/2010/chart" office:version="1.4">
   <office:meta>
-    <meta:generator>LibreOffice/26.8.0.3$Windows_X86_64 LibreOffice_project/bce0998afefdbc355585ca324285661a2170ba77</meta:generator>
+    <meta:generator>LibreOffice/26.2.0.3$Windows_X86_64 LibreOffice_project/620$Build-3</meta:generator>
   </office:meta>
 </office:document-meta>
 </file>
 
 <file path=Object 12/styles.xml><?xml version="1.0" encoding="utf-8"?>
-<office:document-styles xmlns:office="urn:oasis:names:tc:opendocument:xmlns:office:1.0" xmlns:ooo="http://openoffice.org/2004/office" xmlns:fo="urn:oasis:names:tc:opendocument:xmlns:xsl-fo-compatible:1.0" xmlns:xlink="http://www.w3.org/1999/xlink" xmlns:style="urn:oasis:names:tc:opendocument:xmlns:style:1.0" xmlns:dc="http://purl.org/dc/elements/1.1/" xmlns:text="urn:oasis:names:tc:opendocument:xmlns:text:1.0" xmlns:rpt="http://openoffice.org/2005/report" xmlns:draw="urn:oasis:names:tc:opendocument:xmlns:drawing:1.0" xmlns:dr3d="urn:oasis:names:tc:opendocument:xmlns:dr3d:1.0" xmlns:svg="urn:oasis:names:tc:opendocument:xmlns:svg-compatible:1.0" xmlns:chart="urn:oasis:names:tc:opendocument:xmlns:chart:1.0" xmlns:table="urn:oasis:names:tc:opendocument:xmlns:table:1.0" xmlns:number="urn:oasis:names:tc:opendocument:xmlns:datastyle:1.0" xmlns:ooow="http://openoffice.org/2004/writer" xmlns:oooc="http://openoffice.org/2004/calc" xmlns:field="urn:openoffice:names:experimental:ooo-ms-interop:xmlns:field:1.0" xmlns:of="urn:oasis:names:tc:opendocument:xmlns:of:1.2" xmlns:tableooo="http://openoffice.org/2009/table" xmlns:calcext="urn:org:documentfoundation:names:experimental:calc:xmlns:calcext:1.0" xmlns:drawooo="http://openoffice.org/2010/draw" xmlns:xhtml="http://www.w3.org/1999/xhtml" xmlns:loext="urn:org:documentfoundation:names:experimental:office:xmlns:loext:1.0" xmlns:script="urn:oasis:names:tc:opendocument:xmlns:script:1.0" xmlns:css3t="http://www.w3.org/TR/css3-text/" xmlns:dom="http://www.w3.org/2001/xml-events" xmlns:grddl="http://www.w3.org/2003/g/data-view#" xmlns:chartooo="http://openoffice.org/2010/chart" office:version="1.4">
+<office:document-styles xmlns:office="urn:oasis:names:tc:opendocument:xmlns:office:1.0" xmlns:ooo="http://openoffice.org/2004/office" xmlns:fo="urn:oasis:names:tc:opendocument:xmlns:xsl-fo-compatible:1.0" xmlns:xlink="http://www.w3.org/1999/xlink" xmlns:style="urn:oasis:names:tc:opendocument:xmlns:style:1.0" xmlns:dc="http://purl.org/dc/elements/1.1/" xmlns:text="urn:oasis:names:tc:opendocument:xmlns:text:1.0" xmlns:rpt="http://openoffice.org/2005/report" xmlns:draw="urn:oasis:names:tc:opendocument:xmlns:drawing:1.0" xmlns:dr3d="urn:oasis:names:tc:opendocument:xmlns:dr3d:1.0" xmlns:svg="urn:oasis:names:tc:opendocument:xmlns:svg-compatible:1.0" xmlns:chart="urn:oasis:names:tc:opendocument:xmlns:chart:1.0" xmlns:table="urn:oasis:names:tc:opendocument:xmlns:table:1.0" xmlns:number="urn:oasis:names:tc:opendocument:xmlns:datastyle:1.0" xmlns:ooow="http://openoffice.org/2004/writer" xmlns:oooc="http://openoffice.org/2004/calc" xmlns:css3t="http://www.w3.org/TR/css3-text/" xmlns:of="urn:oasis:names:tc:opendocument:xmlns:of:1.2" xmlns:tableooo="http://openoffice.org/2009/table" xmlns:calcext="urn:org:documentfoundation:names:experimental:calc:xmlns:calcext:1.0" xmlns:drawooo="http://openoffice.org/2010/draw" xmlns:xhtml="http://www.w3.org/1999/xhtml" xmlns:loext="urn:org:documentfoundation:names:experimental:office:xmlns:loext:1.0" xmlns:grddl="http://www.w3.org/2003/g/data-view#" xmlns:field="urn:openoffice:names:experimental:ooo-ms-interop:xmlns:field:1.0" xmlns:script="urn:oasis:names:tc:opendocument:xmlns:script:1.0" xmlns:dom="http://www.w3.org/2001/xml-events" xmlns:chartooo="http://openoffice.org/2010/chart" office:version="1.4">
   <office:styles/>
 </office:document-styles>
 </file>
 
 <file path=Object 2/content.xml><?xml version="1.0" encoding="utf-8"?>
-<office:document-content xmlns:office="urn:oasis:names:tc:opendocument:xmlns:office:1.0" xmlns:ooo="http://openoffice.org/2004/office" xmlns:fo="urn:oasis:names:tc:opendocument:xmlns:xsl-fo-compatible:1.0" xmlns:xlink="http://www.w3.org/1999/xlink" xmlns:dc="http://purl.org/dc/elements/1.1/" xmlns:meta="urn:oasis:names:tc:opendocument:xmlns:meta:1.0" xmlns:style="urn:oasis:names:tc:opendocument:xmlns:style:1.0" xmlns:text="urn:oasis:names:tc:opendocument:xmlns:text:1.0" xmlns:rpt="http://openoffice.org/2005/report" xmlns:draw="urn:oasis:names:tc:opendocument:xmlns:drawing:1.0" xmlns:dr3d="urn:oasis:names:tc:opendocument:xmlns:dr3d:1.0" xmlns:svg="urn:oasis:names:tc:opendocument:xmlns:svg-compatible:1.0" xmlns:chart="urn:oasis:names:tc:opendocument:xmlns:chart:1.0" xmlns:table="urn:oasis:names:tc:opendocument:xmlns:table:1.0" xmlns:number="urn:oasis:names:tc:opendocument:xmlns:datastyle:1.0" xmlns:ooow="http://openoffice.org/2004/writer" xmlns:oooc="http://openoffice.org/2004/calc" xmlns:field="urn:openoffice:names:experimental:ooo-ms-interop:xmlns:field:1.0" xmlns:of="urn:oasis:names:tc:opendocument:xmlns:of:1.2" xmlns:xforms="http://www.w3.org/2002/xforms" xmlns:tableooo="http://openoffice.org/2009/table" xmlns:calcext="urn:org:documentfoundation:names:experimental:calc:xmlns:calcext:1.0" xmlns:drawooo="http://openoffice.org/2010/draw" xmlns:xhtml="http://www.w3.org/1999/xhtml" xmlns:loext="urn:org:documentfoundation:names:experimental:office:xmlns:loext:1.0" xmlns:math="http://www.w3.org/1998/Math/MathML" xmlns:form="urn:oasis:names:tc:opendocument:xmlns:form:1.0" xmlns:script="urn:oasis:names:tc:opendocument:xmlns:script:1.0" xmlns:dom="http://www.w3.org/2001/xml-events" xmlns:formx="urn:openoffice:names:experimental:ooxml-odf-interop:xmlns:form:1.0" xmlns:xsd="http://www.w3.org/2001/XMLSchema" xmlns:xsi="http://www.w3.org/2001/XMLSchema-instance" xmlns:grddl="http://www.w3.org/2003/g/data-view#" xmlns:css3t="http://www.w3.org/TR/css3-text/" xmlns:chartooo="http://openoffice.org/2010/chart" office:version="1.4">
+<office:document-content xmlns:office="urn:oasis:names:tc:opendocument:xmlns:office:1.0" xmlns:ooo="http://openoffice.org/2004/office" xmlns:fo="urn:oasis:names:tc:opendocument:xmlns:xsl-fo-compatible:1.0" xmlns:xlink="http://www.w3.org/1999/xlink" xmlns:dc="http://purl.org/dc/elements/1.1/" xmlns:meta="urn:oasis:names:tc:opendocument:xmlns:meta:1.0" xmlns:style="urn:oasis:names:tc:opendocument:xmlns:style:1.0" xmlns:text="urn:oasis:names:tc:opendocument:xmlns:text:1.0" xmlns:rpt="http://openoffice.org/2005/report" xmlns:draw="urn:oasis:names:tc:opendocument:xmlns:drawing:1.0" xmlns:dr3d="urn:oasis:names:tc:opendocument:xmlns:dr3d:1.0" xmlns:svg="urn:oasis:names:tc:opendocument:xmlns:svg-compatible:1.0" xmlns:chart="urn:oasis:names:tc:opendocument:xmlns:chart:1.0" xmlns:table="urn:oasis:names:tc:opendocument:xmlns:table:1.0" xmlns:number="urn:oasis:names:tc:opendocument:xmlns:datastyle:1.0" xmlns:ooow="http://openoffice.org/2004/writer" xmlns:oooc="http://openoffice.org/2004/calc" xmlns:of="urn:oasis:names:tc:opendocument:xmlns:of:1.2" xmlns:xforms="http://www.w3.org/2002/xforms" xmlns:tableooo="http://openoffice.org/2009/table" xmlns:calcext="urn:org:documentfoundation:names:experimental:calc:xmlns:calcext:1.0" xmlns:drawooo="http://openoffice.org/2010/draw" xmlns:xhtml="http://www.w3.org/1999/xhtml" xmlns:loext="urn:org:documentfoundation:names:experimental:office:xmlns:loext:1.0" xmlns:field="urn:openoffice:names:experimental:ooo-ms-interop:xmlns:field:1.0" xmlns:math="http://www.w3.org/1998/Math/MathML" xmlns:form="urn:oasis:names:tc:opendocument:xmlns:form:1.0" xmlns:script="urn:oasis:names:tc:opendocument:xmlns:script:1.0" xmlns:formx="urn:openoffice:names:experimental:ooxml-odf-interop:xmlns:form:1.0" xmlns:dom="http://www.w3.org/2001/xml-events" xmlns:xsd="http://www.w3.org/2001/XMLSchema" xmlns:xsi="http://www.w3.org/2001/XMLSchema-instance" xmlns:grddl="http://www.w3.org/2003/g/data-view#" xmlns:css3t="http://www.w3.org/TR/css3-text/" xmlns:chartooo="http://openoffice.org/2010/chart" office:version="1.4">
   <office:automatic-styles>
     <number:number-style style:name="N0">
       <number:number number:min-integer-digits="1"/>
     </number:number-style>
-    <number:number-style style:name="N119">
+    <number:number-style style:name="N129">
       <number:number number:decimal-places="1" number:min-decimal-places="1" number:min-integer-digits="1"/>
       <number:text>%</number:text>
     </number:number-style>
@@ -925,7 +914,7 @@
       <style:text-properties fo:font-size="13pt" style:font-size-asian="13pt" style:font-size-complex="13pt"/>
     </style:style>
     <style:style style:name="ch3" style:family="chart">
-      <style:chart-properties chart:include-hidden-cells="false" chart:auto-position="true" chart:auto-size="true" chart:treat-empty-cells="ignore" loext:frequency-type="0" loext:bin-width="0" loext:bin-count="0" chart:data-label-number="value" chart:data-label-text="false" chart:data-label-symbol="false" chart:data-label-series="false"/>
+      <style:chart-properties chart:include-hidden-cells="false" chart:auto-position="true" chart:auto-size="true" chart:treat-empty-cells="ignore" chart:data-label-number="value" chart:data-label-text="false" chart:data-label-symbol="false" chart:data-label-series="false"/>
     </style:style>
     <style:style style:name="ch4" style:family="chart" style:data-style-name="N0">
       <style:chart-properties chart:display-label="true" chart:logarithmic="false" chart:reverse-direction="false" text:line-break="true" loext:try-staggering-first="false" chart:label-arrangement="side-by-side" chart:link-data-style-to-source="false" chart:axis-position="0" chart:axis-label-position="outside-start" chart:tick-mark-position="at-axis"/>
@@ -937,7 +926,7 @@
       <style:graphic-properties draw:stroke="none" svg:stroke-width="0.035cm" svg:stroke-color="#b3b3b3"/>
       <style:text-properties fo:color="#5a6b72" style:text-position="0% 100%" fo:font-family="'Times New Roman'" fo:font-size="9pt" style:font-size-asian="9pt" style:font-size-complex="9pt"/>
     </style:style>
-    <style:style style:name="ch6" style:family="chart" style:data-style-name="N119">
+    <style:style style:name="ch6" style:family="chart" style:data-style-name="N129">
       <style:chart-properties chart:link-data-style-to-source="false" chart:data-label-number="value" chart:data-label-text="false" chart:data-label-symbol="false" chart:data-label-series="false" chart:label-position="outside" loext:custom-leader-lines="false">
         <chart:label-separator>
           <text:p>; </text:p>
@@ -948,38 +937,30 @@
     </style:style>
     <style:style style:name="ch7" style:family="chart">
       <style:chart-properties chart:solid-type="cuboid"/>
-      <style:graphic-properties/>
-      <style:text-properties/>
     </style:style>
     <style:style style:name="ch8" style:family="chart">
       <style:chart-properties chart:solid-type="cuboid"/>
       <style:graphic-properties draw:fill-color="#f9d2b2"/>
-      <style:text-properties/>
     </style:style>
     <style:style style:name="ch9" style:family="chart">
       <style:chart-properties chart:solid-type="cuboid"/>
       <style:graphic-properties draw:fill-color="#f8d9c0"/>
-      <style:text-properties/>
     </style:style>
     <style:style style:name="ch10" style:family="chart">
       <style:chart-properties chart:solid-type="cuboid"/>
       <style:graphic-properties draw:fill-color="#f6c8a3"/>
-      <style:text-properties/>
     </style:style>
     <style:style style:name="ch11" style:family="chart">
       <style:chart-properties chart:solid-type="cuboid"/>
       <style:graphic-properties draw:fill-color="#f4b887"/>
-      <style:text-properties/>
     </style:style>
     <style:style style:name="ch12" style:family="chart">
       <style:chart-properties chart:solid-type="cuboid"/>
       <style:graphic-properties draw:fill-color="#f3ae76"/>
-      <style:text-properties/>
     </style:style>
     <style:style style:name="ch13" style:family="chart">
       <style:chart-properties chart:solid-type="cuboid"/>
       <style:graphic-properties draw:fill-color="#e08a45"/>
-      <style:text-properties/>
     </style:style>
     <style:style style:name="ch14" style:family="chart">
       <style:graphic-properties draw:fill="none" draw:fill-color="#d9d9d9"/>
@@ -994,13 +975,13 @@
   <office:body>
     <office:chart>
       <chart:chart svg:width="11.428cm" svg:height="6.475cm" xlink:href="." xlink:type="simple" chart:class="chart:bar" chart:style-name="ch1">
-        <chart:title svg:x="2.357cm" svg:y="0.265cm" chart:style-name="ch2">
+        <chart:title svg:x="2.234cm" svg:y="0.265cm" chart:style-name="ch2">
           <text:p>
             <text:span text:style-name="T1">% underweight (BMI &lt; 18.5) by age</text:span>
           </text:p>
         </chart:title>
-        <chart:plot-area chart:style-name="ch3" svg:x="0.228cm" svg:y="1.151cm" svg:width="10.972cm" svg:height="5.195cm">
-          <chart:coordinate-region svg:x="0.228cm" svg:y="1.151cm" svg:width="10.972cm" svg:height="4.627cm"/>
+        <chart:plot-area chart:style-name="ch3" svg:x="0.228cm" svg:y="1.199cm" svg:width="10.972cm" svg:height="5.147cm">
+          <chart:coordinate-region svg:x="0.228cm" svg:y="1.199cm" svg:width="10.972cm" svg:height="4.579cm"/>
           <chart:axis chart:dimension="x" chart:name="primary-x" chart:style-name="ch4" chartooo:axis-type="auto">
             <chartooo:date-scale/>
             <chart:categories table:cell-range-address="local-table.$A$2:.$A$9"/>
@@ -1111,24 +1092,24 @@
 <file path=Object 2/meta.xml><?xml version="1.0" encoding="utf-8"?>
 <office:document-meta xmlns:office="urn:oasis:names:tc:opendocument:xmlns:office:1.0" xmlns:ooo="http://openoffice.org/2004/office" xmlns:xlink="http://www.w3.org/1999/xlink" xmlns:dc="http://purl.org/dc/elements/1.1/" xmlns:meta="urn:oasis:names:tc:opendocument:xmlns:meta:1.0" xmlns:grddl="http://www.w3.org/2003/g/data-view#" xmlns:chartooo="http://openoffice.org/2010/chart" office:version="1.4">
   <office:meta>
-    <meta:generator>LibreOffice/26.8.0.3$Windows_X86_64 LibreOffice_project/bce0998afefdbc355585ca324285661a2170ba77</meta:generator>
+    <meta:generator>LibreOffice/26.2.0.3$Windows_X86_64 LibreOffice_project/620$Build-3</meta:generator>
   </office:meta>
 </office:document-meta>
 </file>
 
 <file path=Object 2/styles.xml><?xml version="1.0" encoding="utf-8"?>
-<office:document-styles xmlns:office="urn:oasis:names:tc:opendocument:xmlns:office:1.0" xmlns:ooo="http://openoffice.org/2004/office" xmlns:fo="urn:oasis:names:tc:opendocument:xmlns:xsl-fo-compatible:1.0" xmlns:xlink="http://www.w3.org/1999/xlink" xmlns:style="urn:oasis:names:tc:opendocument:xmlns:style:1.0" xmlns:dc="http://purl.org/dc/elements/1.1/" xmlns:text="urn:oasis:names:tc:opendocument:xmlns:text:1.0" xmlns:rpt="http://openoffice.org/2005/report" xmlns:draw="urn:oasis:names:tc:opendocument:xmlns:drawing:1.0" xmlns:dr3d="urn:oasis:names:tc:opendocument:xmlns:dr3d:1.0" xmlns:svg="urn:oasis:names:tc:opendocument:xmlns:svg-compatible:1.0" xmlns:chart="urn:oasis:names:tc:opendocument:xmlns:chart:1.0" xmlns:table="urn:oasis:names:tc:opendocument:xmlns:table:1.0" xmlns:number="urn:oasis:names:tc:opendocument:xmlns:datastyle:1.0" xmlns:ooow="http://openoffice.org/2004/writer" xmlns:oooc="http://openoffice.org/2004/calc" xmlns:field="urn:openoffice:names:experimental:ooo-ms-interop:xmlns:field:1.0" xmlns:of="urn:oasis:names:tc:opendocument:xmlns:of:1.2" xmlns:tableooo="http://openoffice.org/2009/table" xmlns:calcext="urn:org:documentfoundation:names:experimental:calc:xmlns:calcext:1.0" xmlns:drawooo="http://openoffice.org/2010/draw" xmlns:xhtml="http://www.w3.org/1999/xhtml" xmlns:loext="urn:org:documentfoundation:names:experimental:office:xmlns:loext:1.0" xmlns:script="urn:oasis:names:tc:opendocument:xmlns:script:1.0" xmlns:css3t="http://www.w3.org/TR/css3-text/" xmlns:dom="http://www.w3.org/2001/xml-events" xmlns:grddl="http://www.w3.org/2003/g/data-view#" xmlns:chartooo="http://openoffice.org/2010/chart" office:version="1.4">
+<office:document-styles xmlns:office="urn:oasis:names:tc:opendocument:xmlns:office:1.0" xmlns:ooo="http://openoffice.org/2004/office" xmlns:fo="urn:oasis:names:tc:opendocument:xmlns:xsl-fo-compatible:1.0" xmlns:xlink="http://www.w3.org/1999/xlink" xmlns:style="urn:oasis:names:tc:opendocument:xmlns:style:1.0" xmlns:dc="http://purl.org/dc/elements/1.1/" xmlns:text="urn:oasis:names:tc:opendocument:xmlns:text:1.0" xmlns:rpt="http://openoffice.org/2005/report" xmlns:draw="urn:oasis:names:tc:opendocument:xmlns:drawing:1.0" xmlns:dr3d="urn:oasis:names:tc:opendocument:xmlns:dr3d:1.0" xmlns:svg="urn:oasis:names:tc:opendocument:xmlns:svg-compatible:1.0" xmlns:chart="urn:oasis:names:tc:opendocument:xmlns:chart:1.0" xmlns:table="urn:oasis:names:tc:opendocument:xmlns:table:1.0" xmlns:number="urn:oasis:names:tc:opendocument:xmlns:datastyle:1.0" xmlns:ooow="http://openoffice.org/2004/writer" xmlns:oooc="http://openoffice.org/2004/calc" xmlns:css3t="http://www.w3.org/TR/css3-text/" xmlns:of="urn:oasis:names:tc:opendocument:xmlns:of:1.2" xmlns:tableooo="http://openoffice.org/2009/table" xmlns:calcext="urn:org:documentfoundation:names:experimental:calc:xmlns:calcext:1.0" xmlns:drawooo="http://openoffice.org/2010/draw" xmlns:xhtml="http://www.w3.org/1999/xhtml" xmlns:loext="urn:org:documentfoundation:names:experimental:office:xmlns:loext:1.0" xmlns:grddl="http://www.w3.org/2003/g/data-view#" xmlns:field="urn:openoffice:names:experimental:ooo-ms-interop:xmlns:field:1.0" xmlns:script="urn:oasis:names:tc:opendocument:xmlns:script:1.0" xmlns:dom="http://www.w3.org/2001/xml-events" xmlns:chartooo="http://openoffice.org/2010/chart" office:version="1.4">
   <office:styles/>
 </office:document-styles>
 </file>
 
 <file path=Object 3/content.xml><?xml version="1.0" encoding="utf-8"?>
-<office:document-content xmlns:office="urn:oasis:names:tc:opendocument:xmlns:office:1.0" xmlns:ooo="http://openoffice.org/2004/office" xmlns:fo="urn:oasis:names:tc:opendocument:xmlns:xsl-fo-compatible:1.0" xmlns:xlink="http://www.w3.org/1999/xlink" xmlns:dc="http://purl.org/dc/elements/1.1/" xmlns:meta="urn:oasis:names:tc:opendocument:xmlns:meta:1.0" xmlns:style="urn:oasis:names:tc:opendocument:xmlns:style:1.0" xmlns:text="urn:oasis:names:tc:opendocument:xmlns:text:1.0" xmlns:rpt="http://openoffice.org/2005/report" xmlns:draw="urn:oasis:names:tc:opendocument:xmlns:drawing:1.0" xmlns:dr3d="urn:oasis:names:tc:opendocument:xmlns:dr3d:1.0" xmlns:svg="urn:oasis:names:tc:opendocument:xmlns:svg-compatible:1.0" xmlns:chart="urn:oasis:names:tc:opendocument:xmlns:chart:1.0" xmlns:table="urn:oasis:names:tc:opendocument:xmlns:table:1.0" xmlns:number="urn:oasis:names:tc:opendocument:xmlns:datastyle:1.0" xmlns:ooow="http://openoffice.org/2004/writer" xmlns:oooc="http://openoffice.org/2004/calc" xmlns:field="urn:openoffice:names:experimental:ooo-ms-interop:xmlns:field:1.0" xmlns:of="urn:oasis:names:tc:opendocument:xmlns:of:1.2" xmlns:xforms="http://www.w3.org/2002/xforms" xmlns:tableooo="http://openoffice.org/2009/table" xmlns:calcext="urn:org:documentfoundation:names:experimental:calc:xmlns:calcext:1.0" xmlns:drawooo="http://openoffice.org/2010/draw" xmlns:xhtml="http://www.w3.org/1999/xhtml" xmlns:loext="urn:org:documentfoundation:names:experimental:office:xmlns:loext:1.0" xmlns:math="http://www.w3.org/1998/Math/MathML" xmlns:form="urn:oasis:names:tc:opendocument:xmlns:form:1.0" xmlns:script="urn:oasis:names:tc:opendocument:xmlns:script:1.0" xmlns:dom="http://www.w3.org/2001/xml-events" xmlns:formx="urn:openoffice:names:experimental:ooxml-odf-interop:xmlns:form:1.0" xmlns:xsd="http://www.w3.org/2001/XMLSchema" xmlns:xsi="http://www.w3.org/2001/XMLSchema-instance" xmlns:grddl="http://www.w3.org/2003/g/data-view#" xmlns:css3t="http://www.w3.org/TR/css3-text/" xmlns:chartooo="http://openoffice.org/2010/chart" office:version="1.4">
+<office:document-content xmlns:office="urn:oasis:names:tc:opendocument:xmlns:office:1.0" xmlns:ooo="http://openoffice.org/2004/office" xmlns:fo="urn:oasis:names:tc:opendocument:xmlns:xsl-fo-compatible:1.0" xmlns:xlink="http://www.w3.org/1999/xlink" xmlns:dc="http://purl.org/dc/elements/1.1/" xmlns:meta="urn:oasis:names:tc:opendocument:xmlns:meta:1.0" xmlns:style="urn:oasis:names:tc:opendocument:xmlns:style:1.0" xmlns:text="urn:oasis:names:tc:opendocument:xmlns:text:1.0" xmlns:rpt="http://openoffice.org/2005/report" xmlns:draw="urn:oasis:names:tc:opendocument:xmlns:drawing:1.0" xmlns:dr3d="urn:oasis:names:tc:opendocument:xmlns:dr3d:1.0" xmlns:svg="urn:oasis:names:tc:opendocument:xmlns:svg-compatible:1.0" xmlns:chart="urn:oasis:names:tc:opendocument:xmlns:chart:1.0" xmlns:table="urn:oasis:names:tc:opendocument:xmlns:table:1.0" xmlns:number="urn:oasis:names:tc:opendocument:xmlns:datastyle:1.0" xmlns:ooow="http://openoffice.org/2004/writer" xmlns:oooc="http://openoffice.org/2004/calc" xmlns:of="urn:oasis:names:tc:opendocument:xmlns:of:1.2" xmlns:xforms="http://www.w3.org/2002/xforms" xmlns:tableooo="http://openoffice.org/2009/table" xmlns:calcext="urn:org:documentfoundation:names:experimental:calc:xmlns:calcext:1.0" xmlns:drawooo="http://openoffice.org/2010/draw" xmlns:xhtml="http://www.w3.org/1999/xhtml" xmlns:loext="urn:org:documentfoundation:names:experimental:office:xmlns:loext:1.0" xmlns:field="urn:openoffice:names:experimental:ooo-ms-interop:xmlns:field:1.0" xmlns:math="http://www.w3.org/1998/Math/MathML" xmlns:form="urn:oasis:names:tc:opendocument:xmlns:form:1.0" xmlns:script="urn:oasis:names:tc:opendocument:xmlns:script:1.0" xmlns:formx="urn:openoffice:names:experimental:ooxml-odf-interop:xmlns:form:1.0" xmlns:dom="http://www.w3.org/2001/xml-events" xmlns:xsd="http://www.w3.org/2001/XMLSchema" xmlns:xsi="http://www.w3.org/2001/XMLSchema-instance" xmlns:grddl="http://www.w3.org/2003/g/data-view#" xmlns:css3t="http://www.w3.org/TR/css3-text/" xmlns:chartooo="http://openoffice.org/2010/chart" office:version="1.4">
   <office:automatic-styles>
     <number:number-style style:name="N0">
       <number:number number:min-integer-digits="1"/>
     </number:number-style>
-    <number:number-style style:name="N119">
+    <number:number-style style:name="N129">
       <number:number number:decimal-places="1" number:min-decimal-places="1" number:min-integer-digits="1"/>
       <number:text>%</number:text>
     </number:number-style>
@@ -1145,7 +1126,7 @@
       <style:text-properties fo:color="#1b2a30" style:text-position="0% 100%" fo:font-family="'Times New Roman'" fo:font-size="9pt" style:font-size-asian="9pt" style:font-size-complex="9pt"/>
     </style:style>
     <style:style style:name="ch4" style:family="chart">
-      <style:chart-properties chart:symbol-type="automatic" chart:include-hidden-cells="false" chart:auto-position="true" chart:auto-size="true" chart:treat-empty-cells="ignore" loext:frequency-type="0" loext:bin-width="0" loext:bin-count="0" chart:data-label-number="value" chart:data-label-text="false" chart:data-label-symbol="false" chart:data-label-series="false"/>
+      <style:chart-properties chart:symbol-type="automatic" chart:include-hidden-cells="false" chart:auto-position="true" chart:auto-size="true" chart:treat-empty-cells="ignore" chart:data-label-number="value" chart:data-label-text="false" chart:data-label-symbol="false" chart:data-label-series="false"/>
     </style:style>
     <style:style style:name="ch5" style:family="chart" style:data-style-name="N0">
       <style:chart-properties chart:display-label="true" chart:logarithmic="false" chart:reverse-direction="false" text:line-break="true" loext:try-staggering-first="false" chart:label-arrangement="side-by-side" chart:link-data-style-to-source="false" loext:major-origin="0.5" chart:axis-position="0" chart:axis-label-position="outside-start" chart:tick-mark-position="at-axis"/>
@@ -1157,7 +1138,7 @@
       <style:graphic-properties draw:stroke="none" svg:stroke-width="0.035cm" svg:stroke-color="#b3b3b3"/>
       <style:text-properties fo:color="#5a6b72" style:text-position="0% 100%" fo:font-family="'Times New Roman'" fo:font-size="9pt" style:font-size-asian="9pt" style:font-size-complex="9pt"/>
     </style:style>
-    <style:style style:name="ch7" style:family="chart" style:data-style-name="N119">
+    <style:style style:name="ch7" style:family="chart" style:data-style-name="N129">
       <style:chart-properties chart:symbol-type="named-symbol" chart:symbol-name="circle" chart:symbol-width="0.282cm" chart:symbol-height="0.282cm" chart:link-data-style-to-source="false" chart:data-label-number="value" chart:data-label-text="false" chart:data-label-symbol="false" chart:data-label-series="false" chart:label-position="top" loext:custom-leader-lines="false">
         <chart:label-separator>
           <text:p>; </text:p>
@@ -1166,7 +1147,7 @@
       <style:graphic-properties svg:stroke-width="0.106cm" svg:stroke-color="#5fa8d3" draw:fill-color="#5fa8d3" fo:wrap-option="wrap"/>
       <style:text-properties fo:color="#1b2a30" style:text-position="0% 100%" fo:font-family="'Times New Roman'" fo:font-size="10pt" style:font-size-asian="10pt" style:font-size-complex="10pt"/>
     </style:style>
-    <style:style style:name="ch8" style:family="chart" style:data-style-name="N119">
+    <style:style style:name="ch8" style:family="chart" style:data-style-name="N129">
       <style:chart-properties chart:symbol-type="named-symbol" chart:symbol-name="circle" chart:symbol-width="0.282cm" chart:symbol-height="0.282cm" chart:link-data-style-to-source="false" chart:data-label-number="value" chart:data-label-text="false" chart:data-label-symbol="false" chart:data-label-series="false" chart:label-position="bottom" loext:custom-leader-lines="false">
         <chart:label-separator>
           <text:p>; </text:p>
@@ -1188,14 +1169,14 @@
   <office:body>
     <office:chart>
       <chart:chart svg:width="11.682cm" svg:height="6.475cm" xlink:href="." xlink:type="simple" chart:class="chart:line" chart:style-name="ch1">
-        <chart:title svg:x="2.036cm" svg:y="0.265cm" chart:style-name="ch2">
+        <chart:title svg:x="1.897cm" svg:y="0.265cm" chart:style-name="ch2">
           <text:p>
             <text:span text:style-name="T1">Readmission and mortality over time (%)</text:span>
           </text:p>
         </chart:title>
-        <chart:legend chart:legend-position="top" svg:x="3.531cm" svg:y="1.207cm" style:legend-expansion="wide" chart:style-name="ch3"/>
-        <chart:plot-area chart:style-name="ch4" svg:x="0.233cm" svg:y="1.907cm" svg:width="11.216cm" svg:height="4.439cm">
-          <chart:coordinate-region svg:x="0.233cm" svg:y="1.907cm" svg:width="11.216cm" svg:height="3.792cm"/>
+        <chart:legend chart:legend-position="top" svg:x="3.531cm" svg:y="1.255cm" style:legend-expansion="wide" chart:style-name="ch3"/>
+        <chart:plot-area chart:style-name="ch4" svg:x="0.233cm" svg:y="1.924cm" svg:width="11.216cm" svg:height="4.422cm">
+          <chart:coordinate-region svg:x="0.233cm" svg:y="1.924cm" svg:width="11.216cm" svg:height="3.769cm"/>
           <chart:axis chart:dimension="x" chart:name="primary-x" chart:style-name="ch5" chartooo:axis-type="auto">
             <chartooo:date-scale/>
             <chart:categories table:cell-range-address="local-table.$A$2:.$A$4"/>
@@ -1275,24 +1256,24 @@
 <file path=Object 3/meta.xml><?xml version="1.0" encoding="utf-8"?>
 <office:document-meta xmlns:office="urn:oasis:names:tc:opendocument:xmlns:office:1.0" xmlns:ooo="http://openoffice.org/2004/office" xmlns:xlink="http://www.w3.org/1999/xlink" xmlns:dc="http://purl.org/dc/elements/1.1/" xmlns:meta="urn:oasis:names:tc:opendocument:xmlns:meta:1.0" xmlns:grddl="http://www.w3.org/2003/g/data-view#" xmlns:chartooo="http://openoffice.org/2010/chart" office:version="1.4">
   <office:meta>
-    <meta:generator>LibreOffice/26.8.0.3$Windows_X86_64 LibreOffice_project/bce0998afefdbc355585ca324285661a2170ba77</meta:generator>
+    <meta:generator>LibreOffice/26.2.0.3$Windows_X86_64 LibreOffice_project/620$Build-3</meta:generator>
   </office:meta>
 </office:document-meta>
 </file>
 
 <file path=Object 3/styles.xml><?xml version="1.0" encoding="utf-8"?>
-<office:document-styles xmlns:office="urn:oasis:names:tc:opendocument:xmlns:office:1.0" xmlns:ooo="http://openoffice.org/2004/office" xmlns:fo="urn:oasis:names:tc:opendocument:xmlns:xsl-fo-compatible:1.0" xmlns:xlink="http://www.w3.org/1999/xlink" xmlns:style="urn:oasis:names:tc:opendocument:xmlns:style:1.0" xmlns:dc="http://purl.org/dc/elements/1.1/" xmlns:text="urn:oasis:names:tc:opendocument:xmlns:text:1.0" xmlns:rpt="http://openoffice.org/2005/report" xmlns:draw="urn:oasis:names:tc:opendocument:xmlns:drawing:1.0" xmlns:dr3d="urn:oasis:names:tc:opendocument:xmlns:dr3d:1.0" xmlns:svg="urn:oasis:names:tc:opendocument:xmlns:svg-compatible:1.0" xmlns:chart="urn:oasis:names:tc:opendocument:xmlns:chart:1.0" xmlns:table="urn:oasis:names:tc:opendocument:xmlns:table:1.0" xmlns:number="urn:oasis:names:tc:opendocument:xmlns:datastyle:1.0" xmlns:ooow="http://openoffice.org/2004/writer" xmlns:oooc="http://openoffice.org/2004/calc" xmlns:field="urn:openoffice:names:experimental:ooo-ms-interop:xmlns:field:1.0" xmlns:of="urn:oasis:names:tc:opendocument:xmlns:of:1.2" xmlns:tableooo="http://openoffice.org/2009/table" xmlns:calcext="urn:org:documentfoundation:names:experimental:calc:xmlns:calcext:1.0" xmlns:drawooo="http://openoffice.org/2010/draw" xmlns:xhtml="http://www.w3.org/1999/xhtml" xmlns:loext="urn:org:documentfoundation:names:experimental:office:xmlns:loext:1.0" xmlns:script="urn:oasis:names:tc:opendocument:xmlns:script:1.0" xmlns:css3t="http://www.w3.org/TR/css3-text/" xmlns:dom="http://www.w3.org/2001/xml-events" xmlns:grddl="http://www.w3.org/2003/g/data-view#" xmlns:chartooo="http://openoffice.org/2010/chart" office:version="1.4">
+<office:document-styles xmlns:office="urn:oasis:names:tc:opendocument:xmlns:office:1.0" xmlns:ooo="http://openoffice.org/2004/office" xmlns:fo="urn:oasis:names:tc:opendocument:xmlns:xsl-fo-compatible:1.0" xmlns:xlink="http://www.w3.org/1999/xlink" xmlns:style="urn:oasis:names:tc:opendocument:xmlns:style:1.0" xmlns:dc="http://purl.org/dc/elements/1.1/" xmlns:text="urn:oasis:names:tc:opendocument:xmlns:text:1.0" xmlns:rpt="http://openoffice.org/2005/report" xmlns:draw="urn:oasis:names:tc:opendocument:xmlns:drawing:1.0" xmlns:dr3d="urn:oasis:names:tc:opendocument:xmlns:dr3d:1.0" xmlns:svg="urn:oasis:names:tc:opendocument:xmlns:svg-compatible:1.0" xmlns:chart="urn:oasis:names:tc:opendocument:xmlns:chart:1.0" xmlns:table="urn:oasis:names:tc:opendocument:xmlns:table:1.0" xmlns:number="urn:oasis:names:tc:opendocument:xmlns:datastyle:1.0" xmlns:ooow="http://openoffice.org/2004/writer" xmlns:oooc="http://openoffice.org/2004/calc" xmlns:css3t="http://www.w3.org/TR/css3-text/" xmlns:of="urn:oasis:names:tc:opendocument:xmlns:of:1.2" xmlns:tableooo="http://openoffice.org/2009/table" xmlns:calcext="urn:org:documentfoundation:names:experimental:calc:xmlns:calcext:1.0" xmlns:drawooo="http://openoffice.org/2010/draw" xmlns:xhtml="http://www.w3.org/1999/xhtml" xmlns:loext="urn:org:documentfoundation:names:experimental:office:xmlns:loext:1.0" xmlns:grddl="http://www.w3.org/2003/g/data-view#" xmlns:field="urn:openoffice:names:experimental:ooo-ms-interop:xmlns:field:1.0" xmlns:script="urn:oasis:names:tc:opendocument:xmlns:script:1.0" xmlns:dom="http://www.w3.org/2001/xml-events" xmlns:chartooo="http://openoffice.org/2010/chart" office:version="1.4">
   <office:styles/>
 </office:document-styles>
 </file>
 
 <file path=Object 4/content.xml><?xml version="1.0" encoding="utf-8"?>
-<office:document-content xmlns:office="urn:oasis:names:tc:opendocument:xmlns:office:1.0" xmlns:ooo="http://openoffice.org/2004/office" xmlns:fo="urn:oasis:names:tc:opendocument:xmlns:xsl-fo-compatible:1.0" xmlns:xlink="http://www.w3.org/1999/xlink" xmlns:dc="http://purl.org/dc/elements/1.1/" xmlns:meta="urn:oasis:names:tc:opendocument:xmlns:meta:1.0" xmlns:style="urn:oasis:names:tc:opendocument:xmlns:style:1.0" xmlns:text="urn:oasis:names:tc:opendocument:xmlns:text:1.0" xmlns:rpt="http://openoffice.org/2005/report" xmlns:draw="urn:oasis:names:tc:opendocument:xmlns:drawing:1.0" xmlns:dr3d="urn:oasis:names:tc:opendocument:xmlns:dr3d:1.0" xmlns:svg="urn:oasis:names:tc:opendocument:xmlns:svg-compatible:1.0" xmlns:chart="urn:oasis:names:tc:opendocument:xmlns:chart:1.0" xmlns:table="urn:oasis:names:tc:opendocument:xmlns:table:1.0" xmlns:number="urn:oasis:names:tc:opendocument:xmlns:datastyle:1.0" xmlns:ooow="http://openoffice.org/2004/writer" xmlns:oooc="http://openoffice.org/2004/calc" xmlns:field="urn:openoffice:names:experimental:ooo-ms-interop:xmlns:field:1.0" xmlns:of="urn:oasis:names:tc:opendocument:xmlns:of:1.2" xmlns:xforms="http://www.w3.org/2002/xforms" xmlns:tableooo="http://openoffice.org/2009/table" xmlns:calcext="urn:org:documentfoundation:names:experimental:calc:xmlns:calcext:1.0" xmlns:drawooo="http://openoffice.org/2010/draw" xmlns:xhtml="http://www.w3.org/1999/xhtml" xmlns:loext="urn:org:documentfoundation:names:experimental:office:xmlns:loext:1.0" xmlns:math="http://www.w3.org/1998/Math/MathML" xmlns:form="urn:oasis:names:tc:opendocument:xmlns:form:1.0" xmlns:script="urn:oasis:names:tc:opendocument:xmlns:script:1.0" xmlns:dom="http://www.w3.org/2001/xml-events" xmlns:formx="urn:openoffice:names:experimental:ooxml-odf-interop:xmlns:form:1.0" xmlns:xsd="http://www.w3.org/2001/XMLSchema" xmlns:xsi="http://www.w3.org/2001/XMLSchema-instance" xmlns:grddl="http://www.w3.org/2003/g/data-view#" xmlns:css3t="http://www.w3.org/TR/css3-text/" xmlns:chartooo="http://openoffice.org/2010/chart" office:version="1.4">
+<office:document-content xmlns:office="urn:oasis:names:tc:opendocument:xmlns:office:1.0" xmlns:ooo="http://openoffice.org/2004/office" xmlns:fo="urn:oasis:names:tc:opendocument:xmlns:xsl-fo-compatible:1.0" xmlns:xlink="http://www.w3.org/1999/xlink" xmlns:dc="http://purl.org/dc/elements/1.1/" xmlns:meta="urn:oasis:names:tc:opendocument:xmlns:meta:1.0" xmlns:style="urn:oasis:names:tc:opendocument:xmlns:style:1.0" xmlns:text="urn:oasis:names:tc:opendocument:xmlns:text:1.0" xmlns:rpt="http://openoffice.org/2005/report" xmlns:draw="urn:oasis:names:tc:opendocument:xmlns:drawing:1.0" xmlns:dr3d="urn:oasis:names:tc:opendocument:xmlns:dr3d:1.0" xmlns:svg="urn:oasis:names:tc:opendocument:xmlns:svg-compatible:1.0" xmlns:chart="urn:oasis:names:tc:opendocument:xmlns:chart:1.0" xmlns:table="urn:oasis:names:tc:opendocument:xmlns:table:1.0" xmlns:number="urn:oasis:names:tc:opendocument:xmlns:datastyle:1.0" xmlns:ooow="http://openoffice.org/2004/writer" xmlns:oooc="http://openoffice.org/2004/calc" xmlns:of="urn:oasis:names:tc:opendocument:xmlns:of:1.2" xmlns:xforms="http://www.w3.org/2002/xforms" xmlns:tableooo="http://openoffice.org/2009/table" xmlns:calcext="urn:org:documentfoundation:names:experimental:calc:xmlns:calcext:1.0" xmlns:drawooo="http://openoffice.org/2010/draw" xmlns:xhtml="http://www.w3.org/1999/xhtml" xmlns:loext="urn:org:documentfoundation:names:experimental:office:xmlns:loext:1.0" xmlns:field="urn:openoffice:names:experimental:ooo-ms-interop:xmlns:field:1.0" xmlns:math="http://www.w3.org/1998/Math/MathML" xmlns:form="urn:oasis:names:tc:opendocument:xmlns:form:1.0" xmlns:script="urn:oasis:names:tc:opendocument:xmlns:script:1.0" xmlns:formx="urn:openoffice:names:experimental:ooxml-odf-interop:xmlns:form:1.0" xmlns:dom="http://www.w3.org/2001/xml-events" xmlns:xsd="http://www.w3.org/2001/XMLSchema" xmlns:xsi="http://www.w3.org/2001/XMLSchema-instance" xmlns:grddl="http://www.w3.org/2003/g/data-view#" xmlns:css3t="http://www.w3.org/TR/css3-text/" xmlns:chartooo="http://openoffice.org/2010/chart" office:version="1.4">
   <office:automatic-styles>
     <number:number-style style:name="N0">
       <number:number number:min-integer-digits="1"/>
     </number:number-style>
-    <number:number-style style:name="N119">
+    <number:number-style style:name="N129">
       <number:number number:decimal-places="0" number:min-decimal-places="0" number:min-integer-digits="1"/>
       <number:text>%</number:text>
     </number:number-style>
@@ -1309,14 +1290,14 @@
       <style:text-properties fo:color="#1b2a30" style:text-position="0% 100%" fo:font-family="'Times New Roman'" fo:font-size="8.5pt" style:font-size-asian="8.5pt" style:font-size-complex="8.5pt"/>
     </style:style>
     <style:style style:name="ch4" style:family="chart">
-      <style:chart-properties chart:include-hidden-cells="false" chart:auto-position="true" chart:auto-size="true" chart:treat-empty-cells="ignore" loext:frequency-type="0" loext:bin-width="0" loext:bin-count="0"/>
+      <style:chart-properties chart:include-hidden-cells="false" chart:auto-position="true" chart:auto-size="true" chart:treat-empty-cells="ignore"/>
     </style:style>
     <style:style style:name="ch5" style:family="chart" style:data-style-name="N0">
       <style:chart-properties chart:display-label="true" chart:logarithmic="false" chart:reverse-direction="false" text:line-break="true" loext:try-staggering-first="false" chart:label-arrangement="side-by-side" chart:link-data-style-to-source="false" loext:major-origin="0.5" chart:axis-position="0" chart:axis-label-position="outside-start" chart:tick-mark-position="at-axis"/>
       <style:graphic-properties svg:stroke-width="0.035cm" svg:stroke-color="#b5c4c9"/>
       <style:text-properties fo:color="#5a6b72" style:text-position="0% 100%" fo:font-family="'Times New Roman'" fo:font-size="9pt" style:font-size-asian="9pt" style:font-size-complex="9pt"/>
     </style:style>
-    <style:style style:name="ch6" style:family="chart" style:data-style-name="N119">
+    <style:style style:name="ch6" style:family="chart" style:data-style-name="N129">
       <style:chart-properties chart:display-label="true" chart:logarithmic="false" chart:minimum="0" chart:maximum="100" chart:interval-major="25" chart:interval-minor-divisor="5" chart:reverse-direction="false" text:line-break="false" loext:try-staggering-first="false" chart:link-data-style-to-source="false" chart:axis-position="0" chart:tick-mark-position="at-axis"/>
       <style:graphic-properties draw:stroke="none" svg:stroke-width="0.035cm" svg:stroke-color="#b3b3b3"/>
       <style:text-properties fo:color="#5a6b72" style:text-position="0% 100%" fo:font-family="'Times New Roman'" fo:font-size="9pt" style:font-size-asian="9pt" style:font-size-complex="9pt"/>
@@ -1370,14 +1351,14 @@
   <office:body>
     <office:chart>
       <chart:chart svg:width="11.428cm" svg:height="6.475cm" xlink:href="." xlink:type="simple" chart:class="chart:line" chart:style-name="ch1">
-        <chart:title svg:x="1.822cm" svg:y="0.265cm" chart:style-name="ch2">
+        <chart:title svg:x="1.68cm" svg:y="0.265cm" chart:style-name="ch2">
           <text:p>
             <text:span text:style-name="T1">Early mortality by consciousness (% died)</text:span>
           </text:p>
         </chart:title>
-        <chart:legend chart:legend-position="top" svg:x="1.028cm" svg:y="1.207cm" style:legend-expansion="wide" chart:style-name="ch3"/>
-        <chart:plot-area chart:style-name="ch4" svg:x="0.228cm" svg:y="1.855cm" svg:width="10.972cm" svg:height="4.491cm">
-          <chart:coordinate-region svg:x="1.22cm" svg:y="2.041cm" svg:width="9.98cm" svg:height="2.334cm"/>
+        <chart:legend chart:legend-position="top" svg:x="0.984cm" svg:y="1.255cm" style:legend-expansion="wide" chart:style-name="ch3"/>
+        <chart:plot-area chart:style-name="ch4" svg:x="0.228cm" svg:y="1.903cm" svg:width="10.972cm" svg:height="4.443cm">
+          <chart:coordinate-region svg:x="1.22cm" svg:y="2.073cm" svg:width="9.98cm" svg:height="2.324cm"/>
           <chart:axis chart:dimension="x" chart:name="primary-x" chart:style-name="ch5" chartooo:axis-type="auto">
             <chartooo:date-scale/>
             <chart:categories table:cell-range-address="local-table.$A$2:.$A$30"/>
@@ -1929,24 +1910,24 @@
 <file path=Object 4/meta.xml><?xml version="1.0" encoding="utf-8"?>
 <office:document-meta xmlns:office="urn:oasis:names:tc:opendocument:xmlns:office:1.0" xmlns:ooo="http://openoffice.org/2004/office" xmlns:xlink="http://www.w3.org/1999/xlink" xmlns:dc="http://purl.org/dc/elements/1.1/" xmlns:meta="urn:oasis:names:tc:opendocument:xmlns:meta:1.0" xmlns:grddl="http://www.w3.org/2003/g/data-view#" xmlns:chartooo="http://openoffice.org/2010/chart" office:version="1.4">
   <office:meta>
-    <meta:generator>LibreOffice/26.8.0.3$Windows_X86_64 LibreOffice_project/bce0998afefdbc355585ca324285661a2170ba77</meta:generator>
+    <meta:generator>LibreOffice/26.2.0.3$Windows_X86_64 LibreOffice_project/620$Build-3</meta:generator>
   </office:meta>
 </office:document-meta>
 </file>
 
 <file path=Object 4/styles.xml><?xml version="1.0" encoding="utf-8"?>
-<office:document-styles xmlns:office="urn:oasis:names:tc:opendocument:xmlns:office:1.0" xmlns:ooo="http://openoffice.org/2004/office" xmlns:fo="urn:oasis:names:tc:opendocument:xmlns:xsl-fo-compatible:1.0" xmlns:xlink="http://www.w3.org/1999/xlink" xmlns:style="urn:oasis:names:tc:opendocument:xmlns:style:1.0" xmlns:dc="http://purl.org/dc/elements/1.1/" xmlns:text="urn:oasis:names:tc:opendocument:xmlns:text:1.0" xmlns:rpt="http://openoffice.org/2005/report" xmlns:draw="urn:oasis:names:tc:opendocument:xmlns:drawing:1.0" xmlns:dr3d="urn:oasis:names:tc:opendocument:xmlns:dr3d:1.0" xmlns:svg="urn:oasis:names:tc:opendocument:xmlns:svg-compatible:1.0" xmlns:chart="urn:oasis:names:tc:opendocument:xmlns:chart:1.0" xmlns:table="urn:oasis:names:tc:opendocument:xmlns:table:1.0" xmlns:number="urn:oasis:names:tc:opendocument:xmlns:datastyle:1.0" xmlns:ooow="http://openoffice.org/2004/writer" xmlns:oooc="http://openoffice.org/2004/calc" xmlns:field="urn:openoffice:names:experimental:ooo-ms-interop:xmlns:field:1.0" xmlns:of="urn:oasis:names:tc:opendocument:xmlns:of:1.2" xmlns:tableooo="http://openoffice.org/2009/table" xmlns:calcext="urn:org:documentfoundation:names:experimental:calc:xmlns:calcext:1.0" xmlns:drawooo="http://openoffice.org/2010/draw" xmlns:xhtml="http://www.w3.org/1999/xhtml" xmlns:loext="urn:org:documentfoundation:names:experimental:office:xmlns:loext:1.0" xmlns:script="urn:oasis:names:tc:opendocument:xmlns:script:1.0" xmlns:css3t="http://www.w3.org/TR/css3-text/" xmlns:dom="http://www.w3.org/2001/xml-events" xmlns:grddl="http://www.w3.org/2003/g/data-view#" xmlns:chartooo="http://openoffice.org/2010/chart" office:version="1.4">
+<office:document-styles xmlns:office="urn:oasis:names:tc:opendocument:xmlns:office:1.0" xmlns:ooo="http://openoffice.org/2004/office" xmlns:fo="urn:oasis:names:tc:opendocument:xmlns:xsl-fo-compatible:1.0" xmlns:xlink="http://www.w3.org/1999/xlink" xmlns:style="urn:oasis:names:tc:opendocument:xmlns:style:1.0" xmlns:dc="http://purl.org/dc/elements/1.1/" xmlns:text="urn:oasis:names:tc:opendocument:xmlns:text:1.0" xmlns:rpt="http://openoffice.org/2005/report" xmlns:draw="urn:oasis:names:tc:opendocument:xmlns:drawing:1.0" xmlns:dr3d="urn:oasis:names:tc:opendocument:xmlns:dr3d:1.0" xmlns:svg="urn:oasis:names:tc:opendocument:xmlns:svg-compatible:1.0" xmlns:chart="urn:oasis:names:tc:opendocument:xmlns:chart:1.0" xmlns:table="urn:oasis:names:tc:opendocument:xmlns:table:1.0" xmlns:number="urn:oasis:names:tc:opendocument:xmlns:datastyle:1.0" xmlns:ooow="http://openoffice.org/2004/writer" xmlns:oooc="http://openoffice.org/2004/calc" xmlns:css3t="http://www.w3.org/TR/css3-text/" xmlns:of="urn:oasis:names:tc:opendocument:xmlns:of:1.2" xmlns:tableooo="http://openoffice.org/2009/table" xmlns:calcext="urn:org:documentfoundation:names:experimental:calc:xmlns:calcext:1.0" xmlns:drawooo="http://openoffice.org/2010/draw" xmlns:xhtml="http://www.w3.org/1999/xhtml" xmlns:loext="urn:org:documentfoundation:names:experimental:office:xmlns:loext:1.0" xmlns:grddl="http://www.w3.org/2003/g/data-view#" xmlns:field="urn:openoffice:names:experimental:ooo-ms-interop:xmlns:field:1.0" xmlns:script="urn:oasis:names:tc:opendocument:xmlns:script:1.0" xmlns:dom="http://www.w3.org/2001/xml-events" xmlns:chartooo="http://openoffice.org/2010/chart" office:version="1.4">
   <office:styles/>
 </office:document-styles>
 </file>
 
 <file path=Object 5/content.xml><?xml version="1.0" encoding="utf-8"?>
-<office:document-content xmlns:office="urn:oasis:names:tc:opendocument:xmlns:office:1.0" xmlns:ooo="http://openoffice.org/2004/office" xmlns:fo="urn:oasis:names:tc:opendocument:xmlns:xsl-fo-compatible:1.0" xmlns:xlink="http://www.w3.org/1999/xlink" xmlns:dc="http://purl.org/dc/elements/1.1/" xmlns:meta="urn:oasis:names:tc:opendocument:xmlns:meta:1.0" xmlns:style="urn:oasis:names:tc:opendocument:xmlns:style:1.0" xmlns:text="urn:oasis:names:tc:opendocument:xmlns:text:1.0" xmlns:rpt="http://openoffice.org/2005/report" xmlns:draw="urn:oasis:names:tc:opendocument:xmlns:drawing:1.0" xmlns:dr3d="urn:oasis:names:tc:opendocument:xmlns:dr3d:1.0" xmlns:svg="urn:oasis:names:tc:opendocument:xmlns:svg-compatible:1.0" xmlns:chart="urn:oasis:names:tc:opendocument:xmlns:chart:1.0" xmlns:table="urn:oasis:names:tc:opendocument:xmlns:table:1.0" xmlns:number="urn:oasis:names:tc:opendocument:xmlns:datastyle:1.0" xmlns:ooow="http://openoffice.org/2004/writer" xmlns:oooc="http://openoffice.org/2004/calc" xmlns:field="urn:openoffice:names:experimental:ooo-ms-interop:xmlns:field:1.0" xmlns:of="urn:oasis:names:tc:opendocument:xmlns:of:1.2" xmlns:xforms="http://www.w3.org/2002/xforms" xmlns:tableooo="http://openoffice.org/2009/table" xmlns:calcext="urn:org:documentfoundation:names:experimental:calc:xmlns:calcext:1.0" xmlns:drawooo="http://openoffice.org/2010/draw" xmlns:xhtml="http://www.w3.org/1999/xhtml" xmlns:loext="urn:org:documentfoundation:names:experimental:office:xmlns:loext:1.0" xmlns:math="http://www.w3.org/1998/Math/MathML" xmlns:form="urn:oasis:names:tc:opendocument:xmlns:form:1.0" xmlns:script="urn:oasis:names:tc:opendocument:xmlns:script:1.0" xmlns:dom="http://www.w3.org/2001/xml-events" xmlns:formx="urn:openoffice:names:experimental:ooxml-odf-interop:xmlns:form:1.0" xmlns:xsd="http://www.w3.org/2001/XMLSchema" xmlns:xsi="http://www.w3.org/2001/XMLSchema-instance" xmlns:grddl="http://www.w3.org/2003/g/data-view#" xmlns:css3t="http://www.w3.org/TR/css3-text/" xmlns:chartooo="http://openoffice.org/2010/chart" office:version="1.4">
+<office:document-content xmlns:office="urn:oasis:names:tc:opendocument:xmlns:office:1.0" xmlns:ooo="http://openoffice.org/2004/office" xmlns:fo="urn:oasis:names:tc:opendocument:xmlns:xsl-fo-compatible:1.0" xmlns:xlink="http://www.w3.org/1999/xlink" xmlns:dc="http://purl.org/dc/elements/1.1/" xmlns:meta="urn:oasis:names:tc:opendocument:xmlns:meta:1.0" xmlns:style="urn:oasis:names:tc:opendocument:xmlns:style:1.0" xmlns:text="urn:oasis:names:tc:opendocument:xmlns:text:1.0" xmlns:rpt="http://openoffice.org/2005/report" xmlns:draw="urn:oasis:names:tc:opendocument:xmlns:drawing:1.0" xmlns:dr3d="urn:oasis:names:tc:opendocument:xmlns:dr3d:1.0" xmlns:svg="urn:oasis:names:tc:opendocument:xmlns:svg-compatible:1.0" xmlns:chart="urn:oasis:names:tc:opendocument:xmlns:chart:1.0" xmlns:table="urn:oasis:names:tc:opendocument:xmlns:table:1.0" xmlns:number="urn:oasis:names:tc:opendocument:xmlns:datastyle:1.0" xmlns:ooow="http://openoffice.org/2004/writer" xmlns:oooc="http://openoffice.org/2004/calc" xmlns:of="urn:oasis:names:tc:opendocument:xmlns:of:1.2" xmlns:xforms="http://www.w3.org/2002/xforms" xmlns:tableooo="http://openoffice.org/2009/table" xmlns:calcext="urn:org:documentfoundation:names:experimental:calc:xmlns:calcext:1.0" xmlns:drawooo="http://openoffice.org/2010/draw" xmlns:xhtml="http://www.w3.org/1999/xhtml" xmlns:loext="urn:org:documentfoundation:names:experimental:office:xmlns:loext:1.0" xmlns:field="urn:openoffice:names:experimental:ooo-ms-interop:xmlns:field:1.0" xmlns:math="http://www.w3.org/1998/Math/MathML" xmlns:form="urn:oasis:names:tc:opendocument:xmlns:form:1.0" xmlns:script="urn:oasis:names:tc:opendocument:xmlns:script:1.0" xmlns:formx="urn:openoffice:names:experimental:ooxml-odf-interop:xmlns:form:1.0" xmlns:dom="http://www.w3.org/2001/xml-events" xmlns:xsd="http://www.w3.org/2001/XMLSchema" xmlns:xsi="http://www.w3.org/2001/XMLSchema-instance" xmlns:grddl="http://www.w3.org/2003/g/data-view#" xmlns:css3t="http://www.w3.org/TR/css3-text/" xmlns:chartooo="http://openoffice.org/2010/chart" office:version="1.4">
   <office:automatic-styles>
     <number:number-style style:name="N0">
       <number:number number:min-integer-digits="1"/>
     </number:number-style>
-    <number:number-style style:name="N119">
+    <number:number-style style:name="N129">
       <number:number number:decimal-places="1" number:min-decimal-places="1" number:min-integer-digits="1"/>
       <number:text>%</number:text>
     </number:number-style>
@@ -1958,7 +1939,7 @@
       <style:text-properties fo:font-size="13pt" style:font-size-asian="13pt" style:font-size-complex="13pt"/>
     </style:style>
     <style:style style:name="ch3" style:family="chart">
-      <style:chart-properties chart:symbol-type="automatic" chart:include-hidden-cells="false" chart:auto-position="true" chart:auto-size="true" chart:treat-empty-cells="ignore" loext:frequency-type="0" loext:bin-width="0" loext:bin-count="0" chart:data-label-number="value" chart:data-label-text="false" chart:data-label-symbol="false" chart:data-label-series="false"/>
+      <style:chart-properties chart:symbol-type="automatic" chart:include-hidden-cells="false" chart:auto-position="true" chart:auto-size="true" chart:treat-empty-cells="ignore" chart:data-label-number="value" chart:data-label-text="false" chart:data-label-symbol="false" chart:data-label-series="false"/>
     </style:style>
     <style:style style:name="ch4" style:family="chart" style:data-style-name="N0">
       <style:chart-properties chart:display-label="true" chart:logarithmic="false" chart:reverse-direction="false" text:line-break="true" loext:try-staggering-first="false" chart:label-arrangement="side-by-side" chart:link-data-style-to-source="false" loext:major-origin="0.5" chart:axis-position="0" chart:axis-label-position="outside-start" chart:tick-mark-position="at-axis"/>
@@ -1970,7 +1951,7 @@
       <style:graphic-properties draw:stroke="none" svg:stroke-width="0.035cm" svg:stroke-color="#b3b3b3"/>
       <style:text-properties fo:color="#5a6b72" style:text-position="0% 100%" fo:font-family="'Times New Roman'" fo:font-size="9pt" style:font-size-asian="9pt" style:font-size-complex="9pt"/>
     </style:style>
-    <style:style style:name="ch6" style:family="chart" style:data-style-name="N119">
+    <style:style style:name="ch6" style:family="chart" style:data-style-name="N129">
       <style:chart-properties chart:symbol-type="named-symbol" chart:symbol-name="circle" chart:symbol-width="0.318cm" chart:symbol-height="0.318cm" chart:link-data-style-to-source="false" chart:data-label-number="value" chart:data-label-text="false" chart:data-label-symbol="false" chart:data-label-series="false" chart:label-position="top" loext:custom-leader-lines="false">
         <chart:label-separator>
           <text:p>; </text:p>
@@ -1992,13 +1973,13 @@
   <office:body>
     <office:chart>
       <chart:chart svg:width="11.682cm" svg:height="6.475cm" xlink:href="." xlink:type="simple" chart:class="chart:line" chart:style-name="ch1">
-        <chart:title svg:x="2.073cm" svg:y="0.265cm" chart:style-name="ch2">
+        <chart:title svg:x="1.936cm" svg:y="0.265cm" chart:style-name="ch2">
           <text:p>
             <text:span text:style-name="T1">6-month readmission by eGFR stage (%)</text:span>
           </text:p>
         </chart:title>
-        <chart:plot-area chart:style-name="ch3" svg:x="0.233cm" svg:y="1.151cm" svg:width="11.216cm" svg:height="5.195cm">
-          <chart:coordinate-region svg:x="0.233cm" svg:y="1.151cm" svg:width="11.216cm" svg:height="4.548cm"/>
+        <chart:plot-area chart:style-name="ch3" svg:x="0.233cm" svg:y="1.199cm" svg:width="11.216cm" svg:height="5.147cm">
+          <chart:coordinate-region svg:x="0.233cm" svg:y="1.199cm" svg:width="11.216cm" svg:height="4.494cm"/>
           <chart:axis chart:dimension="x" chart:name="primary-x" chart:style-name="ch4" chartooo:axis-type="auto">
             <chartooo:date-scale/>
             <chart:categories table:cell-range-address="local-table.$A$2:.$A$7"/>
@@ -2087,24 +2068,24 @@
 <file path=Object 5/meta.xml><?xml version="1.0" encoding="utf-8"?>
 <office:document-meta xmlns:office="urn:oasis:names:tc:opendocument:xmlns:office:1.0" xmlns:ooo="http://openoffice.org/2004/office" xmlns:xlink="http://www.w3.org/1999/xlink" xmlns:dc="http://purl.org/dc/elements/1.1/" xmlns:meta="urn:oasis:names:tc:opendocument:xmlns:meta:1.0" xmlns:grddl="http://www.w3.org/2003/g/data-view#" xmlns:chartooo="http://openoffice.org/2010/chart" office:version="1.4">
   <office:meta>
-    <meta:generator>LibreOffice/26.8.0.3$Windows_X86_64 LibreOffice_project/bce0998afefdbc355585ca324285661a2170ba77</meta:generator>
+    <meta:generator>LibreOffice/26.2.0.3$Windows_X86_64 LibreOffice_project/620$Build-3</meta:generator>
   </office:meta>
 </office:document-meta>
 </file>
 
 <file path=Object 5/styles.xml><?xml version="1.0" encoding="utf-8"?>
-<office:document-styles xmlns:office="urn:oasis:names:tc:opendocument:xmlns:office:1.0" xmlns:ooo="http://openoffice.org/2004/office" xmlns:fo="urn:oasis:names:tc:opendocument:xmlns:xsl-fo-compatible:1.0" xmlns:xlink="http://www.w3.org/1999/xlink" xmlns:style="urn:oasis:names:tc:opendocument:xmlns:style:1.0" xmlns:dc="http://purl.org/dc/elements/1.1/" xmlns:text="urn:oasis:names:tc:opendocument:xmlns:text:1.0" xmlns:rpt="http://openoffice.org/2005/report" xmlns:draw="urn:oasis:names:tc:opendocument:xmlns:drawing:1.0" xmlns:dr3d="urn:oasis:names:tc:opendocument:xmlns:dr3d:1.0" xmlns:svg="urn:oasis:names:tc:opendocument:xmlns:svg-compatible:1.0" xmlns:chart="urn:oasis:names:tc:opendocument:xmlns:chart:1.0" xmlns:table="urn:oasis:names:tc:opendocument:xmlns:table:1.0" xmlns:number="urn:oasis:names:tc:opendocument:xmlns:datastyle:1.0" xmlns:ooow="http://openoffice.org/2004/writer" xmlns:oooc="http://openoffice.org/2004/calc" xmlns:field="urn:openoffice:names:experimental:ooo-ms-interop:xmlns:field:1.0" xmlns:of="urn:oasis:names:tc:opendocument:xmlns:of:1.2" xmlns:tableooo="http://openoffice.org/2009/table" xmlns:calcext="urn:org:documentfoundation:names:experimental:calc:xmlns:calcext:1.0" xmlns:drawooo="http://openoffice.org/2010/draw" xmlns:xhtml="http://www.w3.org/1999/xhtml" xmlns:loext="urn:org:documentfoundation:names:experimental:office:xmlns:loext:1.0" xmlns:script="urn:oasis:names:tc:opendocument:xmlns:script:1.0" xmlns:css3t="http://www.w3.org/TR/css3-text/" xmlns:dom="http://www.w3.org/2001/xml-events" xmlns:grddl="http://www.w3.org/2003/g/data-view#" xmlns:chartooo="http://openoffice.org/2010/chart" office:version="1.4">
+<office:document-styles xmlns:office="urn:oasis:names:tc:opendocument:xmlns:office:1.0" xmlns:ooo="http://openoffice.org/2004/office" xmlns:fo="urn:oasis:names:tc:opendocument:xmlns:xsl-fo-compatible:1.0" xmlns:xlink="http://www.w3.org/1999/xlink" xmlns:style="urn:oasis:names:tc:opendocument:xmlns:style:1.0" xmlns:dc="http://purl.org/dc/elements/1.1/" xmlns:text="urn:oasis:names:tc:opendocument:xmlns:text:1.0" xmlns:rpt="http://openoffice.org/2005/report" xmlns:draw="urn:oasis:names:tc:opendocument:xmlns:drawing:1.0" xmlns:dr3d="urn:oasis:names:tc:opendocument:xmlns:dr3d:1.0" xmlns:svg="urn:oasis:names:tc:opendocument:xmlns:svg-compatible:1.0" xmlns:chart="urn:oasis:names:tc:opendocument:xmlns:chart:1.0" xmlns:table="urn:oasis:names:tc:opendocument:xmlns:table:1.0" xmlns:number="urn:oasis:names:tc:opendocument:xmlns:datastyle:1.0" xmlns:ooow="http://openoffice.org/2004/writer" xmlns:oooc="http://openoffice.org/2004/calc" xmlns:css3t="http://www.w3.org/TR/css3-text/" xmlns:of="urn:oasis:names:tc:opendocument:xmlns:of:1.2" xmlns:tableooo="http://openoffice.org/2009/table" xmlns:calcext="urn:org:documentfoundation:names:experimental:calc:xmlns:calcext:1.0" xmlns:drawooo="http://openoffice.org/2010/draw" xmlns:xhtml="http://www.w3.org/1999/xhtml" xmlns:loext="urn:org:documentfoundation:names:experimental:office:xmlns:loext:1.0" xmlns:grddl="http://www.w3.org/2003/g/data-view#" xmlns:field="urn:openoffice:names:experimental:ooo-ms-interop:xmlns:field:1.0" xmlns:script="urn:oasis:names:tc:opendocument:xmlns:script:1.0" xmlns:dom="http://www.w3.org/2001/xml-events" xmlns:chartooo="http://openoffice.org/2010/chart" office:version="1.4">
   <office:styles/>
 </office:document-styles>
 </file>
 
 <file path=Object 6/content.xml><?xml version="1.0" encoding="utf-8"?>
-<office:document-content xmlns:office="urn:oasis:names:tc:opendocument:xmlns:office:1.0" xmlns:ooo="http://openoffice.org/2004/office" xmlns:fo="urn:oasis:names:tc:opendocument:xmlns:xsl-fo-compatible:1.0" xmlns:xlink="http://www.w3.org/1999/xlink" xmlns:dc="http://purl.org/dc/elements/1.1/" xmlns:meta="urn:oasis:names:tc:opendocument:xmlns:meta:1.0" xmlns:style="urn:oasis:names:tc:opendocument:xmlns:style:1.0" xmlns:text="urn:oasis:names:tc:opendocument:xmlns:text:1.0" xmlns:rpt="http://openoffice.org/2005/report" xmlns:draw="urn:oasis:names:tc:opendocument:xmlns:drawing:1.0" xmlns:dr3d="urn:oasis:names:tc:opendocument:xmlns:dr3d:1.0" xmlns:svg="urn:oasis:names:tc:opendocument:xmlns:svg-compatible:1.0" xmlns:chart="urn:oasis:names:tc:opendocument:xmlns:chart:1.0" xmlns:table="urn:oasis:names:tc:opendocument:xmlns:table:1.0" xmlns:number="urn:oasis:names:tc:opendocument:xmlns:datastyle:1.0" xmlns:ooow="http://openoffice.org/2004/writer" xmlns:oooc="http://openoffice.org/2004/calc" xmlns:field="urn:openoffice:names:experimental:ooo-ms-interop:xmlns:field:1.0" xmlns:of="urn:oasis:names:tc:opendocument:xmlns:of:1.2" xmlns:xforms="http://www.w3.org/2002/xforms" xmlns:tableooo="http://openoffice.org/2009/table" xmlns:calcext="urn:org:documentfoundation:names:experimental:calc:xmlns:calcext:1.0" xmlns:drawooo="http://openoffice.org/2010/draw" xmlns:xhtml="http://www.w3.org/1999/xhtml" xmlns:loext="urn:org:documentfoundation:names:experimental:office:xmlns:loext:1.0" xmlns:math="http://www.w3.org/1998/Math/MathML" xmlns:form="urn:oasis:names:tc:opendocument:xmlns:form:1.0" xmlns:script="urn:oasis:names:tc:opendocument:xmlns:script:1.0" xmlns:dom="http://www.w3.org/2001/xml-events" xmlns:formx="urn:openoffice:names:experimental:ooxml-odf-interop:xmlns:form:1.0" xmlns:xsd="http://www.w3.org/2001/XMLSchema" xmlns:xsi="http://www.w3.org/2001/XMLSchema-instance" xmlns:grddl="http://www.w3.org/2003/g/data-view#" xmlns:css3t="http://www.w3.org/TR/css3-text/" xmlns:chartooo="http://openoffice.org/2010/chart" office:version="1.4">
+<office:document-content xmlns:office="urn:oasis:names:tc:opendocument:xmlns:office:1.0" xmlns:ooo="http://openoffice.org/2004/office" xmlns:fo="urn:oasis:names:tc:opendocument:xmlns:xsl-fo-compatible:1.0" xmlns:xlink="http://www.w3.org/1999/xlink" xmlns:dc="http://purl.org/dc/elements/1.1/" xmlns:meta="urn:oasis:names:tc:opendocument:xmlns:meta:1.0" xmlns:style="urn:oasis:names:tc:opendocument:xmlns:style:1.0" xmlns:text="urn:oasis:names:tc:opendocument:xmlns:text:1.0" xmlns:rpt="http://openoffice.org/2005/report" xmlns:draw="urn:oasis:names:tc:opendocument:xmlns:drawing:1.0" xmlns:dr3d="urn:oasis:names:tc:opendocument:xmlns:dr3d:1.0" xmlns:svg="urn:oasis:names:tc:opendocument:xmlns:svg-compatible:1.0" xmlns:chart="urn:oasis:names:tc:opendocument:xmlns:chart:1.0" xmlns:table="urn:oasis:names:tc:opendocument:xmlns:table:1.0" xmlns:number="urn:oasis:names:tc:opendocument:xmlns:datastyle:1.0" xmlns:ooow="http://openoffice.org/2004/writer" xmlns:oooc="http://openoffice.org/2004/calc" xmlns:of="urn:oasis:names:tc:opendocument:xmlns:of:1.2" xmlns:xforms="http://www.w3.org/2002/xforms" xmlns:tableooo="http://openoffice.org/2009/table" xmlns:calcext="urn:org:documentfoundation:names:experimental:calc:xmlns:calcext:1.0" xmlns:drawooo="http://openoffice.org/2010/draw" xmlns:xhtml="http://www.w3.org/1999/xhtml" xmlns:loext="urn:org:documentfoundation:names:experimental:office:xmlns:loext:1.0" xmlns:field="urn:openoffice:names:experimental:ooo-ms-interop:xmlns:field:1.0" xmlns:math="http://www.w3.org/1998/Math/MathML" xmlns:form="urn:oasis:names:tc:opendocument:xmlns:form:1.0" xmlns:script="urn:oasis:names:tc:opendocument:xmlns:script:1.0" xmlns:formx="urn:openoffice:names:experimental:ooxml-odf-interop:xmlns:form:1.0" xmlns:dom="http://www.w3.org/2001/xml-events" xmlns:xsd="http://www.w3.org/2001/XMLSchema" xmlns:xsi="http://www.w3.org/2001/XMLSchema-instance" xmlns:grddl="http://www.w3.org/2003/g/data-view#" xmlns:css3t="http://www.w3.org/TR/css3-text/" xmlns:chartooo="http://openoffice.org/2010/chart" office:version="1.4">
   <office:automatic-styles>
     <number:number-style style:name="N0">
       <number:number number:min-integer-digits="1"/>
     </number:number-style>
-    <number:number-style style:name="N119">
+    <number:number-style style:name="N129">
       <number:number number:decimal-places="1" number:min-decimal-places="1" number:min-integer-digits="1"/>
       <number:text>%</number:text>
     </number:number-style>
@@ -2116,7 +2097,7 @@
       <style:text-properties fo:font-size="13pt" style:font-size-asian="13pt" style:font-size-complex="13pt"/>
     </style:style>
     <style:style style:name="ch3" style:family="chart">
-      <style:chart-properties chart:symbol-type="automatic" chart:include-hidden-cells="false" chart:auto-position="true" chart:auto-size="true" chart:treat-empty-cells="ignore" loext:frequency-type="0" loext:bin-width="0" loext:bin-count="0" chart:data-label-number="value" chart:data-label-text="false" chart:data-label-symbol="false" chart:data-label-series="false"/>
+      <style:chart-properties chart:symbol-type="automatic" chart:include-hidden-cells="false" chart:auto-position="true" chart:auto-size="true" chart:treat-empty-cells="ignore" chart:data-label-number="value" chart:data-label-text="false" chart:data-label-symbol="false" chart:data-label-series="false"/>
     </style:style>
     <style:style style:name="ch4" style:family="chart" style:data-style-name="N0">
       <style:chart-properties chart:display-label="true" chart:logarithmic="false" chart:reverse-direction="false" text:line-break="true" loext:try-staggering-first="false" chart:label-arrangement="side-by-side" chart:link-data-style-to-source="false" loext:major-origin="0.5" chart:axis-position="0" chart:axis-label-position="outside-start" chart:tick-mark-position="at-axis"/>
@@ -2128,7 +2109,7 @@
       <style:graphic-properties draw:stroke="none" svg:stroke-width="0.035cm" svg:stroke-color="#b3b3b3"/>
       <style:text-properties fo:color="#5a6b72" style:text-position="0% 100%" fo:font-family="'Times New Roman'" fo:font-size="9pt" style:font-size-asian="9pt" style:font-size-complex="9pt"/>
     </style:style>
-    <style:style style:name="ch6" style:family="chart" style:data-style-name="N119">
+    <style:style style:name="ch6" style:family="chart" style:data-style-name="N129">
       <style:chart-properties chart:symbol-type="named-symbol" chart:symbol-name="circle" chart:symbol-width="0.318cm" chart:symbol-height="0.318cm" chart:link-data-style-to-source="false" chart:data-label-number="value" chart:data-label-text="false" chart:data-label-symbol="false" chart:data-label-series="false" chart:label-position="top" loext:custom-leader-lines="false">
         <chart:label-separator>
           <text:p>; </text:p>
@@ -2150,13 +2131,13 @@
   <office:body>
     <office:chart>
       <chart:chart svg:width="11.428cm" svg:height="6.475cm" xlink:href="." xlink:type="simple" chart:class="chart:line" chart:style-name="ch1">
-        <chart:title svg:x="2.209cm" svg:y="0.265cm" chart:style-name="ch2">
+        <chart:title svg:x="2.081cm" svg:y="0.265cm" chart:style-name="ch2">
           <text:p>
             <text:span text:style-name="T1">6-month mortality by eGFR stage (%)</text:span>
           </text:p>
         </chart:title>
-        <chart:plot-area chart:style-name="ch3" svg:x="0.228cm" svg:y="1.151cm" svg:width="10.972cm" svg:height="5.195cm">
-          <chart:coordinate-region svg:x="0.228cm" svg:y="1.151cm" svg:width="10.972cm" svg:height="4.548cm"/>
+        <chart:plot-area chart:style-name="ch3" svg:x="0.228cm" svg:y="1.199cm" svg:width="10.972cm" svg:height="5.147cm">
+          <chart:coordinate-region svg:x="0.228cm" svg:y="1.199cm" svg:width="10.972cm" svg:height="4.494cm"/>
           <chart:axis chart:dimension="x" chart:name="primary-x" chart:style-name="ch4" chartooo:axis-type="auto">
             <chartooo:date-scale/>
             <chart:categories table:cell-range-address="local-table.$A$2:.$A$7"/>
@@ -2245,24 +2226,24 @@
 <file path=Object 6/meta.xml><?xml version="1.0" encoding="utf-8"?>
 <office:document-meta xmlns:office="urn:oasis:names:tc:opendocument:xmlns:office:1.0" xmlns:ooo="http://openoffice.org/2004/office" xmlns:xlink="http://www.w3.org/1999/xlink" xmlns:dc="http://purl.org/dc/elements/1.1/" xmlns:meta="urn:oasis:names:tc:opendocument:xmlns:meta:1.0" xmlns:grddl="http://www.w3.org/2003/g/data-view#" xmlns:chartooo="http://openoffice.org/2010/chart" office:version="1.4">
   <office:meta>
-    <meta:generator>LibreOffice/26.8.0.3$Windows_X86_64 LibreOffice_project/bce0998afefdbc355585ca324285661a2170ba77</meta:generator>
+    <meta:generator>LibreOffice/26.2.0.3$Windows_X86_64 LibreOffice_project/620$Build-3</meta:generator>
   </office:meta>
 </office:document-meta>
 </file>
 
 <file path=Object 6/styles.xml><?xml version="1.0" encoding="utf-8"?>
-<office:document-styles xmlns:office="urn:oasis:names:tc:opendocument:xmlns:office:1.0" xmlns:ooo="http://openoffice.org/2004/office" xmlns:fo="urn:oasis:names:tc:opendocument:xmlns:xsl-fo-compatible:1.0" xmlns:xlink="http://www.w3.org/1999/xlink" xmlns:style="urn:oasis:names:tc:opendocument:xmlns:style:1.0" xmlns:dc="http://purl.org/dc/elements/1.1/" xmlns:text="urn:oasis:names:tc:opendocument:xmlns:text:1.0" xmlns:rpt="http://openoffice.org/2005/report" xmlns:draw="urn:oasis:names:tc:opendocument:xmlns:drawing:1.0" xmlns:dr3d="urn:oasis:names:tc:opendocument:xmlns:dr3d:1.0" xmlns:svg="urn:oasis:names:tc:opendocument:xmlns:svg-compatible:1.0" xmlns:chart="urn:oasis:names:tc:opendocument:xmlns:chart:1.0" xmlns:table="urn:oasis:names:tc:opendocument:xmlns:table:1.0" xmlns:number="urn:oasis:names:tc:opendocument:xmlns:datastyle:1.0" xmlns:ooow="http://openoffice.org/2004/writer" xmlns:oooc="http://openoffice.org/2004/calc" xmlns:field="urn:openoffice:names:experimental:ooo-ms-interop:xmlns:field:1.0" xmlns:of="urn:oasis:names:tc:opendocument:xmlns:of:1.2" xmlns:tableooo="http://openoffice.org/2009/table" xmlns:calcext="urn:org:documentfoundation:names:experimental:calc:xmlns:calcext:1.0" xmlns:drawooo="http://openoffice.org/2010/draw" xmlns:xhtml="http://www.w3.org/1999/xhtml" xmlns:loext="urn:org:documentfoundation:names:experimental:office:xmlns:loext:1.0" xmlns:script="urn:oasis:names:tc:opendocument:xmlns:script:1.0" xmlns:css3t="http://www.w3.org/TR/css3-text/" xmlns:dom="http://www.w3.org/2001/xml-events" xmlns:grddl="http://www.w3.org/2003/g/data-view#" xmlns:chartooo="http://openoffice.org/2010/chart" office:version="1.4">
+<office:document-styles xmlns:office="urn:oasis:names:tc:opendocument:xmlns:office:1.0" xmlns:ooo="http://openoffice.org/2004/office" xmlns:fo="urn:oasis:names:tc:opendocument:xmlns:xsl-fo-compatible:1.0" xmlns:xlink="http://www.w3.org/1999/xlink" xmlns:style="urn:oasis:names:tc:opendocument:xmlns:style:1.0" xmlns:dc="http://purl.org/dc/elements/1.1/" xmlns:text="urn:oasis:names:tc:opendocument:xmlns:text:1.0" xmlns:rpt="http://openoffice.org/2005/report" xmlns:draw="urn:oasis:names:tc:opendocument:xmlns:drawing:1.0" xmlns:dr3d="urn:oasis:names:tc:opendocument:xmlns:dr3d:1.0" xmlns:svg="urn:oasis:names:tc:opendocument:xmlns:svg-compatible:1.0" xmlns:chart="urn:oasis:names:tc:opendocument:xmlns:chart:1.0" xmlns:table="urn:oasis:names:tc:opendocument:xmlns:table:1.0" xmlns:number="urn:oasis:names:tc:opendocument:xmlns:datastyle:1.0" xmlns:ooow="http://openoffice.org/2004/writer" xmlns:oooc="http://openoffice.org/2004/calc" xmlns:css3t="http://www.w3.org/TR/css3-text/" xmlns:of="urn:oasis:names:tc:opendocument:xmlns:of:1.2" xmlns:tableooo="http://openoffice.org/2009/table" xmlns:calcext="urn:org:documentfoundation:names:experimental:calc:xmlns:calcext:1.0" xmlns:drawooo="http://openoffice.org/2010/draw" xmlns:xhtml="http://www.w3.org/1999/xhtml" xmlns:loext="urn:org:documentfoundation:names:experimental:office:xmlns:loext:1.0" xmlns:grddl="http://www.w3.org/2003/g/data-view#" xmlns:field="urn:openoffice:names:experimental:ooo-ms-interop:xmlns:field:1.0" xmlns:script="urn:oasis:names:tc:opendocument:xmlns:script:1.0" xmlns:dom="http://www.w3.org/2001/xml-events" xmlns:chartooo="http://openoffice.org/2010/chart" office:version="1.4">
   <office:styles/>
 </office:document-styles>
 </file>
 
 <file path=Object 7/content.xml><?xml version="1.0" encoding="utf-8"?>
-<office:document-content xmlns:office="urn:oasis:names:tc:opendocument:xmlns:office:1.0" xmlns:ooo="http://openoffice.org/2004/office" xmlns:fo="urn:oasis:names:tc:opendocument:xmlns:xsl-fo-compatible:1.0" xmlns:xlink="http://www.w3.org/1999/xlink" xmlns:dc="http://purl.org/dc/elements/1.1/" xmlns:meta="urn:oasis:names:tc:opendocument:xmlns:meta:1.0" xmlns:style="urn:oasis:names:tc:opendocument:xmlns:style:1.0" xmlns:text="urn:oasis:names:tc:opendocument:xmlns:text:1.0" xmlns:rpt="http://openoffice.org/2005/report" xmlns:draw="urn:oasis:names:tc:opendocument:xmlns:drawing:1.0" xmlns:dr3d="urn:oasis:names:tc:opendocument:xmlns:dr3d:1.0" xmlns:svg="urn:oasis:names:tc:opendocument:xmlns:svg-compatible:1.0" xmlns:chart="urn:oasis:names:tc:opendocument:xmlns:chart:1.0" xmlns:table="urn:oasis:names:tc:opendocument:xmlns:table:1.0" xmlns:number="urn:oasis:names:tc:opendocument:xmlns:datastyle:1.0" xmlns:ooow="http://openoffice.org/2004/writer" xmlns:oooc="http://openoffice.org/2004/calc" xmlns:field="urn:openoffice:names:experimental:ooo-ms-interop:xmlns:field:1.0" xmlns:of="urn:oasis:names:tc:opendocument:xmlns:of:1.2" xmlns:xforms="http://www.w3.org/2002/xforms" xmlns:tableooo="http://openoffice.org/2009/table" xmlns:calcext="urn:org:documentfoundation:names:experimental:calc:xmlns:calcext:1.0" xmlns:drawooo="http://openoffice.org/2010/draw" xmlns:xhtml="http://www.w3.org/1999/xhtml" xmlns:loext="urn:org:documentfoundation:names:experimental:office:xmlns:loext:1.0" xmlns:math="http://www.w3.org/1998/Math/MathML" xmlns:form="urn:oasis:names:tc:opendocument:xmlns:form:1.0" xmlns:script="urn:oasis:names:tc:opendocument:xmlns:script:1.0" xmlns:dom="http://www.w3.org/2001/xml-events" xmlns:formx="urn:openoffice:names:experimental:ooxml-odf-interop:xmlns:form:1.0" xmlns:xsd="http://www.w3.org/2001/XMLSchema" xmlns:xsi="http://www.w3.org/2001/XMLSchema-instance" xmlns:grddl="http://www.w3.org/2003/g/data-view#" xmlns:css3t="http://www.w3.org/TR/css3-text/" xmlns:chartooo="http://openoffice.org/2010/chart" office:version="1.4">
+<office:document-content xmlns:office="urn:oasis:names:tc:opendocument:xmlns:office:1.0" xmlns:ooo="http://openoffice.org/2004/office" xmlns:fo="urn:oasis:names:tc:opendocument:xmlns:xsl-fo-compatible:1.0" xmlns:xlink="http://www.w3.org/1999/xlink" xmlns:dc="http://purl.org/dc/elements/1.1/" xmlns:meta="urn:oasis:names:tc:opendocument:xmlns:meta:1.0" xmlns:style="urn:oasis:names:tc:opendocument:xmlns:style:1.0" xmlns:text="urn:oasis:names:tc:opendocument:xmlns:text:1.0" xmlns:rpt="http://openoffice.org/2005/report" xmlns:draw="urn:oasis:names:tc:opendocument:xmlns:drawing:1.0" xmlns:dr3d="urn:oasis:names:tc:opendocument:xmlns:dr3d:1.0" xmlns:svg="urn:oasis:names:tc:opendocument:xmlns:svg-compatible:1.0" xmlns:chart="urn:oasis:names:tc:opendocument:xmlns:chart:1.0" xmlns:table="urn:oasis:names:tc:opendocument:xmlns:table:1.0" xmlns:number="urn:oasis:names:tc:opendocument:xmlns:datastyle:1.0" xmlns:ooow="http://openoffice.org/2004/writer" xmlns:oooc="http://openoffice.org/2004/calc" xmlns:of="urn:oasis:names:tc:opendocument:xmlns:of:1.2" xmlns:xforms="http://www.w3.org/2002/xforms" xmlns:tableooo="http://openoffice.org/2009/table" xmlns:calcext="urn:org:documentfoundation:names:experimental:calc:xmlns:calcext:1.0" xmlns:drawooo="http://openoffice.org/2010/draw" xmlns:xhtml="http://www.w3.org/1999/xhtml" xmlns:loext="urn:org:documentfoundation:names:experimental:office:xmlns:loext:1.0" xmlns:field="urn:openoffice:names:experimental:ooo-ms-interop:xmlns:field:1.0" xmlns:math="http://www.w3.org/1998/Math/MathML" xmlns:form="urn:oasis:names:tc:opendocument:xmlns:form:1.0" xmlns:script="urn:oasis:names:tc:opendocument:xmlns:script:1.0" xmlns:formx="urn:openoffice:names:experimental:ooxml-odf-interop:xmlns:form:1.0" xmlns:dom="http://www.w3.org/2001/xml-events" xmlns:xsd="http://www.w3.org/2001/XMLSchema" xmlns:xsi="http://www.w3.org/2001/XMLSchema-instance" xmlns:grddl="http://www.w3.org/2003/g/data-view#" xmlns:css3t="http://www.w3.org/TR/css3-text/" xmlns:chartooo="http://openoffice.org/2010/chart" office:version="1.4">
   <office:automatic-styles>
     <number:number-style style:name="N0">
       <number:number number:min-integer-digits="1"/>
     </number:number-style>
-    <number:number-style style:name="N119">
+    <number:number-style style:name="N129">
       <number:number number:decimal-places="1" number:min-decimal-places="1" number:min-integer-digits="1"/>
       <number:text>%</number:text>
     </number:number-style>
@@ -2274,7 +2255,7 @@
       <style:text-properties fo:font-size="13pt" style:font-size-asian="13pt" style:font-size-complex="13pt"/>
     </style:style>
     <style:style style:name="ch3" style:family="chart">
-      <style:chart-properties chart:include-hidden-cells="false" chart:auto-position="true" chart:auto-size="true" chart:treat-empty-cells="ignore" loext:frequency-type="0" loext:bin-width="0" loext:bin-count="0" chart:data-label-number="value" chart:data-label-text="false" chart:data-label-symbol="false" chart:data-label-series="false"/>
+      <style:chart-properties chart:include-hidden-cells="false" chart:auto-position="true" chart:auto-size="true" chart:treat-empty-cells="ignore" chart:data-label-number="value" chart:data-label-text="false" chart:data-label-symbol="false" chart:data-label-series="false"/>
     </style:style>
     <style:style style:name="ch4" style:family="chart" style:data-style-name="N0">
       <style:chart-properties chart:display-label="true" chart:logarithmic="false" chart:reverse-direction="false" text:line-break="true" loext:try-staggering-first="false" chart:label-arrangement="side-by-side" chart:link-data-style-to-source="false" chart:axis-position="0" chart:axis-label-position="outside-start" chart:tick-mark-position="at-axis"/>
@@ -2286,7 +2267,7 @@
       <style:graphic-properties draw:stroke="none" svg:stroke-width="0.035cm" svg:stroke-color="#b3b3b3"/>
       <style:text-properties fo:color="#5a6b72" style:text-position="0% 100%" fo:font-family="'Times New Roman'" fo:font-size="9pt" style:font-size-asian="9pt" style:font-size-complex="9pt"/>
     </style:style>
-    <style:style style:name="ch6" style:family="chart" style:data-style-name="N119">
+    <style:style style:name="ch6" style:family="chart" style:data-style-name="N129">
       <style:chart-properties chart:link-data-style-to-source="false" chart:data-label-number="value" chart:data-label-text="false" chart:data-label-symbol="false" chart:data-label-series="false" chart:label-position="outside" loext:custom-leader-lines="false">
         <chart:label-separator>
           <text:p>; </text:p>
@@ -2323,13 +2304,13 @@
   <office:body>
     <office:chart>
       <chart:chart svg:width="11.682cm" svg:height="6.475cm" xlink:href="." xlink:type="simple" chart:class="chart:bar" chart:style-name="ch1">
-        <chart:title svg:x="2.08cm" svg:y="0.265cm" chart:style-name="ch2">
+        <chart:title svg:x="1.943cm" svg:y="0.265cm" chart:style-name="ch2">
           <text:p>
             <text:span text:style-name="T1">Cardio-renal risk: 6-month mortality (%)</text:span>
           </text:p>
         </chart:title>
-        <chart:plot-area chart:style-name="ch3" svg:x="0.233cm" svg:y="1.151cm" svg:width="11.216cm" svg:height="5.195cm">
-          <chart:coordinate-region svg:x="0.233cm" svg:y="1.151cm" svg:width="11.216cm" svg:height="4.627cm"/>
+        <chart:plot-area chart:style-name="ch3" svg:x="0.233cm" svg:y="1.199cm" svg:width="11.216cm" svg:height="5.147cm">
+          <chart:coordinate-region svg:x="0.233cm" svg:y="1.199cm" svg:width="11.216cm" svg:height="4.579cm"/>
           <chart:axis chart:dimension="x" chart:name="primary-x" chart:style-name="ch4" chartooo:axis-type="auto">
             <chartooo:date-scale/>
             <chart:categories table:cell-range-address="local-table.$A$2:.$A$5"/>
@@ -2405,24 +2386,24 @@
 <file path=Object 7/meta.xml><?xml version="1.0" encoding="utf-8"?>
 <office:document-meta xmlns:office="urn:oasis:names:tc:opendocument:xmlns:office:1.0" xmlns:ooo="http://openoffice.org/2004/office" xmlns:xlink="http://www.w3.org/1999/xlink" xmlns:dc="http://purl.org/dc/elements/1.1/" xmlns:meta="urn:oasis:names:tc:opendocument:xmlns:meta:1.0" xmlns:grddl="http://www.w3.org/2003/g/data-view#" xmlns:chartooo="http://openoffice.org/2010/chart" office:version="1.4">
   <office:meta>
-    <meta:generator>LibreOffice/26.8.0.3$Windows_X86_64 LibreOffice_project/bce0998afefdbc355585ca324285661a2170ba77</meta:generator>
+    <meta:generator>LibreOffice/26.2.0.3$Windows_X86_64 LibreOffice_project/620$Build-3</meta:generator>
   </office:meta>
 </office:document-meta>
 </file>
 
 <file path=Object 7/styles.xml><?xml version="1.0" encoding="utf-8"?>
-<office:document-styles xmlns:office="urn:oasis:names:tc:opendocument:xmlns:office:1.0" xmlns:ooo="http://openoffice.org/2004/office" xmlns:fo="urn:oasis:names:tc:opendocument:xmlns:xsl-fo-compatible:1.0" xmlns:xlink="http://www.w3.org/1999/xlink" xmlns:style="urn:oasis:names:tc:opendocument:xmlns:style:1.0" xmlns:dc="http://purl.org/dc/elements/1.1/" xmlns:text="urn:oasis:names:tc:opendocument:xmlns:text:1.0" xmlns:rpt="http://openoffice.org/2005/report" xmlns:draw="urn:oasis:names:tc:opendocument:xmlns:drawing:1.0" xmlns:dr3d="urn:oasis:names:tc:opendocument:xmlns:dr3d:1.0" xmlns:svg="urn:oasis:names:tc:opendocument:xmlns:svg-compatible:1.0" xmlns:chart="urn:oasis:names:tc:opendocument:xmlns:chart:1.0" xmlns:table="urn:oasis:names:tc:opendocument:xmlns:table:1.0" xmlns:number="urn:oasis:names:tc:opendocument:xmlns:datastyle:1.0" xmlns:ooow="http://openoffice.org/2004/writer" xmlns:oooc="http://openoffice.org/2004/calc" xmlns:field="urn:openoffice:names:experimental:ooo-ms-interop:xmlns:field:1.0" xmlns:of="urn:oasis:names:tc:opendocument:xmlns:of:1.2" xmlns:tableooo="http://openoffice.org/2009/table" xmlns:calcext="urn:org:documentfoundation:names:experimental:calc:xmlns:calcext:1.0" xmlns:drawooo="http://openoffice.org/2010/draw" xmlns:xhtml="http://www.w3.org/1999/xhtml" xmlns:loext="urn:org:documentfoundation:names:experimental:office:xmlns:loext:1.0" xmlns:script="urn:oasis:names:tc:opendocument:xmlns:script:1.0" xmlns:css3t="http://www.w3.org/TR/css3-text/" xmlns:dom="http://www.w3.org/2001/xml-events" xmlns:grddl="http://www.w3.org/2003/g/data-view#" xmlns:chartooo="http://openoffice.org/2010/chart" office:version="1.4">
+<office:document-styles xmlns:office="urn:oasis:names:tc:opendocument:xmlns:office:1.0" xmlns:ooo="http://openoffice.org/2004/office" xmlns:fo="urn:oasis:names:tc:opendocument:xmlns:xsl-fo-compatible:1.0" xmlns:xlink="http://www.w3.org/1999/xlink" xmlns:style="urn:oasis:names:tc:opendocument:xmlns:style:1.0" xmlns:dc="http://purl.org/dc/elements/1.1/" xmlns:text="urn:oasis:names:tc:opendocument:xmlns:text:1.0" xmlns:rpt="http://openoffice.org/2005/report" xmlns:draw="urn:oasis:names:tc:opendocument:xmlns:drawing:1.0" xmlns:dr3d="urn:oasis:names:tc:opendocument:xmlns:dr3d:1.0" xmlns:svg="urn:oasis:names:tc:opendocument:xmlns:svg-compatible:1.0" xmlns:chart="urn:oasis:names:tc:opendocument:xmlns:chart:1.0" xmlns:table="urn:oasis:names:tc:opendocument:xmlns:table:1.0" xmlns:number="urn:oasis:names:tc:opendocument:xmlns:datastyle:1.0" xmlns:ooow="http://openoffice.org/2004/writer" xmlns:oooc="http://openoffice.org/2004/calc" xmlns:css3t="http://www.w3.org/TR/css3-text/" xmlns:of="urn:oasis:names:tc:opendocument:xmlns:of:1.2" xmlns:tableooo="http://openoffice.org/2009/table" xmlns:calcext="urn:org:documentfoundation:names:experimental:calc:xmlns:calcext:1.0" xmlns:drawooo="http://openoffice.org/2010/draw" xmlns:xhtml="http://www.w3.org/1999/xhtml" xmlns:loext="urn:org:documentfoundation:names:experimental:office:xmlns:loext:1.0" xmlns:grddl="http://www.w3.org/2003/g/data-view#" xmlns:field="urn:openoffice:names:experimental:ooo-ms-interop:xmlns:field:1.0" xmlns:script="urn:oasis:names:tc:opendocument:xmlns:script:1.0" xmlns:dom="http://www.w3.org/2001/xml-events" xmlns:chartooo="http://openoffice.org/2010/chart" office:version="1.4">
   <office:styles/>
 </office:document-styles>
 </file>
 
 <file path=Object 8/content.xml><?xml version="1.0" encoding="utf-8"?>
-<office:document-content xmlns:office="urn:oasis:names:tc:opendocument:xmlns:office:1.0" xmlns:ooo="http://openoffice.org/2004/office" xmlns:fo="urn:oasis:names:tc:opendocument:xmlns:xsl-fo-compatible:1.0" xmlns:xlink="http://www.w3.org/1999/xlink" xmlns:dc="http://purl.org/dc/elements/1.1/" xmlns:meta="urn:oasis:names:tc:opendocument:xmlns:meta:1.0" xmlns:style="urn:oasis:names:tc:opendocument:xmlns:style:1.0" xmlns:text="urn:oasis:names:tc:opendocument:xmlns:text:1.0" xmlns:rpt="http://openoffice.org/2005/report" xmlns:draw="urn:oasis:names:tc:opendocument:xmlns:drawing:1.0" xmlns:dr3d="urn:oasis:names:tc:opendocument:xmlns:dr3d:1.0" xmlns:svg="urn:oasis:names:tc:opendocument:xmlns:svg-compatible:1.0" xmlns:chart="urn:oasis:names:tc:opendocument:xmlns:chart:1.0" xmlns:table="urn:oasis:names:tc:opendocument:xmlns:table:1.0" xmlns:number="urn:oasis:names:tc:opendocument:xmlns:datastyle:1.0" xmlns:ooow="http://openoffice.org/2004/writer" xmlns:oooc="http://openoffice.org/2004/calc" xmlns:field="urn:openoffice:names:experimental:ooo-ms-interop:xmlns:field:1.0" xmlns:of="urn:oasis:names:tc:opendocument:xmlns:of:1.2" xmlns:xforms="http://www.w3.org/2002/xforms" xmlns:tableooo="http://openoffice.org/2009/table" xmlns:calcext="urn:org:documentfoundation:names:experimental:calc:xmlns:calcext:1.0" xmlns:drawooo="http://openoffice.org/2010/draw" xmlns:xhtml="http://www.w3.org/1999/xhtml" xmlns:loext="urn:org:documentfoundation:names:experimental:office:xmlns:loext:1.0" xmlns:math="http://www.w3.org/1998/Math/MathML" xmlns:form="urn:oasis:names:tc:opendocument:xmlns:form:1.0" xmlns:script="urn:oasis:names:tc:opendocument:xmlns:script:1.0" xmlns:dom="http://www.w3.org/2001/xml-events" xmlns:formx="urn:openoffice:names:experimental:ooxml-odf-interop:xmlns:form:1.0" xmlns:xsd="http://www.w3.org/2001/XMLSchema" xmlns:xsi="http://www.w3.org/2001/XMLSchema-instance" xmlns:grddl="http://www.w3.org/2003/g/data-view#" xmlns:css3t="http://www.w3.org/TR/css3-text/" xmlns:chartooo="http://openoffice.org/2010/chart" office:version="1.4">
+<office:document-content xmlns:office="urn:oasis:names:tc:opendocument:xmlns:office:1.0" xmlns:ooo="http://openoffice.org/2004/office" xmlns:fo="urn:oasis:names:tc:opendocument:xmlns:xsl-fo-compatible:1.0" xmlns:xlink="http://www.w3.org/1999/xlink" xmlns:dc="http://purl.org/dc/elements/1.1/" xmlns:meta="urn:oasis:names:tc:opendocument:xmlns:meta:1.0" xmlns:style="urn:oasis:names:tc:opendocument:xmlns:style:1.0" xmlns:text="urn:oasis:names:tc:opendocument:xmlns:text:1.0" xmlns:rpt="http://openoffice.org/2005/report" xmlns:draw="urn:oasis:names:tc:opendocument:xmlns:drawing:1.0" xmlns:dr3d="urn:oasis:names:tc:opendocument:xmlns:dr3d:1.0" xmlns:svg="urn:oasis:names:tc:opendocument:xmlns:svg-compatible:1.0" xmlns:chart="urn:oasis:names:tc:opendocument:xmlns:chart:1.0" xmlns:table="urn:oasis:names:tc:opendocument:xmlns:table:1.0" xmlns:number="urn:oasis:names:tc:opendocument:xmlns:datastyle:1.0" xmlns:ooow="http://openoffice.org/2004/writer" xmlns:oooc="http://openoffice.org/2004/calc" xmlns:of="urn:oasis:names:tc:opendocument:xmlns:of:1.2" xmlns:xforms="http://www.w3.org/2002/xforms" xmlns:tableooo="http://openoffice.org/2009/table" xmlns:calcext="urn:org:documentfoundation:names:experimental:calc:xmlns:calcext:1.0" xmlns:drawooo="http://openoffice.org/2010/draw" xmlns:xhtml="http://www.w3.org/1999/xhtml" xmlns:loext="urn:org:documentfoundation:names:experimental:office:xmlns:loext:1.0" xmlns:field="urn:openoffice:names:experimental:ooo-ms-interop:xmlns:field:1.0" xmlns:math="http://www.w3.org/1998/Math/MathML" xmlns:form="urn:oasis:names:tc:opendocument:xmlns:form:1.0" xmlns:script="urn:oasis:names:tc:opendocument:xmlns:script:1.0" xmlns:formx="urn:openoffice:names:experimental:ooxml-odf-interop:xmlns:form:1.0" xmlns:dom="http://www.w3.org/2001/xml-events" xmlns:xsd="http://www.w3.org/2001/XMLSchema" xmlns:xsi="http://www.w3.org/2001/XMLSchema-instance" xmlns:grddl="http://www.w3.org/2003/g/data-view#" xmlns:css3t="http://www.w3.org/TR/css3-text/" xmlns:chartooo="http://openoffice.org/2010/chart" office:version="1.4">
   <office:automatic-styles>
     <number:number-style style:name="N0">
       <number:number number:min-integer-digits="1"/>
     </number:number-style>
-    <number:number-style style:name="N119">
+    <number:number-style style:name="N129">
       <number:number number:decimal-places="1" number:min-decimal-places="1" number:min-integer-digits="1"/>
       <number:text>%</number:text>
     </number:number-style>
@@ -2434,7 +2415,7 @@
       <style:text-properties fo:font-size="13pt" style:font-size-asian="13pt" style:font-size-complex="13pt"/>
     </style:style>
     <style:style style:name="ch3" style:family="chart">
-      <style:chart-properties chart:include-hidden-cells="false" chart:auto-position="true" chart:auto-size="true" chart:treat-empty-cells="ignore" loext:frequency-type="0" loext:bin-width="0" loext:bin-count="0" chart:data-label-number="value" chart:data-label-text="false" chart:data-label-symbol="false" chart:data-label-series="false"/>
+      <style:chart-properties chart:include-hidden-cells="false" chart:auto-position="true" chart:auto-size="true" chart:treat-empty-cells="ignore" chart:data-label-number="value" chart:data-label-text="false" chart:data-label-symbol="false" chart:data-label-series="false"/>
     </style:style>
     <style:style style:name="ch4" style:family="chart" style:data-style-name="N0">
       <style:chart-properties chart:display-label="true" chart:logarithmic="false" chart:reverse-direction="false" text:line-break="true" loext:try-staggering-first="false" chart:label-arrangement="side-by-side" chart:link-data-style-to-source="false" chart:axis-position="0" chart:axis-label-position="outside-start" chart:tick-mark-position="at-axis"/>
@@ -2446,7 +2427,7 @@
       <style:graphic-properties draw:stroke="none" svg:stroke-width="0.035cm" svg:stroke-color="#b3b3b3"/>
       <style:text-properties fo:color="#5a6b72" style:text-position="0% 100%" fo:font-family="'Times New Roman'" fo:font-size="9pt" style:font-size-asian="9pt" style:font-size-complex="9pt"/>
     </style:style>
-    <style:style style:name="ch6" style:family="chart" style:data-style-name="N119">
+    <style:style style:name="ch6" style:family="chart" style:data-style-name="N129">
       <style:chart-properties chart:link-data-style-to-source="false" chart:data-label-number="value" chart:data-label-text="false" chart:data-label-symbol="false" chart:data-label-series="false" chart:label-position="outside" loext:custom-leader-lines="false">
         <chart:label-separator>
           <text:p>; </text:p>
@@ -2457,28 +2438,22 @@
     </style:style>
     <style:style style:name="ch7" style:family="chart">
       <style:chart-properties chart:solid-type="cuboid"/>
-      <style:graphic-properties/>
-      <style:text-properties/>
     </style:style>
     <style:style style:name="ch8" style:family="chart">
       <style:chart-properties chart:solid-type="cuboid"/>
       <style:graphic-properties draw:fill-color="#a9cde6"/>
-      <style:text-properties/>
     </style:style>
     <style:style style:name="ch9" style:family="chart">
       <style:chart-properties chart:solid-type="cuboid"/>
       <style:graphic-properties draw:fill-color="#7fb4d9"/>
-      <style:text-properties/>
     </style:style>
     <style:style style:name="ch10" style:family="chart">
       <style:chart-properties chart:solid-type="cuboid"/>
       <style:graphic-properties draw:fill-color="#5fa8d3"/>
-      <style:text-properties/>
     </style:style>
     <style:style style:name="ch11" style:family="chart">
       <style:chart-properties chart:solid-type="cuboid"/>
       <style:graphic-properties draw:fill-color="#c0543a"/>
-      <style:text-properties/>
     </style:style>
     <style:style style:name="ch12" style:family="chart">
       <style:graphic-properties draw:fill="none" draw:fill-color="#d9d9d9"/>
@@ -2493,13 +2468,13 @@
   <office:body>
     <office:chart>
       <chart:chart svg:width="11.428cm" svg:height="6.475cm" xlink:href="." xlink:type="simple" chart:class="chart:bar" chart:style-name="ch1">
-        <chart:title svg:x="2.308cm" svg:y="0.265cm" chart:style-name="ch2">
+        <chart:title svg:x="2.184cm" svg:y="0.265cm" chart:style-name="ch2">
           <text:p>
             <text:span text:style-name="T1">Mortality by potassium, mmol/L (%)</text:span>
           </text:p>
         </chart:title>
-        <chart:plot-area chart:style-name="ch3" svg:x="0.228cm" svg:y="1.151cm" svg:width="10.972cm" svg:height="5.195cm">
-          <chart:coordinate-region svg:x="0.228cm" svg:y="1.151cm" svg:width="10.972cm" svg:height="4.548cm"/>
+        <chart:plot-area chart:style-name="ch3" svg:x="0.228cm" svg:y="1.199cm" svg:width="10.972cm" svg:height="5.147cm">
+          <chart:coordinate-region svg:x="0.228cm" svg:y="1.199cm" svg:width="10.972cm" svg:height="4.494cm"/>
           <chart:axis chart:dimension="x" chart:name="primary-x" chart:style-name="ch4" chartooo:axis-type="auto">
             <chartooo:date-scale/>
             <chart:categories table:cell-range-address="local-table.$A$2:.$A$6"/>
@@ -2584,24 +2559,24 @@
 <file path=Object 8/meta.xml><?xml version="1.0" encoding="utf-8"?>
 <office:document-meta xmlns:office="urn:oasis:names:tc:opendocument:xmlns:office:1.0" xmlns:ooo="http://openoffice.org/2004/office" xmlns:xlink="http://www.w3.org/1999/xlink" xmlns:dc="http://purl.org/dc/elements/1.1/" xmlns:meta="urn:oasis:names:tc:opendocument:xmlns:meta:1.0" xmlns:grddl="http://www.w3.org/2003/g/data-view#" xmlns:chartooo="http://openoffice.org/2010/chart" office:version="1.4">
   <office:meta>
-    <meta:generator>LibreOffice/26.8.0.3$Windows_X86_64 LibreOffice_project/bce0998afefdbc355585ca324285661a2170ba77</meta:generator>
+    <meta:generator>LibreOffice/26.2.0.3$Windows_X86_64 LibreOffice_project/620$Build-3</meta:generator>
   </office:meta>
 </office:document-meta>
 </file>
 
 <file path=Object 8/styles.xml><?xml version="1.0" encoding="utf-8"?>
-<office:document-styles xmlns:office="urn:oasis:names:tc:opendocument:xmlns:office:1.0" xmlns:ooo="http://openoffice.org/2004/office" xmlns:fo="urn:oasis:names:tc:opendocument:xmlns:xsl-fo-compatible:1.0" xmlns:xlink="http://www.w3.org/1999/xlink" xmlns:style="urn:oasis:names:tc:opendocument:xmlns:style:1.0" xmlns:dc="http://purl.org/dc/elements/1.1/" xmlns:text="urn:oasis:names:tc:opendocument:xmlns:text:1.0" xmlns:rpt="http://openoffice.org/2005/report" xmlns:draw="urn:oasis:names:tc:opendocument:xmlns:drawing:1.0" xmlns:dr3d="urn:oasis:names:tc:opendocument:xmlns:dr3d:1.0" xmlns:svg="urn:oasis:names:tc:opendocument:xmlns:svg-compatible:1.0" xmlns:chart="urn:oasis:names:tc:opendocument:xmlns:chart:1.0" xmlns:table="urn:oasis:names:tc:opendocument:xmlns:table:1.0" xmlns:number="urn:oasis:names:tc:opendocument:xmlns:datastyle:1.0" xmlns:ooow="http://openoffice.org/2004/writer" xmlns:oooc="http://openoffice.org/2004/calc" xmlns:field="urn:openoffice:names:experimental:ooo-ms-interop:xmlns:field:1.0" xmlns:of="urn:oasis:names:tc:opendocument:xmlns:of:1.2" xmlns:tableooo="http://openoffice.org/2009/table" xmlns:calcext="urn:org:documentfoundation:names:experimental:calc:xmlns:calcext:1.0" xmlns:drawooo="http://openoffice.org/2010/draw" xmlns:xhtml="http://www.w3.org/1999/xhtml" xmlns:loext="urn:org:documentfoundation:names:experimental:office:xmlns:loext:1.0" xmlns:script="urn:oasis:names:tc:opendocument:xmlns:script:1.0" xmlns:css3t="http://www.w3.org/TR/css3-text/" xmlns:dom="http://www.w3.org/2001/xml-events" xmlns:grddl="http://www.w3.org/2003/g/data-view#" xmlns:chartooo="http://openoffice.org/2010/chart" office:version="1.4">
+<office:document-styles xmlns:office="urn:oasis:names:tc:opendocument:xmlns:office:1.0" xmlns:ooo="http://openoffice.org/2004/office" xmlns:fo="urn:oasis:names:tc:opendocument:xmlns:xsl-fo-compatible:1.0" xmlns:xlink="http://www.w3.org/1999/xlink" xmlns:style="urn:oasis:names:tc:opendocument:xmlns:style:1.0" xmlns:dc="http://purl.org/dc/elements/1.1/" xmlns:text="urn:oasis:names:tc:opendocument:xmlns:text:1.0" xmlns:rpt="http://openoffice.org/2005/report" xmlns:draw="urn:oasis:names:tc:opendocument:xmlns:drawing:1.0" xmlns:dr3d="urn:oasis:names:tc:opendocument:xmlns:dr3d:1.0" xmlns:svg="urn:oasis:names:tc:opendocument:xmlns:svg-compatible:1.0" xmlns:chart="urn:oasis:names:tc:opendocument:xmlns:chart:1.0" xmlns:table="urn:oasis:names:tc:opendocument:xmlns:table:1.0" xmlns:number="urn:oasis:names:tc:opendocument:xmlns:datastyle:1.0" xmlns:ooow="http://openoffice.org/2004/writer" xmlns:oooc="http://openoffice.org/2004/calc" xmlns:css3t="http://www.w3.org/TR/css3-text/" xmlns:of="urn:oasis:names:tc:opendocument:xmlns:of:1.2" xmlns:tableooo="http://openoffice.org/2009/table" xmlns:calcext="urn:org:documentfoundation:names:experimental:calc:xmlns:calcext:1.0" xmlns:drawooo="http://openoffice.org/2010/draw" xmlns:xhtml="http://www.w3.org/1999/xhtml" xmlns:loext="urn:org:documentfoundation:names:experimental:office:xmlns:loext:1.0" xmlns:grddl="http://www.w3.org/2003/g/data-view#" xmlns:field="urn:openoffice:names:experimental:ooo-ms-interop:xmlns:field:1.0" xmlns:script="urn:oasis:names:tc:opendocument:xmlns:script:1.0" xmlns:dom="http://www.w3.org/2001/xml-events" xmlns:chartooo="http://openoffice.org/2010/chart" office:version="1.4">
   <office:styles/>
 </office:document-styles>
 </file>
 
 <file path=Object 9/content.xml><?xml version="1.0" encoding="utf-8"?>
-<office:document-content xmlns:office="urn:oasis:names:tc:opendocument:xmlns:office:1.0" xmlns:ooo="http://openoffice.org/2004/office" xmlns:fo="urn:oasis:names:tc:opendocument:xmlns:xsl-fo-compatible:1.0" xmlns:xlink="http://www.w3.org/1999/xlink" xmlns:dc="http://purl.org/dc/elements/1.1/" xmlns:meta="urn:oasis:names:tc:opendocument:xmlns:meta:1.0" xmlns:style="urn:oasis:names:tc:opendocument:xmlns:style:1.0" xmlns:text="urn:oasis:names:tc:opendocument:xmlns:text:1.0" xmlns:rpt="http://openoffice.org/2005/report" xmlns:draw="urn:oasis:names:tc:opendocument:xmlns:drawing:1.0" xmlns:dr3d="urn:oasis:names:tc:opendocument:xmlns:dr3d:1.0" xmlns:svg="urn:oasis:names:tc:opendocument:xmlns:svg-compatible:1.0" xmlns:chart="urn:oasis:names:tc:opendocument:xmlns:chart:1.0" xmlns:table="urn:oasis:names:tc:opendocument:xmlns:table:1.0" xmlns:number="urn:oasis:names:tc:opendocument:xmlns:datastyle:1.0" xmlns:ooow="http://openoffice.org/2004/writer" xmlns:oooc="http://openoffice.org/2004/calc" xmlns:field="urn:openoffice:names:experimental:ooo-ms-interop:xmlns:field:1.0" xmlns:of="urn:oasis:names:tc:opendocument:xmlns:of:1.2" xmlns:xforms="http://www.w3.org/2002/xforms" xmlns:tableooo="http://openoffice.org/2009/table" xmlns:calcext="urn:org:documentfoundation:names:experimental:calc:xmlns:calcext:1.0" xmlns:drawooo="http://openoffice.org/2010/draw" xmlns:xhtml="http://www.w3.org/1999/xhtml" xmlns:loext="urn:org:documentfoundation:names:experimental:office:xmlns:loext:1.0" xmlns:math="http://www.w3.org/1998/Math/MathML" xmlns:form="urn:oasis:names:tc:opendocument:xmlns:form:1.0" xmlns:script="urn:oasis:names:tc:opendocument:xmlns:script:1.0" xmlns:dom="http://www.w3.org/2001/xml-events" xmlns:formx="urn:openoffice:names:experimental:ooxml-odf-interop:xmlns:form:1.0" xmlns:xsd="http://www.w3.org/2001/XMLSchema" xmlns:xsi="http://www.w3.org/2001/XMLSchema-instance" xmlns:grddl="http://www.w3.org/2003/g/data-view#" xmlns:css3t="http://www.w3.org/TR/css3-text/" xmlns:chartooo="http://openoffice.org/2010/chart" office:version="1.4">
+<office:document-content xmlns:office="urn:oasis:names:tc:opendocument:xmlns:office:1.0" xmlns:ooo="http://openoffice.org/2004/office" xmlns:fo="urn:oasis:names:tc:opendocument:xmlns:xsl-fo-compatible:1.0" xmlns:xlink="http://www.w3.org/1999/xlink" xmlns:dc="http://purl.org/dc/elements/1.1/" xmlns:meta="urn:oasis:names:tc:opendocument:xmlns:meta:1.0" xmlns:style="urn:oasis:names:tc:opendocument:xmlns:style:1.0" xmlns:text="urn:oasis:names:tc:opendocument:xmlns:text:1.0" xmlns:rpt="http://openoffice.org/2005/report" xmlns:draw="urn:oasis:names:tc:opendocument:xmlns:drawing:1.0" xmlns:dr3d="urn:oasis:names:tc:opendocument:xmlns:dr3d:1.0" xmlns:svg="urn:oasis:names:tc:opendocument:xmlns:svg-compatible:1.0" xmlns:chart="urn:oasis:names:tc:opendocument:xmlns:chart:1.0" xmlns:table="urn:oasis:names:tc:opendocument:xmlns:table:1.0" xmlns:number="urn:oasis:names:tc:opendocument:xmlns:datastyle:1.0" xmlns:ooow="http://openoffice.org/2004/writer" xmlns:oooc="http://openoffice.org/2004/calc" xmlns:of="urn:oasis:names:tc:opendocument:xmlns:of:1.2" xmlns:xforms="http://www.w3.org/2002/xforms" xmlns:tableooo="http://openoffice.org/2009/table" xmlns:calcext="urn:org:documentfoundation:names:experimental:calc:xmlns:calcext:1.0" xmlns:drawooo="http://openoffice.org/2010/draw" xmlns:xhtml="http://www.w3.org/1999/xhtml" xmlns:loext="urn:org:documentfoundation:names:experimental:office:xmlns:loext:1.0" xmlns:field="urn:openoffice:names:experimental:ooo-ms-interop:xmlns:field:1.0" xmlns:math="http://www.w3.org/1998/Math/MathML" xmlns:form="urn:oasis:names:tc:opendocument:xmlns:form:1.0" xmlns:script="urn:oasis:names:tc:opendocument:xmlns:script:1.0" xmlns:formx="urn:openoffice:names:experimental:ooxml-odf-interop:xmlns:form:1.0" xmlns:dom="http://www.w3.org/2001/xml-events" xmlns:xsd="http://www.w3.org/2001/XMLSchema" xmlns:xsi="http://www.w3.org/2001/XMLSchema-instance" xmlns:grddl="http://www.w3.org/2003/g/data-view#" xmlns:css3t="http://www.w3.org/TR/css3-text/" xmlns:chartooo="http://openoffice.org/2010/chart" office:version="1.4">
   <office:automatic-styles>
     <number:number-style style:name="N0">
       <number:number number:min-integer-digits="1"/>
     </number:number-style>
-    <number:number-style style:name="N119">
+    <number:number-style style:name="N129">
       <number:number number:decimal-places="1" number:min-decimal-places="1" number:min-integer-digits="1"/>
       <number:text>%</number:text>
     </number:number-style>
@@ -2618,7 +2593,7 @@
       <style:text-properties fo:color="#1b2a30" style:text-position="0% 100%" fo:font-family="'Times New Roman'" fo:font-size="9pt" style:font-size-asian="9pt" style:font-size-complex="9pt"/>
     </style:style>
     <style:style style:name="ch4" style:family="chart">
-      <style:chart-properties chart:include-hidden-cells="false" chart:auto-position="true" chart:auto-size="true" chart:treat-empty-cells="ignore" loext:frequency-type="0" loext:bin-width="0" loext:bin-count="0" chart:data-label-number="value" chart:data-label-text="false" chart:data-label-symbol="false" chart:data-label-series="false"/>
+      <style:chart-properties chart:include-hidden-cells="false" chart:auto-position="true" chart:auto-size="true" chart:treat-empty-cells="ignore" chart:data-label-number="value" chart:data-label-text="false" chart:data-label-symbol="false" chart:data-label-series="false"/>
     </style:style>
     <style:style style:name="ch5" style:family="chart" style:data-style-name="N0">
       <style:chart-properties chart:display-label="true" chart:logarithmic="false" chart:reverse-direction="false" text:line-break="true" loext:try-staggering-first="false" chart:label-arrangement="side-by-side" chart:link-data-style-to-source="false" chart:axis-position="0" chart:axis-label-position="outside-start" chart:tick-mark-position="at-axis"/>
@@ -2630,7 +2605,7 @@
       <style:graphic-properties draw:stroke="none" svg:stroke-width="0.035cm" svg:stroke-color="#b3b3b3"/>
       <style:text-properties fo:color="#5a6b72" style:text-position="0% 100%" fo:font-family="'Times New Roman'" fo:font-size="9pt" style:font-size-asian="9pt" style:font-size-complex="9pt"/>
     </style:style>
-    <style:style style:name="ch7" style:family="chart" style:data-style-name="N119">
+    <style:style style:name="ch7" style:family="chart" style:data-style-name="N129">
       <style:chart-properties chart:link-data-style-to-source="false" chart:data-label-number="value" chart:data-label-text="false" chart:data-label-symbol="false" chart:data-label-series="false" chart:label-position="outside" loext:custom-leader-lines="false">
         <chart:label-separator>
           <text:p>; </text:p>
@@ -2639,7 +2614,7 @@
       <style:graphic-properties draw:stroke="none" draw:fill-color="#5fa8d3" fo:wrap-option="wrap"/>
       <style:text-properties fo:color="#1b2a30" style:text-position="0% 100%" fo:font-family="'Times New Roman'" fo:font-size="10pt" style:font-size-asian="10pt" style:font-size-complex="10pt"/>
     </style:style>
-    <style:style style:name="ch8" style:family="chart" style:data-style-name="N119">
+    <style:style style:name="ch8" style:family="chart" style:data-style-name="N129">
       <style:chart-properties chart:link-data-style-to-source="false" chart:data-label-number="value" chart:data-label-text="false" chart:data-label-symbol="false" chart:data-label-series="false" chart:label-position="outside" loext:custom-leader-lines="false">
         <chart:label-separator>
           <text:p>; </text:p>
@@ -2661,14 +2636,14 @@
   <office:body>
     <office:chart>
       <chart:chart svg:width="11.682cm" svg:height="6.475cm" xlink:href="." xlink:type="simple" chart:class="chart:bar" chart:style-name="ch1">
-        <chart:title svg:x="2.361cm" svg:y="0.265cm" chart:style-name="ch2">
+        <chart:title svg:x="2.234cm" svg:y="0.265cm" chart:style-name="ch2">
           <text:p>
             <text:span text:style-name="T1">The echo gap: 6-month outcomes (%)</text:span>
           </text:p>
         </chart:title>
-        <chart:legend chart:legend-position="top" svg:x="4.141cm" svg:y="1.207cm" style:legend-expansion="wide" chart:style-name="ch3"/>
-        <chart:plot-area chart:style-name="ch4" svg:x="0.233cm" svg:y="1.907cm" svg:width="11.216cm" svg:height="4.439cm">
-          <chart:coordinate-region svg:x="0.233cm" svg:y="1.907cm" svg:width="11.216cm" svg:height="3.792cm"/>
+        <chart:legend chart:legend-position="top" svg:x="4.141cm" svg:y="1.255cm" style:legend-expansion="wide" chart:style-name="ch3"/>
+        <chart:plot-area chart:style-name="ch4" svg:x="0.233cm" svg:y="1.924cm" svg:width="11.216cm" svg:height="4.422cm">
+          <chart:coordinate-region svg:x="0.233cm" svg:y="1.924cm" svg:width="11.216cm" svg:height="3.769cm"/>
           <chart:axis chart:dimension="x" chart:name="primary-x" chart:style-name="ch5" chartooo:axis-type="auto">
             <chartooo:date-scale/>
             <chart:categories table:cell-range-address="local-table.$A$2:.$A$3"/>
@@ -2737,19 +2712,19 @@
 <file path=Object 9/meta.xml><?xml version="1.0" encoding="utf-8"?>
 <office:document-meta xmlns:office="urn:oasis:names:tc:opendocument:xmlns:office:1.0" xmlns:ooo="http://openoffice.org/2004/office" xmlns:xlink="http://www.w3.org/1999/xlink" xmlns:dc="http://purl.org/dc/elements/1.1/" xmlns:meta="urn:oasis:names:tc:opendocument:xmlns:meta:1.0" xmlns:grddl="http://www.w3.org/2003/g/data-view#" xmlns:chartooo="http://openoffice.org/2010/chart" office:version="1.4">
   <office:meta>
-    <meta:generator>LibreOffice/26.8.0.3$Windows_X86_64 LibreOffice_project/bce0998afefdbc355585ca324285661a2170ba77</meta:generator>
+    <meta:generator>LibreOffice/26.2.0.3$Windows_X86_64 LibreOffice_project/620$Build-3</meta:generator>
   </office:meta>
 </office:document-meta>
 </file>
 
 <file path=Object 9/styles.xml><?xml version="1.0" encoding="utf-8"?>
-<office:document-styles xmlns:office="urn:oasis:names:tc:opendocument:xmlns:office:1.0" xmlns:ooo="http://openoffice.org/2004/office" xmlns:fo="urn:oasis:names:tc:opendocument:xmlns:xsl-fo-compatible:1.0" xmlns:xlink="http://www.w3.org/1999/xlink" xmlns:style="urn:oasis:names:tc:opendocument:xmlns:style:1.0" xmlns:dc="http://purl.org/dc/elements/1.1/" xmlns:text="urn:oasis:names:tc:opendocument:xmlns:text:1.0" xmlns:rpt="http://openoffice.org/2005/report" xmlns:draw="urn:oasis:names:tc:opendocument:xmlns:drawing:1.0" xmlns:dr3d="urn:oasis:names:tc:opendocument:xmlns:dr3d:1.0" xmlns:svg="urn:oasis:names:tc:opendocument:xmlns:svg-compatible:1.0" xmlns:chart="urn:oasis:names:tc:opendocument:xmlns:chart:1.0" xmlns:table="urn:oasis:names:tc:opendocument:xmlns:table:1.0" xmlns:number="urn:oasis:names:tc:opendocument:xmlns:datastyle:1.0" xmlns:ooow="http://openoffice.org/2004/writer" xmlns:oooc="http://openoffice.org/2004/calc" xmlns:field="urn:openoffice:names:experimental:ooo-ms-interop:xmlns:field:1.0" xmlns:of="urn:oasis:names:tc:opendocument:xmlns:of:1.2" xmlns:tableooo="http://openoffice.org/2009/table" xmlns:calcext="urn:org:documentfoundation:names:experimental:calc:xmlns:calcext:1.0" xmlns:drawooo="http://openoffice.org/2010/draw" xmlns:xhtml="http://www.w3.org/1999/xhtml" xmlns:loext="urn:org:documentfoundation:names:experimental:office:xmlns:loext:1.0" xmlns:script="urn:oasis:names:tc:opendocument:xmlns:script:1.0" xmlns:css3t="http://www.w3.org/TR/css3-text/" xmlns:dom="http://www.w3.org/2001/xml-events" xmlns:grddl="http://www.w3.org/2003/g/data-view#" xmlns:chartooo="http://openoffice.org/2010/chart" office:version="1.4">
+<office:document-styles xmlns:office="urn:oasis:names:tc:opendocument:xmlns:office:1.0" xmlns:ooo="http://openoffice.org/2004/office" xmlns:fo="urn:oasis:names:tc:opendocument:xmlns:xsl-fo-compatible:1.0" xmlns:xlink="http://www.w3.org/1999/xlink" xmlns:style="urn:oasis:names:tc:opendocument:xmlns:style:1.0" xmlns:dc="http://purl.org/dc/elements/1.1/" xmlns:text="urn:oasis:names:tc:opendocument:xmlns:text:1.0" xmlns:rpt="http://openoffice.org/2005/report" xmlns:draw="urn:oasis:names:tc:opendocument:xmlns:drawing:1.0" xmlns:dr3d="urn:oasis:names:tc:opendocument:xmlns:dr3d:1.0" xmlns:svg="urn:oasis:names:tc:opendocument:xmlns:svg-compatible:1.0" xmlns:chart="urn:oasis:names:tc:opendocument:xmlns:chart:1.0" xmlns:table="urn:oasis:names:tc:opendocument:xmlns:table:1.0" xmlns:number="urn:oasis:names:tc:opendocument:xmlns:datastyle:1.0" xmlns:ooow="http://openoffice.org/2004/writer" xmlns:oooc="http://openoffice.org/2004/calc" xmlns:css3t="http://www.w3.org/TR/css3-text/" xmlns:of="urn:oasis:names:tc:opendocument:xmlns:of:1.2" xmlns:tableooo="http://openoffice.org/2009/table" xmlns:calcext="urn:org:documentfoundation:names:experimental:calc:xmlns:calcext:1.0" xmlns:drawooo="http://openoffice.org/2010/draw" xmlns:xhtml="http://www.w3.org/1999/xhtml" xmlns:loext="urn:org:documentfoundation:names:experimental:office:xmlns:loext:1.0" xmlns:grddl="http://www.w3.org/2003/g/data-view#" xmlns:field="urn:openoffice:names:experimental:ooo-ms-interop:xmlns:field:1.0" xmlns:script="urn:oasis:names:tc:opendocument:xmlns:script:1.0" xmlns:dom="http://www.w3.org/2001/xml-events" xmlns:chartooo="http://openoffice.org/2010/chart" office:version="1.4">
   <office:styles/>
 </office:document-styles>
 </file>
 
 <file path=content.xml><?xml version="1.0" encoding="utf-8"?>
-<office:document-content xmlns:office="urn:oasis:names:tc:opendocument:xmlns:office:1.0" xmlns:ooo="http://openoffice.org/2004/office" xmlns:fo="urn:oasis:names:tc:opendocument:xmlns:xsl-fo-compatible:1.0" xmlns:xlink="http://www.w3.org/1999/xlink" xmlns:dc="http://purl.org/dc/elements/1.1/" xmlns:meta="urn:oasis:names:tc:opendocument:xmlns:meta:1.0" xmlns:style="urn:oasis:names:tc:opendocument:xmlns:style:1.0" xmlns:text="urn:oasis:names:tc:opendocument:xmlns:text:1.0" xmlns:rpt="http://openoffice.org/2005/report" xmlns:draw="urn:oasis:names:tc:opendocument:xmlns:drawing:1.0" xmlns:dr3d="urn:oasis:names:tc:opendocument:xmlns:dr3d:1.0" xmlns:svg="urn:oasis:names:tc:opendocument:xmlns:svg-compatible:1.0" xmlns:chart="urn:oasis:names:tc:opendocument:xmlns:chart:1.0" xmlns:table="urn:oasis:names:tc:opendocument:xmlns:table:1.0" xmlns:number="urn:oasis:names:tc:opendocument:xmlns:datastyle:1.0" xmlns:ooow="http://openoffice.org/2004/writer" xmlns:oooc="http://openoffice.org/2004/calc" xmlns:field="urn:openoffice:names:experimental:ooo-ms-interop:xmlns:field:1.0" xmlns:of="urn:oasis:names:tc:opendocument:xmlns:of:1.2" xmlns:xforms="http://www.w3.org/2002/xforms" xmlns:tableooo="http://openoffice.org/2009/table" xmlns:calcext="urn:org:documentfoundation:names:experimental:calc:xmlns:calcext:1.0" xmlns:drawooo="http://openoffice.org/2010/draw" xmlns:xhtml="http://www.w3.org/1999/xhtml" xmlns:loext="urn:org:documentfoundation:names:experimental:office:xmlns:loext:1.0" xmlns:math="http://www.w3.org/1998/Math/MathML" xmlns:form="urn:oasis:names:tc:opendocument:xmlns:form:1.0" xmlns:script="urn:oasis:names:tc:opendocument:xmlns:script:1.0" xmlns:dom="http://www.w3.org/2001/xml-events" xmlns:formx="urn:openoffice:names:experimental:ooxml-odf-interop:xmlns:form:1.0" xmlns:xsd="http://www.w3.org/2001/XMLSchema" xmlns:xsi="http://www.w3.org/2001/XMLSchema-instance" xmlns:grddl="http://www.w3.org/2003/g/data-view#" xmlns:css3t="http://www.w3.org/TR/css3-text/" xmlns:presentation="urn:oasis:names:tc:opendocument:xmlns:presentation:1.0" xmlns:smil="urn:oasis:names:tc:opendocument:xmlns:smil-compatible:1.0" xmlns:anim="urn:oasis:names:tc:opendocument:xmlns:animation:1.0" xmlns:officeooo="http://openoffice.org/2009/office" office:version="1.4">
+<office:document-content xmlns:office="urn:oasis:names:tc:opendocument:xmlns:office:1.0" xmlns:ooo="http://openoffice.org/2004/office" xmlns:fo="urn:oasis:names:tc:opendocument:xmlns:xsl-fo-compatible:1.0" xmlns:xlink="http://www.w3.org/1999/xlink" xmlns:dc="http://purl.org/dc/elements/1.1/" xmlns:meta="urn:oasis:names:tc:opendocument:xmlns:meta:1.0" xmlns:style="urn:oasis:names:tc:opendocument:xmlns:style:1.0" xmlns:text="urn:oasis:names:tc:opendocument:xmlns:text:1.0" xmlns:rpt="http://openoffice.org/2005/report" xmlns:draw="urn:oasis:names:tc:opendocument:xmlns:drawing:1.0" xmlns:dr3d="urn:oasis:names:tc:opendocument:xmlns:dr3d:1.0" xmlns:svg="urn:oasis:names:tc:opendocument:xmlns:svg-compatible:1.0" xmlns:chart="urn:oasis:names:tc:opendocument:xmlns:chart:1.0" xmlns:table="urn:oasis:names:tc:opendocument:xmlns:table:1.0" xmlns:number="urn:oasis:names:tc:opendocument:xmlns:datastyle:1.0" xmlns:ooow="http://openoffice.org/2004/writer" xmlns:oooc="http://openoffice.org/2004/calc" xmlns:of="urn:oasis:names:tc:opendocument:xmlns:of:1.2" xmlns:xforms="http://www.w3.org/2002/xforms" xmlns:tableooo="http://openoffice.org/2009/table" xmlns:calcext="urn:org:documentfoundation:names:experimental:calc:xmlns:calcext:1.0" xmlns:drawooo="http://openoffice.org/2010/draw" xmlns:xhtml="http://www.w3.org/1999/xhtml" xmlns:loext="urn:org:documentfoundation:names:experimental:office:xmlns:loext:1.0" xmlns:field="urn:openoffice:names:experimental:ooo-ms-interop:xmlns:field:1.0" xmlns:math="http://www.w3.org/1998/Math/MathML" xmlns:form="urn:oasis:names:tc:opendocument:xmlns:form:1.0" xmlns:script="urn:oasis:names:tc:opendocument:xmlns:script:1.0" xmlns:formx="urn:openoffice:names:experimental:ooxml-odf-interop:xmlns:form:1.0" xmlns:dom="http://www.w3.org/2001/xml-events" xmlns:xsd="http://www.w3.org/2001/XMLSchema" xmlns:xsi="http://www.w3.org/2001/XMLSchema-instance" xmlns:grddl="http://www.w3.org/2003/g/data-view#" xmlns:css3t="http://www.w3.org/TR/css3-text/" xmlns:presentation="urn:oasis:names:tc:opendocument:xmlns:presentation:1.0" xmlns:smil="urn:oasis:names:tc:opendocument:xmlns:smil-compatible:1.0" xmlns:anim="urn:oasis:names:tc:opendocument:xmlns:animation:1.0" xmlns:officeooo="http://openoffice.org/2009/office" office:version="1.4">
   <office:scripts/>
   <office:font-face-decls>
     <style:font-face style:name="+mn-ea" svg:font-family="+mn-ea"/>
@@ -2799,32 +2774,37 @@
       <style:drawing-page-properties presentation:background-visible="true" presentation:background-objects-visible="true" draw:fill="bitmap" draw:fill-image-name="msFillBitmap_20_18" style:repeat="stretch" presentation:display-footer="false" presentation:display-page-number="false" presentation:display-date-time="false"/>
     </style:style>
     <style:style style:name="dp12" style:family="drawing-page">
-      <style:drawing-page-properties presentation:background-visible="true" presentation:background-objects-visible="true" presentation:display-footer="false" presentation:display-page-number="false" presentation:display-date-time="false"/>
+      <style:drawing-page-properties presentation:display-header="true" presentation:display-footer="false" presentation:display-page-number="false" presentation:display-date-time="false"/>
     </style:style>
     <style:style style:name="gr1" style:family="graphic" style:parent-style-name="standard">
       <style:graphic-properties draw:stroke="none" svg:stroke-width="0cm" draw:fill="none" loext:fill-use-slide-background="false" draw:textarea-horizontal-align="justify" draw:textarea-vertical-align="middle" draw:auto-grow-height="false" draw:fit-to-size="false" style:shrink-to-fit="false" fo:min-height="0cm" fo:min-width="0cm" fo:padding-top="0cm" fo:padding-bottom="0cm" fo:padding-left="0cm" fo:padding-right="0cm" fo:wrap-option="wrap" loext:decorative="false"/>
     </style:style>
     <style:style style:name="gr2" style:family="graphic" style:parent-style-name="standard" style:list-style-name="L2">
-      <style:graphic-properties draw:stroke="none" svg:stroke-width="0cm" draw:fill="none" loext:fill-use-slide-background="false" draw:textarea-horizontal-align="justify" draw:textarea-vertical-align="top" draw:auto-grow-height="false" draw:fit-to-size="false" style:shrink-to-fit="false" fo:min-height="0cm" fo:min-width="0cm" fo:padding-top="0cm" fo:padding-bottom="0cm" fo:padding-left="0cm" fo:padding-right="0cm" fo:wrap-option="wrap" loext:decorative="false"/>
+      <style:graphic-properties draw:stroke="none" svg:stroke-width="0cm" draw:fill="none" loext:fill-use-slide-background="false" draw:textarea-horizontal-align="justify" draw:textarea-vertical-align="top" draw:auto-grow-height="false" draw:fit-to-size="false" style:shrink-to-fit="false" fo:min-height="0cm" fo:min-width="0cm" fo:padding-top="0cm" fo:padding-bottom="0cm" fo:padding-left="0cm" fo:padding-right="0cm" fo:wrap-option="wrap" style:writing-mode="lr-tb" loext:decorative="false"/>
       <style:paragraph-properties style:writing-mode="lr-tb"/>
     </style:style>
     <style:style style:name="gr3" style:family="graphic" style:parent-style-name="standard" style:list-style-name="L3">
-      <style:graphic-properties draw:stroke="none" svg:stroke-width="0cm" draw:fill="none" loext:fill-use-slide-background="false" draw:textarea-horizontal-align="justify" draw:textarea-vertical-align="middle" draw:auto-grow-height="false" draw:fit-to-size="false" style:shrink-to-fit="false" fo:min-height="1.268cm" fo:min-width="12.698cm" fo:padding-top="0cm" fo:padding-bottom="0cm" fo:padding-left="0cm" fo:padding-right="0cm" fo:wrap-option="wrap" loext:decorative="false"/>
+      <style:graphic-properties draw:stroke="none" svg:stroke-width="0cm" draw:fill="none" loext:fill-use-slide-background="false" draw:textarea-horizontal-align="justify" draw:textarea-vertical-align="middle" draw:auto-grow-height="false" draw:fit-to-size="false" style:shrink-to-fit="false" fo:min-height="1.268cm" fo:min-width="12.698cm" fo:padding-top="0cm" fo:padding-bottom="0cm" fo:padding-left="0cm" fo:padding-right="0cm" fo:wrap-option="wrap" style:writing-mode="lr-tb" loext:decorative="false"/>
       <style:paragraph-properties style:writing-mode="lr-tb"/>
     </style:style>
     <style:style style:name="gr4" style:family="graphic" style:parent-style-name="standard" style:list-style-name="L4">
-      <style:graphic-properties draw:stroke="none" svg:stroke-width="0cm" draw:fill="none" loext:fill-use-slide-background="false" draw:textarea-horizontal-align="justify" draw:textarea-vertical-align="middle" draw:auto-grow-height="false" draw:fit-to-size="false" style:shrink-to-fit="false" fo:min-height="0cm" fo:min-width="0cm" fo:padding-top="0cm" fo:padding-bottom="0cm" fo:padding-left="0cm" fo:padding-right="0cm" fo:wrap-option="wrap" loext:decorative="false"/>
+      <style:graphic-properties draw:stroke="none" svg:stroke-width="0cm" draw:fill="none" loext:fill-use-slide-background="false" draw:textarea-horizontal-align="justify" draw:textarea-vertical-align="middle" draw:auto-grow-height="false" draw:fit-to-size="false" style:shrink-to-fit="false" fo:min-height="0cm" fo:min-width="0cm" fo:padding-top="0cm" fo:padding-bottom="0cm" fo:padding-left="0cm" fo:padding-right="0cm" fo:wrap-option="wrap" style:writing-mode="lr-tb" loext:decorative="false"/>
       <style:paragraph-properties style:writing-mode="lr-tb"/>
     </style:style>
     <style:style style:name="gr5" style:family="graphic" style:parent-style-name="standard">
-      <style:graphic-properties draw:stroke="solid" svg:stroke-width="0.053cm" svg:stroke-color="#4cc3b0" draw:stroke-linejoin="round" draw:fill="none" loext:fill-use-slide-background="false" draw:textarea-horizontal-align="center" draw:textarea-vertical-align="top" draw:auto-grow-height="false" draw:fit-to-size="false" style:shrink-to-fit="false" fo:padding-top="-0.124cm" fo:padding-bottom="-0.124cm" fo:padding-left="0.25cm" fo:padding-right="0.25cm" fo:wrap-option="wrap" loext:decorative="false"/>
+      <style:graphic-properties draw:stroke="solid" svg:stroke-width="0.053cm" svg:stroke-color="#4cc3b0" draw:stroke-linejoin="round" draw:fill="none" loext:fill-use-slide-background="false" draw:textarea-horizontal-align="center" draw:textarea-vertical-align="top" draw:auto-grow-height="false" draw:fit-to-size="false" style:shrink-to-fit="false" fo:padding-top="-0.124cm" fo:padding-bottom="-0.124cm" fo:padding-left="0.25cm" fo:padding-right="0.25cm" fo:wrap-option="wrap" loext:decorative="false">
+        <loext:stroke-complex-color loext:theme-type="accent1" loext:color-type="theme">
+          <loext:transformation loext:type="lummod" loext:value="7500"/>
+          <loext:transformation loext:type="lumoff" loext:value="0"/>
+        </loext:stroke-complex-color>
+      </style:graphic-properties>
     </style:style>
     <style:style style:name="gr6" style:family="graphic" style:parent-style-name="standard" style:list-style-name="L2">
-      <style:graphic-properties draw:stroke="none" svg:stroke-width="0cm" draw:fill="none" loext:fill-use-slide-background="false" draw:textarea-horizontal-align="justify" draw:textarea-vertical-align="middle" draw:auto-grow-height="false" draw:fit-to-size="false" style:shrink-to-fit="false" fo:min-height="0cm" fo:min-width="0cm" fo:padding-top="0cm" fo:padding-bottom="0cm" fo:padding-left="0cm" fo:padding-right="0cm" fo:wrap-option="wrap" loext:decorative="false"/>
+      <style:graphic-properties draw:stroke="none" svg:stroke-width="0cm" draw:fill="none" loext:fill-use-slide-background="false" draw:textarea-horizontal-align="justify" draw:textarea-vertical-align="middle" draw:auto-grow-height="false" draw:fit-to-size="false" style:shrink-to-fit="false" fo:min-height="0cm" fo:min-width="0cm" fo:padding-top="0cm" fo:padding-bottom="0cm" fo:padding-left="0cm" fo:padding-right="0cm" fo:wrap-option="wrap" style:writing-mode="lr-tb" loext:decorative="false"/>
       <style:paragraph-properties style:writing-mode="lr-tb"/>
     </style:style>
     <style:style style:name="gr7" style:family="graphic" style:parent-style-name="standard" style:list-style-name="L5">
-      <style:graphic-properties draw:stroke="none" svg:stroke-width="0cm" draw:fill="none" loext:fill-use-slide-background="false" draw:textarea-horizontal-align="justify" draw:textarea-vertical-align="middle" draw:auto-grow-height="false" draw:fit-to-size="false" style:shrink-to-fit="false" fo:min-height="0cm" fo:min-width="0cm" fo:padding-top="0cm" fo:padding-bottom="0cm" fo:padding-left="0cm" fo:padding-right="0cm" fo:wrap-option="wrap" loext:decorative="false"/>
+      <style:graphic-properties draw:stroke="none" svg:stroke-width="0cm" draw:fill="none" loext:fill-use-slide-background="false" draw:textarea-horizontal-align="justify" draw:textarea-vertical-align="middle" draw:auto-grow-height="false" draw:fit-to-size="false" style:shrink-to-fit="false" fo:min-height="0cm" fo:min-width="0cm" fo:padding-top="0cm" fo:padding-bottom="0cm" fo:padding-left="0cm" fo:padding-right="0cm" fo:wrap-option="wrap" style:writing-mode="lr-tb" loext:decorative="false"/>
       <style:paragraph-properties style:writing-mode="lr-tb"/>
     </style:style>
     <style:style style:name="gr8" style:family="graphic" style:parent-style-name="Object_20_with_20_no_20_fill_20_and_20_no_20_line">
@@ -2837,607 +2817,763 @@
       <style:graphic-properties style:protect="size" loext:decorative="false"/>
     </style:style>
     <style:style style:name="gr11" style:family="graphic" style:parent-style-name="standard">
-      <style:graphic-properties draw:stroke="solid" svg:stroke-width="0.035cm" svg:stroke-color="#e07a5f" draw:stroke-linejoin="round" draw:fill="solid" draw:fill-color="#e07a5f" draw:textarea-horizontal-align="justify" draw:textarea-vertical-align="top" draw:auto-grow-height="false" draw:fit-to-size="false" style:shrink-to-fit="false" fo:min-height="0cm" fo:min-width="0cm" fo:padding-top="0.125cm" fo:padding-bottom="0.125cm" fo:padding-left="0.25cm" fo:padding-right="0.25cm" fo:wrap-option="wrap" loext:decorative="false"/>
+      <style:graphic-properties draw:stroke="solid" svg:stroke-width="0.035cm" svg:stroke-color="#e07a5f" draw:stroke-linejoin="round" draw:fill="solid" draw:fill-color="#e07a5f" draw:textarea-horizontal-align="justify" draw:textarea-vertical-align="top" draw:auto-grow-height="false" draw:fit-to-size="false" style:shrink-to-fit="false" fo:min-height="0cm" fo:min-width="0cm" fo:padding-top="0.125cm" fo:padding-bottom="0.125cm" fo:padding-left="0.25cm" fo:padding-right="0.25cm" fo:wrap-option="wrap" loext:decorative="false">
+        <loext:stroke-complex-color loext:theme-type="accent1" loext:color-type="theme">
+          <loext:transformation loext:type="lummod" loext:value="7500"/>
+          <loext:transformation loext:type="lumoff" loext:value="0"/>
+        </loext:stroke-complex-color>
+        <loext:fill-complex-color loext:theme-type="accent1" loext:color-type="theme"/>
+      </style:graphic-properties>
     </style:style>
     <style:style style:name="gr12" style:family="graphic" style:parent-style-name="standard" style:list-style-name="L2">
-      <style:graphic-properties draw:stroke="none" svg:stroke-width="0cm" draw:fill="none" loext:fill-use-slide-background="false" draw:textarea-horizontal-align="justify" draw:textarea-vertical-align="middle" draw:auto-grow-height="false" draw:fit-to-size="false" style:shrink-to-fit="false" fo:min-height="0cm" fo:min-width="0cm" fo:padding-top="0cm" fo:padding-bottom="0cm" fo:padding-left="0cm" fo:padding-right="0cm" fo:wrap-option="wrap" loext:decorative="false"/>
+      <style:graphic-properties draw:stroke="none" svg:stroke-width="0cm" draw:fill="none" loext:fill-use-slide-background="false" draw:textarea-horizontal-align="justify" draw:textarea-vertical-align="middle" draw:auto-grow-height="false" draw:fit-to-size="false" style:shrink-to-fit="false" fo:min-height="0cm" fo:min-width="0cm" fo:padding-top="0cm" fo:padding-bottom="0cm" fo:padding-left="0cm" fo:padding-right="0cm" fo:wrap-option="wrap" style:writing-mode="lr-tb" loext:decorative="false"/>
       <style:paragraph-properties style:writing-mode="lr-tb"/>
     </style:style>
     <style:style style:name="gr13" style:family="graphic" style:parent-style-name="standard" style:list-style-name="L7">
-      <style:graphic-properties draw:stroke="none" svg:stroke-width="0cm" draw:fill="none" loext:fill-use-slide-background="false" draw:textarea-horizontal-align="justify" draw:textarea-vertical-align="middle" draw:auto-grow-height="false" draw:fit-to-size="false" style:shrink-to-fit="false" fo:min-height="2.053cm" fo:min-width="22.858cm" fo:padding-top="0cm" fo:padding-bottom="0cm" fo:padding-left="0cm" fo:padding-right="0cm" fo:wrap-option="wrap" loext:decorative="false"/>
+      <style:graphic-properties draw:stroke="none" svg:stroke-width="0cm" draw:fill="none" loext:fill-use-slide-background="false" draw:textarea-horizontal-align="justify" draw:textarea-vertical-align="middle" draw:auto-grow-height="false" draw:fit-to-size="false" style:shrink-to-fit="false" fo:min-height="2.053cm" fo:min-width="22.858cm" fo:padding-top="0cm" fo:padding-bottom="0cm" fo:padding-left="0cm" fo:padding-right="0cm" fo:wrap-option="wrap" style:writing-mode="lr-tb" loext:decorative="false"/>
       <style:paragraph-properties style:writing-mode="lr-tb"/>
     </style:style>
     <style:style style:name="gr14" style:family="graphic" style:parent-style-name="standard">
-      <style:graphic-properties draw:stroke="solid" svg:stroke-width="0.026cm" svg:stroke-color="#e07a5f" draw:stroke-linejoin="round" draw:fill="solid" draw:fill-color="#e07a5f" draw:textarea-horizontal-align="justify" draw:textarea-vertical-align="top" draw:auto-grow-height="false" draw:fit-to-size="false" style:shrink-to-fit="false" fo:min-height="0cm" fo:min-width="0cm" fo:padding-top="0.125cm" fo:padding-bottom="0.125cm" fo:padding-left="0.25cm" fo:padding-right="0.25cm" fo:wrap-option="wrap" loext:decorative="false"/>
+      <style:graphic-properties draw:stroke="solid" svg:stroke-width="0.026cm" svg:stroke-color="#e07a5f" draw:stroke-linejoin="round" draw:fill="solid" draw:fill-color="#e07a5f" draw:textarea-horizontal-align="justify" draw:textarea-vertical-align="top" draw:auto-grow-height="false" draw:fit-to-size="false" style:shrink-to-fit="false" fo:min-height="0cm" fo:min-width="0cm" fo:padding-top="0.125cm" fo:padding-bottom="0.125cm" fo:padding-left="0.25cm" fo:padding-right="0.25cm" fo:wrap-option="wrap" loext:decorative="false">
+        <loext:stroke-complex-color loext:theme-type="accent1" loext:color-type="theme">
+          <loext:transformation loext:type="lummod" loext:value="7500"/>
+          <loext:transformation loext:type="lumoff" loext:value="0"/>
+        </loext:stroke-complex-color>
+        <loext:fill-complex-color loext:theme-type="accent1" loext:color-type="theme"/>
+      </style:graphic-properties>
     </style:style>
     <style:style style:name="gr15" style:family="graphic" style:parent-style-name="standard" style:list-style-name="L2">
-      <style:graphic-properties draw:stroke="none" svg:stroke-width="0cm" draw:fill="none" loext:fill-use-slide-background="false" draw:textarea-horizontal-align="justify" draw:textarea-vertical-align="middle" draw:auto-grow-height="false" draw:fit-to-size="false" style:shrink-to-fit="false" fo:min-height="0cm" fo:min-width="0cm" fo:padding-top="0cm" fo:padding-bottom="0cm" fo:padding-left="0cm" fo:padding-right="0cm" fo:wrap-option="wrap" loext:decorative="false"/>
+      <style:graphic-properties draw:stroke="none" svg:stroke-width="0cm" draw:fill="none" loext:fill-use-slide-background="false" draw:textarea-horizontal-align="justify" draw:textarea-vertical-align="middle" draw:auto-grow-height="false" draw:fit-to-size="false" style:shrink-to-fit="false" fo:min-height="0cm" fo:min-width="0cm" fo:padding-top="0cm" fo:padding-bottom="0cm" fo:padding-left="0cm" fo:padding-right="0cm" fo:wrap-option="wrap" style:writing-mode="lr-tb" loext:decorative="false"/>
       <style:paragraph-properties style:writing-mode="lr-tb"/>
     </style:style>
     <style:style style:name="gr16" style:family="graphic" style:parent-style-name="standard">
-      <style:graphic-properties draw:stroke="solid" svg:stroke-width="0.026cm" svg:stroke-color="#c3d0d4" draw:stroke-linejoin="round" draw:fill="solid" draw:fill-color="#ffffff" draw:textarea-horizontal-align="justify" draw:textarea-vertical-align="top" draw:auto-grow-height="false" draw:fit-to-size="false" style:shrink-to-fit="false" fo:min-height="0cm" fo:min-width="0cm" fo:padding-top="0.125cm" fo:padding-bottom="0.125cm" fo:padding-left="0.25cm" fo:padding-right="0.25cm" fo:wrap-option="wrap" loext:decorative="false"/>
+      <style:graphic-properties draw:stroke="solid" svg:stroke-width="0.026cm" svg:stroke-color="#c3d0d4" draw:stroke-linejoin="round" draw:fill="solid" draw:fill-color="#ffffff" draw:textarea-horizontal-align="justify" draw:textarea-vertical-align="top" draw:auto-grow-height="false" draw:fit-to-size="false" style:shrink-to-fit="false" fo:min-height="0cm" fo:min-width="0cm" fo:padding-top="0.125cm" fo:padding-bottom="0.125cm" fo:padding-left="0.25cm" fo:padding-right="0.25cm" fo:wrap-option="wrap" loext:decorative="false">
+        <loext:stroke-complex-color loext:theme-type="accent1" loext:color-type="theme">
+          <loext:transformation loext:type="lummod" loext:value="7500"/>
+          <loext:transformation loext:type="lumoff" loext:value="0"/>
+        </loext:stroke-complex-color>
+        <loext:fill-complex-color loext:theme-type="accent1" loext:color-type="theme"/>
+      </style:graphic-properties>
     </style:style>
     <style:style style:name="gr17" style:family="graphic" style:parent-style-name="standard" style:list-style-name="L8">
-      <style:graphic-properties draw:stroke="none" svg:stroke-width="0cm" draw:fill="none" loext:fill-use-slide-background="false" draw:textarea-horizontal-align="justify" draw:textarea-vertical-align="middle" draw:auto-grow-height="false" draw:fit-to-size="false" style:shrink-to-fit="false" fo:min-height="0cm" fo:min-width="0cm" fo:padding-top="0cm" fo:padding-bottom="0cm" fo:padding-left="0cm" fo:padding-right="0cm" fo:wrap-option="wrap" loext:decorative="false"/>
+      <style:graphic-properties draw:stroke="none" svg:stroke-width="0cm" draw:fill="none" loext:fill-use-slide-background="false" draw:textarea-horizontal-align="justify" draw:textarea-vertical-align="middle" draw:auto-grow-height="false" draw:fit-to-size="false" style:shrink-to-fit="false" fo:min-height="0cm" fo:min-width="0cm" fo:padding-top="0cm" fo:padding-bottom="0cm" fo:padding-left="0cm" fo:padding-right="0cm" fo:wrap-option="wrap" style:writing-mode="lr-tb" loext:decorative="false"/>
       <style:paragraph-properties style:writing-mode="lr-tb"/>
     </style:style>
     <style:style style:name="gr18" style:family="graphic" style:parent-style-name="standard" style:list-style-name="L8">
-      <style:graphic-properties draw:stroke="none" svg:stroke-width="0cm" draw:fill="none" loext:fill-use-slide-background="false" draw:textarea-horizontal-align="justify" draw:textarea-vertical-align="middle" draw:auto-grow-height="false" draw:fit-to-size="false" style:shrink-to-fit="false" fo:min-height="0cm" fo:min-width="0cm" fo:padding-top="0cm" fo:padding-bottom="0cm" fo:padding-left="0cm" fo:padding-right="0cm" fo:wrap-option="wrap" loext:decorative="false"/>
+      <style:graphic-properties draw:stroke="none" svg:stroke-width="0cm" draw:fill="none" loext:fill-use-slide-background="false" draw:textarea-horizontal-align="justify" draw:textarea-vertical-align="middle" draw:auto-grow-height="false" draw:fit-to-size="false" style:shrink-to-fit="false" fo:min-height="0cm" fo:min-width="0cm" fo:padding-top="0cm" fo:padding-bottom="0cm" fo:padding-left="0cm" fo:padding-right="0cm" fo:wrap-option="wrap" style:writing-mode="lr-tb" loext:decorative="false"/>
       <style:paragraph-properties style:writing-mode="lr-tb"/>
     </style:style>
     <style:style style:name="gr19" style:family="graphic" style:parent-style-name="standard" style:list-style-name="L8">
-      <style:graphic-properties draw:stroke="none" svg:stroke-width="0cm" draw:fill="none" loext:fill-use-slide-background="false" draw:textarea-horizontal-align="justify" draw:textarea-vertical-align="middle" draw:auto-grow-height="false" draw:fit-to-size="false" style:shrink-to-fit="false" fo:min-height="0cm" fo:min-width="0cm" fo:padding-top="0cm" fo:padding-bottom="0cm" fo:padding-left="0cm" fo:padding-right="0cm" fo:wrap-option="wrap" loext:decorative="false"/>
+      <style:graphic-properties draw:stroke="none" svg:stroke-width="0cm" draw:fill="none" loext:fill-use-slide-background="false" draw:textarea-horizontal-align="justify" draw:textarea-vertical-align="middle" draw:auto-grow-height="false" draw:fit-to-size="false" style:shrink-to-fit="false" fo:min-height="0cm" fo:min-width="0cm" fo:padding-top="0cm" fo:padding-bottom="0cm" fo:padding-left="0cm" fo:padding-right="0cm" fo:wrap-option="wrap" style:writing-mode="lr-tb" loext:decorative="false"/>
       <style:paragraph-properties style:writing-mode="lr-tb"/>
     </style:style>
     <style:style style:name="gr20" style:family="graphic" style:parent-style-name="standard">
-      <style:graphic-properties draw:stroke="solid" svg:stroke-width="0.026cm" svg:stroke-color="#d6e3e6" draw:stroke-linejoin="round" draw:fill="solid" draw:fill-color="#ffffff" draw:textarea-horizontal-align="justify" draw:textarea-vertical-align="top" draw:auto-grow-height="false" draw:fit-to-size="false" style:shrink-to-fit="false" fo:min-height="0cm" fo:min-width="0cm" fo:padding-top="0.125cm" fo:padding-bottom="0.125cm" fo:padding-left="0.25cm" fo:padding-right="0.25cm" fo:wrap-option="wrap" draw:shadow="visible" draw:shadow-offset-x="0cm" draw:shadow-offset-y="0.071cm" draw:shadow-color="#0a2630" draw:shadow-opacity="8%" loext:shadow-blur="0.212cm" loext:decorative="false"/>
+      <style:graphic-properties draw:stroke="solid" svg:stroke-width="0.026cm" svg:stroke-color="#d6e3e6" draw:stroke-linejoin="round" draw:fill="solid" draw:fill-color="#ffffff" draw:textarea-horizontal-align="justify" draw:textarea-vertical-align="top" draw:auto-grow-height="false" draw:fit-to-size="false" style:shrink-to-fit="false" fo:min-height="0cm" fo:min-width="0cm" fo:padding-top="0.125cm" fo:padding-bottom="0.125cm" fo:padding-left="0.25cm" fo:padding-right="0.25cm" fo:wrap-option="wrap" draw:shadow="visible" draw:shadow-offset-x="0cm" draw:shadow-offset-y="0.071cm" draw:shadow-color="#0a2630" draw:shadow-opacity="8%" loext:shadow-blur="0.212cm" loext:decorative="false">
+        <loext:stroke-complex-color loext:theme-type="accent1" loext:color-type="theme">
+          <loext:transformation loext:type="lummod" loext:value="7500"/>
+          <loext:transformation loext:type="lumoff" loext:value="0"/>
+        </loext:stroke-complex-color>
+        <loext:fill-complex-color loext:theme-type="accent1" loext:color-type="theme"/>
+      </style:graphic-properties>
     </style:style>
     <style:style style:name="gr21" style:family="graphic" style:parent-style-name="standard">
-      <style:graphic-properties draw:stroke="solid" svg:stroke-width="0.035cm" svg:stroke-color="#3d7ea6" draw:stroke-linejoin="round" draw:fill="solid" draw:fill-color="#3d7ea6" draw:textarea-horizontal-align="justify" draw:textarea-vertical-align="top" draw:auto-grow-height="false" draw:fit-to-size="false" style:shrink-to-fit="false" fo:min-height="0cm" fo:min-width="0cm" fo:padding-top="0.125cm" fo:padding-bottom="0.125cm" fo:padding-left="0.177cm" fo:padding-right="0.177cm" fo:wrap-option="wrap" loext:decorative="false"/>
+      <style:graphic-properties draw:stroke="solid" svg:stroke-width="0.035cm" svg:stroke-color="#3d7ea6" draw:stroke-linejoin="round" draw:fill="solid" draw:fill-color="#3d7ea6" draw:textarea-horizontal-align="justify" draw:textarea-vertical-align="top" draw:auto-grow-height="false" draw:fit-to-size="false" style:shrink-to-fit="false" fo:min-height="0cm" fo:min-width="0cm" fo:padding-top="0.125cm" fo:padding-bottom="0.125cm" fo:padding-left="0.177cm" fo:padding-right="0.177cm" fo:wrap-option="wrap" loext:decorative="false">
+        <loext:stroke-complex-color loext:theme-type="accent1" loext:color-type="theme">
+          <loext:transformation loext:type="lummod" loext:value="7500"/>
+          <loext:transformation loext:type="lumoff" loext:value="0"/>
+        </loext:stroke-complex-color>
+        <loext:fill-complex-color loext:theme-type="accent1" loext:color-type="theme"/>
+      </style:graphic-properties>
     </style:style>
     <style:style style:name="gr22" style:family="graphic" style:parent-style-name="standard" style:list-style-name="L9">
-      <style:graphic-properties draw:stroke="none" svg:stroke-width="0cm" draw:fill="none" loext:fill-use-slide-background="false" draw:textarea-horizontal-align="justify" draw:textarea-vertical-align="middle" draw:auto-grow-height="false" draw:fit-to-size="false" style:shrink-to-fit="false" fo:min-height="0cm" fo:min-width="0cm" fo:padding-top="0cm" fo:padding-bottom="0cm" fo:padding-left="0cm" fo:padding-right="0cm" fo:wrap-option="wrap" loext:decorative="false"/>
+      <style:graphic-properties draw:stroke="none" svg:stroke-width="0cm" draw:fill="none" loext:fill-use-slide-background="false" draw:textarea-horizontal-align="justify" draw:textarea-vertical-align="middle" draw:auto-grow-height="false" draw:fit-to-size="false" style:shrink-to-fit="false" fo:min-height="0cm" fo:min-width="0cm" fo:padding-top="0cm" fo:padding-bottom="0cm" fo:padding-left="0cm" fo:padding-right="0cm" fo:wrap-option="wrap" style:writing-mode="lr-tb" loext:decorative="false"/>
       <style:paragraph-properties style:writing-mode="lr-tb"/>
     </style:style>
     <style:style style:name="gr23" style:family="graphic" style:parent-style-name="standard" style:list-style-name="L7">
-      <style:graphic-properties draw:stroke="none" svg:stroke-width="0cm" draw:fill="none" loext:fill-use-slide-background="false" draw:textarea-horizontal-align="justify" draw:textarea-vertical-align="middle" draw:auto-grow-height="false" draw:fit-to-size="false" style:shrink-to-fit="false" fo:min-height="0cm" fo:min-width="0cm" fo:padding-top="0cm" fo:padding-bottom="0cm" fo:padding-left="0cm" fo:padding-right="0cm" fo:wrap-option="wrap" loext:decorative="false"/>
+      <style:graphic-properties draw:stroke="none" svg:stroke-width="0cm" draw:fill="none" loext:fill-use-slide-background="false" draw:textarea-horizontal-align="justify" draw:textarea-vertical-align="middle" draw:auto-grow-height="false" draw:fit-to-size="false" style:shrink-to-fit="false" fo:min-height="0cm" fo:min-width="0cm" fo:padding-top="0cm" fo:padding-bottom="0cm" fo:padding-left="0cm" fo:padding-right="0cm" fo:wrap-option="wrap" style:writing-mode="lr-tb" loext:decorative="false"/>
       <style:paragraph-properties style:writing-mode="lr-tb"/>
     </style:style>
     <style:style style:name="gr24" style:family="graphic" style:parent-style-name="standard" style:list-style-name="L9">
-      <style:graphic-properties draw:stroke="none" svg:stroke-width="0cm" draw:fill="none" loext:fill-use-slide-background="false" draw:textarea-horizontal-align="justify" draw:textarea-vertical-align="middle" draw:auto-grow-height="false" draw:fit-to-size="false" style:shrink-to-fit="false" fo:min-height="0cm" fo:min-width="0cm" fo:padding-top="0cm" fo:padding-bottom="0cm" fo:padding-left="0cm" fo:padding-right="0cm" fo:wrap-option="wrap" loext:decorative="false"/>
+      <style:graphic-properties draw:stroke="none" svg:stroke-width="0cm" draw:fill="none" loext:fill-use-slide-background="false" draw:textarea-horizontal-align="justify" draw:textarea-vertical-align="middle" draw:auto-grow-height="false" draw:fit-to-size="false" style:shrink-to-fit="false" fo:min-height="0cm" fo:min-width="0cm" fo:padding-top="0cm" fo:padding-bottom="0cm" fo:padding-left="0cm" fo:padding-right="0cm" fo:wrap-option="wrap" style:writing-mode="lr-tb" loext:decorative="false"/>
       <style:paragraph-properties style:writing-mode="lr-tb"/>
     </style:style>
     <style:style style:name="gr25" style:family="graphic" style:parent-style-name="standard">
-      <style:graphic-properties draw:stroke="solid" svg:stroke-width="0.035cm" svg:stroke-color="#5fa8d3" draw:stroke-linejoin="round" draw:fill="solid" draw:fill-color="#5fa8d3" draw:textarea-horizontal-align="justify" draw:textarea-vertical-align="top" draw:auto-grow-height="false" draw:fit-to-size="false" style:shrink-to-fit="false" fo:min-height="0cm" fo:min-width="0cm" fo:padding-top="0.125cm" fo:padding-bottom="0.125cm" fo:padding-left="0.177cm" fo:padding-right="0.177cm" fo:wrap-option="wrap" loext:decorative="false"/>
+      <style:graphic-properties draw:stroke="solid" svg:stroke-width="0.035cm" svg:stroke-color="#5fa8d3" draw:stroke-linejoin="round" draw:fill="solid" draw:fill-color="#5fa8d3" draw:textarea-horizontal-align="justify" draw:textarea-vertical-align="top" draw:auto-grow-height="false" draw:fit-to-size="false" style:shrink-to-fit="false" fo:min-height="0cm" fo:min-width="0cm" fo:padding-top="0.125cm" fo:padding-bottom="0.125cm" fo:padding-left="0.177cm" fo:padding-right="0.177cm" fo:wrap-option="wrap" loext:decorative="false">
+        <loext:stroke-complex-color loext:theme-type="accent1" loext:color-type="theme">
+          <loext:transformation loext:type="lummod" loext:value="7500"/>
+          <loext:transformation loext:type="lumoff" loext:value="0"/>
+        </loext:stroke-complex-color>
+        <loext:fill-complex-color loext:theme-type="accent1" loext:color-type="theme"/>
+      </style:graphic-properties>
     </style:style>
     <style:style style:name="gr26" style:family="graphic" style:parent-style-name="standard" style:list-style-name="L9">
-      <style:graphic-properties draw:stroke="none" svg:stroke-width="0cm" draw:fill="none" loext:fill-use-slide-background="false" draw:textarea-horizontal-align="justify" draw:textarea-vertical-align="middle" draw:auto-grow-height="false" draw:fit-to-size="false" style:shrink-to-fit="false" fo:min-height="0cm" fo:min-width="0cm" fo:padding-top="0cm" fo:padding-bottom="0cm" fo:padding-left="0cm" fo:padding-right="0cm" fo:wrap-option="wrap" loext:decorative="false"/>
+      <style:graphic-properties draw:stroke="none" svg:stroke-width="0cm" draw:fill="none" loext:fill-use-slide-background="false" draw:textarea-horizontal-align="justify" draw:textarea-vertical-align="middle" draw:auto-grow-height="false" draw:fit-to-size="false" style:shrink-to-fit="false" fo:min-height="0cm" fo:min-width="0cm" fo:padding-top="0cm" fo:padding-bottom="0cm" fo:padding-left="0cm" fo:padding-right="0cm" fo:wrap-option="wrap" style:writing-mode="lr-tb" loext:decorative="false"/>
       <style:paragraph-properties style:writing-mode="lr-tb"/>
     </style:style>
     <style:style style:name="gr27" style:family="graphic" style:parent-style-name="standard" style:list-style-name="L7">
-      <style:graphic-properties draw:stroke="none" svg:stroke-width="0cm" draw:fill="none" loext:fill-use-slide-background="false" draw:textarea-horizontal-align="justify" draw:textarea-vertical-align="middle" draw:auto-grow-height="false" draw:fit-to-size="false" style:shrink-to-fit="false" fo:min-height="0cm" fo:min-width="0cm" fo:padding-top="0cm" fo:padding-bottom="0cm" fo:padding-left="0cm" fo:padding-right="0cm" fo:wrap-option="wrap" loext:decorative="false"/>
+      <style:graphic-properties draw:stroke="none" svg:stroke-width="0cm" draw:fill="none" loext:fill-use-slide-background="false" draw:textarea-horizontal-align="justify" draw:textarea-vertical-align="middle" draw:auto-grow-height="false" draw:fit-to-size="false" style:shrink-to-fit="false" fo:min-height="0cm" fo:min-width="0cm" fo:padding-top="0cm" fo:padding-bottom="0cm" fo:padding-left="0cm" fo:padding-right="0cm" fo:wrap-option="wrap" style:writing-mode="lr-tb" loext:decorative="false"/>
       <style:paragraph-properties style:writing-mode="lr-tb"/>
     </style:style>
     <style:style style:name="gr28" style:family="graphic" style:parent-style-name="standard" style:list-style-name="L9">
-      <style:graphic-properties draw:stroke="none" svg:stroke-width="0cm" draw:fill="none" loext:fill-use-slide-background="false" draw:textarea-horizontal-align="justify" draw:textarea-vertical-align="middle" draw:auto-grow-height="false" draw:fit-to-size="false" style:shrink-to-fit="false" fo:min-height="0cm" fo:min-width="0cm" fo:padding-top="0cm" fo:padding-bottom="0cm" fo:padding-left="0cm" fo:padding-right="0cm" fo:wrap-option="wrap" loext:decorative="false"/>
+      <style:graphic-properties draw:stroke="none" svg:stroke-width="0cm" draw:fill="none" loext:fill-use-slide-background="false" draw:textarea-horizontal-align="justify" draw:textarea-vertical-align="middle" draw:auto-grow-height="false" draw:fit-to-size="false" style:shrink-to-fit="false" fo:min-height="0cm" fo:min-width="0cm" fo:padding-top="0cm" fo:padding-bottom="0cm" fo:padding-left="0cm" fo:padding-right="0cm" fo:wrap-option="wrap" style:writing-mode="lr-tb" loext:decorative="false"/>
       <style:paragraph-properties style:writing-mode="lr-tb"/>
     </style:style>
     <style:style style:name="gr29" style:family="graphic" style:parent-style-name="standard">
-      <style:graphic-properties draw:stroke="solid" svg:stroke-width="0.035cm" svg:stroke-color="#e07a5f" draw:stroke-linejoin="round" draw:fill="solid" draw:fill-color="#e07a5f" draw:textarea-horizontal-align="justify" draw:textarea-vertical-align="top" draw:auto-grow-height="false" draw:fit-to-size="false" style:shrink-to-fit="false" fo:min-height="0cm" fo:min-width="0cm" fo:padding-top="0.125cm" fo:padding-bottom="0.125cm" fo:padding-left="0.177cm" fo:padding-right="0.177cm" fo:wrap-option="wrap" loext:decorative="false"/>
+      <style:graphic-properties draw:stroke="solid" svg:stroke-width="0.035cm" svg:stroke-color="#e07a5f" draw:stroke-linejoin="round" draw:fill="solid" draw:fill-color="#e07a5f" draw:textarea-horizontal-align="justify" draw:textarea-vertical-align="top" draw:auto-grow-height="false" draw:fit-to-size="false" style:shrink-to-fit="false" fo:min-height="0cm" fo:min-width="0cm" fo:padding-top="0.125cm" fo:padding-bottom="0.125cm" fo:padding-left="0.177cm" fo:padding-right="0.177cm" fo:wrap-option="wrap" loext:decorative="false">
+        <loext:stroke-complex-color loext:theme-type="accent1" loext:color-type="theme">
+          <loext:transformation loext:type="lummod" loext:value="7500"/>
+          <loext:transformation loext:type="lumoff" loext:value="0"/>
+        </loext:stroke-complex-color>
+        <loext:fill-complex-color loext:theme-type="accent1" loext:color-type="theme"/>
+      </style:graphic-properties>
     </style:style>
     <style:style style:name="gr30" style:family="graphic" style:parent-style-name="standard" style:list-style-name="L9">
-      <style:graphic-properties draw:stroke="none" svg:stroke-width="0cm" draw:fill="none" loext:fill-use-slide-background="false" draw:textarea-horizontal-align="justify" draw:textarea-vertical-align="middle" draw:auto-grow-height="false" draw:fit-to-size="false" style:shrink-to-fit="false" fo:min-height="0cm" fo:min-width="0cm" fo:padding-top="0cm" fo:padding-bottom="0cm" fo:padding-left="0cm" fo:padding-right="0cm" fo:wrap-option="wrap" loext:decorative="false"/>
+      <style:graphic-properties draw:stroke="none" svg:stroke-width="0cm" draw:fill="none" loext:fill-use-slide-background="false" draw:textarea-horizontal-align="justify" draw:textarea-vertical-align="middle" draw:auto-grow-height="false" draw:fit-to-size="false" style:shrink-to-fit="false" fo:min-height="0cm" fo:min-width="0cm" fo:padding-top="0cm" fo:padding-bottom="0cm" fo:padding-left="0cm" fo:padding-right="0cm" fo:wrap-option="wrap" style:writing-mode="lr-tb" loext:decorative="false"/>
       <style:paragraph-properties style:writing-mode="lr-tb"/>
     </style:style>
     <style:style style:name="gr31" style:family="graphic" style:parent-style-name="standard" style:list-style-name="L7">
-      <style:graphic-properties draw:stroke="none" svg:stroke-width="0cm" draw:fill="none" loext:fill-use-slide-background="false" draw:textarea-horizontal-align="justify" draw:textarea-vertical-align="middle" draw:auto-grow-height="false" draw:fit-to-size="false" style:shrink-to-fit="false" fo:min-height="0cm" fo:min-width="0cm" fo:padding-top="0cm" fo:padding-bottom="0cm" fo:padding-left="0cm" fo:padding-right="0cm" fo:wrap-option="wrap" loext:decorative="false"/>
+      <style:graphic-properties draw:stroke="none" svg:stroke-width="0cm" draw:fill="none" loext:fill-use-slide-background="false" draw:textarea-horizontal-align="justify" draw:textarea-vertical-align="middle" draw:auto-grow-height="false" draw:fit-to-size="false" style:shrink-to-fit="false" fo:min-height="0cm" fo:min-width="0cm" fo:padding-top="0cm" fo:padding-bottom="0cm" fo:padding-left="0cm" fo:padding-right="0cm" fo:wrap-option="wrap" style:writing-mode="lr-tb" loext:decorative="false"/>
       <style:paragraph-properties style:writing-mode="lr-tb"/>
     </style:style>
     <style:style style:name="gr32" style:family="graphic" style:parent-style-name="standard" style:list-style-name="L9">
-      <style:graphic-properties draw:stroke="none" svg:stroke-width="0cm" draw:fill="none" loext:fill-use-slide-background="false" draw:textarea-horizontal-align="justify" draw:textarea-vertical-align="middle" draw:auto-grow-height="false" draw:fit-to-size="false" style:shrink-to-fit="false" fo:min-height="0cm" fo:min-width="0cm" fo:padding-top="0cm" fo:padding-bottom="0cm" fo:padding-left="0cm" fo:padding-right="0cm" fo:wrap-option="wrap" loext:decorative="false"/>
+      <style:graphic-properties draw:stroke="none" svg:stroke-width="0cm" draw:fill="none" loext:fill-use-slide-background="false" draw:textarea-horizontal-align="justify" draw:textarea-vertical-align="middle" draw:auto-grow-height="false" draw:fit-to-size="false" style:shrink-to-fit="false" fo:min-height="0cm" fo:min-width="0cm" fo:padding-top="0cm" fo:padding-bottom="0cm" fo:padding-left="0cm" fo:padding-right="0cm" fo:wrap-option="wrap" style:writing-mode="lr-tb" loext:decorative="false"/>
       <style:paragraph-properties style:writing-mode="lr-tb"/>
     </style:style>
     <style:style style:name="gr33" style:family="graphic" style:parent-style-name="standard">
-      <style:graphic-properties draw:stroke="solid" svg:stroke-width="0.035cm" svg:stroke-color="#4cc3b0" draw:stroke-linejoin="round" draw:fill="solid" draw:fill-color="#4cc3b0" draw:textarea-horizontal-align="justify" draw:textarea-vertical-align="top" draw:auto-grow-height="false" draw:fit-to-size="false" style:shrink-to-fit="false" fo:min-height="0cm" fo:min-width="0cm" fo:padding-top="0.125cm" fo:padding-bottom="0.125cm" fo:padding-left="0.177cm" fo:padding-right="0.177cm" fo:wrap-option="wrap" loext:decorative="false"/>
+      <style:graphic-properties draw:stroke="solid" svg:stroke-width="0.035cm" svg:stroke-color="#4cc3b0" draw:stroke-linejoin="round" draw:fill="solid" draw:fill-color="#4cc3b0" draw:textarea-horizontal-align="justify" draw:textarea-vertical-align="top" draw:auto-grow-height="false" draw:fit-to-size="false" style:shrink-to-fit="false" fo:min-height="0cm" fo:min-width="0cm" fo:padding-top="0.125cm" fo:padding-bottom="0.125cm" fo:padding-left="0.177cm" fo:padding-right="0.177cm" fo:wrap-option="wrap" loext:decorative="false">
+        <loext:stroke-complex-color loext:theme-type="accent1" loext:color-type="theme">
+          <loext:transformation loext:type="lummod" loext:value="7500"/>
+          <loext:transformation loext:type="lumoff" loext:value="0"/>
+        </loext:stroke-complex-color>
+        <loext:fill-complex-color loext:theme-type="accent1" loext:color-type="theme"/>
+      </style:graphic-properties>
     </style:style>
     <style:style style:name="gr34" style:family="graphic" style:parent-style-name="standard" style:list-style-name="L9">
-      <style:graphic-properties draw:stroke="none" svg:stroke-width="0cm" draw:fill="none" loext:fill-use-slide-background="false" draw:textarea-horizontal-align="justify" draw:textarea-vertical-align="middle" draw:auto-grow-height="false" draw:fit-to-size="false" style:shrink-to-fit="false" fo:min-height="0cm" fo:min-width="0cm" fo:padding-top="0cm" fo:padding-bottom="0cm" fo:padding-left="0cm" fo:padding-right="0cm" fo:wrap-option="wrap" loext:decorative="false"/>
+      <style:graphic-properties draw:stroke="none" svg:stroke-width="0cm" draw:fill="none" loext:fill-use-slide-background="false" draw:textarea-horizontal-align="justify" draw:textarea-vertical-align="middle" draw:auto-grow-height="false" draw:fit-to-size="false" style:shrink-to-fit="false" fo:min-height="0cm" fo:min-width="0cm" fo:padding-top="0cm" fo:padding-bottom="0cm" fo:padding-left="0cm" fo:padding-right="0cm" fo:wrap-option="wrap" style:writing-mode="lr-tb" loext:decorative="false"/>
       <style:paragraph-properties style:writing-mode="lr-tb"/>
     </style:style>
     <style:style style:name="gr35" style:family="graphic" style:parent-style-name="standard" style:list-style-name="L7">
-      <style:graphic-properties draw:stroke="none" svg:stroke-width="0cm" draw:fill="none" loext:fill-use-slide-background="false" draw:textarea-horizontal-align="justify" draw:textarea-vertical-align="middle" draw:auto-grow-height="false" draw:fit-to-size="false" style:shrink-to-fit="false" fo:min-height="0cm" fo:min-width="0cm" fo:padding-top="0cm" fo:padding-bottom="0cm" fo:padding-left="0cm" fo:padding-right="0cm" fo:wrap-option="wrap" loext:decorative="false"/>
+      <style:graphic-properties draw:stroke="none" svg:stroke-width="0cm" draw:fill="none" loext:fill-use-slide-background="false" draw:textarea-horizontal-align="justify" draw:textarea-vertical-align="middle" draw:auto-grow-height="false" draw:fit-to-size="false" style:shrink-to-fit="false" fo:min-height="0cm" fo:min-width="0cm" fo:padding-top="0cm" fo:padding-bottom="0cm" fo:padding-left="0cm" fo:padding-right="0cm" fo:wrap-option="wrap" style:writing-mode="lr-tb" loext:decorative="false"/>
       <style:paragraph-properties style:writing-mode="lr-tb"/>
     </style:style>
     <style:style style:name="gr36" style:family="graphic" style:parent-style-name="standard" style:list-style-name="L9">
-      <style:graphic-properties draw:stroke="none" svg:stroke-width="0cm" draw:fill="none" loext:fill-use-slide-background="false" draw:textarea-horizontal-align="justify" draw:textarea-vertical-align="middle" draw:auto-grow-height="false" draw:fit-to-size="false" style:shrink-to-fit="false" fo:min-height="0cm" fo:min-width="0cm" fo:padding-top="0cm" fo:padding-bottom="0cm" fo:padding-left="0cm" fo:padding-right="0cm" fo:wrap-option="wrap" loext:decorative="false"/>
+      <style:graphic-properties draw:stroke="none" svg:stroke-width="0cm" draw:fill="none" loext:fill-use-slide-background="false" draw:textarea-horizontal-align="justify" draw:textarea-vertical-align="middle" draw:auto-grow-height="false" draw:fit-to-size="false" style:shrink-to-fit="false" fo:min-height="0cm" fo:min-width="0cm" fo:padding-top="0cm" fo:padding-bottom="0cm" fo:padding-left="0cm" fo:padding-right="0cm" fo:wrap-option="wrap" style:writing-mode="lr-tb" loext:decorative="false"/>
       <style:paragraph-properties style:writing-mode="lr-tb"/>
     </style:style>
     <style:style style:name="gr37" style:family="graphic" style:parent-style-name="standard">
-      <style:graphic-properties draw:stroke="solid" svg:stroke-width="0.035cm" svg:stroke-color="#7b6cb3" draw:stroke-linejoin="round" draw:fill="solid" draw:fill-color="#7b6cb3" draw:textarea-horizontal-align="justify" draw:textarea-vertical-align="top" draw:auto-grow-height="false" draw:fit-to-size="false" style:shrink-to-fit="false" fo:min-height="0cm" fo:min-width="0cm" fo:padding-top="0.125cm" fo:padding-bottom="0.125cm" fo:padding-left="0.177cm" fo:padding-right="0.177cm" fo:wrap-option="wrap" loext:decorative="false"/>
+      <style:graphic-properties draw:stroke="solid" svg:stroke-width="0.035cm" svg:stroke-color="#7b6cb3" draw:stroke-linejoin="round" draw:fill="solid" draw:fill-color="#7b6cb3" draw:textarea-horizontal-align="justify" draw:textarea-vertical-align="top" draw:auto-grow-height="false" draw:fit-to-size="false" style:shrink-to-fit="false" fo:min-height="0cm" fo:min-width="0cm" fo:padding-top="0.125cm" fo:padding-bottom="0.125cm" fo:padding-left="0.177cm" fo:padding-right="0.177cm" fo:wrap-option="wrap" loext:decorative="false">
+        <loext:stroke-complex-color loext:theme-type="accent1" loext:color-type="theme">
+          <loext:transformation loext:type="lummod" loext:value="7500"/>
+          <loext:transformation loext:type="lumoff" loext:value="0"/>
+        </loext:stroke-complex-color>
+        <loext:fill-complex-color loext:theme-type="accent1" loext:color-type="theme"/>
+      </style:graphic-properties>
     </style:style>
     <style:style style:name="gr38" style:family="graphic" style:parent-style-name="standard" style:list-style-name="L9">
-      <style:graphic-properties draw:stroke="none" svg:stroke-width="0cm" draw:fill="none" loext:fill-use-slide-background="false" draw:textarea-horizontal-align="justify" draw:textarea-vertical-align="middle" draw:auto-grow-height="false" draw:fit-to-size="false" style:shrink-to-fit="false" fo:min-height="0cm" fo:min-width="0cm" fo:padding-top="0cm" fo:padding-bottom="0cm" fo:padding-left="0cm" fo:padding-right="0cm" fo:wrap-option="wrap" loext:decorative="false"/>
+      <style:graphic-properties draw:stroke="none" svg:stroke-width="0cm" draw:fill="none" loext:fill-use-slide-background="false" draw:textarea-horizontal-align="justify" draw:textarea-vertical-align="middle" draw:auto-grow-height="false" draw:fit-to-size="false" style:shrink-to-fit="false" fo:min-height="0cm" fo:min-width="0cm" fo:padding-top="0cm" fo:padding-bottom="0cm" fo:padding-left="0cm" fo:padding-right="0cm" fo:wrap-option="wrap" style:writing-mode="lr-tb" loext:decorative="false"/>
       <style:paragraph-properties style:writing-mode="lr-tb"/>
     </style:style>
     <style:style style:name="gr39" style:family="graphic" style:parent-style-name="standard" style:list-style-name="L7">
-      <style:graphic-properties draw:stroke="none" svg:stroke-width="0cm" draw:fill="none" loext:fill-use-slide-background="false" draw:textarea-horizontal-align="justify" draw:textarea-vertical-align="middle" draw:auto-grow-height="false" draw:fit-to-size="false" style:shrink-to-fit="false" fo:min-height="0cm" fo:min-width="0cm" fo:padding-top="0cm" fo:padding-bottom="0cm" fo:padding-left="0cm" fo:padding-right="0cm" fo:wrap-option="wrap" loext:decorative="false"/>
+      <style:graphic-properties draw:stroke="none" svg:stroke-width="0cm" draw:fill="none" loext:fill-use-slide-background="false" draw:textarea-horizontal-align="justify" draw:textarea-vertical-align="middle" draw:auto-grow-height="false" draw:fit-to-size="false" style:shrink-to-fit="false" fo:min-height="0cm" fo:min-width="0cm" fo:padding-top="0cm" fo:padding-bottom="0cm" fo:padding-left="0cm" fo:padding-right="0cm" fo:wrap-option="wrap" style:writing-mode="lr-tb" loext:decorative="false"/>
       <style:paragraph-properties style:writing-mode="lr-tb"/>
     </style:style>
     <style:style style:name="gr40" style:family="graphic" style:parent-style-name="standard" style:list-style-name="L9">
-      <style:graphic-properties draw:stroke="none" svg:stroke-width="0cm" draw:fill="none" loext:fill-use-slide-background="false" draw:textarea-horizontal-align="justify" draw:textarea-vertical-align="middle" draw:auto-grow-height="false" draw:fit-to-size="false" style:shrink-to-fit="false" fo:min-height="0cm" fo:min-width="0cm" fo:padding-top="0cm" fo:padding-bottom="0cm" fo:padding-left="0cm" fo:padding-right="0cm" fo:wrap-option="wrap" loext:decorative="false"/>
+      <style:graphic-properties draw:stroke="none" svg:stroke-width="0cm" draw:fill="none" loext:fill-use-slide-background="false" draw:textarea-horizontal-align="justify" draw:textarea-vertical-align="middle" draw:auto-grow-height="false" draw:fit-to-size="false" style:shrink-to-fit="false" fo:min-height="0cm" fo:min-width="0cm" fo:padding-top="0cm" fo:padding-bottom="0cm" fo:padding-left="0cm" fo:padding-right="0cm" fo:wrap-option="wrap" style:writing-mode="lr-tb" loext:decorative="false"/>
       <style:paragraph-properties style:writing-mode="lr-tb"/>
     </style:style>
     <style:style style:name="gr41" style:family="graphic" style:parent-style-name="standard">
-      <style:graphic-properties draw:stroke="solid" svg:stroke-width="0.035cm" svg:stroke-color="#8fa3ad" draw:stroke-linejoin="round" draw:fill="solid" draw:fill-color="#8fa3ad" draw:textarea-horizontal-align="justify" draw:textarea-vertical-align="top" draw:auto-grow-height="false" draw:fit-to-size="false" style:shrink-to-fit="false" fo:min-height="0cm" fo:min-width="0cm" fo:padding-top="0.125cm" fo:padding-bottom="0.125cm" fo:padding-left="0.177cm" fo:padding-right="0.177cm" fo:wrap-option="wrap" loext:decorative="false"/>
+      <style:graphic-properties draw:stroke="solid" svg:stroke-width="0.035cm" svg:stroke-color="#8fa3ad" draw:stroke-linejoin="round" draw:fill="solid" draw:fill-color="#8fa3ad" draw:textarea-horizontal-align="justify" draw:textarea-vertical-align="top" draw:auto-grow-height="false" draw:fit-to-size="false" style:shrink-to-fit="false" fo:min-height="0cm" fo:min-width="0cm" fo:padding-top="0.125cm" fo:padding-bottom="0.125cm" fo:padding-left="0.177cm" fo:padding-right="0.177cm" fo:wrap-option="wrap" loext:decorative="false">
+        <loext:stroke-complex-color loext:theme-type="accent1" loext:color-type="theme">
+          <loext:transformation loext:type="lummod" loext:value="7500"/>
+          <loext:transformation loext:type="lumoff" loext:value="0"/>
+        </loext:stroke-complex-color>
+        <loext:fill-complex-color loext:theme-type="accent1" loext:color-type="theme"/>
+      </style:graphic-properties>
     </style:style>
     <style:style style:name="gr42" style:family="graphic" style:parent-style-name="standard" style:list-style-name="L9">
-      <style:graphic-properties draw:stroke="none" svg:stroke-width="0cm" draw:fill="none" loext:fill-use-slide-background="false" draw:textarea-horizontal-align="justify" draw:textarea-vertical-align="middle" draw:auto-grow-height="false" draw:fit-to-size="false" style:shrink-to-fit="false" fo:min-height="0cm" fo:min-width="0cm" fo:padding-top="0cm" fo:padding-bottom="0cm" fo:padding-left="0cm" fo:padding-right="0cm" fo:wrap-option="wrap" loext:decorative="false"/>
+      <style:graphic-properties draw:stroke="none" svg:stroke-width="0cm" draw:fill="none" loext:fill-use-slide-background="false" draw:textarea-horizontal-align="justify" draw:textarea-vertical-align="middle" draw:auto-grow-height="false" draw:fit-to-size="false" style:shrink-to-fit="false" fo:min-height="0cm" fo:min-width="0cm" fo:padding-top="0cm" fo:padding-bottom="0cm" fo:padding-left="0cm" fo:padding-right="0cm" fo:wrap-option="wrap" style:writing-mode="lr-tb" loext:decorative="false"/>
       <style:paragraph-properties style:writing-mode="lr-tb"/>
     </style:style>
     <style:style style:name="gr43" style:family="graphic" style:parent-style-name="standard" style:list-style-name="L7">
-      <style:graphic-properties draw:stroke="none" svg:stroke-width="0cm" draw:fill="none" loext:fill-use-slide-background="false" draw:textarea-horizontal-align="justify" draw:textarea-vertical-align="middle" draw:auto-grow-height="false" draw:fit-to-size="false" style:shrink-to-fit="false" fo:min-height="0cm" fo:min-width="0cm" fo:padding-top="0cm" fo:padding-bottom="0cm" fo:padding-left="0cm" fo:padding-right="0cm" fo:wrap-option="wrap" loext:decorative="false"/>
+      <style:graphic-properties draw:stroke="none" svg:stroke-width="0cm" draw:fill="none" loext:fill-use-slide-background="false" draw:textarea-horizontal-align="justify" draw:textarea-vertical-align="middle" draw:auto-grow-height="false" draw:fit-to-size="false" style:shrink-to-fit="false" fo:min-height="0cm" fo:min-width="0cm" fo:padding-top="0cm" fo:padding-bottom="0cm" fo:padding-left="0cm" fo:padding-right="0cm" fo:wrap-option="wrap" style:writing-mode="lr-tb" loext:decorative="false"/>
       <style:paragraph-properties style:writing-mode="lr-tb"/>
     </style:style>
     <style:style style:name="gr44" style:family="graphic" style:parent-style-name="standard" style:list-style-name="L9">
-      <style:graphic-properties draw:stroke="none" svg:stroke-width="0cm" draw:fill="none" loext:fill-use-slide-background="false" draw:textarea-horizontal-align="justify" draw:textarea-vertical-align="middle" draw:auto-grow-height="false" draw:fit-to-size="false" style:shrink-to-fit="false" fo:min-height="0cm" fo:min-width="0cm" fo:padding-top="0cm" fo:padding-bottom="0cm" fo:padding-left="0cm" fo:padding-right="0cm" fo:wrap-option="wrap" loext:decorative="false"/>
+      <style:graphic-properties draw:stroke="none" svg:stroke-width="0cm" draw:fill="none" loext:fill-use-slide-background="false" draw:textarea-horizontal-align="justify" draw:textarea-vertical-align="middle" draw:auto-grow-height="false" draw:fit-to-size="false" style:shrink-to-fit="false" fo:min-height="0cm" fo:min-width="0cm" fo:padding-top="0cm" fo:padding-bottom="0cm" fo:padding-left="0cm" fo:padding-right="0cm" fo:wrap-option="wrap" style:writing-mode="lr-tb" loext:decorative="false"/>
       <style:paragraph-properties style:writing-mode="lr-tb"/>
     </style:style>
     <style:style style:name="gr45" style:family="graphic" style:parent-style-name="standard">
-      <style:graphic-properties draw:stroke="solid" svg:stroke-width="0.035cm" svg:stroke-color="#f2a65a" draw:stroke-linejoin="round" draw:fill="solid" draw:fill-color="#f2a65a" draw:textarea-horizontal-align="justify" draw:textarea-vertical-align="top" draw:auto-grow-height="false" draw:fit-to-size="false" style:shrink-to-fit="false" fo:min-height="0cm" fo:min-width="0cm" fo:padding-top="0.125cm" fo:padding-bottom="0.125cm" fo:padding-left="0.177cm" fo:padding-right="0.177cm" fo:wrap-option="wrap" loext:decorative="false"/>
+      <style:graphic-properties draw:stroke="solid" svg:stroke-width="0.035cm" svg:stroke-color="#f2a65a" draw:stroke-linejoin="round" draw:fill="solid" draw:fill-color="#f2a65a" draw:textarea-horizontal-align="justify" draw:textarea-vertical-align="top" draw:auto-grow-height="false" draw:fit-to-size="false" style:shrink-to-fit="false" fo:min-height="0cm" fo:min-width="0cm" fo:padding-top="0.125cm" fo:padding-bottom="0.125cm" fo:padding-left="0.177cm" fo:padding-right="0.177cm" fo:wrap-option="wrap" loext:decorative="false">
+        <loext:stroke-complex-color loext:theme-type="accent1" loext:color-type="theme">
+          <loext:transformation loext:type="lummod" loext:value="7500"/>
+          <loext:transformation loext:type="lumoff" loext:value="0"/>
+        </loext:stroke-complex-color>
+        <loext:fill-complex-color loext:theme-type="accent1" loext:color-type="theme"/>
+      </style:graphic-properties>
     </style:style>
     <style:style style:name="gr46" style:family="graphic" style:parent-style-name="standard" style:list-style-name="L9">
-      <style:graphic-properties draw:stroke="none" svg:stroke-width="0cm" draw:fill="none" loext:fill-use-slide-background="false" draw:textarea-horizontal-align="justify" draw:textarea-vertical-align="middle" draw:auto-grow-height="false" draw:fit-to-size="false" style:shrink-to-fit="false" fo:min-height="0cm" fo:min-width="0cm" fo:padding-top="0cm" fo:padding-bottom="0cm" fo:padding-left="0cm" fo:padding-right="0cm" fo:wrap-option="wrap" loext:decorative="false"/>
+      <style:graphic-properties draw:stroke="none" svg:stroke-width="0cm" draw:fill="none" loext:fill-use-slide-background="false" draw:textarea-horizontal-align="justify" draw:textarea-vertical-align="middle" draw:auto-grow-height="false" draw:fit-to-size="false" style:shrink-to-fit="false" fo:min-height="0cm" fo:min-width="0cm" fo:padding-top="0cm" fo:padding-bottom="0cm" fo:padding-left="0cm" fo:padding-right="0cm" fo:wrap-option="wrap" style:writing-mode="lr-tb" loext:decorative="false"/>
       <style:paragraph-properties style:writing-mode="lr-tb"/>
     </style:style>
     <style:style style:name="gr47" style:family="graphic" style:parent-style-name="standard" style:list-style-name="L7">
-      <style:graphic-properties draw:stroke="none" svg:stroke-width="0cm" draw:fill="none" loext:fill-use-slide-background="false" draw:textarea-horizontal-align="justify" draw:textarea-vertical-align="middle" draw:auto-grow-height="false" draw:fit-to-size="false" style:shrink-to-fit="false" fo:min-height="0cm" fo:min-width="0cm" fo:padding-top="0cm" fo:padding-bottom="0cm" fo:padding-left="0cm" fo:padding-right="0cm" fo:wrap-option="wrap" loext:decorative="false"/>
+      <style:graphic-properties draw:stroke="none" svg:stroke-width="0cm" draw:fill="none" loext:fill-use-slide-background="false" draw:textarea-horizontal-align="justify" draw:textarea-vertical-align="middle" draw:auto-grow-height="false" draw:fit-to-size="false" style:shrink-to-fit="false" fo:min-height="0cm" fo:min-width="0cm" fo:padding-top="0cm" fo:padding-bottom="0cm" fo:padding-left="0cm" fo:padding-right="0cm" fo:wrap-option="wrap" style:writing-mode="lr-tb" loext:decorative="false"/>
       <style:paragraph-properties style:writing-mode="lr-tb"/>
     </style:style>
     <style:style style:name="gr48" style:family="graphic" style:parent-style-name="standard" style:list-style-name="L9">
-      <style:graphic-properties draw:stroke="none" svg:stroke-width="0cm" draw:fill="none" loext:fill-use-slide-background="false" draw:textarea-horizontal-align="justify" draw:textarea-vertical-align="middle" draw:auto-grow-height="false" draw:fit-to-size="false" style:shrink-to-fit="false" fo:min-height="0cm" fo:min-width="0cm" fo:padding-top="0cm" fo:padding-bottom="0cm" fo:padding-left="0cm" fo:padding-right="0cm" fo:wrap-option="wrap" loext:decorative="false"/>
+      <style:graphic-properties draw:stroke="none" svg:stroke-width="0cm" draw:fill="none" loext:fill-use-slide-background="false" draw:textarea-horizontal-align="justify" draw:textarea-vertical-align="middle" draw:auto-grow-height="false" draw:fit-to-size="false" style:shrink-to-fit="false" fo:min-height="0cm" fo:min-width="0cm" fo:padding-top="0cm" fo:padding-bottom="0cm" fo:padding-left="0cm" fo:padding-right="0cm" fo:wrap-option="wrap" style:writing-mode="lr-tb" loext:decorative="false"/>
       <style:paragraph-properties style:writing-mode="lr-tb"/>
     </style:style>
     <style:style style:name="gr49" style:family="graphic" style:parent-style-name="standard">
-      <style:graphic-properties draw:stroke="solid" svg:stroke-width="0.035cm" svg:stroke-color="#e6c35c" draw:stroke-linejoin="round" draw:fill="solid" draw:fill-color="#e6c35c" draw:textarea-horizontal-align="justify" draw:textarea-vertical-align="top" draw:auto-grow-height="false" draw:fit-to-size="false" style:shrink-to-fit="false" fo:min-height="0cm" fo:min-width="0cm" fo:padding-top="0.125cm" fo:padding-bottom="0.125cm" fo:padding-left="0.177cm" fo:padding-right="0.177cm" fo:wrap-option="wrap" loext:decorative="false"/>
+      <style:graphic-properties draw:stroke="solid" svg:stroke-width="0.035cm" svg:stroke-color="#e6c35c" draw:stroke-linejoin="round" draw:fill="solid" draw:fill-color="#e6c35c" draw:textarea-horizontal-align="justify" draw:textarea-vertical-align="top" draw:auto-grow-height="false" draw:fit-to-size="false" style:shrink-to-fit="false" fo:min-height="0cm" fo:min-width="0cm" fo:padding-top="0.125cm" fo:padding-bottom="0.125cm" fo:padding-left="0.177cm" fo:padding-right="0.177cm" fo:wrap-option="wrap" loext:decorative="false">
+        <loext:stroke-complex-color loext:theme-type="accent1" loext:color-type="theme">
+          <loext:transformation loext:type="lummod" loext:value="7500"/>
+          <loext:transformation loext:type="lumoff" loext:value="0"/>
+        </loext:stroke-complex-color>
+        <loext:fill-complex-color loext:theme-type="accent1" loext:color-type="theme"/>
+      </style:graphic-properties>
     </style:style>
     <style:style style:name="gr50" style:family="graphic" style:parent-style-name="standard" style:list-style-name="L9">
-      <style:graphic-properties draw:stroke="none" svg:stroke-width="0cm" draw:fill="none" loext:fill-use-slide-background="false" draw:textarea-horizontal-align="justify" draw:textarea-vertical-align="middle" draw:auto-grow-height="false" draw:fit-to-size="false" style:shrink-to-fit="false" fo:min-height="0cm" fo:min-width="0cm" fo:padding-top="0cm" fo:padding-bottom="0cm" fo:padding-left="0cm" fo:padding-right="0cm" fo:wrap-option="wrap" loext:decorative="false"/>
+      <style:graphic-properties draw:stroke="none" svg:stroke-width="0cm" draw:fill="none" loext:fill-use-slide-background="false" draw:textarea-horizontal-align="justify" draw:textarea-vertical-align="middle" draw:auto-grow-height="false" draw:fit-to-size="false" style:shrink-to-fit="false" fo:min-height="0cm" fo:min-width="0cm" fo:padding-top="0cm" fo:padding-bottom="0cm" fo:padding-left="0cm" fo:padding-right="0cm" fo:wrap-option="wrap" style:writing-mode="lr-tb" loext:decorative="false"/>
       <style:paragraph-properties style:writing-mode="lr-tb"/>
     </style:style>
     <style:style style:name="gr51" style:family="graphic" style:parent-style-name="standard" style:list-style-name="L7">
-      <style:graphic-properties draw:stroke="none" svg:stroke-width="0cm" draw:fill="none" loext:fill-use-slide-background="false" draw:textarea-horizontal-align="justify" draw:textarea-vertical-align="middle" draw:auto-grow-height="false" draw:fit-to-size="false" style:shrink-to-fit="false" fo:min-height="0cm" fo:min-width="0cm" fo:padding-top="0cm" fo:padding-bottom="0cm" fo:padding-left="0cm" fo:padding-right="0cm" fo:wrap-option="wrap" loext:decorative="false"/>
+      <style:graphic-properties draw:stroke="none" svg:stroke-width="0cm" draw:fill="none" loext:fill-use-slide-background="false" draw:textarea-horizontal-align="justify" draw:textarea-vertical-align="middle" draw:auto-grow-height="false" draw:fit-to-size="false" style:shrink-to-fit="false" fo:min-height="0cm" fo:min-width="0cm" fo:padding-top="0cm" fo:padding-bottom="0cm" fo:padding-left="0cm" fo:padding-right="0cm" fo:wrap-option="wrap" style:writing-mode="lr-tb" loext:decorative="false"/>
       <style:paragraph-properties style:writing-mode="lr-tb"/>
     </style:style>
     <style:style style:name="gr52" style:family="graphic" style:parent-style-name="standard" style:list-style-name="L9">
-      <style:graphic-properties draw:stroke="none" svg:stroke-width="0cm" draw:fill="none" loext:fill-use-slide-background="false" draw:textarea-horizontal-align="justify" draw:textarea-vertical-align="middle" draw:auto-grow-height="false" draw:fit-to-size="false" style:shrink-to-fit="false" fo:min-height="0cm" fo:min-width="0cm" fo:padding-top="0cm" fo:padding-bottom="0cm" fo:padding-left="0cm" fo:padding-right="0cm" fo:wrap-option="wrap" loext:decorative="false"/>
+      <style:graphic-properties draw:stroke="none" svg:stroke-width="0cm" draw:fill="none" loext:fill-use-slide-background="false" draw:textarea-horizontal-align="justify" draw:textarea-vertical-align="middle" draw:auto-grow-height="false" draw:fit-to-size="false" style:shrink-to-fit="false" fo:min-height="0cm" fo:min-width="0cm" fo:padding-top="0cm" fo:padding-bottom="0cm" fo:padding-left="0cm" fo:padding-right="0cm" fo:wrap-option="wrap" style:writing-mode="lr-tb" loext:decorative="false"/>
       <style:paragraph-properties style:writing-mode="lr-tb"/>
     </style:style>
     <style:style style:name="gr53" style:family="graphic" style:parent-style-name="standard">
-      <style:graphic-properties draw:stroke="solid" svg:stroke-width="0.026cm" svg:stroke-color="#f5d5cb" draw:stroke-linejoin="round" draw:fill="solid" draw:fill-color="#fdf0ec" draw:textarea-horizontal-align="justify" draw:textarea-vertical-align="top" draw:auto-grow-height="false" draw:fit-to-size="false" style:shrink-to-fit="false" fo:min-height="0cm" fo:min-width="0cm" fo:padding-top="0.125cm" fo:padding-bottom="0.125cm" fo:padding-left="0.25cm" fo:padding-right="0.25cm" fo:wrap-option="wrap" draw:shadow="visible" draw:shadow-offset-x="0cm" draw:shadow-offset-y="0.071cm" draw:shadow-color="#0a2630" draw:shadow-opacity="8%" loext:shadow-blur="0.212cm" loext:decorative="false"/>
+      <style:graphic-properties draw:stroke="solid" svg:stroke-width="0.026cm" svg:stroke-color="#f5d5cb" draw:stroke-linejoin="round" draw:fill="solid" draw:fill-color="#fdf0ec" draw:textarea-horizontal-align="justify" draw:textarea-vertical-align="top" draw:auto-grow-height="false" draw:fit-to-size="false" style:shrink-to-fit="false" fo:min-height="0cm" fo:min-width="0cm" fo:padding-top="0.125cm" fo:padding-bottom="0.125cm" fo:padding-left="0.25cm" fo:padding-right="0.25cm" fo:wrap-option="wrap" draw:shadow="visible" draw:shadow-offset-x="0cm" draw:shadow-offset-y="0.071cm" draw:shadow-color="#0a2630" draw:shadow-opacity="8%" loext:shadow-blur="0.212cm" loext:decorative="false">
+        <loext:stroke-complex-color loext:theme-type="accent1" loext:color-type="theme">
+          <loext:transformation loext:type="lummod" loext:value="7500"/>
+          <loext:transformation loext:type="lumoff" loext:value="0"/>
+        </loext:stroke-complex-color>
+        <loext:fill-complex-color loext:theme-type="accent1" loext:color-type="theme"/>
+      </style:graphic-properties>
     </style:style>
     <style:style style:name="gr54" style:family="graphic" style:parent-style-name="standard" style:list-style-name="L10">
-      <style:graphic-properties draw:stroke="none" svg:stroke-width="0cm" draw:fill="none" loext:fill-use-slide-background="false" draw:textarea-horizontal-align="justify" draw:textarea-vertical-align="middle" draw:auto-grow-height="false" draw:fit-to-size="false" style:shrink-to-fit="false" fo:min-height="0cm" fo:min-width="0cm" fo:padding-top="0cm" fo:padding-bottom="0cm" fo:padding-left="0cm" fo:padding-right="0cm" fo:wrap-option="wrap" loext:decorative="false"/>
+      <style:graphic-properties draw:stroke="none" svg:stroke-width="0cm" draw:fill="none" loext:fill-use-slide-background="false" draw:textarea-horizontal-align="justify" draw:textarea-vertical-align="middle" draw:auto-grow-height="false" draw:fit-to-size="false" style:shrink-to-fit="false" fo:min-height="0cm" fo:min-width="0cm" fo:padding-top="0cm" fo:padding-bottom="0cm" fo:padding-left="0cm" fo:padding-right="0cm" fo:wrap-option="wrap" style:writing-mode="lr-tb" loext:decorative="false"/>
       <style:paragraph-properties style:writing-mode="lr-tb"/>
     </style:style>
     <style:style style:name="gr55" style:family="graphic" style:parent-style-name="standard">
-      <style:graphic-properties draw:stroke="solid" svg:stroke-width="0.026cm" svg:stroke-color="#cde3e7" draw:stroke-linejoin="round" draw:fill="solid" draw:fill-color="#e6f2f4" draw:textarea-horizontal-align="justify" draw:textarea-vertical-align="top" draw:auto-grow-height="false" draw:fit-to-size="false" style:shrink-to-fit="false" fo:min-height="0cm" fo:min-width="0cm" fo:padding-top="0.125cm" fo:padding-bottom="0.125cm" fo:padding-left="0.25cm" fo:padding-right="0.25cm" fo:wrap-option="wrap" draw:shadow="visible" draw:shadow-offset-x="0cm" draw:shadow-offset-y="0.071cm" draw:shadow-color="#0a2630" draw:shadow-opacity="8%" loext:shadow-blur="0.212cm" loext:decorative="false"/>
+      <style:graphic-properties draw:stroke="solid" svg:stroke-width="0.026cm" svg:stroke-color="#cde3e7" draw:stroke-linejoin="round" draw:fill="solid" draw:fill-color="#e6f2f4" draw:textarea-horizontal-align="justify" draw:textarea-vertical-align="top" draw:auto-grow-height="false" draw:fit-to-size="false" style:shrink-to-fit="false" fo:min-height="0cm" fo:min-width="0cm" fo:padding-top="0.125cm" fo:padding-bottom="0.125cm" fo:padding-left="0.25cm" fo:padding-right="0.25cm" fo:wrap-option="wrap" draw:shadow="visible" draw:shadow-offset-x="0cm" draw:shadow-offset-y="0.071cm" draw:shadow-color="#0a2630" draw:shadow-opacity="8%" loext:shadow-blur="0.212cm" loext:decorative="false">
+        <loext:stroke-complex-color loext:theme-type="accent1" loext:color-type="theme">
+          <loext:transformation loext:type="lummod" loext:value="7500"/>
+          <loext:transformation loext:type="lumoff" loext:value="0"/>
+        </loext:stroke-complex-color>
+        <loext:fill-complex-color loext:theme-type="accent1" loext:color-type="theme"/>
+      </style:graphic-properties>
     </style:style>
     <style:style style:name="gr56" style:family="graphic" style:parent-style-name="standard">
-      <style:graphic-properties draw:stroke="solid" svg:stroke-width="0.035cm" svg:stroke-color="#1f7a6f" draw:stroke-linejoin="round" draw:fill="solid" draw:fill-color="#1f7a6f" draw:textarea-horizontal-align="justify" draw:textarea-vertical-align="top" draw:auto-grow-height="false" draw:fit-to-size="false" style:shrink-to-fit="false" fo:min-height="0cm" fo:min-width="0cm" fo:padding-top="0.125cm" fo:padding-bottom="0.125cm" fo:padding-left="0.25cm" fo:padding-right="0.25cm" fo:wrap-option="wrap" loext:decorative="false"/>
+      <style:graphic-properties draw:stroke="solid" svg:stroke-width="0.035cm" svg:stroke-color="#1f7a6f" draw:stroke-linejoin="round" draw:fill="solid" draw:fill-color="#1f7a6f" draw:textarea-horizontal-align="justify" draw:textarea-vertical-align="top" draw:auto-grow-height="false" draw:fit-to-size="false" style:shrink-to-fit="false" fo:min-height="0cm" fo:min-width="0cm" fo:padding-top="0.125cm" fo:padding-bottom="0.125cm" fo:padding-left="0.25cm" fo:padding-right="0.25cm" fo:wrap-option="wrap" loext:decorative="false">
+        <loext:stroke-complex-color loext:theme-type="accent1" loext:color-type="theme">
+          <loext:transformation loext:type="lummod" loext:value="7500"/>
+          <loext:transformation loext:type="lumoff" loext:value="0"/>
+        </loext:stroke-complex-color>
+        <loext:fill-complex-color loext:theme-type="accent1" loext:color-type="theme"/>
+      </style:graphic-properties>
     </style:style>
     <style:style style:name="gr57" style:family="graphic" style:parent-style-name="standard" style:list-style-name="L7">
-      <style:graphic-properties draw:stroke="none" svg:stroke-width="0cm" draw:fill="none" loext:fill-use-slide-background="false" draw:textarea-horizontal-align="justify" draw:textarea-vertical-align="middle" draw:auto-grow-height="false" draw:fit-to-size="false" style:shrink-to-fit="false" fo:min-height="0cm" fo:min-width="0cm" fo:padding-top="0cm" fo:padding-bottom="0cm" fo:padding-left="0cm" fo:padding-right="0cm" fo:wrap-option="wrap" loext:decorative="false"/>
+      <style:graphic-properties draw:stroke="none" svg:stroke-width="0cm" draw:fill="none" loext:fill-use-slide-background="false" draw:textarea-horizontal-align="justify" draw:textarea-vertical-align="middle" draw:auto-grow-height="false" draw:fit-to-size="false" style:shrink-to-fit="false" fo:min-height="0cm" fo:min-width="0cm" fo:padding-top="0cm" fo:padding-bottom="0cm" fo:padding-left="0cm" fo:padding-right="0cm" fo:wrap-option="wrap" style:writing-mode="lr-tb" loext:decorative="false"/>
       <style:paragraph-properties style:writing-mode="lr-tb"/>
     </style:style>
     <style:style style:name="gr58" style:family="graphic" style:parent-style-name="standard">
       <style:graphic-properties draw:stroke="none" svg:stroke-width="0cm" draw:fill="bitmap" draw:fill-image-name="msFillBitmap_20_4" style:repeat="stretch" draw:textarea-horizontal-align="justify" draw:textarea-vertical-align="top" draw:auto-grow-height="false" draw:fit-to-size="false" style:shrink-to-fit="false" fo:min-height="0cm" fo:min-width="0cm" fo:padding-top="0.125cm" fo:padding-bottom="0.125cm" fo:padding-left="0.25cm" fo:padding-right="0.25cm" fo:wrap-option="wrap" loext:decorative="false"/>
     </style:style>
     <style:style style:name="gr59" style:family="graphic" style:parent-style-name="standard">
-      <style:graphic-properties draw:stroke="solid" svg:stroke-width="0.035cm" svg:stroke-color="#3d7ea6" draw:stroke-linejoin="round" draw:fill="solid" draw:fill-color="#3d7ea6" draw:textarea-horizontal-align="justify" draw:textarea-vertical-align="top" draw:auto-grow-height="false" draw:fit-to-size="false" style:shrink-to-fit="false" fo:min-height="0cm" fo:min-width="0cm" fo:padding-top="0.125cm" fo:padding-bottom="0.125cm" fo:padding-left="0.25cm" fo:padding-right="0.25cm" fo:wrap-option="wrap" loext:decorative="false"/>
+      <style:graphic-properties draw:stroke="solid" svg:stroke-width="0.035cm" svg:stroke-color="#3d7ea6" draw:stroke-linejoin="round" draw:fill="solid" draw:fill-color="#3d7ea6" draw:textarea-horizontal-align="justify" draw:textarea-vertical-align="top" draw:auto-grow-height="false" draw:fit-to-size="false" style:shrink-to-fit="false" fo:min-height="0cm" fo:min-width="0cm" fo:padding-top="0.125cm" fo:padding-bottom="0.125cm" fo:padding-left="0.25cm" fo:padding-right="0.25cm" fo:wrap-option="wrap" loext:decorative="false">
+        <loext:stroke-complex-color loext:theme-type="accent1" loext:color-type="theme">
+          <loext:transformation loext:type="lummod" loext:value="7500"/>
+          <loext:transformation loext:type="lumoff" loext:value="0"/>
+        </loext:stroke-complex-color>
+        <loext:fill-complex-color loext:theme-type="accent1" loext:color-type="theme"/>
+      </style:graphic-properties>
     </style:style>
     <style:style style:name="gr60" style:family="graphic" style:parent-style-name="standard" style:list-style-name="L2">
-      <style:graphic-properties draw:stroke="none" svg:stroke-width="0cm" draw:fill="none" loext:fill-use-slide-background="false" draw:textarea-horizontal-align="justify" draw:textarea-vertical-align="middle" draw:auto-grow-height="false" draw:fit-to-size="false" style:shrink-to-fit="false" fo:min-height="0cm" fo:min-width="0cm" fo:padding-top="0cm" fo:padding-bottom="0cm" fo:padding-left="0cm" fo:padding-right="0cm" fo:wrap-option="wrap" loext:decorative="false"/>
+      <style:graphic-properties draw:stroke="none" svg:stroke-width="0cm" draw:fill="none" loext:fill-use-slide-background="false" draw:textarea-horizontal-align="justify" draw:textarea-vertical-align="middle" draw:auto-grow-height="false" draw:fit-to-size="false" style:shrink-to-fit="false" fo:min-height="0cm" fo:min-width="0cm" fo:padding-top="0cm" fo:padding-bottom="0cm" fo:padding-left="0cm" fo:padding-right="0cm" fo:wrap-option="wrap" style:writing-mode="lr-tb" loext:decorative="false"/>
       <style:paragraph-properties style:writing-mode="lr-tb"/>
     </style:style>
     <style:style style:name="gr61" style:family="graphic" style:parent-style-name="standard" style:list-style-name="L11">
-      <style:graphic-properties draw:stroke="none" svg:stroke-width="0cm" draw:fill="none" loext:fill-use-slide-background="false" draw:textarea-horizontal-align="justify" draw:textarea-vertical-align="middle" draw:auto-grow-height="false" draw:fit-to-size="false" style:shrink-to-fit="false" fo:min-height="0cm" fo:min-width="0cm" fo:padding-top="0cm" fo:padding-bottom="0cm" fo:padding-left="0cm" fo:padding-right="0cm" fo:wrap-option="wrap" loext:decorative="false"/>
+      <style:graphic-properties draw:stroke="none" svg:stroke-width="0cm" draw:fill="none" loext:fill-use-slide-background="false" draw:textarea-horizontal-align="justify" draw:textarea-vertical-align="middle" draw:auto-grow-height="false" draw:fit-to-size="false" style:shrink-to-fit="false" fo:min-height="0cm" fo:min-width="0cm" fo:padding-top="0cm" fo:padding-bottom="0cm" fo:padding-left="0cm" fo:padding-right="0cm" fo:wrap-option="wrap" style:writing-mode="lr-tb" loext:decorative="false"/>
       <style:paragraph-properties style:writing-mode="lr-tb"/>
     </style:style>
     <style:style style:name="gr62" style:family="graphic" style:parent-style-name="standard" style:list-style-name="L7">
-      <style:graphic-properties draw:stroke="none" svg:stroke-width="0cm" draw:fill="none" loext:fill-use-slide-background="false" draw:textarea-horizontal-align="justify" draw:textarea-vertical-align="middle" draw:auto-grow-height="false" draw:fit-to-size="false" style:shrink-to-fit="false" fo:min-height="0cm" fo:min-width="0cm" fo:padding-top="0cm" fo:padding-bottom="0cm" fo:padding-left="0cm" fo:padding-right="0cm" fo:wrap-option="wrap" loext:decorative="false"/>
+      <style:graphic-properties draw:stroke="none" svg:stroke-width="0cm" draw:fill="none" loext:fill-use-slide-background="false" draw:textarea-horizontal-align="justify" draw:textarea-vertical-align="middle" draw:auto-grow-height="false" draw:fit-to-size="false" style:shrink-to-fit="false" fo:min-height="0cm" fo:min-width="0cm" fo:padding-top="0cm" fo:padding-bottom="0cm" fo:padding-left="0cm" fo:padding-right="0cm" fo:wrap-option="wrap" style:writing-mode="lr-tb" loext:decorative="false"/>
       <style:paragraph-properties style:writing-mode="lr-tb"/>
     </style:style>
     <style:style style:name="gr63" style:family="graphic" style:parent-style-name="standard" style:list-style-name="L9">
-      <style:graphic-properties draw:stroke="none" svg:stroke-width="0cm" draw:fill="none" loext:fill-use-slide-background="false" draw:textarea-horizontal-align="justify" draw:textarea-vertical-align="middle" draw:auto-grow-height="false" draw:fit-to-size="false" style:shrink-to-fit="false" fo:min-height="0cm" fo:min-width="0cm" fo:padding-top="0cm" fo:padding-bottom="0cm" fo:padding-left="0cm" fo:padding-right="0cm" fo:wrap-option="wrap" loext:decorative="false"/>
+      <style:graphic-properties draw:stroke="none" svg:stroke-width="0cm" draw:fill="none" loext:fill-use-slide-background="false" draw:textarea-horizontal-align="justify" draw:textarea-vertical-align="middle" draw:auto-grow-height="false" draw:fit-to-size="false" style:shrink-to-fit="false" fo:min-height="0cm" fo:min-width="0cm" fo:padding-top="0cm" fo:padding-bottom="0cm" fo:padding-left="0cm" fo:padding-right="0cm" fo:wrap-option="wrap" style:writing-mode="lr-tb" loext:decorative="false"/>
       <style:paragraph-properties style:writing-mode="lr-tb"/>
     </style:style>
     <style:style style:name="gr64" style:family="graphic" style:parent-style-name="standard" style:list-style-name="L8">
-      <style:graphic-properties draw:stroke="none" svg:stroke-width="0cm" draw:fill="none" loext:fill-use-slide-background="false" draw:textarea-horizontal-align="justify" draw:textarea-vertical-align="middle" draw:auto-grow-height="false" draw:fit-to-size="false" style:shrink-to-fit="false" fo:min-height="0cm" fo:min-width="0cm" fo:padding-top="0cm" fo:padding-bottom="0cm" fo:padding-left="0cm" fo:padding-right="0cm" fo:wrap-option="wrap" loext:decorative="false"/>
+      <style:graphic-properties draw:stroke="none" svg:stroke-width="0cm" draw:fill="none" loext:fill-use-slide-background="false" draw:textarea-horizontal-align="justify" draw:textarea-vertical-align="middle" draw:auto-grow-height="false" draw:fit-to-size="false" style:shrink-to-fit="false" fo:min-height="0cm" fo:min-width="0cm" fo:padding-top="0cm" fo:padding-bottom="0cm" fo:padding-left="0cm" fo:padding-right="0cm" fo:wrap-option="wrap" style:writing-mode="lr-tb" loext:decorative="false"/>
       <style:paragraph-properties style:writing-mode="lr-tb"/>
     </style:style>
     <style:style style:name="gr65" style:family="graphic" style:parent-style-name="standard">
-      <style:graphic-properties draw:stroke="solid" svg:stroke-width="0.026cm" svg:stroke-color="#3d7ea6" draw:stroke-linejoin="round" draw:fill="solid" draw:fill-color="#3d7ea6" draw:textarea-horizontal-align="justify" draw:textarea-vertical-align="top" draw:auto-grow-height="false" draw:fit-to-size="false" style:shrink-to-fit="false" fo:min-height="0cm" fo:min-width="0cm" fo:padding-top="0.125cm" fo:padding-bottom="0.125cm" fo:padding-left="0.25cm" fo:padding-right="0.25cm" fo:wrap-option="wrap" loext:decorative="false"/>
+      <style:graphic-properties draw:stroke="solid" svg:stroke-width="0.026cm" svg:stroke-color="#3d7ea6" draw:stroke-linejoin="round" draw:fill="solid" draw:fill-color="#3d7ea6" draw:textarea-horizontal-align="justify" draw:textarea-vertical-align="top" draw:auto-grow-height="false" draw:fit-to-size="false" style:shrink-to-fit="false" fo:min-height="0cm" fo:min-width="0cm" fo:padding-top="0.125cm" fo:padding-bottom="0.125cm" fo:padding-left="0.25cm" fo:padding-right="0.25cm" fo:wrap-option="wrap" loext:decorative="false">
+        <loext:stroke-complex-color loext:theme-type="accent1" loext:color-type="theme">
+          <loext:transformation loext:type="lummod" loext:value="7500"/>
+          <loext:transformation loext:type="lumoff" loext:value="0"/>
+        </loext:stroke-complex-color>
+        <loext:fill-complex-color loext:theme-type="accent1" loext:color-type="theme"/>
+      </style:graphic-properties>
     </style:style>
     <style:style style:name="gr66" style:family="graphic" style:parent-style-name="standard" style:list-style-name="L2">
-      <style:graphic-properties draw:stroke="none" svg:stroke-width="0cm" draw:fill="none" loext:fill-use-slide-background="false" draw:textarea-horizontal-align="justify" draw:textarea-vertical-align="middle" draw:auto-grow-height="false" draw:fit-to-size="false" style:shrink-to-fit="false" fo:min-height="0cm" fo:min-width="0cm" fo:padding-top="0cm" fo:padding-bottom="0cm" fo:padding-left="0cm" fo:padding-right="0cm" fo:wrap-option="wrap" loext:decorative="false"/>
+      <style:graphic-properties draw:stroke="none" svg:stroke-width="0cm" draw:fill="none" loext:fill-use-slide-background="false" draw:textarea-horizontal-align="justify" draw:textarea-vertical-align="middle" draw:auto-grow-height="false" draw:fit-to-size="false" style:shrink-to-fit="false" fo:min-height="0cm" fo:min-width="0cm" fo:padding-top="0cm" fo:padding-bottom="0cm" fo:padding-left="0cm" fo:padding-right="0cm" fo:wrap-option="wrap" style:writing-mode="lr-tb" loext:decorative="false"/>
       <style:paragraph-properties style:writing-mode="lr-tb"/>
     </style:style>
     <style:style style:name="gr67" style:family="graphic" style:parent-style-name="standard" style:list-style-name="L8">
-      <style:graphic-properties draw:stroke="none" svg:stroke-width="0cm" draw:fill="none" loext:fill-use-slide-background="false" draw:textarea-horizontal-align="justify" draw:textarea-vertical-align="middle" draw:auto-grow-height="false" draw:fit-to-size="false" style:shrink-to-fit="false" fo:min-height="0cm" fo:min-width="0cm" fo:padding-top="0cm" fo:padding-bottom="0cm" fo:padding-left="0cm" fo:padding-right="0cm" fo:wrap-option="wrap" loext:decorative="false"/>
+      <style:graphic-properties draw:stroke="none" svg:stroke-width="0cm" draw:fill="none" loext:fill-use-slide-background="false" draw:textarea-horizontal-align="justify" draw:textarea-vertical-align="middle" draw:auto-grow-height="false" draw:fit-to-size="false" style:shrink-to-fit="false" fo:min-height="0cm" fo:min-width="0cm" fo:padding-top="0cm" fo:padding-bottom="0cm" fo:padding-left="0cm" fo:padding-right="0cm" fo:wrap-option="wrap" style:writing-mode="lr-tb" loext:decorative="false"/>
       <style:paragraph-properties style:writing-mode="lr-tb"/>
     </style:style>
     <style:style style:name="gr68" style:family="graphic" style:parent-style-name="standard" style:list-style-name="L8">
-      <style:graphic-properties draw:stroke="none" svg:stroke-width="0cm" draw:fill="none" loext:fill-use-slide-background="false" draw:textarea-horizontal-align="justify" draw:textarea-vertical-align="middle" draw:auto-grow-height="false" draw:fit-to-size="false" style:shrink-to-fit="false" fo:min-height="0cm" fo:min-width="0cm" fo:padding-top="0cm" fo:padding-bottom="0cm" fo:padding-left="0cm" fo:padding-right="0cm" fo:wrap-option="wrap" loext:decorative="false"/>
+      <style:graphic-properties draw:stroke="none" svg:stroke-width="0cm" draw:fill="none" loext:fill-use-slide-background="false" draw:textarea-horizontal-align="justify" draw:textarea-vertical-align="middle" draw:auto-grow-height="false" draw:fit-to-size="false" style:shrink-to-fit="false" fo:min-height="0cm" fo:min-width="0cm" fo:padding-top="0cm" fo:padding-bottom="0cm" fo:padding-left="0cm" fo:padding-right="0cm" fo:wrap-option="wrap" style:writing-mode="lr-tb" loext:decorative="false"/>
       <style:paragraph-properties style:writing-mode="lr-tb"/>
     </style:style>
     <style:style style:name="gr69" style:family="graphic" style:parent-style-name="Object_20_with_20_no_20_fill_20_and_20_no_20_line">
       <style:graphic-properties draw:stroke="none" svg:stroke-width="0cm" draw:fill="none" loext:fill-use-slide-background="false" draw:textarea-horizontal-align="center" draw:textarea-vertical-align="top" draw:auto-grow-height="false" fo:padding-top="0.125cm" fo:padding-bottom="0.125cm" fo:padding-left="0.25cm" fo:padding-right="0.25cm" fo:wrap-option="wrap" draw:ole-draw-aspect="1" loext:decorative="false"/>
     </style:style>
     <style:style style:name="gr70" style:family="graphic" style:parent-style-name="standard" style:list-style-name="L11">
-      <style:graphic-properties draw:stroke="none" svg:stroke-width="0cm" draw:fill="none" loext:fill-use-slide-background="false" draw:textarea-horizontal-align="justify" draw:textarea-vertical-align="middle" draw:auto-grow-height="false" draw:fit-to-size="false" style:shrink-to-fit="false" fo:min-height="0cm" fo:min-width="0cm" fo:padding-top="0cm" fo:padding-bottom="0cm" fo:padding-left="0cm" fo:padding-right="0cm" fo:wrap-option="wrap" loext:decorative="false"/>
+      <style:graphic-properties draw:stroke="none" svg:stroke-width="0cm" draw:fill="none" loext:fill-use-slide-background="false" draw:textarea-horizontal-align="justify" draw:textarea-vertical-align="middle" draw:auto-grow-height="false" draw:fit-to-size="false" style:shrink-to-fit="false" fo:min-height="0cm" fo:min-width="0cm" fo:padding-top="0cm" fo:padding-bottom="0cm" fo:padding-left="0cm" fo:padding-right="0cm" fo:wrap-option="wrap" style:writing-mode="lr-tb" loext:decorative="false"/>
       <style:paragraph-properties style:writing-mode="lr-tb"/>
     </style:style>
     <style:style style:name="gr71" style:family="graphic" style:parent-style-name="standard" style:list-style-name="L11">
-      <style:graphic-properties draw:stroke="none" svg:stroke-width="0cm" draw:fill="none" loext:fill-use-slide-background="false" draw:textarea-horizontal-align="justify" draw:textarea-vertical-align="middle" draw:auto-grow-height="false" draw:fit-to-size="false" style:shrink-to-fit="false" fo:min-height="0cm" fo:min-width="0cm" fo:padding-top="0cm" fo:padding-bottom="0cm" fo:padding-left="0cm" fo:padding-right="0cm" fo:wrap-option="wrap" loext:decorative="false"/>
+      <style:graphic-properties draw:stroke="none" svg:stroke-width="0cm" draw:fill="none" loext:fill-use-slide-background="false" draw:textarea-horizontal-align="justify" draw:textarea-vertical-align="middle" draw:auto-grow-height="false" draw:fit-to-size="false" style:shrink-to-fit="false" fo:min-height="0cm" fo:min-width="0cm" fo:padding-top="0cm" fo:padding-bottom="0cm" fo:padding-left="0cm" fo:padding-right="0cm" fo:wrap-option="wrap" style:writing-mode="lr-tb" loext:decorative="false"/>
       <style:paragraph-properties style:writing-mode="lr-tb"/>
     </style:style>
     <style:style style:name="gr72" style:family="graphic" style:parent-style-name="standard" style:list-style-name="L2">
-      <style:graphic-properties draw:stroke="none" svg:stroke-width="0cm" draw:fill="none" loext:fill-use-slide-background="false" draw:textarea-horizontal-align="justify" draw:textarea-vertical-align="middle" draw:auto-grow-height="false" draw:fit-to-size="false" style:shrink-to-fit="false" fo:min-height="0cm" fo:min-width="0cm" fo:padding-top="0cm" fo:padding-bottom="0cm" fo:padding-left="0cm" fo:padding-right="0cm" fo:wrap-option="wrap" loext:decorative="false"/>
+      <style:graphic-properties draw:stroke="none" svg:stroke-width="0cm" draw:fill="none" loext:fill-use-slide-background="false" draw:textarea-horizontal-align="justify" draw:textarea-vertical-align="middle" draw:auto-grow-height="false" draw:fit-to-size="false" style:shrink-to-fit="false" fo:min-height="0cm" fo:min-width="0cm" fo:padding-top="0cm" fo:padding-bottom="0cm" fo:padding-left="0cm" fo:padding-right="0cm" fo:wrap-option="wrap" style:writing-mode="lr-tb" loext:decorative="false"/>
       <style:paragraph-properties style:writing-mode="lr-tb"/>
     </style:style>
     <style:style style:name="gr73" style:family="graphic" style:parent-style-name="standard" style:list-style-name="L11">
-      <style:graphic-properties draw:stroke="none" svg:stroke-width="0cm" draw:fill="none" loext:fill-use-slide-background="false" draw:textarea-horizontal-align="justify" draw:textarea-vertical-align="middle" draw:auto-grow-height="false" draw:fit-to-size="false" style:shrink-to-fit="false" fo:min-height="0cm" fo:min-width="0cm" fo:padding-top="0cm" fo:padding-bottom="0cm" fo:padding-left="0cm" fo:padding-right="0cm" fo:wrap-option="wrap" loext:decorative="false"/>
+      <style:graphic-properties draw:stroke="none" svg:stroke-width="0cm" draw:fill="none" loext:fill-use-slide-background="false" draw:textarea-horizontal-align="justify" draw:textarea-vertical-align="middle" draw:auto-grow-height="false" draw:fit-to-size="false" style:shrink-to-fit="false" fo:min-height="0cm" fo:min-width="0cm" fo:padding-top="0cm" fo:padding-bottom="0cm" fo:padding-left="0cm" fo:padding-right="0cm" fo:wrap-option="wrap" style:writing-mode="lr-tb" loext:decorative="false"/>
       <style:paragraph-properties style:writing-mode="lr-tb"/>
     </style:style>
     <style:style style:name="gr74" style:family="graphic" style:parent-style-name="standard" style:list-style-name="L7">
-      <style:graphic-properties draw:stroke="none" svg:stroke-width="0cm" draw:fill="none" loext:fill-use-slide-background="false" draw:textarea-horizontal-align="justify" draw:textarea-vertical-align="middle" draw:auto-grow-height="false" draw:fit-to-size="false" style:shrink-to-fit="false" fo:min-height="0cm" fo:min-width="0cm" fo:padding-top="0cm" fo:padding-bottom="0cm" fo:padding-left="0cm" fo:padding-right="0cm" fo:wrap-option="wrap" loext:decorative="false"/>
+      <style:graphic-properties draw:stroke="none" svg:stroke-width="0cm" draw:fill="none" loext:fill-use-slide-background="false" draw:textarea-horizontal-align="justify" draw:textarea-vertical-align="middle" draw:auto-grow-height="false" draw:fit-to-size="false" style:shrink-to-fit="false" fo:min-height="0cm" fo:min-width="0cm" fo:padding-top="0cm" fo:padding-bottom="0cm" fo:padding-left="0cm" fo:padding-right="0cm" fo:wrap-option="wrap" style:writing-mode="lr-tb" loext:decorative="false"/>
       <style:paragraph-properties style:writing-mode="lr-tb"/>
     </style:style>
     <style:style style:name="gr75" style:family="graphic" style:parent-style-name="standard" style:list-style-name="L9">
-      <style:graphic-properties draw:stroke="none" svg:stroke-width="0cm" draw:fill="none" loext:fill-use-slide-background="false" draw:textarea-horizontal-align="justify" draw:textarea-vertical-align="middle" draw:auto-grow-height="false" draw:fit-to-size="false" style:shrink-to-fit="false" fo:min-height="0cm" fo:min-width="0cm" fo:padding-top="0cm" fo:padding-bottom="0cm" fo:padding-left="0cm" fo:padding-right="0cm" fo:wrap-option="wrap" loext:decorative="false"/>
+      <style:graphic-properties draw:stroke="none" svg:stroke-width="0cm" draw:fill="none" loext:fill-use-slide-background="false" draw:textarea-horizontal-align="justify" draw:textarea-vertical-align="middle" draw:auto-grow-height="false" draw:fit-to-size="false" style:shrink-to-fit="false" fo:min-height="0cm" fo:min-width="0cm" fo:padding-top="0cm" fo:padding-bottom="0cm" fo:padding-left="0cm" fo:padding-right="0cm" fo:wrap-option="wrap" style:writing-mode="lr-tb" loext:decorative="false"/>
       <style:paragraph-properties style:writing-mode="lr-tb"/>
     </style:style>
     <style:style style:name="gr76" style:family="graphic" style:parent-style-name="standard" style:list-style-name="L8">
-      <style:graphic-properties draw:stroke="none" svg:stroke-width="0cm" draw:fill="none" loext:fill-use-slide-background="false" draw:textarea-horizontal-align="justify" draw:textarea-vertical-align="middle" draw:auto-grow-height="false" draw:fit-to-size="false" style:shrink-to-fit="false" fo:min-height="0cm" fo:min-width="0cm" fo:padding-top="0cm" fo:padding-bottom="0cm" fo:padding-left="0cm" fo:padding-right="0cm" fo:wrap-option="wrap" loext:decorative="false"/>
+      <style:graphic-properties draw:stroke="none" svg:stroke-width="0cm" draw:fill="none" loext:fill-use-slide-background="false" draw:textarea-horizontal-align="justify" draw:textarea-vertical-align="middle" draw:auto-grow-height="false" draw:fit-to-size="false" style:shrink-to-fit="false" fo:min-height="0cm" fo:min-width="0cm" fo:padding-top="0cm" fo:padding-bottom="0cm" fo:padding-left="0cm" fo:padding-right="0cm" fo:wrap-option="wrap" style:writing-mode="lr-tb" loext:decorative="false"/>
       <style:paragraph-properties style:writing-mode="lr-tb"/>
     </style:style>
     <style:style style:name="gr77" style:family="graphic" style:parent-style-name="standard" style:list-style-name="L2">
-      <style:graphic-properties draw:stroke="none" svg:stroke-width="0cm" draw:fill="none" loext:fill-use-slide-background="false" draw:textarea-horizontal-align="justify" draw:textarea-vertical-align="middle" draw:auto-grow-height="false" draw:fit-to-size="false" style:shrink-to-fit="false" fo:min-height="0cm" fo:min-width="0cm" fo:padding-top="0cm" fo:padding-bottom="0cm" fo:padding-left="0cm" fo:padding-right="0cm" fo:wrap-option="wrap" loext:decorative="false"/>
+      <style:graphic-properties draw:stroke="none" svg:stroke-width="0cm" draw:fill="none" loext:fill-use-slide-background="false" draw:textarea-horizontal-align="justify" draw:textarea-vertical-align="middle" draw:auto-grow-height="false" draw:fit-to-size="false" style:shrink-to-fit="false" fo:min-height="0cm" fo:min-width="0cm" fo:padding-top="0cm" fo:padding-bottom="0cm" fo:padding-left="0cm" fo:padding-right="0cm" fo:wrap-option="wrap" style:writing-mode="lr-tb" loext:decorative="false"/>
       <style:paragraph-properties style:writing-mode="lr-tb"/>
     </style:style>
     <style:style style:name="gr78" style:family="graphic" style:parent-style-name="standard" style:list-style-name="L8">
-      <style:graphic-properties draw:stroke="none" svg:stroke-width="0cm" draw:fill="none" loext:fill-use-slide-background="false" draw:textarea-horizontal-align="justify" draw:textarea-vertical-align="middle" draw:auto-grow-height="false" draw:fit-to-size="false" style:shrink-to-fit="false" fo:min-height="0cm" fo:min-width="0cm" fo:padding-top="0cm" fo:padding-bottom="0cm" fo:padding-left="0cm" fo:padding-right="0cm" fo:wrap-option="wrap" loext:decorative="false"/>
+      <style:graphic-properties draw:stroke="none" svg:stroke-width="0cm" draw:fill="none" loext:fill-use-slide-background="false" draw:textarea-horizontal-align="justify" draw:textarea-vertical-align="middle" draw:auto-grow-height="false" draw:fit-to-size="false" style:shrink-to-fit="false" fo:min-height="0cm" fo:min-width="0cm" fo:padding-top="0cm" fo:padding-bottom="0cm" fo:padding-left="0cm" fo:padding-right="0cm" fo:wrap-option="wrap" style:writing-mode="lr-tb" loext:decorative="false"/>
       <style:paragraph-properties style:writing-mode="lr-tb"/>
     </style:style>
     <style:style style:name="gr79" style:family="graphic" style:parent-style-name="standard" style:list-style-name="L8">
-      <style:graphic-properties draw:stroke="none" svg:stroke-width="0cm" draw:fill="none" loext:fill-use-slide-background="false" draw:textarea-horizontal-align="justify" draw:textarea-vertical-align="middle" draw:auto-grow-height="false" draw:fit-to-size="false" style:shrink-to-fit="false" fo:min-height="0cm" fo:min-width="0cm" fo:padding-top="0cm" fo:padding-bottom="0cm" fo:padding-left="0cm" fo:padding-right="0cm" fo:wrap-option="wrap" loext:decorative="false"/>
+      <style:graphic-properties draw:stroke="none" svg:stroke-width="0cm" draw:fill="none" loext:fill-use-slide-background="false" draw:textarea-horizontal-align="justify" draw:textarea-vertical-align="middle" draw:auto-grow-height="false" draw:fit-to-size="false" style:shrink-to-fit="false" fo:min-height="0cm" fo:min-width="0cm" fo:padding-top="0cm" fo:padding-bottom="0cm" fo:padding-left="0cm" fo:padding-right="0cm" fo:wrap-option="wrap" style:writing-mode="lr-tb" loext:decorative="false"/>
       <style:paragraph-properties style:writing-mode="lr-tb"/>
     </style:style>
     <style:style style:name="gr80" style:family="graphic" style:parent-style-name="standard" style:list-style-name="L11">
-      <style:graphic-properties draw:stroke="none" svg:stroke-width="0cm" draw:fill="none" loext:fill-use-slide-background="false" draw:textarea-horizontal-align="justify" draw:textarea-vertical-align="middle" draw:auto-grow-height="false" draw:fit-to-size="false" style:shrink-to-fit="false" fo:min-height="0cm" fo:min-width="0cm" fo:padding-top="0cm" fo:padding-bottom="0cm" fo:padding-left="0cm" fo:padding-right="0cm" fo:wrap-option="wrap" loext:decorative="false"/>
+      <style:graphic-properties draw:stroke="none" svg:stroke-width="0cm" draw:fill="none" loext:fill-use-slide-background="false" draw:textarea-horizontal-align="justify" draw:textarea-vertical-align="middle" draw:auto-grow-height="false" draw:fit-to-size="false" style:shrink-to-fit="false" fo:min-height="0cm" fo:min-width="0cm" fo:padding-top="0cm" fo:padding-bottom="0cm" fo:padding-left="0cm" fo:padding-right="0cm" fo:wrap-option="wrap" style:writing-mode="lr-tb" loext:decorative="false"/>
       <style:paragraph-properties style:writing-mode="lr-tb"/>
     </style:style>
     <style:style style:name="gr81" style:family="graphic" style:parent-style-name="standard" style:list-style-name="L11">
-      <style:graphic-properties draw:stroke="none" svg:stroke-width="0cm" draw:fill="none" loext:fill-use-slide-background="false" draw:textarea-horizontal-align="justify" draw:textarea-vertical-align="middle" draw:auto-grow-height="false" draw:fit-to-size="false" style:shrink-to-fit="false" fo:min-height="0cm" fo:min-width="0cm" fo:padding-top="0cm" fo:padding-bottom="0cm" fo:padding-left="0cm" fo:padding-right="0cm" fo:wrap-option="wrap" loext:decorative="false"/>
+      <style:graphic-properties draw:stroke="none" svg:stroke-width="0cm" draw:fill="none" loext:fill-use-slide-background="false" draw:textarea-horizontal-align="justify" draw:textarea-vertical-align="middle" draw:auto-grow-height="false" draw:fit-to-size="false" style:shrink-to-fit="false" fo:min-height="0cm" fo:min-width="0cm" fo:padding-top="0cm" fo:padding-bottom="0cm" fo:padding-left="0cm" fo:padding-right="0cm" fo:wrap-option="wrap" style:writing-mode="lr-tb" loext:decorative="false"/>
       <style:paragraph-properties style:writing-mode="lr-tb"/>
     </style:style>
     <style:style style:name="gr82" style:family="graphic" style:parent-style-name="standard">
       <style:graphic-properties draw:stroke="none" svg:stroke-width="0cm" draw:fill="bitmap" draw:fill-image-name="msFillBitmap_20_7" style:repeat="stretch" draw:textarea-horizontal-align="justify" draw:textarea-vertical-align="top" draw:auto-grow-height="false" draw:fit-to-size="false" style:shrink-to-fit="false" fo:min-height="0cm" fo:min-width="0cm" fo:padding-top="0.125cm" fo:padding-bottom="0.125cm" fo:padding-left="0.25cm" fo:padding-right="0.25cm" fo:wrap-option="wrap" loext:decorative="false"/>
     </style:style>
     <style:style style:name="gr83" style:family="graphic" style:parent-style-name="standard">
-      <style:graphic-properties draw:stroke="solid" svg:stroke-width="0.035cm" svg:stroke-color="#2a9d8f" draw:stroke-linejoin="round" draw:fill="solid" draw:fill-color="#2a9d8f" draw:textarea-horizontal-align="justify" draw:textarea-vertical-align="top" draw:auto-grow-height="false" draw:fit-to-size="false" style:shrink-to-fit="false" fo:min-height="0cm" fo:min-width="0cm" fo:padding-top="0.125cm" fo:padding-bottom="0.125cm" fo:padding-left="0.25cm" fo:padding-right="0.25cm" fo:wrap-option="wrap" loext:decorative="false"/>
+      <style:graphic-properties draw:stroke="solid" svg:stroke-width="0.035cm" svg:stroke-color="#2a9d8f" draw:stroke-linejoin="round" draw:fill="solid" draw:fill-color="#2a9d8f" draw:textarea-horizontal-align="justify" draw:textarea-vertical-align="top" draw:auto-grow-height="false" draw:fit-to-size="false" style:shrink-to-fit="false" fo:min-height="0cm" fo:min-width="0cm" fo:padding-top="0.125cm" fo:padding-bottom="0.125cm" fo:padding-left="0.25cm" fo:padding-right="0.25cm" fo:wrap-option="wrap" loext:decorative="false">
+        <loext:stroke-complex-color loext:theme-type="accent1" loext:color-type="theme">
+          <loext:transformation loext:type="lummod" loext:value="7500"/>
+          <loext:transformation loext:type="lumoff" loext:value="0"/>
+        </loext:stroke-complex-color>
+        <loext:fill-complex-color loext:theme-type="accent1" loext:color-type="theme"/>
+      </style:graphic-properties>
     </style:style>
     <style:style style:name="gr84" style:family="graphic" style:parent-style-name="standard" style:list-style-name="L2">
-      <style:graphic-properties draw:stroke="none" svg:stroke-width="0cm" draw:fill="none" loext:fill-use-slide-background="false" draw:textarea-horizontal-align="justify" draw:textarea-vertical-align="middle" draw:auto-grow-height="false" draw:fit-to-size="false" style:shrink-to-fit="false" fo:min-height="0cm" fo:min-width="0cm" fo:padding-top="0cm" fo:padding-bottom="0cm" fo:padding-left="0cm" fo:padding-right="0cm" fo:wrap-option="wrap" loext:decorative="false"/>
+      <style:graphic-properties draw:stroke="none" svg:stroke-width="0cm" draw:fill="none" loext:fill-use-slide-background="false" draw:textarea-horizontal-align="justify" draw:textarea-vertical-align="middle" draw:auto-grow-height="false" draw:fit-to-size="false" style:shrink-to-fit="false" fo:min-height="0cm" fo:min-width="0cm" fo:padding-top="0cm" fo:padding-bottom="0cm" fo:padding-left="0cm" fo:padding-right="0cm" fo:wrap-option="wrap" style:writing-mode="lr-tb" loext:decorative="false"/>
       <style:paragraph-properties style:writing-mode="lr-tb"/>
     </style:style>
     <style:style style:name="gr85" style:family="graphic" style:parent-style-name="standard" style:list-style-name="L12">
-      <style:graphic-properties draw:stroke="none" svg:stroke-width="0cm" draw:fill="none" loext:fill-use-slide-background="false" draw:textarea-horizontal-align="justify" draw:textarea-vertical-align="middle" draw:auto-grow-height="false" draw:fit-to-size="false" style:shrink-to-fit="false" fo:min-height="0cm" fo:min-width="0cm" fo:padding-top="0cm" fo:padding-bottom="0cm" fo:padding-left="0cm" fo:padding-right="0cm" fo:wrap-option="wrap" loext:decorative="false"/>
+      <style:graphic-properties draw:stroke="none" svg:stroke-width="0cm" draw:fill="none" loext:fill-use-slide-background="false" draw:textarea-horizontal-align="justify" draw:textarea-vertical-align="middle" draw:auto-grow-height="false" draw:fit-to-size="false" style:shrink-to-fit="false" fo:min-height="0cm" fo:min-width="0cm" fo:padding-top="0cm" fo:padding-bottom="0cm" fo:padding-left="0cm" fo:padding-right="0cm" fo:wrap-option="wrap" style:writing-mode="lr-tb" loext:decorative="false"/>
       <style:paragraph-properties style:writing-mode="lr-tb"/>
     </style:style>
     <style:style style:name="gr86" style:family="graphic" style:parent-style-name="standard" style:list-style-name="L7">
-      <style:graphic-properties draw:stroke="none" svg:stroke-width="0cm" draw:fill="none" loext:fill-use-slide-background="false" draw:textarea-horizontal-align="justify" draw:textarea-vertical-align="middle" draw:auto-grow-height="false" draw:fit-to-size="false" style:shrink-to-fit="false" fo:min-height="0cm" fo:min-width="0cm" fo:padding-top="0cm" fo:padding-bottom="0cm" fo:padding-left="0cm" fo:padding-right="0cm" fo:wrap-option="wrap" loext:decorative="false"/>
+      <style:graphic-properties draw:stroke="none" svg:stroke-width="0cm" draw:fill="none" loext:fill-use-slide-background="false" draw:textarea-horizontal-align="justify" draw:textarea-vertical-align="middle" draw:auto-grow-height="false" draw:fit-to-size="false" style:shrink-to-fit="false" fo:min-height="0cm" fo:min-width="0cm" fo:padding-top="0cm" fo:padding-bottom="0cm" fo:padding-left="0cm" fo:padding-right="0cm" fo:wrap-option="wrap" style:writing-mode="lr-tb" loext:decorative="false"/>
       <style:paragraph-properties style:writing-mode="lr-tb"/>
     </style:style>
     <style:style style:name="gr87" style:family="graphic" style:parent-style-name="standard" style:list-style-name="L9">
-      <style:graphic-properties draw:stroke="none" svg:stroke-width="0cm" draw:fill="none" loext:fill-use-slide-background="false" draw:textarea-horizontal-align="justify" draw:textarea-vertical-align="middle" draw:auto-grow-height="false" draw:fit-to-size="false" style:shrink-to-fit="false" fo:min-height="0cm" fo:min-width="0cm" fo:padding-top="0cm" fo:padding-bottom="0cm" fo:padding-left="0cm" fo:padding-right="0cm" fo:wrap-option="wrap" loext:decorative="false"/>
+      <style:graphic-properties draw:stroke="none" svg:stroke-width="0cm" draw:fill="none" loext:fill-use-slide-background="false" draw:textarea-horizontal-align="justify" draw:textarea-vertical-align="middle" draw:auto-grow-height="false" draw:fit-to-size="false" style:shrink-to-fit="false" fo:min-height="0cm" fo:min-width="0cm" fo:padding-top="0cm" fo:padding-bottom="0cm" fo:padding-left="0cm" fo:padding-right="0cm" fo:wrap-option="wrap" style:writing-mode="lr-tb" loext:decorative="false"/>
       <style:paragraph-properties style:writing-mode="lr-tb"/>
     </style:style>
     <style:style style:name="gr88" style:family="graphic" style:parent-style-name="standard" style:list-style-name="L8">
-      <style:graphic-properties draw:stroke="none" svg:stroke-width="0cm" draw:fill="none" loext:fill-use-slide-background="false" draw:textarea-horizontal-align="justify" draw:textarea-vertical-align="middle" draw:auto-grow-height="false" draw:fit-to-size="false" style:shrink-to-fit="false" fo:min-height="0cm" fo:min-width="0cm" fo:padding-top="0cm" fo:padding-bottom="0cm" fo:padding-left="0cm" fo:padding-right="0cm" fo:wrap-option="wrap" loext:decorative="false"/>
+      <style:graphic-properties draw:stroke="none" svg:stroke-width="0cm" draw:fill="none" loext:fill-use-slide-background="false" draw:textarea-horizontal-align="justify" draw:textarea-vertical-align="middle" draw:auto-grow-height="false" draw:fit-to-size="false" style:shrink-to-fit="false" fo:min-height="0cm" fo:min-width="0cm" fo:padding-top="0cm" fo:padding-bottom="0cm" fo:padding-left="0cm" fo:padding-right="0cm" fo:wrap-option="wrap" style:writing-mode="lr-tb" loext:decorative="false"/>
       <style:paragraph-properties style:writing-mode="lr-tb"/>
     </style:style>
     <style:style style:name="gr89" style:family="graphic" style:parent-style-name="standard" style:list-style-name="L8">
-      <style:graphic-properties draw:stroke="none" svg:stroke-width="0cm" draw:fill="none" loext:fill-use-slide-background="false" draw:textarea-horizontal-align="justify" draw:textarea-vertical-align="middle" draw:auto-grow-height="false" draw:fit-to-size="false" style:shrink-to-fit="false" fo:min-height="0cm" fo:min-width="0cm" fo:padding-top="0cm" fo:padding-bottom="0cm" fo:padding-left="0cm" fo:padding-right="0cm" fo:wrap-option="wrap" loext:decorative="false"/>
+      <style:graphic-properties draw:stroke="none" svg:stroke-width="0cm" draw:fill="none" loext:fill-use-slide-background="false" draw:textarea-horizontal-align="justify" draw:textarea-vertical-align="middle" draw:auto-grow-height="false" draw:fit-to-size="false" style:shrink-to-fit="false" fo:min-height="0cm" fo:min-width="0cm" fo:padding-top="0cm" fo:padding-bottom="0cm" fo:padding-left="0cm" fo:padding-right="0cm" fo:wrap-option="wrap" style:writing-mode="lr-tb" loext:decorative="false"/>
       <style:paragraph-properties style:writing-mode="lr-tb"/>
     </style:style>
     <style:style style:name="gr90" style:family="graphic" style:parent-style-name="standard">
-      <style:graphic-properties draw:stroke="solid" svg:stroke-width="0.026cm" svg:stroke-color="#2a9d8f" draw:stroke-linejoin="round" draw:fill="solid" draw:fill-color="#2a9d8f" draw:textarea-horizontal-align="justify" draw:textarea-vertical-align="top" draw:auto-grow-height="false" draw:fit-to-size="false" style:shrink-to-fit="false" fo:min-height="0cm" fo:min-width="0cm" fo:padding-top="0.125cm" fo:padding-bottom="0.125cm" fo:padding-left="0.25cm" fo:padding-right="0.25cm" fo:wrap-option="wrap" loext:decorative="false"/>
+      <style:graphic-properties draw:stroke="solid" svg:stroke-width="0.026cm" svg:stroke-color="#2a9d8f" draw:stroke-linejoin="round" draw:fill="solid" draw:fill-color="#2a9d8f" draw:textarea-horizontal-align="justify" draw:textarea-vertical-align="top" draw:auto-grow-height="false" draw:fit-to-size="false" style:shrink-to-fit="false" fo:min-height="0cm" fo:min-width="0cm" fo:padding-top="0.125cm" fo:padding-bottom="0.125cm" fo:padding-left="0.25cm" fo:padding-right="0.25cm" fo:wrap-option="wrap" loext:decorative="false">
+        <loext:stroke-complex-color loext:theme-type="accent1" loext:color-type="theme">
+          <loext:transformation loext:type="lummod" loext:value="7500"/>
+          <loext:transformation loext:type="lumoff" loext:value="0"/>
+        </loext:stroke-complex-color>
+        <loext:fill-complex-color loext:theme-type="accent1" loext:color-type="theme"/>
+      </style:graphic-properties>
     </style:style>
     <style:style style:name="gr91" style:family="graphic" style:parent-style-name="standard" style:list-style-name="L2">
-      <style:graphic-properties draw:stroke="none" svg:stroke-width="0cm" draw:fill="none" loext:fill-use-slide-background="false" draw:textarea-horizontal-align="justify" draw:textarea-vertical-align="middle" draw:auto-grow-height="false" draw:fit-to-size="false" style:shrink-to-fit="false" fo:min-height="0cm" fo:min-width="0cm" fo:padding-top="0cm" fo:padding-bottom="0cm" fo:padding-left="0cm" fo:padding-right="0cm" fo:wrap-option="wrap" loext:decorative="false"/>
+      <style:graphic-properties draw:stroke="none" svg:stroke-width="0cm" draw:fill="none" loext:fill-use-slide-background="false" draw:textarea-horizontal-align="justify" draw:textarea-vertical-align="middle" draw:auto-grow-height="false" draw:fit-to-size="false" style:shrink-to-fit="false" fo:min-height="0cm" fo:min-width="0cm" fo:padding-top="0cm" fo:padding-bottom="0cm" fo:padding-left="0cm" fo:padding-right="0cm" fo:wrap-option="wrap" style:writing-mode="lr-tb" loext:decorative="false"/>
       <style:paragraph-properties style:writing-mode="lr-tb"/>
     </style:style>
     <style:style style:name="gr92" style:family="graphic" style:parent-style-name="standard" style:list-style-name="L8">
-      <style:graphic-properties draw:stroke="none" svg:stroke-width="0cm" draw:fill="none" loext:fill-use-slide-background="false" draw:textarea-horizontal-align="justify" draw:textarea-vertical-align="middle" draw:auto-grow-height="false" draw:fit-to-size="false" style:shrink-to-fit="false" fo:min-height="0cm" fo:min-width="0cm" fo:padding-top="0cm" fo:padding-bottom="0cm" fo:padding-left="0cm" fo:padding-right="0cm" fo:wrap-option="wrap" loext:decorative="false"/>
+      <style:graphic-properties draw:stroke="none" svg:stroke-width="0cm" draw:fill="none" loext:fill-use-slide-background="false" draw:textarea-horizontal-align="justify" draw:textarea-vertical-align="middle" draw:auto-grow-height="false" draw:fit-to-size="false" style:shrink-to-fit="false" fo:min-height="0cm" fo:min-width="0cm" fo:padding-top="0cm" fo:padding-bottom="0cm" fo:padding-left="0cm" fo:padding-right="0cm" fo:wrap-option="wrap" style:writing-mode="lr-tb" loext:decorative="false"/>
       <style:paragraph-properties style:writing-mode="lr-tb"/>
     </style:style>
     <style:style style:name="gr93" style:family="graphic" style:parent-style-name="standard" style:list-style-name="L12">
-      <style:graphic-properties draw:stroke="none" svg:stroke-width="0cm" draw:fill="none" loext:fill-use-slide-background="false" draw:textarea-horizontal-align="justify" draw:textarea-vertical-align="middle" draw:auto-grow-height="false" draw:fit-to-size="false" style:shrink-to-fit="false" fo:min-height="0cm" fo:min-width="0cm" fo:padding-top="0cm" fo:padding-bottom="0cm" fo:padding-left="0cm" fo:padding-right="0cm" fo:wrap-option="wrap" loext:decorative="false"/>
+      <style:graphic-properties draw:stroke="none" svg:stroke-width="0cm" draw:fill="none" loext:fill-use-slide-background="false" draw:textarea-horizontal-align="justify" draw:textarea-vertical-align="middle" draw:auto-grow-height="false" draw:fit-to-size="false" style:shrink-to-fit="false" fo:min-height="0cm" fo:min-width="0cm" fo:padding-top="0cm" fo:padding-bottom="0cm" fo:padding-left="0cm" fo:padding-right="0cm" fo:wrap-option="wrap" style:writing-mode="lr-tb" loext:decorative="false"/>
       <style:paragraph-properties style:writing-mode="lr-tb"/>
     </style:style>
     <style:style style:name="gr94" style:family="graphic" style:parent-style-name="standard" style:list-style-name="L12">
-      <style:graphic-properties draw:stroke="none" svg:stroke-width="0cm" draw:fill="none" loext:fill-use-slide-background="false" draw:textarea-horizontal-align="justify" draw:textarea-vertical-align="middle" draw:auto-grow-height="false" draw:fit-to-size="false" style:shrink-to-fit="false" fo:min-height="0cm" fo:min-width="0cm" fo:padding-top="0cm" fo:padding-bottom="0cm" fo:padding-left="0cm" fo:padding-right="0cm" fo:wrap-option="wrap" loext:decorative="false"/>
+      <style:graphic-properties draw:stroke="none" svg:stroke-width="0cm" draw:fill="none" loext:fill-use-slide-background="false" draw:textarea-horizontal-align="justify" draw:textarea-vertical-align="middle" draw:auto-grow-height="false" draw:fit-to-size="false" style:shrink-to-fit="false" fo:min-height="0cm" fo:min-width="0cm" fo:padding-top="0cm" fo:padding-bottom="0cm" fo:padding-left="0cm" fo:padding-right="0cm" fo:wrap-option="wrap" style:writing-mode="lr-tb" loext:decorative="false"/>
       <style:paragraph-properties style:writing-mode="lr-tb"/>
     </style:style>
     <style:style style:name="gr95" style:family="graphic" style:parent-style-name="standard">
       <style:graphic-properties draw:stroke="none" svg:stroke-width="0cm" draw:fill="bitmap" draw:fill-image-name="msFillBitmap_20_9" style:repeat="stretch" draw:textarea-horizontal-align="justify" draw:textarea-vertical-align="top" draw:auto-grow-height="false" draw:fit-to-size="false" style:shrink-to-fit="false" fo:min-height="0cm" fo:min-width="0cm" fo:padding-top="0.125cm" fo:padding-bottom="0.125cm" fo:padding-left="0.25cm" fo:padding-right="0.25cm" fo:wrap-option="wrap" loext:decorative="false"/>
     </style:style>
     <style:style style:name="gr96" style:family="graphic" style:parent-style-name="standard" style:list-style-name="L2">
-      <style:graphic-properties draw:stroke="none" svg:stroke-width="0cm" draw:fill="none" loext:fill-use-slide-background="false" draw:textarea-horizontal-align="justify" draw:textarea-vertical-align="middle" draw:auto-grow-height="false" draw:fit-to-size="false" style:shrink-to-fit="false" fo:min-height="0cm" fo:min-width="0cm" fo:padding-top="0cm" fo:padding-bottom="0cm" fo:padding-left="0cm" fo:padding-right="0cm" fo:wrap-option="wrap" loext:decorative="false"/>
+      <style:graphic-properties draw:stroke="none" svg:stroke-width="0cm" draw:fill="none" loext:fill-use-slide-background="false" draw:textarea-horizontal-align="justify" draw:textarea-vertical-align="middle" draw:auto-grow-height="false" draw:fit-to-size="false" style:shrink-to-fit="false" fo:min-height="0cm" fo:min-width="0cm" fo:padding-top="0cm" fo:padding-bottom="0cm" fo:padding-left="0cm" fo:padding-right="0cm" fo:wrap-option="wrap" style:writing-mode="lr-tb" loext:decorative="false"/>
       <style:paragraph-properties style:writing-mode="lr-tb"/>
     </style:style>
     <style:style style:name="gr97" style:family="graphic" style:parent-style-name="standard" style:list-style-name="L12">
-      <style:graphic-properties draw:stroke="none" svg:stroke-width="0cm" draw:fill="none" loext:fill-use-slide-background="false" draw:textarea-horizontal-align="justify" draw:textarea-vertical-align="middle" draw:auto-grow-height="false" draw:fit-to-size="false" style:shrink-to-fit="false" fo:min-height="0cm" fo:min-width="0cm" fo:padding-top="0cm" fo:padding-bottom="0cm" fo:padding-left="0cm" fo:padding-right="0cm" fo:wrap-option="wrap" loext:decorative="false"/>
+      <style:graphic-properties draw:stroke="none" svg:stroke-width="0cm" draw:fill="none" loext:fill-use-slide-background="false" draw:textarea-horizontal-align="justify" draw:textarea-vertical-align="middle" draw:auto-grow-height="false" draw:fit-to-size="false" style:shrink-to-fit="false" fo:min-height="0cm" fo:min-width="0cm" fo:padding-top="0cm" fo:padding-bottom="0cm" fo:padding-left="0cm" fo:padding-right="0cm" fo:wrap-option="wrap" style:writing-mode="lr-tb" loext:decorative="false"/>
       <style:paragraph-properties style:writing-mode="lr-tb"/>
     </style:style>
     <style:style style:name="gr98" style:family="graphic" style:parent-style-name="standard" style:list-style-name="L7">
-      <style:graphic-properties draw:stroke="none" svg:stroke-width="0cm" draw:fill="none" loext:fill-use-slide-background="false" draw:textarea-horizontal-align="justify" draw:textarea-vertical-align="middle" draw:auto-grow-height="false" draw:fit-to-size="false" style:shrink-to-fit="false" fo:min-height="0cm" fo:min-width="0cm" fo:padding-top="0cm" fo:padding-bottom="0cm" fo:padding-left="0cm" fo:padding-right="0cm" fo:wrap-option="wrap" loext:decorative="false"/>
+      <style:graphic-properties draw:stroke="none" svg:stroke-width="0cm" draw:fill="none" loext:fill-use-slide-background="false" draw:textarea-horizontal-align="justify" draw:textarea-vertical-align="middle" draw:auto-grow-height="false" draw:fit-to-size="false" style:shrink-to-fit="false" fo:min-height="0cm" fo:min-width="0cm" fo:padding-top="0cm" fo:padding-bottom="0cm" fo:padding-left="0cm" fo:padding-right="0cm" fo:wrap-option="wrap" style:writing-mode="lr-tb" loext:decorative="false"/>
       <style:paragraph-properties style:writing-mode="lr-tb"/>
     </style:style>
     <style:style style:name="gr99" style:family="graphic" style:parent-style-name="standard" style:list-style-name="L9">
-      <style:graphic-properties draw:stroke="none" svg:stroke-width="0cm" draw:fill="none" loext:fill-use-slide-background="false" draw:textarea-horizontal-align="justify" draw:textarea-vertical-align="middle" draw:auto-grow-height="false" draw:fit-to-size="false" style:shrink-to-fit="false" fo:min-height="0cm" fo:min-width="0cm" fo:padding-top="0cm" fo:padding-bottom="0cm" fo:padding-left="0cm" fo:padding-right="0cm" fo:wrap-option="wrap" loext:decorative="false"/>
+      <style:graphic-properties draw:stroke="none" svg:stroke-width="0cm" draw:fill="none" loext:fill-use-slide-background="false" draw:textarea-horizontal-align="justify" draw:textarea-vertical-align="middle" draw:auto-grow-height="false" draw:fit-to-size="false" style:shrink-to-fit="false" fo:min-height="0cm" fo:min-width="0cm" fo:padding-top="0cm" fo:padding-bottom="0cm" fo:padding-left="0cm" fo:padding-right="0cm" fo:wrap-option="wrap" style:writing-mode="lr-tb" loext:decorative="false"/>
       <style:paragraph-properties style:writing-mode="lr-tb"/>
     </style:style>
     <style:style style:name="gr100" style:family="graphic" style:parent-style-name="standard" style:list-style-name="L8">
-      <style:graphic-properties draw:stroke="none" svg:stroke-width="0cm" draw:fill="none" loext:fill-use-slide-background="false" draw:textarea-horizontal-align="justify" draw:textarea-vertical-align="middle" draw:auto-grow-height="false" draw:fit-to-size="false" style:shrink-to-fit="false" fo:min-height="0cm" fo:min-width="0cm" fo:padding-top="0cm" fo:padding-bottom="0cm" fo:padding-left="0cm" fo:padding-right="0cm" fo:wrap-option="wrap" loext:decorative="false"/>
+      <style:graphic-properties draw:stroke="none" svg:stroke-width="0cm" draw:fill="none" loext:fill-use-slide-background="false" draw:textarea-horizontal-align="justify" draw:textarea-vertical-align="middle" draw:auto-grow-height="false" draw:fit-to-size="false" style:shrink-to-fit="false" fo:min-height="0cm" fo:min-width="0cm" fo:padding-top="0cm" fo:padding-bottom="0cm" fo:padding-left="0cm" fo:padding-right="0cm" fo:wrap-option="wrap" style:writing-mode="lr-tb" loext:decorative="false"/>
       <style:paragraph-properties style:writing-mode="lr-tb"/>
     </style:style>
     <style:style style:name="gr101" style:family="graphic" style:parent-style-name="standard" style:list-style-name="L8">
-      <style:graphic-properties draw:stroke="none" svg:stroke-width="0cm" draw:fill="none" loext:fill-use-slide-background="false" draw:textarea-horizontal-align="justify" draw:textarea-vertical-align="middle" draw:auto-grow-height="false" draw:fit-to-size="false" style:shrink-to-fit="false" fo:min-height="0cm" fo:min-width="0cm" fo:padding-top="0cm" fo:padding-bottom="0cm" fo:padding-left="0cm" fo:padding-right="0cm" fo:wrap-option="wrap" loext:decorative="false"/>
+      <style:graphic-properties draw:stroke="none" svg:stroke-width="0cm" draw:fill="none" loext:fill-use-slide-background="false" draw:textarea-horizontal-align="justify" draw:textarea-vertical-align="middle" draw:auto-grow-height="false" draw:fit-to-size="false" style:shrink-to-fit="false" fo:min-height="0cm" fo:min-width="0cm" fo:padding-top="0cm" fo:padding-bottom="0cm" fo:padding-left="0cm" fo:padding-right="0cm" fo:wrap-option="wrap" style:writing-mode="lr-tb" loext:decorative="false"/>
       <style:paragraph-properties style:writing-mode="lr-tb"/>
     </style:style>
     <style:style style:name="gr102" style:family="graphic" style:parent-style-name="standard" style:list-style-name="L2">
-      <style:graphic-properties draw:stroke="none" svg:stroke-width="0cm" draw:fill="none" loext:fill-use-slide-background="false" draw:textarea-horizontal-align="justify" draw:textarea-vertical-align="middle" draw:auto-grow-height="false" draw:fit-to-size="false" style:shrink-to-fit="false" fo:min-height="0cm" fo:min-width="0cm" fo:padding-top="0cm" fo:padding-bottom="0cm" fo:padding-left="0cm" fo:padding-right="0cm" fo:wrap-option="wrap" loext:decorative="false"/>
+      <style:graphic-properties draw:stroke="none" svg:stroke-width="0cm" draw:fill="none" loext:fill-use-slide-background="false" draw:textarea-horizontal-align="justify" draw:textarea-vertical-align="middle" draw:auto-grow-height="false" draw:fit-to-size="false" style:shrink-to-fit="false" fo:min-height="0cm" fo:min-width="0cm" fo:padding-top="0cm" fo:padding-bottom="0cm" fo:padding-left="0cm" fo:padding-right="0cm" fo:wrap-option="wrap" style:writing-mode="lr-tb" loext:decorative="false"/>
       <style:paragraph-properties style:writing-mode="lr-tb"/>
     </style:style>
     <style:style style:name="gr103" style:family="graphic" style:parent-style-name="standard" style:list-style-name="L8">
-      <style:graphic-properties draw:stroke="none" svg:stroke-width="0cm" draw:fill="none" loext:fill-use-slide-background="false" draw:textarea-horizontal-align="justify" draw:textarea-vertical-align="middle" draw:auto-grow-height="false" draw:fit-to-size="false" style:shrink-to-fit="false" fo:min-height="0cm" fo:min-width="0cm" fo:padding-top="0cm" fo:padding-bottom="0cm" fo:padding-left="0cm" fo:padding-right="0cm" fo:wrap-option="wrap" loext:decorative="false"/>
+      <style:graphic-properties draw:stroke="none" svg:stroke-width="0cm" draw:fill="none" loext:fill-use-slide-background="false" draw:textarea-horizontal-align="justify" draw:textarea-vertical-align="middle" draw:auto-grow-height="false" draw:fit-to-size="false" style:shrink-to-fit="false" fo:min-height="0cm" fo:min-width="0cm" fo:padding-top="0cm" fo:padding-bottom="0cm" fo:padding-left="0cm" fo:padding-right="0cm" fo:wrap-option="wrap" style:writing-mode="lr-tb" loext:decorative="false"/>
       <style:paragraph-properties style:writing-mode="lr-tb"/>
     </style:style>
     <style:style style:name="gr104" style:family="graphic" style:parent-style-name="standard" style:list-style-name="L7">
-      <style:graphic-properties draw:stroke="none" svg:stroke-width="0cm" draw:fill="none" loext:fill-use-slide-background="false" draw:textarea-horizontal-align="justify" draw:textarea-vertical-align="middle" draw:auto-grow-height="false" draw:fit-to-size="false" style:shrink-to-fit="false" fo:min-height="0cm" fo:min-width="0cm" fo:padding-top="0cm" fo:padding-bottom="0cm" fo:padding-left="0cm" fo:padding-right="0cm" fo:wrap-option="wrap" loext:decorative="false"/>
+      <style:graphic-properties draw:stroke="none" svg:stroke-width="0cm" draw:fill="none" loext:fill-use-slide-background="false" draw:textarea-horizontal-align="justify" draw:textarea-vertical-align="middle" draw:auto-grow-height="false" draw:fit-to-size="false" style:shrink-to-fit="false" fo:min-height="0cm" fo:min-width="0cm" fo:padding-top="0cm" fo:padding-bottom="0cm" fo:padding-left="0cm" fo:padding-right="0cm" fo:wrap-option="wrap" style:writing-mode="lr-tb" loext:decorative="false"/>
       <style:paragraph-properties style:writing-mode="lr-tb"/>
     </style:style>
     <style:style style:name="gr105" style:family="graphic" style:parent-style-name="standard">
       <style:graphic-properties loext:decorative="false"/>
     </style:style>
     <style:style style:name="gr106" style:family="graphic" style:parent-style-name="standard">
-      <style:graphic-properties draw:stroke="solid" svg:stroke-width="0.035cm" svg:stroke-color="#7b6cb3" draw:stroke-linejoin="round" draw:fill="solid" draw:fill-color="#7b6cb3" draw:textarea-horizontal-align="justify" draw:textarea-vertical-align="top" draw:auto-grow-height="false" draw:fit-to-size="false" style:shrink-to-fit="false" fo:min-height="0cm" fo:min-width="0cm" fo:padding-top="0.125cm" fo:padding-bottom="0.125cm" fo:padding-left="0.202cm" fo:padding-right="0.202cm" fo:wrap-option="wrap" loext:decorative="false"/>
+      <style:graphic-properties draw:stroke="solid" svg:stroke-width="0.035cm" svg:stroke-color="#7b6cb3" draw:stroke-linejoin="round" draw:fill="solid" draw:fill-color="#7b6cb3" draw:textarea-horizontal-align="justify" draw:textarea-vertical-align="top" draw:auto-grow-height="false" draw:fit-to-size="false" style:shrink-to-fit="false" fo:min-height="0cm" fo:min-width="0cm" fo:padding-top="0.125cm" fo:padding-bottom="0.125cm" fo:padding-left="0.202cm" fo:padding-right="0.202cm" fo:wrap-option="wrap" loext:decorative="false">
+        <loext:stroke-complex-color loext:theme-type="accent1" loext:color-type="theme">
+          <loext:transformation loext:type="lummod" loext:value="7500"/>
+          <loext:transformation loext:type="lumoff" loext:value="0"/>
+        </loext:stroke-complex-color>
+        <loext:fill-complex-color loext:theme-type="accent1" loext:color-type="theme"/>
+      </style:graphic-properties>
     </style:style>
     <style:style style:name="gr107" style:family="graphic" style:parent-style-name="standard" style:list-style-name="L7">
-      <style:graphic-properties draw:stroke="none" svg:stroke-width="0cm" draw:fill="none" loext:fill-use-slide-background="false" draw:textarea-horizontal-align="justify" draw:textarea-vertical-align="middle" draw:auto-grow-height="false" draw:fit-to-size="false" style:shrink-to-fit="false" fo:min-height="0cm" fo:min-width="0cm" fo:padding-top="0cm" fo:padding-bottom="0cm" fo:padding-left="0cm" fo:padding-right="0cm" fo:wrap-option="wrap" loext:decorative="false"/>
+      <style:graphic-properties draw:stroke="none" svg:stroke-width="0cm" draw:fill="none" loext:fill-use-slide-background="false" draw:textarea-horizontal-align="justify" draw:textarea-vertical-align="middle" draw:auto-grow-height="false" draw:fit-to-size="false" style:shrink-to-fit="false" fo:min-height="0cm" fo:min-width="0cm" fo:padding-top="0cm" fo:padding-bottom="0cm" fo:padding-left="0cm" fo:padding-right="0cm" fo:wrap-option="wrap" style:writing-mode="lr-tb" loext:decorative="false"/>
       <style:paragraph-properties style:writing-mode="lr-tb"/>
     </style:style>
     <style:style style:name="gr108" style:family="graphic" style:parent-style-name="standard" style:list-style-name="L9">
-      <style:graphic-properties draw:stroke="none" svg:stroke-width="0cm" draw:fill="none" loext:fill-use-slide-background="false" draw:textarea-horizontal-align="justify" draw:textarea-vertical-align="middle" draw:auto-grow-height="false" draw:fit-to-size="false" style:shrink-to-fit="false" fo:min-height="0cm" fo:min-width="0cm" fo:padding-top="0cm" fo:padding-bottom="0cm" fo:padding-left="0cm" fo:padding-right="0cm" fo:wrap-option="wrap" loext:decorative="false"/>
+      <style:graphic-properties draw:stroke="none" svg:stroke-width="0cm" draw:fill="none" loext:fill-use-slide-background="false" draw:textarea-horizontal-align="justify" draw:textarea-vertical-align="middle" draw:auto-grow-height="false" draw:fit-to-size="false" style:shrink-to-fit="false" fo:min-height="0cm" fo:min-width="0cm" fo:padding-top="0cm" fo:padding-bottom="0cm" fo:padding-left="0cm" fo:padding-right="0cm" fo:wrap-option="wrap" style:writing-mode="lr-tb" loext:decorative="false"/>
       <style:paragraph-properties style:writing-mode="lr-tb"/>
     </style:style>
     <style:style style:name="gr109" style:family="graphic" style:parent-style-name="standard">
-      <style:graphic-properties draw:stroke="solid" svg:stroke-width="0.035cm" svg:stroke-color="#5fa8d3" draw:stroke-linejoin="round" draw:fill="solid" draw:fill-color="#5fa8d3" draw:textarea-horizontal-align="justify" draw:textarea-vertical-align="top" draw:auto-grow-height="false" draw:fit-to-size="false" style:shrink-to-fit="false" fo:min-height="0cm" fo:min-width="0cm" fo:padding-top="0.125cm" fo:padding-bottom="0.125cm" fo:padding-left="0.202cm" fo:padding-right="0.202cm" fo:wrap-option="wrap" loext:decorative="false"/>
+      <style:graphic-properties draw:stroke="solid" svg:stroke-width="0.035cm" svg:stroke-color="#5fa8d3" draw:stroke-linejoin="round" draw:fill="solid" draw:fill-color="#5fa8d3" draw:textarea-horizontal-align="justify" draw:textarea-vertical-align="top" draw:auto-grow-height="false" draw:fit-to-size="false" style:shrink-to-fit="false" fo:min-height="0cm" fo:min-width="0cm" fo:padding-top="0.125cm" fo:padding-bottom="0.125cm" fo:padding-left="0.202cm" fo:padding-right="0.202cm" fo:wrap-option="wrap" loext:decorative="false">
+        <loext:stroke-complex-color loext:theme-type="accent1" loext:color-type="theme">
+          <loext:transformation loext:type="lummod" loext:value="7500"/>
+          <loext:transformation loext:type="lumoff" loext:value="0"/>
+        </loext:stroke-complex-color>
+        <loext:fill-complex-color loext:theme-type="accent1" loext:color-type="theme"/>
+      </style:graphic-properties>
     </style:style>
     <style:style style:name="gr110" style:family="graphic" style:parent-style-name="standard" style:list-style-name="L7">
-      <style:graphic-properties draw:stroke="none" svg:stroke-width="0cm" draw:fill="none" loext:fill-use-slide-background="false" draw:textarea-horizontal-align="justify" draw:textarea-vertical-align="middle" draw:auto-grow-height="false" draw:fit-to-size="false" style:shrink-to-fit="false" fo:min-height="0cm" fo:min-width="0cm" fo:padding-top="0cm" fo:padding-bottom="0cm" fo:padding-left="0cm" fo:padding-right="0cm" fo:wrap-option="wrap" loext:decorative="false"/>
+      <style:graphic-properties draw:stroke="none" svg:stroke-width="0cm" draw:fill="none" loext:fill-use-slide-background="false" draw:textarea-horizontal-align="justify" draw:textarea-vertical-align="middle" draw:auto-grow-height="false" draw:fit-to-size="false" style:shrink-to-fit="false" fo:min-height="0cm" fo:min-width="0cm" fo:padding-top="0cm" fo:padding-bottom="0cm" fo:padding-left="0cm" fo:padding-right="0cm" fo:wrap-option="wrap" style:writing-mode="lr-tb" loext:decorative="false"/>
       <style:paragraph-properties style:writing-mode="lr-tb"/>
     </style:style>
     <style:style style:name="gr111" style:family="graphic" style:parent-style-name="standard" style:list-style-name="L9">
-      <style:graphic-properties draw:stroke="none" svg:stroke-width="0cm" draw:fill="none" loext:fill-use-slide-background="false" draw:textarea-horizontal-align="justify" draw:textarea-vertical-align="middle" draw:auto-grow-height="false" draw:fit-to-size="false" style:shrink-to-fit="false" fo:min-height="0cm" fo:min-width="0cm" fo:padding-top="0cm" fo:padding-bottom="0cm" fo:padding-left="0cm" fo:padding-right="0cm" fo:wrap-option="wrap" loext:decorative="false"/>
+      <style:graphic-properties draw:stroke="none" svg:stroke-width="0cm" draw:fill="none" loext:fill-use-slide-background="false" draw:textarea-horizontal-align="justify" draw:textarea-vertical-align="middle" draw:auto-grow-height="false" draw:fit-to-size="false" style:shrink-to-fit="false" fo:min-height="0cm" fo:min-width="0cm" fo:padding-top="0cm" fo:padding-bottom="0cm" fo:padding-left="0cm" fo:padding-right="0cm" fo:wrap-option="wrap" style:writing-mode="lr-tb" loext:decorative="false"/>
       <style:paragraph-properties style:writing-mode="lr-tb"/>
     </style:style>
     <style:style style:name="gr112" style:family="graphic" style:parent-style-name="standard">
-      <style:graphic-properties draw:stroke="solid" svg:stroke-width="0.035cm" svg:stroke-color="#e07a5f" draw:stroke-linejoin="round" draw:fill="solid" draw:fill-color="#e07a5f" draw:textarea-horizontal-align="justify" draw:textarea-vertical-align="top" draw:auto-grow-height="false" draw:fit-to-size="false" style:shrink-to-fit="false" fo:min-height="0cm" fo:min-width="0cm" fo:padding-top="0.125cm" fo:padding-bottom="0.125cm" fo:padding-left="0.202cm" fo:padding-right="0.202cm" fo:wrap-option="wrap" loext:decorative="false"/>
+      <style:graphic-properties draw:stroke="solid" svg:stroke-width="0.035cm" svg:stroke-color="#e07a5f" draw:stroke-linejoin="round" draw:fill="solid" draw:fill-color="#e07a5f" draw:textarea-horizontal-align="justify" draw:textarea-vertical-align="top" draw:auto-grow-height="false" draw:fit-to-size="false" style:shrink-to-fit="false" fo:min-height="0cm" fo:min-width="0cm" fo:padding-top="0.125cm" fo:padding-bottom="0.125cm" fo:padding-left="0.202cm" fo:padding-right="0.202cm" fo:wrap-option="wrap" loext:decorative="false">
+        <loext:stroke-complex-color loext:theme-type="accent1" loext:color-type="theme">
+          <loext:transformation loext:type="lummod" loext:value="7500"/>
+          <loext:transformation loext:type="lumoff" loext:value="0"/>
+        </loext:stroke-complex-color>
+        <loext:fill-complex-color loext:theme-type="accent1" loext:color-type="theme"/>
+      </style:graphic-properties>
     </style:style>
     <style:style style:name="gr113" style:family="graphic" style:parent-style-name="standard" style:list-style-name="L7">
-      <style:graphic-properties draw:stroke="none" svg:stroke-width="0cm" draw:fill="none" loext:fill-use-slide-background="false" draw:textarea-horizontal-align="justify" draw:textarea-vertical-align="middle" draw:auto-grow-height="false" draw:fit-to-size="false" style:shrink-to-fit="false" fo:min-height="0cm" fo:min-width="0cm" fo:padding-top="0cm" fo:padding-bottom="0cm" fo:padding-left="0cm" fo:padding-right="0cm" fo:wrap-option="wrap" loext:decorative="false"/>
+      <style:graphic-properties draw:stroke="none" svg:stroke-width="0cm" draw:fill="none" loext:fill-use-slide-background="false" draw:textarea-horizontal-align="justify" draw:textarea-vertical-align="middle" draw:auto-grow-height="false" draw:fit-to-size="false" style:shrink-to-fit="false" fo:min-height="0cm" fo:min-width="0cm" fo:padding-top="0cm" fo:padding-bottom="0cm" fo:padding-left="0cm" fo:padding-right="0cm" fo:wrap-option="wrap" style:writing-mode="lr-tb" loext:decorative="false"/>
       <style:paragraph-properties style:writing-mode="lr-tb"/>
     </style:style>
     <style:style style:name="gr114" style:family="graphic" style:parent-style-name="standard" style:list-style-name="L9">
-      <style:graphic-properties draw:stroke="none" svg:stroke-width="0cm" draw:fill="none" loext:fill-use-slide-background="false" draw:textarea-horizontal-align="justify" draw:textarea-vertical-align="middle" draw:auto-grow-height="false" draw:fit-to-size="false" style:shrink-to-fit="false" fo:min-height="0cm" fo:min-width="0cm" fo:padding-top="0cm" fo:padding-bottom="0cm" fo:padding-left="0cm" fo:padding-right="0cm" fo:wrap-option="wrap" loext:decorative="false"/>
+      <style:graphic-properties draw:stroke="none" svg:stroke-width="0cm" draw:fill="none" loext:fill-use-slide-background="false" draw:textarea-horizontal-align="justify" draw:textarea-vertical-align="middle" draw:auto-grow-height="false" draw:fit-to-size="false" style:shrink-to-fit="false" fo:min-height="0cm" fo:min-width="0cm" fo:padding-top="0cm" fo:padding-bottom="0cm" fo:padding-left="0cm" fo:padding-right="0cm" fo:wrap-option="wrap" style:writing-mode="lr-tb" loext:decorative="false"/>
       <style:paragraph-properties style:writing-mode="lr-tb"/>
     </style:style>
     <style:style style:name="gr115" style:family="graphic" style:parent-style-name="standard" style:list-style-name="L12">
-      <style:graphic-properties draw:stroke="none" svg:stroke-width="0cm" draw:fill="none" loext:fill-use-slide-background="false" draw:textarea-horizontal-align="justify" draw:textarea-vertical-align="middle" draw:auto-grow-height="false" draw:fit-to-size="false" style:shrink-to-fit="false" fo:min-height="0cm" fo:min-width="0cm" fo:padding-top="0cm" fo:padding-bottom="0cm" fo:padding-left="0cm" fo:padding-right="0cm" fo:wrap-option="wrap" loext:decorative="false"/>
+      <style:graphic-properties draw:stroke="none" svg:stroke-width="0cm" draw:fill="none" loext:fill-use-slide-background="false" draw:textarea-horizontal-align="justify" draw:textarea-vertical-align="middle" draw:auto-grow-height="false" draw:fit-to-size="false" style:shrink-to-fit="false" fo:min-height="0cm" fo:min-width="0cm" fo:padding-top="0cm" fo:padding-bottom="0cm" fo:padding-left="0cm" fo:padding-right="0cm" fo:wrap-option="wrap" style:writing-mode="lr-tb" loext:decorative="false"/>
       <style:paragraph-properties style:writing-mode="lr-tb"/>
     </style:style>
     <style:style style:name="gr116" style:family="graphic" style:parent-style-name="standard" style:list-style-name="L12">
-      <style:graphic-properties draw:stroke="none" svg:stroke-width="0cm" draw:fill="none" loext:fill-use-slide-background="false" draw:textarea-horizontal-align="justify" draw:textarea-vertical-align="middle" draw:auto-grow-height="false" draw:fit-to-size="false" style:shrink-to-fit="false" fo:min-height="0cm" fo:min-width="0cm" fo:padding-top="0cm" fo:padding-bottom="0cm" fo:padding-left="0cm" fo:padding-right="0cm" fo:wrap-option="wrap" loext:decorative="false"/>
+      <style:graphic-properties draw:stroke="none" svg:stroke-width="0cm" draw:fill="none" loext:fill-use-slide-background="false" draw:textarea-horizontal-align="justify" draw:textarea-vertical-align="middle" draw:auto-grow-height="false" draw:fit-to-size="false" style:shrink-to-fit="false" fo:min-height="0cm" fo:min-width="0cm" fo:padding-top="0cm" fo:padding-bottom="0cm" fo:padding-left="0cm" fo:padding-right="0cm" fo:wrap-option="wrap" style:writing-mode="lr-tb" loext:decorative="false"/>
       <style:paragraph-properties style:writing-mode="lr-tb"/>
     </style:style>
     <style:style style:name="gr117" style:family="graphic" style:parent-style-name="standard">
       <style:graphic-properties draw:stroke="none" svg:stroke-width="0cm" draw:fill="bitmap" draw:fill-image-name="msFillBitmap_20_11" style:repeat="stretch" draw:textarea-horizontal-align="justify" draw:textarea-vertical-align="top" draw:auto-grow-height="false" draw:fit-to-size="false" style:shrink-to-fit="false" fo:min-height="0cm" fo:min-width="0cm" fo:padding-top="0.125cm" fo:padding-bottom="0.125cm" fo:padding-left="0.25cm" fo:padding-right="0.25cm" fo:wrap-option="wrap" loext:decorative="false"/>
     </style:style>
     <style:style style:name="gr118" style:family="graphic" style:parent-style-name="standard" style:list-style-name="L2">
-      <style:graphic-properties draw:stroke="none" svg:stroke-width="0cm" draw:fill="none" loext:fill-use-slide-background="false" draw:textarea-horizontal-align="justify" draw:textarea-vertical-align="middle" draw:auto-grow-height="false" draw:fit-to-size="false" style:shrink-to-fit="false" fo:min-height="0cm" fo:min-width="0cm" fo:padding-top="0cm" fo:padding-bottom="0cm" fo:padding-left="0cm" fo:padding-right="0cm" fo:wrap-option="wrap" loext:decorative="false"/>
+      <style:graphic-properties draw:stroke="none" svg:stroke-width="0cm" draw:fill="none" loext:fill-use-slide-background="false" draw:textarea-horizontal-align="justify" draw:textarea-vertical-align="middle" draw:auto-grow-height="false" draw:fit-to-size="false" style:shrink-to-fit="false" fo:min-height="0cm" fo:min-width="0cm" fo:padding-top="0cm" fo:padding-bottom="0cm" fo:padding-left="0cm" fo:padding-right="0cm" fo:wrap-option="wrap" style:writing-mode="lr-tb" loext:decorative="false"/>
       <style:paragraph-properties style:writing-mode="lr-tb"/>
     </style:style>
     <style:style style:name="gr119" style:family="graphic" style:parent-style-name="standard" style:list-style-name="L12">
-      <style:graphic-properties draw:stroke="none" svg:stroke-width="0cm" draw:fill="none" loext:fill-use-slide-background="false" draw:textarea-horizontal-align="justify" draw:textarea-vertical-align="middle" draw:auto-grow-height="false" draw:fit-to-size="false" style:shrink-to-fit="false" fo:min-height="0cm" fo:min-width="0cm" fo:padding-top="0cm" fo:padding-bottom="0cm" fo:padding-left="0cm" fo:padding-right="0cm" fo:wrap-option="wrap" loext:decorative="false"/>
+      <style:graphic-properties draw:stroke="none" svg:stroke-width="0cm" draw:fill="none" loext:fill-use-slide-background="false" draw:textarea-horizontal-align="justify" draw:textarea-vertical-align="middle" draw:auto-grow-height="false" draw:fit-to-size="false" style:shrink-to-fit="false" fo:min-height="0cm" fo:min-width="0cm" fo:padding-top="0cm" fo:padding-bottom="0cm" fo:padding-left="0cm" fo:padding-right="0cm" fo:wrap-option="wrap" style:writing-mode="lr-tb" loext:decorative="false"/>
       <style:paragraph-properties style:writing-mode="lr-tb"/>
     </style:style>
     <style:style style:name="gr120" style:family="graphic" style:parent-style-name="standard" style:list-style-name="L7">
-      <style:graphic-properties draw:stroke="none" svg:stroke-width="0cm" draw:fill="none" loext:fill-use-slide-background="false" draw:textarea-horizontal-align="justify" draw:textarea-vertical-align="middle" draw:auto-grow-height="false" draw:fit-to-size="false" style:shrink-to-fit="false" fo:min-height="0cm" fo:min-width="0cm" fo:padding-top="0cm" fo:padding-bottom="0cm" fo:padding-left="0cm" fo:padding-right="0cm" fo:wrap-option="wrap" loext:decorative="false"/>
+      <style:graphic-properties draw:stroke="none" svg:stroke-width="0cm" draw:fill="none" loext:fill-use-slide-background="false" draw:textarea-horizontal-align="justify" draw:textarea-vertical-align="middle" draw:auto-grow-height="false" draw:fit-to-size="false" style:shrink-to-fit="false" fo:min-height="0cm" fo:min-width="0cm" fo:padding-top="0cm" fo:padding-bottom="0cm" fo:padding-left="0cm" fo:padding-right="0cm" fo:wrap-option="wrap" style:writing-mode="lr-tb" loext:decorative="false"/>
       <style:paragraph-properties style:writing-mode="lr-tb"/>
     </style:style>
     <style:style style:name="gr121" style:family="graphic" style:parent-style-name="standard" style:list-style-name="L9">
-      <style:graphic-properties draw:stroke="none" svg:stroke-width="0cm" draw:fill="none" loext:fill-use-slide-background="false" draw:textarea-horizontal-align="justify" draw:textarea-vertical-align="middle" draw:auto-grow-height="false" draw:fit-to-size="false" style:shrink-to-fit="false" fo:min-height="0cm" fo:min-width="0cm" fo:padding-top="0cm" fo:padding-bottom="0cm" fo:padding-left="0cm" fo:padding-right="0cm" fo:wrap-option="wrap" loext:decorative="false"/>
+      <style:graphic-properties draw:stroke="none" svg:stroke-width="0cm" draw:fill="none" loext:fill-use-slide-background="false" draw:textarea-horizontal-align="justify" draw:textarea-vertical-align="middle" draw:auto-grow-height="false" draw:fit-to-size="false" style:shrink-to-fit="false" fo:min-height="0cm" fo:min-width="0cm" fo:padding-top="0cm" fo:padding-bottom="0cm" fo:padding-left="0cm" fo:padding-right="0cm" fo:wrap-option="wrap" style:writing-mode="lr-tb" loext:decorative="false"/>
       <style:paragraph-properties style:writing-mode="lr-tb"/>
     </style:style>
     <style:style style:name="gr122" style:family="graphic" style:parent-style-name="standard" style:list-style-name="L8">
-      <style:graphic-properties draw:stroke="none" svg:stroke-width="0cm" draw:fill="none" loext:fill-use-slide-background="false" draw:textarea-horizontal-align="justify" draw:textarea-vertical-align="middle" draw:auto-grow-height="false" draw:fit-to-size="false" style:shrink-to-fit="false" fo:min-height="0cm" fo:min-width="0cm" fo:padding-top="0cm" fo:padding-bottom="0cm" fo:padding-left="0cm" fo:padding-right="0cm" fo:wrap-option="wrap" loext:decorative="false"/>
+      <style:graphic-properties draw:stroke="none" svg:stroke-width="0cm" draw:fill="none" loext:fill-use-slide-background="false" draw:textarea-horizontal-align="justify" draw:textarea-vertical-align="middle" draw:auto-grow-height="false" draw:fit-to-size="false" style:shrink-to-fit="false" fo:min-height="0cm" fo:min-width="0cm" fo:padding-top="0cm" fo:padding-bottom="0cm" fo:padding-left="0cm" fo:padding-right="0cm" fo:wrap-option="wrap" style:writing-mode="lr-tb" loext:decorative="false"/>
       <style:paragraph-properties style:writing-mode="lr-tb"/>
     </style:style>
     <style:style style:name="gr123" style:family="graphic" style:parent-style-name="standard" style:list-style-name="L8">
-      <style:graphic-properties draw:stroke="none" svg:stroke-width="0cm" draw:fill="none" loext:fill-use-slide-background="false" draw:textarea-horizontal-align="justify" draw:textarea-vertical-align="middle" draw:auto-grow-height="false" draw:fit-to-size="false" style:shrink-to-fit="false" fo:min-height="0cm" fo:min-width="0cm" fo:padding-top="0cm" fo:padding-bottom="0cm" fo:padding-left="0cm" fo:padding-right="0cm" fo:wrap-option="wrap" loext:decorative="false"/>
+      <style:graphic-properties draw:stroke="none" svg:stroke-width="0cm" draw:fill="none" loext:fill-use-slide-background="false" draw:textarea-horizontal-align="justify" draw:textarea-vertical-align="middle" draw:auto-grow-height="false" draw:fit-to-size="false" style:shrink-to-fit="false" fo:min-height="0cm" fo:min-width="0cm" fo:padding-top="0cm" fo:padding-bottom="0cm" fo:padding-left="0cm" fo:padding-right="0cm" fo:wrap-option="wrap" style:writing-mode="lr-tb" loext:decorative="false"/>
       <style:paragraph-properties style:writing-mode="lr-tb"/>
     </style:style>
     <style:style style:name="gr124" style:family="graphic" style:parent-style-name="standard" style:list-style-name="L2">
-      <style:graphic-properties draw:stroke="none" svg:stroke-width="0cm" draw:fill="none" loext:fill-use-slide-background="false" draw:textarea-horizontal-align="justify" draw:textarea-vertical-align="middle" draw:auto-grow-height="false" draw:fit-to-size="false" style:shrink-to-fit="false" fo:min-height="0cm" fo:min-width="0cm" fo:padding-top="0cm" fo:padding-bottom="0cm" fo:padding-left="0cm" fo:padding-right="0cm" fo:wrap-option="wrap" loext:decorative="false"/>
+      <style:graphic-properties draw:stroke="none" svg:stroke-width="0cm" draw:fill="none" loext:fill-use-slide-background="false" draw:textarea-horizontal-align="justify" draw:textarea-vertical-align="middle" draw:auto-grow-height="false" draw:fit-to-size="false" style:shrink-to-fit="false" fo:min-height="0cm" fo:min-width="0cm" fo:padding-top="0cm" fo:padding-bottom="0cm" fo:padding-left="0cm" fo:padding-right="0cm" fo:wrap-option="wrap" style:writing-mode="lr-tb" loext:decorative="false"/>
       <style:paragraph-properties style:writing-mode="lr-tb"/>
     </style:style>
     <style:style style:name="gr125" style:family="graphic" style:parent-style-name="standard" style:list-style-name="L8">
-      <style:graphic-properties draw:stroke="none" svg:stroke-width="0cm" draw:fill="none" loext:fill-use-slide-background="false" draw:textarea-horizontal-align="justify" draw:textarea-vertical-align="middle" draw:auto-grow-height="false" draw:fit-to-size="false" style:shrink-to-fit="false" fo:min-height="0cm" fo:min-width="0cm" fo:padding-top="0cm" fo:padding-bottom="0cm" fo:padding-left="0cm" fo:padding-right="0cm" fo:wrap-option="wrap" loext:decorative="false"/>
+      <style:graphic-properties draw:stroke="none" svg:stroke-width="0cm" draw:fill="none" loext:fill-use-slide-background="false" draw:textarea-horizontal-align="justify" draw:textarea-vertical-align="middle" draw:auto-grow-height="false" draw:fit-to-size="false" style:shrink-to-fit="false" fo:min-height="0cm" fo:min-width="0cm" fo:padding-top="0cm" fo:padding-bottom="0cm" fo:padding-left="0cm" fo:padding-right="0cm" fo:wrap-option="wrap" style:writing-mode="lr-tb" loext:decorative="false"/>
       <style:paragraph-properties style:writing-mode="lr-tb"/>
     </style:style>
     <style:style style:name="gr126" style:family="graphic" style:parent-style-name="standard" style:list-style-name="L12">
-      <style:graphic-properties draw:stroke="none" svg:stroke-width="0cm" draw:fill="none" loext:fill-use-slide-background="false" draw:textarea-horizontal-align="justify" draw:textarea-vertical-align="middle" draw:auto-grow-height="false" draw:fit-to-size="false" style:shrink-to-fit="false" fo:min-height="0cm" fo:min-width="0cm" fo:padding-top="0cm" fo:padding-bottom="0cm" fo:padding-left="0cm" fo:padding-right="0cm" fo:wrap-option="wrap" loext:decorative="false"/>
+      <style:graphic-properties draw:stroke="none" svg:stroke-width="0cm" draw:fill="none" loext:fill-use-slide-background="false" draw:textarea-horizontal-align="justify" draw:textarea-vertical-align="middle" draw:auto-grow-height="false" draw:fit-to-size="false" style:shrink-to-fit="false" fo:min-height="0cm" fo:min-width="0cm" fo:padding-top="0cm" fo:padding-bottom="0cm" fo:padding-left="0cm" fo:padding-right="0cm" fo:wrap-option="wrap" style:writing-mode="lr-tb" loext:decorative="false"/>
       <style:paragraph-properties style:writing-mode="lr-tb"/>
     </style:style>
     <style:style style:name="gr127" style:family="graphic" style:parent-style-name="standard" style:list-style-name="L12">
-      <style:graphic-properties draw:stroke="none" svg:stroke-width="0cm" draw:fill="none" loext:fill-use-slide-background="false" draw:textarea-horizontal-align="justify" draw:textarea-vertical-align="middle" draw:auto-grow-height="false" draw:fit-to-size="false" style:shrink-to-fit="false" fo:min-height="0cm" fo:min-width="0cm" fo:padding-top="0cm" fo:padding-bottom="0cm" fo:padding-left="0cm" fo:padding-right="0cm" fo:wrap-option="wrap" loext:decorative="false"/>
+      <style:graphic-properties draw:stroke="none" svg:stroke-width="0cm" draw:fill="none" loext:fill-use-slide-background="false" draw:textarea-horizontal-align="justify" draw:textarea-vertical-align="middle" draw:auto-grow-height="false" draw:fit-to-size="false" style:shrink-to-fit="false" fo:min-height="0cm" fo:min-width="0cm" fo:padding-top="0cm" fo:padding-bottom="0cm" fo:padding-left="0cm" fo:padding-right="0cm" fo:wrap-option="wrap" style:writing-mode="lr-tb" loext:decorative="false"/>
       <style:paragraph-properties style:writing-mode="lr-tb"/>
     </style:style>
     <style:style style:name="gr128" style:family="graphic" style:parent-style-name="standard">
       <style:graphic-properties draw:stroke="none" svg:stroke-width="0cm" draw:fill="bitmap" draw:fill-image-name="msFillBitmap_20_13" style:repeat="stretch" draw:textarea-horizontal-align="justify" draw:textarea-vertical-align="top" draw:auto-grow-height="false" draw:fit-to-size="false" style:shrink-to-fit="false" fo:min-height="0cm" fo:min-width="0cm" fo:padding-top="0.125cm" fo:padding-bottom="0.125cm" fo:padding-left="0.25cm" fo:padding-right="0.25cm" fo:wrap-option="wrap" loext:decorative="false"/>
     </style:style>
     <style:style style:name="gr129" style:family="graphic" style:parent-style-name="standard" style:list-style-name="L2">
-      <style:graphic-properties draw:stroke="none" svg:stroke-width="0cm" draw:fill="none" loext:fill-use-slide-background="false" draw:textarea-horizontal-align="justify" draw:textarea-vertical-align="middle" draw:auto-grow-height="false" draw:fit-to-size="false" style:shrink-to-fit="false" fo:min-height="0cm" fo:min-width="0cm" fo:padding-top="0cm" fo:padding-bottom="0cm" fo:padding-left="0cm" fo:padding-right="0cm" fo:wrap-option="wrap" loext:decorative="false"/>
+      <style:graphic-properties draw:stroke="none" svg:stroke-width="0cm" draw:fill="none" loext:fill-use-slide-background="false" draw:textarea-horizontal-align="justify" draw:textarea-vertical-align="middle" draw:auto-grow-height="false" draw:fit-to-size="false" style:shrink-to-fit="false" fo:min-height="0cm" fo:min-width="0cm" fo:padding-top="0cm" fo:padding-bottom="0cm" fo:padding-left="0cm" fo:padding-right="0cm" fo:wrap-option="wrap" style:writing-mode="lr-tb" loext:decorative="false"/>
       <style:paragraph-properties style:writing-mode="lr-tb"/>
     </style:style>
     <style:style style:name="gr130" style:family="graphic" style:parent-style-name="standard" style:list-style-name="L12">
-      <style:graphic-properties draw:stroke="none" svg:stroke-width="0cm" draw:fill="none" loext:fill-use-slide-background="false" draw:textarea-horizontal-align="justify" draw:textarea-vertical-align="middle" draw:auto-grow-height="false" draw:fit-to-size="false" style:shrink-to-fit="false" fo:min-height="0cm" fo:min-width="0cm" fo:padding-top="0cm" fo:padding-bottom="0cm" fo:padding-left="0cm" fo:padding-right="0cm" fo:wrap-option="wrap" loext:decorative="false"/>
+      <style:graphic-properties draw:stroke="none" svg:stroke-width="0cm" draw:fill="none" loext:fill-use-slide-background="false" draw:textarea-horizontal-align="justify" draw:textarea-vertical-align="middle" draw:auto-grow-height="false" draw:fit-to-size="false" style:shrink-to-fit="false" fo:min-height="0cm" fo:min-width="0cm" fo:padding-top="0cm" fo:padding-bottom="0cm" fo:padding-left="0cm" fo:padding-right="0cm" fo:wrap-option="wrap" style:writing-mode="lr-tb" loext:decorative="false"/>
       <style:paragraph-properties style:writing-mode="lr-tb"/>
     </style:style>
     <style:style style:name="gr131" style:family="graphic" style:parent-style-name="standard" style:list-style-name="L7">
-      <style:graphic-properties draw:stroke="none" svg:stroke-width="0cm" draw:fill="none" loext:fill-use-slide-background="false" draw:textarea-horizontal-align="justify" draw:textarea-vertical-align="middle" draw:auto-grow-height="false" draw:fit-to-size="false" style:shrink-to-fit="false" fo:min-height="0cm" fo:min-width="0cm" fo:padding-top="0cm" fo:padding-bottom="0cm" fo:padding-left="0cm" fo:padding-right="0cm" fo:wrap-option="wrap" loext:decorative="false"/>
+      <style:graphic-properties draw:stroke="none" svg:stroke-width="0cm" draw:fill="none" loext:fill-use-slide-background="false" draw:textarea-horizontal-align="justify" draw:textarea-vertical-align="middle" draw:auto-grow-height="false" draw:fit-to-size="false" style:shrink-to-fit="false" fo:min-height="0cm" fo:min-width="0cm" fo:padding-top="0cm" fo:padding-bottom="0cm" fo:padding-left="0cm" fo:padding-right="0cm" fo:wrap-option="wrap" style:writing-mode="lr-tb" loext:decorative="false"/>
       <style:paragraph-properties style:writing-mode="lr-tb"/>
     </style:style>
     <style:style style:name="gr132" style:family="graphic" style:parent-style-name="standard" style:list-style-name="L9">
-      <style:graphic-properties draw:stroke="none" svg:stroke-width="0cm" draw:fill="none" loext:fill-use-slide-background="false" draw:textarea-horizontal-align="justify" draw:textarea-vertical-align="middle" draw:auto-grow-height="false" draw:fit-to-size="false" style:shrink-to-fit="false" fo:min-height="0cm" fo:min-width="0cm" fo:padding-top="0cm" fo:padding-bottom="0cm" fo:padding-left="0cm" fo:padding-right="0cm" fo:wrap-option="wrap" loext:decorative="false"/>
+      <style:graphic-properties draw:stroke="none" svg:stroke-width="0cm" draw:fill="none" loext:fill-use-slide-background="false" draw:textarea-horizontal-align="justify" draw:textarea-vertical-align="middle" draw:auto-grow-height="false" draw:fit-to-size="false" style:shrink-to-fit="false" fo:min-height="0cm" fo:min-width="0cm" fo:padding-top="0cm" fo:padding-bottom="0cm" fo:padding-left="0cm" fo:padding-right="0cm" fo:wrap-option="wrap" style:writing-mode="lr-tb" loext:decorative="false"/>
       <style:paragraph-properties style:writing-mode="lr-tb"/>
     </style:style>
     <style:style style:name="gr133" style:family="graphic" style:parent-style-name="standard" style:list-style-name="L8">
-      <style:graphic-properties draw:stroke="none" svg:stroke-width="0cm" draw:fill="none" loext:fill-use-slide-background="false" draw:textarea-horizontal-align="justify" draw:textarea-vertical-align="middle" draw:auto-grow-height="false" draw:fit-to-size="false" style:shrink-to-fit="false" fo:min-height="0cm" fo:min-width="0cm" fo:padding-top="0cm" fo:padding-bottom="0cm" fo:padding-left="0cm" fo:padding-right="0cm" fo:wrap-option="wrap" loext:decorative="false"/>
+      <style:graphic-properties draw:stroke="none" svg:stroke-width="0cm" draw:fill="none" loext:fill-use-slide-background="false" draw:textarea-horizontal-align="justify" draw:textarea-vertical-align="middle" draw:auto-grow-height="false" draw:fit-to-size="false" style:shrink-to-fit="false" fo:min-height="0cm" fo:min-width="0cm" fo:padding-top="0cm" fo:padding-bottom="0cm" fo:padding-left="0cm" fo:padding-right="0cm" fo:wrap-option="wrap" style:writing-mode="lr-tb" loext:decorative="false"/>
       <style:paragraph-properties style:writing-mode="lr-tb"/>
     </style:style>
     <style:style style:name="gr134" style:family="graphic" style:parent-style-name="standard" style:list-style-name="L8">
-      <style:graphic-properties draw:stroke="none" svg:stroke-width="0cm" draw:fill="none" loext:fill-use-slide-background="false" draw:textarea-horizontal-align="justify" draw:textarea-vertical-align="middle" draw:auto-grow-height="false" draw:fit-to-size="false" style:shrink-to-fit="false" fo:min-height="0cm" fo:min-width="0cm" fo:padding-top="0cm" fo:padding-bottom="0cm" fo:padding-left="0cm" fo:padding-right="0cm" fo:wrap-option="wrap" loext:decorative="false"/>
+      <style:graphic-properties draw:stroke="none" svg:stroke-width="0cm" draw:fill="none" loext:fill-use-slide-background="false" draw:textarea-horizontal-align="justify" draw:textarea-vertical-align="middle" draw:auto-grow-height="false" draw:fit-to-size="false" style:shrink-to-fit="false" fo:min-height="0cm" fo:min-width="0cm" fo:padding-top="0cm" fo:padding-bottom="0cm" fo:padding-left="0cm" fo:padding-right="0cm" fo:wrap-option="wrap" style:writing-mode="lr-tb" loext:decorative="false"/>
       <style:paragraph-properties style:writing-mode="lr-tb"/>
     </style:style>
     <style:style style:name="gr135" style:family="graphic" style:parent-style-name="standard" style:list-style-name="L2">
-      <style:graphic-properties draw:stroke="none" svg:stroke-width="0cm" draw:fill="none" loext:fill-use-slide-background="false" draw:textarea-horizontal-align="justify" draw:textarea-vertical-align="middle" draw:auto-grow-height="false" draw:fit-to-size="false" style:shrink-to-fit="false" fo:min-height="0cm" fo:min-width="0cm" fo:padding-top="0cm" fo:padding-bottom="0cm" fo:padding-left="0cm" fo:padding-right="0cm" fo:wrap-option="wrap" loext:decorative="false"/>
+      <style:graphic-properties draw:stroke="none" svg:stroke-width="0cm" draw:fill="none" loext:fill-use-slide-background="false" draw:textarea-horizontal-align="justify" draw:textarea-vertical-align="middle" draw:auto-grow-height="false" draw:fit-to-size="false" style:shrink-to-fit="false" fo:min-height="0cm" fo:min-width="0cm" fo:padding-top="0cm" fo:padding-bottom="0cm" fo:padding-left="0cm" fo:padding-right="0cm" fo:wrap-option="wrap" style:writing-mode="lr-tb" loext:decorative="false"/>
       <style:paragraph-properties style:writing-mode="lr-tb"/>
     </style:style>
     <style:style style:name="gr136" style:family="graphic" style:parent-style-name="standard" style:list-style-name="L8">
-      <style:graphic-properties draw:stroke="none" svg:stroke-width="0cm" draw:fill="none" loext:fill-use-slide-background="false" draw:textarea-horizontal-align="justify" draw:textarea-vertical-align="middle" draw:auto-grow-height="false" draw:fit-to-size="false" style:shrink-to-fit="false" fo:min-height="0cm" fo:min-width="0cm" fo:padding-top="0cm" fo:padding-bottom="0cm" fo:padding-left="0cm" fo:padding-right="0cm" fo:wrap-option="wrap" loext:decorative="false"/>
+      <style:graphic-properties draw:stroke="none" svg:stroke-width="0cm" draw:fill="none" loext:fill-use-slide-background="false" draw:textarea-horizontal-align="justify" draw:textarea-vertical-align="middle" draw:auto-grow-height="false" draw:fit-to-size="false" style:shrink-to-fit="false" fo:min-height="0cm" fo:min-width="0cm" fo:padding-top="0cm" fo:padding-bottom="0cm" fo:padding-left="0cm" fo:padding-right="0cm" fo:wrap-option="wrap" style:writing-mode="lr-tb" loext:decorative="false"/>
       <style:paragraph-properties style:writing-mode="lr-tb"/>
     </style:style>
     <style:style style:name="gr137" style:family="graphic" style:parent-style-name="standard" style:list-style-name="L12">
-      <style:graphic-properties draw:stroke="none" svg:stroke-width="0cm" draw:fill="none" loext:fill-use-slide-background="false" draw:textarea-horizontal-align="justify" draw:textarea-vertical-align="middle" draw:auto-grow-height="false" draw:fit-to-size="false" style:shrink-to-fit="false" fo:min-height="0cm" fo:min-width="0cm" fo:padding-top="0cm" fo:padding-bottom="0cm" fo:padding-left="0cm" fo:padding-right="0cm" fo:wrap-option="wrap" loext:decorative="false"/>
+      <style:graphic-properties draw:stroke="none" svg:stroke-width="0cm" draw:fill="none" loext:fill-use-slide-background="false" draw:textarea-horizontal-align="justify" draw:textarea-vertical-align="middle" draw:auto-grow-height="false" draw:fit-to-size="false" style:shrink-to-fit="false" fo:min-height="0cm" fo:min-width="0cm" fo:padding-top="0cm" fo:padding-bottom="0cm" fo:padding-left="0cm" fo:padding-right="0cm" fo:wrap-option="wrap" style:writing-mode="lr-tb" loext:decorative="false"/>
       <style:paragraph-properties style:writing-mode="lr-tb"/>
     </style:style>
     <style:style style:name="gr138" style:family="graphic" style:parent-style-name="standard" style:list-style-name="L12">
-      <style:graphic-properties draw:stroke="none" svg:stroke-width="0cm" draw:fill="none" loext:fill-use-slide-background="false" draw:textarea-horizontal-align="justify" draw:textarea-vertical-align="middle" draw:auto-grow-height="false" draw:fit-to-size="false" style:shrink-to-fit="false" fo:min-height="0cm" fo:min-width="0cm" fo:padding-top="0cm" fo:padding-bottom="0cm" fo:padding-left="0cm" fo:padding-right="0cm" fo:wrap-option="wrap" loext:decorative="false"/>
+      <style:graphic-properties draw:stroke="none" svg:stroke-width="0cm" draw:fill="none" loext:fill-use-slide-background="false" draw:textarea-horizontal-align="justify" draw:textarea-vertical-align="middle" draw:auto-grow-height="false" draw:fit-to-size="false" style:shrink-to-fit="false" fo:min-height="0cm" fo:min-width="0cm" fo:padding-top="0cm" fo:padding-bottom="0cm" fo:padding-left="0cm" fo:padding-right="0cm" fo:wrap-option="wrap" style:writing-mode="lr-tb" loext:decorative="false"/>
       <style:paragraph-properties style:writing-mode="lr-tb"/>
     </style:style>
     <style:style style:name="gr139" style:family="graphic" style:parent-style-name="standard">
       <style:graphic-properties draw:stroke="none" svg:stroke-width="0cm" draw:fill="bitmap" draw:fill-image-name="msFillBitmap_20_15" style:repeat="stretch" draw:textarea-horizontal-align="justify" draw:textarea-vertical-align="top" draw:auto-grow-height="false" draw:fit-to-size="false" style:shrink-to-fit="false" fo:min-height="0cm" fo:min-width="0cm" fo:padding-top="0.125cm" fo:padding-bottom="0.125cm" fo:padding-left="0.25cm" fo:padding-right="0.25cm" fo:wrap-option="wrap" loext:decorative="false"/>
     </style:style>
     <style:style style:name="gr140" style:family="graphic" style:parent-style-name="standard">
-      <style:graphic-properties draw:stroke="solid" svg:stroke-width="0.035cm" svg:stroke-color="#7b6cb3" draw:stroke-linejoin="round" draw:fill="solid" draw:fill-color="#7b6cb3" draw:textarea-horizontal-align="justify" draw:textarea-vertical-align="top" draw:auto-grow-height="false" draw:fit-to-size="false" style:shrink-to-fit="false" fo:min-height="0cm" fo:min-width="0cm" fo:padding-top="0.125cm" fo:padding-bottom="0.125cm" fo:padding-left="0.25cm" fo:padding-right="0.25cm" fo:wrap-option="wrap" loext:decorative="false"/>
+      <style:graphic-properties draw:stroke="solid" svg:stroke-width="0.035cm" svg:stroke-color="#7b6cb3" draw:stroke-linejoin="round" draw:fill="solid" draw:fill-color="#7b6cb3" draw:textarea-horizontal-align="justify" draw:textarea-vertical-align="top" draw:auto-grow-height="false" draw:fit-to-size="false" style:shrink-to-fit="false" fo:min-height="0cm" fo:min-width="0cm" fo:padding-top="0.125cm" fo:padding-bottom="0.125cm" fo:padding-left="0.25cm" fo:padding-right="0.25cm" fo:wrap-option="wrap" loext:decorative="false">
+        <loext:stroke-complex-color loext:theme-type="accent1" loext:color-type="theme">
+          <loext:transformation loext:type="lummod" loext:value="7500"/>
+          <loext:transformation loext:type="lumoff" loext:value="0"/>
+        </loext:stroke-complex-color>
+        <loext:fill-complex-color loext:theme-type="accent1" loext:color-type="theme"/>
+      </style:graphic-properties>
     </style:style>
     <style:style style:name="gr141" style:family="graphic" style:parent-style-name="standard" style:list-style-name="L2">
-      <style:graphic-properties draw:stroke="none" svg:stroke-width="0cm" draw:fill="none" loext:fill-use-slide-background="false" draw:textarea-horizontal-align="justify" draw:textarea-vertical-align="middle" draw:auto-grow-height="false" draw:fit-to-size="false" style:shrink-to-fit="false" fo:min-height="0cm" fo:min-width="0cm" fo:padding-top="0cm" fo:padding-bottom="0cm" fo:padding-left="0cm" fo:padding-right="0cm" fo:wrap-option="wrap" loext:decorative="false"/>
+      <style:graphic-properties draw:stroke="none" svg:stroke-width="0cm" draw:fill="none" loext:fill-use-slide-background="false" draw:textarea-horizontal-align="justify" draw:textarea-vertical-align="middle" draw:auto-grow-height="false" draw:fit-to-size="false" style:shrink-to-fit="false" fo:min-height="0cm" fo:min-width="0cm" fo:padding-top="0cm" fo:padding-bottom="0cm" fo:padding-left="0cm" fo:padding-right="0cm" fo:wrap-option="wrap" style:writing-mode="lr-tb" loext:decorative="false"/>
       <style:paragraph-properties style:writing-mode="lr-tb"/>
     </style:style>
     <style:style style:name="gr142" style:family="graphic" style:parent-style-name="standard" style:list-style-name="L13">
-      <style:graphic-properties draw:stroke="none" svg:stroke-width="0cm" draw:fill="none" loext:fill-use-slide-background="false" draw:textarea-horizontal-align="justify" draw:textarea-vertical-align="middle" draw:auto-grow-height="false" draw:fit-to-size="false" style:shrink-to-fit="false" fo:min-height="0cm" fo:min-width="0cm" fo:padding-top="0cm" fo:padding-bottom="0cm" fo:padding-left="0cm" fo:padding-right="0cm" fo:wrap-option="wrap" loext:decorative="false"/>
+      <style:graphic-properties draw:stroke="none" svg:stroke-width="0cm" draw:fill="none" loext:fill-use-slide-background="false" draw:textarea-horizontal-align="justify" draw:textarea-vertical-align="middle" draw:auto-grow-height="false" draw:fit-to-size="false" style:shrink-to-fit="false" fo:min-height="0cm" fo:min-width="0cm" fo:padding-top="0cm" fo:padding-bottom="0cm" fo:padding-left="0cm" fo:padding-right="0cm" fo:wrap-option="wrap" style:writing-mode="lr-tb" loext:decorative="false"/>
       <style:paragraph-properties style:writing-mode="lr-tb"/>
     </style:style>
     <style:style style:name="gr143" style:family="graphic" style:parent-style-name="standard" style:list-style-name="L7">
-      <style:graphic-properties draw:stroke="none" svg:stroke-width="0cm" draw:fill="none" loext:fill-use-slide-background="false" draw:textarea-horizontal-align="justify" draw:textarea-vertical-align="middle" draw:auto-grow-height="false" draw:fit-to-size="false" style:shrink-to-fit="false" fo:min-height="0cm" fo:min-width="0cm" fo:padding-top="0cm" fo:padding-bottom="0cm" fo:padding-left="0cm" fo:padding-right="0cm" fo:wrap-option="wrap" loext:decorative="false"/>
+      <style:graphic-properties draw:stroke="none" svg:stroke-width="0cm" draw:fill="none" loext:fill-use-slide-background="false" draw:textarea-horizontal-align="justify" draw:textarea-vertical-align="middle" draw:auto-grow-height="false" draw:fit-to-size="false" style:shrink-to-fit="false" fo:min-height="0cm" fo:min-width="0cm" fo:padding-top="0cm" fo:padding-bottom="0cm" fo:padding-left="0cm" fo:padding-right="0cm" fo:wrap-option="wrap" style:writing-mode="lr-tb" loext:decorative="false"/>
       <style:paragraph-properties style:writing-mode="lr-tb"/>
     </style:style>
     <style:style style:name="gr144" style:family="graphic" style:parent-style-name="standard" style:list-style-name="L9">
-      <style:graphic-properties draw:stroke="none" svg:stroke-width="0cm" draw:fill="none" loext:fill-use-slide-background="false" draw:textarea-horizontal-align="justify" draw:textarea-vertical-align="middle" draw:auto-grow-height="false" draw:fit-to-size="false" style:shrink-to-fit="false" fo:min-height="0cm" fo:min-width="0cm" fo:padding-top="0cm" fo:padding-bottom="0cm" fo:padding-left="0cm" fo:padding-right="0cm" fo:wrap-option="wrap" loext:decorative="false"/>
+      <style:graphic-properties draw:stroke="none" svg:stroke-width="0cm" draw:fill="none" loext:fill-use-slide-background="false" draw:textarea-horizontal-align="justify" draw:textarea-vertical-align="middle" draw:auto-grow-height="false" draw:fit-to-size="false" style:shrink-to-fit="false" fo:min-height="0cm" fo:min-width="0cm" fo:padding-top="0cm" fo:padding-bottom="0cm" fo:padding-left="0cm" fo:padding-right="0cm" fo:wrap-option="wrap" style:writing-mode="lr-tb" loext:decorative="false"/>
       <style:paragraph-properties style:writing-mode="lr-tb"/>
     </style:style>
     <style:style style:name="gr145" style:family="graphic" style:parent-style-name="standard" style:list-style-name="L8">
-      <style:graphic-properties draw:stroke="none" svg:stroke-width="0cm" draw:fill="none" loext:fill-use-slide-background="false" draw:textarea-horizontal-align="justify" draw:textarea-vertical-align="middle" draw:auto-grow-height="false" draw:fit-to-size="false" style:shrink-to-fit="false" fo:min-height="0cm" fo:min-width="0cm" fo:padding-top="0cm" fo:padding-bottom="0cm" fo:padding-left="0cm" fo:padding-right="0cm" fo:wrap-option="wrap" loext:decorative="false"/>
+      <style:graphic-properties draw:stroke="none" svg:stroke-width="0cm" draw:fill="none" loext:fill-use-slide-background="false" draw:textarea-horizontal-align="justify" draw:textarea-vertical-align="middle" draw:auto-grow-height="false" draw:fit-to-size="false" style:shrink-to-fit="false" fo:min-height="0cm" fo:min-width="0cm" fo:padding-top="0cm" fo:padding-bottom="0cm" fo:padding-left="0cm" fo:padding-right="0cm" fo:wrap-option="wrap" style:writing-mode="lr-tb" loext:decorative="false"/>
       <style:paragraph-properties style:writing-mode="lr-tb"/>
     </style:style>
     <style:style style:name="gr146" style:family="graphic" style:parent-style-name="standard" style:list-style-name="L8">
-      <style:graphic-properties draw:stroke="none" svg:stroke-width="0cm" draw:fill="none" loext:fill-use-slide-background="false" draw:textarea-horizontal-align="justify" draw:textarea-vertical-align="middle" draw:auto-grow-height="false" draw:fit-to-size="false" style:shrink-to-fit="false" fo:min-height="0cm" fo:min-width="0cm" fo:padding-top="0cm" fo:padding-bottom="0cm" fo:padding-left="0cm" fo:padding-right="0cm" fo:wrap-option="wrap" loext:decorative="false"/>
+      <style:graphic-properties draw:stroke="none" svg:stroke-width="0cm" draw:fill="none" loext:fill-use-slide-background="false" draw:textarea-horizontal-align="justify" draw:textarea-vertical-align="middle" draw:auto-grow-height="false" draw:fit-to-size="false" style:shrink-to-fit="false" fo:min-height="0cm" fo:min-width="0cm" fo:padding-top="0cm" fo:padding-bottom="0cm" fo:padding-left="0cm" fo:padding-right="0cm" fo:wrap-option="wrap" style:writing-mode="lr-tb" loext:decorative="false"/>
       <style:paragraph-properties style:writing-mode="lr-tb"/>
     </style:style>
     <style:style style:name="gr147" style:family="graphic" style:parent-style-name="standard" style:list-style-name="L8">
-      <style:graphic-properties draw:stroke="none" svg:stroke-width="0cm" draw:fill="none" loext:fill-use-slide-background="false" draw:textarea-horizontal-align="justify" draw:textarea-vertical-align="middle" draw:auto-grow-height="false" draw:fit-to-size="false" style:shrink-to-fit="false" fo:min-height="0cm" fo:min-width="0cm" fo:padding-top="0cm" fo:padding-bottom="0cm" fo:padding-left="0cm" fo:padding-right="0cm" fo:wrap-option="wrap" loext:decorative="false"/>
+      <style:graphic-properties draw:stroke="none" svg:stroke-width="0cm" draw:fill="none" loext:fill-use-slide-background="false" draw:textarea-horizontal-align="justify" draw:textarea-vertical-align="middle" draw:auto-grow-height="false" draw:fit-to-size="false" style:shrink-to-fit="false" fo:min-height="0cm" fo:min-width="0cm" fo:padding-top="0cm" fo:padding-bottom="0cm" fo:padding-left="0cm" fo:padding-right="0cm" fo:wrap-option="wrap" style:writing-mode="lr-tb" loext:decorative="false"/>
       <style:paragraph-properties style:writing-mode="lr-tb"/>
     </style:style>
     <style:style style:name="gr148" style:family="graphic" style:parent-style-name="standard">
-      <style:graphic-properties draw:stroke="solid" svg:stroke-width="0.026cm" svg:stroke-color="#7b6cb3" draw:stroke-linejoin="round" draw:fill="solid" draw:fill-color="#7b6cb3" draw:textarea-horizontal-align="justify" draw:textarea-vertical-align="top" draw:auto-grow-height="false" draw:fit-to-size="false" style:shrink-to-fit="false" fo:min-height="0cm" fo:min-width="0cm" fo:padding-top="0.125cm" fo:padding-bottom="0.125cm" fo:padding-left="0.25cm" fo:padding-right="0.25cm" fo:wrap-option="wrap" loext:decorative="false"/>
+      <style:graphic-properties draw:stroke="solid" svg:stroke-width="0.026cm" svg:stroke-color="#7b6cb3" draw:stroke-linejoin="round" draw:fill="solid" draw:fill-color="#7b6cb3" draw:textarea-horizontal-align="justify" draw:textarea-vertical-align="top" draw:auto-grow-height="false" draw:fit-to-size="false" style:shrink-to-fit="false" fo:min-height="0cm" fo:min-width="0cm" fo:padding-top="0.125cm" fo:padding-bottom="0.125cm" fo:padding-left="0.25cm" fo:padding-right="0.25cm" fo:wrap-option="wrap" loext:decorative="false">
+        <loext:stroke-complex-color loext:theme-type="accent1" loext:color-type="theme">
+          <loext:transformation loext:type="lummod" loext:value="7500"/>
+          <loext:transformation loext:type="lumoff" loext:value="0"/>
+        </loext:stroke-complex-color>
+        <loext:fill-complex-color loext:theme-type="accent1" loext:color-type="theme"/>
+      </style:graphic-properties>
     </style:style>
     <style:style style:name="gr149" style:family="graphic" style:parent-style-name="standard" style:list-style-name="L2">
-      <style:graphic-properties draw:stroke="none" svg:stroke-width="0cm" draw:fill="none" loext:fill-use-slide-background="false" draw:textarea-horizontal-align="justify" draw:textarea-vertical-align="middle" draw:auto-grow-height="false" draw:fit-to-size="false" style:shrink-to-fit="false" fo:min-height="0cm" fo:min-width="0cm" fo:padding-top="0cm" fo:padding-bottom="0cm" fo:padding-left="0cm" fo:padding-right="0cm" fo:wrap-option="wrap" loext:decorative="false"/>
+      <style:graphic-properties draw:stroke="none" svg:stroke-width="0cm" draw:fill="none" loext:fill-use-slide-background="false" draw:textarea-horizontal-align="justify" draw:textarea-vertical-align="middle" draw:auto-grow-height="false" draw:fit-to-size="false" style:shrink-to-fit="false" fo:min-height="0cm" fo:min-width="0cm" fo:padding-top="0cm" fo:padding-bottom="0cm" fo:padding-left="0cm" fo:padding-right="0cm" fo:wrap-option="wrap" style:writing-mode="lr-tb" loext:decorative="false"/>
       <style:paragraph-properties style:writing-mode="lr-tb"/>
     </style:style>
     <style:style style:name="gr150" style:family="graphic" style:parent-style-name="standard" style:list-style-name="L13">
-      <style:graphic-properties draw:stroke="none" svg:stroke-width="0cm" draw:fill="none" loext:fill-use-slide-background="false" draw:textarea-horizontal-align="justify" draw:textarea-vertical-align="middle" draw:auto-grow-height="false" draw:fit-to-size="false" style:shrink-to-fit="false" fo:min-height="0cm" fo:min-width="0cm" fo:padding-top="0cm" fo:padding-bottom="0cm" fo:padding-left="0cm" fo:padding-right="0cm" fo:wrap-option="wrap" loext:decorative="false"/>
+      <style:graphic-properties draw:stroke="none" svg:stroke-width="0cm" draw:fill="none" loext:fill-use-slide-background="false" draw:textarea-horizontal-align="justify" draw:textarea-vertical-align="middle" draw:auto-grow-height="false" draw:fit-to-size="false" style:shrink-to-fit="false" fo:min-height="0cm" fo:min-width="0cm" fo:padding-top="0cm" fo:padding-bottom="0cm" fo:padding-left="0cm" fo:padding-right="0cm" fo:wrap-option="wrap" style:writing-mode="lr-tb" loext:decorative="false"/>
       <style:paragraph-properties style:writing-mode="lr-tb"/>
     </style:style>
     <style:style style:name="gr151" style:family="graphic" style:parent-style-name="standard" style:list-style-name="L13">
-      <style:graphic-properties draw:stroke="none" svg:stroke-width="0cm" draw:fill="none" loext:fill-use-slide-background="false" draw:textarea-horizontal-align="justify" draw:textarea-vertical-align="middle" draw:auto-grow-height="false" draw:fit-to-size="false" style:shrink-to-fit="false" fo:min-height="0cm" fo:min-width="0cm" fo:padding-top="0cm" fo:padding-bottom="0cm" fo:padding-left="0cm" fo:padding-right="0cm" fo:wrap-option="wrap" loext:decorative="false"/>
+      <style:graphic-properties draw:stroke="none" svg:stroke-width="0cm" draw:fill="none" loext:fill-use-slide-background="false" draw:textarea-horizontal-align="justify" draw:textarea-vertical-align="middle" draw:auto-grow-height="false" draw:fit-to-size="false" style:shrink-to-fit="false" fo:min-height="0cm" fo:min-width="0cm" fo:padding-top="0cm" fo:padding-bottom="0cm" fo:padding-left="0cm" fo:padding-right="0cm" fo:wrap-option="wrap" style:writing-mode="lr-tb" loext:decorative="false"/>
       <style:paragraph-properties style:writing-mode="lr-tb"/>
     </style:style>
     <style:style style:name="gr152" style:family="graphic" style:parent-style-name="standard">
       <style:graphic-properties draw:stroke="none" svg:stroke-width="0cm" draw:fill="bitmap" draw:fill-image-name="msFillBitmap_20_17" style:repeat="stretch" draw:textarea-horizontal-align="justify" draw:textarea-vertical-align="top" draw:auto-grow-height="false" draw:fit-to-size="false" style:shrink-to-fit="false" fo:min-height="0cm" fo:min-width="0cm" fo:padding-top="0.125cm" fo:padding-bottom="0.125cm" fo:padding-left="0.25cm" fo:padding-right="0.25cm" fo:wrap-option="wrap" loext:decorative="false"/>
     </style:style>
     <style:style style:name="gr153" style:family="graphic" style:parent-style-name="standard" style:list-style-name="L2">
-      <style:graphic-properties draw:stroke="none" svg:stroke-width="0cm" draw:fill="none" loext:fill-use-slide-background="false" draw:textarea-horizontal-align="justify" draw:textarea-vertical-align="middle" draw:auto-grow-height="false" draw:fit-to-size="false" style:shrink-to-fit="false" fo:min-height="0cm" fo:min-width="0cm" fo:padding-top="0cm" fo:padding-bottom="0cm" fo:padding-left="0cm" fo:padding-right="0cm" fo:wrap-option="wrap" loext:decorative="false"/>
+      <style:graphic-properties draw:stroke="none" svg:stroke-width="0cm" draw:fill="none" loext:fill-use-slide-background="false" draw:textarea-horizontal-align="justify" draw:textarea-vertical-align="middle" draw:auto-grow-height="false" draw:fit-to-size="false" style:shrink-to-fit="false" fo:min-height="0cm" fo:min-width="0cm" fo:padding-top="0cm" fo:padding-bottom="0cm" fo:padding-left="0cm" fo:padding-right="0cm" fo:wrap-option="wrap" style:writing-mode="lr-tb" loext:decorative="false"/>
       <style:paragraph-properties style:writing-mode="lr-tb"/>
     </style:style>
     <style:style style:name="gr154" style:family="graphic" style:parent-style-name="standard">
-      <style:graphic-properties draw:stroke="solid" svg:stroke-width="0.026cm" svg:stroke-color="#25606e" draw:stroke-linejoin="round" draw:fill="solid" draw:fill-color="#16414d" draw:textarea-horizontal-align="justify" draw:textarea-vertical-align="top" draw:auto-grow-height="false" draw:fit-to-size="false" style:shrink-to-fit="false" fo:min-height="0cm" fo:min-width="0cm" fo:padding-top="0.125cm" fo:padding-bottom="0.125cm" fo:padding-left="0.25cm" fo:padding-right="0.25cm" fo:wrap-option="wrap" loext:decorative="false"/>
+      <style:graphic-properties draw:stroke="solid" svg:stroke-width="0.026cm" svg:stroke-color="#25606e" draw:stroke-linejoin="round" draw:fill="solid" draw:fill-color="#16414d" draw:textarea-horizontal-align="justify" draw:textarea-vertical-align="top" draw:auto-grow-height="false" draw:fit-to-size="false" style:shrink-to-fit="false" fo:min-height="0cm" fo:min-width="0cm" fo:padding-top="0.125cm" fo:padding-bottom="0.125cm" fo:padding-left="0.25cm" fo:padding-right="0.25cm" fo:wrap-option="wrap" loext:decorative="false">
+        <loext:stroke-complex-color loext:theme-type="accent1" loext:color-type="theme">
+          <loext:transformation loext:type="lummod" loext:value="7500"/>
+          <loext:transformation loext:type="lumoff" loext:value="0"/>
+        </loext:stroke-complex-color>
+        <loext:fill-complex-color loext:theme-type="accent1" loext:color-type="theme"/>
+      </style:graphic-properties>
     </style:style>
     <style:style style:name="gr155" style:family="graphic" style:parent-style-name="standard" style:list-style-name="L2">
-      <style:graphic-properties draw:stroke="none" svg:stroke-width="0cm" draw:fill="none" loext:fill-use-slide-background="false" draw:textarea-horizontal-align="justify" draw:textarea-vertical-align="middle" draw:auto-grow-height="false" draw:fit-to-size="false" style:shrink-to-fit="false" fo:min-height="0cm" fo:min-width="0cm" fo:padding-top="0cm" fo:padding-bottom="0cm" fo:padding-left="0cm" fo:padding-right="0cm" fo:wrap-option="wrap" loext:decorative="false"/>
+      <style:graphic-properties draw:stroke="none" svg:stroke-width="0cm" draw:fill="none" loext:fill-use-slide-background="false" draw:textarea-horizontal-align="justify" draw:textarea-vertical-align="middle" draw:auto-grow-height="false" draw:fit-to-size="false" style:shrink-to-fit="false" fo:min-height="0cm" fo:min-width="0cm" fo:padding-top="0cm" fo:padding-bottom="0cm" fo:padding-left="0cm" fo:padding-right="0cm" fo:wrap-option="wrap" style:writing-mode="lr-tb" loext:decorative="false"/>
       <style:paragraph-properties style:writing-mode="lr-tb"/>
     </style:style>
     <style:style style:name="gr156" style:family="graphic" style:parent-style-name="standard" style:list-style-name="L3">
-      <style:graphic-properties draw:stroke="none" svg:stroke-width="0cm" draw:fill="none" loext:fill-use-slide-background="false" draw:textarea-horizontal-align="justify" draw:textarea-vertical-align="top" draw:auto-grow-height="false" draw:fit-to-size="false" style:shrink-to-fit="false" fo:min-height="0cm" fo:min-width="0cm" fo:padding-top="0cm" fo:padding-bottom="0cm" fo:padding-left="0cm" fo:padding-right="0cm" fo:wrap-option="wrap" loext:decorative="false"/>
+      <style:graphic-properties draw:stroke="none" svg:stroke-width="0cm" draw:fill="none" loext:fill-use-slide-background="false" draw:textarea-horizontal-align="justify" draw:textarea-vertical-align="top" draw:auto-grow-height="false" draw:fit-to-size="false" style:shrink-to-fit="false" fo:min-height="0cm" fo:min-width="0cm" fo:padding-top="0cm" fo:padding-bottom="0cm" fo:padding-left="0cm" fo:padding-right="0cm" fo:wrap-option="wrap" style:writing-mode="lr-tb" loext:decorative="false"/>
       <style:paragraph-properties style:writing-mode="lr-tb"/>
     </style:style>
     <style:style style:name="gr157" style:family="graphic" style:parent-style-name="standard" style:list-style-name="L14">
-      <style:graphic-properties draw:stroke="none" svg:stroke-width="0cm" draw:fill="none" loext:fill-use-slide-background="false" draw:textarea-horizontal-align="justify" draw:textarea-vertical-align="top" draw:auto-grow-height="false" draw:fit-to-size="false" style:shrink-to-fit="false" fo:min-height="0cm" fo:min-width="0cm" fo:padding-top="0cm" fo:padding-bottom="0cm" fo:padding-left="0cm" fo:padding-right="0cm" fo:wrap-option="wrap" loext:decorative="false"/>
+      <style:graphic-properties draw:stroke="none" svg:stroke-width="0cm" draw:fill="none" loext:fill-use-slide-background="false" draw:textarea-horizontal-align="justify" draw:textarea-vertical-align="top" draw:auto-grow-height="false" draw:fit-to-size="false" style:shrink-to-fit="false" fo:min-height="0cm" fo:min-width="0cm" fo:padding-top="0cm" fo:padding-bottom="0cm" fo:padding-left="0cm" fo:padding-right="0cm" fo:wrap-option="wrap" style:writing-mode="lr-tb" loext:decorative="false"/>
       <style:paragraph-properties style:writing-mode="lr-tb"/>
     </style:style>
     <style:style style:name="gr158" style:family="graphic" style:parent-style-name="standard" style:list-style-name="L2">
-      <style:graphic-properties draw:stroke="none" svg:stroke-width="0cm" draw:fill="none" loext:fill-use-slide-background="false" draw:textarea-horizontal-align="justify" draw:textarea-vertical-align="middle" draw:auto-grow-height="false" draw:fit-to-size="false" style:shrink-to-fit="false" fo:min-height="0cm" fo:min-width="0cm" fo:padding-top="0cm" fo:padding-bottom="0cm" fo:padding-left="0cm" fo:padding-right="0cm" fo:wrap-option="wrap" loext:decorative="false"/>
+      <style:graphic-properties draw:stroke="none" svg:stroke-width="0cm" draw:fill="none" loext:fill-use-slide-background="false" draw:textarea-horizontal-align="justify" draw:textarea-vertical-align="middle" draw:auto-grow-height="false" draw:fit-to-size="false" style:shrink-to-fit="false" fo:min-height="0cm" fo:min-width="0cm" fo:padding-top="0cm" fo:padding-bottom="0cm" fo:padding-left="0cm" fo:padding-right="0cm" fo:wrap-option="wrap" style:writing-mode="lr-tb" loext:decorative="false"/>
       <style:paragraph-properties style:writing-mode="lr-tb"/>
     </style:style>
     <style:style style:name="gr159" style:family="graphic" style:parent-style-name="standard" style:list-style-name="L3">
-      <style:graphic-properties draw:stroke="none" svg:stroke-width="0cm" draw:fill="none" loext:fill-use-slide-background="false" draw:textarea-horizontal-align="justify" draw:textarea-vertical-align="top" draw:auto-grow-height="false" draw:fit-to-size="false" style:shrink-to-fit="false" fo:min-height="0cm" fo:min-width="0cm" fo:padding-top="0cm" fo:padding-bottom="0cm" fo:padding-left="0cm" fo:padding-right="0cm" fo:wrap-option="wrap" loext:decorative="false"/>
+      <style:graphic-properties draw:stroke="none" svg:stroke-width="0cm" draw:fill="none" loext:fill-use-slide-background="false" draw:textarea-horizontal-align="justify" draw:textarea-vertical-align="top" draw:auto-grow-height="false" draw:fit-to-size="false" style:shrink-to-fit="false" fo:min-height="0cm" fo:min-width="0cm" fo:padding-top="0cm" fo:padding-bottom="0cm" fo:padding-left="0cm" fo:padding-right="0cm" fo:wrap-option="wrap" style:writing-mode="lr-tb" loext:decorative="false"/>
       <style:paragraph-properties style:writing-mode="lr-tb"/>
     </style:style>
     <style:style style:name="gr160" style:family="graphic" style:parent-style-name="standard" style:list-style-name="L15">
-      <style:graphic-properties draw:stroke="none" svg:stroke-width="0cm" draw:fill="none" loext:fill-use-slide-background="false" draw:textarea-horizontal-align="justify" draw:textarea-vertical-align="top" draw:auto-grow-height="false" draw:fit-to-size="false" style:shrink-to-fit="false" fo:min-height="0cm" fo:min-width="0cm" fo:padding-top="0cm" fo:padding-bottom="0cm" fo:padding-left="0cm" fo:padding-right="0cm" fo:wrap-option="wrap" loext:decorative="false"/>
+      <style:graphic-properties draw:stroke="none" svg:stroke-width="0cm" draw:fill="none" loext:fill-use-slide-background="false" draw:textarea-horizontal-align="justify" draw:textarea-vertical-align="top" draw:auto-grow-height="false" draw:fit-to-size="false" style:shrink-to-fit="false" fo:min-height="0cm" fo:min-width="0cm" fo:padding-top="0cm" fo:padding-bottom="0cm" fo:padding-left="0cm" fo:padding-right="0cm" fo:wrap-option="wrap" style:writing-mode="lr-tb" loext:decorative="false"/>
       <style:paragraph-properties style:writing-mode="lr-tb"/>
     </style:style>
     <style:style style:name="gr161" style:family="graphic" style:parent-style-name="standard" style:list-style-name="L2">
-      <style:graphic-properties draw:stroke="none" svg:stroke-width="0cm" draw:fill="none" loext:fill-use-slide-background="false" draw:textarea-horizontal-align="justify" draw:textarea-vertical-align="middle" draw:auto-grow-height="false" draw:fit-to-size="false" style:shrink-to-fit="false" fo:min-height="0cm" fo:min-width="0cm" fo:padding-top="0cm" fo:padding-bottom="0cm" fo:padding-left="0cm" fo:padding-right="0cm" fo:wrap-option="wrap" loext:decorative="false"/>
+      <style:graphic-properties draw:stroke="none" svg:stroke-width="0cm" draw:fill="none" loext:fill-use-slide-background="false" draw:textarea-horizontal-align="justify" draw:textarea-vertical-align="middle" draw:auto-grow-height="false" draw:fit-to-size="false" style:shrink-to-fit="false" fo:min-height="0cm" fo:min-width="0cm" fo:padding-top="0cm" fo:padding-bottom="0cm" fo:padding-left="0cm" fo:padding-right="0cm" fo:wrap-option="wrap" style:writing-mode="lr-tb" loext:decorative="false"/>
       <style:paragraph-properties style:writing-mode="lr-tb"/>
     </style:style>
     <style:style style:name="gr162" style:family="graphic" style:parent-style-name="standard" style:list-style-name="L3">
-      <style:graphic-properties draw:stroke="none" svg:stroke-width="0cm" draw:fill="none" loext:fill-use-slide-background="false" draw:textarea-horizontal-align="justify" draw:textarea-vertical-align="top" draw:auto-grow-height="false" draw:fit-to-size="false" style:shrink-to-fit="false" fo:min-height="0cm" fo:min-width="0cm" fo:padding-top="0cm" fo:padding-bottom="0cm" fo:padding-left="0cm" fo:padding-right="0cm" fo:wrap-option="wrap" loext:decorative="false"/>
+      <style:graphic-properties draw:stroke="none" svg:stroke-width="0cm" draw:fill="none" loext:fill-use-slide-background="false" draw:textarea-horizontal-align="justify" draw:textarea-vertical-align="top" draw:auto-grow-height="false" draw:fit-to-size="false" style:shrink-to-fit="false" fo:min-height="0cm" fo:min-width="0cm" fo:padding-top="0cm" fo:padding-bottom="0cm" fo:padding-left="0cm" fo:padding-right="0cm" fo:wrap-option="wrap" style:writing-mode="lr-tb" loext:decorative="false"/>
       <style:paragraph-properties style:writing-mode="lr-tb"/>
     </style:style>
     <style:style style:name="gr163" style:family="graphic" style:parent-style-name="standard" style:list-style-name="L16">
-      <style:graphic-properties draw:stroke="none" svg:stroke-width="0cm" draw:fill="none" loext:fill-use-slide-background="false" draw:textarea-horizontal-align="justify" draw:textarea-vertical-align="top" draw:auto-grow-height="false" draw:fit-to-size="false" style:shrink-to-fit="false" fo:min-height="0cm" fo:min-width="0cm" fo:padding-top="0cm" fo:padding-bottom="0cm" fo:padding-left="0cm" fo:padding-right="0cm" fo:wrap-option="wrap" loext:decorative="false"/>
+      <style:graphic-properties draw:stroke="none" svg:stroke-width="0cm" draw:fill="none" loext:fill-use-slide-background="false" draw:textarea-horizontal-align="justify" draw:textarea-vertical-align="top" draw:auto-grow-height="false" draw:fit-to-size="false" style:shrink-to-fit="false" fo:min-height="0cm" fo:min-width="0cm" fo:padding-top="0cm" fo:padding-bottom="0cm" fo:padding-left="0cm" fo:padding-right="0cm" fo:wrap-option="wrap" style:writing-mode="lr-tb" loext:decorative="false"/>
       <style:paragraph-properties style:writing-mode="lr-tb"/>
     </style:style>
     <style:style style:name="gr164" style:family="graphic" style:parent-style-name="standard" style:list-style-name="L2">
-      <style:graphic-properties draw:stroke="none" svg:stroke-width="0cm" draw:fill="none" loext:fill-use-slide-background="false" draw:textarea-horizontal-align="justify" draw:textarea-vertical-align="middle" draw:auto-grow-height="false" draw:fit-to-size="false" style:shrink-to-fit="false" fo:min-height="0cm" fo:min-width="0cm" fo:padding-top="0cm" fo:padding-bottom="0cm" fo:padding-left="0cm" fo:padding-right="0cm" fo:wrap-option="wrap" loext:decorative="false"/>
+      <style:graphic-properties draw:stroke="none" svg:stroke-width="0cm" draw:fill="none" loext:fill-use-slide-background="false" draw:textarea-horizontal-align="justify" draw:textarea-vertical-align="middle" draw:auto-grow-height="false" draw:fit-to-size="false" style:shrink-to-fit="false" fo:min-height="0cm" fo:min-width="0cm" fo:padding-top="0cm" fo:padding-bottom="0cm" fo:padding-left="0cm" fo:padding-right="0cm" fo:wrap-option="wrap" style:writing-mode="lr-tb" loext:decorative="false"/>
       <style:paragraph-properties style:writing-mode="lr-tb"/>
     </style:style>
     <style:style style:name="gr165" style:family="graphic" style:parent-style-name="standard" style:list-style-name="L3">
-      <style:graphic-properties draw:stroke="none" svg:stroke-width="0cm" draw:fill="none" loext:fill-use-slide-background="false" draw:textarea-horizontal-align="justify" draw:textarea-vertical-align="top" draw:auto-grow-height="false" draw:fit-to-size="false" style:shrink-to-fit="false" fo:min-height="0cm" fo:min-width="0cm" fo:padding-top="0cm" fo:padding-bottom="0cm" fo:padding-left="0cm" fo:padding-right="0cm" fo:wrap-option="wrap" loext:decorative="false"/>
+      <style:graphic-properties draw:stroke="none" svg:stroke-width="0cm" draw:fill="none" loext:fill-use-slide-background="false" draw:textarea-horizontal-align="justify" draw:textarea-vertical-align="top" draw:auto-grow-height="false" draw:fit-to-size="false" style:shrink-to-fit="false" fo:min-height="0cm" fo:min-width="0cm" fo:padding-top="0cm" fo:padding-bottom="0cm" fo:padding-left="0cm" fo:padding-right="0cm" fo:wrap-option="wrap" style:writing-mode="lr-tb" loext:decorative="false"/>
       <style:paragraph-properties style:writing-mode="lr-tb"/>
     </style:style>
     <style:style style:name="gr166" style:family="graphic" style:parent-style-name="standard" style:list-style-name="L17">
-      <style:graphic-properties draw:stroke="none" svg:stroke-width="0cm" draw:fill="none" loext:fill-use-slide-background="false" draw:textarea-horizontal-align="justify" draw:textarea-vertical-align="top" draw:auto-grow-height="false" draw:fit-to-size="false" style:shrink-to-fit="false" fo:min-height="0cm" fo:min-width="0cm" fo:padding-top="0cm" fo:padding-bottom="0cm" fo:padding-left="0cm" fo:padding-right="0cm" fo:wrap-option="wrap" loext:decorative="false"/>
+      <style:graphic-properties draw:stroke="none" svg:stroke-width="0cm" draw:fill="none" loext:fill-use-slide-background="false" draw:textarea-horizontal-align="justify" draw:textarea-vertical-align="top" draw:auto-grow-height="false" draw:fit-to-size="false" style:shrink-to-fit="false" fo:min-height="0cm" fo:min-width="0cm" fo:padding-top="0cm" fo:padding-bottom="0cm" fo:padding-left="0cm" fo:padding-right="0cm" fo:wrap-option="wrap" style:writing-mode="lr-tb" loext:decorative="false"/>
       <style:paragraph-properties style:writing-mode="lr-tb"/>
     </style:style>
     <style:style style:name="gr167" style:family="graphic" style:parent-style-name="standard">
-      <style:graphic-properties draw:stroke="solid" svg:stroke-width="0.035cm" svg:stroke-color="#e6f2f4" draw:stroke-linejoin="round" draw:fill="solid" draw:fill-color="#e6f2f4" draw:textarea-horizontal-align="justify" draw:textarea-vertical-align="top" draw:auto-grow-height="false" draw:fit-to-size="false" style:shrink-to-fit="false" fo:min-height="0cm" fo:min-width="0cm" fo:padding-top="0.125cm" fo:padding-bottom="0.125cm" fo:padding-left="0.25cm" fo:padding-right="0.25cm" fo:wrap-option="wrap" loext:decorative="false"/>
+      <style:graphic-properties draw:stroke="solid" svg:stroke-width="0.035cm" svg:stroke-color="#e6f2f4" draw:stroke-linejoin="round" draw:fill="solid" draw:fill-color="#e6f2f4" draw:textarea-horizontal-align="justify" draw:textarea-vertical-align="top" draw:auto-grow-height="false" draw:fit-to-size="false" style:shrink-to-fit="false" fo:min-height="0cm" fo:min-width="0cm" fo:padding-top="0.125cm" fo:padding-bottom="0.125cm" fo:padding-left="0.25cm" fo:padding-right="0.25cm" fo:wrap-option="wrap" loext:decorative="false">
+        <loext:stroke-complex-color loext:theme-type="accent1" loext:color-type="theme">
+          <loext:transformation loext:type="lummod" loext:value="7500"/>
+          <loext:transformation loext:type="lumoff" loext:value="0"/>
+        </loext:stroke-complex-color>
+        <loext:fill-complex-color loext:theme-type="accent1" loext:color-type="theme"/>
+      </style:graphic-properties>
     </style:style>
     <style:style style:name="gr168" style:family="graphic" style:parent-style-name="standard" style:list-style-name="L7">
-      <style:graphic-properties draw:stroke="none" svg:stroke-width="0cm" draw:fill="none" loext:fill-use-slide-background="false" draw:textarea-horizontal-align="justify" draw:textarea-vertical-align="middle" draw:auto-grow-height="false" draw:fit-to-size="false" style:shrink-to-fit="false" fo:min-height="0cm" fo:min-width="0cm" fo:padding-top="0cm" fo:padding-bottom="0cm" fo:padding-left="0cm" fo:padding-right="0cm" fo:wrap-option="wrap" loext:decorative="false"/>
+      <style:graphic-properties draw:stroke="none" svg:stroke-width="0cm" draw:fill="none" loext:fill-use-slide-background="false" draw:textarea-horizontal-align="justify" draw:textarea-vertical-align="middle" draw:auto-grow-height="false" draw:fit-to-size="false" style:shrink-to-fit="false" fo:min-height="0cm" fo:min-width="0cm" fo:padding-top="0cm" fo:padding-bottom="0cm" fo:padding-left="0cm" fo:padding-right="0cm" fo:wrap-option="wrap" style:writing-mode="lr-tb" loext:decorative="false"/>
       <style:paragraph-properties style:writing-mode="lr-tb"/>
     </style:style>
     <style:style style:name="gr169" style:family="graphic" style:parent-style-name="standard">
       <style:graphic-properties draw:stroke="none" svg:stroke-width="0cm" draw:fill="bitmap" draw:fill-image-name="msFillBitmap_20_19" style:repeat="stretch" draw:textarea-horizontal-align="justify" draw:textarea-vertical-align="top" draw:auto-grow-height="false" draw:fit-to-size="false" style:shrink-to-fit="false" fo:min-height="0cm" fo:min-width="0cm" fo:padding-top="0.125cm" fo:padding-bottom="0.125cm" fo:padding-left="0.25cm" fo:padding-right="0.25cm" fo:wrap-option="wrap" loext:decorative="false"/>
     </style:style>
     <style:style style:name="gr170" style:family="graphic" style:parent-style-name="standard" style:list-style-name="L2">
-      <style:graphic-properties draw:stroke="none" svg:stroke-width="0cm" draw:fill="none" loext:fill-use-slide-background="false" draw:textarea-horizontal-align="justify" draw:textarea-vertical-align="middle" draw:auto-grow-height="false" draw:fit-to-size="false" style:shrink-to-fit="false" fo:min-height="1.395cm" fo:min-width="22.858cm" fo:padding-top="0cm" fo:padding-bottom="0cm" fo:padding-left="0cm" fo:padding-right="0cm" fo:wrap-option="wrap" loext:decorative="false"/>
+      <style:graphic-properties draw:stroke="none" svg:stroke-width="0cm" draw:fill="none" loext:fill-use-slide-background="false" draw:textarea-horizontal-align="justify" draw:textarea-vertical-align="middle" draw:auto-grow-height="false" draw:fit-to-size="false" style:shrink-to-fit="false" fo:min-height="1.395cm" fo:min-width="22.858cm" fo:padding-top="0cm" fo:padding-bottom="0cm" fo:padding-left="0cm" fo:padding-right="0cm" fo:wrap-option="wrap" style:writing-mode="lr-tb" loext:decorative="false"/>
       <style:paragraph-properties style:writing-mode="lr-tb"/>
     </style:style>
     <style:style style:name="gr171" style:family="graphic" style:parent-style-name="standard">
@@ -3478,242 +3614,282 @@
       <style:paragraph-properties fo:border="0.99pt solid #ffffff" style:font-independent-line-spacing="true"/>
     </style:style>
     <style:style style:name="ce3" style:family="table-cell">
-      <loext:graphic-properties draw:fill="solid" draw:fill-color="#dae5f1" draw:textarea-vertical-align="middle" fo:padding-top="0.127cm" fo:padding-bottom="0.127cm" fo:padding-left="0.254cm" fo:padding-right="0.254cm"/>
+      <loext:graphic-properties draw:fill="solid" draw:fill-color="#dae5f1" draw:textarea-vertical-align="middle" fo:padding-top="0.127cm" fo:padding-bottom="0.127cm" fo:padding-left="0.254cm" fo:padding-right="0.254cm">
+        <loext:fill-complex-color loext:theme-type="accent1" loext:color-type="theme"/>
+      </loext:graphic-properties>
       <style:paragraph-properties fo:border="0.99pt solid #ffffff" style:font-independent-line-spacing="true"/>
     </style:style>
     <style:style style:name="ce4" style:family="table-cell">
-      <loext:graphic-properties draw:fill="solid" draw:fill-color="#ceddeb" draw:textarea-vertical-align="middle" fo:padding-top="0.127cm" fo:padding-bottom="0.127cm" fo:padding-left="0.254cm" fo:padding-right="0.254cm"/>
+      <loext:graphic-properties draw:fill="solid" draw:fill-color="#ceddeb" draw:textarea-vertical-align="middle" fo:padding-top="0.127cm" fo:padding-bottom="0.127cm" fo:padding-left="0.254cm" fo:padding-right="0.254cm">
+        <loext:fill-complex-color loext:theme-type="accent1" loext:color-type="theme"/>
+      </loext:graphic-properties>
       <style:paragraph-properties fo:border="0.99pt solid #ffffff" style:font-independent-line-spacing="true"/>
     </style:style>
     <style:style style:name="ce5" style:family="table-cell">
-      <loext:graphic-properties draw:fill="solid" draw:fill-color="#8eacc9" draw:textarea-vertical-align="middle" fo:padding-top="0.127cm" fo:padding-bottom="0.127cm" fo:padding-left="0.254cm" fo:padding-right="0.254cm"/>
+      <loext:graphic-properties draw:fill="solid" draw:fill-color="#8eacc9" draw:textarea-vertical-align="middle" fo:padding-top="0.127cm" fo:padding-bottom="0.127cm" fo:padding-left="0.254cm" fo:padding-right="0.254cm">
+        <loext:fill-complex-color loext:theme-type="accent1" loext:color-type="theme"/>
+      </loext:graphic-properties>
       <style:paragraph-properties fo:border="0.99pt solid #ffffff" style:font-independent-line-spacing="true"/>
     </style:style>
     <style:style style:name="ce6" style:family="table-cell">
-      <loext:graphic-properties draw:fill="solid" draw:fill-color="#a4bcd5" draw:textarea-vertical-align="middle" fo:padding-top="0.127cm" fo:padding-bottom="0.127cm" fo:padding-left="0.254cm" fo:padding-right="0.254cm"/>
+      <loext:graphic-properties draw:fill="solid" draw:fill-color="#a4bcd5" draw:textarea-vertical-align="middle" fo:padding-top="0.127cm" fo:padding-bottom="0.127cm" fo:padding-left="0.254cm" fo:padding-right="0.254cm">
+        <loext:fill-complex-color loext:theme-type="accent1" loext:color-type="theme"/>
+      </loext:graphic-properties>
       <style:paragraph-properties fo:border="0.99pt solid #ffffff" style:font-independent-line-spacing="true"/>
     </style:style>
     <style:style style:name="ce7" style:family="table-cell">
-      <loext:graphic-properties draw:fill="solid" draw:fill-color="#306597" draw:textarea-vertical-align="middle" fo:padding-top="0.127cm" fo:padding-bottom="0.127cm" fo:padding-left="0.254cm" fo:padding-right="0.254cm"/>
+      <loext:graphic-properties draw:fill="solid" draw:fill-color="#306597" draw:textarea-vertical-align="middle" fo:padding-top="0.127cm" fo:padding-bottom="0.127cm" fo:padding-left="0.254cm" fo:padding-right="0.254cm">
+        <loext:fill-complex-color loext:theme-type="accent1" loext:color-type="theme"/>
+      </loext:graphic-properties>
       <style:paragraph-properties fo:border="0.99pt solid #ffffff" style:font-independent-line-spacing="true"/>
     </style:style>
     <style:style style:name="ce8" style:family="table-cell">
-      <loext:graphic-properties draw:fill="solid" draw:fill-color="#6d93b8" draw:textarea-vertical-align="middle" fo:padding-top="0.127cm" fo:padding-bottom="0.127cm" fo:padding-left="0.254cm" fo:padding-right="0.254cm"/>
+      <loext:graphic-properties draw:fill="solid" draw:fill-color="#6d93b8" draw:textarea-vertical-align="middle" fo:padding-top="0.127cm" fo:padding-bottom="0.127cm" fo:padding-left="0.254cm" fo:padding-right="0.254cm">
+        <loext:fill-complex-color loext:theme-type="accent1" loext:color-type="theme"/>
+      </loext:graphic-properties>
       <style:paragraph-properties fo:border="0.99pt solid #ffffff" style:font-independent-line-spacing="true"/>
     </style:style>
     <style:style style:name="P1" style:family="paragraph">
       <loext:graphic-properties draw:fill="none"/>
-      <style:paragraph-properties fo:text-align="left" style:font-independent-line-spacing="true" loext:paragraph-composer="false"/>
+      <style:paragraph-properties fo:text-align="left" style:font-independent-line-spacing="true"/>
       <style:text-properties fo:font-variant="normal" fo:text-transform="none" fo:color="#ffffff" loext:opacity="100%" style:text-outline="false" style:text-line-through-style="none" style:text-line-through-type="none" style:text-position="0% 100%" style:font-name="Arial" fo:font-size="18pt" fo:letter-spacing="normal" fo:language="en" fo:country="US" fo:font-style="normal" style:text-underline-style="none" fo:font-weight="normal" fo:background-color="transparent" style:font-size-asian="18pt" style:font-style-asian="normal" style:font-weight-asian="normal" style:font-size-complex="18pt" style:font-style-complex="normal" style:font-weight-complex="normal"/>
     </style:style>
     <style:style style:name="P2" style:family="paragraph">
-      <style:paragraph-properties fo:margin-left="0cm" fo:margin-right="0cm" fo:margin-top="0cm" fo:margin-bottom="0cm" fo:line-height="100%" fo:text-align="left" fo:text-indent="0cm" loext:tab-stop-distance="2.54cm" loext:paragraph-composer="false">
-        <style:tab-stops>
-          <style:tab-stop style:position="0cm"/>
-        </style:tab-stops>
-      </style:paragraph-properties>
-    </style:style>
-    <style:style style:name="P3" style:family="paragraph">
-      <loext:graphic-properties draw:fill="none"/>
-      <style:paragraph-properties fo:margin-left="0cm" fo:margin-right="0cm" fo:margin-top="0cm" fo:margin-bottom="0cm" fo:line-height="100%" fo:text-align="left" fo:text-indent="0cm" loext:tab-stop-distance="2.54cm" style:font-independent-line-spacing="true" loext:paragraph-composer="false">
+      <style:paragraph-properties fo:margin-left="0cm" fo:margin-right="0cm" fo:margin-top="0cm" fo:margin-bottom="0cm" fo:line-height="100%" fo:text-align="left" fo:text-indent="0cm" loext:tab-stop-distance="2.54cm">
         <style:tab-stops>
           <style:tab-stop style:position="0cm"/>
         </style:tab-stops>
       </style:paragraph-properties>
       <style:text-properties fo:font-size="18pt"/>
     </style:style>
-    <style:style style:name="P4" style:family="paragraph">
-      <style:paragraph-properties fo:margin-left="0cm" fo:margin-right="0cm" fo:margin-top="0cm" fo:margin-bottom="0.106cm" fo:line-height="100%" fo:text-align="left" fo:text-indent="0cm" loext:tab-stop-distance="2.54cm" loext:paragraph-composer="false">
-        <style:tab-stops/>
-      </style:paragraph-properties>
-    </style:style>
-    <style:style style:name="P5" style:family="paragraph">
+    <style:style style:name="P3" style:family="paragraph">
       <loext:graphic-properties draw:fill="none"/>
-      <style:paragraph-properties fo:margin-left="0cm" fo:margin-right="0cm" fo:margin-top="0cm" fo:margin-bottom="0.106cm" fo:line-height="100%" fo:text-align="left" fo:text-indent="0cm" loext:tab-stop-distance="2.54cm" style:font-independent-line-spacing="true" loext:paragraph-composer="false">
-        <style:tab-stops/>
-      </style:paragraph-properties>
-      <style:text-properties fo:font-size="18pt"/>
-    </style:style>
-    <style:style style:name="P6" style:family="paragraph">
-      <loext:graphic-properties draw:fill="none"/>
-      <style:paragraph-properties fo:text-align="left" loext:paragraph-composer="false"/>
-      <style:text-properties fo:font-size="18pt"/>
-    </style:style>
-    <style:style style:name="P7" style:family="paragraph">
-      <loext:graphic-properties draw:fill="bitmap" draw:fill-image-name="msFillBitmap_20_2" style:repeat="stretch"/>
-      <style:paragraph-properties fo:text-align="left" style:font-independent-line-spacing="true" loext:paragraph-composer="false"/>
-      <style:text-properties fo:font-variant="normal" fo:text-transform="none" fo:color="#000000" loext:opacity="100%" style:text-outline="false" style:text-line-through-style="none" style:text-line-through-type="none" style:text-position="0% 100%" style:font-name="Arial" fo:font-size="18pt" fo:letter-spacing="normal" fo:language="en" fo:country="US" fo:font-style="normal" style:text-underline-style="none" fo:font-weight="normal" fo:background-color="transparent" style:font-size-asian="18pt" style:font-style-asian="normal" style:font-weight-asian="normal" style:font-size-complex="18pt" style:font-style-complex="normal" style:font-weight-complex="normal"/>
-    </style:style>
-    <style:style style:name="P8" style:family="paragraph">
-      <style:paragraph-properties fo:margin-left="0cm" fo:margin-right="0cm" fo:margin-top="0cm" fo:margin-bottom="0cm" fo:line-height="100%" fo:text-align="left" fo:text-indent="0cm" loext:tab-stop-distance="0cm" loext:paragraph-composer="false">
-        <style:tab-stops>
-          <style:tab-stop style:position="0cm"/>
-        </style:tab-stops>
-      </style:paragraph-properties>
-    </style:style>
-    <style:style style:name="P9" style:family="paragraph">
-      <loext:graphic-properties draw:fill="none" draw:fill-color="#ffffff"/>
-      <style:paragraph-properties fo:text-align="left" style:font-independent-line-spacing="true" loext:paragraph-composer="false"/>
-      <style:text-properties fo:font-size="18pt"/>
-    </style:style>
-    <style:style style:name="P10" style:family="paragraph">
-      <style:paragraph-properties fo:margin-left="0cm" fo:margin-right="0cm" fo:margin-top="0cm" fo:margin-bottom="0cm" fo:line-height="100%" fo:text-align="right" fo:text-indent="0cm" loext:tab-stop-distance="2.54cm" loext:paragraph-composer="false">
-        <style:tab-stops>
-          <style:tab-stop style:position="0cm"/>
-        </style:tab-stops>
-      </style:paragraph-properties>
-      <style:text-properties fo:font-size="14pt" style:font-size-asian="14pt" style:font-size-complex="14pt"/>
-    </style:style>
-    <style:style style:name="P11" style:family="paragraph">
-      <loext:graphic-properties draw:fill="none" draw:fill-color="#ffffff"/>
-      <style:paragraph-properties fo:text-align="left" style:font-independent-line-spacing="true" loext:paragraph-composer="false"/>
-      <style:text-properties fo:font-size="12pt" style:font-size-asian="14pt" style:font-size-complex="14pt"/>
-    </style:style>
-    <style:style style:name="P12" style:family="paragraph">
-      <loext:graphic-properties draw:fill="solid" draw:fill-color="#e07a5f"/>
-      <style:paragraph-properties fo:text-align="left" style:font-independent-line-spacing="true" loext:paragraph-composer="false"/>
-      <style:text-properties fo:font-variant="normal" fo:text-transform="none" fo:color="#ffffff" loext:opacity="100%" style:text-outline="false" style:text-line-through-style="none" style:text-line-through-type="none" style:text-position="0% 100%" style:font-name="Arial" fo:font-size="18pt" fo:letter-spacing="normal" fo:language="en" fo:country="US" fo:font-style="normal" style:text-underline-style="none" fo:font-weight="normal" fo:background-color="transparent" style:font-size-asian="18pt" style:font-style-asian="normal" style:font-weight-asian="normal" style:font-size-complex="18pt" style:font-style-complex="normal" style:font-weight-complex="normal"/>
-    </style:style>
-    <style:style style:name="P13" style:family="paragraph">
-      <style:paragraph-properties fo:margin-left="0cm" fo:margin-right="0cm" fo:margin-top="0cm" fo:margin-bottom="0cm" fo:line-height="100%" fo:text-align="center" fo:text-indent="0cm" loext:tab-stop-distance="2.54cm" loext:paragraph-composer="false">
-        <style:tab-stops>
-          <style:tab-stop style:position="0cm"/>
-        </style:tab-stops>
-      </style:paragraph-properties>
-    </style:style>
-    <style:style style:name="P14" style:family="paragraph">
-      <loext:graphic-properties draw:fill="none"/>
-      <style:paragraph-properties fo:margin-left="0cm" fo:margin-right="0cm" fo:margin-top="0cm" fo:margin-bottom="0cm" fo:line-height="100%" fo:text-align="center" fo:text-indent="0cm" loext:tab-stop-distance="2.54cm" style:font-independent-line-spacing="true" loext:paragraph-composer="false">
+      <style:paragraph-properties fo:margin-left="0cm" fo:margin-right="0cm" fo:margin-top="0cm" fo:margin-bottom="0cm" fo:line-height="100%" fo:text-align="left" fo:text-indent="0cm" loext:tab-stop-distance="2.54cm" style:writing-mode="lr-tb" style:font-independent-line-spacing="true">
         <style:tab-stops>
           <style:tab-stop style:position="0cm"/>
         </style:tab-stops>
       </style:paragraph-properties>
       <style:text-properties fo:font-size="18pt"/>
     </style:style>
-    <style:style style:name="P15" style:family="paragraph">
-      <loext:graphic-properties draw:fill="none"/>
-      <style:paragraph-properties fo:text-align="left" style:font-independent-line-spacing="true" loext:paragraph-composer="false"/>
-      <style:text-properties fo:font-variant="normal" fo:text-transform="none" fo:color="#000000" loext:opacity="100%" style:text-outline="false" style:text-line-through-style="none" style:text-line-through-type="none" style:text-position="0% 100%" style:font-name="Arial" fo:font-size="18pt" fo:letter-spacing="normal" fo:language="en" fo:country="US" fo:font-style="normal" style:text-underline-style="none" fo:font-weight="normal" fo:background-color="transparent" style:font-size-asian="18pt" style:font-style-asian="normal" style:font-weight-asian="normal" style:font-size-complex="18pt" style:font-style-complex="normal" style:font-weight-complex="normal"/>
-    </style:style>
-    <style:style style:name="P16" style:family="paragraph">
-      <loext:graphic-properties draw:fill="solid" draw:fill-color="#ffffff"/>
-      <style:paragraph-properties fo:text-align="left" style:font-independent-line-spacing="true" loext:paragraph-composer="false"/>
-      <style:text-properties fo:font-variant="normal" fo:text-transform="none" fo:color="#000000" loext:opacity="100%" style:text-outline="false" style:text-line-through-style="none" style:text-line-through-type="none" style:text-position="0% 100%" style:font-name="Arial" fo:font-size="18pt" fo:letter-spacing="normal" fo:language="en" fo:country="US" fo:font-style="normal" style:text-underline-style="none" fo:font-weight="normal" fo:background-color="transparent" style:font-size-asian="18pt" style:font-style-asian="normal" style:font-weight-asian="normal" style:font-size-complex="18pt" style:font-style-complex="normal" style:font-weight-complex="normal"/>
-    </style:style>
-    <style:style style:name="P17" style:family="paragraph">
-      <loext:graphic-properties draw:fill="solid" draw:fill-color="#3d7ea6"/>
-      <style:paragraph-properties fo:text-align="left" style:font-independent-line-spacing="true" loext:paragraph-composer="false"/>
-      <style:text-properties fo:font-variant="normal" fo:text-transform="none" fo:color="#ffffff" loext:opacity="100%" style:text-outline="false" style:text-line-through-style="none" style:text-line-through-type="none" style:text-position="0% 100%" style:font-name="Arial" fo:font-size="18pt" fo:letter-spacing="normal" fo:language="en" fo:country="US" fo:font-style="normal" style:text-underline-style="none" fo:font-weight="normal" fo:background-color="transparent" style:font-size-asian="18pt" style:font-style-asian="normal" style:font-weight-asian="normal" style:font-size-complex="18pt" style:font-style-complex="normal" style:font-weight-complex="normal"/>
-    </style:style>
-    <style:style style:name="P18" style:family="paragraph">
-      <loext:graphic-properties draw:fill="solid" draw:fill-color="#5fa8d3"/>
-      <style:paragraph-properties fo:text-align="left" style:font-independent-line-spacing="true" loext:paragraph-composer="false"/>
-      <style:text-properties fo:font-variant="normal" fo:text-transform="none" fo:color="#000000" loext:opacity="100%" style:text-outline="false" style:text-line-through-style="none" style:text-line-through-type="none" style:text-position="0% 100%" style:font-name="Arial" fo:font-size="18pt" fo:letter-spacing="normal" fo:language="en" fo:country="US" fo:font-style="normal" style:text-underline-style="none" fo:font-weight="normal" fo:background-color="transparent" style:font-size-asian="18pt" style:font-style-asian="normal" style:font-weight-asian="normal" style:font-size-complex="18pt" style:font-style-complex="normal" style:font-weight-complex="normal"/>
-    </style:style>
-    <style:style style:name="P19" style:family="paragraph">
-      <loext:graphic-properties draw:fill="solid" draw:fill-color="#4cc3b0"/>
-      <style:paragraph-properties fo:text-align="left" style:font-independent-line-spacing="true" loext:paragraph-composer="false"/>
-      <style:text-properties fo:font-variant="normal" fo:text-transform="none" fo:color="#000000" loext:opacity="100%" style:text-outline="false" style:text-line-through-style="none" style:text-line-through-type="none" style:text-position="0% 100%" style:font-name="Arial" fo:font-size="18pt" fo:letter-spacing="normal" fo:language="en" fo:country="US" fo:font-style="normal" style:text-underline-style="none" fo:font-weight="normal" fo:background-color="transparent" style:font-size-asian="18pt" style:font-style-asian="normal" style:font-weight-asian="normal" style:font-size-complex="18pt" style:font-style-complex="normal" style:font-weight-complex="normal"/>
-    </style:style>
-    <style:style style:name="P20" style:family="paragraph">
-      <loext:graphic-properties draw:fill="solid" draw:fill-color="#7b6cb3"/>
-      <style:paragraph-properties fo:text-align="left" style:font-independent-line-spacing="true" loext:paragraph-composer="false"/>
-      <style:text-properties fo:font-variant="normal" fo:text-transform="none" fo:color="#ffffff" loext:opacity="100%" style:text-outline="false" style:text-line-through-style="none" style:text-line-through-type="none" style:text-position="0% 100%" style:font-name="Arial" fo:font-size="18pt" fo:letter-spacing="normal" fo:language="en" fo:country="US" fo:font-style="normal" style:text-underline-style="none" fo:font-weight="normal" fo:background-color="transparent" style:font-size-asian="18pt" style:font-style-asian="normal" style:font-weight-asian="normal" style:font-size-complex="18pt" style:font-style-complex="normal" style:font-weight-complex="normal"/>
-    </style:style>
-    <style:style style:name="P21" style:family="paragraph">
-      <loext:graphic-properties draw:fill="solid" draw:fill-color="#8fa3ad"/>
-      <style:paragraph-properties fo:text-align="left" style:font-independent-line-spacing="true" loext:paragraph-composer="false"/>
-      <style:text-properties fo:font-variant="normal" fo:text-transform="none" fo:color="#000000" loext:opacity="100%" style:text-outline="false" style:text-line-through-style="none" style:text-line-through-type="none" style:text-position="0% 100%" style:font-name="Arial" fo:font-size="18pt" fo:letter-spacing="normal" fo:language="en" fo:country="US" fo:font-style="normal" style:text-underline-style="none" fo:font-weight="normal" fo:background-color="transparent" style:font-size-asian="18pt" style:font-style-asian="normal" style:font-weight-asian="normal" style:font-size-complex="18pt" style:font-style-complex="normal" style:font-weight-complex="normal"/>
-    </style:style>
-    <style:style style:name="P22" style:family="paragraph">
-      <loext:graphic-properties draw:fill="solid" draw:fill-color="#f2a65a"/>
-      <style:paragraph-properties fo:text-align="left" style:font-independent-line-spacing="true" loext:paragraph-composer="false"/>
-      <style:text-properties fo:font-variant="normal" fo:text-transform="none" fo:color="#000000" loext:opacity="100%" style:text-outline="false" style:text-line-through-style="none" style:text-line-through-type="none" style:text-position="0% 100%" style:font-name="Arial" fo:font-size="18pt" fo:letter-spacing="normal" fo:language="en" fo:country="US" fo:font-style="normal" style:text-underline-style="none" fo:font-weight="normal" fo:background-color="transparent" style:font-size-asian="18pt" style:font-style-asian="normal" style:font-weight-asian="normal" style:font-size-complex="18pt" style:font-style-complex="normal" style:font-weight-complex="normal"/>
-    </style:style>
-    <style:style style:name="P23" style:family="paragraph">
-      <loext:graphic-properties draw:fill="solid" draw:fill-color="#e6c35c"/>
-      <style:paragraph-properties fo:text-align="left" style:font-independent-line-spacing="true" loext:paragraph-composer="false"/>
-      <style:text-properties fo:font-variant="normal" fo:text-transform="none" fo:color="#000000" loext:opacity="100%" style:text-outline="false" style:text-line-through-style="none" style:text-line-through-type="none" style:text-position="0% 100%" style:font-name="Arial" fo:font-size="18pt" fo:letter-spacing="normal" fo:language="en" fo:country="US" fo:font-style="normal" style:text-underline-style="none" fo:font-weight="normal" fo:background-color="transparent" style:font-size-asian="18pt" style:font-style-asian="normal" style:font-weight-asian="normal" style:font-size-complex="18pt" style:font-style-complex="normal" style:font-weight-complex="normal"/>
-    </style:style>
-    <style:style style:name="P24" style:family="paragraph">
-      <loext:graphic-properties draw:fill="solid" draw:fill-color="#fdf0ec"/>
-      <style:paragraph-properties fo:text-align="left" style:font-independent-line-spacing="true" loext:paragraph-composer="false"/>
-      <style:text-properties fo:font-variant="normal" fo:text-transform="none" fo:color="#000000" loext:opacity="100%" style:text-outline="false" style:text-line-through-style="none" style:text-line-through-type="none" style:text-position="0% 100%" style:font-name="Arial" fo:font-size="18pt" fo:letter-spacing="normal" fo:language="en" fo:country="US" fo:font-style="normal" style:text-underline-style="none" fo:font-weight="normal" fo:background-color="transparent" style:font-size-asian="18pt" style:font-style-asian="normal" style:font-weight-asian="normal" style:font-size-complex="18pt" style:font-style-complex="normal" style:font-weight-complex="normal"/>
-    </style:style>
-    <style:style style:name="P25" style:family="paragraph">
-      <loext:graphic-properties draw:fill="solid" draw:fill-color="#e6f2f4"/>
-      <style:paragraph-properties fo:text-align="left" style:font-independent-line-spacing="true" loext:paragraph-composer="false"/>
-      <style:text-properties fo:font-variant="normal" fo:text-transform="none" fo:color="#000000" loext:opacity="100%" style:text-outline="false" style:text-line-through-style="none" style:text-line-through-type="none" style:text-position="0% 100%" style:font-name="Arial" fo:font-size="18pt" fo:letter-spacing="normal" fo:language="en" fo:country="US" fo:font-style="normal" style:text-underline-style="none" fo:font-weight="normal" fo:background-color="transparent" style:font-size-asian="18pt" style:font-style-asian="normal" style:font-weight-asian="normal" style:font-size-complex="18pt" style:font-style-complex="normal" style:font-weight-complex="normal"/>
-    </style:style>
-    <style:style style:name="P26" style:family="paragraph">
-      <loext:graphic-properties draw:fill="solid" draw:fill-color="#1f7a6f"/>
-      <style:paragraph-properties fo:text-align="left" style:font-independent-line-spacing="true" loext:paragraph-composer="false"/>
-      <style:text-properties fo:font-variant="normal" fo:text-transform="none" fo:color="#ffffff" loext:opacity="100%" style:text-outline="false" style:text-line-through-style="none" style:text-line-through-type="none" style:text-position="0% 100%" style:font-name="Arial" fo:font-size="18pt" fo:letter-spacing="normal" fo:language="en" fo:country="US" fo:font-style="normal" style:text-underline-style="none" fo:font-weight="normal" fo:background-color="transparent" style:font-size-asian="18pt" style:font-style-asian="normal" style:font-weight-asian="normal" style:font-size-complex="18pt" style:font-style-complex="normal" style:font-weight-complex="normal"/>
-    </style:style>
-    <style:style style:name="P27" style:family="paragraph">
-      <loext:graphic-properties draw:fill="bitmap" draw:fill-image-name="msFillBitmap_20_4" style:repeat="stretch"/>
-      <style:paragraph-properties fo:text-align="left" style:font-independent-line-spacing="true" loext:paragraph-composer="false"/>
-      <style:text-properties fo:font-variant="normal" fo:text-transform="none" fo:color="#000000" loext:opacity="100%" style:text-outline="false" style:text-line-through-style="none" style:text-line-through-type="none" style:text-position="0% 100%" style:font-name="Arial" fo:font-size="18pt" fo:letter-spacing="normal" fo:language="en" fo:country="US" fo:font-style="normal" style:text-underline-style="none" fo:font-weight="normal" fo:background-color="transparent" style:font-size-asian="18pt" style:font-style-asian="normal" style:font-weight-asian="normal" style:font-size-complex="18pt" style:font-style-complex="normal" style:font-weight-complex="normal"/>
-    </style:style>
-    <style:style style:name="P28" style:family="paragraph">
-      <style:paragraph-properties fo:margin-left="0cm" fo:margin-right="0cm" fo:margin-top="0cm" fo:margin-bottom="0.176cm" fo:line-height="100%" fo:text-align="left" fo:text-indent="0cm" loext:tab-stop-distance="2.54cm" loext:paragraph-composer="false">
+    <style:style style:name="P4" style:family="paragraph">
+      <style:paragraph-properties fo:margin-left="0cm" fo:margin-right="0cm" fo:margin-top="0cm" fo:margin-bottom="0cm" fo:line-height="100%" fo:text-align="left" fo:text-indent="0cm" loext:tab-stop-distance="2.54cm">
         <style:tab-stops>
           <style:tab-stop style:position="0cm"/>
         </style:tab-stops>
       </style:paragraph-properties>
-    </style:style>
-    <style:style style:name="P29" style:family="paragraph">
+      <style:text-properties fo:font-size="18pt" style:font-size-asian="18pt" style:font-size-complex="18pt"/>
+    </style:style>
+    <style:style style:name="P5" style:family="paragraph">
       <loext:graphic-properties draw:fill="none"/>
-      <style:paragraph-properties fo:margin-left="0cm" fo:margin-right="0cm" fo:margin-top="0cm" fo:margin-bottom="0.176cm" fo:line-height="100%" fo:text-align="left" fo:text-indent="0cm" loext:tab-stop-distance="2.54cm" style:font-independent-line-spacing="true" loext:paragraph-composer="false">
+      <style:paragraph-properties fo:margin-left="0cm" fo:margin-right="0cm" fo:margin-top="0cm" fo:margin-bottom="0cm" fo:line-height="100%" fo:text-align="left" fo:text-indent="0cm" loext:tab-stop-distance="2.54cm" style:writing-mode="lr-tb" style:font-independent-line-spacing="true">
+        <style:tab-stops>
+          <style:tab-stop style:position="0cm"/>
+        </style:tab-stops>
+      </style:paragraph-properties>
+      <style:text-properties fo:font-size="18pt" style:font-size-asian="18pt" style:font-size-complex="18pt"/>
+    </style:style>
+    <style:style style:name="P6" style:family="paragraph">
+      <style:paragraph-properties fo:margin-left="0cm" fo:margin-right="0cm" fo:margin-top="0cm" fo:margin-bottom="0.106cm" fo:line-height="100%" fo:text-align="left" fo:text-indent="0cm" loext:tab-stop-distance="2.54cm">
+        <style:tab-stops/>
+      </style:paragraph-properties>
+      <style:text-properties fo:font-size="18pt"/>
+    </style:style>
+    <style:style style:name="P7" style:family="paragraph">
+      <loext:graphic-properties draw:fill="none"/>
+      <style:paragraph-properties fo:margin-left="0cm" fo:margin-right="0cm" fo:margin-top="0cm" fo:margin-bottom="0.106cm" fo:line-height="100%" fo:text-align="left" fo:text-indent="0cm" loext:tab-stop-distance="2.54cm" style:writing-mode="lr-tb" style:font-independent-line-spacing="true">
+        <style:tab-stops/>
+      </style:paragraph-properties>
+      <style:text-properties fo:font-size="18pt"/>
+    </style:style>
+    <style:style style:name="P8" style:family="paragraph">
+      <loext:graphic-properties draw:fill="none"/>
+      <style:paragraph-properties fo:text-align="left"/>
+      <style:text-properties fo:font-size="18pt"/>
+    </style:style>
+    <style:style style:name="P9" style:family="paragraph">
+      <loext:graphic-properties draw:fill="bitmap" draw:fill-image-name="msFillBitmap_20_2" style:repeat="stretch"/>
+      <style:paragraph-properties fo:text-align="left" style:font-independent-line-spacing="true"/>
+      <style:text-properties fo:font-variant="normal" fo:text-transform="none" fo:color="#000000" loext:opacity="100%" style:text-outline="false" style:text-line-through-style="none" style:text-line-through-type="none" style:text-position="0% 100%" style:font-name="Arial" fo:font-size="18pt" fo:letter-spacing="normal" fo:language="en" fo:country="US" fo:font-style="normal" style:text-underline-style="none" fo:font-weight="normal" fo:background-color="transparent" style:font-size-asian="18pt" style:font-style-asian="normal" style:font-weight-asian="normal" style:font-size-complex="18pt" style:font-style-complex="normal" style:font-weight-complex="normal"/>
+    </style:style>
+    <style:style style:name="P10" style:family="paragraph">
+      <style:paragraph-properties fo:margin-left="0cm" fo:margin-right="0cm" fo:margin-top="0cm" fo:margin-bottom="0cm" fo:line-height="100%" fo:text-align="left" fo:text-indent="0cm" loext:tab-stop-distance="0cm">
+        <style:tab-stops>
+          <style:tab-stop style:position="0cm"/>
+        </style:tab-stops>
+      </style:paragraph-properties>
+    </style:style>
+    <style:style style:name="P11" style:family="paragraph">
+      <loext:graphic-properties draw:fill="none" draw:fill-color="#ffffff"/>
+      <style:paragraph-properties fo:text-align="left" style:font-independent-line-spacing="true"/>
+      <style:text-properties fo:font-size="18pt"/>
+    </style:style>
+    <style:style style:name="P12" style:family="paragraph">
+      <style:paragraph-properties fo:margin-left="0cm" fo:margin-right="0cm" fo:margin-top="0cm" fo:margin-bottom="0cm" fo:line-height="100%" fo:text-align="right" fo:text-indent="0cm" loext:tab-stop-distance="2.54cm">
+        <style:tab-stops>
+          <style:tab-stop style:position="0cm"/>
+        </style:tab-stops>
+      </style:paragraph-properties>
+      <style:text-properties fo:font-size="12pt" style:font-size-asian="14pt" style:font-size-complex="14pt"/>
+    </style:style>
+    <style:style style:name="P13" style:family="paragraph">
+      <loext:graphic-properties draw:fill="none" draw:fill-color="#ffffff"/>
+      <style:paragraph-properties fo:text-align="left" style:font-independent-line-spacing="true"/>
+      <style:text-properties fo:font-size="12pt" style:font-size-asian="14pt" style:font-size-complex="14pt"/>
+    </style:style>
+    <style:style style:name="P14" style:family="paragraph">
+      <loext:graphic-properties draw:fill="solid" draw:fill-color="#e07a5f"/>
+      <style:paragraph-properties fo:text-align="left" style:font-independent-line-spacing="true"/>
+      <style:text-properties fo:font-variant="normal" fo:text-transform="none" fo:color="#ffffff" loext:opacity="100%" style:text-outline="false" style:text-line-through-style="none" style:text-line-through-type="none" style:text-position="0% 100%" style:font-name="Arial" fo:font-size="18pt" fo:letter-spacing="normal" fo:language="en" fo:country="US" fo:font-style="normal" style:text-underline-style="none" fo:font-weight="normal" fo:background-color="transparent" style:font-size-asian="18pt" style:font-style-asian="normal" style:font-weight-asian="normal" style:font-size-complex="18pt" style:font-style-complex="normal" style:font-weight-complex="normal"/>
+    </style:style>
+    <style:style style:name="P15" style:family="paragraph">
+      <style:paragraph-properties fo:margin-left="0cm" fo:margin-right="0cm" fo:margin-top="0cm" fo:margin-bottom="0cm" fo:line-height="100%" fo:text-align="center" fo:text-indent="0cm" loext:tab-stop-distance="2.54cm">
         <style:tab-stops>
           <style:tab-stop style:position="0cm"/>
         </style:tab-stops>
       </style:paragraph-properties>
       <style:text-properties fo:font-size="18pt"/>
     </style:style>
+    <style:style style:name="P16" style:family="paragraph">
+      <loext:graphic-properties draw:fill="none"/>
+      <style:paragraph-properties fo:margin-left="0cm" fo:margin-right="0cm" fo:margin-top="0cm" fo:margin-bottom="0cm" fo:line-height="100%" fo:text-align="center" fo:text-indent="0cm" loext:tab-stop-distance="2.54cm" style:writing-mode="lr-tb" style:font-independent-line-spacing="true">
+        <style:tab-stops>
+          <style:tab-stop style:position="0cm"/>
+        </style:tab-stops>
+      </style:paragraph-properties>
+      <style:text-properties fo:font-size="18pt"/>
+    </style:style>
+    <style:style style:name="P17" style:family="paragraph">
+      <loext:graphic-properties draw:fill="none"/>
+      <style:paragraph-properties fo:text-align="left" style:font-independent-line-spacing="true"/>
+      <style:text-properties fo:font-variant="normal" fo:text-transform="none" fo:color="#000000" loext:opacity="100%" style:text-outline="false" style:text-line-through-style="none" style:text-line-through-type="none" style:text-position="0% 100%" style:font-name="Arial" fo:font-size="18pt" fo:letter-spacing="normal" fo:language="en" fo:country="US" fo:font-style="normal" style:text-underline-style="none" fo:font-weight="normal" fo:background-color="transparent" style:font-size-asian="18pt" style:font-style-asian="normal" style:font-weight-asian="normal" style:font-size-complex="18pt" style:font-style-complex="normal" style:font-weight-complex="normal"/>
+    </style:style>
+    <style:style style:name="P18" style:family="paragraph">
+      <loext:graphic-properties draw:fill="solid" draw:fill-color="#ffffff"/>
+      <style:paragraph-properties fo:text-align="left" style:font-independent-line-spacing="true"/>
+      <style:text-properties fo:font-variant="normal" fo:text-transform="none" fo:color="#000000" loext:opacity="100%" style:text-outline="false" style:text-line-through-style="none" style:text-line-through-type="none" style:text-position="0% 100%" style:font-name="Arial" fo:font-size="18pt" fo:letter-spacing="normal" fo:language="en" fo:country="US" fo:font-style="normal" style:text-underline-style="none" fo:font-weight="normal" fo:background-color="transparent" style:font-size-asian="18pt" style:font-style-asian="normal" style:font-weight-asian="normal" style:font-size-complex="18pt" style:font-style-complex="normal" style:font-weight-complex="normal"/>
+    </style:style>
+    <style:style style:name="P19" style:family="paragraph">
+      <loext:graphic-properties draw:fill="solid" draw:fill-color="#3d7ea6"/>
+      <style:paragraph-properties fo:text-align="left" style:font-independent-line-spacing="true"/>
+      <style:text-properties fo:font-variant="normal" fo:text-transform="none" fo:color="#ffffff" loext:opacity="100%" style:text-outline="false" style:text-line-through-style="none" style:text-line-through-type="none" style:text-position="0% 100%" style:font-name="Arial" fo:font-size="18pt" fo:letter-spacing="normal" fo:language="en" fo:country="US" fo:font-style="normal" style:text-underline-style="none" fo:font-weight="normal" fo:background-color="transparent" style:font-size-asian="18pt" style:font-style-asian="normal" style:font-weight-asian="normal" style:font-size-complex="18pt" style:font-style-complex="normal" style:font-weight-complex="normal"/>
+    </style:style>
+    <style:style style:name="P20" style:family="paragraph">
+      <loext:graphic-properties draw:fill="solid" draw:fill-color="#5fa8d3"/>
+      <style:paragraph-properties fo:text-align="left" style:font-independent-line-spacing="true"/>
+      <style:text-properties fo:font-variant="normal" fo:text-transform="none" fo:color="#000000" loext:opacity="100%" style:text-outline="false" style:text-line-through-style="none" style:text-line-through-type="none" style:text-position="0% 100%" style:font-name="Arial" fo:font-size="18pt" fo:letter-spacing="normal" fo:language="en" fo:country="US" fo:font-style="normal" style:text-underline-style="none" fo:font-weight="normal" fo:background-color="transparent" style:font-size-asian="18pt" style:font-style-asian="normal" style:font-weight-asian="normal" style:font-size-complex="18pt" style:font-style-complex="normal" style:font-weight-complex="normal"/>
+    </style:style>
+    <style:style style:name="P21" style:family="paragraph">
+      <loext:graphic-properties draw:fill="solid" draw:fill-color="#4cc3b0"/>
+      <style:paragraph-properties fo:text-align="left" style:font-independent-line-spacing="true"/>
+      <style:text-properties fo:font-variant="normal" fo:text-transform="none" fo:color="#000000" loext:opacity="100%" style:text-outline="false" style:text-line-through-style="none" style:text-line-through-type="none" style:text-position="0% 100%" style:font-name="Arial" fo:font-size="18pt" fo:letter-spacing="normal" fo:language="en" fo:country="US" fo:font-style="normal" style:text-underline-style="none" fo:font-weight="normal" fo:background-color="transparent" style:font-size-asian="18pt" style:font-style-asian="normal" style:font-weight-asian="normal" style:font-size-complex="18pt" style:font-style-complex="normal" style:font-weight-complex="normal"/>
+    </style:style>
+    <style:style style:name="P22" style:family="paragraph">
+      <loext:graphic-properties draw:fill="solid" draw:fill-color="#7b6cb3"/>
+      <style:paragraph-properties fo:text-align="left" style:font-independent-line-spacing="true"/>
+      <style:text-properties fo:font-variant="normal" fo:text-transform="none" fo:color="#ffffff" loext:opacity="100%" style:text-outline="false" style:text-line-through-style="none" style:text-line-through-type="none" style:text-position="0% 100%" style:font-name="Arial" fo:font-size="18pt" fo:letter-spacing="normal" fo:language="en" fo:country="US" fo:font-style="normal" style:text-underline-style="none" fo:font-weight="normal" fo:background-color="transparent" style:font-size-asian="18pt" style:font-style-asian="normal" style:font-weight-asian="normal" style:font-size-complex="18pt" style:font-style-complex="normal" style:font-weight-complex="normal"/>
+    </style:style>
+    <style:style style:name="P23" style:family="paragraph">
+      <loext:graphic-properties draw:fill="solid" draw:fill-color="#8fa3ad"/>
+      <style:paragraph-properties fo:text-align="left" style:font-independent-line-spacing="true"/>
+      <style:text-properties fo:font-variant="normal" fo:text-transform="none" fo:color="#000000" loext:opacity="100%" style:text-outline="false" style:text-line-through-style="none" style:text-line-through-type="none" style:text-position="0% 100%" style:font-name="Arial" fo:font-size="18pt" fo:letter-spacing="normal" fo:language="en" fo:country="US" fo:font-style="normal" style:text-underline-style="none" fo:font-weight="normal" fo:background-color="transparent" style:font-size-asian="18pt" style:font-style-asian="normal" style:font-weight-asian="normal" style:font-size-complex="18pt" style:font-style-complex="normal" style:font-weight-complex="normal"/>
+    </style:style>
+    <style:style style:name="P24" style:family="paragraph">
+      <loext:graphic-properties draw:fill="solid" draw:fill-color="#f2a65a"/>
+      <style:paragraph-properties fo:text-align="left" style:font-independent-line-spacing="true"/>
+      <style:text-properties fo:font-variant="normal" fo:text-transform="none" fo:color="#000000" loext:opacity="100%" style:text-outline="false" style:text-line-through-style="none" style:text-line-through-type="none" style:text-position="0% 100%" style:font-name="Arial" fo:font-size="18pt" fo:letter-spacing="normal" fo:language="en" fo:country="US" fo:font-style="normal" style:text-underline-style="none" fo:font-weight="normal" fo:background-color="transparent" style:font-size-asian="18pt" style:font-style-asian="normal" style:font-weight-asian="normal" style:font-size-complex="18pt" style:font-style-complex="normal" style:font-weight-complex="normal"/>
+    </style:style>
+    <style:style style:name="P25" style:family="paragraph">
+      <loext:graphic-properties draw:fill="solid" draw:fill-color="#e6c35c"/>
+      <style:paragraph-properties fo:text-align="left" style:font-independent-line-spacing="true"/>
+      <style:text-properties fo:font-variant="normal" fo:text-transform="none" fo:color="#000000" loext:opacity="100%" style:text-outline="false" style:text-line-through-style="none" style:text-line-through-type="none" style:text-position="0% 100%" style:font-name="Arial" fo:font-size="18pt" fo:letter-spacing="normal" fo:language="en" fo:country="US" fo:font-style="normal" style:text-underline-style="none" fo:font-weight="normal" fo:background-color="transparent" style:font-size-asian="18pt" style:font-style-asian="normal" style:font-weight-asian="normal" style:font-size-complex="18pt" style:font-style-complex="normal" style:font-weight-complex="normal"/>
+    </style:style>
+    <style:style style:name="P26" style:family="paragraph">
+      <loext:graphic-properties draw:fill="solid" draw:fill-color="#fdf0ec"/>
+      <style:paragraph-properties fo:text-align="left" style:font-independent-line-spacing="true"/>
+      <style:text-properties fo:font-variant="normal" fo:text-transform="none" fo:color="#000000" loext:opacity="100%" style:text-outline="false" style:text-line-through-style="none" style:text-line-through-type="none" style:text-position="0% 100%" style:font-name="Arial" fo:font-size="18pt" fo:letter-spacing="normal" fo:language="en" fo:country="US" fo:font-style="normal" style:text-underline-style="none" fo:font-weight="normal" fo:background-color="transparent" style:font-size-asian="18pt" style:font-style-asian="normal" style:font-weight-asian="normal" style:font-size-complex="18pt" style:font-style-complex="normal" style:font-weight-complex="normal"/>
+    </style:style>
+    <style:style style:name="P27" style:family="paragraph">
+      <loext:graphic-properties draw:fill="solid" draw:fill-color="#e6f2f4"/>
+      <style:paragraph-properties fo:text-align="left" style:font-independent-line-spacing="true"/>
+      <style:text-properties fo:font-variant="normal" fo:text-transform="none" fo:color="#000000" loext:opacity="100%" style:text-outline="false" style:text-line-through-style="none" style:text-line-through-type="none" style:text-position="0% 100%" style:font-name="Arial" fo:font-size="18pt" fo:letter-spacing="normal" fo:language="en" fo:country="US" fo:font-style="normal" style:text-underline-style="none" fo:font-weight="normal" fo:background-color="transparent" style:font-size-asian="18pt" style:font-style-asian="normal" style:font-weight-asian="normal" style:font-size-complex="18pt" style:font-style-complex="normal" style:font-weight-complex="normal"/>
+    </style:style>
+    <style:style style:name="P28" style:family="paragraph">
+      <loext:graphic-properties draw:fill="solid" draw:fill-color="#1f7a6f"/>
+      <style:paragraph-properties fo:text-align="left" style:font-independent-line-spacing="true"/>
+      <style:text-properties fo:font-variant="normal" fo:text-transform="none" fo:color="#ffffff" loext:opacity="100%" style:text-outline="false" style:text-line-through-style="none" style:text-line-through-type="none" style:text-position="0% 100%" style:font-name="Arial" fo:font-size="18pt" fo:letter-spacing="normal" fo:language="en" fo:country="US" fo:font-style="normal" style:text-underline-style="none" fo:font-weight="normal" fo:background-color="transparent" style:font-size-asian="18pt" style:font-style-asian="normal" style:font-weight-asian="normal" style:font-size-complex="18pt" style:font-style-complex="normal" style:font-weight-complex="normal"/>
+    </style:style>
+    <style:style style:name="P29" style:family="paragraph">
+      <loext:graphic-properties draw:fill="bitmap" draw:fill-image-name="msFillBitmap_20_4" style:repeat="stretch"/>
+      <style:paragraph-properties fo:text-align="left" style:font-independent-line-spacing="true"/>
+      <style:text-properties fo:font-variant="normal" fo:text-transform="none" fo:color="#000000" loext:opacity="100%" style:text-outline="false" style:text-line-through-style="none" style:text-line-through-type="none" style:text-position="0% 100%" style:font-name="Arial" fo:font-size="18pt" fo:letter-spacing="normal" fo:language="en" fo:country="US" fo:font-style="normal" style:text-underline-style="none" fo:font-weight="normal" fo:background-color="transparent" style:font-size-asian="18pt" style:font-style-asian="normal" style:font-weight-asian="normal" style:font-size-complex="18pt" style:font-style-complex="normal" style:font-weight-complex="normal"/>
+    </style:style>
     <style:style style:name="P30" style:family="paragraph">
+      <style:paragraph-properties fo:margin-left="0cm" fo:margin-right="0cm" fo:margin-top="0cm" fo:margin-bottom="0.176cm" fo:line-height="100%" fo:text-align="left" fo:text-indent="0cm" loext:tab-stop-distance="2.54cm">
+        <style:tab-stops>
+          <style:tab-stop style:position="0cm"/>
+        </style:tab-stops>
+      </style:paragraph-properties>
+      <style:text-properties fo:font-size="18pt"/>
+    </style:style>
+    <style:style style:name="P31" style:family="paragraph">
+      <loext:graphic-properties draw:fill="none"/>
+      <style:paragraph-properties fo:margin-left="0cm" fo:margin-right="0cm" fo:margin-top="0cm" fo:margin-bottom="0.176cm" fo:line-height="100%" fo:text-align="left" fo:text-indent="0cm" loext:tab-stop-distance="2.54cm" style:writing-mode="lr-tb" style:font-independent-line-spacing="true">
+        <style:tab-stops>
+          <style:tab-stop style:position="0cm"/>
+        </style:tab-stops>
+      </style:paragraph-properties>
+      <style:text-properties fo:font-size="18pt"/>
+    </style:style>
+    <style:style style:name="P32" style:family="paragraph">
       <loext:graphic-properties draw:fill="bitmap" draw:fill-image-name="msFillBitmap_20_7" style:repeat="stretch"/>
-      <style:paragraph-properties fo:text-align="left" style:font-independent-line-spacing="true" loext:paragraph-composer="false"/>
+      <style:paragraph-properties fo:text-align="left" style:font-independent-line-spacing="true"/>
       <style:text-properties fo:font-variant="normal" fo:text-transform="none" fo:color="#000000" loext:opacity="100%" style:text-outline="false" style:text-line-through-style="none" style:text-line-through-type="none" style:text-position="0% 100%" style:font-name="Arial" fo:font-size="18pt" fo:letter-spacing="normal" fo:language="en" fo:country="US" fo:font-style="normal" style:text-underline-style="none" fo:font-weight="normal" fo:background-color="transparent" style:font-size-asian="18pt" style:font-style-asian="normal" style:font-weight-asian="normal" style:font-size-complex="18pt" style:font-style-complex="normal" style:font-weight-complex="normal"/>
     </style:style>
-    <style:style style:name="P31" style:family="paragraph">
+    <style:style style:name="P33" style:family="paragraph">
       <loext:graphic-properties draw:fill="solid" draw:fill-color="#2a9d8f"/>
-      <style:paragraph-properties fo:text-align="left" style:font-independent-line-spacing="true" loext:paragraph-composer="false"/>
+      <style:paragraph-properties fo:text-align="left" style:font-independent-line-spacing="true"/>
       <style:text-properties fo:font-variant="normal" fo:text-transform="none" fo:color="#ffffff" loext:opacity="100%" style:text-outline="false" style:text-line-through-style="none" style:text-line-through-type="none" style:text-position="0% 100%" style:font-name="Arial" fo:font-size="18pt" fo:letter-spacing="normal" fo:language="en" fo:country="US" fo:font-style="normal" style:text-underline-style="none" fo:font-weight="normal" fo:background-color="transparent" style:font-size-asian="18pt" style:font-style-asian="normal" style:font-weight-asian="normal" style:font-size-complex="18pt" style:font-style-complex="normal" style:font-weight-complex="normal"/>
     </style:style>
-    <style:style style:name="P32" style:family="paragraph">
+    <style:style style:name="P34" style:family="paragraph">
       <loext:graphic-properties draw:fill="bitmap" draw:fill-image-name="msFillBitmap_20_9" style:repeat="stretch"/>
-      <style:paragraph-properties fo:text-align="left" style:font-independent-line-spacing="true" loext:paragraph-composer="false"/>
+      <style:paragraph-properties fo:text-align="left" style:font-independent-line-spacing="true"/>
       <style:text-properties fo:font-variant="normal" fo:text-transform="none" fo:color="#000000" loext:opacity="100%" style:text-outline="false" style:text-line-through-style="none" style:text-line-through-type="none" style:text-position="0% 100%" style:font-name="Arial" fo:font-size="18pt" fo:letter-spacing="normal" fo:language="en" fo:country="US" fo:font-style="normal" style:text-underline-style="none" fo:font-weight="normal" fo:background-color="transparent" style:font-size-asian="18pt" style:font-style-asian="normal" style:font-weight-asian="normal" style:font-size-complex="18pt" style:font-style-complex="normal" style:font-weight-complex="normal"/>
     </style:style>
-    <style:style style:name="P33" style:family="paragraph">
+    <style:style style:name="P35" style:family="paragraph">
+      <style:paragraph-properties fo:margin-left="0cm" fo:margin-right="0cm" fo:margin-top="0cm" fo:margin-bottom="0cm" fo:line-height="100%" fo:text-align="center" fo:text-indent="0cm" loext:tab-stop-distance="2.54cm">
+        <style:tab-stops>
+          <style:tab-stop style:position="0cm"/>
+        </style:tab-stops>
+      </style:paragraph-properties>
+    </style:style>
+    <style:style style:name="P36" style:family="paragraph">
       <loext:graphic-properties draw:fill="bitmap" draw:fill-image-name="msFillBitmap_20_11" style:repeat="stretch"/>
-      <style:paragraph-properties fo:text-align="left" style:font-independent-line-spacing="true" loext:paragraph-composer="false"/>
+      <style:paragraph-properties fo:text-align="left" style:font-independent-line-spacing="true"/>
       <style:text-properties fo:font-variant="normal" fo:text-transform="none" fo:color="#000000" loext:opacity="100%" style:text-outline="false" style:text-line-through-style="none" style:text-line-through-type="none" style:text-position="0% 100%" style:font-name="Arial" fo:font-size="18pt" fo:letter-spacing="normal" fo:language="en" fo:country="US" fo:font-style="normal" style:text-underline-style="none" fo:font-weight="normal" fo:background-color="transparent" style:font-size-asian="18pt" style:font-style-asian="normal" style:font-weight-asian="normal" style:font-size-complex="18pt" style:font-style-complex="normal" style:font-weight-complex="normal"/>
     </style:style>
-    <style:style style:name="P34" style:family="paragraph">
+    <style:style style:name="P37" style:family="paragraph">
       <loext:graphic-properties draw:fill="bitmap" draw:fill-image-name="msFillBitmap_20_13" style:repeat="stretch"/>
-      <style:paragraph-properties fo:text-align="left" style:font-independent-line-spacing="true" loext:paragraph-composer="false"/>
+      <style:paragraph-properties fo:text-align="left" style:font-independent-line-spacing="true"/>
       <style:text-properties fo:font-variant="normal" fo:text-transform="none" fo:color="#000000" loext:opacity="100%" style:text-outline="false" style:text-line-through-style="none" style:text-line-through-type="none" style:text-position="0% 100%" style:font-name="Arial" fo:font-size="18pt" fo:letter-spacing="normal" fo:language="en" fo:country="US" fo:font-style="normal" style:text-underline-style="none" fo:font-weight="normal" fo:background-color="transparent" style:font-size-asian="18pt" style:font-style-asian="normal" style:font-weight-asian="normal" style:font-size-complex="18pt" style:font-style-complex="normal" style:font-weight-complex="normal"/>
     </style:style>
-    <style:style style:name="P35" style:family="paragraph">
+    <style:style style:name="P38" style:family="paragraph">
       <loext:graphic-properties draw:fill="bitmap" draw:fill-image-name="msFillBitmap_20_15" style:repeat="stretch"/>
-      <style:paragraph-properties fo:text-align="left" style:font-independent-line-spacing="true" loext:paragraph-composer="false"/>
+      <style:paragraph-properties fo:text-align="left" style:font-independent-line-spacing="true"/>
       <style:text-properties fo:font-variant="normal" fo:text-transform="none" fo:color="#000000" loext:opacity="100%" style:text-outline="false" style:text-line-through-style="none" style:text-line-through-type="none" style:text-position="0% 100%" style:font-name="Arial" fo:font-size="18pt" fo:letter-spacing="normal" fo:language="en" fo:country="US" fo:font-style="normal" style:text-underline-style="none" fo:font-weight="normal" fo:background-color="transparent" style:font-size-asian="18pt" style:font-style-asian="normal" style:font-weight-asian="normal" style:font-size-complex="18pt" style:font-style-complex="normal" style:font-weight-complex="normal"/>
     </style:style>
-    <style:style style:name="P36" style:family="paragraph">
+    <style:style style:name="P39" style:family="paragraph">
       <loext:graphic-properties draw:fill="bitmap" draw:fill-image-name="msFillBitmap_20_17" style:repeat="stretch"/>
-      <style:paragraph-properties fo:text-align="left" style:font-independent-line-spacing="true" loext:paragraph-composer="false"/>
+      <style:paragraph-properties fo:text-align="left" style:font-independent-line-spacing="true"/>
       <style:text-properties fo:font-variant="normal" fo:text-transform="none" fo:color="#000000" loext:opacity="100%" style:text-outline="false" style:text-line-through-style="none" style:text-line-through-type="none" style:text-position="0% 100%" style:font-name="Arial" fo:font-size="18pt" fo:letter-spacing="normal" fo:language="en" fo:country="US" fo:font-style="normal" style:text-underline-style="none" fo:font-weight="normal" fo:background-color="transparent" style:font-size-asian="18pt" style:font-style-asian="normal" style:font-weight-asian="normal" style:font-size-complex="18pt" style:font-style-complex="normal" style:font-weight-complex="normal"/>
     </style:style>
-    <style:style style:name="P37" style:family="paragraph">
+    <style:style style:name="P40" style:family="paragraph">
       <loext:graphic-properties draw:fill="solid" draw:fill-color="#16414d"/>
-      <style:paragraph-properties fo:text-align="left" style:font-independent-line-spacing="true" loext:paragraph-composer="false"/>
+      <style:paragraph-properties fo:text-align="left" style:font-independent-line-spacing="true"/>
       <style:text-properties fo:font-variant="normal" fo:text-transform="none" fo:color="#ffffff" loext:opacity="100%" style:text-outline="false" style:text-line-through-style="none" style:text-line-through-type="none" style:text-position="0% 100%" style:font-name="Arial" fo:font-size="18pt" fo:letter-spacing="normal" fo:language="en" fo:country="US" fo:font-style="normal" style:text-underline-style="none" fo:font-weight="normal" fo:background-color="transparent" style:font-size-asian="18pt" style:font-style-asian="normal" style:font-weight-asian="normal" style:font-size-complex="18pt" style:font-style-complex="normal" style:font-weight-complex="normal"/>
     </style:style>
-    <style:style style:name="P38" style:family="paragraph">
+    <style:style style:name="P41" style:family="paragraph">
       <loext:graphic-properties draw:fill="bitmap" draw:fill-image-name="msFillBitmap_20_19" style:repeat="stretch"/>
-      <style:paragraph-properties fo:text-align="left" style:font-independent-line-spacing="true" loext:paragraph-composer="false"/>
+      <style:paragraph-properties fo:text-align="left" style:font-independent-line-spacing="true"/>
       <style:text-properties fo:font-variant="normal" fo:text-transform="none" fo:color="#000000" loext:opacity="100%" style:text-outline="false" style:text-line-through-style="none" style:text-line-through-type="none" style:text-position="0% 100%" style:font-name="Arial" fo:font-size="18pt" fo:letter-spacing="normal" fo:language="en" fo:country="US" fo:font-style="normal" style:text-underline-style="none" fo:font-weight="normal" fo:background-color="transparent" style:font-size-asian="18pt" style:font-style-asian="normal" style:font-weight-asian="normal" style:font-size-complex="18pt" style:font-style-complex="normal" style:font-weight-complex="normal"/>
     </style:style>
     <style:style style:name="T1" style:family="text">
@@ -3726,7 +3902,7 @@
       <style:text-properties fo:font-variant="normal" fo:text-transform="none" fo:color="#9fbec5" loext:opacity="100%" style:text-outline="false" style:text-line-through-style="none" style:text-line-through-type="none" style:text-position="0% 100%" style:font-name="Times New Roman" fo:font-size="12pt" fo:letter-spacing="normal" fo:language="en" fo:country="US" fo:font-style="normal" style:text-underline-style="none" fo:font-weight="normal" fo:background-color="transparent" style:font-name-asian="Times New Roman" style:font-size-asian="12pt" style:font-style-asian="normal" style:font-weight-asian="normal" style:font-size-complex="12pt" style:font-style-complex="normal" style:font-weight-complex="normal"/>
     </style:style>
     <style:style style:name="T4" style:family="text">
-      <style:text-properties fo:font-variant="normal" fo:text-transform="none" fo:color="#ffffff" loext:opacity="100%" style:text-outline="false" style:text-line-through-style="none" style:text-line-through-type="none" style:text-position="0% 100%" style:font-name="Times New Roman" fo:font-size="16pt" fo:letter-spacing="normal" fo:language="en" fo:country="US" fo:font-style="normal" style:text-underline-style="none" fo:font-weight="bold" fo:background-color="transparent" style:font-name-asian="Times New Roman" style:font-size-asian="16pt" style:font-style-asian="normal" style:font-weight-asian="bold" style:font-size-complex="16pt" style:font-style-complex="normal" style:font-weight-complex="bold"/>
+      <style:text-properties fo:font-variant="normal" fo:text-transform="none" fo:color="#ffffff" loext:opacity="100%" style:text-outline="false" style:text-line-through-style="none" style:text-line-through-type="none" style:text-position="0% 100%" style:font-name="Times New Roman" fo:font-size="18pt" fo:letter-spacing="normal" fo:language="en" fo:country="US" fo:font-style="normal" style:text-underline-style="none" fo:font-weight="bold" fo:background-color="transparent" style:font-name-asian="Times New Roman" style:font-size-asian="18pt" style:font-style-asian="normal" style:font-weight-asian="bold" style:font-size-complex="18pt" style:font-style-complex="normal" style:font-weight-complex="bold"/>
     </style:style>
     <style:style style:name="T5" style:family="text">
       <style:text-properties fo:font-variant="normal" fo:text-transform="none" fo:color="#c9dde1" loext:opacity="100%" style:text-outline="false" style:text-line-through-style="none" style:text-line-through-type="none" style:text-position="0% 100%" style:font-name="Times New Roman" fo:font-size="15pt" fo:letter-spacing="normal" fo:language="en" fo:country="US" fo:font-style="normal" style:text-underline-style="none" fo:font-weight="normal" fo:background-color="transparent" style:font-name-asian="Times New Roman" style:font-size-asian="15pt" style:font-style-asian="normal" style:font-weight-asian="normal" style:font-size-complex="15pt" style:font-style-complex="normal" style:font-weight-complex="normal"/>
@@ -4058,10 +4234,10 @@
       </text:list-level-style-bullet>
     </text:list-style>
     <text:list-style style:name="L6">
-      <text:list-level-style-number text:level="1" style:num-format="">
+      <text:list-level-style-bullet text:level="1" text:bullet-char="●">
         <style:list-level-properties text:min-label-width="0.6cm"/>
-        <style:text-properties fo:color="#000000" fo:font-size="100%"/>
-      </text:list-level-style-number>
+        <style:text-properties fo:font-family="OpenSymbol" style:use-window-font-color="true" fo:font-size="45%"/>
+      </text:list-level-style-bullet>
       <text:list-level-style-bullet text:level="2" text:bullet-char="●">
         <style:list-level-properties text:space-before="0.6cm" text:min-label-width="0.6cm"/>
         <style:text-properties fo:font-family="OpenSymbol" style:use-window-font-color="true" fo:font-size="45%"/>
@@ -4564,10 +4740,10 @@
   </office:automatic-styles>
   <office:body>
     <office:presentation>
-      <draw:page draw:name="page1" draw:style-name="dp1" draw:master-page-name="DEFAULT">
+      <draw:page draw:name="page1" draw:style-name="dp1" draw:master-page-name="DEFAULT" presentation:presentation-page-layout-name="AL1T0">
         <draw:custom-shape draw:name="Text 0" draw:style-name="gr1" draw:text-style-name="P1" draw:layer="layout" svg:width="7.617cm" svg:height="0.759cm" svg:x="1.524cm" svg:y="1.524cm">
           <text:p/>
-          <draw:enhanced-geometry draw:mirror-horizontal="false" draw:mirror-vertical="false" draw:glue-points="?f0 0 0 ?f1 ?f0 ?f2 ?f3 ?f1" draw:text-areas="0 0 ?f3 ?f2" svg:viewBox="0 0 0 0" draw:type="ooxml-rect" draw:enhanced-path="M 0 0 L ?f3 0 ?f3 ?f2 0 ?f2 Z N">
+          <draw:enhanced-geometry draw:mirror-horizontal="false" draw:mirror-vertical="false" svg:viewBox="0 0 0 0" draw:glue-points="?f0 0 0 ?f1 ?f0 ?f2 ?f3 ?f1" draw:text-areas="0 0 ?f3 ?f2" draw:type="ooxml-rect" draw:enhanced-path="M 0 0 L ?f3 0 ?f3 ?f2 0 ?f2 Z N">
             <draw:equation draw:name="f0" draw:formula="logwidth/2"/>
             <draw:equation draw:name="f1" draw:formula="logheight/2"/>
             <draw:equation draw:name="f2" draw:formula="logheight"/>
@@ -4576,11 +4752,14 @@
         </draw:custom-shape>
         <draw:custom-shape draw:name="Text 1" draw:style-name="gr2" draw:text-style-name="P3" draw:layer="layout" svg:width="13.205cm" svg:height="3.045cm" svg:x="1.524cm" svg:y="2.413cm">
           <text:p text:style-name="P2">
-            <text:span text:style-name="T1">Hospitalized </text:span>
-            <text:span text:style-name="T1">Patients with </text:span>
-            <text:span text:style-name="T1">Heart Failure</text:span>
-          </text:p>
-          <draw:enhanced-geometry draw:mirror-horizontal="false" draw:mirror-vertical="false" draw:glue-points="?f0 0 0 ?f1 ?f0 ?f2 ?f3 ?f1" draw:text-areas="0 0 ?f3 ?f2" svg:viewBox="0 0 0 0" draw:type="ooxml-rect" draw:enhanced-path="M 0 0 L ?f3 0 ?f3 ?f2 0 ?f2 Z N">
+            <text:span text:style-name="T1">Hospitali</text:span>
+            <text:span text:style-name="T1">zed </text:span>
+            <text:span text:style-name="T1">Patients </text:span>
+            <text:span text:style-name="T1">with </text:span>
+            <text:span text:style-name="T1">Heart </text:span>
+            <text:span text:style-name="T1">Failure</text:span>
+          </text:p>
+          <draw:enhanced-geometry draw:mirror-horizontal="false" draw:mirror-vertical="false" svg:viewBox="0 0 0 0" draw:glue-points="?f0 0 0 ?f1 ?f0 ?f2 ?f3 ?f1" draw:text-areas="0 0 ?f3 ?f2" draw:type="ooxml-rect" draw:enhanced-path="M 0 0 L ?f3 0 ?f3 ?f2 0 ?f2 Z N">
             <draw:equation draw:name="f0" draw:formula="logwidth/2"/>
             <draw:equation draw:name="f1" draw:formula="logheight/2"/>
             <draw:equation draw:name="f2" draw:formula="logheight"/>
@@ -4589,9 +4768,11 @@
         </draw:custom-shape>
         <draw:custom-shape draw:name="Text 2" draw:style-name="gr3" draw:text-style-name="P3" draw:layer="layout" svg:width="12.697cm" svg:height="1.267cm" svg:x="1.524cm" svg:y="5.588cm">
           <text:p text:style-name="P2">
-            <text:span text:style-name="T2">Integrating Electronic Healthcare Records and External Outcome Data</text:span>
-          </text:p>
-          <draw:enhanced-geometry draw:mirror-horizontal="false" draw:mirror-vertical="false" draw:glue-points="?f0 0 0 ?f1 ?f0 ?f2 ?f3 ?f1" draw:text-areas="0 0 ?f3 ?f2" svg:viewBox="0 0 0 0" draw:type="ooxml-rect" draw:enhanced-path="M 0 0 L ?f3 0 ?f3 ?f2 0 ?f2 Z N">
+            <text:span text:style-name="T2">Integrating Electronic </text:span>
+            <text:span text:style-name="T2">Healthcare Records and </text:span>
+            <text:span text:style-name="T2">External Outcome Data</text:span>
+          </text:p>
+          <draw:enhanced-geometry draw:mirror-horizontal="false" draw:mirror-vertical="false" svg:viewBox="0 0 0 0" draw:glue-points="?f0 0 0 ?f1 ?f0 ?f2 ?f3 ?f1" draw:text-areas="0 0 ?f3 ?f2" draw:type="ooxml-rect" draw:enhanced-path="M 0 0 L ?f3 0 ?f3 ?f2 0 ?f2 Z N">
             <draw:equation draw:name="f0" draw:formula="logwidth/2"/>
             <draw:equation draw:name="f1" draw:formula="logheight/2"/>
             <draw:equation draw:name="f2" draw:formula="logheight"/>
@@ -4607,16 +4788,19 @@
               <text:s/>
               2,008 patients 
               <text:s/>
+            </text:span>
+            <text:span text:style-name="T3">
               · 
               <text:s/>
               Sichuan, China 
               <text:s/>
               · 
               <text:s/>
-              2016–2019
+              2016–
             </text:span>
-          </text:p>
-          <draw:enhanced-geometry draw:mirror-horizontal="false" draw:mirror-vertical="false" draw:glue-points="?f0 0 0 ?f1 ?f0 ?f2 ?f3 ?f1" draw:text-areas="0 0 ?f3 ?f2" svg:viewBox="0 0 0 0" draw:type="ooxml-rect" draw:enhanced-path="M 0 0 L ?f3 0 ?f3 ?f2 0 ?f2 Z N">
+            <text:span text:style-name="T3">2019</text:span>
+          </text:p>
+          <draw:enhanced-geometry draw:mirror-horizontal="false" draw:mirror-vertical="false" svg:viewBox="0 0 0 0" draw:glue-points="?f0 0 0 ?f1 ?f0 ?f2 ?f3 ?f1" draw:text-areas="0 0 ?f3 ?f2" draw:type="ooxml-rect" draw:enhanced-path="M 0 0 L ?f3 0 ?f3 ?f2 0 ?f2 Z N">
             <draw:equation draw:name="f0" draw:formula="logwidth/2"/>
             <draw:equation draw:name="f1" draw:formula="logheight/2"/>
             <draw:equation draw:name="f2" draw:formula="logheight"/>
@@ -4626,49 +4810,48 @@
         <draw:line draw:name="Shape 4" draw:style-name="gr5" draw:text-style-name="P1" draw:layer="layout" svg:x1="1.524cm" svg:y1="8.128cm" svg:x2="3.556cm" svg:y2="8.129cm">
           <text:p/>
         </draw:line>
-        <draw:custom-shape draw:name="Text 5" draw:style-name="gr6" draw:text-style-name="P3" draw:layer="layout" svg:width="12.697cm" svg:height="0.886cm" svg:x="1.524cm" svg:y="8.509cm">
-          <text:p text:style-name="P2">
-            <text:span text:style-name="T4">Team05 </text:span>
-            <text:span text:style-name="T4">PyCraft</text:span>
-          </text:p>
-          <draw:enhanced-geometry draw:mirror-horizontal="false" draw:mirror-vertical="false" draw:glue-points="?f0 0 0 ?f1 ?f0 ?f2 ?f3 ?f1" draw:text-areas="0 0 ?f3 ?f2" svg:viewBox="0 0 0 0" draw:type="ooxml-rect" draw:enhanced-path="M 0 0 L ?f3 0 ?f3 ?f2 0 ?f2 Z N">
-            <draw:equation draw:name="f0" draw:formula="logwidth/2"/>
-            <draw:equation draw:name="f1" draw:formula="logheight/2"/>
-            <draw:equation draw:name="f2" draw:formula="logheight"/>
-            <draw:equation draw:name="f3" draw:formula="logwidth"/>
-          </draw:enhanced-geometry>
-        </draw:custom-shape>
-        <draw:custom-shape draw:name="Text 6" draw:style-name="gr7" draw:text-style-name="P5" draw:layer="layout" svg:width="8.887cm" svg:height="3.172cm" svg:x="1.524cm" svg:y="9.449cm">
+        <draw:custom-shape draw:name="Text 5" draw:style-name="gr6" draw:text-style-name="P5" draw:layer="layout" svg:width="12.697cm" svg:height="0.886cm" svg:x="1.524cm" svg:y="8.509cm">
+          <text:p text:style-name="P4">
+            <text:span text:style-name="T4">Team05 PyCraft</text:span>
+          </text:p>
+          <draw:enhanced-geometry draw:mirror-horizontal="false" draw:mirror-vertical="false" svg:viewBox="0 0 0 0" draw:glue-points="?f0 0 0 ?f1 ?f0 ?f2 ?f3 ?f1" draw:text-areas="0 0 ?f3 ?f2" draw:type="ooxml-rect" draw:enhanced-path="M 0 0 L ?f3 0 ?f3 ?f2 0 ?f2 Z N">
+            <draw:equation draw:name="f0" draw:formula="logwidth/2"/>
+            <draw:equation draw:name="f1" draw:formula="logheight/2"/>
+            <draw:equation draw:name="f2" draw:formula="logheight"/>
+            <draw:equation draw:name="f3" draw:formula="logwidth"/>
+          </draw:enhanced-geometry>
+        </draw:custom-shape>
+        <draw:custom-shape draw:name="Text 6" draw:style-name="gr7" draw:text-style-name="P7" draw:layer="layout" svg:width="8.887cm" svg:height="3.172cm" svg:x="1.524cm" svg:y="9.449cm">
           <text:list text:style-name="L5">
             <text:list-item>
-              <text:p text:style-name="P4">
+              <text:p text:style-name="P6">
                 <text:span text:style-name="T5">Snehalatha</text:span>
               </text:p>
             </text:list-item>
             <text:list-item>
-              <text:p text:style-name="P4">
+              <text:p text:style-name="P6">
                 <text:span text:style-name="T5">Rashmi</text:span>
               </text:p>
             </text:list-item>
             <text:list-item>
-              <text:p text:style-name="P4">
+              <text:p text:style-name="P6">
                 <text:span text:style-name="T5">Sandhya</text:span>
               </text:p>
             </text:list-item>
             <text:list-item>
-              <text:p text:style-name="P4">
+              <text:p text:style-name="P6">
                 <text:span text:style-name="T5">Jayasree</text:span>
               </text:p>
             </text:list-item>
           </text:list>
-          <draw:enhanced-geometry draw:mirror-horizontal="false" draw:mirror-vertical="false" draw:glue-points="?f0 0 0 ?f1 ?f0 ?f2 ?f3 ?f1" draw:text-areas="0 0 ?f3 ?f2" svg:viewBox="0 0 0 0" draw:type="ooxml-rect" draw:enhanced-path="M 0 0 L ?f3 0 ?f3 ?f2 0 ?f2 Z N">
-            <draw:equation draw:name="f0" draw:formula="logwidth/2"/>
-            <draw:equation draw:name="f1" draw:formula="logheight/2"/>
-            <draw:equation draw:name="f2" draw:formula="logheight"/>
-            <draw:equation draw:name="f3" draw:formula="logwidth"/>
-          </draw:enhanced-geometry>
-        </draw:custom-shape>
-        <draw:frame draw:name="Image 0" draw:style-name="gr8" draw:text-style-name="P6" draw:layer="layout" svg:width="9.903cm" svg:height="8.912cm" svg:x="14.605cm" svg:y="2.54cm">
+          <draw:enhanced-geometry draw:mirror-horizontal="false" draw:mirror-vertical="false" svg:viewBox="0 0 0 0" draw:glue-points="?f0 0 0 ?f1 ?f0 ?f2 ?f3 ?f1" draw:text-areas="0 0 ?f3 ?f2" draw:type="ooxml-rect" draw:enhanced-path="M 0 0 L ?f3 0 ?f3 ?f2 0 ?f2 Z N">
+            <draw:equation draw:name="f0" draw:formula="logwidth/2"/>
+            <draw:equation draw:name="f1" draw:formula="logheight/2"/>
+            <draw:equation draw:name="f2" draw:formula="logheight"/>
+            <draw:equation draw:name="f3" draw:formula="logwidth"/>
+          </draw:enhanced-geometry>
+        </draw:custom-shape>
+        <draw:frame draw:name="Image 0" draw:style-name="gr8" draw:text-style-name="P8" draw:layer="layout" svg:width="9.903cm" svg:height="8.912cm" svg:x="14.605cm" svg:y="2.54cm">
           <draw:image xlink:href="Pictures/1000000100000640000005A06EE4E2BA.png" xlink:type="simple" xlink:show="embed" xlink:actuate="onLoad" draw:mime-type="image/png">
             <text:p/>
           </draw:image>
@@ -4676,16 +4859,16 @@
         </draw:frame>
         <draw:custom-shape draw:name="Text 7" draw:style-name="gr1" draw:text-style-name="P1" draw:layer="layout" svg:width="9.903cm" svg:height="0.759cm" svg:x="14.605cm" svg:y="12.319cm">
           <text:p/>
-          <draw:enhanced-geometry draw:mirror-horizontal="false" draw:mirror-vertical="false" draw:glue-points="?f0 0 0 ?f1 ?f0 ?f2 ?f3 ?f1" draw:text-areas="0 0 ?f3 ?f2" svg:viewBox="0 0 0 0" draw:type="ooxml-rect" draw:enhanced-path="M 0 0 L ?f3 0 ?f3 ?f2 0 ?f2 Z N">
-            <draw:equation draw:name="f0" draw:formula="logwidth/2"/>
-            <draw:equation draw:name="f1" draw:formula="logheight/2"/>
-            <draw:equation draw:name="f2" draw:formula="logheight"/>
-            <draw:equation draw:name="f3" draw:formula="logwidth"/>
-          </draw:enhanced-geometry>
-        </draw:custom-shape>
-        <draw:custom-shape draw:name="Freeform 5" draw:style-name="gr9" draw:text-style-name="P7" draw:layer="layout" svg:width="1.347cm" svg:height="2.221cm" svg:x="23.971cm" svg:y="0.085cm">
-          <text:p/>
-          <draw:enhanced-geometry draw:mirror-horizontal="false" draw:mirror-vertical="false" drawooo:sub-view-size="647700 1066800" draw:text-areas="?f0 ?f2 ?f1 ?f3" svg:viewBox="0 0 0 0" draw:type="ooxml-non-primitive" draw:enhanced-path="M 0 0 L 647700 0 647700 1066800 0 1066800 0 0 Z N">
+          <draw:enhanced-geometry draw:mirror-horizontal="false" draw:mirror-vertical="false" svg:viewBox="0 0 0 0" draw:glue-points="?f0 0 0 ?f1 ?f0 ?f2 ?f3 ?f1" draw:text-areas="0 0 ?f3 ?f2" draw:type="ooxml-rect" draw:enhanced-path="M 0 0 L ?f3 0 ?f3 ?f2 0 ?f2 Z N">
+            <draw:equation draw:name="f0" draw:formula="logwidth/2"/>
+            <draw:equation draw:name="f1" draw:formula="logheight/2"/>
+            <draw:equation draw:name="f2" draw:formula="logheight"/>
+            <draw:equation draw:name="f3" draw:formula="logwidth"/>
+          </draw:enhanced-geometry>
+        </draw:custom-shape>
+        <draw:custom-shape draw:name="Freeform 5" draw:style-name="gr9" draw:text-style-name="P9" draw:layer="layout" svg:width="1.347cm" svg:height="2.221cm" svg:x="23.971cm" svg:y="0.085cm">
+          <text:p/>
+          <draw:enhanced-geometry draw:mirror-horizontal="false" draw:mirror-vertical="false" svg:viewBox="0 0 0 0" drawooo:sub-view-size="647700 1066800" draw:text-areas="?f0 ?f2 ?f1 ?f3" draw:type="ooxml-non-primitive" draw:enhanced-path="M 0 0 L 647700 0 647700 1066800 0 1066800 0 0 Z N">
             <draw:equation draw:name="f0" draw:formula="0*logwidth/485280"/>
             <draw:equation draw:name="f1" draw:formula="485640*logwidth/485280"/>
             <draw:equation draw:name="f2" draw:formula="0*logheight/799920"/>
@@ -4694,16 +4877,16 @@
         </draw:custom-shape>
         <presentation:notes draw:style-name="dp2">
           <draw:page-thumbnail draw:name="PlaceHolder 1" draw:style-name="gr10" draw:layer="layout" svg:width="15.237cm" svg:height="8.57cm" svg:x="1.905cm" svg:y="3.175cm" draw:page-number="1" presentation:class="page"/>
-          <draw:frame draw:name="PlaceHolder 2" presentation:style-name="pr1" draw:text-style-name="P9" draw:layer="layout" svg:width="15.237cm" svg:height="9.998cm" svg:x="1.905cm" svg:y="12.224cm" presentation:class="notes" presentation:user-transformed="true">
+          <draw:frame draw:name="PlaceHolder 2" presentation:style-name="pr1" draw:text-style-name="P11" draw:layer="layout" svg:width="15.237cm" svg:height="9.998cm" svg:x="1.905cm" svg:y="12.224cm" presentation:class="notes" presentation:user-transformed="true">
             <draw:text-box>
-              <text:p text:style-name="P8">
+              <text:p text:style-name="P10">
                 <text:span text:style-name="T6">Introduce the dataset: 2,008 hospitalized heart-failure patients from PhysioNet (Sichuan, China, 2016–2019), linking hospital records with 28-day, 3-month and 6-month outcomes. Then introduce the team: Snehalatha, Rashmi, Sandhya and Jayasree.</text:span>
               </text:p>
             </draw:text-box>
           </draw:frame>
-          <draw:frame draw:name="PlaceHolder 3" presentation:style-name="pr2" draw:text-style-name="P11" draw:layer="layout" svg:width="8.252cm" svg:height="1.271cm" svg:x="10.791cm" svg:y="24.126cm" presentation:class="page-number" presentation:user-transformed="true">
+          <draw:frame draw:name="PlaceHolder 3" presentation:style-name="pr2" draw:text-style-name="P13" draw:layer="layout" svg:width="8.252cm" svg:height="1.271cm" svg:x="10.791cm" svg:y="24.126cm" presentation:class="page-number" presentation:user-transformed="true">
             <draw:text-box>
-              <text:p text:style-name="P10">
+              <text:p text:style-name="P12">
                 <text:span text:style-name="T7">
                   <text:page-number>&lt;number&gt;</text:page-number>
                 </text:span>
@@ -4713,9 +4896,9 @@
         </presentation:notes>
       </draw:page>
       <draw:page draw:name="page2" draw:style-name="dp3" draw:master-page-name="DEFAULT">
-        <draw:custom-shape draw:name="Shape 0" draw:style-name="gr11" draw:text-style-name="P12" draw:layer="layout" svg:width="3.426cm" svg:height="0.683cm" svg:x="1.27cm" svg:y="0.635cm">
-          <text:p/>
-          <draw:enhanced-geometry draw:mirror-horizontal="false" draw:mirror-vertical="false" draw:glue-points="?f8 0 0 ?f9 ?f8 ?f10 ?f11 ?f9" draw:text-areas="?f5 ?f5 ?f6 ?f7" svg:viewBox="0 0 0 0" draw:type="ooxml-roundRect" draw:modifiers="48148" draw:enhanced-path="M 0 ?f2 L ?f3 0 L ?f11 ?f4 L ?f2 ?f10 Z N" drawooo:enhanced-path="M 0 ?f2 G ?f2 ?f2 ?f12 ?f13 L ?f3 0 G ?f2 ?f2 ?f14 ?f15 L ?f11 ?f4 G ?f2 ?f2 ?f16 ?f17 L ?f2 ?f10 G ?f2 ?f2 ?f18 ?f19 Z N">
+        <draw:custom-shape draw:name="Shape 0" draw:style-name="gr11" draw:text-style-name="P14" draw:layer="layout" svg:width="3.426cm" svg:height="0.683cm" svg:x="1.27cm" svg:y="0.635cm">
+          <text:p/>
+          <draw:enhanced-geometry draw:mirror-horizontal="false" draw:mirror-vertical="false" svg:viewBox="0 0 0 0" draw:glue-points="?f8 0 0 ?f9 ?f8 ?f10 ?f11 ?f9" draw:text-areas="?f5 ?f5 ?f6 ?f7" draw:type="ooxml-roundRect" draw:modifiers="48148" draw:enhanced-path="M 0 ?f2 L ?f3 0 L ?f11 ?f4 L ?f2 ?f10 Z N" drawooo:enhanced-path="M 0 ?f2 G ?f2 ?f2 ?f12 ?f13 L ?f3 0 G ?f2 ?f2 ?f14 ?f15 L ?f11 ?f4 G ?f2 ?f2 ?f16 ?f17 L ?f2 ?f10 G ?f2 ?f2 ?f18 ?f19 Z N">
             <draw:equation draw:name="f0" draw:formula="if(0-$0 ,0,if(50000-$0 ,$0 ,50000))"/>
             <draw:equation draw:name="f1" draw:formula="min(logwidth,logheight)"/>
             <draw:equation draw:name="f2" draw:formula="?f1 *?f0 /100000"/>
@@ -4736,23 +4919,23 @@
             <draw:equation draw:name="f17" draw:formula="(5400000)/60000.0"/>
             <draw:equation draw:name="f18" draw:formula="(5400000)/60000.0"/>
             <draw:equation draw:name="f19" draw:formula="(5400000)/60000.0"/>
-            <draw:handle draw:handle-position="?f2 0" draw:handle-position-x="?f2" draw:handle-position-y="0" draw:handle-range-x-maximum="50000" draw:handle-range-x-minimum="0"/>
-          </draw:enhanced-geometry>
-        </draw:custom-shape>
-        <draw:custom-shape draw:name="Text 1" draw:style-name="gr12" draw:text-style-name="P14" draw:layer="layout" svg:width="3.426cm" svg:height="0.683cm" svg:x="1.27cm" svg:y="0.635cm">
-          <text:p text:style-name="P13">
+            <draw:handle draw:handle-range-x-maximum="50000" draw:handle-range-x-minimum="0" draw:handle-position="?f2 0" draw:handle-position-x="?f2" draw:handle-position-y="0"/>
+          </draw:enhanced-geometry>
+        </draw:custom-shape>
+        <draw:custom-shape draw:name="Text 1" draw:style-name="gr12" draw:text-style-name="P16" draw:layer="layout" svg:width="3.426cm" svg:height="0.683cm" svg:x="1.27cm" svg:y="0.635cm">
+          <text:p text:style-name="P15">
             <text:span text:style-name="T8">KPIS</text:span>
           </text:p>
-          <draw:enhanced-geometry draw:mirror-horizontal="false" draw:mirror-vertical="false" draw:glue-points="?f0 0 0 ?f1 ?f0 ?f2 ?f3 ?f1" draw:text-areas="0 0 ?f3 ?f2" svg:viewBox="0 0 0 0" draw:type="ooxml-rect" draw:enhanced-path="M 0 0 L ?f3 0 ?f3 ?f2 0 ?f2 Z N">
-            <draw:equation draw:name="f0" draw:formula="logwidth/2"/>
-            <draw:equation draw:name="f1" draw:formula="logheight/2"/>
-            <draw:equation draw:name="f2" draw:formula="logheight"/>
-            <draw:equation draw:name="f3" draw:formula="logwidth"/>
-          </draw:enhanced-geometry>
-        </draw:custom-shape>
-        <draw:custom-shape draw:name="Text 2" draw:style-name="gr1" draw:text-style-name="P15" draw:layer="layout" svg:width="7.617cm" svg:height="0.683cm" svg:x="4.953cm" svg:y="0.635cm">
-          <text:p/>
-          <draw:enhanced-geometry draw:mirror-horizontal="false" draw:mirror-vertical="false" draw:glue-points="?f0 0 0 ?f1 ?f0 ?f2 ?f3 ?f1" draw:text-areas="0 0 ?f3 ?f2" svg:viewBox="0 0 0 0" draw:type="ooxml-rect" draw:enhanced-path="M 0 0 L ?f3 0 ?f3 ?f2 0 ?f2 Z N">
+          <draw:enhanced-geometry draw:mirror-horizontal="false" draw:mirror-vertical="false" svg:viewBox="0 0 0 0" draw:glue-points="?f0 0 0 ?f1 ?f0 ?f2 ?f3 ?f1" draw:text-areas="0 0 ?f3 ?f2" draw:type="ooxml-rect" draw:enhanced-path="M 0 0 L ?f3 0 ?f3 ?f2 0 ?f2 Z N">
+            <draw:equation draw:name="f0" draw:formula="logwidth/2"/>
+            <draw:equation draw:name="f1" draw:formula="logheight/2"/>
+            <draw:equation draw:name="f2" draw:formula="logheight"/>
+            <draw:equation draw:name="f3" draw:formula="logwidth"/>
+          </draw:enhanced-geometry>
+        </draw:custom-shape>
+        <draw:custom-shape draw:name="Text 2" draw:style-name="gr1" draw:text-style-name="P17" draw:layer="layout" svg:width="7.617cm" svg:height="0.683cm" svg:x="4.953cm" svg:y="0.635cm">
+          <text:p/>
+          <draw:enhanced-geometry draw:mirror-horizontal="false" draw:mirror-vertical="false" svg:viewBox="0 0 0 0" draw:glue-points="?f0 0 0 ?f1 ?f0 ?f2 ?f3 ?f1" draw:text-areas="0 0 ?f3 ?f2" draw:type="ooxml-rect" draw:enhanced-path="M 0 0 L ?f3 0 ?f3 ?f2 0 ?f2 Z N">
             <draw:equation draw:name="f0" draw:formula="logwidth/2"/>
             <draw:equation draw:name="f1" draw:formula="logheight/2"/>
             <draw:equation draw:name="f2" draw:formula="logheight"/>
@@ -4761,18 +4944,23 @@
         </draw:custom-shape>
         <draw:custom-shape draw:name="Text 3" draw:style-name="gr13" draw:text-style-name="P3" draw:layer="layout" svg:width="22.857cm" svg:height="2.052cm" svg:x="1.169cm" svg:y="1.4cm">
           <text:p text:style-name="P2">
-            <text:span text:style-name="T9">Key Performance Indicators</text:span>
-          </text:p>
-          <draw:enhanced-geometry draw:mirror-horizontal="false" draw:mirror-vertical="false" draw:glue-points="?f0 0 0 ?f1 ?f0 ?f2 ?f3 ?f1" draw:text-areas="0 0 ?f3 ?f2" svg:viewBox="0 0 0 0" draw:type="ooxml-rect" draw:enhanced-path="M 0 0 L ?f3 0 ?f3 ?f2 0 ?f2 Z N">
-            <draw:equation draw:name="f0" draw:formula="logwidth/2"/>
-            <draw:equation draw:name="f1" draw:formula="logheight/2"/>
-            <draw:equation draw:name="f2" draw:formula="logheight"/>
-            <draw:equation draw:name="f3" draw:formula="logwidth"/>
-          </draw:enhanced-geometry>
-        </draw:custom-shape>
-        <draw:custom-shape draw:name="Shape 5" draw:style-name="gr14" draw:text-style-name="P12" draw:layer="layout" svg:width="2.283cm" svg:height="0.505cm" svg:x="14.224cm" svg:y="13.411cm">
-          <text:p/>
-          <draw:enhanced-geometry draw:mirror-horizontal="false" draw:mirror-vertical="false" draw:glue-points="?f8 0 0 ?f9 ?f8 ?f10 ?f11 ?f9" draw:text-areas="?f5 ?f5 ?f6 ?f7" svg:viewBox="0 0 0 0" draw:type="ooxml-roundRect" draw:modifiers="50000" draw:enhanced-path="M 0 ?f2 L ?f3 0 L ?f11 ?f4 L ?f2 ?f10 Z N" drawooo:enhanced-path="M 0 ?f2 G ?f2 ?f2 ?f12 ?f13 L ?f3 0 G ?f2 ?f2 ?f14 ?f15 L ?f11 ?f4 G ?f2 ?f2 ?f16 ?f17 L ?f2 ?f10 G ?f2 ?f2 ?f18 ?f19 Z N">
+            <text:span text:style-name="T9">Key </text:span>
+            <text:span text:style-name="T9">Perfo</text:span>
+            <text:span text:style-name="T9">rman</text:span>
+            <text:span text:style-name="T9">ce </text:span>
+            <text:span text:style-name="T9">Indic</text:span>
+            <text:span text:style-name="T9">ators</text:span>
+          </text:p>
+          <draw:enhanced-geometry draw:mirror-horizontal="false" draw:mirror-vertical="false" svg:viewBox="0 0 0 0" draw:glue-points="?f0 0 0 ?f1 ?f0 ?f2 ?f3 ?f1" draw:text-areas="0 0 ?f3 ?f2" draw:type="ooxml-rect" draw:enhanced-path="M 0 0 L ?f3 0 ?f3 ?f2 0 ?f2 Z N">
+            <draw:equation draw:name="f0" draw:formula="logwidth/2"/>
+            <draw:equation draw:name="f1" draw:formula="logheight/2"/>
+            <draw:equation draw:name="f2" draw:formula="logheight"/>
+            <draw:equation draw:name="f3" draw:formula="logwidth"/>
+          </draw:enhanced-geometry>
+        </draw:custom-shape>
+        <draw:custom-shape draw:name="Shape 5" draw:style-name="gr14" draw:text-style-name="P14" draw:layer="layout" svg:width="2.283cm" svg:height="0.505cm" svg:x="14.224cm" svg:y="13.411cm">
+          <text:p/>
+          <draw:enhanced-geometry draw:mirror-horizontal="false" draw:mirror-vertical="false" svg:viewBox="0 0 0 0" draw:glue-points="?f8 0 0 ?f9 ?f8 ?f10 ?f11 ?f9" draw:text-areas="?f5 ?f5 ?f6 ?f7" draw:type="ooxml-roundRect" draw:modifiers="50000" draw:enhanced-path="M 0 ?f2 L ?f3 0 L ?f11 ?f4 L ?f2 ?f10 Z N" drawooo:enhanced-path="M 0 ?f2 G ?f2 ?f2 ?f12 ?f13 L ?f3 0 G ?f2 ?f2 ?f14 ?f15 L ?f11 ?f4 G ?f2 ?f2 ?f16 ?f17 L ?f2 ?f10 G ?f2 ?f2 ?f18 ?f19 Z N">
             <draw:equation draw:name="f0" draw:formula="if(0-$0 ,0,if(50000-$0 ,$0 ,50000))"/>
             <draw:equation draw:name="f1" draw:formula="min(logwidth,logheight)"/>
             <draw:equation draw:name="f2" draw:formula="?f1 *?f0 /100000"/>
@@ -4793,23 +4981,23 @@
             <draw:equation draw:name="f17" draw:formula="(5400000)/60000.0"/>
             <draw:equation draw:name="f18" draw:formula="(5400000)/60000.0"/>
             <draw:equation draw:name="f19" draw:formula="(5400000)/60000.0"/>
-            <draw:handle draw:handle-position="?f2 0" draw:handle-position-x="?f2" draw:handle-position-y="0" draw:handle-range-x-maximum="50000" draw:handle-range-x-minimum="0"/>
-          </draw:enhanced-geometry>
-        </draw:custom-shape>
-        <draw:custom-shape draw:name="Text 6" draw:style-name="gr15" draw:text-style-name="P14" draw:layer="layout" svg:width="2.283cm" svg:height="0.505cm" svg:x="14.224cm" svg:y="13.411cm">
-          <text:p text:style-name="P13">
+            <draw:handle draw:handle-range-x-maximum="50000" draw:handle-range-x-minimum="0" draw:handle-position="?f2 0" draw:handle-position-x="?f2" draw:handle-position-y="0"/>
+          </draw:enhanced-geometry>
+        </draw:custom-shape>
+        <draw:custom-shape draw:name="Text 6" draw:style-name="gr15" draw:text-style-name="P16" draw:layer="layout" svg:width="2.283cm" svg:height="0.505cm" svg:x="14.224cm" svg:y="13.411cm">
+          <text:p text:style-name="P15">
             <text:span text:style-name="T10">KPIs</text:span>
           </text:p>
-          <draw:enhanced-geometry draw:mirror-horizontal="false" draw:mirror-vertical="false" draw:glue-points="?f0 0 0 ?f1 ?f0 ?f2 ?f3 ?f1" draw:text-areas="0 0 ?f3 ?f2" svg:viewBox="0 0 0 0" draw:type="ooxml-rect" draw:enhanced-path="M 0 0 L ?f3 0 ?f3 ?f2 0 ?f2 Z N">
-            <draw:equation draw:name="f0" draw:formula="logwidth/2"/>
-            <draw:equation draw:name="f1" draw:formula="logheight/2"/>
-            <draw:equation draw:name="f2" draw:formula="logheight"/>
-            <draw:equation draw:name="f3" draw:formula="logwidth"/>
-          </draw:enhanced-geometry>
-        </draw:custom-shape>
-        <draw:custom-shape draw:name="Shape 7" draw:style-name="gr16" draw:text-style-name="P16" draw:layer="layout" svg:width="2.283cm" svg:height="0.505cm" svg:x="16.739cm" svg:y="13.411cm">
-          <text:p/>
-          <draw:enhanced-geometry draw:mirror-horizontal="false" draw:mirror-vertical="false" draw:glue-points="?f8 0 0 ?f9 ?f8 ?f10 ?f11 ?f9" draw:text-areas="?f5 ?f5 ?f6 ?f7" svg:viewBox="0 0 0 0" draw:type="ooxml-roundRect" draw:modifiers="50000" draw:enhanced-path="M 0 ?f2 L ?f3 0 L ?f11 ?f4 L ?f2 ?f10 Z N" drawooo:enhanced-path="M 0 ?f2 G ?f2 ?f2 ?f12 ?f13 L ?f3 0 G ?f2 ?f2 ?f14 ?f15 L ?f11 ?f4 G ?f2 ?f2 ?f16 ?f17 L ?f2 ?f10 G ?f2 ?f2 ?f18 ?f19 Z N">
+          <draw:enhanced-geometry draw:mirror-horizontal="false" draw:mirror-vertical="false" svg:viewBox="0 0 0 0" draw:glue-points="?f0 0 0 ?f1 ?f0 ?f2 ?f3 ?f1" draw:text-areas="0 0 ?f3 ?f2" draw:type="ooxml-rect" draw:enhanced-path="M 0 0 L ?f3 0 ?f3 ?f2 0 ?f2 Z N">
+            <draw:equation draw:name="f0" draw:formula="logwidth/2"/>
+            <draw:equation draw:name="f1" draw:formula="logheight/2"/>
+            <draw:equation draw:name="f2" draw:formula="logheight"/>
+            <draw:equation draw:name="f3" draw:formula="logwidth"/>
+          </draw:enhanced-geometry>
+        </draw:custom-shape>
+        <draw:custom-shape draw:name="Shape 7" draw:style-name="gr16" draw:text-style-name="P18" draw:layer="layout" svg:width="2.283cm" svg:height="0.505cm" svg:x="16.739cm" svg:y="13.411cm">
+          <text:p/>
+          <draw:enhanced-geometry draw:mirror-horizontal="false" draw:mirror-vertical="false" svg:viewBox="0 0 0 0" draw:glue-points="?f8 0 0 ?f9 ?f8 ?f10 ?f11 ?f9" draw:text-areas="?f5 ?f5 ?f6 ?f7" draw:type="ooxml-roundRect" draw:modifiers="50000" draw:enhanced-path="M 0 ?f2 L ?f3 0 L ?f11 ?f4 L ?f2 ?f10 Z N" drawooo:enhanced-path="M 0 ?f2 G ?f2 ?f2 ?f12 ?f13 L ?f3 0 G ?f2 ?f2 ?f14 ?f15 L ?f11 ?f4 G ?f2 ?f2 ?f16 ?f17 L ?f2 ?f10 G ?f2 ?f2 ?f18 ?f19 Z N">
             <draw:equation draw:name="f0" draw:formula="if(0-$0 ,0,if(50000-$0 ,$0 ,50000))"/>
             <draw:equation draw:name="f1" draw:formula="min(logwidth,logheight)"/>
             <draw:equation draw:name="f2" draw:formula="?f1 *?f0 /100000"/>
@@ -4830,23 +5018,23 @@
             <draw:equation draw:name="f17" draw:formula="(5400000)/60000.0"/>
             <draw:equation draw:name="f18" draw:formula="(5400000)/60000.0"/>
             <draw:equation draw:name="f19" draw:formula="(5400000)/60000.0"/>
-            <draw:handle draw:handle-position="?f2 0" draw:handle-position-x="?f2" draw:handle-position-y="0" draw:handle-range-x-maximum="50000" draw:handle-range-x-minimum="0"/>
-          </draw:enhanced-geometry>
-        </draw:custom-shape>
-        <draw:custom-shape draw:name="Text 8" draw:style-name="gr17" draw:text-style-name="P14" draw:layer="layout" svg:width="2.283cm" svg:height="0.505cm" svg:x="16.739cm" svg:y="13.411cm">
-          <text:p text:style-name="P13">
+            <draw:handle draw:handle-range-x-maximum="50000" draw:handle-range-x-minimum="0" draw:handle-position="?f2 0" draw:handle-position-x="?f2" draw:handle-position-y="0"/>
+          </draw:enhanced-geometry>
+        </draw:custom-shape>
+        <draw:custom-shape draw:name="Text 8" draw:style-name="gr17" draw:text-style-name="P16" draw:layer="layout" svg:width="2.283cm" svg:height="0.505cm" svg:x="16.739cm" svg:y="13.411cm">
+          <text:p text:style-name="P15">
             <text:span text:style-name="T11">Descriptive</text:span>
           </text:p>
-          <draw:enhanced-geometry draw:mirror-horizontal="false" draw:mirror-vertical="false" draw:glue-points="?f0 0 0 ?f1 ?f0 ?f2 ?f3 ?f1" draw:text-areas="0 0 ?f3 ?f2" svg:viewBox="0 0 0 0" draw:type="ooxml-rect" draw:enhanced-path="M 0 0 L ?f3 0 ?f3 ?f2 0 ?f2 Z N">
-            <draw:equation draw:name="f0" draw:formula="logwidth/2"/>
-            <draw:equation draw:name="f1" draw:formula="logheight/2"/>
-            <draw:equation draw:name="f2" draw:formula="logheight"/>
-            <draw:equation draw:name="f3" draw:formula="logwidth"/>
-          </draw:enhanced-geometry>
-        </draw:custom-shape>
-        <draw:custom-shape draw:name="Shape 9" draw:style-name="gr16" draw:text-style-name="P16" draw:layer="layout" svg:width="2.283cm" svg:height="0.505cm" svg:x="19.253cm" svg:y="13.411cm">
-          <text:p/>
-          <draw:enhanced-geometry draw:mirror-horizontal="false" draw:mirror-vertical="false" draw:glue-points="?f8 0 0 ?f9 ?f8 ?f10 ?f11 ?f9" draw:text-areas="?f5 ?f5 ?f6 ?f7" svg:viewBox="0 0 0 0" draw:type="ooxml-roundRect" draw:modifiers="50000" draw:enhanced-path="M 0 ?f2 L ?f3 0 L ?f11 ?f4 L ?f2 ?f10 Z N" drawooo:enhanced-path="M 0 ?f2 G ?f2 ?f2 ?f12 ?f13 L ?f3 0 G ?f2 ?f2 ?f14 ?f15 L ?f11 ?f4 G ?f2 ?f2 ?f16 ?f17 L ?f2 ?f10 G ?f2 ?f2 ?f18 ?f19 Z N">
+          <draw:enhanced-geometry draw:mirror-horizontal="false" draw:mirror-vertical="false" svg:viewBox="0 0 0 0" draw:glue-points="?f0 0 0 ?f1 ?f0 ?f2 ?f3 ?f1" draw:text-areas="0 0 ?f3 ?f2" draw:type="ooxml-rect" draw:enhanced-path="M 0 0 L ?f3 0 ?f3 ?f2 0 ?f2 Z N">
+            <draw:equation draw:name="f0" draw:formula="logwidth/2"/>
+            <draw:equation draw:name="f1" draw:formula="logheight/2"/>
+            <draw:equation draw:name="f2" draw:formula="logheight"/>
+            <draw:equation draw:name="f3" draw:formula="logwidth"/>
+          </draw:enhanced-geometry>
+        </draw:custom-shape>
+        <draw:custom-shape draw:name="Shape 9" draw:style-name="gr16" draw:text-style-name="P18" draw:layer="layout" svg:width="2.283cm" svg:height="0.505cm" svg:x="19.253cm" svg:y="13.411cm">
+          <text:p/>
+          <draw:enhanced-geometry draw:mirror-horizontal="false" draw:mirror-vertical="false" svg:viewBox="0 0 0 0" draw:glue-points="?f8 0 0 ?f9 ?f8 ?f10 ?f11 ?f9" draw:text-areas="?f5 ?f5 ?f6 ?f7" draw:type="ooxml-roundRect" draw:modifiers="50000" draw:enhanced-path="M 0 ?f2 L ?f3 0 L ?f11 ?f4 L ?f2 ?f10 Z N" drawooo:enhanced-path="M 0 ?f2 G ?f2 ?f2 ?f12 ?f13 L ?f3 0 G ?f2 ?f2 ?f14 ?f15 L ?f11 ?f4 G ?f2 ?f2 ?f16 ?f17 L ?f2 ?f10 G ?f2 ?f2 ?f18 ?f19 Z N">
             <draw:equation draw:name="f0" draw:formula="if(0-$0 ,0,if(50000-$0 ,$0 ,50000))"/>
             <draw:equation draw:name="f1" draw:formula="min(logwidth,logheight)"/>
             <draw:equation draw:name="f2" draw:formula="?f1 *?f0 /100000"/>
@@ -4867,23 +5055,23 @@
             <draw:equation draw:name="f17" draw:formula="(5400000)/60000.0"/>
             <draw:equation draw:name="f18" draw:formula="(5400000)/60000.0"/>
             <draw:equation draw:name="f19" draw:formula="(5400000)/60000.0"/>
-            <draw:handle draw:handle-position="?f2 0" draw:handle-position-x="?f2" draw:handle-position-y="0" draw:handle-range-x-maximum="50000" draw:handle-range-x-minimum="0"/>
-          </draw:enhanced-geometry>
-        </draw:custom-shape>
-        <draw:custom-shape draw:name="Text 10" draw:style-name="gr18" draw:text-style-name="P14" draw:layer="layout" svg:width="2.283cm" svg:height="0.505cm" svg:x="19.253cm" svg:y="13.411cm">
-          <text:p text:style-name="P13">
+            <draw:handle draw:handle-range-x-maximum="50000" draw:handle-range-x-minimum="0" draw:handle-position="?f2 0" draw:handle-position-x="?f2" draw:handle-position-y="0"/>
+          </draw:enhanced-geometry>
+        </draw:custom-shape>
+        <draw:custom-shape draw:name="Text 10" draw:style-name="gr18" draw:text-style-name="P16" draw:layer="layout" svg:width="2.283cm" svg:height="0.505cm" svg:x="19.253cm" svg:y="13.411cm">
+          <text:p text:style-name="P15">
             <text:span text:style-name="T11">Prescriptive</text:span>
           </text:p>
-          <draw:enhanced-geometry draw:mirror-horizontal="false" draw:mirror-vertical="false" draw:glue-points="?f0 0 0 ?f1 ?f0 ?f2 ?f3 ?f1" draw:text-areas="0 0 ?f3 ?f2" svg:viewBox="0 0 0 0" draw:type="ooxml-rect" draw:enhanced-path="M 0 0 L ?f3 0 ?f3 ?f2 0 ?f2 Z N">
-            <draw:equation draw:name="f0" draw:formula="logwidth/2"/>
-            <draw:equation draw:name="f1" draw:formula="logheight/2"/>
-            <draw:equation draw:name="f2" draw:formula="logheight"/>
-            <draw:equation draw:name="f3" draw:formula="logwidth"/>
-          </draw:enhanced-geometry>
-        </draw:custom-shape>
-        <draw:custom-shape draw:name="Shape 11" draw:style-name="gr16" draw:text-style-name="P16" draw:layer="layout" svg:width="2.283cm" svg:height="0.505cm" svg:x="21.768cm" svg:y="13.411cm">
-          <text:p/>
-          <draw:enhanced-geometry draw:mirror-horizontal="false" draw:mirror-vertical="false" draw:glue-points="?f8 0 0 ?f9 ?f8 ?f10 ?f11 ?f9" draw:text-areas="?f5 ?f5 ?f6 ?f7" svg:viewBox="0 0 0 0" draw:type="ooxml-roundRect" draw:modifiers="50000" draw:enhanced-path="M 0 ?f2 L ?f3 0 L ?f11 ?f4 L ?f2 ?f10 Z N" drawooo:enhanced-path="M 0 ?f2 G ?f2 ?f2 ?f12 ?f13 L ?f3 0 G ?f2 ?f2 ?f14 ?f15 L ?f11 ?f4 G ?f2 ?f2 ?f16 ?f17 L ?f2 ?f10 G ?f2 ?f2 ?f18 ?f19 Z N">
+          <draw:enhanced-geometry draw:mirror-horizontal="false" draw:mirror-vertical="false" svg:viewBox="0 0 0 0" draw:glue-points="?f0 0 0 ?f1 ?f0 ?f2 ?f3 ?f1" draw:text-areas="0 0 ?f3 ?f2" draw:type="ooxml-rect" draw:enhanced-path="M 0 0 L ?f3 0 ?f3 ?f2 0 ?f2 Z N">
+            <draw:equation draw:name="f0" draw:formula="logwidth/2"/>
+            <draw:equation draw:name="f1" draw:formula="logheight/2"/>
+            <draw:equation draw:name="f2" draw:formula="logheight"/>
+            <draw:equation draw:name="f3" draw:formula="logwidth"/>
+          </draw:enhanced-geometry>
+        </draw:custom-shape>
+        <draw:custom-shape draw:name="Shape 11" draw:style-name="gr16" draw:text-style-name="P18" draw:layer="layout" svg:width="2.283cm" svg:height="0.505cm" svg:x="21.768cm" svg:y="13.411cm">
+          <text:p/>
+          <draw:enhanced-geometry draw:mirror-horizontal="false" draw:mirror-vertical="false" svg:viewBox="0 0 0 0" draw:glue-points="?f8 0 0 ?f9 ?f8 ?f10 ?f11 ?f9" draw:text-areas="?f5 ?f5 ?f6 ?f7" draw:type="ooxml-roundRect" draw:modifiers="50000" draw:enhanced-path="M 0 ?f2 L ?f3 0 L ?f11 ?f4 L ?f2 ?f10 Z N" drawooo:enhanced-path="M 0 ?f2 G ?f2 ?f2 ?f12 ?f13 L ?f3 0 G ?f2 ?f2 ?f14 ?f15 L ?f11 ?f4 G ?f2 ?f2 ?f16 ?f17 L ?f2 ?f10 G ?f2 ?f2 ?f18 ?f19 Z N">
             <draw:equation draw:name="f0" draw:formula="if(0-$0 ,0,if(50000-$0 ,$0 ,50000))"/>
             <draw:equation draw:name="f1" draw:formula="min(logwidth,logheight)"/>
             <draw:equation draw:name="f2" draw:formula="?f1 *?f0 /100000"/>
@@ -4904,23 +5092,23 @@
             <draw:equation draw:name="f17" draw:formula="(5400000)/60000.0"/>
             <draw:equation draw:name="f18" draw:formula="(5400000)/60000.0"/>
             <draw:equation draw:name="f19" draw:formula="(5400000)/60000.0"/>
-            <draw:handle draw:handle-position="?f2 0" draw:handle-position-x="?f2" draw:handle-position-y="0" draw:handle-range-x-maximum="50000" draw:handle-range-x-minimum="0"/>
-          </draw:enhanced-geometry>
-        </draw:custom-shape>
-        <draw:custom-shape draw:name="Text 12" draw:style-name="gr19" draw:text-style-name="P14" draw:layer="layout" svg:width="2.283cm" svg:height="0.505cm" svg:x="21.768cm" svg:y="13.411cm">
-          <text:p text:style-name="P13">
+            <draw:handle draw:handle-range-x-maximum="50000" draw:handle-range-x-minimum="0" draw:handle-position="?f2 0" draw:handle-position-x="?f2" draw:handle-position-y="0"/>
+          </draw:enhanced-geometry>
+        </draw:custom-shape>
+        <draw:custom-shape draw:name="Text 12" draw:style-name="gr19" draw:text-style-name="P16" draw:layer="layout" svg:width="2.283cm" svg:height="0.505cm" svg:x="21.768cm" svg:y="13.411cm">
+          <text:p text:style-name="P15">
             <text:span text:style-name="T11">Predictive</text:span>
           </text:p>
-          <draw:enhanced-geometry draw:mirror-horizontal="false" draw:mirror-vertical="false" draw:glue-points="?f0 0 0 ?f1 ?f0 ?f2 ?f3 ?f1" draw:text-areas="0 0 ?f3 ?f2" svg:viewBox="0 0 0 0" draw:type="ooxml-rect" draw:enhanced-path="M 0 0 L ?f3 0 ?f3 ?f2 0 ?f2 Z N">
-            <draw:equation draw:name="f0" draw:formula="logwidth/2"/>
-            <draw:equation draw:name="f1" draw:formula="logheight/2"/>
-            <draw:equation draw:name="f2" draw:formula="logheight"/>
-            <draw:equation draw:name="f3" draw:formula="logwidth"/>
-          </draw:enhanced-geometry>
-        </draw:custom-shape>
-        <draw:custom-shape draw:name="Shape 13" draw:style-name="gr20" draw:text-style-name="P16" draw:layer="layout" svg:width="5.382cm" svg:height="2.74cm" svg:x="1.27cm" svg:y="3.607cm">
-          <text:p/>
-          <draw:enhanced-geometry draw:mirror-horizontal="false" draw:mirror-vertical="false" draw:glue-points="?f8 0 0 ?f9 ?f8 ?f10 ?f11 ?f9" draw:text-areas="?f5 ?f5 ?f6 ?f7" svg:viewBox="0 0 0 0" draw:type="ooxml-roundRect" draw:modifiers="7407" draw:enhanced-path="M 0 ?f2 L ?f3 0 L ?f11 ?f4 L ?f2 ?f10 Z N" drawooo:enhanced-path="M 0 ?f2 G ?f2 ?f2 ?f12 ?f13 L ?f3 0 G ?f2 ?f2 ?f14 ?f15 L ?f11 ?f4 G ?f2 ?f2 ?f16 ?f17 L ?f2 ?f10 G ?f2 ?f2 ?f18 ?f19 Z N">
+          <draw:enhanced-geometry draw:mirror-horizontal="false" draw:mirror-vertical="false" svg:viewBox="0 0 0 0" draw:glue-points="?f0 0 0 ?f1 ?f0 ?f2 ?f3 ?f1" draw:text-areas="0 0 ?f3 ?f2" draw:type="ooxml-rect" draw:enhanced-path="M 0 0 L ?f3 0 ?f3 ?f2 0 ?f2 Z N">
+            <draw:equation draw:name="f0" draw:formula="logwidth/2"/>
+            <draw:equation draw:name="f1" draw:formula="logheight/2"/>
+            <draw:equation draw:name="f2" draw:formula="logheight"/>
+            <draw:equation draw:name="f3" draw:formula="logwidth"/>
+          </draw:enhanced-geometry>
+        </draw:custom-shape>
+        <draw:custom-shape draw:name="Shape 13" draw:style-name="gr20" draw:text-style-name="P18" draw:layer="layout" svg:width="5.382cm" svg:height="2.74cm" svg:x="1.27cm" svg:y="3.607cm">
+          <text:p/>
+          <draw:enhanced-geometry draw:mirror-horizontal="false" draw:mirror-vertical="false" svg:viewBox="0 0 0 0" draw:glue-points="?f8 0 0 ?f9 ?f8 ?f10 ?f11 ?f9" draw:text-areas="?f5 ?f5 ?f6 ?f7" draw:type="ooxml-roundRect" draw:modifiers="7407" draw:enhanced-path="M 0 ?f2 L ?f3 0 L ?f11 ?f4 L ?f2 ?f10 Z N" drawooo:enhanced-path="M 0 ?f2 G ?f2 ?f2 ?f12 ?f13 L ?f3 0 G ?f2 ?f2 ?f14 ?f15 L ?f11 ?f4 G ?f2 ?f2 ?f16 ?f17 L ?f2 ?f10 G ?f2 ?f2 ?f18 ?f19 Z N">
             <draw:equation draw:name="f0" draw:formula="if(0-$0 ,0,if(50000-$0 ,$0 ,50000))"/>
             <draw:equation draw:name="f1" draw:formula="min(logwidth,logheight)"/>
             <draw:equation draw:name="f2" draw:formula="?f1 *?f0 /100000"/>
@@ -4941,12 +5129,12 @@
             <draw:equation draw:name="f17" draw:formula="(5400000)/60000.0"/>
             <draw:equation draw:name="f18" draw:formula="(5400000)/60000.0"/>
             <draw:equation draw:name="f19" draw:formula="(5400000)/60000.0"/>
-            <draw:handle draw:handle-position="?f2 0" draw:handle-position-x="?f2" draw:handle-position-y="0" draw:handle-range-x-maximum="50000" draw:handle-range-x-minimum="0"/>
-          </draw:enhanced-geometry>
-        </draw:custom-shape>
-        <draw:custom-shape draw:name="Shape 14" draw:style-name="gr21" draw:text-style-name="P17" draw:layer="layout" svg:width="0.353cm" svg:height="0.353cm" svg:x="1.651cm" svg:y="3.962cm">
-          <text:p/>
-          <draw:enhanced-geometry draw:mirror-horizontal="false" draw:mirror-vertical="false" draw:glue-points="?f4 0 ?f5 ?f8 0 ?f7 ?f5 ?f9 ?f4 ?f10 ?f6 ?f9 ?f11 ?f7 ?f6 ?f8" draw:text-areas="?f5 ?f8 ?f6 ?f9" svg:viewBox="0 0 0 0" draw:type="ooxml-ellipse" draw:enhanced-path="M 0 ?f7 Z N" drawooo:enhanced-path="M 0 ?f7 G ?f0 ?f2 ?f12 ?f13 ?f0 ?f2 ?f14 ?f15 ?f0 ?f2 ?f16 ?f17 ?f0 ?f2 ?f18 ?f19 Z N">
+            <draw:handle draw:handle-range-x-maximum="50000" draw:handle-range-x-minimum="0" draw:handle-position="?f2 0" draw:handle-position-x="?f2" draw:handle-position-y="0"/>
+          </draw:enhanced-geometry>
+        </draw:custom-shape>
+        <draw:custom-shape draw:name="Shape 14" draw:style-name="gr21" draw:text-style-name="P19" draw:layer="layout" svg:width="0.353cm" svg:height="0.353cm" svg:x="1.651cm" svg:y="3.962cm">
+          <text:p/>
+          <draw:enhanced-geometry draw:mirror-horizontal="false" draw:mirror-vertical="false" svg:viewBox="0 0 0 0" draw:glue-points="?f4 0 ?f5 ?f8 0 ?f7 ?f5 ?f9 ?f4 ?f10 ?f6 ?f9 ?f11 ?f7 ?f6 ?f8" draw:text-areas="?f5 ?f8 ?f6 ?f9" draw:type="ooxml-ellipse" draw:enhanced-path="M 0 ?f7 Z N" drawooo:enhanced-path="M 0 ?f7 G ?f0 ?f2 ?f12 ?f13 ?f0 ?f2 ?f14 ?f15 ?f0 ?f2 ?f16 ?f17 ?f0 ?f2 ?f18 ?f19 Z N">
             <draw:equation draw:name="f0" draw:formula="logwidth/2"/>
             <draw:equation draw:name="f1" draw:formula="?f0 *cos(pi*(2700000)/10800000)"/>
             <draw:equation draw:name="f2" draw:formula="logheight/2"/>
@@ -4973,7 +5161,7 @@
           <text:p text:style-name="P2">
             <text:span text:style-name="T12">Patients</text:span>
           </text:p>
-          <draw:enhanced-geometry draw:mirror-horizontal="false" draw:mirror-vertical="false" draw:glue-points="?f0 0 0 ?f1 ?f0 ?f2 ?f3 ?f1" draw:text-areas="0 0 ?f3 ?f2" svg:viewBox="0 0 0 0" draw:type="ooxml-rect" draw:enhanced-path="M 0 0 L ?f3 0 ?f3 ?f2 0 ?f2 Z N">
+          <draw:enhanced-geometry draw:mirror-horizontal="false" draw:mirror-vertical="false" svg:viewBox="0 0 0 0" draw:glue-points="?f0 0 0 ?f1 ?f0 ?f2 ?f3 ?f1" draw:text-areas="0 0 ?f3 ?f2" draw:type="ooxml-rect" draw:enhanced-path="M 0 0 L ?f3 0 ?f3 ?f2 0 ?f2 Z N">
             <draw:equation draw:name="f0" draw:formula="logwidth/2"/>
             <draw:equation draw:name="f1" draw:formula="logheight/2"/>
             <draw:equation draw:name="f2" draw:formula="logheight"/>
@@ -4984,7 +5172,7 @@
           <text:p text:style-name="P2">
             <text:span text:style-name="T13">2,008</text:span>
           </text:p>
-          <draw:enhanced-geometry draw:mirror-horizontal="false" draw:mirror-vertical="false" draw:glue-points="?f0 0 0 ?f1 ?f0 ?f2 ?f3 ?f1" draw:text-areas="0 0 ?f3 ?f2" svg:viewBox="0 0 0 0" draw:type="ooxml-rect" draw:enhanced-path="M 0 0 L ?f3 0 ?f3 ?f2 0 ?f2 Z N">
+          <draw:enhanced-geometry draw:mirror-horizontal="false" draw:mirror-vertical="false" svg:viewBox="0 0 0 0" draw:glue-points="?f0 0 0 ?f1 ?f0 ?f2 ?f3 ?f1" draw:text-areas="0 0 ?f3 ?f2" draw:type="ooxml-rect" draw:enhanced-path="M 0 0 L ?f3 0 ?f3 ?f2 0 ?f2 Z N">
             <draw:equation draw:name="f0" draw:formula="logwidth/2"/>
             <draw:equation draw:name="f1" draw:formula="logheight/2"/>
             <draw:equation draw:name="f2" draw:formula="logheight"/>
@@ -4995,16 +5183,16 @@
           <text:p text:style-name="P2">
             <text:span text:style-name="T14">58% female · 73% aged 69+</text:span>
           </text:p>
-          <draw:enhanced-geometry draw:mirror-horizontal="false" draw:mirror-vertical="false" draw:glue-points="?f0 0 0 ?f1 ?f0 ?f2 ?f3 ?f1" draw:text-areas="0 0 ?f3 ?f2" svg:viewBox="0 0 0 0" draw:type="ooxml-rect" draw:enhanced-path="M 0 0 L ?f3 0 ?f3 ?f2 0 ?f2 Z N">
-            <draw:equation draw:name="f0" draw:formula="logwidth/2"/>
-            <draw:equation draw:name="f1" draw:formula="logheight/2"/>
-            <draw:equation draw:name="f2" draw:formula="logheight"/>
-            <draw:equation draw:name="f3" draw:formula="logwidth"/>
-          </draw:enhanced-geometry>
-        </draw:custom-shape>
-        <draw:custom-shape draw:name="Shape 18" draw:style-name="gr20" draw:text-style-name="P16" draw:layer="layout" svg:width="5.382cm" svg:height="2.74cm" svg:x="7.061cm" svg:y="3.607cm">
-          <text:p/>
-          <draw:enhanced-geometry draw:mirror-horizontal="false" draw:mirror-vertical="false" draw:glue-points="?f8 0 0 ?f9 ?f8 ?f10 ?f11 ?f9" draw:text-areas="?f5 ?f5 ?f6 ?f7" svg:viewBox="0 0 0 0" draw:type="ooxml-roundRect" draw:modifiers="7407" draw:enhanced-path="M 0 ?f2 L ?f3 0 L ?f11 ?f4 L ?f2 ?f10 Z N" drawooo:enhanced-path="M 0 ?f2 G ?f2 ?f2 ?f12 ?f13 L ?f3 0 G ?f2 ?f2 ?f14 ?f15 L ?f11 ?f4 G ?f2 ?f2 ?f16 ?f17 L ?f2 ?f10 G ?f2 ?f2 ?f18 ?f19 Z N">
+          <draw:enhanced-geometry draw:mirror-horizontal="false" draw:mirror-vertical="false" svg:viewBox="0 0 0 0" draw:glue-points="?f0 0 0 ?f1 ?f0 ?f2 ?f3 ?f1" draw:text-areas="0 0 ?f3 ?f2" draw:type="ooxml-rect" draw:enhanced-path="M 0 0 L ?f3 0 ?f3 ?f2 0 ?f2 Z N">
+            <draw:equation draw:name="f0" draw:formula="logwidth/2"/>
+            <draw:equation draw:name="f1" draw:formula="logheight/2"/>
+            <draw:equation draw:name="f2" draw:formula="logheight"/>
+            <draw:equation draw:name="f3" draw:formula="logwidth"/>
+          </draw:enhanced-geometry>
+        </draw:custom-shape>
+        <draw:custom-shape draw:name="Shape 18" draw:style-name="gr20" draw:text-style-name="P18" draw:layer="layout" svg:width="5.382cm" svg:height="2.74cm" svg:x="7.061cm" svg:y="3.607cm">
+          <text:p/>
+          <draw:enhanced-geometry draw:mirror-horizontal="false" draw:mirror-vertical="false" svg:viewBox="0 0 0 0" draw:glue-points="?f8 0 0 ?f9 ?f8 ?f10 ?f11 ?f9" draw:text-areas="?f5 ?f5 ?f6 ?f7" draw:type="ooxml-roundRect" draw:modifiers="7407" draw:enhanced-path="M 0 ?f2 L ?f3 0 L ?f11 ?f4 L ?f2 ?f10 Z N" drawooo:enhanced-path="M 0 ?f2 G ?f2 ?f2 ?f12 ?f13 L ?f3 0 G ?f2 ?f2 ?f14 ?f15 L ?f11 ?f4 G ?f2 ?f2 ?f16 ?f17 L ?f2 ?f10 G ?f2 ?f2 ?f18 ?f19 Z N">
             <draw:equation draw:name="f0" draw:formula="if(0-$0 ,0,if(50000-$0 ,$0 ,50000))"/>
             <draw:equation draw:name="f1" draw:formula="min(logwidth,logheight)"/>
             <draw:equation draw:name="f2" draw:formula="?f1 *?f0 /100000"/>
@@ -5025,12 +5213,12 @@
             <draw:equation draw:name="f17" draw:formula="(5400000)/60000.0"/>
             <draw:equation draw:name="f18" draw:formula="(5400000)/60000.0"/>
             <draw:equation draw:name="f19" draw:formula="(5400000)/60000.0"/>
-            <draw:handle draw:handle-position="?f2 0" draw:handle-position-x="?f2" draw:handle-position-y="0" draw:handle-range-x-maximum="50000" draw:handle-range-x-minimum="0"/>
-          </draw:enhanced-geometry>
-        </draw:custom-shape>
-        <draw:custom-shape draw:name="Shape 19" draw:style-name="gr25" draw:text-style-name="P18" draw:layer="layout" svg:width="0.353cm" svg:height="0.353cm" svg:x="7.442cm" svg:y="3.962cm">
-          <text:p/>
-          <draw:enhanced-geometry draw:mirror-horizontal="false" draw:mirror-vertical="false" draw:glue-points="?f4 0 ?f5 ?f8 0 ?f7 ?f5 ?f9 ?f4 ?f10 ?f6 ?f9 ?f11 ?f7 ?f6 ?f8" draw:text-areas="?f5 ?f8 ?f6 ?f9" svg:viewBox="0 0 0 0" draw:type="ooxml-ellipse" draw:enhanced-path="M 0 ?f7 Z N" drawooo:enhanced-path="M 0 ?f7 G ?f0 ?f2 ?f12 ?f13 ?f0 ?f2 ?f14 ?f15 ?f0 ?f2 ?f16 ?f17 ?f0 ?f2 ?f18 ?f19 Z N">
+            <draw:handle draw:handle-range-x-maximum="50000" draw:handle-range-x-minimum="0" draw:handle-position="?f2 0" draw:handle-position-x="?f2" draw:handle-position-y="0"/>
+          </draw:enhanced-geometry>
+        </draw:custom-shape>
+        <draw:custom-shape draw:name="Shape 19" draw:style-name="gr25" draw:text-style-name="P20" draw:layer="layout" svg:width="0.353cm" svg:height="0.353cm" svg:x="7.442cm" svg:y="3.962cm">
+          <text:p/>
+          <draw:enhanced-geometry draw:mirror-horizontal="false" draw:mirror-vertical="false" svg:viewBox="0 0 0 0" draw:glue-points="?f4 0 ?f5 ?f8 0 ?f7 ?f5 ?f9 ?f4 ?f10 ?f6 ?f9 ?f11 ?f7 ?f6 ?f8" draw:text-areas="?f5 ?f8 ?f6 ?f9" draw:type="ooxml-ellipse" draw:enhanced-path="M 0 ?f7 Z N" drawooo:enhanced-path="M 0 ?f7 G ?f0 ?f2 ?f12 ?f13 ?f0 ?f2 ?f14 ?f15 ?f0 ?f2 ?f16 ?f17 ?f0 ?f2 ?f18 ?f19 Z N">
             <draw:equation draw:name="f0" draw:formula="logwidth/2"/>
             <draw:equation draw:name="f1" draw:formula="?f0 *cos(pi*(2700000)/10800000)"/>
             <draw:equation draw:name="f2" draw:formula="logheight/2"/>
@@ -5057,7 +5245,7 @@
           <text:p text:style-name="P2">
             <text:span text:style-name="T12">6-month readmission</text:span>
           </text:p>
-          <draw:enhanced-geometry draw:mirror-horizontal="false" draw:mirror-vertical="false" draw:glue-points="?f0 0 0 ?f1 ?f0 ?f2 ?f3 ?f1" draw:text-areas="0 0 ?f3 ?f2" svg:viewBox="0 0 0 0" draw:type="ooxml-rect" draw:enhanced-path="M 0 0 L ?f3 0 ?f3 ?f2 0 ?f2 Z N">
+          <draw:enhanced-geometry draw:mirror-horizontal="false" draw:mirror-vertical="false" svg:viewBox="0 0 0 0" draw:glue-points="?f0 0 0 ?f1 ?f0 ?f2 ?f3 ?f1" draw:text-areas="0 0 ?f3 ?f2" draw:type="ooxml-rect" draw:enhanced-path="M 0 0 L ?f3 0 ?f3 ?f2 0 ?f2 Z N">
             <draw:equation draw:name="f0" draw:formula="logwidth/2"/>
             <draw:equation draw:name="f1" draw:formula="logheight/2"/>
             <draw:equation draw:name="f2" draw:formula="logheight"/>
@@ -5068,7 +5256,7 @@
           <text:p text:style-name="P2">
             <text:span text:style-name="T13">38.5%</text:span>
           </text:p>
-          <draw:enhanced-geometry draw:mirror-horizontal="false" draw:mirror-vertical="false" draw:glue-points="?f0 0 0 ?f1 ?f0 ?f2 ?f3 ?f1" draw:text-areas="0 0 ?f3 ?f2" svg:viewBox="0 0 0 0" draw:type="ooxml-rect" draw:enhanced-path="M 0 0 L ?f3 0 ?f3 ?f2 0 ?f2 Z N">
+          <draw:enhanced-geometry draw:mirror-horizontal="false" draw:mirror-vertical="false" svg:viewBox="0 0 0 0" draw:glue-points="?f0 0 0 ?f1 ?f0 ?f2 ?f3 ?f1" draw:text-areas="0 0 ?f3 ?f2" draw:type="ooxml-rect" draw:enhanced-path="M 0 0 L ?f3 0 ?f3 ?f2 0 ?f2 Z N">
             <draw:equation draw:name="f0" draw:formula="logwidth/2"/>
             <draw:equation draw:name="f1" draw:formula="logheight/2"/>
             <draw:equation draw:name="f2" draw:formula="logheight"/>
@@ -5079,16 +5267,16 @@
           <text:p text:style-name="P2">
             <text:span text:style-name="T14">28-day 7.0% · 3-month 24.8%</text:span>
           </text:p>
-          <draw:enhanced-geometry draw:mirror-horizontal="false" draw:mirror-vertical="false" draw:glue-points="?f0 0 0 ?f1 ?f0 ?f2 ?f3 ?f1" draw:text-areas="0 0 ?f3 ?f2" svg:viewBox="0 0 0 0" draw:type="ooxml-rect" draw:enhanced-path="M 0 0 L ?f3 0 ?f3 ?f2 0 ?f2 Z N">
-            <draw:equation draw:name="f0" draw:formula="logwidth/2"/>
-            <draw:equation draw:name="f1" draw:formula="logheight/2"/>
-            <draw:equation draw:name="f2" draw:formula="logheight"/>
-            <draw:equation draw:name="f3" draw:formula="logwidth"/>
-          </draw:enhanced-geometry>
-        </draw:custom-shape>
-        <draw:custom-shape draw:name="Shape 23" draw:style-name="gr20" draw:text-style-name="P16" draw:layer="layout" svg:width="5.382cm" svg:height="2.74cm" svg:x="12.852cm" svg:y="3.607cm">
-          <text:p/>
-          <draw:enhanced-geometry draw:mirror-horizontal="false" draw:mirror-vertical="false" draw:glue-points="?f8 0 0 ?f9 ?f8 ?f10 ?f11 ?f9" draw:text-areas="?f5 ?f5 ?f6 ?f7" svg:viewBox="0 0 0 0" draw:type="ooxml-roundRect" draw:modifiers="7407" draw:enhanced-path="M 0 ?f2 L ?f3 0 L ?f11 ?f4 L ?f2 ?f10 Z N" drawooo:enhanced-path="M 0 ?f2 G ?f2 ?f2 ?f12 ?f13 L ?f3 0 G ?f2 ?f2 ?f14 ?f15 L ?f11 ?f4 G ?f2 ?f2 ?f16 ?f17 L ?f2 ?f10 G ?f2 ?f2 ?f18 ?f19 Z N">
+          <draw:enhanced-geometry draw:mirror-horizontal="false" draw:mirror-vertical="false" svg:viewBox="0 0 0 0" draw:glue-points="?f0 0 0 ?f1 ?f0 ?f2 ?f3 ?f1" draw:text-areas="0 0 ?f3 ?f2" draw:type="ooxml-rect" draw:enhanced-path="M 0 0 L ?f3 0 ?f3 ?f2 0 ?f2 Z N">
+            <draw:equation draw:name="f0" draw:formula="logwidth/2"/>
+            <draw:equation draw:name="f1" draw:formula="logheight/2"/>
+            <draw:equation draw:name="f2" draw:formula="logheight"/>
+            <draw:equation draw:name="f3" draw:formula="logwidth"/>
+          </draw:enhanced-geometry>
+        </draw:custom-shape>
+        <draw:custom-shape draw:name="Shape 23" draw:style-name="gr20" draw:text-style-name="P18" draw:layer="layout" svg:width="5.382cm" svg:height="2.74cm" svg:x="12.852cm" svg:y="3.607cm">
+          <text:p/>
+          <draw:enhanced-geometry draw:mirror-horizontal="false" draw:mirror-vertical="false" svg:viewBox="0 0 0 0" draw:glue-points="?f8 0 0 ?f9 ?f8 ?f10 ?f11 ?f9" draw:text-areas="?f5 ?f5 ?f6 ?f7" draw:type="ooxml-roundRect" draw:modifiers="7407" draw:enhanced-path="M 0 ?f2 L ?f3 0 L ?f11 ?f4 L ?f2 ?f10 Z N" drawooo:enhanced-path="M 0 ?f2 G ?f2 ?f2 ?f12 ?f13 L ?f3 0 G ?f2 ?f2 ?f14 ?f15 L ?f11 ?f4 G ?f2 ?f2 ?f16 ?f17 L ?f2 ?f10 G ?f2 ?f2 ?f18 ?f19 Z N">
             <draw:equation draw:name="f0" draw:formula="if(0-$0 ,0,if(50000-$0 ,$0 ,50000))"/>
             <draw:equation draw:name="f1" draw:formula="min(logwidth,logheight)"/>
             <draw:equation draw:name="f2" draw:formula="?f1 *?f0 /100000"/>
@@ -5109,12 +5297,12 @@
             <draw:equation draw:name="f17" draw:formula="(5400000)/60000.0"/>
             <draw:equation draw:name="f18" draw:formula="(5400000)/60000.0"/>
             <draw:equation draw:name="f19" draw:formula="(5400000)/60000.0"/>
-            <draw:handle draw:handle-position="?f2 0" draw:handle-position-x="?f2" draw:handle-position-y="0" draw:handle-range-x-maximum="50000" draw:handle-range-x-minimum="0"/>
-          </draw:enhanced-geometry>
-        </draw:custom-shape>
-        <draw:custom-shape draw:name="Shape 24" draw:style-name="gr29" draw:text-style-name="P12" draw:layer="layout" svg:width="0.353cm" svg:height="0.353cm" svg:x="13.233cm" svg:y="3.962cm">
-          <text:p/>
-          <draw:enhanced-geometry draw:mirror-horizontal="false" draw:mirror-vertical="false" draw:glue-points="?f4 0 ?f5 ?f8 0 ?f7 ?f5 ?f9 ?f4 ?f10 ?f6 ?f9 ?f11 ?f7 ?f6 ?f8" draw:text-areas="?f5 ?f8 ?f6 ?f9" svg:viewBox="0 0 0 0" draw:type="ooxml-ellipse" draw:enhanced-path="M 0 ?f7 Z N" drawooo:enhanced-path="M 0 ?f7 G ?f0 ?f2 ?f12 ?f13 ?f0 ?f2 ?f14 ?f15 ?f0 ?f2 ?f16 ?f17 ?f0 ?f2 ?f18 ?f19 Z N">
+            <draw:handle draw:handle-range-x-maximum="50000" draw:handle-range-x-minimum="0" draw:handle-position="?f2 0" draw:handle-position-x="?f2" draw:handle-position-y="0"/>
+          </draw:enhanced-geometry>
+        </draw:custom-shape>
+        <draw:custom-shape draw:name="Shape 24" draw:style-name="gr29" draw:text-style-name="P14" draw:layer="layout" svg:width="0.353cm" svg:height="0.353cm" svg:x="13.233cm" svg:y="3.962cm">
+          <text:p/>
+          <draw:enhanced-geometry draw:mirror-horizontal="false" draw:mirror-vertical="false" svg:viewBox="0 0 0 0" draw:glue-points="?f4 0 ?f5 ?f8 0 ?f7 ?f5 ?f9 ?f4 ?f10 ?f6 ?f9 ?f11 ?f7 ?f6 ?f8" draw:text-areas="?f5 ?f8 ?f6 ?f9" draw:type="ooxml-ellipse" draw:enhanced-path="M 0 ?f7 Z N" drawooo:enhanced-path="M 0 ?f7 G ?f0 ?f2 ?f12 ?f13 ?f0 ?f2 ?f14 ?f15 ?f0 ?f2 ?f16 ?f17 ?f0 ?f2 ?f18 ?f19 Z N">
             <draw:equation draw:name="f0" draw:formula="logwidth/2"/>
             <draw:equation draw:name="f1" draw:formula="?f0 *cos(pi*(2700000)/10800000)"/>
             <draw:equation draw:name="f2" draw:formula="logheight/2"/>
@@ -5141,7 +5329,7 @@
           <text:p text:style-name="P2">
             <text:span text:style-name="T12">6-month mortality</text:span>
           </text:p>
-          <draw:enhanced-geometry draw:mirror-horizontal="false" draw:mirror-vertical="false" draw:glue-points="?f0 0 0 ?f1 ?f0 ?f2 ?f3 ?f1" draw:text-areas="0 0 ?f3 ?f2" svg:viewBox="0 0 0 0" draw:type="ooxml-rect" draw:enhanced-path="M 0 0 L ?f3 0 ?f3 ?f2 0 ?f2 Z N">
+          <draw:enhanced-geometry draw:mirror-horizontal="false" draw:mirror-vertical="false" svg:viewBox="0 0 0 0" draw:glue-points="?f0 0 0 ?f1 ?f0 ?f2 ?f3 ?f1" draw:text-areas="0 0 ?f3 ?f2" draw:type="ooxml-rect" draw:enhanced-path="M 0 0 L ?f3 0 ?f3 ?f2 0 ?f2 Z N">
             <draw:equation draw:name="f0" draw:formula="logwidth/2"/>
             <draw:equation draw:name="f1" draw:formula="logheight/2"/>
             <draw:equation draw:name="f2" draw:formula="logheight"/>
@@ -5152,7 +5340,7 @@
           <text:p text:style-name="P2">
             <text:span text:style-name="T13">2.8%</text:span>
           </text:p>
-          <draw:enhanced-geometry draw:mirror-horizontal="false" draw:mirror-vertical="false" draw:glue-points="?f0 0 0 ?f1 ?f0 ?f2 ?f3 ?f1" draw:text-areas="0 0 ?f3 ?f2" svg:viewBox="0 0 0 0" draw:type="ooxml-rect" draw:enhanced-path="M 0 0 L ?f3 0 ?f3 ?f2 0 ?f2 Z N">
+          <draw:enhanced-geometry draw:mirror-horizontal="false" draw:mirror-vertical="false" svg:viewBox="0 0 0 0" draw:glue-points="?f0 0 0 ?f1 ?f0 ?f2 ?f3 ?f1" draw:text-areas="0 0 ?f3 ?f2" draw:type="ooxml-rect" draw:enhanced-path="M 0 0 L ?f3 0 ?f3 ?f2 0 ?f2 Z N">
             <draw:equation draw:name="f0" draw:formula="logwidth/2"/>
             <draw:equation draw:name="f1" draw:formula="logheight/2"/>
             <draw:equation draw:name="f2" draw:formula="logheight"/>
@@ -5161,26 +5349,18 @@
         </draw:custom-shape>
         <draw:custom-shape draw:name="Text 27" draw:style-name="gr32" draw:text-style-name="P3" draw:layer="layout" svg:width="4.95cm" svg:height="0.607cm" svg:x="13.233cm" svg:y="5.563cm">
           <text:p text:style-name="P2">
-            <text:span text:style-name="T14">28-</text:span>
-            <text:span text:style-name="T14">day </text:span>
-            <text:span text:style-name="T14">1.8% </text:span>
-            <text:span text:style-name="T14">· 11 </text:span>
-            <text:span text:style-name="T14">in-</text:span>
-            <text:span text:style-name="T14">hospit</text:span>
-            <text:span text:style-name="T14">al </text:span>
-            <text:span text:style-name="T14">death</text:span>
-            <text:span text:style-name="T14">s</text:span>
-          </text:p>
-          <draw:enhanced-geometry draw:mirror-horizontal="false" draw:mirror-vertical="false" draw:glue-points="?f0 0 0 ?f1 ?f0 ?f2 ?f3 ?f1" draw:text-areas="0 0 ?f3 ?f2" svg:viewBox="0 0 0 0" draw:type="ooxml-rect" draw:enhanced-path="M 0 0 L ?f3 0 ?f3 ?f2 0 ?f2 Z N">
-            <draw:equation draw:name="f0" draw:formula="logwidth/2"/>
-            <draw:equation draw:name="f1" draw:formula="logheight/2"/>
-            <draw:equation draw:name="f2" draw:formula="logheight"/>
-            <draw:equation draw:name="f3" draw:formula="logwidth"/>
-          </draw:enhanced-geometry>
-        </draw:custom-shape>
-        <draw:custom-shape draw:name="Shape 28" draw:style-name="gr20" draw:text-style-name="P16" draw:layer="layout" svg:width="5.382cm" svg:height="2.74cm" svg:x="18.644cm" svg:y="3.607cm">
-          <text:p/>
-          <draw:enhanced-geometry draw:mirror-horizontal="false" draw:mirror-vertical="false" draw:glue-points="?f8 0 0 ?f9 ?f8 ?f10 ?f11 ?f9" draw:text-areas="?f5 ?f5 ?f6 ?f7" svg:viewBox="0 0 0 0" draw:type="ooxml-roundRect" draw:modifiers="7407" draw:enhanced-path="M 0 ?f2 L ?f3 0 L ?f11 ?f4 L ?f2 ?f10 Z N" drawooo:enhanced-path="M 0 ?f2 G ?f2 ?f2 ?f12 ?f13 L ?f3 0 G ?f2 ?f2 ?f14 ?f15 L ?f11 ?f4 G ?f2 ?f2 ?f16 ?f17 L ?f2 ?f10 G ?f2 ?f2 ?f18 ?f19 Z N">
+            <text:span text:style-name="T14">28-day 1.8% · 11 in-hospital deaths</text:span>
+          </text:p>
+          <draw:enhanced-geometry draw:mirror-horizontal="false" draw:mirror-vertical="false" svg:viewBox="0 0 0 0" draw:glue-points="?f0 0 0 ?f1 ?f0 ?f2 ?f3 ?f1" draw:text-areas="0 0 ?f3 ?f2" draw:type="ooxml-rect" draw:enhanced-path="M 0 0 L ?f3 0 ?f3 ?f2 0 ?f2 Z N">
+            <draw:equation draw:name="f0" draw:formula="logwidth/2"/>
+            <draw:equation draw:name="f1" draw:formula="logheight/2"/>
+            <draw:equation draw:name="f2" draw:formula="logheight"/>
+            <draw:equation draw:name="f3" draw:formula="logwidth"/>
+          </draw:enhanced-geometry>
+        </draw:custom-shape>
+        <draw:custom-shape draw:name="Shape 28" draw:style-name="gr20" draw:text-style-name="P18" draw:layer="layout" svg:width="5.382cm" svg:height="2.74cm" svg:x="18.644cm" svg:y="3.607cm">
+          <text:p/>
+          <draw:enhanced-geometry draw:mirror-horizontal="false" draw:mirror-vertical="false" svg:viewBox="0 0 0 0" draw:glue-points="?f8 0 0 ?f9 ?f8 ?f10 ?f11 ?f9" draw:text-areas="?f5 ?f5 ?f6 ?f7" draw:type="ooxml-roundRect" draw:modifiers="7407" draw:enhanced-path="M 0 ?f2 L ?f3 0 L ?f11 ?f4 L ?f2 ?f10 Z N" drawooo:enhanced-path="M 0 ?f2 G ?f2 ?f2 ?f12 ?f13 L ?f3 0 G ?f2 ?f2 ?f14 ?f15 L ?f11 ?f4 G ?f2 ?f2 ?f16 ?f17 L ?f2 ?f10 G ?f2 ?f2 ?f18 ?f19 Z N">
             <draw:equation draw:name="f0" draw:formula="if(0-$0 ,0,if(50000-$0 ,$0 ,50000))"/>
             <draw:equation draw:name="f1" draw:formula="min(logwidth,logheight)"/>
             <draw:equation draw:name="f2" draw:formula="?f1 *?f0 /100000"/>
@@ -5201,12 +5381,12 @@
             <draw:equation draw:name="f17" draw:formula="(5400000)/60000.0"/>
             <draw:equation draw:name="f18" draw:formula="(5400000)/60000.0"/>
             <draw:equation draw:name="f19" draw:formula="(5400000)/60000.0"/>
-            <draw:handle draw:handle-position="?f2 0" draw:handle-position-x="?f2" draw:handle-position-y="0" draw:handle-range-x-maximum="50000" draw:handle-range-x-minimum="0"/>
-          </draw:enhanced-geometry>
-        </draw:custom-shape>
-        <draw:custom-shape draw:name="Shape 29" draw:style-name="gr33" draw:text-style-name="P19" draw:layer="layout" svg:width="0.353cm" svg:height="0.353cm" svg:x="19.025cm" svg:y="3.962cm">
-          <text:p/>
-          <draw:enhanced-geometry draw:mirror-horizontal="false" draw:mirror-vertical="false" draw:glue-points="?f4 0 ?f5 ?f8 0 ?f7 ?f5 ?f9 ?f4 ?f10 ?f6 ?f9 ?f11 ?f7 ?f6 ?f8" draw:text-areas="?f5 ?f8 ?f6 ?f9" svg:viewBox="0 0 0 0" draw:type="ooxml-ellipse" draw:enhanced-path="M 0 ?f7 Z N" drawooo:enhanced-path="M 0 ?f7 G ?f0 ?f2 ?f12 ?f13 ?f0 ?f2 ?f14 ?f15 ?f0 ?f2 ?f16 ?f17 ?f0 ?f2 ?f18 ?f19 Z N">
+            <draw:handle draw:handle-range-x-maximum="50000" draw:handle-range-x-minimum="0" draw:handle-position="?f2 0" draw:handle-position-x="?f2" draw:handle-position-y="0"/>
+          </draw:enhanced-geometry>
+        </draw:custom-shape>
+        <draw:custom-shape draw:name="Shape 29" draw:style-name="gr33" draw:text-style-name="P21" draw:layer="layout" svg:width="0.353cm" svg:height="0.353cm" svg:x="19.025cm" svg:y="3.962cm">
+          <text:p/>
+          <draw:enhanced-geometry draw:mirror-horizontal="false" draw:mirror-vertical="false" svg:viewBox="0 0 0 0" draw:glue-points="?f4 0 ?f5 ?f8 0 ?f7 ?f5 ?f9 ?f4 ?f10 ?f6 ?f9 ?f11 ?f7 ?f6 ?f8" draw:text-areas="?f5 ?f8 ?f6 ?f9" draw:type="ooxml-ellipse" draw:enhanced-path="M 0 ?f7 Z N" drawooo:enhanced-path="M 0 ?f7 G ?f0 ?f2 ?f12 ?f13 ?f0 ?f2 ?f14 ?f15 ?f0 ?f2 ?f16 ?f17 ?f0 ?f2 ?f18 ?f19 Z N">
             <draw:equation draw:name="f0" draw:formula="logwidth/2"/>
             <draw:equation draw:name="f1" draw:formula="?f0 *cos(pi*(2700000)/10800000)"/>
             <draw:equation draw:name="f2" draw:formula="logheight/2"/>
@@ -5231,21 +5411,9 @@
         </draw:custom-shape>
         <draw:custom-shape draw:name="Text 30" draw:style-name="gr34" draw:text-style-name="P3" draw:layer="layout" svg:width="4.315cm" svg:height="0.657cm" svg:x="19.558cm" svg:y="3.81cm">
           <text:p text:style-name="P2">
-            <text:span text:style-name="T12">M</text:span>
-            <text:span text:style-name="T12">e</text:span>
-            <text:span text:style-name="T12">di</text:span>
-            <text:span text:style-name="T12">a</text:span>
-            <text:span text:style-name="T12">n </text:span>
-            <text:span text:style-name="T12">le</text:span>
-            <text:span text:style-name="T12">n</text:span>
-            <text:span text:style-name="T12">gt</text:span>
-            <text:span text:style-name="T12">h </text:span>
-            <text:span text:style-name="T12">of </text:span>
-            <text:span text:style-name="T12">st</text:span>
-            <text:span text:style-name="T12">a</text:span>
-            <text:span text:style-name="T12">y</text:span>
-          </text:p>
-          <draw:enhanced-geometry draw:mirror-horizontal="false" draw:mirror-vertical="false" draw:glue-points="?f0 0 0 ?f1 ?f0 ?f2 ?f3 ?f1" draw:text-areas="0 0 ?f3 ?f2" svg:viewBox="0 0 0 0" draw:type="ooxml-rect" draw:enhanced-path="M 0 0 L ?f3 0 ?f3 ?f2 0 ?f2 Z N">
+            <text:span text:style-name="T12">Median length of stay</text:span>
+          </text:p>
+          <draw:enhanced-geometry draw:mirror-horizontal="false" draw:mirror-vertical="false" svg:viewBox="0 0 0 0" draw:glue-points="?f0 0 0 ?f1 ?f0 ?f2 ?f3 ?f1" draw:text-areas="0 0 ?f3 ?f2" draw:type="ooxml-rect" draw:enhanced-path="M 0 0 L ?f3 0 ?f3 ?f2 0 ?f2 Z N">
             <draw:equation draw:name="f0" draw:formula="logwidth/2"/>
             <draw:equation draw:name="f1" draw:formula="logheight/2"/>
             <draw:equation draw:name="f2" draw:formula="logheight"/>
@@ -5256,7 +5424,7 @@
           <text:p text:style-name="P2">
             <text:span text:style-name="T13">8 days</text:span>
           </text:p>
-          <draw:enhanced-geometry draw:mirror-horizontal="false" draw:mirror-vertical="false" draw:glue-points="?f0 0 0 ?f1 ?f0 ?f2 ?f3 ?f1" draw:text-areas="0 0 ?f3 ?f2" svg:viewBox="0 0 0 0" draw:type="ooxml-rect" draw:enhanced-path="M 0 0 L ?f3 0 ?f3 ?f2 0 ?f2 Z N">
+          <draw:enhanced-geometry draw:mirror-horizontal="false" draw:mirror-vertical="false" svg:viewBox="0 0 0 0" draw:glue-points="?f0 0 0 ?f1 ?f0 ?f2 ?f3 ?f1" draw:text-areas="0 0 ?f3 ?f2" draw:type="ooxml-rect" draw:enhanced-path="M 0 0 L ?f3 0 ?f3 ?f2 0 ?f2 Z N">
             <draw:equation draw:name="f0" draw:formula="logwidth/2"/>
             <draw:equation draw:name="f1" draw:formula="logheight/2"/>
             <draw:equation draw:name="f2" draw:formula="logheight"/>
@@ -5267,16 +5435,16 @@
           <text:p text:style-name="P2">
             <text:span text:style-name="T14">IQR 6–10 days</text:span>
           </text:p>
-          <draw:enhanced-geometry draw:mirror-horizontal="false" draw:mirror-vertical="false" draw:glue-points="?f0 0 0 ?f1 ?f0 ?f2 ?f3 ?f1" draw:text-areas="0 0 ?f3 ?f2" svg:viewBox="0 0 0 0" draw:type="ooxml-rect" draw:enhanced-path="M 0 0 L ?f3 0 ?f3 ?f2 0 ?f2 Z N">
-            <draw:equation draw:name="f0" draw:formula="logwidth/2"/>
-            <draw:equation draw:name="f1" draw:formula="logheight/2"/>
-            <draw:equation draw:name="f2" draw:formula="logheight"/>
-            <draw:equation draw:name="f3" draw:formula="logwidth"/>
-          </draw:enhanced-geometry>
-        </draw:custom-shape>
-        <draw:custom-shape draw:name="Shape 33" draw:style-name="gr20" draw:text-style-name="P16" draw:layer="layout" svg:width="5.382cm" svg:height="2.74cm" svg:x="1.27cm" svg:y="6.655cm">
-          <text:p/>
-          <draw:enhanced-geometry draw:mirror-horizontal="false" draw:mirror-vertical="false" draw:glue-points="?f8 0 0 ?f9 ?f8 ?f10 ?f11 ?f9" draw:text-areas="?f5 ?f5 ?f6 ?f7" svg:viewBox="0 0 0 0" draw:type="ooxml-roundRect" draw:modifiers="7407" draw:enhanced-path="M 0 ?f2 L ?f3 0 L ?f11 ?f4 L ?f2 ?f10 Z N" drawooo:enhanced-path="M 0 ?f2 G ?f2 ?f2 ?f12 ?f13 L ?f3 0 G ?f2 ?f2 ?f14 ?f15 L ?f11 ?f4 G ?f2 ?f2 ?f16 ?f17 L ?f2 ?f10 G ?f2 ?f2 ?f18 ?f19 Z N">
+          <draw:enhanced-geometry draw:mirror-horizontal="false" draw:mirror-vertical="false" svg:viewBox="0 0 0 0" draw:glue-points="?f0 0 0 ?f1 ?f0 ?f2 ?f3 ?f1" draw:text-areas="0 0 ?f3 ?f2" draw:type="ooxml-rect" draw:enhanced-path="M 0 0 L ?f3 0 ?f3 ?f2 0 ?f2 Z N">
+            <draw:equation draw:name="f0" draw:formula="logwidth/2"/>
+            <draw:equation draw:name="f1" draw:formula="logheight/2"/>
+            <draw:equation draw:name="f2" draw:formula="logheight"/>
+            <draw:equation draw:name="f3" draw:formula="logwidth"/>
+          </draw:enhanced-geometry>
+        </draw:custom-shape>
+        <draw:custom-shape draw:name="Shape 33" draw:style-name="gr20" draw:text-style-name="P18" draw:layer="layout" svg:width="5.382cm" svg:height="2.74cm" svg:x="1.27cm" svg:y="6.655cm">
+          <text:p/>
+          <draw:enhanced-geometry draw:mirror-horizontal="false" draw:mirror-vertical="false" svg:viewBox="0 0 0 0" draw:glue-points="?f8 0 0 ?f9 ?f8 ?f10 ?f11 ?f9" draw:text-areas="?f5 ?f5 ?f6 ?f7" draw:type="ooxml-roundRect" draw:modifiers="7407" draw:enhanced-path="M 0 ?f2 L ?f3 0 L ?f11 ?f4 L ?f2 ?f10 Z N" drawooo:enhanced-path="M 0 ?f2 G ?f2 ?f2 ?f12 ?f13 L ?f3 0 G ?f2 ?f2 ?f14 ?f15 L ?f11 ?f4 G ?f2 ?f2 ?f16 ?f17 L ?f2 ?f10 G ?f2 ?f2 ?f18 ?f19 Z N">
             <draw:equation draw:name="f0" draw:formula="if(0-$0 ,0,if(50000-$0 ,$0 ,50000))"/>
             <draw:equation draw:name="f1" draw:formula="min(logwidth,logheight)"/>
             <draw:equation draw:name="f2" draw:formula="?f1 *?f0 /100000"/>
@@ -5297,12 +5465,12 @@
             <draw:equation draw:name="f17" draw:formula="(5400000)/60000.0"/>
             <draw:equation draw:name="f18" draw:formula="(5400000)/60000.0"/>
             <draw:equation draw:name="f19" draw:formula="(5400000)/60000.0"/>
-            <draw:handle draw:handle-position="?f2 0" draw:handle-position-x="?f2" draw:handle-position-y="0" draw:handle-range-x-maximum="50000" draw:handle-range-x-minimum="0"/>
-          </draw:enhanced-geometry>
-        </draw:custom-shape>
-        <draw:custom-shape draw:name="Shape 34" draw:style-name="gr37" draw:text-style-name="P20" draw:layer="layout" svg:width="0.353cm" svg:height="0.353cm" svg:x="1.651cm" svg:y="7.01cm">
-          <text:p/>
-          <draw:enhanced-geometry draw:mirror-horizontal="false" draw:mirror-vertical="false" draw:glue-points="?f4 0 ?f5 ?f8 0 ?f7 ?f5 ?f9 ?f4 ?f10 ?f6 ?f9 ?f11 ?f7 ?f6 ?f8" draw:text-areas="?f5 ?f8 ?f6 ?f9" svg:viewBox="0 0 0 0" draw:type="ooxml-ellipse" draw:enhanced-path="M 0 ?f7 Z N" drawooo:enhanced-path="M 0 ?f7 G ?f0 ?f2 ?f12 ?f13 ?f0 ?f2 ?f14 ?f15 ?f0 ?f2 ?f16 ?f17 ?f0 ?f2 ?f18 ?f19 Z N">
+            <draw:handle draw:handle-range-x-maximum="50000" draw:handle-range-x-minimum="0" draw:handle-position="?f2 0" draw:handle-position-x="?f2" draw:handle-position-y="0"/>
+          </draw:enhanced-geometry>
+        </draw:custom-shape>
+        <draw:custom-shape draw:name="Shape 34" draw:style-name="gr37" draw:text-style-name="P22" draw:layer="layout" svg:width="0.353cm" svg:height="0.353cm" svg:x="1.651cm" svg:y="7.01cm">
+          <text:p/>
+          <draw:enhanced-geometry draw:mirror-horizontal="false" draw:mirror-vertical="false" svg:viewBox="0 0 0 0" draw:glue-points="?f4 0 ?f5 ?f8 0 ?f7 ?f5 ?f9 ?f4 ?f10 ?f6 ?f9 ?f11 ?f7 ?f6 ?f8" draw:text-areas="?f5 ?f8 ?f6 ?f9" draw:type="ooxml-ellipse" draw:enhanced-path="M 0 ?f7 Z N" drawooo:enhanced-path="M 0 ?f7 G ?f0 ?f2 ?f12 ?f13 ?f0 ?f2 ?f14 ?f15 ?f0 ?f2 ?f16 ?f17 ?f0 ?f2 ?f18 ?f19 Z N">
             <draw:equation draw:name="f0" draw:formula="logwidth/2"/>
             <draw:equation draw:name="f1" draw:formula="?f0 *cos(pi*(2700000)/10800000)"/>
             <draw:equation draw:name="f2" draw:formula="logheight/2"/>
@@ -5329,7 +5497,7 @@
           <text:p text:style-name="P2">
             <text:span text:style-name="T12">Severe heart failure</text:span>
           </text:p>
-          <draw:enhanced-geometry draw:mirror-horizontal="false" draw:mirror-vertical="false" draw:glue-points="?f0 0 0 ?f1 ?f0 ?f2 ?f3 ?f1" draw:text-areas="0 0 ?f3 ?f2" svg:viewBox="0 0 0 0" draw:type="ooxml-rect" draw:enhanced-path="M 0 0 L ?f3 0 ?f3 ?f2 0 ?f2 Z N">
+          <draw:enhanced-geometry draw:mirror-horizontal="false" draw:mirror-vertical="false" svg:viewBox="0 0 0 0" draw:glue-points="?f0 0 0 ?f1 ?f0 ?f2 ?f3 ?f1" draw:text-areas="0 0 ?f3 ?f2" draw:type="ooxml-rect" draw:enhanced-path="M 0 0 L ?f3 0 ?f3 ?f2 0 ?f2 Z N">
             <draw:equation draw:name="f0" draw:formula="logwidth/2"/>
             <draw:equation draw:name="f1" draw:formula="logheight/2"/>
             <draw:equation draw:name="f2" draw:formula="logheight"/>
@@ -5340,7 +5508,7 @@
           <text:p text:style-name="P2">
             <text:span text:style-name="T13">19.2%</text:span>
           </text:p>
-          <draw:enhanced-geometry draw:mirror-horizontal="false" draw:mirror-vertical="false" draw:glue-points="?f0 0 0 ?f1 ?f0 ?f2 ?f3 ?f1" draw:text-areas="0 0 ?f3 ?f2" svg:viewBox="0 0 0 0" draw:type="ooxml-rect" draw:enhanced-path="M 0 0 L ?f3 0 ?f3 ?f2 0 ?f2 Z N">
+          <draw:enhanced-geometry draw:mirror-horizontal="false" draw:mirror-vertical="false" svg:viewBox="0 0 0 0" draw:glue-points="?f0 0 0 ?f1 ?f0 ?f2 ?f3 ?f1" draw:text-areas="0 0 ?f3 ?f2" draw:type="ooxml-rect" draw:enhanced-path="M 0 0 L ?f3 0 ?f3 ?f2 0 ?f2 Z N">
             <draw:equation draw:name="f0" draw:formula="logwidth/2"/>
             <draw:equation draw:name="f1" draw:formula="logheight/2"/>
             <draw:equation draw:name="f2" draw:formula="logheight"/>
@@ -5349,44 +5517,18 @@
         </draw:custom-shape>
         <draw:custom-shape draw:name="Text 37" draw:style-name="gr40" draw:text-style-name="P3" draw:layer="layout" svg:width="4.95cm" svg:height="0.607cm" svg:x="1.651cm" svg:y="8.611cm">
           <text:p text:style-name="P2">
-            <text:span text:style-name="T14">N</text:span>
-            <text:span text:style-name="T14">Y</text:span>
-            <text:span text:style-name="T14">H</text:span>
-            <text:span text:style-name="T14">A</text:span>
-            <text:span text:style-name="T14"> </text:span>
-            <text:span text:style-name="T14">4</text:span>
-            <text:span text:style-name="T14">: </text:span>
-            <text:span text:style-name="T14">3</text:span>
-            <text:span text:style-name="T14">1</text:span>
-            <text:span text:style-name="T14">%</text:span>
-            <text:span text:style-name="T14"> </text:span>
-            <text:span text:style-name="T14">·</text:span>
-            <text:span text:style-name="T14"> </text:span>
-            <text:span text:style-name="T14">K</text:span>
-            <text:span text:style-name="T14">i</text:span>
-            <text:span text:style-name="T14">l</text:span>
-            <text:span text:style-name="T14">l</text:span>
-            <text:span text:style-name="T14">i</text:span>
-            <text:span text:style-name="T14">p</text:span>
-            <text:span text:style-name="T14"> </text:span>
-            <text:span text:style-name="T14">3</text:span>
-            <text:span text:style-name="T14">–</text:span>
-            <text:span text:style-name="T14">4</text:span>
-            <text:span text:style-name="T14">: </text:span>
-            <text:span text:style-name="T14">2</text:span>
-            <text:span text:style-name="T14">2</text:span>
-            <text:span text:style-name="T14">%</text:span>
-          </text:p>
-          <draw:enhanced-geometry draw:mirror-horizontal="false" draw:mirror-vertical="false" draw:glue-points="?f0 0 0 ?f1 ?f0 ?f2 ?f3 ?f1" draw:text-areas="0 0 ?f3 ?f2" svg:viewBox="0 0 0 0" draw:type="ooxml-rect" draw:enhanced-path="M 0 0 L ?f3 0 ?f3 ?f2 0 ?f2 Z N">
-            <draw:equation draw:name="f0" draw:formula="logwidth/2"/>
-            <draw:equation draw:name="f1" draw:formula="logheight/2"/>
-            <draw:equation draw:name="f2" draw:formula="logheight"/>
-            <draw:equation draw:name="f3" draw:formula="logwidth"/>
-          </draw:enhanced-geometry>
-        </draw:custom-shape>
-        <draw:custom-shape draw:name="Shape 38" draw:style-name="gr20" draw:text-style-name="P16" draw:layer="layout" svg:width="5.382cm" svg:height="2.74cm" svg:x="7.061cm" svg:y="6.655cm">
-          <text:p/>
-          <draw:enhanced-geometry draw:mirror-horizontal="false" draw:mirror-vertical="false" draw:glue-points="?f8 0 0 ?f9 ?f8 ?f10 ?f11 ?f9" draw:text-areas="?f5 ?f5 ?f6 ?f7" svg:viewBox="0 0 0 0" draw:type="ooxml-roundRect" draw:modifiers="7407" draw:enhanced-path="M 0 ?f2 L ?f3 0 L ?f11 ?f4 L ?f2 ?f10 Z N" drawooo:enhanced-path="M 0 ?f2 G ?f2 ?f2 ?f12 ?f13 L ?f3 0 G ?f2 ?f2 ?f14 ?f15 L ?f11 ?f4 G ?f2 ?f2 ?f16 ?f17 L ?f2 ?f10 G ?f2 ?f2 ?f18 ?f19 Z N">
+            <text:span text:style-name="T14">NYHA 4: 31% · Killip 3–4: 22%</text:span>
+          </text:p>
+          <draw:enhanced-geometry draw:mirror-horizontal="false" draw:mirror-vertical="false" svg:viewBox="0 0 0 0" draw:glue-points="?f0 0 0 ?f1 ?f0 ?f2 ?f3 ?f1" draw:text-areas="0 0 ?f3 ?f2" draw:type="ooxml-rect" draw:enhanced-path="M 0 0 L ?f3 0 ?f3 ?f2 0 ?f2 Z N">
+            <draw:equation draw:name="f0" draw:formula="logwidth/2"/>
+            <draw:equation draw:name="f1" draw:formula="logheight/2"/>
+            <draw:equation draw:name="f2" draw:formula="logheight"/>
+            <draw:equation draw:name="f3" draw:formula="logwidth"/>
+          </draw:enhanced-geometry>
+        </draw:custom-shape>
+        <draw:custom-shape draw:name="Shape 38" draw:style-name="gr20" draw:text-style-name="P18" draw:layer="layout" svg:width="5.382cm" svg:height="2.74cm" svg:x="7.061cm" svg:y="6.655cm">
+          <text:p/>
+          <draw:enhanced-geometry draw:mirror-horizontal="false" draw:mirror-vertical="false" svg:viewBox="0 0 0 0" draw:glue-points="?f8 0 0 ?f9 ?f8 ?f10 ?f11 ?f9" draw:text-areas="?f5 ?f5 ?f6 ?f7" draw:type="ooxml-roundRect" draw:modifiers="7407" draw:enhanced-path="M 0 ?f2 L ?f3 0 L ?f11 ?f4 L ?f2 ?f10 Z N" drawooo:enhanced-path="M 0 ?f2 G ?f2 ?f2 ?f12 ?f13 L ?f3 0 G ?f2 ?f2 ?f14 ?f15 L ?f11 ?f4 G ?f2 ?f2 ?f16 ?f17 L ?f2 ?f10 G ?f2 ?f2 ?f18 ?f19 Z N">
             <draw:equation draw:name="f0" draw:formula="if(0-$0 ,0,if(50000-$0 ,$0 ,50000))"/>
             <draw:equation draw:name="f1" draw:formula="min(logwidth,logheight)"/>
             <draw:equation draw:name="f2" draw:formula="?f1 *?f0 /100000"/>
@@ -5407,12 +5549,12 @@
             <draw:equation draw:name="f17" draw:formula="(5400000)/60000.0"/>
             <draw:equation draw:name="f18" draw:formula="(5400000)/60000.0"/>
             <draw:equation draw:name="f19" draw:formula="(5400000)/60000.0"/>
-            <draw:handle draw:handle-position="?f2 0" draw:handle-position-x="?f2" draw:handle-position-y="0" draw:handle-range-x-maximum="50000" draw:handle-range-x-minimum="0"/>
-          </draw:enhanced-geometry>
-        </draw:custom-shape>
-        <draw:custom-shape draw:name="Shape 39" draw:style-name="gr41" draw:text-style-name="P21" draw:layer="layout" svg:width="0.353cm" svg:height="0.353cm" svg:x="7.442cm" svg:y="7.01cm">
-          <text:p/>
-          <draw:enhanced-geometry draw:mirror-horizontal="false" draw:mirror-vertical="false" draw:glue-points="?f4 0 ?f5 ?f8 0 ?f7 ?f5 ?f9 ?f4 ?f10 ?f6 ?f9 ?f11 ?f7 ?f6 ?f8" draw:text-areas="?f5 ?f8 ?f6 ?f9" svg:viewBox="0 0 0 0" draw:type="ooxml-ellipse" draw:enhanced-path="M 0 ?f7 Z N" drawooo:enhanced-path="M 0 ?f7 G ?f0 ?f2 ?f12 ?f13 ?f0 ?f2 ?f14 ?f15 ?f0 ?f2 ?f16 ?f17 ?f0 ?f2 ?f18 ?f19 Z N">
+            <draw:handle draw:handle-range-x-maximum="50000" draw:handle-range-x-minimum="0" draw:handle-position="?f2 0" draw:handle-position-x="?f2" draw:handle-position-y="0"/>
+          </draw:enhanced-geometry>
+        </draw:custom-shape>
+        <draw:custom-shape draw:name="Shape 39" draw:style-name="gr41" draw:text-style-name="P23" draw:layer="layout" svg:width="0.353cm" svg:height="0.353cm" svg:x="7.442cm" svg:y="7.01cm">
+          <text:p/>
+          <draw:enhanced-geometry draw:mirror-horizontal="false" draw:mirror-vertical="false" svg:viewBox="0 0 0 0" draw:glue-points="?f4 0 ?f5 ?f8 0 ?f7 ?f5 ?f9 ?f4 ?f10 ?f6 ?f9 ?f11 ?f7 ?f6 ?f8" draw:text-areas="?f5 ?f8 ?f6 ?f9" draw:type="ooxml-ellipse" draw:enhanced-path="M 0 ?f7 Z N" drawooo:enhanced-path="M 0 ?f7 G ?f0 ?f2 ?f12 ?f13 ?f0 ?f2 ?f14 ?f15 ?f0 ?f2 ?f16 ?f17 ?f0 ?f2 ?f18 ?f19 Z N">
             <draw:equation draw:name="f0" draw:formula="logwidth/2"/>
             <draw:equation draw:name="f1" draw:formula="?f0 *cos(pi*(2700000)/10800000)"/>
             <draw:equation draw:name="f2" draw:formula="logheight/2"/>
@@ -5439,7 +5581,7 @@
           <text:p text:style-name="P2">
             <text:span text:style-name="T12">Emergency admissions</text:span>
           </text:p>
-          <draw:enhanced-geometry draw:mirror-horizontal="false" draw:mirror-vertical="false" draw:glue-points="?f0 0 0 ?f1 ?f0 ?f2 ?f3 ?f1" draw:text-areas="0 0 ?f3 ?f2" svg:viewBox="0 0 0 0" draw:type="ooxml-rect" draw:enhanced-path="M 0 0 L ?f3 0 ?f3 ?f2 0 ?f2 Z N">
+          <draw:enhanced-geometry draw:mirror-horizontal="false" draw:mirror-vertical="false" svg:viewBox="0 0 0 0" draw:glue-points="?f0 0 0 ?f1 ?f0 ?f2 ?f3 ?f1" draw:text-areas="0 0 ?f3 ?f2" draw:type="ooxml-rect" draw:enhanced-path="M 0 0 L ?f3 0 ?f3 ?f2 0 ?f2 Z N">
             <draw:equation draw:name="f0" draw:formula="logwidth/2"/>
             <draw:equation draw:name="f1" draw:formula="logheight/2"/>
             <draw:equation draw:name="f2" draw:formula="logheight"/>
@@ -5450,7 +5592,7 @@
           <text:p text:style-name="P2">
             <text:span text:style-name="T13">47.6%</text:span>
           </text:p>
-          <draw:enhanced-geometry draw:mirror-horizontal="false" draw:mirror-vertical="false" draw:glue-points="?f0 0 0 ?f1 ?f0 ?f2 ?f3 ?f1" draw:text-areas="0 0 ?f3 ?f2" svg:viewBox="0 0 0 0" draw:type="ooxml-rect" draw:enhanced-path="M 0 0 L ?f3 0 ?f3 ?f2 0 ?f2 Z N">
+          <draw:enhanced-geometry draw:mirror-horizontal="false" draw:mirror-vertical="false" svg:viewBox="0 0 0 0" draw:glue-points="?f0 0 0 ?f1 ?f0 ?f2 ?f3 ?f1" draw:text-areas="0 0 ?f3 ?f2" draw:type="ooxml-rect" draw:enhanced-path="M 0 0 L ?f3 0 ?f3 ?f2 0 ?f2 Z N">
             <draw:equation draw:name="f0" draw:formula="logwidth/2"/>
             <draw:equation draw:name="f1" draw:formula="logheight/2"/>
             <draw:equation draw:name="f2" draw:formula="logheight"/>
@@ -5459,34 +5601,18 @@
         </draw:custom-shape>
         <draw:custom-shape draw:name="Text 42" draw:style-name="gr44" draw:text-style-name="P3" draw:layer="layout" svg:width="4.95cm" svg:height="0.607cm" svg:x="7.442cm" svg:y="8.611cm">
           <text:p text:style-name="P2">
-            <text:span text:style-name="T14">1</text:span>
-            <text:span text:style-name="T14">5</text:span>
-            <text:span text:style-name="T14"> </text:span>
-            <text:span text:style-name="T14">I</text:span>
-            <text:span text:style-name="T14">C</text:span>
-            <text:span text:style-name="T14">U</text:span>
-            <text:span text:style-name="T14"> </text:span>
-            <text:span text:style-name="T14">a</text:span>
-            <text:span text:style-name="T14">d</text:span>
-            <text:span text:style-name="T14">m</text:span>
-            <text:span text:style-name="T14">i</text:span>
-            <text:span text:style-name="T14">s</text:span>
-            <text:span text:style-name="T14">s</text:span>
-            <text:span text:style-name="T14">i</text:span>
-            <text:span text:style-name="T14">o</text:span>
-            <text:span text:style-name="T14">n</text:span>
-            <text:span text:style-name="T14">s</text:span>
-          </text:p>
-          <draw:enhanced-geometry draw:mirror-horizontal="false" draw:mirror-vertical="false" draw:glue-points="?f0 0 0 ?f1 ?f0 ?f2 ?f3 ?f1" draw:text-areas="0 0 ?f3 ?f2" svg:viewBox="0 0 0 0" draw:type="ooxml-rect" draw:enhanced-path="M 0 0 L ?f3 0 ?f3 ?f2 0 ?f2 Z N">
-            <draw:equation draw:name="f0" draw:formula="logwidth/2"/>
-            <draw:equation draw:name="f1" draw:formula="logheight/2"/>
-            <draw:equation draw:name="f2" draw:formula="logheight"/>
-            <draw:equation draw:name="f3" draw:formula="logwidth"/>
-          </draw:enhanced-geometry>
-        </draw:custom-shape>
-        <draw:custom-shape draw:name="Shape 43" draw:style-name="gr20" draw:text-style-name="P16" draw:layer="layout" svg:width="5.382cm" svg:height="2.74cm" svg:x="12.852cm" svg:y="6.655cm">
-          <text:p/>
-          <draw:enhanced-geometry draw:mirror-horizontal="false" draw:mirror-vertical="false" draw:glue-points="?f8 0 0 ?f9 ?f8 ?f10 ?f11 ?f9" draw:text-areas="?f5 ?f5 ?f6 ?f7" svg:viewBox="0 0 0 0" draw:type="ooxml-roundRect" draw:modifiers="7407" draw:enhanced-path="M 0 ?f2 L ?f3 0 L ?f11 ?f4 L ?f2 ?f10 Z N" drawooo:enhanced-path="M 0 ?f2 G ?f2 ?f2 ?f12 ?f13 L ?f3 0 G ?f2 ?f2 ?f14 ?f15 L ?f11 ?f4 G ?f2 ?f2 ?f16 ?f17 L ?f2 ?f10 G ?f2 ?f2 ?f18 ?f19 Z N">
+            <text:span text:style-name="T14">15 ICU admissions</text:span>
+          </text:p>
+          <draw:enhanced-geometry draw:mirror-horizontal="false" draw:mirror-vertical="false" svg:viewBox="0 0 0 0" draw:glue-points="?f0 0 0 ?f1 ?f0 ?f2 ?f3 ?f1" draw:text-areas="0 0 ?f3 ?f2" draw:type="ooxml-rect" draw:enhanced-path="M 0 0 L ?f3 0 ?f3 ?f2 0 ?f2 Z N">
+            <draw:equation draw:name="f0" draw:formula="logwidth/2"/>
+            <draw:equation draw:name="f1" draw:formula="logheight/2"/>
+            <draw:equation draw:name="f2" draw:formula="logheight"/>
+            <draw:equation draw:name="f3" draw:formula="logwidth"/>
+          </draw:enhanced-geometry>
+        </draw:custom-shape>
+        <draw:custom-shape draw:name="Shape 43" draw:style-name="gr20" draw:text-style-name="P18" draw:layer="layout" svg:width="5.382cm" svg:height="2.74cm" svg:x="12.852cm" svg:y="6.655cm">
+          <text:p/>
+          <draw:enhanced-geometry draw:mirror-horizontal="false" draw:mirror-vertical="false" svg:viewBox="0 0 0 0" draw:glue-points="?f8 0 0 ?f9 ?f8 ?f10 ?f11 ?f9" draw:text-areas="?f5 ?f5 ?f6 ?f7" draw:type="ooxml-roundRect" draw:modifiers="7407" draw:enhanced-path="M 0 ?f2 L ?f3 0 L ?f11 ?f4 L ?f2 ?f10 Z N" drawooo:enhanced-path="M 0 ?f2 G ?f2 ?f2 ?f12 ?f13 L ?f3 0 G ?f2 ?f2 ?f14 ?f15 L ?f11 ?f4 G ?f2 ?f2 ?f16 ?f17 L ?f2 ?f10 G ?f2 ?f2 ?f18 ?f19 Z N">
             <draw:equation draw:name="f0" draw:formula="if(0-$0 ,0,if(50000-$0 ,$0 ,50000))"/>
             <draw:equation draw:name="f1" draw:formula="min(logwidth,logheight)"/>
             <draw:equation draw:name="f2" draw:formula="?f1 *?f0 /100000"/>
@@ -5507,12 +5633,12 @@
             <draw:equation draw:name="f17" draw:formula="(5400000)/60000.0"/>
             <draw:equation draw:name="f18" draw:formula="(5400000)/60000.0"/>
             <draw:equation draw:name="f19" draw:formula="(5400000)/60000.0"/>
-            <draw:handle draw:handle-position="?f2 0" draw:handle-position-x="?f2" draw:handle-position-y="0" draw:handle-range-x-maximum="50000" draw:handle-range-x-minimum="0"/>
-          </draw:enhanced-geometry>
-        </draw:custom-shape>
-        <draw:custom-shape draw:name="Shape 44" draw:style-name="gr45" draw:text-style-name="P22" draw:layer="layout" svg:width="0.353cm" svg:height="0.353cm" svg:x="13.233cm" svg:y="7.01cm">
-          <text:p/>
-          <draw:enhanced-geometry draw:mirror-horizontal="false" draw:mirror-vertical="false" draw:glue-points="?f4 0 ?f5 ?f8 0 ?f7 ?f5 ?f9 ?f4 ?f10 ?f6 ?f9 ?f11 ?f7 ?f6 ?f8" draw:text-areas="?f5 ?f8 ?f6 ?f9" svg:viewBox="0 0 0 0" draw:type="ooxml-ellipse" draw:enhanced-path="M 0 ?f7 Z N" drawooo:enhanced-path="M 0 ?f7 G ?f0 ?f2 ?f12 ?f13 ?f0 ?f2 ?f14 ?f15 ?f0 ?f2 ?f16 ?f17 ?f0 ?f2 ?f18 ?f19 Z N">
+            <draw:handle draw:handle-range-x-maximum="50000" draw:handle-range-x-minimum="0" draw:handle-position="?f2 0" draw:handle-position-x="?f2" draw:handle-position-y="0"/>
+          </draw:enhanced-geometry>
+        </draw:custom-shape>
+        <draw:custom-shape draw:name="Shape 44" draw:style-name="gr45" draw:text-style-name="P24" draw:layer="layout" svg:width="0.353cm" svg:height="0.353cm" svg:x="13.233cm" svg:y="7.01cm">
+          <text:p/>
+          <draw:enhanced-geometry draw:mirror-horizontal="false" draw:mirror-vertical="false" svg:viewBox="0 0 0 0" draw:glue-points="?f4 0 ?f5 ?f8 0 ?f7 ?f5 ?f9 ?f4 ?f10 ?f6 ?f9 ?f11 ?f7 ?f6 ?f8" draw:text-areas="?f5 ?f8 ?f6 ?f9" draw:type="ooxml-ellipse" draw:enhanced-path="M 0 ?f7 Z N" drawooo:enhanced-path="M 0 ?f7 G ?f0 ?f2 ?f12 ?f13 ?f0 ?f2 ?f14 ?f15 ?f0 ?f2 ?f16 ?f17 ?f0 ?f2 ?f18 ?f19 Z N">
             <draw:equation draw:name="f0" draw:formula="logwidth/2"/>
             <draw:equation draw:name="f1" draw:formula="?f0 *cos(pi*(2700000)/10800000)"/>
             <draw:equation draw:name="f2" draw:formula="logheight/2"/>
@@ -5539,7 +5665,7 @@
           <text:p text:style-name="P2">
             <text:span text:style-name="T12">Left against advice</text:span>
           </text:p>
-          <draw:enhanced-geometry draw:mirror-horizontal="false" draw:mirror-vertical="false" draw:glue-points="?f0 0 0 ?f1 ?f0 ?f2 ?f3 ?f1" draw:text-areas="0 0 ?f3 ?f2" svg:viewBox="0 0 0 0" draw:type="ooxml-rect" draw:enhanced-path="M 0 0 L ?f3 0 ?f3 ?f2 0 ?f2 Z N">
+          <draw:enhanced-geometry draw:mirror-horizontal="false" draw:mirror-vertical="false" svg:viewBox="0 0 0 0" draw:glue-points="?f0 0 0 ?f1 ?f0 ?f2 ?f3 ?f1" draw:text-areas="0 0 ?f3 ?f2" draw:type="ooxml-rect" draw:enhanced-path="M 0 0 L ?f3 0 ?f3 ?f2 0 ?f2 Z N">
             <draw:equation draw:name="f0" draw:formula="logwidth/2"/>
             <draw:equation draw:name="f1" draw:formula="logheight/2"/>
             <draw:equation draw:name="f2" draw:formula="logheight"/>
@@ -5550,7 +5676,7 @@
           <text:p text:style-name="P2">
             <text:span text:style-name="T13">5.3%</text:span>
           </text:p>
-          <draw:enhanced-geometry draw:mirror-horizontal="false" draw:mirror-vertical="false" draw:glue-points="?f0 0 0 ?f1 ?f0 ?f2 ?f3 ?f1" draw:text-areas="0 0 ?f3 ?f2" svg:viewBox="0 0 0 0" draw:type="ooxml-rect" draw:enhanced-path="M 0 0 L ?f3 0 ?f3 ?f2 0 ?f2 Z N">
+          <draw:enhanced-geometry draw:mirror-horizontal="false" draw:mirror-vertical="false" svg:viewBox="0 0 0 0" draw:glue-points="?f0 0 0 ?f1 ?f0 ?f2 ?f3 ?f1" draw:text-areas="0 0 ?f3 ?f2" draw:type="ooxml-rect" draw:enhanced-path="M 0 0 L ?f3 0 ?f3 ?f2 0 ?f2 Z N">
             <draw:equation draw:name="f0" draw:formula="logwidth/2"/>
             <draw:equation draw:name="f1" draw:formula="logheight/2"/>
             <draw:equation draw:name="f2" draw:formula="logheight"/>
@@ -5559,48 +5685,18 @@
         </draw:custom-shape>
         <draw:custom-shape draw:name="Text 47" draw:style-name="gr48" draw:text-style-name="P3" draw:layer="layout" svg:width="4.95cm" svg:height="0.607cm" svg:x="13.233cm" svg:y="8.611cm">
           <text:p text:style-name="P2">
-            <text:span text:style-name="T14">1</text:span>
-            <text:span text:style-name="T14">0</text:span>
-            <text:span text:style-name="T14">7</text:span>
-            <text:span text:style-name="T14"> </text:span>
-            <text:span text:style-name="T14">p</text:span>
-            <text:span text:style-name="T14">a</text:span>
-            <text:span text:style-name="T14">t</text:span>
-            <text:span text:style-name="T14">i</text:span>
-            <text:span text:style-name="T14">e</text:span>
-            <text:span text:style-name="T14">n</text:span>
-            <text:span text:style-name="T14">t</text:span>
-            <text:span text:style-name="T14">s</text:span>
-            <text:span text:style-name="T14"> </text:span>
-            <text:span text:style-name="T14">·</text:span>
-            <text:span text:style-name="T14"> </text:span>
-            <text:span text:style-name="T14">2</text:span>
-            <text:span text:style-name="T14">8</text:span>
-            <text:span text:style-name="T14">-</text:span>
-            <text:span text:style-name="T14">d</text:span>
-            <text:span text:style-name="T14">a</text:span>
-            <text:span text:style-name="T14">y</text:span>
-            <text:span text:style-name="T14"> </text:span>
-            <text:span text:style-name="T14">d</text:span>
-            <text:span text:style-name="T14">e</text:span>
-            <text:span text:style-name="T14">a</text:span>
-            <text:span text:style-name="T14">t</text:span>
-            <text:span text:style-name="T14">h</text:span>
-            <text:span text:style-name="T14"> </text:span>
-            <text:span text:style-name="T14">1</text:span>
-            <text:span text:style-name="T14">9</text:span>
-            <text:span text:style-name="T14">%</text:span>
-          </text:p>
-          <draw:enhanced-geometry draw:mirror-horizontal="false" draw:mirror-vertical="false" draw:glue-points="?f0 0 0 ?f1 ?f0 ?f2 ?f3 ?f1" draw:text-areas="0 0 ?f3 ?f2" svg:viewBox="0 0 0 0" draw:type="ooxml-rect" draw:enhanced-path="M 0 0 L ?f3 0 ?f3 ?f2 0 ?f2 Z N">
-            <draw:equation draw:name="f0" draw:formula="logwidth/2"/>
-            <draw:equation draw:name="f1" draw:formula="logheight/2"/>
-            <draw:equation draw:name="f2" draw:formula="logheight"/>
-            <draw:equation draw:name="f3" draw:formula="logwidth"/>
-          </draw:enhanced-geometry>
-        </draw:custom-shape>
-        <draw:custom-shape draw:name="Shape 48" draw:style-name="gr20" draw:text-style-name="P16" draw:layer="layout" svg:width="5.382cm" svg:height="2.74cm" svg:x="18.644cm" svg:y="6.655cm">
-          <text:p/>
-          <draw:enhanced-geometry draw:mirror-horizontal="false" draw:mirror-vertical="false" draw:glue-points="?f8 0 0 ?f9 ?f8 ?f10 ?f11 ?f9" draw:text-areas="?f5 ?f5 ?f6 ?f7" svg:viewBox="0 0 0 0" draw:type="ooxml-roundRect" draw:modifiers="7407" draw:enhanced-path="M 0 ?f2 L ?f3 0 L ?f11 ?f4 L ?f2 ?f10 Z N" drawooo:enhanced-path="M 0 ?f2 G ?f2 ?f2 ?f12 ?f13 L ?f3 0 G ?f2 ?f2 ?f14 ?f15 L ?f11 ?f4 G ?f2 ?f2 ?f16 ?f17 L ?f2 ?f10 G ?f2 ?f2 ?f18 ?f19 Z N">
+            <text:span text:style-name="T14">107 patients · 28-day death 19%</text:span>
+          </text:p>
+          <draw:enhanced-geometry draw:mirror-horizontal="false" draw:mirror-vertical="false" svg:viewBox="0 0 0 0" draw:glue-points="?f0 0 0 ?f1 ?f0 ?f2 ?f3 ?f1" draw:text-areas="0 0 ?f3 ?f2" draw:type="ooxml-rect" draw:enhanced-path="M 0 0 L ?f3 0 ?f3 ?f2 0 ?f2 Z N">
+            <draw:equation draw:name="f0" draw:formula="logwidth/2"/>
+            <draw:equation draw:name="f1" draw:formula="logheight/2"/>
+            <draw:equation draw:name="f2" draw:formula="logheight"/>
+            <draw:equation draw:name="f3" draw:formula="logwidth"/>
+          </draw:enhanced-geometry>
+        </draw:custom-shape>
+        <draw:custom-shape draw:name="Shape 48" draw:style-name="gr20" draw:text-style-name="P18" draw:layer="layout" svg:width="5.382cm" svg:height="2.74cm" svg:x="18.644cm" svg:y="6.655cm">
+          <text:p/>
+          <draw:enhanced-geometry draw:mirror-horizontal="false" draw:mirror-vertical="false" svg:viewBox="0 0 0 0" draw:glue-points="?f8 0 0 ?f9 ?f8 ?f10 ?f11 ?f9" draw:text-areas="?f5 ?f5 ?f6 ?f7" draw:type="ooxml-roundRect" draw:modifiers="7407" draw:enhanced-path="M 0 ?f2 L ?f3 0 L ?f11 ?f4 L ?f2 ?f10 Z N" drawooo:enhanced-path="M 0 ?f2 G ?f2 ?f2 ?f12 ?f13 L ?f3 0 G ?f2 ?f2 ?f14 ?f15 L ?f11 ?f4 G ?f2 ?f2 ?f16 ?f17 L ?f2 ?f10 G ?f2 ?f2 ?f18 ?f19 Z N">
             <draw:equation draw:name="f0" draw:formula="if(0-$0 ,0,if(50000-$0 ,$0 ,50000))"/>
             <draw:equation draw:name="f1" draw:formula="min(logwidth,logheight)"/>
             <draw:equation draw:name="f2" draw:formula="?f1 *?f0 /100000"/>
@@ -5621,12 +5717,12 @@
             <draw:equation draw:name="f17" draw:formula="(5400000)/60000.0"/>
             <draw:equation draw:name="f18" draw:formula="(5400000)/60000.0"/>
             <draw:equation draw:name="f19" draw:formula="(5400000)/60000.0"/>
-            <draw:handle draw:handle-position="?f2 0" draw:handle-position-x="?f2" draw:handle-position-y="0" draw:handle-range-x-maximum="50000" draw:handle-range-x-minimum="0"/>
-          </draw:enhanced-geometry>
-        </draw:custom-shape>
-        <draw:custom-shape draw:name="Shape 49" draw:style-name="gr49" draw:text-style-name="P23" draw:layer="layout" svg:width="0.353cm" svg:height="0.353cm" svg:x="19.025cm" svg:y="7.01cm">
-          <text:p/>
-          <draw:enhanced-geometry draw:mirror-horizontal="false" draw:mirror-vertical="false" draw:glue-points="?f4 0 ?f5 ?f8 0 ?f7 ?f5 ?f9 ?f4 ?f10 ?f6 ?f9 ?f11 ?f7 ?f6 ?f8" draw:text-areas="?f5 ?f8 ?f6 ?f9" svg:viewBox="0 0 0 0" draw:type="ooxml-ellipse" draw:enhanced-path="M 0 ?f7 Z N" drawooo:enhanced-path="M 0 ?f7 G ?f0 ?f2 ?f12 ?f13 ?f0 ?f2 ?f14 ?f15 ?f0 ?f2 ?f16 ?f17 ?f0 ?f2 ?f18 ?f19 Z N">
+            <draw:handle draw:handle-range-x-maximum="50000" draw:handle-range-x-minimum="0" draw:handle-position="?f2 0" draw:handle-position-x="?f2" draw:handle-position-y="0"/>
+          </draw:enhanced-geometry>
+        </draw:custom-shape>
+        <draw:custom-shape draw:name="Shape 49" draw:style-name="gr49" draw:text-style-name="P25" draw:layer="layout" svg:width="0.353cm" svg:height="0.353cm" svg:x="19.025cm" svg:y="7.01cm">
+          <text:p/>
+          <draw:enhanced-geometry draw:mirror-horizontal="false" draw:mirror-vertical="false" svg:viewBox="0 0 0 0" draw:glue-points="?f4 0 ?f5 ?f8 0 ?f7 ?f5 ?f9 ?f4 ?f10 ?f6 ?f9 ?f11 ?f7 ?f6 ?f8" draw:text-areas="?f5 ?f8 ?f6 ?f9" draw:type="ooxml-ellipse" draw:enhanced-path="M 0 ?f7 Z N" drawooo:enhanced-path="M 0 ?f7 G ?f0 ?f2 ?f12 ?f13 ?f0 ?f2 ?f14 ?f15 ?f0 ?f2 ?f16 ?f17 ?f0 ?f2 ?f18 ?f19 Z N">
             <draw:equation draw:name="f0" draw:formula="logwidth/2"/>
             <draw:equation draw:name="f1" draw:formula="?f0 *cos(pi*(2700000)/10800000)"/>
             <draw:equation draw:name="f2" draw:formula="logheight/2"/>
@@ -5653,7 +5749,7 @@
           <text:p text:style-name="P2">
             <text:span text:style-name="T12">Echo gap</text:span>
           </text:p>
-          <draw:enhanced-geometry draw:mirror-horizontal="false" draw:mirror-vertical="false" draw:glue-points="?f0 0 0 ?f1 ?f0 ?f2 ?f3 ?f1" draw:text-areas="0 0 ?f3 ?f2" svg:viewBox="0 0 0 0" draw:type="ooxml-rect" draw:enhanced-path="M 0 0 L ?f3 0 ?f3 ?f2 0 ?f2 Z N">
+          <draw:enhanced-geometry draw:mirror-horizontal="false" draw:mirror-vertical="false" svg:viewBox="0 0 0 0" draw:glue-points="?f0 0 0 ?f1 ?f0 ?f2 ?f3 ?f1" draw:text-areas="0 0 ?f3 ?f2" draw:type="ooxml-rect" draw:enhanced-path="M 0 0 L ?f3 0 ?f3 ?f2 0 ?f2 Z N">
             <draw:equation draw:name="f0" draw:formula="logwidth/2"/>
             <draw:equation draw:name="f1" draw:formula="logheight/2"/>
             <draw:equation draw:name="f2" draw:formula="logheight"/>
@@ -5664,7 +5760,7 @@
           <text:p text:style-name="P2">
             <text:span text:style-name="T13">31.7%</text:span>
           </text:p>
-          <draw:enhanced-geometry draw:mirror-horizontal="false" draw:mirror-vertical="false" draw:glue-points="?f0 0 0 ?f1 ?f0 ?f2 ?f3 ?f1" draw:text-areas="0 0 ?f3 ?f2" svg:viewBox="0 0 0 0" draw:type="ooxml-rect" draw:enhanced-path="M 0 0 L ?f3 0 ?f3 ?f2 0 ?f2 Z N">
+          <draw:enhanced-geometry draw:mirror-horizontal="false" draw:mirror-vertical="false" svg:viewBox="0 0 0 0" draw:glue-points="?f0 0 0 ?f1 ?f0 ?f2 ?f3 ?f1" draw:text-areas="0 0 ?f3 ?f2" draw:type="ooxml-rect" draw:enhanced-path="M 0 0 L ?f3 0 ?f3 ?f2 0 ?f2 Z N">
             <draw:equation draw:name="f0" draw:formula="logwidth/2"/>
             <draw:equation draw:name="f1" draw:formula="logheight/2"/>
             <draw:equation draw:name="f2" draw:formula="logheight"/>
@@ -5673,48 +5769,18 @@
         </draw:custom-shape>
         <draw:custom-shape draw:name="Text 52" draw:style-name="gr52" draw:text-style-name="P3" draw:layer="layout" svg:width="4.95cm" svg:height="0.607cm" svg:x="19.025cm" svg:y="8.611cm">
           <text:p text:style-name="P2">
-            <text:span text:style-name="T14">n</text:span>
-            <text:span text:style-name="T14">o</text:span>
-            <text:span text:style-name="T14"> </text:span>
-            <text:span text:style-name="T14">e</text:span>
-            <text:span text:style-name="T14">c</text:span>
-            <text:span text:style-name="T14">h</text:span>
-            <text:span text:style-name="T14">o</text:span>
-            <text:span text:style-name="T14"> </text:span>
-            <text:span text:style-name="T14">r</text:span>
-            <text:span text:style-name="T14">e</text:span>
-            <text:span text:style-name="T14">c</text:span>
-            <text:span text:style-name="T14">o</text:span>
-            <text:span text:style-name="T14">r</text:span>
-            <text:span text:style-name="T14">d</text:span>
-            <text:span text:style-name="T14">e</text:span>
-            <text:span text:style-name="T14">d</text:span>
-            <text:span text:style-name="T14"> </text:span>
-            <text:span text:style-name="T14">·</text:span>
-            <text:span text:style-name="T14"> </text:span>
-            <text:span text:style-name="T14">m</text:span>
-            <text:span text:style-name="T14">e</text:span>
-            <text:span text:style-name="T14">a</text:span>
-            <text:span text:style-name="T14">n</text:span>
-            <text:span text:style-name="T14"> </text:span>
-            <text:span text:style-name="T14">C</text:span>
-            <text:span text:style-name="T14">C</text:span>
-            <text:span text:style-name="T14">I</text:span>
-            <text:span text:style-name="T14"> </text:span>
-            <text:span text:style-name="T14">1</text:span>
-            <text:span text:style-name="T14">.</text:span>
-            <text:span text:style-name="T14">9</text:span>
-          </text:p>
-          <draw:enhanced-geometry draw:mirror-horizontal="false" draw:mirror-vertical="false" draw:glue-points="?f0 0 0 ?f1 ?f0 ?f2 ?f3 ?f1" draw:text-areas="0 0 ?f3 ?f2" svg:viewBox="0 0 0 0" draw:type="ooxml-rect" draw:enhanced-path="M 0 0 L ?f3 0 ?f3 ?f2 0 ?f2 Z N">
-            <draw:equation draw:name="f0" draw:formula="logwidth/2"/>
-            <draw:equation draw:name="f1" draw:formula="logheight/2"/>
-            <draw:equation draw:name="f2" draw:formula="logheight"/>
-            <draw:equation draw:name="f3" draw:formula="logwidth"/>
-          </draw:enhanced-geometry>
-        </draw:custom-shape>
-        <draw:custom-shape draw:name="Shape 53" draw:style-name="gr53" draw:text-style-name="P24" draw:layer="layout" svg:width="22.857cm" svg:height="1.394cm" svg:x="1.27cm" svg:y="9.855cm">
-          <text:p/>
-          <draw:enhanced-geometry draw:mirror-horizontal="false" draw:mirror-vertical="false" draw:glue-points="?f8 0 0 ?f9 ?f8 ?f10 ?f11 ?f9" draw:text-areas="?f5 ?f5 ?f6 ?f7" svg:viewBox="0 0 0 0" draw:type="ooxml-roundRect" draw:modifiers="14545" draw:enhanced-path="M 0 ?f2 L ?f3 0 L ?f11 ?f4 L ?f2 ?f10 Z N" drawooo:enhanced-path="M 0 ?f2 G ?f2 ?f2 ?f12 ?f13 L ?f3 0 G ?f2 ?f2 ?f14 ?f15 L ?f11 ?f4 G ?f2 ?f2 ?f16 ?f17 L ?f2 ?f10 G ?f2 ?f2 ?f18 ?f19 Z N">
+            <text:span text:style-name="T14">no echo recorded · mean CCI 1.9</text:span>
+          </text:p>
+          <draw:enhanced-geometry draw:mirror-horizontal="false" draw:mirror-vertical="false" svg:viewBox="0 0 0 0" draw:glue-points="?f0 0 0 ?f1 ?f0 ?f2 ?f3 ?f1" draw:text-areas="0 0 ?f3 ?f2" draw:type="ooxml-rect" draw:enhanced-path="M 0 0 L ?f3 0 ?f3 ?f2 0 ?f2 Z N">
+            <draw:equation draw:name="f0" draw:formula="logwidth/2"/>
+            <draw:equation draw:name="f1" draw:formula="logheight/2"/>
+            <draw:equation draw:name="f2" draw:formula="logheight"/>
+            <draw:equation draw:name="f3" draw:formula="logwidth"/>
+          </draw:enhanced-geometry>
+        </draw:custom-shape>
+        <draw:custom-shape draw:name="Shape 53" draw:style-name="gr53" draw:text-style-name="P26" draw:layer="layout" svg:width="22.857cm" svg:height="1.394cm" svg:x="1.27cm" svg:y="9.855cm">
+          <text:p/>
+          <draw:enhanced-geometry draw:mirror-horizontal="false" draw:mirror-vertical="false" svg:viewBox="0 0 0 0" draw:glue-points="?f8 0 0 ?f9 ?f8 ?f10 ?f11 ?f9" draw:text-areas="?f5 ?f5 ?f6 ?f7" draw:type="ooxml-roundRect" draw:modifiers="14545" draw:enhanced-path="M 0 ?f2 L ?f3 0 L ?f11 ?f4 L ?f2 ?f10 Z N" drawooo:enhanced-path="M 0 ?f2 G ?f2 ?f2 ?f12 ?f13 L ?f3 0 G ?f2 ?f2 ?f14 ?f15 L ?f11 ?f4 G ?f2 ?f2 ?f16 ?f17 L ?f2 ?f10 G ?f2 ?f2 ?f18 ?f19 Z N">
             <draw:equation draw:name="f0" draw:formula="if(0-$0 ,0,if(50000-$0 ,$0 ,50000))"/>
             <draw:equation draw:name="f1" draw:formula="min(logwidth,logheight)"/>
             <draw:equation draw:name="f2" draw:formula="?f1 *?f0 /100000"/>
@@ -5735,7 +5801,7 @@
             <draw:equation draw:name="f17" draw:formula="(5400000)/60000.0"/>
             <draw:equation draw:name="f18" draw:formula="(5400000)/60000.0"/>
             <draw:equation draw:name="f19" draw:formula="(5400000)/60000.0"/>
-            <draw:handle draw:handle-position="?f2 0" draw:handle-position-x="?f2" draw:handle-position-y="0" draw:handle-range-x-maximum="50000" draw:handle-range-x-minimum="0"/>
+            <draw:handle draw:handle-range-x-maximum="50000" draw:handle-range-x-minimum="0" draw:handle-position="?f2 0" draw:handle-position-x="?f2" draw:handle-position-y="0"/>
           </draw:enhanced-geometry>
         </draw:custom-shape>
         <draw:custom-shape draw:name="Text 54" draw:style-name="gr54" draw:text-style-name="P3" draw:layer="layout" svg:width="22.095cm" svg:height="1.394cm" svg:x="1.651cm" svg:y="9.855cm">
@@ -5744,22 +5810,18 @@
               KEY INSIGHT 
               <text:s/>
             </text:span>
-            <text:span text:style-name="T16">Readmission </text:span>
-            <text:span text:style-name="T16">(38.5%) is about 14× more </text:span>
-            <text:span text:style-name="T16">common than death (2.8%), </text:span>
-            <text:span text:style-name="T16">and 1 in 3 patients has no </text:span>
-            <text:span text:style-name="T16">echo on record.</text:span>
-          </text:p>
-          <draw:enhanced-geometry draw:mirror-horizontal="false" draw:mirror-vertical="false" draw:glue-points="?f0 0 0 ?f1 ?f0 ?f2 ?f3 ?f1" draw:text-areas="0 0 ?f3 ?f2" svg:viewBox="0 0 0 0" draw:type="ooxml-rect" draw:enhanced-path="M 0 0 L ?f3 0 ?f3 ?f2 0 ?f2 Z N">
-            <draw:equation draw:name="f0" draw:formula="logwidth/2"/>
-            <draw:equation draw:name="f1" draw:formula="logheight/2"/>
-            <draw:equation draw:name="f2" draw:formula="logheight"/>
-            <draw:equation draw:name="f3" draw:formula="logwidth"/>
-          </draw:enhanced-geometry>
-        </draw:custom-shape>
-        <draw:custom-shape draw:name="Shape 55" draw:style-name="gr55" draw:text-style-name="P25" draw:layer="layout" svg:width="22.857cm" svg:height="1.572cm" svg:x="1.27cm" svg:y="11.557cm">
-          <text:p/>
-          <draw:enhanced-geometry draw:mirror-horizontal="false" draw:mirror-vertical="false" draw:glue-points="?f8 0 0 ?f9 ?f8 ?f10 ?f11 ?f9" draw:text-areas="?f5 ?f5 ?f6 ?f7" svg:viewBox="0 0 0 0" draw:type="ooxml-roundRect" draw:modifiers="12903" draw:enhanced-path="M 0 ?f2 L ?f3 0 L ?f11 ?f4 L ?f2 ?f10 Z N" drawooo:enhanced-path="M 0 ?f2 G ?f2 ?f2 ?f12 ?f13 L ?f3 0 G ?f2 ?f2 ?f14 ?f15 L ?f11 ?f4 G ?f2 ?f2 ?f16 ?f17 L ?f2 ?f10 G ?f2 ?f2 ?f18 ?f19 Z N">
+            <text:span text:style-name="T16">Readmission (38.5%) is about 14× more common than death (2.8%), and 1 in 3 patients has no echo on record.</text:span>
+          </text:p>
+          <draw:enhanced-geometry draw:mirror-horizontal="false" draw:mirror-vertical="false" svg:viewBox="0 0 0 0" draw:glue-points="?f0 0 0 ?f1 ?f0 ?f2 ?f3 ?f1" draw:text-areas="0 0 ?f3 ?f2" draw:type="ooxml-rect" draw:enhanced-path="M 0 0 L ?f3 0 ?f3 ?f2 0 ?f2 Z N">
+            <draw:equation draw:name="f0" draw:formula="logwidth/2"/>
+            <draw:equation draw:name="f1" draw:formula="logheight/2"/>
+            <draw:equation draw:name="f2" draw:formula="logheight"/>
+            <draw:equation draw:name="f3" draw:formula="logwidth"/>
+          </draw:enhanced-geometry>
+        </draw:custom-shape>
+        <draw:custom-shape draw:name="Shape 55" draw:style-name="gr55" draw:text-style-name="P27" draw:layer="layout" svg:width="22.857cm" svg:height="1.572cm" svg:x="1.27cm" svg:y="11.557cm">
+          <text:p/>
+          <draw:enhanced-geometry draw:mirror-horizontal="false" draw:mirror-vertical="false" svg:viewBox="0 0 0 0" draw:glue-points="?f8 0 0 ?f9 ?f8 ?f10 ?f11 ?f9" draw:text-areas="?f5 ?f5 ?f6 ?f7" draw:type="ooxml-roundRect" draw:modifiers="12903" draw:enhanced-path="M 0 ?f2 L ?f3 0 L ?f11 ?f4 L ?f2 ?f10 Z N" drawooo:enhanced-path="M 0 ?f2 G ?f2 ?f2 ?f12 ?f13 L ?f3 0 G ?f2 ?f2 ?f14 ?f15 L ?f11 ?f4 G ?f2 ?f2 ?f16 ?f17 L ?f2 ?f10 G ?f2 ?f2 ?f18 ?f19 Z N">
             <draw:equation draw:name="f0" draw:formula="if(0-$0 ,0,if(50000-$0 ,$0 ,50000))"/>
             <draw:equation draw:name="f1" draw:formula="min(logwidth,logheight)"/>
             <draw:equation draw:name="f2" draw:formula="?f1 *?f0 /100000"/>
@@ -5780,12 +5842,12 @@
             <draw:equation draw:name="f17" draw:formula="(5400000)/60000.0"/>
             <draw:equation draw:name="f18" draw:formula="(5400000)/60000.0"/>
             <draw:equation draw:name="f19" draw:formula="(5400000)/60000.0"/>
-            <draw:handle draw:handle-position="?f2 0" draw:handle-position-x="?f2" draw:handle-position-y="0" draw:handle-range-x-maximum="50000" draw:handle-range-x-minimum="0"/>
-          </draw:enhanced-geometry>
-        </draw:custom-shape>
-        <draw:custom-shape draw:name="Shape 56" draw:style-name="gr56" draw:text-style-name="P26" draw:layer="layout" svg:width="1.216cm" svg:height="1.216cm" svg:x="1.575cm" svg:y="11.735cm">
-          <text:p/>
-          <draw:enhanced-geometry draw:mirror-horizontal="false" draw:mirror-vertical="false" draw:glue-points="?f4 0 ?f5 ?f8 0 ?f7 ?f5 ?f9 ?f4 ?f10 ?f6 ?f9 ?f11 ?f7 ?f6 ?f8" draw:text-areas="?f5 ?f8 ?f6 ?f9" svg:viewBox="0 0 0 0" draw:type="ooxml-ellipse" draw:enhanced-path="M 0 ?f7 Z N" drawooo:enhanced-path="M 0 ?f7 G ?f0 ?f2 ?f12 ?f13 ?f0 ?f2 ?f14 ?f15 ?f0 ?f2 ?f16 ?f17 ?f0 ?f2 ?f18 ?f19 Z N">
+            <draw:handle draw:handle-range-x-maximum="50000" draw:handle-range-x-minimum="0" draw:handle-position="?f2 0" draw:handle-position-x="?f2" draw:handle-position-y="0"/>
+          </draw:enhanced-geometry>
+        </draw:custom-shape>
+        <draw:custom-shape draw:name="Shape 56" draw:style-name="gr56" draw:text-style-name="P28" draw:layer="layout" svg:width="1.216cm" svg:height="1.216cm" svg:x="1.575cm" svg:y="11.735cm">
+          <text:p/>
+          <draw:enhanced-geometry draw:mirror-horizontal="false" draw:mirror-vertical="false" svg:viewBox="0 0 0 0" draw:glue-points="?f4 0 ?f5 ?f8 0 ?f7 ?f5 ?f9 ?f4 ?f10 ?f6 ?f9 ?f11 ?f7 ?f6 ?f8" draw:text-areas="?f5 ?f8 ?f6 ?f9" draw:type="ooxml-ellipse" draw:enhanced-path="M 0 ?f7 Z N" drawooo:enhanced-path="M 0 ?f7 G ?f0 ?f2 ?f12 ?f13 ?f0 ?f2 ?f14 ?f15 ?f0 ?f2 ?f16 ?f17 ?f0 ?f2 ?f18 ?f19 Z N">
             <draw:equation draw:name="f0" draw:formula="logwidth/2"/>
             <draw:equation draw:name="f1" draw:formula="?f0 *cos(pi*(2700000)/10800000)"/>
             <draw:equation draw:name="f2" draw:formula="logheight/2"/>
@@ -5808,7 +5870,7 @@
             <draw:equation draw:name="f19" draw:formula="(5400000)/60000.0"/>
           </draw:enhanced-geometry>
         </draw:custom-shape>
-        <draw:frame draw:name="Image 0" draw:style-name="gr8" draw:text-style-name="P6" draw:layer="layout" svg:width="0.582cm" svg:height="0.582cm" svg:x="1.892cm" svg:y="12.052cm">
+        <draw:frame draw:name="Image 0" draw:style-name="gr8" draw:text-style-name="P8" draw:layer="layout" svg:width="0.582cm" svg:height="0.582cm" svg:x="1.892cm" svg:y="12.052cm">
           <draw:image xlink:href="Pictures/100000010000010000000100781A1E16.png" xlink:type="simple" xlink:show="embed" xlink:actuate="onLoad" draw:mime-type="image/png">
             <text:p/>
           </draw:image>
@@ -5816,27 +5878,29 @@
         </draw:frame>
         <draw:custom-shape draw:name="Text 57" draw:style-name="gr57" draw:text-style-name="P3" draw:layer="layout" svg:width="20.571cm" svg:height="1.47cm" svg:x="3.175cm" svg:y="11.608cm">
           <text:p text:style-name="P2">
-            <text:span text:style-name="T17">Live dashboard: </text:span>
+            <text:span text:style-name="T17">Live </text:span>
+            <text:span text:style-name="T17">dashboard: </text:span>
             <text:span text:style-name="T18">
               <text:a xlink:href="http://localhost:8501/" xlink:type="simple">Hospitalized HF Patients Analytics · Team05 PyCraft</text:a>
             </text:span>
           </text:p>
           <text:p text:style-name="P2">
-            <text:span text:style-name="T17">Code &amp; data: </text:span>
+            <text:span text:style-name="T17">Code &amp; </text:span>
+            <text:span text:style-name="T17">data: </text:span>
             <text:span text:style-name="T19">
               <text:a xlink:href="https://github.com/snehaboddukuri/Team5_PyCraft_Python-Hackathon_SEP2026" xlink:type="simple">github.com/snehaboddukuri/Team5_PyCraft_Python-Hackathon_SEP2026</text:a>
             </text:span>
           </text:p>
-          <draw:enhanced-geometry draw:mirror-horizontal="false" draw:mirror-vertical="false" draw:glue-points="?f0 0 0 ?f1 ?f0 ?f2 ?f3 ?f1" draw:text-areas="0 0 ?f3 ?f2" svg:viewBox="0 0 0 0" draw:type="ooxml-rect" draw:enhanced-path="M 0 0 L ?f3 0 ?f3 ?f2 0 ?f2 Z N">
-            <draw:equation draw:name="f0" draw:formula="logwidth/2"/>
-            <draw:equation draw:name="f1" draw:formula="logheight/2"/>
-            <draw:equation draw:name="f2" draw:formula="logheight"/>
-            <draw:equation draw:name="f3" draw:formula="logwidth"/>
-          </draw:enhanced-geometry>
-        </draw:custom-shape>
-        <draw:custom-shape draw:name="Freeform 1" draw:style-name="gr58" draw:text-style-name="P27" draw:layer="layout" svg:width="1.347cm" svg:height="2.221cm" svg:x="23.971cm" svg:y="0.085cm">
-          <text:p/>
-          <draw:enhanced-geometry draw:mirror-horizontal="false" draw:mirror-vertical="false" drawooo:sub-view-size="647700 1066800" draw:text-areas="?f0 ?f2 ?f1 ?f3" svg:viewBox="0 0 0 0" draw:type="ooxml-non-primitive" draw:enhanced-path="M 0 0 L 647700 0 647700 1066800 0 1066800 0 0 Z N">
+          <draw:enhanced-geometry draw:mirror-horizontal="false" draw:mirror-vertical="false" svg:viewBox="0 0 0 0" draw:glue-points="?f0 0 0 ?f1 ?f0 ?f2 ?f3 ?f1" draw:text-areas="0 0 ?f3 ?f2" draw:type="ooxml-rect" draw:enhanced-path="M 0 0 L ?f3 0 ?f3 ?f2 0 ?f2 Z N">
+            <draw:equation draw:name="f0" draw:formula="logwidth/2"/>
+            <draw:equation draw:name="f1" draw:formula="logheight/2"/>
+            <draw:equation draw:name="f2" draw:formula="logheight"/>
+            <draw:equation draw:name="f3" draw:formula="logwidth"/>
+          </draw:enhanced-geometry>
+        </draw:custom-shape>
+        <draw:custom-shape draw:name="Freeform 1" draw:style-name="gr58" draw:text-style-name="P29" draw:layer="layout" svg:width="1.347cm" svg:height="2.221cm" svg:x="23.971cm" svg:y="0.085cm">
+          <text:p/>
+          <draw:enhanced-geometry draw:mirror-horizontal="false" draw:mirror-vertical="false" svg:viewBox="0 0 0 0" drawooo:sub-view-size="647700 1066800" draw:text-areas="?f0 ?f2 ?f1 ?f3" draw:type="ooxml-non-primitive" draw:enhanced-path="M 0 0 L 647700 0 647700 1066800 0 1066800 0 0 Z N">
             <draw:equation draw:name="f0" draw:formula="0*logwidth/485280"/>
             <draw:equation draw:name="f1" draw:formula="485640*logwidth/485280"/>
             <draw:equation draw:name="f2" draw:formula="0*logheight/799920"/>
@@ -5845,44 +5909,54 @@
         </draw:custom-shape>
         <presentation:notes draw:style-name="dp2">
           <draw:page-thumbnail draw:name="PlaceHolder 1" draw:style-name="gr10" draw:layer="layout" svg:width="15.237cm" svg:height="8.57cm" svg:x="1.905cm" svg:y="3.175cm" draw:page-number="2" presentation:class="page"/>
-          <draw:frame draw:name="PlaceHolder 2" presentation:style-name="pr1" draw:text-style-name="P9" draw:layer="layout" svg:width="15.237cm" svg:height="9.998cm" svg:x="1.905cm" svg:y="12.224cm" presentation:class="notes" presentation:user-transformed="true">
+          <draw:frame draw:name="PlaceHolder 2" presentation:style-name="pr1" draw:text-style-name="P11" draw:layer="layout" svg:width="15.237cm" svg:height="9.998cm" svg:x="1.905cm" svg:y="12.224cm" presentation:class="notes" presentation:user-transformed="true">
             <draw:text-box>
-              <text:p text:style-name="P8">
-                <text:span text:style-name="T6">These are the </text:span>
-                <text:span text:style-name="T6">eight KPI </text:span>
-                <text:span text:style-name="T6">cards shown </text:span>
+              <text:p text:style-name="P10">
+                <text:span text:style-name="T6">These are </text:span>
+                <text:span text:style-name="T6">the eight </text:span>
+                <text:span text:style-name="T6">KPI cards </text:span>
+                <text:span text:style-name="T6">shown </text:span>
                 <text:span text:style-name="T6">above the </text:span>
                 <text:span text:style-name="T6">dashboard </text:span>
-                <text:span text:style-name="T6">tabs. The two </text:span>
-                <text:span text:style-name="T6">outcome KPIs </text:span>
-                <text:span text:style-name="T6">set the story: </text:span>
+                <text:span text:style-name="T6">tabs. The </text:span>
+                <text:span text:style-name="T6">two </text:span>
+                <text:span text:style-name="T6">outcome </text:span>
+                <text:span text:style-name="T6">KPIs set </text:span>
+                <text:span text:style-name="T6">the story: </text:span>
                 <text:span text:style-name="T6">38.5% of </text:span>
-                <text:span text:style-name="T6">patients are </text:span>
+                <text:span text:style-name="T6">patients </text:span>
+                <text:span text:style-name="T6">are </text:span>
                 <text:span text:style-name="T6">readmitted </text:span>
                 <text:span text:style-name="T6">within six </text:span>
-                <text:span text:style-name="T6">months but </text:span>
-                <text:span text:style-name="T6">only 2.8% die. </text:span>
-                <text:span text:style-name="T6">The cohort is </text:span>
-                <text:span text:style-name="T6">old (73% aged </text:span>
+                <text:span text:style-name="T6">months </text:span>
+                <text:span text:style-name="T6">but only </text:span>
+                <text:span text:style-name="T6">2.8% die. </text:span>
+                <text:span text:style-name="T6">The cohort </text:span>
+                <text:span text:style-name="T6">is old </text:span>
+                <text:span text:style-name="T6">(73% aged </text:span>
                 <text:span text:style-name="T6">69+), half </text:span>
                 <text:span text:style-name="T6">arrive as </text:span>
-                <text:span text:style-name="T6">emergencies, </text:span>
-                <text:span text:style-name="T6">and two </text:span>
-                <text:span text:style-name="T6">process KPIs </text:span>
-                <text:span text:style-name="T6">— 5.3% </text:span>
-                <text:span text:style-name="T6">leaving against </text:span>
-                <text:span text:style-name="T6">advice and a </text:span>
-                <text:span text:style-name="T6">31.7% echo </text:span>
-                <text:span text:style-name="T6">gap — come </text:span>
+                <text:span text:style-name="T6">emergenci</text:span>
+                <text:span text:style-name="T6">es, and </text:span>
+                <text:span text:style-name="T6">two </text:span>
+                <text:span text:style-name="T6">process </text:span>
+                <text:span text:style-name="T6">KPIs — </text:span>
+                <text:span text:style-name="T6">5.3% </text:span>
+                <text:span text:style-name="T6">leaving </text:span>
+                <text:span text:style-name="T6">against </text:span>
+                <text:span text:style-name="T6">advice and </text:span>
+                <text:span text:style-name="T6">a 31.7% </text:span>
+                <text:span text:style-name="T6">echo gap </text:span>
+                <text:span text:style-name="T6">— come </text:span>
                 <text:span text:style-name="T6">back in the </text:span>
-                <text:span text:style-name="T6">prescriptive </text:span>
-                <text:span text:style-name="T6">section.</text:span>
+                <text:span text:style-name="T6">prescriptiv</text:span>
+                <text:span text:style-name="T6">e section.</text:span>
               </text:p>
             </draw:text-box>
           </draw:frame>
-          <draw:frame draw:name="PlaceHolder 3" presentation:style-name="pr2" draw:text-style-name="P11" draw:layer="layout" svg:width="8.252cm" svg:height="1.271cm" svg:x="10.791cm" svg:y="24.126cm" presentation:class="page-number" presentation:user-transformed="true">
+          <draw:frame draw:name="PlaceHolder 3" presentation:style-name="pr2" draw:text-style-name="P13" draw:layer="layout" svg:width="8.252cm" svg:height="1.271cm" svg:x="10.791cm" svg:y="24.126cm" presentation:class="page-number" presentation:user-transformed="true">
             <draw:text-box>
-              <text:p text:style-name="P10">
+              <text:p text:style-name="P12">
                 <text:span text:style-name="T7">
                   <text:page-number>&lt;number&gt;</text:page-number>
                 </text:span>
@@ -5892,9 +5966,9 @@
         </presentation:notes>
       </draw:page>
       <draw:page draw:name="page3" draw:style-name="dp4" draw:master-page-name="DEFAULT">
-        <draw:custom-shape draw:name="Shape 0" draw:style-name="gr59" draw:text-style-name="P17" draw:layer="layout" svg:width="3.426cm" svg:height="0.683cm" svg:x="1.27cm" svg:y="0.635cm">
-          <text:p/>
-          <draw:enhanced-geometry draw:mirror-horizontal="false" draw:mirror-vertical="false" draw:glue-points="?f8 0 0 ?f9 ?f8 ?f10 ?f11 ?f9" draw:text-areas="?f5 ?f5 ?f6 ?f7" svg:viewBox="0 0 0 0" draw:type="ooxml-roundRect" draw:modifiers="48148" draw:enhanced-path="M 0 ?f2 L ?f3 0 L ?f11 ?f4 L ?f2 ?f10 Z N" drawooo:enhanced-path="M 0 ?f2 G ?f2 ?f2 ?f12 ?f13 L ?f3 0 G ?f2 ?f2 ?f14 ?f15 L ?f11 ?f4 G ?f2 ?f2 ?f16 ?f17 L ?f2 ?f10 G ?f2 ?f2 ?f18 ?f19 Z N">
+        <draw:custom-shape draw:name="Shape 0" draw:style-name="gr59" draw:text-style-name="P19" draw:layer="layout" svg:width="3.426cm" svg:height="0.683cm" svg:x="1.27cm" svg:y="0.635cm">
+          <text:p/>
+          <draw:enhanced-geometry draw:mirror-horizontal="false" draw:mirror-vertical="false" svg:viewBox="0 0 0 0" draw:glue-points="?f8 0 0 ?f9 ?f8 ?f10 ?f11 ?f9" draw:text-areas="?f5 ?f5 ?f6 ?f7" draw:type="ooxml-roundRect" draw:modifiers="48148" draw:enhanced-path="M 0 ?f2 L ?f3 0 L ?f11 ?f4 L ?f2 ?f10 Z N" drawooo:enhanced-path="M 0 ?f2 G ?f2 ?f2 ?f12 ?f13 L ?f3 0 G ?f2 ?f2 ?f14 ?f15 L ?f11 ?f4 G ?f2 ?f2 ?f16 ?f17 L ?f2 ?f10 G ?f2 ?f2 ?f18 ?f19 Z N">
             <draw:equation draw:name="f0" draw:formula="if(0-$0 ,0,if(50000-$0 ,$0 ,50000))"/>
             <draw:equation draw:name="f1" draw:formula="min(logwidth,logheight)"/>
             <draw:equation draw:name="f2" draw:formula="?f1 *?f0 /100000"/>
@@ -5915,14 +5989,15 @@
             <draw:equation draw:name="f17" draw:formula="(5400000)/60000.0"/>
             <draw:equation draw:name="f18" draw:formula="(5400000)/60000.0"/>
             <draw:equation draw:name="f19" draw:formula="(5400000)/60000.0"/>
-            <draw:handle draw:handle-position="?f2 0" draw:handle-position-x="?f2" draw:handle-position-y="0" draw:handle-range-x-maximum="50000" draw:handle-range-x-minimum="0"/>
-          </draw:enhanced-geometry>
-        </draw:custom-shape>
-        <draw:custom-shape draw:name="Text 1" draw:style-name="gr60" draw:text-style-name="P14" draw:layer="layout" svg:width="3.426cm" svg:height="0.683cm" svg:x="1.27cm" svg:y="0.635cm">
-          <text:p text:style-name="P13">
-            <text:span text:style-name="T8">DESCRIPTIVE</text:span>
-          </text:p>
-          <draw:enhanced-geometry draw:mirror-horizontal="false" draw:mirror-vertical="false" draw:glue-points="?f0 0 0 ?f1 ?f0 ?f2 ?f3 ?f1" draw:text-areas="0 0 ?f3 ?f2" svg:viewBox="0 0 0 0" draw:type="ooxml-rect" draw:enhanced-path="M 0 0 L ?f3 0 ?f3 ?f2 0 ?f2 Z N">
+            <draw:handle draw:handle-range-x-maximum="50000" draw:handle-range-x-minimum="0" draw:handle-position="?f2 0" draw:handle-position-x="?f2" draw:handle-position-y="0"/>
+          </draw:enhanced-geometry>
+        </draw:custom-shape>
+        <draw:custom-shape draw:name="Text 1" draw:style-name="gr60" draw:text-style-name="P16" draw:layer="layout" svg:width="3.426cm" svg:height="0.683cm" svg:x="1.27cm" svg:y="0.635cm">
+          <text:p text:style-name="P15">
+            <text:span text:style-name="T8">DESCRIPTI</text:span>
+            <text:span text:style-name="T8">VE</text:span>
+          </text:p>
+          <draw:enhanced-geometry draw:mirror-horizontal="false" draw:mirror-vertical="false" svg:viewBox="0 0 0 0" draw:glue-points="?f0 0 0 ?f1 ?f0 ?f2 ?f3 ?f1" draw:text-areas="0 0 ?f3 ?f2" draw:type="ooxml-rect" draw:enhanced-path="M 0 0 L ?f3 0 ?f3 ?f2 0 ?f2 Z N">
             <draw:equation draw:name="f0" draw:formula="logwidth/2"/>
             <draw:equation draw:name="f1" draw:formula="logheight/2"/>
             <draw:equation draw:name="f2" draw:formula="logheight"/>
@@ -5933,7 +6008,7 @@
           <text:p text:style-name="P2">
             <text:span text:style-name="T20">What happened?</text:span>
           </text:p>
-          <draw:enhanced-geometry draw:mirror-horizontal="false" draw:mirror-vertical="false" draw:glue-points="?f0 0 0 ?f1 ?f0 ?f2 ?f3 ?f1" draw:text-areas="0 0 ?f3 ?f2" svg:viewBox="0 0 0 0" draw:type="ooxml-rect" draw:enhanced-path="M 0 0 L ?f3 0 ?f3 ?f2 0 ?f2 Z N">
+          <draw:enhanced-geometry draw:mirror-horizontal="false" draw:mirror-vertical="false" svg:viewBox="0 0 0 0" draw:glue-points="?f0 0 0 ?f1 ?f0 ?f2 ?f3 ?f1" draw:text-areas="0 0 ?f3 ?f2" draw:type="ooxml-rect" draw:enhanced-path="M 0 0 L ?f3 0 ?f3 ?f2 0 ?f2 Z N">
             <draw:equation draw:name="f0" draw:formula="logwidth/2"/>
             <draw:equation draw:name="f1" draw:formula="logheight/2"/>
             <draw:equation draw:name="f2" draw:formula="logheight"/>
@@ -5942,11 +6017,9 @@
         </draw:custom-shape>
         <draw:custom-shape draw:name="Text 3" draw:style-name="gr62" draw:text-style-name="P3" draw:layer="layout" svg:width="22.857cm" svg:height="1.267cm" svg:x="1.27cm" svg:y="1.448cm">
           <text:p text:style-name="P2">
-            <text:span text:style-name="T9">Who Are </text:span>
-            <text:span text:style-name="T9">the </text:span>
-            <text:span text:style-name="T9">Patients?</text:span>
-          </text:p>
-          <draw:enhanced-geometry draw:mirror-horizontal="false" draw:mirror-vertical="false" draw:glue-points="?f0 0 0 ?f1 ?f0 ?f2 ?f3 ?f1" draw:text-areas="0 0 ?f3 ?f2" svg:viewBox="0 0 0 0" draw:type="ooxml-rect" draw:enhanced-path="M 0 0 L ?f3 0 ?f3 ?f2 0 ?f2 Z N">
+            <text:span text:style-name="T9">Who Are the Patients?</text:span>
+          </text:p>
+          <draw:enhanced-geometry draw:mirror-horizontal="false" draw:mirror-vertical="false" svg:viewBox="0 0 0 0" draw:glue-points="?f0 0 0 ?f1 ?f0 ?f2 ?f3 ?f1" draw:text-areas="0 0 ?f3 ?f2" draw:type="ooxml-rect" draw:enhanced-path="M 0 0 L ?f3 0 ?f3 ?f2 0 ?f2 Z N">
             <draw:equation draw:name="f0" draw:formula="logwidth/2"/>
             <draw:equation draw:name="f1" draw:formula="logheight/2"/>
             <draw:equation draw:name="f2" draw:formula="logheight"/>
@@ -5955,20 +6028,18 @@
         </draw:custom-shape>
         <draw:custom-shape draw:name="Text 4" draw:style-name="gr63" draw:text-style-name="P3" draw:layer="layout" svg:width="22.857cm" svg:height="0.657cm" svg:x="1.27cm" svg:y="2.692cm">
           <text:p text:style-name="P2">
-            <text:span text:style-name="T21">Dashboard charts: Age </text:span>
-            <text:span text:style-name="T21">&amp; gender distribution · </text:span>
-            <text:span text:style-name="T21">Malnutrition risk by age</text:span>
-          </text:p>
-          <draw:enhanced-geometry draw:mirror-horizontal="false" draw:mirror-vertical="false" draw:glue-points="?f0 0 0 ?f1 ?f0 ?f2 ?f3 ?f1" draw:text-areas="0 0 ?f3 ?f2" svg:viewBox="0 0 0 0" draw:type="ooxml-rect" draw:enhanced-path="M 0 0 L ?f3 0 ?f3 ?f2 0 ?f2 Z N">
-            <draw:equation draw:name="f0" draw:formula="logwidth/2"/>
-            <draw:equation draw:name="f1" draw:formula="logheight/2"/>
-            <draw:equation draw:name="f2" draw:formula="logheight"/>
-            <draw:equation draw:name="f3" draw:formula="logwidth"/>
-          </draw:enhanced-geometry>
-        </draw:custom-shape>
-        <draw:custom-shape draw:name="Shape 5" draw:style-name="gr16" draw:text-style-name="P16" draw:layer="layout" svg:width="2.283cm" svg:height="0.505cm" svg:x="14.224cm" svg:y="13.411cm">
-          <text:p/>
-          <draw:enhanced-geometry draw:mirror-horizontal="false" draw:mirror-vertical="false" draw:glue-points="?f8 0 0 ?f9 ?f8 ?f10 ?f11 ?f9" draw:text-areas="?f5 ?f5 ?f6 ?f7" svg:viewBox="0 0 0 0" draw:type="ooxml-roundRect" draw:modifiers="50000" draw:enhanced-path="M 0 ?f2 L ?f3 0 L ?f11 ?f4 L ?f2 ?f10 Z N" drawooo:enhanced-path="M 0 ?f2 G ?f2 ?f2 ?f12 ?f13 L ?f3 0 G ?f2 ?f2 ?f14 ?f15 L ?f11 ?f4 G ?f2 ?f2 ?f16 ?f17 L ?f2 ?f10 G ?f2 ?f2 ?f18 ?f19 Z N">
+            <text:span text:style-name="T21"/>
+          </text:p>
+          <draw:enhanced-geometry draw:mirror-horizontal="false" draw:mirror-vertical="false" svg:viewBox="0 0 0 0" draw:glue-points="?f0 0 0 ?f1 ?f0 ?f2 ?f3 ?f1" draw:text-areas="0 0 ?f3 ?f2" draw:type="ooxml-rect" draw:enhanced-path="M 0 0 L ?f3 0 ?f3 ?f2 0 ?f2 Z N">
+            <draw:equation draw:name="f0" draw:formula="logwidth/2"/>
+            <draw:equation draw:name="f1" draw:formula="logheight/2"/>
+            <draw:equation draw:name="f2" draw:formula="logheight"/>
+            <draw:equation draw:name="f3" draw:formula="logwidth"/>
+          </draw:enhanced-geometry>
+        </draw:custom-shape>
+        <draw:custom-shape draw:name="Shape 5" draw:style-name="gr16" draw:text-style-name="P18" draw:layer="layout" svg:width="2.283cm" svg:height="0.505cm" svg:x="14.224cm" svg:y="13.411cm">
+          <text:p/>
+          <draw:enhanced-geometry draw:mirror-horizontal="false" draw:mirror-vertical="false" svg:viewBox="0 0 0 0" draw:glue-points="?f8 0 0 ?f9 ?f8 ?f10 ?f11 ?f9" draw:text-areas="?f5 ?f5 ?f6 ?f7" draw:type="ooxml-roundRect" draw:modifiers="50000" draw:enhanced-path="M 0 ?f2 L ?f3 0 L ?f11 ?f4 L ?f2 ?f10 Z N" drawooo:enhanced-path="M 0 ?f2 G ?f2 ?f2 ?f12 ?f13 L ?f3 0 G ?f2 ?f2 ?f14 ?f15 L ?f11 ?f4 G ?f2 ?f2 ?f16 ?f17 L ?f2 ?f10 G ?f2 ?f2 ?f18 ?f19 Z N">
             <draw:equation draw:name="f0" draw:formula="if(0-$0 ,0,if(50000-$0 ,$0 ,50000))"/>
             <draw:equation draw:name="f1" draw:formula="min(logwidth,logheight)"/>
             <draw:equation draw:name="f2" draw:formula="?f1 *?f0 /100000"/>
@@ -5989,23 +6060,23 @@
             <draw:equation draw:name="f17" draw:formula="(5400000)/60000.0"/>
             <draw:equation draw:name="f18" draw:formula="(5400000)/60000.0"/>
             <draw:equation draw:name="f19" draw:formula="(5400000)/60000.0"/>
-            <draw:handle draw:handle-position="?f2 0" draw:handle-position-x="?f2" draw:handle-position-y="0" draw:handle-range-x-maximum="50000" draw:handle-range-x-minimum="0"/>
-          </draw:enhanced-geometry>
-        </draw:custom-shape>
-        <draw:custom-shape draw:name="Text 6" draw:style-name="gr64" draw:text-style-name="P14" draw:layer="layout" svg:width="2.283cm" svg:height="0.505cm" svg:x="14.224cm" svg:y="13.411cm">
-          <text:p text:style-name="P13">
+            <draw:handle draw:handle-range-x-maximum="50000" draw:handle-range-x-minimum="0" draw:handle-position="?f2 0" draw:handle-position-x="?f2" draw:handle-position-y="0"/>
+          </draw:enhanced-geometry>
+        </draw:custom-shape>
+        <draw:custom-shape draw:name="Text 6" draw:style-name="gr64" draw:text-style-name="P16" draw:layer="layout" svg:width="2.283cm" svg:height="0.505cm" svg:x="14.224cm" svg:y="13.411cm">
+          <text:p text:style-name="P15">
             <text:span text:style-name="T11">KPIs</text:span>
           </text:p>
-          <draw:enhanced-geometry draw:mirror-horizontal="false" draw:mirror-vertical="false" draw:glue-points="?f0 0 0 ?f1 ?f0 ?f2 ?f3 ?f1" draw:text-areas="0 0 ?f3 ?f2" svg:viewBox="0 0 0 0" draw:type="ooxml-rect" draw:enhanced-path="M 0 0 L ?f3 0 ?f3 ?f2 0 ?f2 Z N">
-            <draw:equation draw:name="f0" draw:formula="logwidth/2"/>
-            <draw:equation draw:name="f1" draw:formula="logheight/2"/>
-            <draw:equation draw:name="f2" draw:formula="logheight"/>
-            <draw:equation draw:name="f3" draw:formula="logwidth"/>
-          </draw:enhanced-geometry>
-        </draw:custom-shape>
-        <draw:custom-shape draw:name="Shape 7" draw:style-name="gr65" draw:text-style-name="P17" draw:layer="layout" svg:width="2.283cm" svg:height="0.505cm" svg:x="16.739cm" svg:y="13.411cm">
-          <text:p/>
-          <draw:enhanced-geometry draw:mirror-horizontal="false" draw:mirror-vertical="false" draw:glue-points="?f8 0 0 ?f9 ?f8 ?f10 ?f11 ?f9" draw:text-areas="?f5 ?f5 ?f6 ?f7" svg:viewBox="0 0 0 0" draw:type="ooxml-roundRect" draw:modifiers="50000" draw:enhanced-path="M 0 ?f2 L ?f3 0 L ?f11 ?f4 L ?f2 ?f10 Z N" drawooo:enhanced-path="M 0 ?f2 G ?f2 ?f2 ?f12 ?f13 L ?f3 0 G ?f2 ?f2 ?f14 ?f15 L ?f11 ?f4 G ?f2 ?f2 ?f16 ?f17 L ?f2 ?f10 G ?f2 ?f2 ?f18 ?f19 Z N">
+          <draw:enhanced-geometry draw:mirror-horizontal="false" draw:mirror-vertical="false" svg:viewBox="0 0 0 0" draw:glue-points="?f0 0 0 ?f1 ?f0 ?f2 ?f3 ?f1" draw:text-areas="0 0 ?f3 ?f2" draw:type="ooxml-rect" draw:enhanced-path="M 0 0 L ?f3 0 ?f3 ?f2 0 ?f2 Z N">
+            <draw:equation draw:name="f0" draw:formula="logwidth/2"/>
+            <draw:equation draw:name="f1" draw:formula="logheight/2"/>
+            <draw:equation draw:name="f2" draw:formula="logheight"/>
+            <draw:equation draw:name="f3" draw:formula="logwidth"/>
+          </draw:enhanced-geometry>
+        </draw:custom-shape>
+        <draw:custom-shape draw:name="Shape 7" draw:style-name="gr65" draw:text-style-name="P19" draw:layer="layout" svg:width="2.283cm" svg:height="0.505cm" svg:x="16.739cm" svg:y="13.411cm">
+          <text:p/>
+          <draw:enhanced-geometry draw:mirror-horizontal="false" draw:mirror-vertical="false" svg:viewBox="0 0 0 0" draw:glue-points="?f8 0 0 ?f9 ?f8 ?f10 ?f11 ?f9" draw:text-areas="?f5 ?f5 ?f6 ?f7" draw:type="ooxml-roundRect" draw:modifiers="50000" draw:enhanced-path="M 0 ?f2 L ?f3 0 L ?f11 ?f4 L ?f2 ?f10 Z N" drawooo:enhanced-path="M 0 ?f2 G ?f2 ?f2 ?f12 ?f13 L ?f3 0 G ?f2 ?f2 ?f14 ?f15 L ?f11 ?f4 G ?f2 ?f2 ?f16 ?f17 L ?f2 ?f10 G ?f2 ?f2 ?f18 ?f19 Z N">
             <draw:equation draw:name="f0" draw:formula="if(0-$0 ,0,if(50000-$0 ,$0 ,50000))"/>
             <draw:equation draw:name="f1" draw:formula="min(logwidth,logheight)"/>
             <draw:equation draw:name="f2" draw:formula="?f1 *?f0 /100000"/>
@@ -6026,23 +6097,23 @@
             <draw:equation draw:name="f17" draw:formula="(5400000)/60000.0"/>
             <draw:equation draw:name="f18" draw:formula="(5400000)/60000.0"/>
             <draw:equation draw:name="f19" draw:formula="(5400000)/60000.0"/>
-            <draw:handle draw:handle-position="?f2 0" draw:handle-position-x="?f2" draw:handle-position-y="0" draw:handle-range-x-maximum="50000" draw:handle-range-x-minimum="0"/>
-          </draw:enhanced-geometry>
-        </draw:custom-shape>
-        <draw:custom-shape draw:name="Text 8" draw:style-name="gr66" draw:text-style-name="P14" draw:layer="layout" svg:width="2.283cm" svg:height="0.505cm" svg:x="16.739cm" svg:y="13.411cm">
-          <text:p text:style-name="P13">
+            <draw:handle draw:handle-range-x-maximum="50000" draw:handle-range-x-minimum="0" draw:handle-position="?f2 0" draw:handle-position-x="?f2" draw:handle-position-y="0"/>
+          </draw:enhanced-geometry>
+        </draw:custom-shape>
+        <draw:custom-shape draw:name="Text 8" draw:style-name="gr66" draw:text-style-name="P16" draw:layer="layout" svg:width="2.283cm" svg:height="0.505cm" svg:x="16.739cm" svg:y="13.411cm">
+          <text:p text:style-name="P15">
             <text:span text:style-name="T10">Descriptive</text:span>
           </text:p>
-          <draw:enhanced-geometry draw:mirror-horizontal="false" draw:mirror-vertical="false" draw:glue-points="?f0 0 0 ?f1 ?f0 ?f2 ?f3 ?f1" draw:text-areas="0 0 ?f3 ?f2" svg:viewBox="0 0 0 0" draw:type="ooxml-rect" draw:enhanced-path="M 0 0 L ?f3 0 ?f3 ?f2 0 ?f2 Z N">
-            <draw:equation draw:name="f0" draw:formula="logwidth/2"/>
-            <draw:equation draw:name="f1" draw:formula="logheight/2"/>
-            <draw:equation draw:name="f2" draw:formula="logheight"/>
-            <draw:equation draw:name="f3" draw:formula="logwidth"/>
-          </draw:enhanced-geometry>
-        </draw:custom-shape>
-        <draw:custom-shape draw:name="Shape 9" draw:style-name="gr16" draw:text-style-name="P16" draw:layer="layout" svg:width="2.283cm" svg:height="0.505cm" svg:x="19.253cm" svg:y="13.411cm">
-          <text:p/>
-          <draw:enhanced-geometry draw:mirror-horizontal="false" draw:mirror-vertical="false" draw:glue-points="?f8 0 0 ?f9 ?f8 ?f10 ?f11 ?f9" draw:text-areas="?f5 ?f5 ?f6 ?f7" svg:viewBox="0 0 0 0" draw:type="ooxml-roundRect" draw:modifiers="50000" draw:enhanced-path="M 0 ?f2 L ?f3 0 L ?f11 ?f4 L ?f2 ?f10 Z N" drawooo:enhanced-path="M 0 ?f2 G ?f2 ?f2 ?f12 ?f13 L ?f3 0 G ?f2 ?f2 ?f14 ?f15 L ?f11 ?f4 G ?f2 ?f2 ?f16 ?f17 L ?f2 ?f10 G ?f2 ?f2 ?f18 ?f19 Z N">
+          <draw:enhanced-geometry draw:mirror-horizontal="false" draw:mirror-vertical="false" svg:viewBox="0 0 0 0" draw:glue-points="?f0 0 0 ?f1 ?f0 ?f2 ?f3 ?f1" draw:text-areas="0 0 ?f3 ?f2" draw:type="ooxml-rect" draw:enhanced-path="M 0 0 L ?f3 0 ?f3 ?f2 0 ?f2 Z N">
+            <draw:equation draw:name="f0" draw:formula="logwidth/2"/>
+            <draw:equation draw:name="f1" draw:formula="logheight/2"/>
+            <draw:equation draw:name="f2" draw:formula="logheight"/>
+            <draw:equation draw:name="f3" draw:formula="logwidth"/>
+          </draw:enhanced-geometry>
+        </draw:custom-shape>
+        <draw:custom-shape draw:name="Shape 9" draw:style-name="gr16" draw:text-style-name="P18" draw:layer="layout" svg:width="2.283cm" svg:height="0.505cm" svg:x="19.253cm" svg:y="13.411cm">
+          <text:p/>
+          <draw:enhanced-geometry draw:mirror-horizontal="false" draw:mirror-vertical="false" svg:viewBox="0 0 0 0" draw:glue-points="?f8 0 0 ?f9 ?f8 ?f10 ?f11 ?f9" draw:text-areas="?f5 ?f5 ?f6 ?f7" draw:type="ooxml-roundRect" draw:modifiers="50000" draw:enhanced-path="M 0 ?f2 L ?f3 0 L ?f11 ?f4 L ?f2 ?f10 Z N" drawooo:enhanced-path="M 0 ?f2 G ?f2 ?f2 ?f12 ?f13 L ?f3 0 G ?f2 ?f2 ?f14 ?f15 L ?f11 ?f4 G ?f2 ?f2 ?f16 ?f17 L ?f2 ?f10 G ?f2 ?f2 ?f18 ?f19 Z N">
             <draw:equation draw:name="f0" draw:formula="if(0-$0 ,0,if(50000-$0 ,$0 ,50000))"/>
             <draw:equation draw:name="f1" draw:formula="min(logwidth,logheight)"/>
             <draw:equation draw:name="f2" draw:formula="?f1 *?f0 /100000"/>
@@ -6063,34 +6134,23 @@
             <draw:equation draw:name="f17" draw:formula="(5400000)/60000.0"/>
             <draw:equation draw:name="f18" draw:formula="(5400000)/60000.0"/>
             <draw:equation draw:name="f19" draw:formula="(5400000)/60000.0"/>
-            <draw:handle draw:handle-position="?f2 0" draw:handle-position-x="?f2" draw:handle-position-y="0" draw:handle-range-x-maximum="50000" draw:handle-range-x-minimum="0"/>
-          </draw:enhanced-geometry>
-        </draw:custom-shape>
-        <draw:custom-shape draw:name="Text 10" draw:style-name="gr67" draw:text-style-name="P14" draw:layer="layout" svg:width="2.283cm" svg:height="0.505cm" svg:x="19.253cm" svg:y="13.411cm">
-          <text:p text:style-name="P13">
-            <text:span text:style-name="T11">P</text:span>
-            <text:span text:style-name="T11">r</text:span>
-            <text:span text:style-name="T11">e</text:span>
-            <text:span text:style-name="T11">s</text:span>
-            <text:span text:style-name="T11">c</text:span>
-            <text:span text:style-name="T11">r</text:span>
-            <text:span text:style-name="T11">i</text:span>
-            <text:span text:style-name="T11">p</text:span>
-            <text:span text:style-name="T11">t</text:span>
-            <text:span text:style-name="T11">i</text:span>
-            <text:span text:style-name="T11">v</text:span>
-            <text:span text:style-name="T11">e</text:span>
-          </text:p>
-          <draw:enhanced-geometry draw:mirror-horizontal="false" draw:mirror-vertical="false" draw:glue-points="?f0 0 0 ?f1 ?f0 ?f2 ?f3 ?f1" draw:text-areas="0 0 ?f3 ?f2" svg:viewBox="0 0 0 0" draw:type="ooxml-rect" draw:enhanced-path="M 0 0 L ?f3 0 ?f3 ?f2 0 ?f2 Z N">
-            <draw:equation draw:name="f0" draw:formula="logwidth/2"/>
-            <draw:equation draw:name="f1" draw:formula="logheight/2"/>
-            <draw:equation draw:name="f2" draw:formula="logheight"/>
-            <draw:equation draw:name="f3" draw:formula="logwidth"/>
-          </draw:enhanced-geometry>
-        </draw:custom-shape>
-        <draw:custom-shape draw:name="Shape 11" draw:style-name="gr16" draw:text-style-name="P16" draw:layer="layout" svg:width="2.283cm" svg:height="0.505cm" svg:x="21.768cm" svg:y="13.411cm">
-          <text:p/>
-          <draw:enhanced-geometry draw:mirror-horizontal="false" draw:mirror-vertical="false" draw:glue-points="?f8 0 0 ?f9 ?f8 ?f10 ?f11 ?f9" draw:text-areas="?f5 ?f5 ?f6 ?f7" svg:viewBox="0 0 0 0" draw:type="ooxml-roundRect" draw:modifiers="50000" draw:enhanced-path="M 0 ?f2 L ?f3 0 L ?f11 ?f4 L ?f2 ?f10 Z N" drawooo:enhanced-path="M 0 ?f2 G ?f2 ?f2 ?f12 ?f13 L ?f3 0 G ?f2 ?f2 ?f14 ?f15 L ?f11 ?f4 G ?f2 ?f2 ?f16 ?f17 L ?f2 ?f10 G ?f2 ?f2 ?f18 ?f19 Z N">
+            <draw:handle draw:handle-range-x-maximum="50000" draw:handle-range-x-minimum="0" draw:handle-position="?f2 0" draw:handle-position-x="?f2" draw:handle-position-y="0"/>
+          </draw:enhanced-geometry>
+        </draw:custom-shape>
+        <draw:custom-shape draw:name="Text 10" draw:style-name="gr67" draw:text-style-name="P16" draw:layer="layout" svg:width="2.283cm" svg:height="0.505cm" svg:x="19.253cm" svg:y="13.411cm">
+          <text:p text:style-name="P15">
+            <text:span text:style-name="T11">Prescriptive</text:span>
+          </text:p>
+          <draw:enhanced-geometry draw:mirror-horizontal="false" draw:mirror-vertical="false" svg:viewBox="0 0 0 0" draw:glue-points="?f0 0 0 ?f1 ?f0 ?f2 ?f3 ?f1" draw:text-areas="0 0 ?f3 ?f2" draw:type="ooxml-rect" draw:enhanced-path="M 0 0 L ?f3 0 ?f3 ?f2 0 ?f2 Z N">
+            <draw:equation draw:name="f0" draw:formula="logwidth/2"/>
+            <draw:equation draw:name="f1" draw:formula="logheight/2"/>
+            <draw:equation draw:name="f2" draw:formula="logheight"/>
+            <draw:equation draw:name="f3" draw:formula="logwidth"/>
+          </draw:enhanced-geometry>
+        </draw:custom-shape>
+        <draw:custom-shape draw:name="Shape 11" draw:style-name="gr16" draw:text-style-name="P18" draw:layer="layout" svg:width="2.283cm" svg:height="0.505cm" svg:x="21.768cm" svg:y="13.411cm">
+          <text:p/>
+          <draw:enhanced-geometry draw:mirror-horizontal="false" draw:mirror-vertical="false" svg:viewBox="0 0 0 0" draw:glue-points="?f8 0 0 ?f9 ?f8 ?f10 ?f11 ?f9" draw:text-areas="?f5 ?f5 ?f6 ?f7" draw:type="ooxml-roundRect" draw:modifiers="50000" draw:enhanced-path="M 0 ?f2 L ?f3 0 L ?f11 ?f4 L ?f2 ?f10 Z N" drawooo:enhanced-path="M 0 ?f2 G ?f2 ?f2 ?f12 ?f13 L ?f3 0 G ?f2 ?f2 ?f14 ?f15 L ?f11 ?f4 G ?f2 ?f2 ?f16 ?f17 L ?f2 ?f10 G ?f2 ?f2 ?f18 ?f19 Z N">
             <draw:equation draw:name="f0" draw:formula="if(0-$0 ,0,if(50000-$0 ,$0 ,50000))"/>
             <draw:equation draw:name="f1" draw:formula="min(logwidth,logheight)"/>
             <draw:equation draw:name="f2" draw:formula="?f1 *?f0 /100000"/>
@@ -6111,35 +6171,35 @@
             <draw:equation draw:name="f17" draw:formula="(5400000)/60000.0"/>
             <draw:equation draw:name="f18" draw:formula="(5400000)/60000.0"/>
             <draw:equation draw:name="f19" draw:formula="(5400000)/60000.0"/>
-            <draw:handle draw:handle-position="?f2 0" draw:handle-position-x="?f2" draw:handle-position-y="0" draw:handle-range-x-maximum="50000" draw:handle-range-x-minimum="0"/>
-          </draw:enhanced-geometry>
-        </draw:custom-shape>
-        <draw:custom-shape draw:name="Text 12" draw:style-name="gr68" draw:text-style-name="P14" draw:layer="layout" svg:width="2.283cm" svg:height="0.505cm" svg:x="21.768cm" svg:y="13.411cm">
-          <text:p text:style-name="P13">
+            <draw:handle draw:handle-range-x-maximum="50000" draw:handle-range-x-minimum="0" draw:handle-position="?f2 0" draw:handle-position-x="?f2" draw:handle-position-y="0"/>
+          </draw:enhanced-geometry>
+        </draw:custom-shape>
+        <draw:custom-shape draw:name="Text 12" draw:style-name="gr68" draw:text-style-name="P16" draw:layer="layout" svg:width="2.283cm" svg:height="0.505cm" svg:x="21.768cm" svg:y="13.411cm">
+          <text:p text:style-name="P15">
             <text:span text:style-name="T11">Predictive</text:span>
           </text:p>
-          <draw:enhanced-geometry draw:mirror-horizontal="false" draw:mirror-vertical="false" draw:glue-points="?f0 0 0 ?f1 ?f0 ?f2 ?f3 ?f1" draw:text-areas="0 0 ?f3 ?f2" svg:viewBox="0 0 0 0" draw:type="ooxml-rect" draw:enhanced-path="M 0 0 L ?f3 0 ?f3 ?f2 0 ?f2 Z N">
-            <draw:equation draw:name="f0" draw:formula="logwidth/2"/>
-            <draw:equation draw:name="f1" draw:formula="logheight/2"/>
-            <draw:equation draw:name="f2" draw:formula="logheight"/>
-            <draw:equation draw:name="f3" draw:formula="logwidth"/>
-          </draw:enhanced-geometry>
-        </draw:custom-shape>
-        <draw:frame draw:name="Chart 0" draw:style-name="gr69" draw:text-style-name="P6" draw:layer="layout" svg:width="11.681cm" svg:height="6.474cm" svg:x="1.016cm" svg:y="3.505cm">
+          <draw:enhanced-geometry draw:mirror-horizontal="false" draw:mirror-vertical="false" svg:viewBox="0 0 0 0" draw:glue-points="?f0 0 0 ?f1 ?f0 ?f2 ?f3 ?f1" draw:text-areas="0 0 ?f3 ?f2" draw:type="ooxml-rect" draw:enhanced-path="M 0 0 L ?f3 0 ?f3 ?f2 0 ?f2 Z N">
+            <draw:equation draw:name="f0" draw:formula="logwidth/2"/>
+            <draw:equation draw:name="f1" draw:formula="logheight/2"/>
+            <draw:equation draw:name="f2" draw:formula="logheight"/>
+            <draw:equation draw:name="f3" draw:formula="logwidth"/>
+          </draw:enhanced-geometry>
+        </draw:custom-shape>
+        <draw:frame draw:name="Chart 0" draw:style-name="gr69" draw:text-style-name="P8" draw:layer="layout" svg:width="11.681cm" svg:height="6.474cm" svg:x="1.016cm" svg:y="3.505cm">
           <draw:object xlink:href="./Object 1" xlink:type="simple" xlink:show="embed" xlink:actuate="onLoad">
             <loext:p/>
           </draw:object>
           <draw:image xlink:href="./ObjectReplacements/Object 1" xlink:type="simple" xlink:show="embed" xlink:actuate="onLoad"/>
         </draw:frame>
-        <draw:frame draw:name="Chart 1" draw:style-name="gr69" draw:text-style-name="P6" draw:layer="layout" svg:width="11.427cm" svg:height="6.474cm" svg:x="12.954cm" svg:y="3.505cm">
+        <draw:frame draw:name="Chart 1" draw:style-name="gr69" draw:text-style-name="P8" draw:layer="layout" svg:width="11.427cm" svg:height="6.474cm" svg:x="12.954cm" svg:y="3.505cm">
           <draw:object xlink:href="./Object 2" xlink:type="simple" xlink:show="embed" xlink:actuate="onLoad">
             <loext:p/>
           </draw:object>
           <draw:image xlink:href="./ObjectReplacements/Object 2" xlink:type="simple" xlink:show="embed" xlink:actuate="onLoad"/>
         </draw:frame>
-        <draw:custom-shape draw:name="Shape 13" draw:style-name="gr20" draw:text-style-name="P16" draw:layer="layout" svg:width="11.173cm" svg:height="2.842cm" svg:x="1.27cm" svg:y="10.211cm">
-          <text:p/>
-          <draw:enhanced-geometry draw:mirror-horizontal="false" draw:mirror-vertical="false" draw:glue-points="?f8 0 0 ?f9 ?f8 ?f10 ?f11 ?f9" draw:text-areas="?f5 ?f5 ?f6 ?f7" svg:viewBox="0 0 0 0" draw:type="ooxml-roundRect" draw:modifiers="7143" draw:enhanced-path="M 0 ?f2 L ?f3 0 L ?f11 ?f4 L ?f2 ?f10 Z N" drawooo:enhanced-path="M 0 ?f2 G ?f2 ?f2 ?f12 ?f13 L ?f3 0 G ?f2 ?f2 ?f14 ?f15 L ?f11 ?f4 G ?f2 ?f2 ?f16 ?f17 L ?f2 ?f10 G ?f2 ?f2 ?f18 ?f19 Z N">
+        <draw:custom-shape draw:name="Shape 13" draw:style-name="gr20" draw:text-style-name="P18" draw:layer="layout" svg:width="11.173cm" svg:height="2.842cm" svg:x="1.27cm" svg:y="10.211cm">
+          <text:p/>
+          <draw:enhanced-geometry draw:mirror-horizontal="false" draw:mirror-vertical="false" svg:viewBox="0 0 0 0" draw:glue-points="?f8 0 0 ?f9 ?f8 ?f10 ?f11 ?f9" draw:text-areas="?f5 ?f5 ?f6 ?f7" draw:type="ooxml-roundRect" draw:modifiers="7143" draw:enhanced-path="M 0 ?f2 L ?f3 0 L ?f11 ?f4 L ?f2 ?f10 Z N" drawooo:enhanced-path="M 0 ?f2 G ?f2 ?f2 ?f12 ?f13 L ?f3 0 G ?f2 ?f2 ?f14 ?f15 L ?f11 ?f4 G ?f2 ?f2 ?f16 ?f17 L ?f2 ?f10 G ?f2 ?f2 ?f18 ?f19 Z N">
             <draw:equation draw:name="f0" draw:formula="if(0-$0 ,0,if(50000-$0 ,$0 ,50000))"/>
             <draw:equation draw:name="f1" draw:formula="min(logwidth,logheight)"/>
             <draw:equation draw:name="f2" draw:formula="?f1 *?f0 /100000"/>
@@ -6160,49 +6220,34 @@
             <draw:equation draw:name="f17" draw:formula="(5400000)/60000.0"/>
             <draw:equation draw:name="f18" draw:formula="(5400000)/60000.0"/>
             <draw:equation draw:name="f19" draw:formula="(5400000)/60000.0"/>
-            <draw:handle draw:handle-position="?f2 0" draw:handle-position-x="?f2" draw:handle-position-y="0" draw:handle-range-x-maximum="50000" draw:handle-range-x-minimum="0"/>
-          </draw:enhanced-geometry>
-        </draw:custom-shape>
-        <draw:custom-shape draw:name="Text 14" draw:style-name="gr70" draw:text-style-name="P29" draw:layer="layout" svg:width="10.411cm" svg:height="2.435cm" svg:x="1.651cm" svg:y="10.414cm">
-          <text:p text:style-name="P28">
+            <draw:handle draw:handle-range-x-maximum="50000" draw:handle-range-x-minimum="0" draw:handle-position="?f2 0" draw:handle-position-x="?f2" draw:handle-position-y="0"/>
+          </draw:enhanced-geometry>
+        </draw:custom-shape>
+        <draw:custom-shape draw:name="Text 14" draw:style-name="gr70" draw:text-style-name="P31" draw:layer="layout" svg:width="10.411cm" svg:height="2.435cm" svg:x="1.651cm" svg:y="10.414cm">
+          <text:p text:style-name="P30">
             <text:span text:style-name="T22">
               FINDING 
               <text:s/>
             </text:span>
-            <text:span text:style-name="T23">73% are aged </text:span>
-            <text:span text:style-name="T23">69+; the 69–</text:span>
-            <text:span text:style-name="T23">89 bands hold </text:span>
-            <text:span text:style-name="T23">68% of </text:span>
-            <text:span text:style-name="T23">patients, and </text:span>
-            <text:span text:style-name="T23">women </text:span>
-            <text:span text:style-name="T23">outnumber </text:span>
-            <text:span text:style-name="T23">men there.</text:span>
-          </text:p>
-          <text:p text:style-name="P28">
+            <text:span text:style-name="T23">73% are aged 69+; the 69–89 bands hold 68% of patients, and women outnumber men there.</text:span>
+          </text:p>
+          <text:p text:style-name="P30">
             <text:span text:style-name="T22">
               SO WHAT 
               <text:s/>
             </text:span>
-            <text:span text:style-name="T23">Care must be </text:span>
-            <text:span text:style-name="T23">built for </text:span>
-            <text:span text:style-name="T23">older, often </text:span>
-            <text:span text:style-name="T23">frail patients: </text:span>
-            <text:span text:style-name="T23">family </text:span>
-            <text:span text:style-name="T23">support, </text:span>
-            <text:span text:style-name="T23">multiple </text:span>
-            <text:span text:style-name="T23">medicines, </text:span>
-            <text:span text:style-name="T23">mobility.</text:span>
-          </text:p>
-          <draw:enhanced-geometry draw:mirror-horizontal="false" draw:mirror-vertical="false" draw:glue-points="?f0 0 0 ?f1 ?f0 ?f2 ?f3 ?f1" draw:text-areas="0 0 ?f3 ?f2" svg:viewBox="0 0 0 0" draw:type="ooxml-rect" draw:enhanced-path="M 0 0 L ?f3 0 ?f3 ?f2 0 ?f2 Z N">
-            <draw:equation draw:name="f0" draw:formula="logwidth/2"/>
-            <draw:equation draw:name="f1" draw:formula="logheight/2"/>
-            <draw:equation draw:name="f2" draw:formula="logheight"/>
-            <draw:equation draw:name="f3" draw:formula="logwidth"/>
-          </draw:enhanced-geometry>
-        </draw:custom-shape>
-        <draw:custom-shape draw:name="Shape 15" draw:style-name="gr20" draw:text-style-name="P16" draw:layer="layout" svg:width="11.173cm" svg:height="2.842cm" svg:x="12.954cm" svg:y="10.211cm">
-          <text:p/>
-          <draw:enhanced-geometry draw:mirror-horizontal="false" draw:mirror-vertical="false" draw:glue-points="?f8 0 0 ?f9 ?f8 ?f10 ?f11 ?f9" draw:text-areas="?f5 ?f5 ?f6 ?f7" svg:viewBox="0 0 0 0" draw:type="ooxml-roundRect" draw:modifiers="7143" draw:enhanced-path="M 0 ?f2 L ?f3 0 L ?f11 ?f4 L ?f2 ?f10 Z N" drawooo:enhanced-path="M 0 ?f2 G ?f2 ?f2 ?f12 ?f13 L ?f3 0 G ?f2 ?f2 ?f14 ?f15 L ?f11 ?f4 G ?f2 ?f2 ?f16 ?f17 L ?f2 ?f10 G ?f2 ?f2 ?f18 ?f19 Z N">
+            <text:span text:style-name="T23">Care must be built for older, often frail patients: family support, multiple medicines, mobility.</text:span>
+          </text:p>
+          <draw:enhanced-geometry draw:mirror-horizontal="false" draw:mirror-vertical="false" svg:viewBox="0 0 0 0" draw:glue-points="?f0 0 0 ?f1 ?f0 ?f2 ?f3 ?f1" draw:text-areas="0 0 ?f3 ?f2" draw:type="ooxml-rect" draw:enhanced-path="M 0 0 L ?f3 0 ?f3 ?f2 0 ?f2 Z N">
+            <draw:equation draw:name="f0" draw:formula="logwidth/2"/>
+            <draw:equation draw:name="f1" draw:formula="logheight/2"/>
+            <draw:equation draw:name="f2" draw:formula="logheight"/>
+            <draw:equation draw:name="f3" draw:formula="logwidth"/>
+          </draw:enhanced-geometry>
+        </draw:custom-shape>
+        <draw:custom-shape draw:name="Shape 15" draw:style-name="gr20" draw:text-style-name="P18" draw:layer="layout" svg:width="11.173cm" svg:height="2.842cm" svg:x="12.954cm" svg:y="10.211cm">
+          <text:p/>
+          <draw:enhanced-geometry draw:mirror-horizontal="false" draw:mirror-vertical="false" svg:viewBox="0 0 0 0" draw:glue-points="?f8 0 0 ?f9 ?f8 ?f10 ?f11 ?f9" draw:text-areas="?f5 ?f5 ?f6 ?f7" draw:type="ooxml-roundRect" draw:modifiers="7143" draw:enhanced-path="M 0 ?f2 L ?f3 0 L ?f11 ?f4 L ?f2 ?f10 Z N" drawooo:enhanced-path="M 0 ?f2 G ?f2 ?f2 ?f12 ?f13 L ?f3 0 G ?f2 ?f2 ?f14 ?f15 L ?f11 ?f4 G ?f2 ?f2 ?f16 ?f17 L ?f2 ?f10 G ?f2 ?f2 ?f18 ?f19 Z N">
             <draw:equation draw:name="f0" draw:formula="if(0-$0 ,0,if(50000-$0 ,$0 ,50000))"/>
             <draw:equation draw:name="f1" draw:formula="min(logwidth,logheight)"/>
             <draw:equation draw:name="f2" draw:formula="?f1 *?f0 /100000"/>
@@ -6223,40 +6268,25 @@
             <draw:equation draw:name="f17" draw:formula="(5400000)/60000.0"/>
             <draw:equation draw:name="f18" draw:formula="(5400000)/60000.0"/>
             <draw:equation draw:name="f19" draw:formula="(5400000)/60000.0"/>
-            <draw:handle draw:handle-position="?f2 0" draw:handle-position-x="?f2" draw:handle-position-y="0" draw:handle-range-x-maximum="50000" draw:handle-range-x-minimum="0"/>
-          </draw:enhanced-geometry>
-        </draw:custom-shape>
-        <draw:custom-shape draw:name="Text 16" draw:style-name="gr71" draw:text-style-name="P29" draw:layer="layout" svg:width="10.411cm" svg:height="2.435cm" svg:x="13.335cm" svg:y="10.414cm">
-          <text:p text:style-name="P28">
+            <draw:handle draw:handle-range-x-maximum="50000" draw:handle-range-x-minimum="0" draw:handle-position="?f2 0" draw:handle-position-x="?f2" draw:handle-position-y="0"/>
+          </draw:enhanced-geometry>
+        </draw:custom-shape>
+        <draw:custom-shape draw:name="Text 16" draw:style-name="gr71" draw:text-style-name="P31" draw:layer="layout" svg:width="10.411cm" svg:height="2.435cm" svg:x="13.335cm" svg:y="10.414cm">
+          <text:p text:style-name="P30">
             <text:span text:style-name="T22">
               FINDING 
               <text:s/>
             </text:span>
-            <text:span text:style-name="T23">1 </text:span>
-            <text:span text:style-name="T23">in 4 patients </text:span>
-            <text:span text:style-name="T23">(25.2%) is </text:span>
-            <text:span text:style-name="T23">underweight, </text:span>
-            <text:span text:style-name="T23">rising to </text:span>
-            <text:span text:style-name="T23">36.6% in </text:span>
-            <text:span text:style-name="T23">those aged </text:span>
-            <text:span text:style-name="T23">89+.</text:span>
-          </text:p>
-          <text:p text:style-name="P28">
+            <text:span text:style-name="T23">1 in 4 patients (25.2%) is underweight, rising to 36.6% in those aged 89+.</text:span>
+          </text:p>
+          <text:p text:style-name="P30">
             <text:span text:style-name="T22">
               SO WHAT 
               <text:s/>
             </text:span>
-            <text:span text:style-name="T23">Malnutrition </text:span>
-            <text:span text:style-name="T23">is common </text:span>
-            <text:span text:style-name="T23">and easy to </text:span>
-            <text:span text:style-name="T23">miss; </text:span>
-            <text:span text:style-name="T23">nutrition </text:span>
-            <text:span text:style-name="T23">screening </text:span>
-            <text:span text:style-name="T23">belongs in </text:span>
-            <text:span text:style-name="T23">every elderly </text:span>
-            <text:span text:style-name="T23">admission.</text:span>
-          </text:p>
-          <draw:enhanced-geometry draw:mirror-horizontal="false" draw:mirror-vertical="false" draw:glue-points="?f0 0 0 ?f1 ?f0 ?f2 ?f3 ?f1" draw:text-areas="0 0 ?f3 ?f2" svg:viewBox="0 0 0 0" draw:type="ooxml-rect" draw:enhanced-path="M 0 0 L ?f3 0 ?f3 ?f2 0 ?f2 Z N">
+            <text:span text:style-name="T23">Malnutrition is common and easy to miss; nutrition screening belongs in every elderly admission.</text:span>
+          </text:p>
+          <draw:enhanced-geometry draw:mirror-horizontal="false" draw:mirror-vertical="false" svg:viewBox="0 0 0 0" draw:glue-points="?f0 0 0 ?f1 ?f0 ?f2 ?f3 ?f1" draw:text-areas="0 0 ?f3 ?f2" draw:type="ooxml-rect" draw:enhanced-path="M 0 0 L ?f3 0 ?f3 ?f2 0 ?f2 Z N">
             <draw:equation draw:name="f0" draw:formula="logwidth/2"/>
             <draw:equation draw:name="f1" draw:formula="logheight/2"/>
             <draw:equation draw:name="f2" draw:formula="logheight"/>
@@ -6265,106 +6295,16 @@
         </draw:custom-shape>
         <presentation:notes draw:style-name="dp2">
           <draw:page-thumbnail draw:name="PlaceHolder 1" draw:style-name="gr10" draw:layer="layout" svg:width="15.237cm" svg:height="8.57cm" svg:x="1.905cm" svg:y="3.175cm" draw:page-number="3" presentation:class="page"/>
-          <draw:frame draw:name="PlaceHolder 2" presentation:style-name="pr1" draw:text-style-name="P9" draw:layer="layout" svg:width="15.237cm" svg:height="9.998cm" svg:x="1.905cm" svg:y="12.224cm" presentation:class="notes" presentation:user-transformed="true">
+          <draw:frame draw:name="PlaceHolder 2" presentation:style-name="pr1" draw:text-style-name="P11" draw:layer="layout" svg:width="15.237cm" svg:height="9.998cm" svg:x="1.905cm" svg:y="12.224cm" presentation:class="notes" presentation:user-transformed="true">
             <draw:text-box>
-              <text:p text:style-name="P8">
-                <text:span text:style-name="T6">Left: </text:span>
-                <text:span text:style-name="T6">num</text:span>
-                <text:span text:style-name="T6">ber </text:span>
-                <text:span text:style-name="T6">of </text:span>
-                <text:span text:style-name="T6">patie</text:span>
-                <text:span text:style-name="T6">nts </text:span>
-                <text:span text:style-name="T6">in </text:span>
-                <text:span text:style-name="T6">each </text:span>
-                <text:span text:style-name="T6">age </text:span>
-                <text:span text:style-name="T6">grou</text:span>
-                <text:span text:style-name="T6">p by </text:span>
-                <text:span text:style-name="T6">gend</text:span>
-                <text:span text:style-name="T6">er </text:span>
-                <text:span text:style-name="T6">(pink </text:span>
-                <text:span text:style-name="T6">= </text:span>
-                <text:span text:style-name="T6">fema</text:span>
-                <text:span text:style-name="T6">le, </text:span>
-                <text:span text:style-name="T6">blue </text:span>
-                <text:span text:style-name="T6">= </text:span>
-                <text:span text:style-name="T6">male</text:span>
-                <text:span text:style-name="T6">). </text:span>
-                <text:span text:style-name="T6">The </text:span>
-                <text:span text:style-name="T6">bulk </text:span>
-                <text:span text:style-name="T6">of </text:span>
-                <text:span text:style-name="T6">the </text:span>
-                <text:span text:style-name="T6">coho</text:span>
-                <text:span text:style-name="T6">rt is </text:span>
-                <text:span text:style-name="T6">69–</text:span>
-                <text:span text:style-name="T6">89, </text:span>
-                <text:span text:style-name="T6">wher</text:span>
-                <text:span text:style-name="T6">e </text:span>
-                <text:span text:style-name="T6">wom</text:span>
-                <text:span text:style-name="T6">en </text:span>
-                <text:span text:style-name="T6">outn</text:span>
-                <text:span text:style-name="T6">umb</text:span>
-                <text:span text:style-name="T6">er </text:span>
-                <text:span text:style-name="T6">men. </text:span>
-                <text:span text:style-name="T6">Righ</text:span>
-                <text:span text:style-name="T6">t: </text:span>
-                <text:span text:style-name="T6">shar</text:span>
-                <text:span text:style-name="T6">e of </text:span>
-                <text:span text:style-name="T6">patie</text:span>
-                <text:span text:style-name="T6">nts </text:span>
-                <text:span text:style-name="T6">who </text:span>
-                <text:span text:style-name="T6">are </text:span>
-                <text:span text:style-name="T6">unde</text:span>
-                <text:span text:style-name="T6">rwei</text:span>
-                <text:span text:style-name="T6">ght </text:span>
-                <text:span text:style-name="T6">in </text:span>
-                <text:span text:style-name="T6">each </text:span>
-                <text:span text:style-name="T6">age </text:span>
-                <text:span text:style-name="T6">grou</text:span>
-                <text:span text:style-name="T6">p; it </text:span>
-                <text:span text:style-name="T6">is </text:span>
-                <text:span text:style-name="T6">high</text:span>
-                <text:span text:style-name="T6">est </text:span>
-                <text:span text:style-name="T6">in </text:span>
-                <text:span text:style-name="T6">the </text:span>
-                <text:span text:style-name="T6">olde</text:span>
-                <text:span text:style-name="T6">st </text:span>
-                <text:span text:style-name="T6">grou</text:span>
-                <text:span text:style-name="T6">p </text:span>
-                <text:span text:style-name="T6">(the </text:span>
-                <text:span text:style-name="T6">21–</text:span>
-                <text:span text:style-name="T6">29 </text:span>
-                <text:span text:style-name="T6">bar </text:span>
-                <text:span text:style-name="T6">is </text:span>
-                <text:span text:style-name="T6">0% </text:span>
-                <text:span text:style-name="T6">but </text:span>
-                <text:span text:style-name="T6">has </text:span>
-                <text:span text:style-name="T6">only </text:span>
-                <text:span text:style-name="T6">4 </text:span>
-                <text:span text:style-name="T6">patie</text:span>
-                <text:span text:style-name="T6">nts). </text:span>
-                <text:span text:style-name="T6">This </text:span>
-                <text:span text:style-name="T6">frail, </text:span>
-                <text:span text:style-name="T6">elder</text:span>
-                <text:span text:style-name="T6">ly </text:span>
-                <text:span text:style-name="T6">profil</text:span>
-                <text:span text:style-name="T6">e </text:span>
-                <text:span text:style-name="T6">shap</text:span>
-                <text:span text:style-name="T6">es </text:span>
-                <text:span text:style-name="T6">ever</text:span>
-                <text:span text:style-name="T6">y </text:span>
-                <text:span text:style-name="T6">reco</text:span>
-                <text:span text:style-name="T6">mme</text:span>
-                <text:span text:style-name="T6">ndati</text:span>
-                <text:span text:style-name="T6">on </text:span>
-                <text:span text:style-name="T6">that </text:span>
-                <text:span text:style-name="T6">follo</text:span>
-                <text:span text:style-name="T6">ws.</text:span>
+              <text:p text:style-name="P10">
+                <text:span text:style-name="T6">Left: number of patients in each age group by gender (pink = female, blue = male). The bulk of the cohort is 69–89, where women outnumber men. Right: share of patients who are underweight in each age group; it is highest in the oldest group (the 21–29 bar is 0% but has only 4 patients). This frail, elderly profile shapes every recommendation that follows.</text:span>
               </text:p>
             </draw:text-box>
           </draw:frame>
-          <draw:frame draw:name="PlaceHolder 3" presentation:style-name="pr2" draw:text-style-name="P11" draw:layer="layout" svg:width="8.252cm" svg:height="1.271cm" svg:x="10.791cm" svg:y="24.126cm" presentation:class="page-number" presentation:user-transformed="true">
+          <draw:frame draw:name="PlaceHolder 3" presentation:style-name="pr2" draw:text-style-name="P13" draw:layer="layout" svg:width="8.252cm" svg:height="1.271cm" svg:x="10.791cm" svg:y="24.126cm" presentation:class="page-number" presentation:user-transformed="true">
             <draw:text-box>
-              <text:p text:style-name="P10">
+              <text:p text:style-name="P12">
                 <text:span text:style-name="T7">
                   <text:page-number>&lt;number&gt;</text:page-number>
                 </text:span>
@@ -6374,9 +6314,9 @@
         </presentation:notes>
       </draw:page>
       <draw:page draw:name="page4" draw:style-name="dp5" draw:master-page-name="DEFAULT">
-        <draw:custom-shape draw:name="Shape 0" draw:style-name="gr59" draw:text-style-name="P17" draw:layer="layout" svg:width="3.426cm" svg:height="0.683cm" svg:x="1.27cm" svg:y="0.635cm">
-          <text:p/>
-          <draw:enhanced-geometry draw:mirror-horizontal="false" draw:mirror-vertical="false" draw:glue-points="?f8 0 0 ?f9 ?f8 ?f10 ?f11 ?f9" draw:text-areas="?f5 ?f5 ?f6 ?f7" svg:viewBox="0 0 0 0" draw:type="ooxml-roundRect" draw:modifiers="48148" draw:enhanced-path="M 0 ?f2 L ?f3 0 L ?f11 ?f4 L ?f2 ?f10 Z N" drawooo:enhanced-path="M 0 ?f2 G ?f2 ?f2 ?f12 ?f13 L ?f3 0 G ?f2 ?f2 ?f14 ?f15 L ?f11 ?f4 G ?f2 ?f2 ?f16 ?f17 L ?f2 ?f10 G ?f2 ?f2 ?f18 ?f19 Z N">
+        <draw:custom-shape draw:name="Shape 0" draw:style-name="gr59" draw:text-style-name="P19" draw:layer="layout" svg:width="3.426cm" svg:height="0.683cm" svg:x="1.27cm" svg:y="0.635cm">
+          <text:p/>
+          <draw:enhanced-geometry draw:mirror-horizontal="false" draw:mirror-vertical="false" svg:viewBox="0 0 0 0" draw:glue-points="?f8 0 0 ?f9 ?f8 ?f10 ?f11 ?f9" draw:text-areas="?f5 ?f5 ?f6 ?f7" draw:type="ooxml-roundRect" draw:modifiers="48148" draw:enhanced-path="M 0 ?f2 L ?f3 0 L ?f11 ?f4 L ?f2 ?f10 Z N" drawooo:enhanced-path="M 0 ?f2 G ?f2 ?f2 ?f12 ?f13 L ?f3 0 G ?f2 ?f2 ?f14 ?f15 L ?f11 ?f4 G ?f2 ?f2 ?f16 ?f17 L ?f2 ?f10 G ?f2 ?f2 ?f18 ?f19 Z N">
             <draw:equation draw:name="f0" draw:formula="if(0-$0 ,0,if(50000-$0 ,$0 ,50000))"/>
             <draw:equation draw:name="f1" draw:formula="min(logwidth,logheight)"/>
             <draw:equation draw:name="f2" draw:formula="?f1 *?f0 /100000"/>
@@ -6397,14 +6337,14 @@
             <draw:equation draw:name="f17" draw:formula="(5400000)/60000.0"/>
             <draw:equation draw:name="f18" draw:formula="(5400000)/60000.0"/>
             <draw:equation draw:name="f19" draw:formula="(5400000)/60000.0"/>
-            <draw:handle draw:handle-position="?f2 0" draw:handle-position-x="?f2" draw:handle-position-y="0" draw:handle-range-x-maximum="50000" draw:handle-range-x-minimum="0"/>
-          </draw:enhanced-geometry>
-        </draw:custom-shape>
-        <draw:custom-shape draw:name="Text 1" draw:style-name="gr72" draw:text-style-name="P14" draw:layer="layout" svg:width="3.426cm" svg:height="0.683cm" svg:x="1.27cm" svg:y="0.635cm">
-          <text:p text:style-name="P13">
+            <draw:handle draw:handle-range-x-maximum="50000" draw:handle-range-x-minimum="0" draw:handle-position="?f2 0" draw:handle-position-x="?f2" draw:handle-position-y="0"/>
+          </draw:enhanced-geometry>
+        </draw:custom-shape>
+        <draw:custom-shape draw:name="Text 1" draw:style-name="gr72" draw:text-style-name="P16" draw:layer="layout" svg:width="3.426cm" svg:height="0.683cm" svg:x="1.27cm" svg:y="0.635cm">
+          <text:p text:style-name="P15">
             <text:span text:style-name="T8">DESCRIPTIVE</text:span>
           </text:p>
-          <draw:enhanced-geometry draw:mirror-horizontal="false" draw:mirror-vertical="false" draw:glue-points="?f0 0 0 ?f1 ?f0 ?f2 ?f3 ?f1" draw:text-areas="0 0 ?f3 ?f2" svg:viewBox="0 0 0 0" draw:type="ooxml-rect" draw:enhanced-path="M 0 0 L ?f3 0 ?f3 ?f2 0 ?f2 Z N">
+          <draw:enhanced-geometry draw:mirror-horizontal="false" draw:mirror-vertical="false" svg:viewBox="0 0 0 0" draw:glue-points="?f0 0 0 ?f1 ?f0 ?f2 ?f3 ?f1" draw:text-areas="0 0 ?f3 ?f2" draw:type="ooxml-rect" draw:enhanced-path="M 0 0 L ?f3 0 ?f3 ?f2 0 ?f2 Z N">
             <draw:equation draw:name="f0" draw:formula="logwidth/2"/>
             <draw:equation draw:name="f1" draw:formula="logheight/2"/>
             <draw:equation draw:name="f2" draw:formula="logheight"/>
@@ -6415,7 +6355,7 @@
           <text:p text:style-name="P2">
             <text:span text:style-name="T20">What happened?</text:span>
           </text:p>
-          <draw:enhanced-geometry draw:mirror-horizontal="false" draw:mirror-vertical="false" draw:glue-points="?f0 0 0 ?f1 ?f0 ?f2 ?f3 ?f1" draw:text-areas="0 0 ?f3 ?f2" svg:viewBox="0 0 0 0" draw:type="ooxml-rect" draw:enhanced-path="M 0 0 L ?f3 0 ?f3 ?f2 0 ?f2 Z N">
+          <draw:enhanced-geometry draw:mirror-horizontal="false" draw:mirror-vertical="false" svg:viewBox="0 0 0 0" draw:glue-points="?f0 0 0 ?f1 ?f0 ?f2 ?f3 ?f1" draw:text-areas="0 0 ?f3 ?f2" draw:type="ooxml-rect" draw:enhanced-path="M 0 0 L ?f3 0 ?f3 ?f2 0 ?f2 Z N">
             <draw:equation draw:name="f0" draw:formula="logwidth/2"/>
             <draw:equation draw:name="f1" draw:formula="logheight/2"/>
             <draw:equation draw:name="f2" draw:formula="logheight"/>
@@ -6426,7 +6366,7 @@
           <text:p text:style-name="P2">
             <text:span text:style-name="T9">When Do Readmission and Death Happen?</text:span>
           </text:p>
-          <draw:enhanced-geometry draw:mirror-horizontal="false" draw:mirror-vertical="false" draw:glue-points="?f0 0 0 ?f1 ?f0 ?f2 ?f3 ?f1" draw:text-areas="0 0 ?f3 ?f2" svg:viewBox="0 0 0 0" draw:type="ooxml-rect" draw:enhanced-path="M 0 0 L ?f3 0 ?f3 ?f2 0 ?f2 Z N">
+          <draw:enhanced-geometry draw:mirror-horizontal="false" draw:mirror-vertical="false" svg:viewBox="0 0 0 0" draw:glue-points="?f0 0 0 ?f1 ?f0 ?f2 ?f3 ?f1" draw:text-areas="0 0 ?f3 ?f2" draw:type="ooxml-rect" draw:enhanced-path="M 0 0 L ?f3 0 ?f3 ?f2 0 ?f2 Z N">
             <draw:equation draw:name="f0" draw:formula="logwidth/2"/>
             <draw:equation draw:name="f1" draw:formula="logheight/2"/>
             <draw:equation draw:name="f2" draw:formula="logheight"/>
@@ -6435,18 +6375,18 @@
         </draw:custom-shape>
         <draw:custom-shape draw:name="Text 4" draw:style-name="gr75" draw:text-style-name="P3" draw:layer="layout" svg:width="22.857cm" svg:height="0.657cm" svg:x="1.27cm" svg:y="2.692cm">
           <text:p text:style-name="P2">
-            <text:span text:style-name="T21">Dashboard charts: Readmission and mortality over time · Early mortality by consciousness</text:span>
-          </text:p>
-          <draw:enhanced-geometry draw:mirror-horizontal="false" draw:mirror-vertical="false" draw:glue-points="?f0 0 0 ?f1 ?f0 ?f2 ?f3 ?f1" draw:text-areas="0 0 ?f3 ?f2" svg:viewBox="0 0 0 0" draw:type="ooxml-rect" draw:enhanced-path="M 0 0 L ?f3 0 ?f3 ?f2 0 ?f2 Z N">
-            <draw:equation draw:name="f0" draw:formula="logwidth/2"/>
-            <draw:equation draw:name="f1" draw:formula="logheight/2"/>
-            <draw:equation draw:name="f2" draw:formula="logheight"/>
-            <draw:equation draw:name="f3" draw:formula="logwidth"/>
-          </draw:enhanced-geometry>
-        </draw:custom-shape>
-        <draw:custom-shape draw:name="Shape 5" draw:style-name="gr16" draw:text-style-name="P16" draw:layer="layout" svg:width="2.283cm" svg:height="0.505cm" svg:x="14.224cm" svg:y="13.411cm">
-          <text:p/>
-          <draw:enhanced-geometry draw:mirror-horizontal="false" draw:mirror-vertical="false" draw:glue-points="?f8 0 0 ?f9 ?f8 ?f10 ?f11 ?f9" draw:text-areas="?f5 ?f5 ?f6 ?f7" svg:viewBox="0 0 0 0" draw:type="ooxml-roundRect" draw:modifiers="50000" draw:enhanced-path="M 0 ?f2 L ?f3 0 L ?f11 ?f4 L ?f2 ?f10 Z N" drawooo:enhanced-path="M 0 ?f2 G ?f2 ?f2 ?f12 ?f13 L ?f3 0 G ?f2 ?f2 ?f14 ?f15 L ?f11 ?f4 G ?f2 ?f2 ?f16 ?f17 L ?f2 ?f10 G ?f2 ?f2 ?f18 ?f19 Z N">
+            <text:span text:style-name="T21"/>
+          </text:p>
+          <draw:enhanced-geometry draw:mirror-horizontal="false" draw:mirror-vertical="false" svg:viewBox="0 0 0 0" draw:glue-points="?f0 0 0 ?f1 ?f0 ?f2 ?f3 ?f1" draw:text-areas="0 0 ?f3 ?f2" draw:type="ooxml-rect" draw:enhanced-path="M 0 0 L ?f3 0 ?f3 ?f2 0 ?f2 Z N">
+            <draw:equation draw:name="f0" draw:formula="logwidth/2"/>
+            <draw:equation draw:name="f1" draw:formula="logheight/2"/>
+            <draw:equation draw:name="f2" draw:formula="logheight"/>
+            <draw:equation draw:name="f3" draw:formula="logwidth"/>
+          </draw:enhanced-geometry>
+        </draw:custom-shape>
+        <draw:custom-shape draw:name="Shape 5" draw:style-name="gr16" draw:text-style-name="P18" draw:layer="layout" svg:width="2.283cm" svg:height="0.505cm" svg:x="14.224cm" svg:y="13.411cm">
+          <text:p/>
+          <draw:enhanced-geometry draw:mirror-horizontal="false" draw:mirror-vertical="false" svg:viewBox="0 0 0 0" draw:glue-points="?f8 0 0 ?f9 ?f8 ?f10 ?f11 ?f9" draw:text-areas="?f5 ?f5 ?f6 ?f7" draw:type="ooxml-roundRect" draw:modifiers="50000" draw:enhanced-path="M 0 ?f2 L ?f3 0 L ?f11 ?f4 L ?f2 ?f10 Z N" drawooo:enhanced-path="M 0 ?f2 G ?f2 ?f2 ?f12 ?f13 L ?f3 0 G ?f2 ?f2 ?f14 ?f15 L ?f11 ?f4 G ?f2 ?f2 ?f16 ?f17 L ?f2 ?f10 G ?f2 ?f2 ?f18 ?f19 Z N">
             <draw:equation draw:name="f0" draw:formula="if(0-$0 ,0,if(50000-$0 ,$0 ,50000))"/>
             <draw:equation draw:name="f1" draw:formula="min(logwidth,logheight)"/>
             <draw:equation draw:name="f2" draw:formula="?f1 *?f0 /100000"/>
@@ -6467,23 +6407,23 @@
             <draw:equation draw:name="f17" draw:formula="(5400000)/60000.0"/>
             <draw:equation draw:name="f18" draw:formula="(5400000)/60000.0"/>
             <draw:equation draw:name="f19" draw:formula="(5400000)/60000.0"/>
-            <draw:handle draw:handle-position="?f2 0" draw:handle-position-x="?f2" draw:handle-position-y="0" draw:handle-range-x-maximum="50000" draw:handle-range-x-minimum="0"/>
-          </draw:enhanced-geometry>
-        </draw:custom-shape>
-        <draw:custom-shape draw:name="Text 6" draw:style-name="gr76" draw:text-style-name="P14" draw:layer="layout" svg:width="2.283cm" svg:height="0.505cm" svg:x="14.224cm" svg:y="13.411cm">
-          <text:p text:style-name="P13">
+            <draw:handle draw:handle-range-x-maximum="50000" draw:handle-range-x-minimum="0" draw:handle-position="?f2 0" draw:handle-position-x="?f2" draw:handle-position-y="0"/>
+          </draw:enhanced-geometry>
+        </draw:custom-shape>
+        <draw:custom-shape draw:name="Text 6" draw:style-name="gr76" draw:text-style-name="P16" draw:layer="layout" svg:width="2.283cm" svg:height="0.505cm" svg:x="14.224cm" svg:y="13.411cm">
+          <text:p text:style-name="P15">
             <text:span text:style-name="T11">KPIs</text:span>
           </text:p>
-          <draw:enhanced-geometry draw:mirror-horizontal="false" draw:mirror-vertical="false" draw:glue-points="?f0 0 0 ?f1 ?f0 ?f2 ?f3 ?f1" draw:text-areas="0 0 ?f3 ?f2" svg:viewBox="0 0 0 0" draw:type="ooxml-rect" draw:enhanced-path="M 0 0 L ?f3 0 ?f3 ?f2 0 ?f2 Z N">
-            <draw:equation draw:name="f0" draw:formula="logwidth/2"/>
-            <draw:equation draw:name="f1" draw:formula="logheight/2"/>
-            <draw:equation draw:name="f2" draw:formula="logheight"/>
-            <draw:equation draw:name="f3" draw:formula="logwidth"/>
-          </draw:enhanced-geometry>
-        </draw:custom-shape>
-        <draw:custom-shape draw:name="Shape 7" draw:style-name="gr65" draw:text-style-name="P17" draw:layer="layout" svg:width="2.283cm" svg:height="0.505cm" svg:x="16.739cm" svg:y="13.411cm">
-          <text:p/>
-          <draw:enhanced-geometry draw:mirror-horizontal="false" draw:mirror-vertical="false" draw:glue-points="?f8 0 0 ?f9 ?f8 ?f10 ?f11 ?f9" draw:text-areas="?f5 ?f5 ?f6 ?f7" svg:viewBox="0 0 0 0" draw:type="ooxml-roundRect" draw:modifiers="50000" draw:enhanced-path="M 0 ?f2 L ?f3 0 L ?f11 ?f4 L ?f2 ?f10 Z N" drawooo:enhanced-path="M 0 ?f2 G ?f2 ?f2 ?f12 ?f13 L ?f3 0 G ?f2 ?f2 ?f14 ?f15 L ?f11 ?f4 G ?f2 ?f2 ?f16 ?f17 L ?f2 ?f10 G ?f2 ?f2 ?f18 ?f19 Z N">
+          <draw:enhanced-geometry draw:mirror-horizontal="false" draw:mirror-vertical="false" svg:viewBox="0 0 0 0" draw:glue-points="?f0 0 0 ?f1 ?f0 ?f2 ?f3 ?f1" draw:text-areas="0 0 ?f3 ?f2" draw:type="ooxml-rect" draw:enhanced-path="M 0 0 L ?f3 0 ?f3 ?f2 0 ?f2 Z N">
+            <draw:equation draw:name="f0" draw:formula="logwidth/2"/>
+            <draw:equation draw:name="f1" draw:formula="logheight/2"/>
+            <draw:equation draw:name="f2" draw:formula="logheight"/>
+            <draw:equation draw:name="f3" draw:formula="logwidth"/>
+          </draw:enhanced-geometry>
+        </draw:custom-shape>
+        <draw:custom-shape draw:name="Shape 7" draw:style-name="gr65" draw:text-style-name="P19" draw:layer="layout" svg:width="2.283cm" svg:height="0.505cm" svg:x="16.739cm" svg:y="13.411cm">
+          <text:p/>
+          <draw:enhanced-geometry draw:mirror-horizontal="false" draw:mirror-vertical="false" svg:viewBox="0 0 0 0" draw:glue-points="?f8 0 0 ?f9 ?f8 ?f10 ?f11 ?f9" draw:text-areas="?f5 ?f5 ?f6 ?f7" draw:type="ooxml-roundRect" draw:modifiers="50000" draw:enhanced-path="M 0 ?f2 L ?f3 0 L ?f11 ?f4 L ?f2 ?f10 Z N" drawooo:enhanced-path="M 0 ?f2 G ?f2 ?f2 ?f12 ?f13 L ?f3 0 G ?f2 ?f2 ?f14 ?f15 L ?f11 ?f4 G ?f2 ?f2 ?f16 ?f17 L ?f2 ?f10 G ?f2 ?f2 ?f18 ?f19 Z N">
             <draw:equation draw:name="f0" draw:formula="if(0-$0 ,0,if(50000-$0 ,$0 ,50000))"/>
             <draw:equation draw:name="f1" draw:formula="min(logwidth,logheight)"/>
             <draw:equation draw:name="f2" draw:formula="?f1 *?f0 /100000"/>
@@ -6504,23 +6444,23 @@
             <draw:equation draw:name="f17" draw:formula="(5400000)/60000.0"/>
             <draw:equation draw:name="f18" draw:formula="(5400000)/60000.0"/>
             <draw:equation draw:name="f19" draw:formula="(5400000)/60000.0"/>
-            <draw:handle draw:handle-position="?f2 0" draw:handle-position-x="?f2" draw:handle-position-y="0" draw:handle-range-x-maximum="50000" draw:handle-range-x-minimum="0"/>
-          </draw:enhanced-geometry>
-        </draw:custom-shape>
-        <draw:custom-shape draw:name="Text 8" draw:style-name="gr77" draw:text-style-name="P14" draw:layer="layout" svg:width="2.283cm" svg:height="0.505cm" svg:x="16.739cm" svg:y="13.411cm">
-          <text:p text:style-name="P13">
+            <draw:handle draw:handle-range-x-maximum="50000" draw:handle-range-x-minimum="0" draw:handle-position="?f2 0" draw:handle-position-x="?f2" draw:handle-position-y="0"/>
+          </draw:enhanced-geometry>
+        </draw:custom-shape>
+        <draw:custom-shape draw:name="Text 8" draw:style-name="gr77" draw:text-style-name="P16" draw:layer="layout" svg:width="2.283cm" svg:height="0.505cm" svg:x="16.739cm" svg:y="13.411cm">
+          <text:p text:style-name="P15">
             <text:span text:style-name="T10">Descriptive</text:span>
           </text:p>
-          <draw:enhanced-geometry draw:mirror-horizontal="false" draw:mirror-vertical="false" draw:glue-points="?f0 0 0 ?f1 ?f0 ?f2 ?f3 ?f1" draw:text-areas="0 0 ?f3 ?f2" svg:viewBox="0 0 0 0" draw:type="ooxml-rect" draw:enhanced-path="M 0 0 L ?f3 0 ?f3 ?f2 0 ?f2 Z N">
-            <draw:equation draw:name="f0" draw:formula="logwidth/2"/>
-            <draw:equation draw:name="f1" draw:formula="logheight/2"/>
-            <draw:equation draw:name="f2" draw:formula="logheight"/>
-            <draw:equation draw:name="f3" draw:formula="logwidth"/>
-          </draw:enhanced-geometry>
-        </draw:custom-shape>
-        <draw:custom-shape draw:name="Shape 9" draw:style-name="gr16" draw:text-style-name="P16" draw:layer="layout" svg:width="2.283cm" svg:height="0.505cm" svg:x="19.253cm" svg:y="13.411cm">
-          <text:p/>
-          <draw:enhanced-geometry draw:mirror-horizontal="false" draw:mirror-vertical="false" draw:glue-points="?f8 0 0 ?f9 ?f8 ?f10 ?f11 ?f9" draw:text-areas="?f5 ?f5 ?f6 ?f7" svg:viewBox="0 0 0 0" draw:type="ooxml-roundRect" draw:modifiers="50000" draw:enhanced-path="M 0 ?f2 L ?f3 0 L ?f11 ?f4 L ?f2 ?f10 Z N" drawooo:enhanced-path="M 0 ?f2 G ?f2 ?f2 ?f12 ?f13 L ?f3 0 G ?f2 ?f2 ?f14 ?f15 L ?f11 ?f4 G ?f2 ?f2 ?f16 ?f17 L ?f2 ?f10 G ?f2 ?f2 ?f18 ?f19 Z N">
+          <draw:enhanced-geometry draw:mirror-horizontal="false" draw:mirror-vertical="false" svg:viewBox="0 0 0 0" draw:glue-points="?f0 0 0 ?f1 ?f0 ?f2 ?f3 ?f1" draw:text-areas="0 0 ?f3 ?f2" draw:type="ooxml-rect" draw:enhanced-path="M 0 0 L ?f3 0 ?f3 ?f2 0 ?f2 Z N">
+            <draw:equation draw:name="f0" draw:formula="logwidth/2"/>
+            <draw:equation draw:name="f1" draw:formula="logheight/2"/>
+            <draw:equation draw:name="f2" draw:formula="logheight"/>
+            <draw:equation draw:name="f3" draw:formula="logwidth"/>
+          </draw:enhanced-geometry>
+        </draw:custom-shape>
+        <draw:custom-shape draw:name="Shape 9" draw:style-name="gr16" draw:text-style-name="P18" draw:layer="layout" svg:width="2.283cm" svg:height="0.505cm" svg:x="19.253cm" svg:y="13.411cm">
+          <text:p/>
+          <draw:enhanced-geometry draw:mirror-horizontal="false" draw:mirror-vertical="false" svg:viewBox="0 0 0 0" draw:glue-points="?f8 0 0 ?f9 ?f8 ?f10 ?f11 ?f9" draw:text-areas="?f5 ?f5 ?f6 ?f7" draw:type="ooxml-roundRect" draw:modifiers="50000" draw:enhanced-path="M 0 ?f2 L ?f3 0 L ?f11 ?f4 L ?f2 ?f10 Z N" drawooo:enhanced-path="M 0 ?f2 G ?f2 ?f2 ?f12 ?f13 L ?f3 0 G ?f2 ?f2 ?f14 ?f15 L ?f11 ?f4 G ?f2 ?f2 ?f16 ?f17 L ?f2 ?f10 G ?f2 ?f2 ?f18 ?f19 Z N">
             <draw:equation draw:name="f0" draw:formula="if(0-$0 ,0,if(50000-$0 ,$0 ,50000))"/>
             <draw:equation draw:name="f1" draw:formula="min(logwidth,logheight)"/>
             <draw:equation draw:name="f2" draw:formula="?f1 *?f0 /100000"/>
@@ -6541,23 +6481,23 @@
             <draw:equation draw:name="f17" draw:formula="(5400000)/60000.0"/>
             <draw:equation draw:name="f18" draw:formula="(5400000)/60000.0"/>
             <draw:equation draw:name="f19" draw:formula="(5400000)/60000.0"/>
-            <draw:handle draw:handle-position="?f2 0" draw:handle-position-x="?f2" draw:handle-position-y="0" draw:handle-range-x-maximum="50000" draw:handle-range-x-minimum="0"/>
-          </draw:enhanced-geometry>
-        </draw:custom-shape>
-        <draw:custom-shape draw:name="Text 10" draw:style-name="gr78" draw:text-style-name="P14" draw:layer="layout" svg:width="2.283cm" svg:height="0.505cm" svg:x="19.253cm" svg:y="13.411cm">
-          <text:p text:style-name="P13">
+            <draw:handle draw:handle-range-x-maximum="50000" draw:handle-range-x-minimum="0" draw:handle-position="?f2 0" draw:handle-position-x="?f2" draw:handle-position-y="0"/>
+          </draw:enhanced-geometry>
+        </draw:custom-shape>
+        <draw:custom-shape draw:name="Text 10" draw:style-name="gr78" draw:text-style-name="P16" draw:layer="layout" svg:width="2.283cm" svg:height="0.505cm" svg:x="19.253cm" svg:y="13.411cm">
+          <text:p text:style-name="P15">
             <text:span text:style-name="T11">Prescriptive</text:span>
           </text:p>
-          <draw:enhanced-geometry draw:mirror-horizontal="false" draw:mirror-vertical="false" draw:glue-points="?f0 0 0 ?f1 ?f0 ?f2 ?f3 ?f1" draw:text-areas="0 0 ?f3 ?f2" svg:viewBox="0 0 0 0" draw:type="ooxml-rect" draw:enhanced-path="M 0 0 L ?f3 0 ?f3 ?f2 0 ?f2 Z N">
-            <draw:equation draw:name="f0" draw:formula="logwidth/2"/>
-            <draw:equation draw:name="f1" draw:formula="logheight/2"/>
-            <draw:equation draw:name="f2" draw:formula="logheight"/>
-            <draw:equation draw:name="f3" draw:formula="logwidth"/>
-          </draw:enhanced-geometry>
-        </draw:custom-shape>
-        <draw:custom-shape draw:name="Shape 11" draw:style-name="gr16" draw:text-style-name="P16" draw:layer="layout" svg:width="2.283cm" svg:height="0.505cm" svg:x="21.768cm" svg:y="13.411cm">
-          <text:p/>
-          <draw:enhanced-geometry draw:mirror-horizontal="false" draw:mirror-vertical="false" draw:glue-points="?f8 0 0 ?f9 ?f8 ?f10 ?f11 ?f9" draw:text-areas="?f5 ?f5 ?f6 ?f7" svg:viewBox="0 0 0 0" draw:type="ooxml-roundRect" draw:modifiers="50000" draw:enhanced-path="M 0 ?f2 L ?f3 0 L ?f11 ?f4 L ?f2 ?f10 Z N" drawooo:enhanced-path="M 0 ?f2 G ?f2 ?f2 ?f12 ?f13 L ?f3 0 G ?f2 ?f2 ?f14 ?f15 L ?f11 ?f4 G ?f2 ?f2 ?f16 ?f17 L ?f2 ?f10 G ?f2 ?f2 ?f18 ?f19 Z N">
+          <draw:enhanced-geometry draw:mirror-horizontal="false" draw:mirror-vertical="false" svg:viewBox="0 0 0 0" draw:glue-points="?f0 0 0 ?f1 ?f0 ?f2 ?f3 ?f1" draw:text-areas="0 0 ?f3 ?f2" draw:type="ooxml-rect" draw:enhanced-path="M 0 0 L ?f3 0 ?f3 ?f2 0 ?f2 Z N">
+            <draw:equation draw:name="f0" draw:formula="logwidth/2"/>
+            <draw:equation draw:name="f1" draw:formula="logheight/2"/>
+            <draw:equation draw:name="f2" draw:formula="logheight"/>
+            <draw:equation draw:name="f3" draw:formula="logwidth"/>
+          </draw:enhanced-geometry>
+        </draw:custom-shape>
+        <draw:custom-shape draw:name="Shape 11" draw:style-name="gr16" draw:text-style-name="P18" draw:layer="layout" svg:width="2.283cm" svg:height="0.505cm" svg:x="21.768cm" svg:y="13.411cm">
+          <text:p/>
+          <draw:enhanced-geometry draw:mirror-horizontal="false" draw:mirror-vertical="false" svg:viewBox="0 0 0 0" draw:glue-points="?f8 0 0 ?f9 ?f8 ?f10 ?f11 ?f9" draw:text-areas="?f5 ?f5 ?f6 ?f7" draw:type="ooxml-roundRect" draw:modifiers="50000" draw:enhanced-path="M 0 ?f2 L ?f3 0 L ?f11 ?f4 L ?f2 ?f10 Z N" drawooo:enhanced-path="M 0 ?f2 G ?f2 ?f2 ?f12 ?f13 L ?f3 0 G ?f2 ?f2 ?f14 ?f15 L ?f11 ?f4 G ?f2 ?f2 ?f16 ?f17 L ?f2 ?f10 G ?f2 ?f2 ?f18 ?f19 Z N">
             <draw:equation draw:name="f0" draw:formula="if(0-$0 ,0,if(50000-$0 ,$0 ,50000))"/>
             <draw:equation draw:name="f1" draw:formula="min(logwidth,logheight)"/>
             <draw:equation draw:name="f2" draw:formula="?f1 *?f0 /100000"/>
@@ -6578,35 +6518,35 @@
             <draw:equation draw:name="f17" draw:formula="(5400000)/60000.0"/>
             <draw:equation draw:name="f18" draw:formula="(5400000)/60000.0"/>
             <draw:equation draw:name="f19" draw:formula="(5400000)/60000.0"/>
-            <draw:handle draw:handle-position="?f2 0" draw:handle-position-x="?f2" draw:handle-position-y="0" draw:handle-range-x-maximum="50000" draw:handle-range-x-minimum="0"/>
-          </draw:enhanced-geometry>
-        </draw:custom-shape>
-        <draw:custom-shape draw:name="Text 12" draw:style-name="gr79" draw:text-style-name="P14" draw:layer="layout" svg:width="2.283cm" svg:height="0.505cm" svg:x="21.768cm" svg:y="13.411cm">
-          <text:p text:style-name="P13">
+            <draw:handle draw:handle-range-x-maximum="50000" draw:handle-range-x-minimum="0" draw:handle-position="?f2 0" draw:handle-position-x="?f2" draw:handle-position-y="0"/>
+          </draw:enhanced-geometry>
+        </draw:custom-shape>
+        <draw:custom-shape draw:name="Text 12" draw:style-name="gr79" draw:text-style-name="P16" draw:layer="layout" svg:width="2.283cm" svg:height="0.505cm" svg:x="21.768cm" svg:y="13.411cm">
+          <text:p text:style-name="P15">
             <text:span text:style-name="T11">Predictive</text:span>
           </text:p>
-          <draw:enhanced-geometry draw:mirror-horizontal="false" draw:mirror-vertical="false" draw:glue-points="?f0 0 0 ?f1 ?f0 ?f2 ?f3 ?f1" draw:text-areas="0 0 ?f3 ?f2" svg:viewBox="0 0 0 0" draw:type="ooxml-rect" draw:enhanced-path="M 0 0 L ?f3 0 ?f3 ?f2 0 ?f2 Z N">
-            <draw:equation draw:name="f0" draw:formula="logwidth/2"/>
-            <draw:equation draw:name="f1" draw:formula="logheight/2"/>
-            <draw:equation draw:name="f2" draw:formula="logheight"/>
-            <draw:equation draw:name="f3" draw:formula="logwidth"/>
-          </draw:enhanced-geometry>
-        </draw:custom-shape>
-        <draw:frame draw:name="Chart 0" draw:style-name="gr69" draw:text-style-name="P6" draw:layer="layout" svg:width="11.681cm" svg:height="6.474cm" svg:x="1.016cm" svg:y="3.505cm">
+          <draw:enhanced-geometry draw:mirror-horizontal="false" draw:mirror-vertical="false" svg:viewBox="0 0 0 0" draw:glue-points="?f0 0 0 ?f1 ?f0 ?f2 ?f3 ?f1" draw:text-areas="0 0 ?f3 ?f2" draw:type="ooxml-rect" draw:enhanced-path="M 0 0 L ?f3 0 ?f3 ?f2 0 ?f2 Z N">
+            <draw:equation draw:name="f0" draw:formula="logwidth/2"/>
+            <draw:equation draw:name="f1" draw:formula="logheight/2"/>
+            <draw:equation draw:name="f2" draw:formula="logheight"/>
+            <draw:equation draw:name="f3" draw:formula="logwidth"/>
+          </draw:enhanced-geometry>
+        </draw:custom-shape>
+        <draw:frame draw:name="Chart 0" draw:style-name="gr69" draw:text-style-name="P8" draw:layer="layout" svg:width="11.681cm" svg:height="6.474cm" svg:x="1.016cm" svg:y="3.505cm">
           <draw:object xlink:href="./Object 3" xlink:type="simple" xlink:show="embed" xlink:actuate="onLoad">
             <loext:p/>
           </draw:object>
           <draw:image xlink:href="./ObjectReplacements/Object 3" xlink:type="simple" xlink:show="embed" xlink:actuate="onLoad"/>
         </draw:frame>
-        <draw:frame draw:name="Chart 1" draw:style-name="gr69" draw:text-style-name="P6" draw:layer="layout" svg:width="11.427cm" svg:height="6.474cm" svg:x="12.954cm" svg:y="3.505cm">
+        <draw:frame draw:name="Chart 1" draw:style-name="gr69" draw:text-style-name="P8" draw:layer="layout" svg:width="11.427cm" svg:height="6.474cm" svg:x="12.954cm" svg:y="3.505cm">
           <draw:object xlink:href="./Object 4" xlink:type="simple" xlink:show="embed" xlink:actuate="onLoad">
             <loext:p/>
           </draw:object>
           <draw:image xlink:href="./ObjectReplacements/Object 4" xlink:type="simple" xlink:show="embed" xlink:actuate="onLoad"/>
         </draw:frame>
-        <draw:custom-shape draw:name="Shape 13" draw:style-name="gr20" draw:text-style-name="P16" draw:layer="layout" svg:width="11.173cm" svg:height="2.842cm" svg:x="1.27cm" svg:y="10.211cm">
-          <text:p/>
-          <draw:enhanced-geometry draw:mirror-horizontal="false" draw:mirror-vertical="false" draw:glue-points="?f8 0 0 ?f9 ?f8 ?f10 ?f11 ?f9" draw:text-areas="?f5 ?f5 ?f6 ?f7" svg:viewBox="0 0 0 0" draw:type="ooxml-roundRect" draw:modifiers="7143" draw:enhanced-path="M 0 ?f2 L ?f3 0 L ?f11 ?f4 L ?f2 ?f10 Z N" drawooo:enhanced-path="M 0 ?f2 G ?f2 ?f2 ?f12 ?f13 L ?f3 0 G ?f2 ?f2 ?f14 ?f15 L ?f11 ?f4 G ?f2 ?f2 ?f16 ?f17 L ?f2 ?f10 G ?f2 ?f2 ?f18 ?f19 Z N">
+        <draw:custom-shape draw:name="Shape 13" draw:style-name="gr20" draw:text-style-name="P18" draw:layer="layout" svg:width="11.173cm" svg:height="2.842cm" svg:x="1.27cm" svg:y="10.211cm">
+          <text:p/>
+          <draw:enhanced-geometry draw:mirror-horizontal="false" draw:mirror-vertical="false" svg:viewBox="0 0 0 0" draw:glue-points="?f8 0 0 ?f9 ?f8 ?f10 ?f11 ?f9" draw:text-areas="?f5 ?f5 ?f6 ?f7" draw:type="ooxml-roundRect" draw:modifiers="7143" draw:enhanced-path="M 0 ?f2 L ?f3 0 L ?f11 ?f4 L ?f2 ?f10 Z N" drawooo:enhanced-path="M 0 ?f2 G ?f2 ?f2 ?f12 ?f13 L ?f3 0 G ?f2 ?f2 ?f14 ?f15 L ?f11 ?f4 G ?f2 ?f2 ?f16 ?f17 L ?f2 ?f10 G ?f2 ?f2 ?f18 ?f19 Z N">
             <draw:equation draw:name="f0" draw:formula="if(0-$0 ,0,if(50000-$0 ,$0 ,50000))"/>
             <draw:equation draw:name="f1" draw:formula="min(logwidth,logheight)"/>
             <draw:equation draw:name="f2" draw:formula="?f1 *?f0 /100000"/>
@@ -6627,34 +6567,34 @@
             <draw:equation draw:name="f17" draw:formula="(5400000)/60000.0"/>
             <draw:equation draw:name="f18" draw:formula="(5400000)/60000.0"/>
             <draw:equation draw:name="f19" draw:formula="(5400000)/60000.0"/>
-            <draw:handle draw:handle-position="?f2 0" draw:handle-position-x="?f2" draw:handle-position-y="0" draw:handle-range-x-maximum="50000" draw:handle-range-x-minimum="0"/>
-          </draw:enhanced-geometry>
-        </draw:custom-shape>
-        <draw:custom-shape draw:name="Text 14" draw:style-name="gr80" draw:text-style-name="P29" draw:layer="layout" svg:width="10.411cm" svg:height="2.435cm" svg:x="1.651cm" svg:y="10.414cm">
-          <text:p text:style-name="P28">
+            <draw:handle draw:handle-range-x-maximum="50000" draw:handle-range-x-minimum="0" draw:handle-position="?f2 0" draw:handle-position-x="?f2" draw:handle-position-y="0"/>
+          </draw:enhanced-geometry>
+        </draw:custom-shape>
+        <draw:custom-shape draw:name="Text 14" draw:style-name="gr80" draw:text-style-name="P31" draw:layer="layout" svg:width="10.411cm" svg:height="2.435cm" svg:x="1.651cm" svg:y="10.414cm">
+          <text:p text:style-name="P30">
             <text:span text:style-name="T22">
               FINDING 
               <text:s/>
             </text:span>
             <text:span text:style-name="T23">Readmission keeps climbing (7% → 25% → 38.5%), while mortality is almost flat after the first month.</text:span>
           </text:p>
-          <text:p text:style-name="P28">
+          <text:p text:style-name="P30">
             <text:span text:style-name="T22">
               SO WHAT 
               <text:s/>
             </text:span>
             <text:span text:style-name="T23">Death prevention must be front-loaded; readmission prevention must last the full 6 months.</text:span>
           </text:p>
-          <draw:enhanced-geometry draw:mirror-horizontal="false" draw:mirror-vertical="false" draw:glue-points="?f0 0 0 ?f1 ?f0 ?f2 ?f3 ?f1" draw:text-areas="0 0 ?f3 ?f2" svg:viewBox="0 0 0 0" draw:type="ooxml-rect" draw:enhanced-path="M 0 0 L ?f3 0 ?f3 ?f2 0 ?f2 Z N">
-            <draw:equation draw:name="f0" draw:formula="logwidth/2"/>
-            <draw:equation draw:name="f1" draw:formula="logheight/2"/>
-            <draw:equation draw:name="f2" draw:formula="logheight"/>
-            <draw:equation draw:name="f3" draw:formula="logwidth"/>
-          </draw:enhanced-geometry>
-        </draw:custom-shape>
-        <draw:custom-shape draw:name="Shape 15" draw:style-name="gr20" draw:text-style-name="P16" draw:layer="layout" svg:width="11.173cm" svg:height="2.842cm" svg:x="12.954cm" svg:y="10.211cm">
-          <text:p/>
-          <draw:enhanced-geometry draw:mirror-horizontal="false" draw:mirror-vertical="false" draw:glue-points="?f8 0 0 ?f9 ?f8 ?f10 ?f11 ?f9" draw:text-areas="?f5 ?f5 ?f6 ?f7" svg:viewBox="0 0 0 0" draw:type="ooxml-roundRect" draw:modifiers="7143" draw:enhanced-path="M 0 ?f2 L ?f3 0 L ?f11 ?f4 L ?f2 ?f10 Z N" drawooo:enhanced-path="M 0 ?f2 G ?f2 ?f2 ?f12 ?f13 L ?f3 0 G ?f2 ?f2 ?f14 ?f15 L ?f11 ?f4 G ?f2 ?f2 ?f16 ?f17 L ?f2 ?f10 G ?f2 ?f2 ?f18 ?f19 Z N">
+          <draw:enhanced-geometry draw:mirror-horizontal="false" draw:mirror-vertical="false" svg:viewBox="0 0 0 0" draw:glue-points="?f0 0 0 ?f1 ?f0 ?f2 ?f3 ?f1" draw:text-areas="0 0 ?f3 ?f2" draw:type="ooxml-rect" draw:enhanced-path="M 0 0 L ?f3 0 ?f3 ?f2 0 ?f2 Z N">
+            <draw:equation draw:name="f0" draw:formula="logwidth/2"/>
+            <draw:equation draw:name="f1" draw:formula="logheight/2"/>
+            <draw:equation draw:name="f2" draw:formula="logheight"/>
+            <draw:equation draw:name="f3" draw:formula="logwidth"/>
+          </draw:enhanced-geometry>
+        </draw:custom-shape>
+        <draw:custom-shape draw:name="Shape 15" draw:style-name="gr20" draw:text-style-name="P18" draw:layer="layout" svg:width="11.173cm" svg:height="2.842cm" svg:x="12.954cm" svg:y="10.211cm">
+          <text:p/>
+          <draw:enhanced-geometry draw:mirror-horizontal="false" draw:mirror-vertical="false" svg:viewBox="0 0 0 0" draw:glue-points="?f8 0 0 ?f9 ?f8 ?f10 ?f11 ?f9" draw:text-areas="?f5 ?f5 ?f6 ?f7" draw:type="ooxml-roundRect" draw:modifiers="7143" draw:enhanced-path="M 0 ?f2 L ?f3 0 L ?f11 ?f4 L ?f2 ?f10 Z N" drawooo:enhanced-path="M 0 ?f2 G ?f2 ?f2 ?f12 ?f13 L ?f3 0 G ?f2 ?f2 ?f14 ?f15 L ?f11 ?f4 G ?f2 ?f2 ?f16 ?f17 L ?f2 ?f10 G ?f2 ?f2 ?f18 ?f19 Z N">
             <draw:equation draw:name="f0" draw:formula="if(0-$0 ,0,if(50000-$0 ,$0 ,50000))"/>
             <draw:equation draw:name="f1" draw:formula="min(logwidth,logheight)"/>
             <draw:equation draw:name="f2" draw:formula="?f1 *?f0 /100000"/>
@@ -6675,34 +6615,34 @@
             <draw:equation draw:name="f17" draw:formula="(5400000)/60000.0"/>
             <draw:equation draw:name="f18" draw:formula="(5400000)/60000.0"/>
             <draw:equation draw:name="f19" draw:formula="(5400000)/60000.0"/>
-            <draw:handle draw:handle-position="?f2 0" draw:handle-position-x="?f2" draw:handle-position-y="0" draw:handle-range-x-maximum="50000" draw:handle-range-x-minimum="0"/>
-          </draw:enhanced-geometry>
-        </draw:custom-shape>
-        <draw:custom-shape draw:name="Text 16" draw:style-name="gr81" draw:text-style-name="P29" draw:layer="layout" svg:width="10.411cm" svg:height="2.435cm" svg:x="13.335cm" svg:y="10.414cm">
-          <text:p text:style-name="P28">
+            <draw:handle draw:handle-range-x-maximum="50000" draw:handle-range-x-minimum="0" draw:handle-position="?f2 0" draw:handle-position-x="?f2" draw:handle-position-y="0"/>
+          </draw:enhanced-geometry>
+        </draw:custom-shape>
+        <draw:custom-shape draw:name="Text 16" draw:style-name="gr81" draw:text-style-name="P31" draw:layer="layout" svg:width="10.411cm" svg:height="2.435cm" svg:x="13.335cm" svg:y="10.414cm">
+          <text:p text:style-name="P30">
             <text:span text:style-name="T22">
               FINDING 
               <text:s/>
             </text:span>
             <text:span text:style-name="T23">Only ~2% arrive with reduced consciousness, but they make up over a third of early deaths; 91% of unresponsive patients die, most in week 1.</text:span>
           </text:p>
-          <text:p text:style-name="P28">
+          <text:p text:style-name="P30">
             <text:span text:style-name="T22">
               SO WHAT 
               <text:s/>
             </text:span>
             <text:span text:style-name="T23">Consciousness at the door is one of the strongest early warning signs.</text:span>
           </text:p>
-          <draw:enhanced-geometry draw:mirror-horizontal="false" draw:mirror-vertical="false" draw:glue-points="?f0 0 0 ?f1 ?f0 ?f2 ?f3 ?f1" draw:text-areas="0 0 ?f3 ?f2" svg:viewBox="0 0 0 0" draw:type="ooxml-rect" draw:enhanced-path="M 0 0 L ?f3 0 ?f3 ?f2 0 ?f2 Z N">
-            <draw:equation draw:name="f0" draw:formula="logwidth/2"/>
-            <draw:equation draw:name="f1" draw:formula="logheight/2"/>
-            <draw:equation draw:name="f2" draw:formula="logheight"/>
-            <draw:equation draw:name="f3" draw:formula="logwidth"/>
-          </draw:enhanced-geometry>
-        </draw:custom-shape>
-        <draw:custom-shape draw:name="Freeform 2" draw:style-name="gr82" draw:text-style-name="P30" draw:layer="layout" svg:width="1.347cm" svg:height="2.221cm" svg:x="23.971cm" svg:y="0.085cm">
-          <text:p/>
-          <draw:enhanced-geometry draw:mirror-horizontal="false" draw:mirror-vertical="false" drawooo:sub-view-size="647700 1066800" draw:text-areas="?f0 ?f2 ?f1 ?f3" svg:viewBox="0 0 0 0" draw:type="ooxml-non-primitive" draw:enhanced-path="M 0 0 L 647700 0 647700 1066800 0 1066800 0 0 Z N">
+          <draw:enhanced-geometry draw:mirror-horizontal="false" draw:mirror-vertical="false" svg:viewBox="0 0 0 0" draw:glue-points="?f0 0 0 ?f1 ?f0 ?f2 ?f3 ?f1" draw:text-areas="0 0 ?f3 ?f2" draw:type="ooxml-rect" draw:enhanced-path="M 0 0 L ?f3 0 ?f3 ?f2 0 ?f2 Z N">
+            <draw:equation draw:name="f0" draw:formula="logwidth/2"/>
+            <draw:equation draw:name="f1" draw:formula="logheight/2"/>
+            <draw:equation draw:name="f2" draw:formula="logheight"/>
+            <draw:equation draw:name="f3" draw:formula="logwidth"/>
+          </draw:enhanced-geometry>
+        </draw:custom-shape>
+        <draw:custom-shape draw:name="Freeform 2" draw:style-name="gr82" draw:text-style-name="P32" draw:layer="layout" svg:width="1.347cm" svg:height="2.221cm" svg:x="23.971cm" svg:y="0.085cm">
+          <text:p/>
+          <draw:enhanced-geometry draw:mirror-horizontal="false" draw:mirror-vertical="false" svg:viewBox="0 0 0 0" drawooo:sub-view-size="647700 1066800" draw:text-areas="?f0 ?f2 ?f1 ?f3" draw:type="ooxml-non-primitive" draw:enhanced-path="M 0 0 L 647700 0 647700 1066800 0 1066800 0 0 Z N">
             <draw:equation draw:name="f0" draw:formula="0*logwidth/485280"/>
             <draw:equation draw:name="f1" draw:formula="485640*logwidth/485280"/>
             <draw:equation draw:name="f2" draw:formula="0*logheight/799920"/>
@@ -6711,16 +6651,16 @@
         </draw:custom-shape>
         <presentation:notes draw:style-name="dp2">
           <draw:page-thumbnail draw:name="PlaceHolder 1" draw:style-name="gr10" draw:layer="layout" svg:width="15.237cm" svg:height="8.57cm" svg:x="1.905cm" svg:y="3.175cm" draw:page-number="4" presentation:class="page"/>
-          <draw:frame draw:name="PlaceHolder 2" presentation:style-name="pr1" draw:text-style-name="P9" draw:layer="layout" svg:width="15.237cm" svg:height="9.998cm" svg:x="1.905cm" svg:y="12.224cm" presentation:class="notes" presentation:user-transformed="true">
+          <draw:frame draw:name="PlaceHolder 2" presentation:style-name="pr1" draw:text-style-name="P11" draw:layer="layout" svg:width="15.237cm" svg:height="9.998cm" svg:x="1.905cm" svg:y="12.224cm" presentation:class="notes" presentation:user-transformed="true">
             <draw:text-box>
-              <text:p text:style-name="P8">
+              <text:p text:style-name="P10">
                 <text:span text:style-name="T6">Left: cumulative percentage readmitted (blue) and dead (red) by 28 days, 3 months and 6 months. The two lines move apart — readmission is the long-term burden. Right: day-by-day cumulative mortality over the first 28 days for each consciousness level. The clear group stays near 1%, while the unresponsive group climbs to 91%, mostly within the first week.</text:span>
               </text:p>
             </draw:text-box>
           </draw:frame>
-          <draw:frame draw:name="PlaceHolder 3" presentation:style-name="pr2" draw:text-style-name="P11" draw:layer="layout" svg:width="8.252cm" svg:height="1.271cm" svg:x="10.791cm" svg:y="24.126cm" presentation:class="page-number" presentation:user-transformed="true">
+          <draw:frame draw:name="PlaceHolder 3" presentation:style-name="pr2" draw:text-style-name="P13" draw:layer="layout" svg:width="8.252cm" svg:height="1.271cm" svg:x="10.791cm" svg:y="24.126cm" presentation:class="page-number" presentation:user-transformed="true">
             <draw:text-box>
-              <text:p text:style-name="P10">
+              <text:p text:style-name="P12">
                 <text:span text:style-name="T7">
                   <text:page-number>&lt;number&gt;</text:page-number>
                 </text:span>
@@ -6730,9 +6670,9 @@
         </presentation:notes>
       </draw:page>
       <draw:page draw:name="page5" draw:style-name="dp6" draw:master-page-name="DEFAULT">
-        <draw:custom-shape draw:name="Shape 0" draw:style-name="gr83" draw:text-style-name="P31" draw:layer="layout" svg:width="3.426cm" svg:height="0.683cm" svg:x="1.27cm" svg:y="0.635cm">
-          <text:p/>
-          <draw:enhanced-geometry draw:mirror-horizontal="false" draw:mirror-vertical="false" draw:glue-points="?f8 0 0 ?f9 ?f8 ?f10 ?f11 ?f9" draw:text-areas="?f5 ?f5 ?f6 ?f7" svg:viewBox="0 0 0 0" draw:type="ooxml-roundRect" draw:modifiers="48148" draw:enhanced-path="M 0 ?f2 L ?f3 0 L ?f11 ?f4 L ?f2 ?f10 Z N" drawooo:enhanced-path="M 0 ?f2 G ?f2 ?f2 ?f12 ?f13 L ?f3 0 G ?f2 ?f2 ?f14 ?f15 L ?f11 ?f4 G ?f2 ?f2 ?f16 ?f17 L ?f2 ?f10 G ?f2 ?f2 ?f18 ?f19 Z N">
+        <draw:custom-shape draw:name="Shape 0" draw:style-name="gr83" draw:text-style-name="P33" draw:layer="layout" svg:width="3.426cm" svg:height="0.683cm" svg:x="1.27cm" svg:y="0.635cm">
+          <text:p/>
+          <draw:enhanced-geometry draw:mirror-horizontal="false" draw:mirror-vertical="false" svg:viewBox="0 0 0 0" draw:glue-points="?f8 0 0 ?f9 ?f8 ?f10 ?f11 ?f9" draw:text-areas="?f5 ?f5 ?f6 ?f7" draw:type="ooxml-roundRect" draw:modifiers="48148" draw:enhanced-path="M 0 ?f2 L ?f3 0 L ?f11 ?f4 L ?f2 ?f10 Z N" drawooo:enhanced-path="M 0 ?f2 G ?f2 ?f2 ?f12 ?f13 L ?f3 0 G ?f2 ?f2 ?f14 ?f15 L ?f11 ?f4 G ?f2 ?f2 ?f16 ?f17 L ?f2 ?f10 G ?f2 ?f2 ?f18 ?f19 Z N">
             <draw:equation draw:name="f0" draw:formula="if(0-$0 ,0,if(50000-$0 ,$0 ,50000))"/>
             <draw:equation draw:name="f1" draw:formula="min(logwidth,logheight)"/>
             <draw:equation draw:name="f2" draw:formula="?f1 *?f0 /100000"/>
@@ -6753,14 +6693,14 @@
             <draw:equation draw:name="f17" draw:formula="(5400000)/60000.0"/>
             <draw:equation draw:name="f18" draw:formula="(5400000)/60000.0"/>
             <draw:equation draw:name="f19" draw:formula="(5400000)/60000.0"/>
-            <draw:handle draw:handle-position="?f2 0" draw:handle-position-x="?f2" draw:handle-position-y="0" draw:handle-range-x-maximum="50000" draw:handle-range-x-minimum="0"/>
-          </draw:enhanced-geometry>
-        </draw:custom-shape>
-        <draw:custom-shape draw:name="Text 1" draw:style-name="gr84" draw:text-style-name="P14" draw:layer="layout" svg:width="3.426cm" svg:height="0.683cm" svg:x="1.27cm" svg:y="0.635cm">
-          <text:p text:style-name="P13">
+            <draw:handle draw:handle-range-x-maximum="50000" draw:handle-range-x-minimum="0" draw:handle-position="?f2 0" draw:handle-position-x="?f2" draw:handle-position-y="0"/>
+          </draw:enhanced-geometry>
+        </draw:custom-shape>
+        <draw:custom-shape draw:name="Text 1" draw:style-name="gr84" draw:text-style-name="P16" draw:layer="layout" svg:width="3.426cm" svg:height="0.683cm" svg:x="1.27cm" svg:y="0.635cm">
+          <text:p text:style-name="P15">
             <text:span text:style-name="T8">PRESCRIPTIVE</text:span>
           </text:p>
-          <draw:enhanced-geometry draw:mirror-horizontal="false" draw:mirror-vertical="false" draw:glue-points="?f0 0 0 ?f1 ?f0 ?f2 ?f3 ?f1" draw:text-areas="0 0 ?f3 ?f2" svg:viewBox="0 0 0 0" draw:type="ooxml-rect" draw:enhanced-path="M 0 0 L ?f3 0 ?f3 ?f2 0 ?f2 Z N">
+          <draw:enhanced-geometry draw:mirror-horizontal="false" draw:mirror-vertical="false" svg:viewBox="0 0 0 0" draw:glue-points="?f0 0 0 ?f1 ?f0 ?f2 ?f3 ?f1" draw:text-areas="0 0 ?f3 ?f2" draw:type="ooxml-rect" draw:enhanced-path="M 0 0 L ?f3 0 ?f3 ?f2 0 ?f2 Z N">
             <draw:equation draw:name="f0" draw:formula="logwidth/2"/>
             <draw:equation draw:name="f1" draw:formula="logheight/2"/>
             <draw:equation draw:name="f2" draw:formula="logheight"/>
@@ -6771,7 +6711,7 @@
           <text:p text:style-name="P2">
             <text:span text:style-name="T24">What should we do?</text:span>
           </text:p>
-          <draw:enhanced-geometry draw:mirror-horizontal="false" draw:mirror-vertical="false" draw:glue-points="?f0 0 0 ?f1 ?f0 ?f2 ?f3 ?f1" draw:text-areas="0 0 ?f3 ?f2" svg:viewBox="0 0 0 0" draw:type="ooxml-rect" draw:enhanced-path="M 0 0 L ?f3 0 ?f3 ?f2 0 ?f2 Z N">
+          <draw:enhanced-geometry draw:mirror-horizontal="false" draw:mirror-vertical="false" svg:viewBox="0 0 0 0" draw:glue-points="?f0 0 0 ?f1 ?f0 ?f2 ?f3 ?f1" draw:text-areas="0 0 ?f3 ?f2" draw:type="ooxml-rect" draw:enhanced-path="M 0 0 L ?f3 0 ?f3 ?f2 0 ?f2 Z N">
             <draw:equation draw:name="f0" draw:formula="logwidth/2"/>
             <draw:equation draw:name="f1" draw:formula="logheight/2"/>
             <draw:equation draw:name="f2" draw:formula="logheight"/>
@@ -6782,7 +6722,7 @@
           <text:p text:style-name="P2">
             <text:span text:style-name="T9">Kidney Function: Two Risks at Two Stages</text:span>
           </text:p>
-          <draw:enhanced-geometry draw:mirror-horizontal="false" draw:mirror-vertical="false" draw:glue-points="?f0 0 0 ?f1 ?f0 ?f2 ?f3 ?f1" draw:text-areas="0 0 ?f3 ?f2" svg:viewBox="0 0 0 0" draw:type="ooxml-rect" draw:enhanced-path="M 0 0 L ?f3 0 ?f3 ?f2 0 ?f2 Z N">
+          <draw:enhanced-geometry draw:mirror-horizontal="false" draw:mirror-vertical="false" svg:viewBox="0 0 0 0" draw:glue-points="?f0 0 0 ?f1 ?f0 ?f2 ?f3 ?f1" draw:text-areas="0 0 ?f3 ?f2" draw:type="ooxml-rect" draw:enhanced-path="M 0 0 L ?f3 0 ?f3 ?f2 0 ?f2 Z N">
             <draw:equation draw:name="f0" draw:formula="logwidth/2"/>
             <draw:equation draw:name="f1" draw:formula="logheight/2"/>
             <draw:equation draw:name="f2" draw:formula="logheight"/>
@@ -6791,18 +6731,18 @@
         </draw:custom-shape>
         <draw:custom-shape draw:name="Text 4" draw:style-name="gr87" draw:text-style-name="P3" draw:layer="layout" svg:width="22.857cm" svg:height="0.657cm" svg:x="1.27cm" svg:y="2.692cm">
           <text:p text:style-name="P2">
-            <text:span text:style-name="T21">Dashboard charts: 6-month readmission and mortality by eGFR stage (G1 normal → G5 failure)</text:span>
-          </text:p>
-          <draw:enhanced-geometry draw:mirror-horizontal="false" draw:mirror-vertical="false" draw:glue-points="?f0 0 0 ?f1 ?f0 ?f2 ?f3 ?f1" draw:text-areas="0 0 ?f3 ?f2" svg:viewBox="0 0 0 0" draw:type="ooxml-rect" draw:enhanced-path="M 0 0 L ?f3 0 ?f3 ?f2 0 ?f2 Z N">
-            <draw:equation draw:name="f0" draw:formula="logwidth/2"/>
-            <draw:equation draw:name="f1" draw:formula="logheight/2"/>
-            <draw:equation draw:name="f2" draw:formula="logheight"/>
-            <draw:equation draw:name="f3" draw:formula="logwidth"/>
-          </draw:enhanced-geometry>
-        </draw:custom-shape>
-        <draw:custom-shape draw:name="Shape 5" draw:style-name="gr16" draw:text-style-name="P16" draw:layer="layout" svg:width="2.283cm" svg:height="0.505cm" svg:x="14.224cm" svg:y="13.411cm">
-          <text:p/>
-          <draw:enhanced-geometry draw:mirror-horizontal="false" draw:mirror-vertical="false" draw:glue-points="?f8 0 0 ?f9 ?f8 ?f10 ?f11 ?f9" draw:text-areas="?f5 ?f5 ?f6 ?f7" svg:viewBox="0 0 0 0" draw:type="ooxml-roundRect" draw:modifiers="50000" draw:enhanced-path="M 0 ?f2 L ?f3 0 L ?f11 ?f4 L ?f2 ?f10 Z N" drawooo:enhanced-path="M 0 ?f2 G ?f2 ?f2 ?f12 ?f13 L ?f3 0 G ?f2 ?f2 ?f14 ?f15 L ?f11 ?f4 G ?f2 ?f2 ?f16 ?f17 L ?f2 ?f10 G ?f2 ?f2 ?f18 ?f19 Z N">
+            <text:span text:style-name="T21"/>
+          </text:p>
+          <draw:enhanced-geometry draw:mirror-horizontal="false" draw:mirror-vertical="false" svg:viewBox="0 0 0 0" draw:glue-points="?f0 0 0 ?f1 ?f0 ?f2 ?f3 ?f1" draw:text-areas="0 0 ?f3 ?f2" draw:type="ooxml-rect" draw:enhanced-path="M 0 0 L ?f3 0 ?f3 ?f2 0 ?f2 Z N">
+            <draw:equation draw:name="f0" draw:formula="logwidth/2"/>
+            <draw:equation draw:name="f1" draw:formula="logheight/2"/>
+            <draw:equation draw:name="f2" draw:formula="logheight"/>
+            <draw:equation draw:name="f3" draw:formula="logwidth"/>
+          </draw:enhanced-geometry>
+        </draw:custom-shape>
+        <draw:custom-shape draw:name="Shape 5" draw:style-name="gr16" draw:text-style-name="P18" draw:layer="layout" svg:width="2.283cm" svg:height="0.505cm" svg:x="14.224cm" svg:y="13.411cm">
+          <text:p/>
+          <draw:enhanced-geometry draw:mirror-horizontal="false" draw:mirror-vertical="false" svg:viewBox="0 0 0 0" draw:glue-points="?f8 0 0 ?f9 ?f8 ?f10 ?f11 ?f9" draw:text-areas="?f5 ?f5 ?f6 ?f7" draw:type="ooxml-roundRect" draw:modifiers="50000" draw:enhanced-path="M 0 ?f2 L ?f3 0 L ?f11 ?f4 L ?f2 ?f10 Z N" drawooo:enhanced-path="M 0 ?f2 G ?f2 ?f2 ?f12 ?f13 L ?f3 0 G ?f2 ?f2 ?f14 ?f15 L ?f11 ?f4 G ?f2 ?f2 ?f16 ?f17 L ?f2 ?f10 G ?f2 ?f2 ?f18 ?f19 Z N">
             <draw:equation draw:name="f0" draw:formula="if(0-$0 ,0,if(50000-$0 ,$0 ,50000))"/>
             <draw:equation draw:name="f1" draw:formula="min(logwidth,logheight)"/>
             <draw:equation draw:name="f2" draw:formula="?f1 *?f0 /100000"/>
@@ -6823,23 +6763,23 @@
             <draw:equation draw:name="f17" draw:formula="(5400000)/60000.0"/>
             <draw:equation draw:name="f18" draw:formula="(5400000)/60000.0"/>
             <draw:equation draw:name="f19" draw:formula="(5400000)/60000.0"/>
-            <draw:handle draw:handle-position="?f2 0" draw:handle-position-x="?f2" draw:handle-position-y="0" draw:handle-range-x-maximum="50000" draw:handle-range-x-minimum="0"/>
-          </draw:enhanced-geometry>
-        </draw:custom-shape>
-        <draw:custom-shape draw:name="Text 6" draw:style-name="gr88" draw:text-style-name="P14" draw:layer="layout" svg:width="2.283cm" svg:height="0.505cm" svg:x="14.224cm" svg:y="13.411cm">
-          <text:p text:style-name="P13">
+            <draw:handle draw:handle-range-x-maximum="50000" draw:handle-range-x-minimum="0" draw:handle-position="?f2 0" draw:handle-position-x="?f2" draw:handle-position-y="0"/>
+          </draw:enhanced-geometry>
+        </draw:custom-shape>
+        <draw:custom-shape draw:name="Text 6" draw:style-name="gr88" draw:text-style-name="P16" draw:layer="layout" svg:width="2.283cm" svg:height="0.505cm" svg:x="14.224cm" svg:y="13.411cm">
+          <text:p text:style-name="P15">
             <text:span text:style-name="T11">KPIs</text:span>
           </text:p>
-          <draw:enhanced-geometry draw:mirror-horizontal="false" draw:mirror-vertical="false" draw:glue-points="?f0 0 0 ?f1 ?f0 ?f2 ?f3 ?f1" draw:text-areas="0 0 ?f3 ?f2" svg:viewBox="0 0 0 0" draw:type="ooxml-rect" draw:enhanced-path="M 0 0 L ?f3 0 ?f3 ?f2 0 ?f2 Z N">
-            <draw:equation draw:name="f0" draw:formula="logwidth/2"/>
-            <draw:equation draw:name="f1" draw:formula="logheight/2"/>
-            <draw:equation draw:name="f2" draw:formula="logheight"/>
-            <draw:equation draw:name="f3" draw:formula="logwidth"/>
-          </draw:enhanced-geometry>
-        </draw:custom-shape>
-        <draw:custom-shape draw:name="Shape 7" draw:style-name="gr16" draw:text-style-name="P16" draw:layer="layout" svg:width="2.283cm" svg:height="0.505cm" svg:x="16.739cm" svg:y="13.411cm">
-          <text:p/>
-          <draw:enhanced-geometry draw:mirror-horizontal="false" draw:mirror-vertical="false" draw:glue-points="?f8 0 0 ?f9 ?f8 ?f10 ?f11 ?f9" draw:text-areas="?f5 ?f5 ?f6 ?f7" svg:viewBox="0 0 0 0" draw:type="ooxml-roundRect" draw:modifiers="50000" draw:enhanced-path="M 0 ?f2 L ?f3 0 L ?f11 ?f4 L ?f2 ?f10 Z N" drawooo:enhanced-path="M 0 ?f2 G ?f2 ?f2 ?f12 ?f13 L ?f3 0 G ?f2 ?f2 ?f14 ?f15 L ?f11 ?f4 G ?f2 ?f2 ?f16 ?f17 L ?f2 ?f10 G ?f2 ?f2 ?f18 ?f19 Z N">
+          <draw:enhanced-geometry draw:mirror-horizontal="false" draw:mirror-vertical="false" svg:viewBox="0 0 0 0" draw:glue-points="?f0 0 0 ?f1 ?f0 ?f2 ?f3 ?f1" draw:text-areas="0 0 ?f3 ?f2" draw:type="ooxml-rect" draw:enhanced-path="M 0 0 L ?f3 0 ?f3 ?f2 0 ?f2 Z N">
+            <draw:equation draw:name="f0" draw:formula="logwidth/2"/>
+            <draw:equation draw:name="f1" draw:formula="logheight/2"/>
+            <draw:equation draw:name="f2" draw:formula="logheight"/>
+            <draw:equation draw:name="f3" draw:formula="logwidth"/>
+          </draw:enhanced-geometry>
+        </draw:custom-shape>
+        <draw:custom-shape draw:name="Shape 7" draw:style-name="gr16" draw:text-style-name="P18" draw:layer="layout" svg:width="2.283cm" svg:height="0.505cm" svg:x="16.739cm" svg:y="13.411cm">
+          <text:p/>
+          <draw:enhanced-geometry draw:mirror-horizontal="false" draw:mirror-vertical="false" svg:viewBox="0 0 0 0" draw:glue-points="?f8 0 0 ?f9 ?f8 ?f10 ?f11 ?f9" draw:text-areas="?f5 ?f5 ?f6 ?f7" draw:type="ooxml-roundRect" draw:modifiers="50000" draw:enhanced-path="M 0 ?f2 L ?f3 0 L ?f11 ?f4 L ?f2 ?f10 Z N" drawooo:enhanced-path="M 0 ?f2 G ?f2 ?f2 ?f12 ?f13 L ?f3 0 G ?f2 ?f2 ?f14 ?f15 L ?f11 ?f4 G ?f2 ?f2 ?f16 ?f17 L ?f2 ?f10 G ?f2 ?f2 ?f18 ?f19 Z N">
             <draw:equation draw:name="f0" draw:formula="if(0-$0 ,0,if(50000-$0 ,$0 ,50000))"/>
             <draw:equation draw:name="f1" draw:formula="min(logwidth,logheight)"/>
             <draw:equation draw:name="f2" draw:formula="?f1 *?f0 /100000"/>
@@ -6860,23 +6800,23 @@
             <draw:equation draw:name="f17" draw:formula="(5400000)/60000.0"/>
             <draw:equation draw:name="f18" draw:formula="(5400000)/60000.0"/>
             <draw:equation draw:name="f19" draw:formula="(5400000)/60000.0"/>
-            <draw:handle draw:handle-position="?f2 0" draw:handle-position-x="?f2" draw:handle-position-y="0" draw:handle-range-x-maximum="50000" draw:handle-range-x-minimum="0"/>
-          </draw:enhanced-geometry>
-        </draw:custom-shape>
-        <draw:custom-shape draw:name="Text 8" draw:style-name="gr89" draw:text-style-name="P14" draw:layer="layout" svg:width="2.283cm" svg:height="0.505cm" svg:x="16.739cm" svg:y="13.411cm">
-          <text:p text:style-name="P13">
+            <draw:handle draw:handle-range-x-maximum="50000" draw:handle-range-x-minimum="0" draw:handle-position="?f2 0" draw:handle-position-x="?f2" draw:handle-position-y="0"/>
+          </draw:enhanced-geometry>
+        </draw:custom-shape>
+        <draw:custom-shape draw:name="Text 8" draw:style-name="gr89" draw:text-style-name="P16" draw:layer="layout" svg:width="2.283cm" svg:height="0.505cm" svg:x="16.739cm" svg:y="13.411cm">
+          <text:p text:style-name="P15">
             <text:span text:style-name="T11">Descriptive</text:span>
           </text:p>
-          <draw:enhanced-geometry draw:mirror-horizontal="false" draw:mirror-vertical="false" draw:glue-points="?f0 0 0 ?f1 ?f0 ?f2 ?f3 ?f1" draw:text-areas="0 0 ?f3 ?f2" svg:viewBox="0 0 0 0" draw:type="ooxml-rect" draw:enhanced-path="M 0 0 L ?f3 0 ?f3 ?f2 0 ?f2 Z N">
-            <draw:equation draw:name="f0" draw:formula="logwidth/2"/>
-            <draw:equation draw:name="f1" draw:formula="logheight/2"/>
-            <draw:equation draw:name="f2" draw:formula="logheight"/>
-            <draw:equation draw:name="f3" draw:formula="logwidth"/>
-          </draw:enhanced-geometry>
-        </draw:custom-shape>
-        <draw:custom-shape draw:name="Shape 9" draw:style-name="gr90" draw:text-style-name="P31" draw:layer="layout" svg:width="2.283cm" svg:height="0.505cm" svg:x="19.253cm" svg:y="13.411cm">
-          <text:p/>
-          <draw:enhanced-geometry draw:mirror-horizontal="false" draw:mirror-vertical="false" draw:glue-points="?f8 0 0 ?f9 ?f8 ?f10 ?f11 ?f9" draw:text-areas="?f5 ?f5 ?f6 ?f7" svg:viewBox="0 0 0 0" draw:type="ooxml-roundRect" draw:modifiers="50000" draw:enhanced-path="M 0 ?f2 L ?f3 0 L ?f11 ?f4 L ?f2 ?f10 Z N" drawooo:enhanced-path="M 0 ?f2 G ?f2 ?f2 ?f12 ?f13 L ?f3 0 G ?f2 ?f2 ?f14 ?f15 L ?f11 ?f4 G ?f2 ?f2 ?f16 ?f17 L ?f2 ?f10 G ?f2 ?f2 ?f18 ?f19 Z N">
+          <draw:enhanced-geometry draw:mirror-horizontal="false" draw:mirror-vertical="false" svg:viewBox="0 0 0 0" draw:glue-points="?f0 0 0 ?f1 ?f0 ?f2 ?f3 ?f1" draw:text-areas="0 0 ?f3 ?f2" draw:type="ooxml-rect" draw:enhanced-path="M 0 0 L ?f3 0 ?f3 ?f2 0 ?f2 Z N">
+            <draw:equation draw:name="f0" draw:formula="logwidth/2"/>
+            <draw:equation draw:name="f1" draw:formula="logheight/2"/>
+            <draw:equation draw:name="f2" draw:formula="logheight"/>
+            <draw:equation draw:name="f3" draw:formula="logwidth"/>
+          </draw:enhanced-geometry>
+        </draw:custom-shape>
+        <draw:custom-shape draw:name="Shape 9" draw:style-name="gr90" draw:text-style-name="P33" draw:layer="layout" svg:width="2.283cm" svg:height="0.505cm" svg:x="19.253cm" svg:y="13.411cm">
+          <text:p/>
+          <draw:enhanced-geometry draw:mirror-horizontal="false" draw:mirror-vertical="false" svg:viewBox="0 0 0 0" draw:glue-points="?f8 0 0 ?f9 ?f8 ?f10 ?f11 ?f9" draw:text-areas="?f5 ?f5 ?f6 ?f7" draw:type="ooxml-roundRect" draw:modifiers="50000" draw:enhanced-path="M 0 ?f2 L ?f3 0 L ?f11 ?f4 L ?f2 ?f10 Z N" drawooo:enhanced-path="M 0 ?f2 G ?f2 ?f2 ?f12 ?f13 L ?f3 0 G ?f2 ?f2 ?f14 ?f15 L ?f11 ?f4 G ?f2 ?f2 ?f16 ?f17 L ?f2 ?f10 G ?f2 ?f2 ?f18 ?f19 Z N">
             <draw:equation draw:name="f0" draw:formula="if(0-$0 ,0,if(50000-$0 ,$0 ,50000))"/>
             <draw:equation draw:name="f1" draw:formula="min(logwidth,logheight)"/>
             <draw:equation draw:name="f2" draw:formula="?f1 *?f0 /100000"/>
@@ -6897,23 +6837,23 @@
             <draw:equation draw:name="f17" draw:formula="(5400000)/60000.0"/>
             <draw:equation draw:name="f18" draw:formula="(5400000)/60000.0"/>
             <draw:equation draw:name="f19" draw:formula="(5400000)/60000.0"/>
-            <draw:handle draw:handle-position="?f2 0" draw:handle-position-x="?f2" draw:handle-position-y="0" draw:handle-range-x-maximum="50000" draw:handle-range-x-minimum="0"/>
-          </draw:enhanced-geometry>
-        </draw:custom-shape>
-        <draw:custom-shape draw:name="Text 10" draw:style-name="gr91" draw:text-style-name="P14" draw:layer="layout" svg:width="2.283cm" svg:height="0.505cm" svg:x="19.253cm" svg:y="13.411cm">
-          <text:p text:style-name="P13">
+            <draw:handle draw:handle-range-x-maximum="50000" draw:handle-range-x-minimum="0" draw:handle-position="?f2 0" draw:handle-position-x="?f2" draw:handle-position-y="0"/>
+          </draw:enhanced-geometry>
+        </draw:custom-shape>
+        <draw:custom-shape draw:name="Text 10" draw:style-name="gr91" draw:text-style-name="P16" draw:layer="layout" svg:width="2.283cm" svg:height="0.505cm" svg:x="19.253cm" svg:y="13.411cm">
+          <text:p text:style-name="P15">
             <text:span text:style-name="T10">Prescriptive</text:span>
           </text:p>
-          <draw:enhanced-geometry draw:mirror-horizontal="false" draw:mirror-vertical="false" draw:glue-points="?f0 0 0 ?f1 ?f0 ?f2 ?f3 ?f1" draw:text-areas="0 0 ?f3 ?f2" svg:viewBox="0 0 0 0" draw:type="ooxml-rect" draw:enhanced-path="M 0 0 L ?f3 0 ?f3 ?f2 0 ?f2 Z N">
-            <draw:equation draw:name="f0" draw:formula="logwidth/2"/>
-            <draw:equation draw:name="f1" draw:formula="logheight/2"/>
-            <draw:equation draw:name="f2" draw:formula="logheight"/>
-            <draw:equation draw:name="f3" draw:formula="logwidth"/>
-          </draw:enhanced-geometry>
-        </draw:custom-shape>
-        <draw:custom-shape draw:name="Shape 11" draw:style-name="gr16" draw:text-style-name="P16" draw:layer="layout" svg:width="2.283cm" svg:height="0.505cm" svg:x="21.768cm" svg:y="13.411cm">
-          <text:p/>
-          <draw:enhanced-geometry draw:mirror-horizontal="false" draw:mirror-vertical="false" draw:glue-points="?f8 0 0 ?f9 ?f8 ?f10 ?f11 ?f9" draw:text-areas="?f5 ?f5 ?f6 ?f7" svg:viewBox="0 0 0 0" draw:type="ooxml-roundRect" draw:modifiers="50000" draw:enhanced-path="M 0 ?f2 L ?f3 0 L ?f11 ?f4 L ?f2 ?f10 Z N" drawooo:enhanced-path="M 0 ?f2 G ?f2 ?f2 ?f12 ?f13 L ?f3 0 G ?f2 ?f2 ?f14 ?f15 L ?f11 ?f4 G ?f2 ?f2 ?f16 ?f17 L ?f2 ?f10 G ?f2 ?f2 ?f18 ?f19 Z N">
+          <draw:enhanced-geometry draw:mirror-horizontal="false" draw:mirror-vertical="false" svg:viewBox="0 0 0 0" draw:glue-points="?f0 0 0 ?f1 ?f0 ?f2 ?f3 ?f1" draw:text-areas="0 0 ?f3 ?f2" draw:type="ooxml-rect" draw:enhanced-path="M 0 0 L ?f3 0 ?f3 ?f2 0 ?f2 Z N">
+            <draw:equation draw:name="f0" draw:formula="logwidth/2"/>
+            <draw:equation draw:name="f1" draw:formula="logheight/2"/>
+            <draw:equation draw:name="f2" draw:formula="logheight"/>
+            <draw:equation draw:name="f3" draw:formula="logwidth"/>
+          </draw:enhanced-geometry>
+        </draw:custom-shape>
+        <draw:custom-shape draw:name="Shape 11" draw:style-name="gr16" draw:text-style-name="P18" draw:layer="layout" svg:width="2.283cm" svg:height="0.505cm" svg:x="21.768cm" svg:y="13.411cm">
+          <text:p/>
+          <draw:enhanced-geometry draw:mirror-horizontal="false" draw:mirror-vertical="false" svg:viewBox="0 0 0 0" draw:glue-points="?f8 0 0 ?f9 ?f8 ?f10 ?f11 ?f9" draw:text-areas="?f5 ?f5 ?f6 ?f7" draw:type="ooxml-roundRect" draw:modifiers="50000" draw:enhanced-path="M 0 ?f2 L ?f3 0 L ?f11 ?f4 L ?f2 ?f10 Z N" drawooo:enhanced-path="M 0 ?f2 G ?f2 ?f2 ?f12 ?f13 L ?f3 0 G ?f2 ?f2 ?f14 ?f15 L ?f11 ?f4 G ?f2 ?f2 ?f16 ?f17 L ?f2 ?f10 G ?f2 ?f2 ?f18 ?f19 Z N">
             <draw:equation draw:name="f0" draw:formula="if(0-$0 ,0,if(50000-$0 ,$0 ,50000))"/>
             <draw:equation draw:name="f1" draw:formula="min(logwidth,logheight)"/>
             <draw:equation draw:name="f2" draw:formula="?f1 *?f0 /100000"/>
@@ -6934,35 +6874,35 @@
             <draw:equation draw:name="f17" draw:formula="(5400000)/60000.0"/>
             <draw:equation draw:name="f18" draw:formula="(5400000)/60000.0"/>
             <draw:equation draw:name="f19" draw:formula="(5400000)/60000.0"/>
-            <draw:handle draw:handle-position="?f2 0" draw:handle-position-x="?f2" draw:handle-position-y="0" draw:handle-range-x-maximum="50000" draw:handle-range-x-minimum="0"/>
-          </draw:enhanced-geometry>
-        </draw:custom-shape>
-        <draw:custom-shape draw:name="Text 12" draw:style-name="gr92" draw:text-style-name="P14" draw:layer="layout" svg:width="2.283cm" svg:height="0.505cm" svg:x="21.768cm" svg:y="13.411cm">
-          <text:p text:style-name="P13">
+            <draw:handle draw:handle-range-x-maximum="50000" draw:handle-range-x-minimum="0" draw:handle-position="?f2 0" draw:handle-position-x="?f2" draw:handle-position-y="0"/>
+          </draw:enhanced-geometry>
+        </draw:custom-shape>
+        <draw:custom-shape draw:name="Text 12" draw:style-name="gr92" draw:text-style-name="P16" draw:layer="layout" svg:width="2.283cm" svg:height="0.505cm" svg:x="21.768cm" svg:y="13.411cm">
+          <text:p text:style-name="P15">
             <text:span text:style-name="T11">Predictive</text:span>
           </text:p>
-          <draw:enhanced-geometry draw:mirror-horizontal="false" draw:mirror-vertical="false" draw:glue-points="?f0 0 0 ?f1 ?f0 ?f2 ?f3 ?f1" draw:text-areas="0 0 ?f3 ?f2" svg:viewBox="0 0 0 0" draw:type="ooxml-rect" draw:enhanced-path="M 0 0 L ?f3 0 ?f3 ?f2 0 ?f2 Z N">
-            <draw:equation draw:name="f0" draw:formula="logwidth/2"/>
-            <draw:equation draw:name="f1" draw:formula="logheight/2"/>
-            <draw:equation draw:name="f2" draw:formula="logheight"/>
-            <draw:equation draw:name="f3" draw:formula="logwidth"/>
-          </draw:enhanced-geometry>
-        </draw:custom-shape>
-        <draw:frame draw:name="Chart 0" draw:style-name="gr69" draw:text-style-name="P6" draw:layer="layout" svg:width="11.681cm" svg:height="6.474cm" svg:x="1.016cm" svg:y="3.505cm">
+          <draw:enhanced-geometry draw:mirror-horizontal="false" draw:mirror-vertical="false" svg:viewBox="0 0 0 0" draw:glue-points="?f0 0 0 ?f1 ?f0 ?f2 ?f3 ?f1" draw:text-areas="0 0 ?f3 ?f2" draw:type="ooxml-rect" draw:enhanced-path="M 0 0 L ?f3 0 ?f3 ?f2 0 ?f2 Z N">
+            <draw:equation draw:name="f0" draw:formula="logwidth/2"/>
+            <draw:equation draw:name="f1" draw:formula="logheight/2"/>
+            <draw:equation draw:name="f2" draw:formula="logheight"/>
+            <draw:equation draw:name="f3" draw:formula="logwidth"/>
+          </draw:enhanced-geometry>
+        </draw:custom-shape>
+        <draw:frame draw:name="Chart 0" draw:style-name="gr69" draw:text-style-name="P8" draw:layer="layout" svg:width="11.681cm" svg:height="6.474cm" svg:x="1.016cm" svg:y="3.505cm">
           <draw:object xlink:href="./Object 5" xlink:type="simple" xlink:show="embed" xlink:actuate="onLoad">
             <loext:p/>
           </draw:object>
           <draw:image xlink:href="./ObjectReplacements/Object 5" xlink:type="simple" xlink:show="embed" xlink:actuate="onLoad"/>
         </draw:frame>
-        <draw:frame draw:name="Chart 1" draw:style-name="gr69" draw:text-style-name="P6" draw:layer="layout" svg:width="11.427cm" svg:height="6.474cm" svg:x="12.954cm" svg:y="3.505cm">
+        <draw:frame draw:name="Chart 1" draw:style-name="gr69" draw:text-style-name="P8" draw:layer="layout" svg:width="11.427cm" svg:height="6.474cm" svg:x="12.954cm" svg:y="3.505cm">
           <draw:object xlink:href="./Object 6" xlink:type="simple" xlink:show="embed" xlink:actuate="onLoad">
             <loext:p/>
           </draw:object>
           <draw:image xlink:href="./ObjectReplacements/Object 6" xlink:type="simple" xlink:show="embed" xlink:actuate="onLoad"/>
         </draw:frame>
-        <draw:custom-shape draw:name="Shape 13" draw:style-name="gr20" draw:text-style-name="P16" draw:layer="layout" svg:width="11.173cm" svg:height="2.842cm" svg:x="1.27cm" svg:y="10.211cm">
-          <text:p/>
-          <draw:enhanced-geometry draw:mirror-horizontal="false" draw:mirror-vertical="false" draw:glue-points="?f8 0 0 ?f9 ?f8 ?f10 ?f11 ?f9" draw:text-areas="?f5 ?f5 ?f6 ?f7" svg:viewBox="0 0 0 0" draw:type="ooxml-roundRect" draw:modifiers="7143" draw:enhanced-path="M 0 ?f2 L ?f3 0 L ?f11 ?f4 L ?f2 ?f10 Z N" drawooo:enhanced-path="M 0 ?f2 G ?f2 ?f2 ?f12 ?f13 L ?f3 0 G ?f2 ?f2 ?f14 ?f15 L ?f11 ?f4 G ?f2 ?f2 ?f16 ?f17 L ?f2 ?f10 G ?f2 ?f2 ?f18 ?f19 Z N">
+        <draw:custom-shape draw:name="Shape 13" draw:style-name="gr20" draw:text-style-name="P18" draw:layer="layout" svg:width="11.173cm" svg:height="2.842cm" svg:x="1.27cm" svg:y="10.211cm">
+          <text:p/>
+          <draw:enhanced-geometry draw:mirror-horizontal="false" draw:mirror-vertical="false" svg:viewBox="0 0 0 0" draw:glue-points="?f8 0 0 ?f9 ?f8 ?f10 ?f11 ?f9" draw:text-areas="?f5 ?f5 ?f6 ?f7" draw:type="ooxml-roundRect" draw:modifiers="7143" draw:enhanced-path="M 0 ?f2 L ?f3 0 L ?f11 ?f4 L ?f2 ?f10 Z N" drawooo:enhanced-path="M 0 ?f2 G ?f2 ?f2 ?f12 ?f13 L ?f3 0 G ?f2 ?f2 ?f14 ?f15 L ?f11 ?f4 G ?f2 ?f2 ?f16 ?f17 L ?f2 ?f10 G ?f2 ?f2 ?f18 ?f19 Z N">
             <draw:equation draw:name="f0" draw:formula="if(0-$0 ,0,if(50000-$0 ,$0 ,50000))"/>
             <draw:equation draw:name="f1" draw:formula="min(logwidth,logheight)"/>
             <draw:equation draw:name="f2" draw:formula="?f1 *?f0 /100000"/>
@@ -6983,34 +6923,34 @@
             <draw:equation draw:name="f17" draw:formula="(5400000)/60000.0"/>
             <draw:equation draw:name="f18" draw:formula="(5400000)/60000.0"/>
             <draw:equation draw:name="f19" draw:formula="(5400000)/60000.0"/>
-            <draw:handle draw:handle-position="?f2 0" draw:handle-position-x="?f2" draw:handle-position-y="0" draw:handle-range-x-maximum="50000" draw:handle-range-x-minimum="0"/>
-          </draw:enhanced-geometry>
-        </draw:custom-shape>
-        <draw:custom-shape draw:name="Text 14" draw:style-name="gr93" draw:text-style-name="P29" draw:layer="layout" svg:width="10.411cm" svg:height="2.435cm" svg:x="1.651cm" svg:y="10.414cm">
-          <text:p text:style-name="P28">
+            <draw:handle draw:handle-range-x-maximum="50000" draw:handle-range-x-minimum="0" draw:handle-position="?f2 0" draw:handle-position-x="?f2" draw:handle-position-y="0"/>
+          </draw:enhanced-geometry>
+        </draw:custom-shape>
+        <draw:custom-shape draw:name="Text 14" draw:style-name="gr93" draw:text-style-name="P31" draw:layer="layout" svg:width="10.411cm" svg:height="2.435cm" svg:x="1.651cm" svg:y="10.414cm">
+          <text:p text:style-name="P30">
             <text:span text:style-name="T25">
               FINDING 
               <text:s/>
             </text:span>
             <text:span text:style-name="T23">Readmission rises to a peak of 50% at moderate kidney disease (G3b) and then falls.</text:span>
           </text:p>
-          <text:p text:style-name="P28">
+          <text:p text:style-name="P30">
             <text:span text:style-name="T25">
               ACTION 
               <text:s/>
             </text:span>
             <text:span text:style-name="T23">eGFR 30–59 → readmission pathway: clinic in 7–14 days, repeat kidney tests, diuretic review.</text:span>
           </text:p>
-          <draw:enhanced-geometry draw:mirror-horizontal="false" draw:mirror-vertical="false" draw:glue-points="?f0 0 0 ?f1 ?f0 ?f2 ?f3 ?f1" draw:text-areas="0 0 ?f3 ?f2" svg:viewBox="0 0 0 0" draw:type="ooxml-rect" draw:enhanced-path="M 0 0 L ?f3 0 ?f3 ?f2 0 ?f2 Z N">
-            <draw:equation draw:name="f0" draw:formula="logwidth/2"/>
-            <draw:equation draw:name="f1" draw:formula="logheight/2"/>
-            <draw:equation draw:name="f2" draw:formula="logheight"/>
-            <draw:equation draw:name="f3" draw:formula="logwidth"/>
-          </draw:enhanced-geometry>
-        </draw:custom-shape>
-        <draw:custom-shape draw:name="Shape 15" draw:style-name="gr20" draw:text-style-name="P16" draw:layer="layout" svg:width="11.173cm" svg:height="2.842cm" svg:x="12.954cm" svg:y="10.211cm">
-          <text:p/>
-          <draw:enhanced-geometry draw:mirror-horizontal="false" draw:mirror-vertical="false" draw:glue-points="?f8 0 0 ?f9 ?f8 ?f10 ?f11 ?f9" draw:text-areas="?f5 ?f5 ?f6 ?f7" svg:viewBox="0 0 0 0" draw:type="ooxml-roundRect" draw:modifiers="7143" draw:enhanced-path="M 0 ?f2 L ?f3 0 L ?f11 ?f4 L ?f2 ?f10 Z N" drawooo:enhanced-path="M 0 ?f2 G ?f2 ?f2 ?f12 ?f13 L ?f3 0 G ?f2 ?f2 ?f14 ?f15 L ?f11 ?f4 G ?f2 ?f2 ?f16 ?f17 L ?f2 ?f10 G ?f2 ?f2 ?f18 ?f19 Z N">
+          <draw:enhanced-geometry draw:mirror-horizontal="false" draw:mirror-vertical="false" svg:viewBox="0 0 0 0" draw:glue-points="?f0 0 0 ?f1 ?f0 ?f2 ?f3 ?f1" draw:text-areas="0 0 ?f3 ?f2" draw:type="ooxml-rect" draw:enhanced-path="M 0 0 L ?f3 0 ?f3 ?f2 0 ?f2 Z N">
+            <draw:equation draw:name="f0" draw:formula="logwidth/2"/>
+            <draw:equation draw:name="f1" draw:formula="logheight/2"/>
+            <draw:equation draw:name="f2" draw:formula="logheight"/>
+            <draw:equation draw:name="f3" draw:formula="logwidth"/>
+          </draw:enhanced-geometry>
+        </draw:custom-shape>
+        <draw:custom-shape draw:name="Shape 15" draw:style-name="gr20" draw:text-style-name="P18" draw:layer="layout" svg:width="11.173cm" svg:height="2.842cm" svg:x="12.954cm" svg:y="10.211cm">
+          <text:p/>
+          <draw:enhanced-geometry draw:mirror-horizontal="false" draw:mirror-vertical="false" svg:viewBox="0 0 0 0" draw:glue-points="?f8 0 0 ?f9 ?f8 ?f10 ?f11 ?f9" draw:text-areas="?f5 ?f5 ?f6 ?f7" draw:type="ooxml-roundRect" draw:modifiers="7143" draw:enhanced-path="M 0 ?f2 L ?f3 0 L ?f11 ?f4 L ?f2 ?f10 Z N" drawooo:enhanced-path="M 0 ?f2 G ?f2 ?f2 ?f12 ?f13 L ?f3 0 G ?f2 ?f2 ?f14 ?f15 L ?f11 ?f4 G ?f2 ?f2 ?f16 ?f17 L ?f2 ?f10 G ?f2 ?f2 ?f18 ?f19 Z N">
             <draw:equation draw:name="f0" draw:formula="if(0-$0 ,0,if(50000-$0 ,$0 ,50000))"/>
             <draw:equation draw:name="f1" draw:formula="min(logwidth,logheight)"/>
             <draw:equation draw:name="f2" draw:formula="?f1 *?f0 /100000"/>
@@ -7031,34 +6971,34 @@
             <draw:equation draw:name="f17" draw:formula="(5400000)/60000.0"/>
             <draw:equation draw:name="f18" draw:formula="(5400000)/60000.0"/>
             <draw:equation draw:name="f19" draw:formula="(5400000)/60000.0"/>
-            <draw:handle draw:handle-position="?f2 0" draw:handle-position-x="?f2" draw:handle-position-y="0" draw:handle-range-x-maximum="50000" draw:handle-range-x-minimum="0"/>
-          </draw:enhanced-geometry>
-        </draw:custom-shape>
-        <draw:custom-shape draw:name="Text 16" draw:style-name="gr94" draw:text-style-name="P29" draw:layer="layout" svg:width="10.411cm" svg:height="2.435cm" svg:x="13.335cm" svg:y="10.414cm">
-          <text:p text:style-name="P28">
+            <draw:handle draw:handle-range-x-maximum="50000" draw:handle-range-x-minimum="0" draw:handle-position="?f2 0" draw:handle-position-x="?f2" draw:handle-position-y="0"/>
+          </draw:enhanced-geometry>
+        </draw:custom-shape>
+        <draw:custom-shape draw:name="Text 16" draw:style-name="gr94" draw:text-style-name="P31" draw:layer="layout" svg:width="10.411cm" svg:height="2.435cm" svg:x="13.335cm" svg:y="10.414cm">
+          <text:p text:style-name="P30">
             <text:span text:style-name="T25">
               FINDING 
               <text:s/>
             </text:span>
             <text:span text:style-name="T23">Mortality stays around 2% until G3b, then jumps to 8–9% at G4–G5 (about 4×).</text:span>
           </text:p>
-          <text:p text:style-name="P28">
+          <text:p text:style-name="P30">
             <text:span text:style-name="T25">
               ACTION 
               <text:s/>
             </text:span>
             <text:span text:style-name="T23">eGFR &lt; 30 → nephrology co-management, renal dosing and an early goals-of-care talk.</text:span>
           </text:p>
-          <draw:enhanced-geometry draw:mirror-horizontal="false" draw:mirror-vertical="false" draw:glue-points="?f0 0 0 ?f1 ?f0 ?f2 ?f3 ?f1" draw:text-areas="0 0 ?f3 ?f2" svg:viewBox="0 0 0 0" draw:type="ooxml-rect" draw:enhanced-path="M 0 0 L ?f3 0 ?f3 ?f2 0 ?f2 Z N">
-            <draw:equation draw:name="f0" draw:formula="logwidth/2"/>
-            <draw:equation draw:name="f1" draw:formula="logheight/2"/>
-            <draw:equation draw:name="f2" draw:formula="logheight"/>
-            <draw:equation draw:name="f3" draw:formula="logwidth"/>
-          </draw:enhanced-geometry>
-        </draw:custom-shape>
-        <draw:custom-shape draw:name="Freeform 3" draw:style-name="gr95" draw:text-style-name="P32" draw:layer="layout" svg:width="1.347cm" svg:height="2.221cm" svg:x="23.971cm" svg:y="0.085cm">
-          <text:p/>
-          <draw:enhanced-geometry draw:mirror-horizontal="false" draw:mirror-vertical="false" drawooo:sub-view-size="647700 1066800" draw:text-areas="?f0 ?f2 ?f1 ?f3" svg:viewBox="0 0 0 0" draw:type="ooxml-non-primitive" draw:enhanced-path="M 0 0 L 647700 0 647700 1066800 0 1066800 0 0 Z N">
+          <draw:enhanced-geometry draw:mirror-horizontal="false" draw:mirror-vertical="false" svg:viewBox="0 0 0 0" draw:glue-points="?f0 0 0 ?f1 ?f0 ?f2 ?f3 ?f1" draw:text-areas="0 0 ?f3 ?f2" draw:type="ooxml-rect" draw:enhanced-path="M 0 0 L ?f3 0 ?f3 ?f2 0 ?f2 Z N">
+            <draw:equation draw:name="f0" draw:formula="logwidth/2"/>
+            <draw:equation draw:name="f1" draw:formula="logheight/2"/>
+            <draw:equation draw:name="f2" draw:formula="logheight"/>
+            <draw:equation draw:name="f3" draw:formula="logwidth"/>
+          </draw:enhanced-geometry>
+        </draw:custom-shape>
+        <draw:custom-shape draw:name="Freeform 3" draw:style-name="gr95" draw:text-style-name="P34" draw:layer="layout" svg:width="1.347cm" svg:height="2.221cm" svg:x="23.971cm" svg:y="0.085cm">
+          <text:p/>
+          <draw:enhanced-geometry draw:mirror-horizontal="false" draw:mirror-vertical="false" svg:viewBox="0 0 0 0" drawooo:sub-view-size="647700 1066800" draw:text-areas="?f0 ?f2 ?f1 ?f3" draw:type="ooxml-non-primitive" draw:enhanced-path="M 0 0 L 647700 0 647700 1066800 0 1066800 0 0 Z N">
             <draw:equation draw:name="f0" draw:formula="0*logwidth/485280"/>
             <draw:equation draw:name="f1" draw:formula="485640*logwidth/485280"/>
             <draw:equation draw:name="f2" draw:formula="0*logheight/799920"/>
@@ -7067,16 +7007,16 @@
         </draw:custom-shape>
         <presentation:notes draw:style-name="dp2">
           <draw:page-thumbnail draw:name="PlaceHolder 1" draw:style-name="gr10" draw:layer="layout" svg:width="15.237cm" svg:height="8.57cm" svg:x="1.905cm" svg:y="3.175cm" draw:page-number="5" presentation:class="page"/>
-          <draw:frame draw:name="PlaceHolder 2" presentation:style-name="pr1" draw:text-style-name="P9" draw:layer="layout" svg:width="15.237cm" svg:height="9.998cm" svg:x="1.905cm" svg:y="12.224cm" presentation:class="notes" presentation:user-transformed="true">
+          <draw:frame draw:name="PlaceHolder 2" presentation:style-name="pr1" draw:text-style-name="P11" draw:layer="layout" svg:width="15.237cm" svg:height="9.998cm" svg:x="1.905cm" svg:y="12.224cm" presentation:class="notes" presentation:user-transformed="true">
             <draw:text-box>
-              <text:p text:style-name="P8">
+              <text:p text:style-name="P10">
                 <text:span text:style-name="T6">Two line charts across kidney-function stages. The readmission line is an arch that peaks in the middle; the mortality line is flat and then shoots up at the severe end. A single straight-line kidney score misses both patterns, so the two risk groups need two different care plans.</text:span>
               </text:p>
             </draw:text-box>
           </draw:frame>
-          <draw:frame draw:name="PlaceHolder 3" presentation:style-name="pr2" draw:text-style-name="P11" draw:layer="layout" svg:width="8.252cm" svg:height="1.271cm" svg:x="10.791cm" svg:y="24.126cm" presentation:class="page-number" presentation:user-transformed="true">
+          <draw:frame draw:name="PlaceHolder 3" presentation:style-name="pr2" draw:text-style-name="P13" draw:layer="layout" svg:width="8.252cm" svg:height="1.271cm" svg:x="10.791cm" svg:y="24.126cm" presentation:class="page-number" presentation:user-transformed="true">
             <draw:text-box>
-              <text:p text:style-name="P10">
+              <text:p text:style-name="P12">
                 <text:span text:style-name="T7">
                   <text:page-number>&lt;number&gt;</text:page-number>
                 </text:span>
@@ -7086,9 +7026,9 @@
         </presentation:notes>
       </draw:page>
       <draw:page draw:name="page6" draw:style-name="dp7" draw:master-page-name="DEFAULT">
-        <draw:custom-shape draw:name="Shape 0" draw:style-name="gr83" draw:text-style-name="P31" draw:layer="layout" svg:width="3.426cm" svg:height="0.683cm" svg:x="1.27cm" svg:y="0.635cm">
-          <text:p/>
-          <draw:enhanced-geometry draw:mirror-horizontal="false" draw:mirror-vertical="false" draw:glue-points="?f8 0 0 ?f9 ?f8 ?f10 ?f11 ?f9" draw:text-areas="?f5 ?f5 ?f6 ?f7" svg:viewBox="0 0 0 0" draw:type="ooxml-roundRect" draw:modifiers="48148" draw:enhanced-path="M 0 ?f2 L ?f3 0 L ?f11 ?f4 L ?f2 ?f10 Z N" drawooo:enhanced-path="M 0 ?f2 G ?f2 ?f2 ?f12 ?f13 L ?f3 0 G ?f2 ?f2 ?f14 ?f15 L ?f11 ?f4 G ?f2 ?f2 ?f16 ?f17 L ?f2 ?f10 G ?f2 ?f2 ?f18 ?f19 Z N">
+        <draw:custom-shape draw:name="Shape 0" draw:style-name="gr83" draw:text-style-name="P33" draw:layer="layout" svg:width="3.426cm" svg:height="0.683cm" svg:x="1.27cm" svg:y="0.635cm">
+          <text:p/>
+          <draw:enhanced-geometry draw:mirror-horizontal="false" draw:mirror-vertical="false" svg:viewBox="0 0 0 0" draw:glue-points="?f8 0 0 ?f9 ?f8 ?f10 ?f11 ?f9" draw:text-areas="?f5 ?f5 ?f6 ?f7" draw:type="ooxml-roundRect" draw:modifiers="48148" draw:enhanced-path="M 0 ?f2 L ?f3 0 L ?f11 ?f4 L ?f2 ?f10 Z N" drawooo:enhanced-path="M 0 ?f2 G ?f2 ?f2 ?f12 ?f13 L ?f3 0 G ?f2 ?f2 ?f14 ?f15 L ?f11 ?f4 G ?f2 ?f2 ?f16 ?f17 L ?f2 ?f10 G ?f2 ?f2 ?f18 ?f19 Z N">
             <draw:equation draw:name="f0" draw:formula="if(0-$0 ,0,if(50000-$0 ,$0 ,50000))"/>
             <draw:equation draw:name="f1" draw:formula="min(logwidth,logheight)"/>
             <draw:equation draw:name="f2" draw:formula="?f1 *?f0 /100000"/>
@@ -7109,14 +7049,14 @@
             <draw:equation draw:name="f17" draw:formula="(5400000)/60000.0"/>
             <draw:equation draw:name="f18" draw:formula="(5400000)/60000.0"/>
             <draw:equation draw:name="f19" draw:formula="(5400000)/60000.0"/>
-            <draw:handle draw:handle-position="?f2 0" draw:handle-position-x="?f2" draw:handle-position-y="0" draw:handle-range-x-maximum="50000" draw:handle-range-x-minimum="0"/>
-          </draw:enhanced-geometry>
-        </draw:custom-shape>
-        <draw:custom-shape draw:name="Text 1" draw:style-name="gr96" draw:text-style-name="P14" draw:layer="layout" svg:width="3.426cm" svg:height="0.683cm" svg:x="1.27cm" svg:y="0.635cm">
-          <text:p text:style-name="P13">
+            <draw:handle draw:handle-range-x-maximum="50000" draw:handle-range-x-minimum="0" draw:handle-position="?f2 0" draw:handle-position-x="?f2" draw:handle-position-y="0"/>
+          </draw:enhanced-geometry>
+        </draw:custom-shape>
+        <draw:custom-shape draw:name="Text 1" draw:style-name="gr96" draw:text-style-name="P16" draw:layer="layout" svg:width="3.426cm" svg:height="0.683cm" svg:x="1.27cm" svg:y="0.635cm">
+          <text:p text:style-name="P15">
             <text:span text:style-name="T8">PRESCRIPTIVE</text:span>
           </text:p>
-          <draw:enhanced-geometry draw:mirror-horizontal="false" draw:mirror-vertical="false" draw:glue-points="?f0 0 0 ?f1 ?f0 ?f2 ?f3 ?f1" draw:text-areas="0 0 ?f3 ?f2" svg:viewBox="0 0 0 0" draw:type="ooxml-rect" draw:enhanced-path="M 0 0 L ?f3 0 ?f3 ?f2 0 ?f2 Z N">
+          <draw:enhanced-geometry draw:mirror-horizontal="false" draw:mirror-vertical="false" svg:viewBox="0 0 0 0" draw:glue-points="?f0 0 0 ?f1 ?f0 ?f2 ?f3 ?f1" draw:text-areas="0 0 ?f3 ?f2" draw:type="ooxml-rect" draw:enhanced-path="M 0 0 L ?f3 0 ?f3 ?f2 0 ?f2 Z N">
             <draw:equation draw:name="f0" draw:formula="logwidth/2"/>
             <draw:equation draw:name="f1" draw:formula="logheight/2"/>
             <draw:equation draw:name="f2" draw:formula="logheight"/>
@@ -7127,7 +7067,7 @@
           <text:p text:style-name="P2">
             <text:span text:style-name="T24">What should we do?</text:span>
           </text:p>
-          <draw:enhanced-geometry draw:mirror-horizontal="false" draw:mirror-vertical="false" draw:glue-points="?f0 0 0 ?f1 ?f0 ?f2 ?f3 ?f1" draw:text-areas="0 0 ?f3 ?f2" svg:viewBox="0 0 0 0" draw:type="ooxml-rect" draw:enhanced-path="M 0 0 L ?f3 0 ?f3 ?f2 0 ?f2 Z N">
+          <draw:enhanced-geometry draw:mirror-horizontal="false" draw:mirror-vertical="false" svg:viewBox="0 0 0 0" draw:glue-points="?f0 0 0 ?f1 ?f0 ?f2 ?f3 ?f1" draw:text-areas="0 0 ?f3 ?f2" draw:type="ooxml-rect" draw:enhanced-path="M 0 0 L ?f3 0 ?f3 ?f2 0 ?f2 Z N">
             <draw:equation draw:name="f0" draw:formula="logwidth/2"/>
             <draw:equation draw:name="f1" draw:formula="logheight/2"/>
             <draw:equation draw:name="f2" draw:formula="logheight"/>
@@ -7138,7 +7078,7 @@
           <text:p text:style-name="P2">
             <text:span text:style-name="T9">Who Needs the Closest Follow-Up?</text:span>
           </text:p>
-          <draw:enhanced-geometry draw:mirror-horizontal="false" draw:mirror-vertical="false" draw:glue-points="?f0 0 0 ?f1 ?f0 ?f2 ?f3 ?f1" draw:text-areas="0 0 ?f3 ?f2" svg:viewBox="0 0 0 0" draw:type="ooxml-rect" draw:enhanced-path="M 0 0 L ?f3 0 ?f3 ?f2 0 ?f2 Z N">
+          <draw:enhanced-geometry draw:mirror-horizontal="false" draw:mirror-vertical="false" svg:viewBox="0 0 0 0" draw:glue-points="?f0 0 0 ?f1 ?f0 ?f2 ?f3 ?f1" draw:text-areas="0 0 ?f3 ?f2" draw:type="ooxml-rect" draw:enhanced-path="M 0 0 L ?f3 0 ?f3 ?f2 0 ?f2 Z N">
             <draw:equation draw:name="f0" draw:formula="logwidth/2"/>
             <draw:equation draw:name="f1" draw:formula="logheight/2"/>
             <draw:equation draw:name="f2" draw:formula="logheight"/>
@@ -7147,18 +7087,18 @@
         </draw:custom-shape>
         <draw:custom-shape draw:name="Text 4" draw:style-name="gr99" draw:text-style-name="P3" draw:layer="layout" svg:width="22.857cm" svg:height="0.657cm" svg:x="1.27cm" svg:y="2.692cm">
           <text:p text:style-name="P2">
-            <text:span text:style-name="T21">Dashboard chart: 28-day readmission by NYHA severity × admission type</text:span>
-          </text:p>
-          <draw:enhanced-geometry draw:mirror-horizontal="false" draw:mirror-vertical="false" draw:glue-points="?f0 0 0 ?f1 ?f0 ?f2 ?f3 ?f1" draw:text-areas="0 0 ?f3 ?f2" svg:viewBox="0 0 0 0" draw:type="ooxml-rect" draw:enhanced-path="M 0 0 L ?f3 0 ?f3 ?f2 0 ?f2 Z N">
-            <draw:equation draw:name="f0" draw:formula="logwidth/2"/>
-            <draw:equation draw:name="f1" draw:formula="logheight/2"/>
-            <draw:equation draw:name="f2" draw:formula="logheight"/>
-            <draw:equation draw:name="f3" draw:formula="logwidth"/>
-          </draw:enhanced-geometry>
-        </draw:custom-shape>
-        <draw:custom-shape draw:name="Shape 5" draw:style-name="gr16" draw:text-style-name="P16" draw:layer="layout" svg:width="2.283cm" svg:height="0.505cm" svg:x="14.224cm" svg:y="13.411cm">
-          <text:p/>
-          <draw:enhanced-geometry draw:mirror-horizontal="false" draw:mirror-vertical="false" draw:glue-points="?f8 0 0 ?f9 ?f8 ?f10 ?f11 ?f9" draw:text-areas="?f5 ?f5 ?f6 ?f7" svg:viewBox="0 0 0 0" draw:type="ooxml-roundRect" draw:modifiers="50000" draw:enhanced-path="M 0 ?f2 L ?f3 0 L ?f11 ?f4 L ?f2 ?f10 Z N" drawooo:enhanced-path="M 0 ?f2 G ?f2 ?f2 ?f12 ?f13 L ?f3 0 G ?f2 ?f2 ?f14 ?f15 L ?f11 ?f4 G ?f2 ?f2 ?f16 ?f17 L ?f2 ?f10 G ?f2 ?f2 ?f18 ?f19 Z N">
+            <text:span text:style-name="T21"/>
+          </text:p>
+          <draw:enhanced-geometry draw:mirror-horizontal="false" draw:mirror-vertical="false" svg:viewBox="0 0 0 0" draw:glue-points="?f0 0 0 ?f1 ?f0 ?f2 ?f3 ?f1" draw:text-areas="0 0 ?f3 ?f2" draw:type="ooxml-rect" draw:enhanced-path="M 0 0 L ?f3 0 ?f3 ?f2 0 ?f2 Z N">
+            <draw:equation draw:name="f0" draw:formula="logwidth/2"/>
+            <draw:equation draw:name="f1" draw:formula="logheight/2"/>
+            <draw:equation draw:name="f2" draw:formula="logheight"/>
+            <draw:equation draw:name="f3" draw:formula="logwidth"/>
+          </draw:enhanced-geometry>
+        </draw:custom-shape>
+        <draw:custom-shape draw:name="Shape 5" draw:style-name="gr16" draw:text-style-name="P18" draw:layer="layout" svg:width="2.283cm" svg:height="0.505cm" svg:x="14.224cm" svg:y="13.411cm">
+          <text:p/>
+          <draw:enhanced-geometry draw:mirror-horizontal="false" draw:mirror-vertical="false" svg:viewBox="0 0 0 0" draw:glue-points="?f8 0 0 ?f9 ?f8 ?f10 ?f11 ?f9" draw:text-areas="?f5 ?f5 ?f6 ?f7" draw:type="ooxml-roundRect" draw:modifiers="50000" draw:enhanced-path="M 0 ?f2 L ?f3 0 L ?f11 ?f4 L ?f2 ?f10 Z N" drawooo:enhanced-path="M 0 ?f2 G ?f2 ?f2 ?f12 ?f13 L ?f3 0 G ?f2 ?f2 ?f14 ?f15 L ?f11 ?f4 G ?f2 ?f2 ?f16 ?f17 L ?f2 ?f10 G ?f2 ?f2 ?f18 ?f19 Z N">
             <draw:equation draw:name="f0" draw:formula="if(0-$0 ,0,if(50000-$0 ,$0 ,50000))"/>
             <draw:equation draw:name="f1" draw:formula="min(logwidth,logheight)"/>
             <draw:equation draw:name="f2" draw:formula="?f1 *?f0 /100000"/>
@@ -7179,23 +7119,23 @@
             <draw:equation draw:name="f17" draw:formula="(5400000)/60000.0"/>
             <draw:equation draw:name="f18" draw:formula="(5400000)/60000.0"/>
             <draw:equation draw:name="f19" draw:formula="(5400000)/60000.0"/>
-            <draw:handle draw:handle-position="?f2 0" draw:handle-position-x="?f2" draw:handle-position-y="0" draw:handle-range-x-maximum="50000" draw:handle-range-x-minimum="0"/>
-          </draw:enhanced-geometry>
-        </draw:custom-shape>
-        <draw:custom-shape draw:name="Text 6" draw:style-name="gr100" draw:text-style-name="P14" draw:layer="layout" svg:width="2.283cm" svg:height="0.505cm" svg:x="14.224cm" svg:y="13.411cm">
-          <text:p text:style-name="P13">
+            <draw:handle draw:handle-range-x-maximum="50000" draw:handle-range-x-minimum="0" draw:handle-position="?f2 0" draw:handle-position-x="?f2" draw:handle-position-y="0"/>
+          </draw:enhanced-geometry>
+        </draw:custom-shape>
+        <draw:custom-shape draw:name="Text 6" draw:style-name="gr100" draw:text-style-name="P16" draw:layer="layout" svg:width="2.283cm" svg:height="0.505cm" svg:x="14.224cm" svg:y="13.411cm">
+          <text:p text:style-name="P15">
             <text:span text:style-name="T11">KPIs</text:span>
           </text:p>
-          <draw:enhanced-geometry draw:mirror-horizontal="false" draw:mirror-vertical="false" draw:glue-points="?f0 0 0 ?f1 ?f0 ?f2 ?f3 ?f1" draw:text-areas="0 0 ?f3 ?f2" svg:viewBox="0 0 0 0" draw:type="ooxml-rect" draw:enhanced-path="M 0 0 L ?f3 0 ?f3 ?f2 0 ?f2 Z N">
-            <draw:equation draw:name="f0" draw:formula="logwidth/2"/>
-            <draw:equation draw:name="f1" draw:formula="logheight/2"/>
-            <draw:equation draw:name="f2" draw:formula="logheight"/>
-            <draw:equation draw:name="f3" draw:formula="logwidth"/>
-          </draw:enhanced-geometry>
-        </draw:custom-shape>
-        <draw:custom-shape draw:name="Shape 7" draw:style-name="gr16" draw:text-style-name="P16" draw:layer="layout" svg:width="2.283cm" svg:height="0.505cm" svg:x="16.739cm" svg:y="13.411cm">
-          <text:p/>
-          <draw:enhanced-geometry draw:mirror-horizontal="false" draw:mirror-vertical="false" draw:glue-points="?f8 0 0 ?f9 ?f8 ?f10 ?f11 ?f9" draw:text-areas="?f5 ?f5 ?f6 ?f7" svg:viewBox="0 0 0 0" draw:type="ooxml-roundRect" draw:modifiers="50000" draw:enhanced-path="M 0 ?f2 L ?f3 0 L ?f11 ?f4 L ?f2 ?f10 Z N" drawooo:enhanced-path="M 0 ?f2 G ?f2 ?f2 ?f12 ?f13 L ?f3 0 G ?f2 ?f2 ?f14 ?f15 L ?f11 ?f4 G ?f2 ?f2 ?f16 ?f17 L ?f2 ?f10 G ?f2 ?f2 ?f18 ?f19 Z N">
+          <draw:enhanced-geometry draw:mirror-horizontal="false" draw:mirror-vertical="false" svg:viewBox="0 0 0 0" draw:glue-points="?f0 0 0 ?f1 ?f0 ?f2 ?f3 ?f1" draw:text-areas="0 0 ?f3 ?f2" draw:type="ooxml-rect" draw:enhanced-path="M 0 0 L ?f3 0 ?f3 ?f2 0 ?f2 Z N">
+            <draw:equation draw:name="f0" draw:formula="logwidth/2"/>
+            <draw:equation draw:name="f1" draw:formula="logheight/2"/>
+            <draw:equation draw:name="f2" draw:formula="logheight"/>
+            <draw:equation draw:name="f3" draw:formula="logwidth"/>
+          </draw:enhanced-geometry>
+        </draw:custom-shape>
+        <draw:custom-shape draw:name="Shape 7" draw:style-name="gr16" draw:text-style-name="P18" draw:layer="layout" svg:width="2.283cm" svg:height="0.505cm" svg:x="16.739cm" svg:y="13.411cm">
+          <text:p/>
+          <draw:enhanced-geometry draw:mirror-horizontal="false" draw:mirror-vertical="false" svg:viewBox="0 0 0 0" draw:glue-points="?f8 0 0 ?f9 ?f8 ?f10 ?f11 ?f9" draw:text-areas="?f5 ?f5 ?f6 ?f7" draw:type="ooxml-roundRect" draw:modifiers="50000" draw:enhanced-path="M 0 ?f2 L ?f3 0 L ?f11 ?f4 L ?f2 ?f10 Z N" drawooo:enhanced-path="M 0 ?f2 G ?f2 ?f2 ?f12 ?f13 L ?f3 0 G ?f2 ?f2 ?f14 ?f15 L ?f11 ?f4 G ?f2 ?f2 ?f16 ?f17 L ?f2 ?f10 G ?f2 ?f2 ?f18 ?f19 Z N">
             <draw:equation draw:name="f0" draw:formula="if(0-$0 ,0,if(50000-$0 ,$0 ,50000))"/>
             <draw:equation draw:name="f1" draw:formula="min(logwidth,logheight)"/>
             <draw:equation draw:name="f2" draw:formula="?f1 *?f0 /100000"/>
@@ -7216,23 +7156,23 @@
             <draw:equation draw:name="f17" draw:formula="(5400000)/60000.0"/>
             <draw:equation draw:name="f18" draw:formula="(5400000)/60000.0"/>
             <draw:equation draw:name="f19" draw:formula="(5400000)/60000.0"/>
-            <draw:handle draw:handle-position="?f2 0" draw:handle-position-x="?f2" draw:handle-position-y="0" draw:handle-range-x-maximum="50000" draw:handle-range-x-minimum="0"/>
-          </draw:enhanced-geometry>
-        </draw:custom-shape>
-        <draw:custom-shape draw:name="Text 8" draw:style-name="gr101" draw:text-style-name="P14" draw:layer="layout" svg:width="2.283cm" svg:height="0.505cm" svg:x="16.739cm" svg:y="13.411cm">
-          <text:p text:style-name="P13">
+            <draw:handle draw:handle-range-x-maximum="50000" draw:handle-range-x-minimum="0" draw:handle-position="?f2 0" draw:handle-position-x="?f2" draw:handle-position-y="0"/>
+          </draw:enhanced-geometry>
+        </draw:custom-shape>
+        <draw:custom-shape draw:name="Text 8" draw:style-name="gr101" draw:text-style-name="P16" draw:layer="layout" svg:width="2.283cm" svg:height="0.505cm" svg:x="16.739cm" svg:y="13.411cm">
+          <text:p text:style-name="P15">
             <text:span text:style-name="T11">Descriptive</text:span>
           </text:p>
-          <draw:enhanced-geometry draw:mirror-horizontal="false" draw:mirror-vertical="false" draw:glue-points="?f0 0 0 ?f1 ?f0 ?f2 ?f3 ?f1" draw:text-areas="0 0 ?f3 ?f2" svg:viewBox="0 0 0 0" draw:type="ooxml-rect" draw:enhanced-path="M 0 0 L ?f3 0 ?f3 ?f2 0 ?f2 Z N">
-            <draw:equation draw:name="f0" draw:formula="logwidth/2"/>
-            <draw:equation draw:name="f1" draw:formula="logheight/2"/>
-            <draw:equation draw:name="f2" draw:formula="logheight"/>
-            <draw:equation draw:name="f3" draw:formula="logwidth"/>
-          </draw:enhanced-geometry>
-        </draw:custom-shape>
-        <draw:custom-shape draw:name="Shape 9" draw:style-name="gr90" draw:text-style-name="P31" draw:layer="layout" svg:width="2.283cm" svg:height="0.505cm" svg:x="19.253cm" svg:y="13.411cm">
-          <text:p/>
-          <draw:enhanced-geometry draw:mirror-horizontal="false" draw:mirror-vertical="false" draw:glue-points="?f8 0 0 ?f9 ?f8 ?f10 ?f11 ?f9" draw:text-areas="?f5 ?f5 ?f6 ?f7" svg:viewBox="0 0 0 0" draw:type="ooxml-roundRect" draw:modifiers="50000" draw:enhanced-path="M 0 ?f2 L ?f3 0 L ?f11 ?f4 L ?f2 ?f10 Z N" drawooo:enhanced-path="M 0 ?f2 G ?f2 ?f2 ?f12 ?f13 L ?f3 0 G ?f2 ?f2 ?f14 ?f15 L ?f11 ?f4 G ?f2 ?f2 ?f16 ?f17 L ?f2 ?f10 G ?f2 ?f2 ?f18 ?f19 Z N">
+          <draw:enhanced-geometry draw:mirror-horizontal="false" draw:mirror-vertical="false" svg:viewBox="0 0 0 0" draw:glue-points="?f0 0 0 ?f1 ?f0 ?f2 ?f3 ?f1" draw:text-areas="0 0 ?f3 ?f2" draw:type="ooxml-rect" draw:enhanced-path="M 0 0 L ?f3 0 ?f3 ?f2 0 ?f2 Z N">
+            <draw:equation draw:name="f0" draw:formula="logwidth/2"/>
+            <draw:equation draw:name="f1" draw:formula="logheight/2"/>
+            <draw:equation draw:name="f2" draw:formula="logheight"/>
+            <draw:equation draw:name="f3" draw:formula="logwidth"/>
+          </draw:enhanced-geometry>
+        </draw:custom-shape>
+        <draw:custom-shape draw:name="Shape 9" draw:style-name="gr90" draw:text-style-name="P33" draw:layer="layout" svg:width="2.283cm" svg:height="0.505cm" svg:x="19.253cm" svg:y="13.411cm">
+          <text:p/>
+          <draw:enhanced-geometry draw:mirror-horizontal="false" draw:mirror-vertical="false" svg:viewBox="0 0 0 0" draw:glue-points="?f8 0 0 ?f9 ?f8 ?f10 ?f11 ?f9" draw:text-areas="?f5 ?f5 ?f6 ?f7" draw:type="ooxml-roundRect" draw:modifiers="50000" draw:enhanced-path="M 0 ?f2 L ?f3 0 L ?f11 ?f4 L ?f2 ?f10 Z N" drawooo:enhanced-path="M 0 ?f2 G ?f2 ?f2 ?f12 ?f13 L ?f3 0 G ?f2 ?f2 ?f14 ?f15 L ?f11 ?f4 G ?f2 ?f2 ?f16 ?f17 L ?f2 ?f10 G ?f2 ?f2 ?f18 ?f19 Z N">
             <draw:equation draw:name="f0" draw:formula="if(0-$0 ,0,if(50000-$0 ,$0 ,50000))"/>
             <draw:equation draw:name="f1" draw:formula="min(logwidth,logheight)"/>
             <draw:equation draw:name="f2" draw:formula="?f1 *?f0 /100000"/>
@@ -7253,23 +7193,23 @@
             <draw:equation draw:name="f17" draw:formula="(5400000)/60000.0"/>
             <draw:equation draw:name="f18" draw:formula="(5400000)/60000.0"/>
             <draw:equation draw:name="f19" draw:formula="(5400000)/60000.0"/>
-            <draw:handle draw:handle-position="?f2 0" draw:handle-position-x="?f2" draw:handle-position-y="0" draw:handle-range-x-maximum="50000" draw:handle-range-x-minimum="0"/>
-          </draw:enhanced-geometry>
-        </draw:custom-shape>
-        <draw:custom-shape draw:name="Text 10" draw:style-name="gr102" draw:text-style-name="P14" draw:layer="layout" svg:width="2.283cm" svg:height="0.505cm" svg:x="19.253cm" svg:y="13.411cm">
-          <text:p text:style-name="P13">
+            <draw:handle draw:handle-range-x-maximum="50000" draw:handle-range-x-minimum="0" draw:handle-position="?f2 0" draw:handle-position-x="?f2" draw:handle-position-y="0"/>
+          </draw:enhanced-geometry>
+        </draw:custom-shape>
+        <draw:custom-shape draw:name="Text 10" draw:style-name="gr102" draw:text-style-name="P16" draw:layer="layout" svg:width="2.283cm" svg:height="0.505cm" svg:x="19.253cm" svg:y="13.411cm">
+          <text:p text:style-name="P15">
             <text:span text:style-name="T10">Prescriptive</text:span>
           </text:p>
-          <draw:enhanced-geometry draw:mirror-horizontal="false" draw:mirror-vertical="false" draw:glue-points="?f0 0 0 ?f1 ?f0 ?f2 ?f3 ?f1" draw:text-areas="0 0 ?f3 ?f2" svg:viewBox="0 0 0 0" draw:type="ooxml-rect" draw:enhanced-path="M 0 0 L ?f3 0 ?f3 ?f2 0 ?f2 Z N">
-            <draw:equation draw:name="f0" draw:formula="logwidth/2"/>
-            <draw:equation draw:name="f1" draw:formula="logheight/2"/>
-            <draw:equation draw:name="f2" draw:formula="logheight"/>
-            <draw:equation draw:name="f3" draw:formula="logwidth"/>
-          </draw:enhanced-geometry>
-        </draw:custom-shape>
-        <draw:custom-shape draw:name="Shape 11" draw:style-name="gr16" draw:text-style-name="P16" draw:layer="layout" svg:width="2.283cm" svg:height="0.505cm" svg:x="21.768cm" svg:y="13.411cm">
-          <text:p/>
-          <draw:enhanced-geometry draw:mirror-horizontal="false" draw:mirror-vertical="false" draw:glue-points="?f8 0 0 ?f9 ?f8 ?f10 ?f11 ?f9" draw:text-areas="?f5 ?f5 ?f6 ?f7" svg:viewBox="0 0 0 0" draw:type="ooxml-roundRect" draw:modifiers="50000" draw:enhanced-path="M 0 ?f2 L ?f3 0 L ?f11 ?f4 L ?f2 ?f10 Z N" drawooo:enhanced-path="M 0 ?f2 G ?f2 ?f2 ?f12 ?f13 L ?f3 0 G ?f2 ?f2 ?f14 ?f15 L ?f11 ?f4 G ?f2 ?f2 ?f16 ?f17 L ?f2 ?f10 G ?f2 ?f2 ?f18 ?f19 Z N">
+          <draw:enhanced-geometry draw:mirror-horizontal="false" draw:mirror-vertical="false" svg:viewBox="0 0 0 0" draw:glue-points="?f0 0 0 ?f1 ?f0 ?f2 ?f3 ?f1" draw:text-areas="0 0 ?f3 ?f2" draw:type="ooxml-rect" draw:enhanced-path="M 0 0 L ?f3 0 ?f3 ?f2 0 ?f2 Z N">
+            <draw:equation draw:name="f0" draw:formula="logwidth/2"/>
+            <draw:equation draw:name="f1" draw:formula="logheight/2"/>
+            <draw:equation draw:name="f2" draw:formula="logheight"/>
+            <draw:equation draw:name="f3" draw:formula="logwidth"/>
+          </draw:enhanced-geometry>
+        </draw:custom-shape>
+        <draw:custom-shape draw:name="Shape 11" draw:style-name="gr16" draw:text-style-name="P18" draw:layer="layout" svg:width="2.283cm" svg:height="0.505cm" svg:x="21.768cm" svg:y="13.411cm">
+          <text:p/>
+          <draw:enhanced-geometry draw:mirror-horizontal="false" draw:mirror-vertical="false" svg:viewBox="0 0 0 0" draw:glue-points="?f8 0 0 ?f9 ?f8 ?f10 ?f11 ?f9" draw:text-areas="?f5 ?f5 ?f6 ?f7" draw:type="ooxml-roundRect" draw:modifiers="50000" draw:enhanced-path="M 0 ?f2 L ?f3 0 L ?f11 ?f4 L ?f2 ?f10 Z N" drawooo:enhanced-path="M 0 ?f2 G ?f2 ?f2 ?f12 ?f13 L ?f3 0 G ?f2 ?f2 ?f14 ?f15 L ?f11 ?f4 G ?f2 ?f2 ?f16 ?f17 L ?f2 ?f10 G ?f2 ?f2 ?f18 ?f19 Z N">
             <draw:equation draw:name="f0" draw:formula="if(0-$0 ,0,if(50000-$0 ,$0 ,50000))"/>
             <draw:equation draw:name="f1" draw:formula="min(logwidth,logheight)"/>
             <draw:equation draw:name="f2" draw:formula="?f1 *?f0 /100000"/>
@@ -7290,25 +7230,25 @@
             <draw:equation draw:name="f17" draw:formula="(5400000)/60000.0"/>
             <draw:equation draw:name="f18" draw:formula="(5400000)/60000.0"/>
             <draw:equation draw:name="f19" draw:formula="(5400000)/60000.0"/>
-            <draw:handle draw:handle-position="?f2 0" draw:handle-position-x="?f2" draw:handle-position-y="0" draw:handle-range-x-maximum="50000" draw:handle-range-x-minimum="0"/>
-          </draw:enhanced-geometry>
-        </draw:custom-shape>
-        <draw:custom-shape draw:name="Text 12" draw:style-name="gr103" draw:text-style-name="P14" draw:layer="layout" svg:width="2.283cm" svg:height="0.505cm" svg:x="21.768cm" svg:y="13.411cm">
-          <text:p text:style-name="P13">
+            <draw:handle draw:handle-range-x-maximum="50000" draw:handle-range-x-minimum="0" draw:handle-position="?f2 0" draw:handle-position-x="?f2" draw:handle-position-y="0"/>
+          </draw:enhanced-geometry>
+        </draw:custom-shape>
+        <draw:custom-shape draw:name="Text 12" draw:style-name="gr103" draw:text-style-name="P16" draw:layer="layout" svg:width="2.283cm" svg:height="0.505cm" svg:x="21.768cm" svg:y="13.411cm">
+          <text:p text:style-name="P15">
             <text:span text:style-name="T11">Predictive</text:span>
           </text:p>
-          <draw:enhanced-geometry draw:mirror-horizontal="false" draw:mirror-vertical="false" draw:glue-points="?f0 0 0 ?f1 ?f0 ?f2 ?f3 ?f1" draw:text-areas="0 0 ?f3 ?f2" svg:viewBox="0 0 0 0" draw:type="ooxml-rect" draw:enhanced-path="M 0 0 L ?f3 0 ?f3 ?f2 0 ?f2 Z N">
-            <draw:equation draw:name="f0" draw:formula="logwidth/2"/>
-            <draw:equation draw:name="f1" draw:formula="logheight/2"/>
-            <draw:equation draw:name="f2" draw:formula="logheight"/>
-            <draw:equation draw:name="f3" draw:formula="logwidth"/>
-          </draw:enhanced-geometry>
-        </draw:custom-shape>
-        <draw:custom-shape draw:name="Text 13" draw:style-name="gr104" draw:text-style-name="P14" draw:layer="layout" svg:width="12.443cm" svg:height="0.759cm" svg:x="1.27cm" svg:y="3.556cm">
-          <text:p text:style-name="P13">
+          <draw:enhanced-geometry draw:mirror-horizontal="false" draw:mirror-vertical="false" svg:viewBox="0 0 0 0" draw:glue-points="?f0 0 0 ?f1 ?f0 ?f2 ?f3 ?f1" draw:text-areas="0 0 ?f3 ?f2" draw:type="ooxml-rect" draw:enhanced-path="M 0 0 L ?f3 0 ?f3 ?f2 0 ?f2 Z N">
+            <draw:equation draw:name="f0" draw:formula="logwidth/2"/>
+            <draw:equation draw:name="f1" draw:formula="logheight/2"/>
+            <draw:equation draw:name="f2" draw:formula="logheight"/>
+            <draw:equation draw:name="f3" draw:formula="logwidth"/>
+          </draw:enhanced-geometry>
+        </draw:custom-shape>
+        <draw:custom-shape draw:name="Text 13" draw:style-name="gr104" draw:text-style-name="P16" draw:layer="layout" svg:width="12.443cm" svg:height="0.759cm" svg:x="1.27cm" svg:y="3.556cm">
+          <text:p text:style-name="P15">
             <text:span text:style-name="T26">28-day readmission by severity (%)</text:span>
           </text:p>
-          <draw:enhanced-geometry draw:mirror-horizontal="false" draw:mirror-vertical="false" draw:glue-points="?f0 0 0 ?f1 ?f0 ?f2 ?f3 ?f1" draw:text-areas="0 0 ?f3 ?f2" svg:viewBox="0 0 0 0" draw:type="ooxml-rect" draw:enhanced-path="M 0 0 L ?f3 0 ?f3 ?f2 0 ?f2 Z N">
+          <draw:enhanced-geometry draw:mirror-horizontal="false" draw:mirror-vertical="false" svg:viewBox="0 0 0 0" draw:glue-points="?f0 0 0 ?f1 ?f0 ?f2 ?f3 ?f1" draw:text-areas="0 0 ?f3 ?f2" draw:type="ooxml-rect" draw:enhanced-path="M 0 0 L ?f3 0 ?f3 ?f2 0 ?f2 Z N">
             <draw:equation draw:name="f0" draw:formula="logwidth/2"/>
             <draw:equation draw:name="f1" draw:formula="logheight/2"/>
             <draw:equation draw:name="f2" draw:formula="logheight"/>
@@ -7323,81 +7263,81 @@
             <table:table-row table:style-name="ro1" table:default-cell-style-name="ce2">
               <table:table-cell table:style-name="ce1"/>
               <table:table-cell>
-                <text:p text:style-name="P13">
+                <text:p text:style-name="P35">
                   <text:span text:style-name="T12">Emergency</text:span>
                 </text:p>
               </table:table-cell>
               <table:table-cell>
-                <text:p text:style-name="P13">
+                <text:p text:style-name="P35">
                   <text:span text:style-name="T12">Non-emergency</text:span>
                 </text:p>
               </table:table-cell>
             </table:table-row>
             <table:table-row table:style-name="ro2">
               <table:table-cell table:style-name="ce2">
-                <text:p text:style-name="P13">
+                <text:p text:style-name="P35">
                   <text:span text:style-name="T12">NYHA 2</text:span>
                 </text:p>
               </table:table-cell>
               <table:table-cell table:style-name="ce3">
-                <text:p text:style-name="P13">
+                <text:p text:style-name="P35">
                   <text:span text:style-name="T27">3.7%</text:span>
                 </text:p>
-                <text:p text:style-name="P13">
+                <text:p text:style-name="P35">
                   <text:span text:style-name="T28">n = 162</text:span>
                 </text:p>
               </table:table-cell>
               <table:table-cell table:style-name="ce4">
-                <text:p text:style-name="P13">
+                <text:p text:style-name="P35">
                   <text:span text:style-name="T27">4.2%</text:span>
                 </text:p>
-                <text:p text:style-name="P13">
+                <text:p text:style-name="P35">
                   <text:span text:style-name="T28">n = 191</text:span>
                 </text:p>
               </table:table-cell>
             </table:table-row>
             <table:table-row table:style-name="ro2">
               <table:table-cell table:style-name="ce2">
-                <text:p text:style-name="P13">
+                <text:p text:style-name="P35">
                   <text:span text:style-name="T12">NYHA 3</text:span>
                 </text:p>
               </table:table-cell>
               <table:table-cell table:style-name="ce5">
-                <text:p text:style-name="P13">
+                <text:p text:style-name="P35">
                   <text:span text:style-name="T27">6.9%</text:span>
                 </text:p>
-                <text:p text:style-name="P13">
+                <text:p text:style-name="P35">
                   <text:span text:style-name="T28">n = 490</text:span>
                 </text:p>
               </table:table-cell>
               <table:table-cell table:style-name="ce6">
-                <text:p text:style-name="P13">
+                <text:p text:style-name="P35">
                   <text:span text:style-name="T27">6.0%</text:span>
                 </text:p>
-                <text:p text:style-name="P13">
+                <text:p text:style-name="P35">
                   <text:span text:style-name="T28">n = 549</text:span>
                 </text:p>
               </table:table-cell>
             </table:table-row>
             <table:table-row table:style-name="ro2">
               <table:table-cell table:style-name="ce2">
-                <text:p text:style-name="P13">
+                <text:p text:style-name="P35">
                   <text:span text:style-name="T12">NYHA 4</text:span>
                 </text:p>
               </table:table-cell>
               <table:table-cell table:style-name="ce7">
-                <text:p text:style-name="P13">
+                <text:p text:style-name="P35">
                   <text:span text:style-name="T29">10.9%</text:span>
                 </text:p>
-                <text:p text:style-name="P13">
+                <text:p text:style-name="P35">
                   <text:span text:style-name="T30">n = 304</text:span>
                 </text:p>
               </table:table-cell>
               <table:table-cell table:style-name="ce8">
-                <text:p text:style-name="P13">
+                <text:p text:style-name="P35">
                   <text:span text:style-name="T27">8.3%</text:span>
                 </text:p>
-                <text:p text:style-name="P13">
+                <text:p text:style-name="P35">
                   <text:span text:style-name="T28">n = 312</text:span>
                 </text:p>
               </table:table-cell>
@@ -7405,9 +7345,9 @@
           </table:table>
           <draw:image xlink:href="Pictures/TablePreview1.svm" xlink:type="simple" xlink:show="embed" xlink:actuate="onLoad"/>
         </draw:frame>
-        <draw:custom-shape draw:name="Shape 14" draw:style-name="gr20" draw:text-style-name="P16" draw:layer="layout" svg:width="9.903cm" svg:height="1.826cm" svg:x="14.224cm" svg:y="3.683cm">
-          <text:p/>
-          <draw:enhanced-geometry draw:mirror-horizontal="false" draw:mirror-vertical="false" draw:glue-points="?f8 0 0 ?f9 ?f8 ?f10 ?f11 ?f9" draw:text-areas="?f5 ?f5 ?f6 ?f7" svg:viewBox="0 0 0 0" draw:type="ooxml-roundRect" draw:modifiers="11111" draw:enhanced-path="M 0 ?f2 L ?f3 0 L ?f11 ?f4 L ?f2 ?f10 Z N" drawooo:enhanced-path="M 0 ?f2 G ?f2 ?f2 ?f12 ?f13 L ?f3 0 G ?f2 ?f2 ?f14 ?f15 L ?f11 ?f4 G ?f2 ?f2 ?f16 ?f17 L ?f2 ?f10 G ?f2 ?f2 ?f18 ?f19 Z N">
+        <draw:custom-shape draw:name="Shape 14" draw:style-name="gr20" draw:text-style-name="P18" draw:layer="layout" svg:width="9.903cm" svg:height="1.826cm" svg:x="14.224cm" svg:y="3.683cm">
+          <text:p/>
+          <draw:enhanced-geometry draw:mirror-horizontal="false" draw:mirror-vertical="false" svg:viewBox="0 0 0 0" draw:glue-points="?f8 0 0 ?f9 ?f8 ?f10 ?f11 ?f9" draw:text-areas="?f5 ?f5 ?f6 ?f7" draw:type="ooxml-roundRect" draw:modifiers="11111" draw:enhanced-path="M 0 ?f2 L ?f3 0 L ?f11 ?f4 L ?f2 ?f10 Z N" drawooo:enhanced-path="M 0 ?f2 G ?f2 ?f2 ?f12 ?f13 L ?f3 0 G ?f2 ?f2 ?f14 ?f15 L ?f11 ?f4 G ?f2 ?f2 ?f16 ?f17 L ?f2 ?f10 G ?f2 ?f2 ?f18 ?f19 Z N">
             <draw:equation draw:name="f0" draw:formula="if(0-$0 ,0,if(50000-$0 ,$0 ,50000))"/>
             <draw:equation draw:name="f1" draw:formula="min(logwidth,logheight)"/>
             <draw:equation draw:name="f2" draw:formula="?f1 *?f0 /100000"/>
@@ -7428,12 +7368,12 @@
             <draw:equation draw:name="f17" draw:formula="(5400000)/60000.0"/>
             <draw:equation draw:name="f18" draw:formula="(5400000)/60000.0"/>
             <draw:equation draw:name="f19" draw:formula="(5400000)/60000.0"/>
-            <draw:handle draw:handle-position="?f2 0" draw:handle-position-x="?f2" draw:handle-position-y="0" draw:handle-range-x-maximum="50000" draw:handle-range-x-minimum="0"/>
-          </draw:enhanced-geometry>
-        </draw:custom-shape>
-        <draw:custom-shape draw:name="Shape 15" draw:style-name="gr106" draw:text-style-name="P20" draw:layer="layout" svg:width="0.403cm" svg:height="0.403cm" svg:x="14.605cm" svg:y="4.394cm">
-          <text:p/>
-          <draw:enhanced-geometry draw:mirror-horizontal="false" draw:mirror-vertical="false" draw:glue-points="?f4 0 ?f5 ?f8 0 ?f7 ?f5 ?f9 ?f4 ?f10 ?f6 ?f9 ?f11 ?f7 ?f6 ?f8" draw:text-areas="?f5 ?f8 ?f6 ?f9" svg:viewBox="0 0 0 0" draw:type="ooxml-ellipse" draw:enhanced-path="M 0 ?f7 Z N" drawooo:enhanced-path="M 0 ?f7 G ?f0 ?f2 ?f12 ?f13 ?f0 ?f2 ?f14 ?f15 ?f0 ?f2 ?f16 ?f17 ?f0 ?f2 ?f18 ?f19 Z N">
+            <draw:handle draw:handle-range-x-maximum="50000" draw:handle-range-x-minimum="0" draw:handle-position="?f2 0" draw:handle-position-x="?f2" draw:handle-position-y="0"/>
+          </draw:enhanced-geometry>
+        </draw:custom-shape>
+        <draw:custom-shape draw:name="Shape 15" draw:style-name="gr106" draw:text-style-name="P22" draw:layer="layout" svg:width="0.403cm" svg:height="0.403cm" svg:x="14.605cm" svg:y="4.394cm">
+          <text:p/>
+          <draw:enhanced-geometry draw:mirror-horizontal="false" draw:mirror-vertical="false" svg:viewBox="0 0 0 0" draw:glue-points="?f4 0 ?f5 ?f8 0 ?f7 ?f5 ?f9 ?f4 ?f10 ?f6 ?f9 ?f11 ?f7 ?f6 ?f8" draw:text-areas="?f5 ?f8 ?f6 ?f9" draw:type="ooxml-ellipse" draw:enhanced-path="M 0 ?f7 Z N" drawooo:enhanced-path="M 0 ?f7 G ?f0 ?f2 ?f12 ?f13 ?f0 ?f2 ?f14 ?f15 ?f0 ?f2 ?f16 ?f17 ?f0 ?f2 ?f18 ?f19 Z N">
             <draw:equation draw:name="f0" draw:formula="logwidth/2"/>
             <draw:equation draw:name="f1" draw:formula="?f0 *cos(pi*(2700000)/10800000)"/>
             <draw:equation draw:name="f2" draw:formula="logheight/2"/>
@@ -7460,7 +7400,7 @@
           <text:p text:style-name="P2">
             <text:span text:style-name="T31">304 patients</text:span>
           </text:p>
-          <draw:enhanced-geometry draw:mirror-horizontal="false" draw:mirror-vertical="false" draw:glue-points="?f0 0 0 ?f1 ?f0 ?f2 ?f3 ?f1" draw:text-areas="0 0 ?f3 ?f2" svg:viewBox="0 0 0 0" draw:type="ooxml-rect" draw:enhanced-path="M 0 0 L ?f3 0 ?f3 ?f2 0 ?f2 Z N">
+          <draw:enhanced-geometry draw:mirror-horizontal="false" draw:mirror-vertical="false" svg:viewBox="0 0 0 0" draw:glue-points="?f0 0 0 ?f1 ?f0 ?f2 ?f3 ?f1" draw:text-areas="0 0 ?f3 ?f2" draw:type="ooxml-rect" draw:enhanced-path="M 0 0 L ?f3 0 ?f3 ?f2 0 ?f2 Z N">
             <draw:equation draw:name="f0" draw:formula="logwidth/2"/>
             <draw:equation draw:name="f1" draw:formula="logheight/2"/>
             <draw:equation draw:name="f2" draw:formula="logheight"/>
@@ -7471,16 +7411,16 @@
           <text:p text:style-name="P2">
             <text:span text:style-name="T32">High-risk profile: Emergency + NYHA 4 (15% of cohort)</text:span>
           </text:p>
-          <draw:enhanced-geometry draw:mirror-horizontal="false" draw:mirror-vertical="false" draw:glue-points="?f0 0 0 ?f1 ?f0 ?f2 ?f3 ?f1" draw:text-areas="0 0 ?f3 ?f2" svg:viewBox="0 0 0 0" draw:type="ooxml-rect" draw:enhanced-path="M 0 0 L ?f3 0 ?f3 ?f2 0 ?f2 Z N">
-            <draw:equation draw:name="f0" draw:formula="logwidth/2"/>
-            <draw:equation draw:name="f1" draw:formula="logheight/2"/>
-            <draw:equation draw:name="f2" draw:formula="logheight"/>
-            <draw:equation draw:name="f3" draw:formula="logwidth"/>
-          </draw:enhanced-geometry>
-        </draw:custom-shape>
-        <draw:custom-shape draw:name="Shape 18" draw:style-name="gr20" draw:text-style-name="P16" draw:layer="layout" svg:width="9.903cm" svg:height="1.826cm" svg:x="14.224cm" svg:y="5.791cm">
-          <text:p/>
-          <draw:enhanced-geometry draw:mirror-horizontal="false" draw:mirror-vertical="false" draw:glue-points="?f8 0 0 ?f9 ?f8 ?f10 ?f11 ?f9" draw:text-areas="?f5 ?f5 ?f6 ?f7" svg:viewBox="0 0 0 0" draw:type="ooxml-roundRect" draw:modifiers="11111" draw:enhanced-path="M 0 ?f2 L ?f3 0 L ?f11 ?f4 L ?f2 ?f10 Z N" drawooo:enhanced-path="M 0 ?f2 G ?f2 ?f2 ?f12 ?f13 L ?f3 0 G ?f2 ?f2 ?f14 ?f15 L ?f11 ?f4 G ?f2 ?f2 ?f16 ?f17 L ?f2 ?f10 G ?f2 ?f2 ?f18 ?f19 Z N">
+          <draw:enhanced-geometry draw:mirror-horizontal="false" draw:mirror-vertical="false" svg:viewBox="0 0 0 0" draw:glue-points="?f0 0 0 ?f1 ?f0 ?f2 ?f3 ?f1" draw:text-areas="0 0 ?f3 ?f2" draw:type="ooxml-rect" draw:enhanced-path="M 0 0 L ?f3 0 ?f3 ?f2 0 ?f2 Z N">
+            <draw:equation draw:name="f0" draw:formula="logwidth/2"/>
+            <draw:equation draw:name="f1" draw:formula="logheight/2"/>
+            <draw:equation draw:name="f2" draw:formula="logheight"/>
+            <draw:equation draw:name="f3" draw:formula="logwidth"/>
+          </draw:enhanced-geometry>
+        </draw:custom-shape>
+        <draw:custom-shape draw:name="Shape 18" draw:style-name="gr20" draw:text-style-name="P18" draw:layer="layout" svg:width="9.903cm" svg:height="1.826cm" svg:x="14.224cm" svg:y="5.791cm">
+          <text:p/>
+          <draw:enhanced-geometry draw:mirror-horizontal="false" draw:mirror-vertical="false" svg:viewBox="0 0 0 0" draw:glue-points="?f8 0 0 ?f9 ?f8 ?f10 ?f11 ?f9" draw:text-areas="?f5 ?f5 ?f6 ?f7" draw:type="ooxml-roundRect" draw:modifiers="11111" draw:enhanced-path="M 0 ?f2 L ?f3 0 L ?f11 ?f4 L ?f2 ?f10 Z N" drawooo:enhanced-path="M 0 ?f2 G ?f2 ?f2 ?f12 ?f13 L ?f3 0 G ?f2 ?f2 ?f14 ?f15 L ?f11 ?f4 G ?f2 ?f2 ?f16 ?f17 L ?f2 ?f10 G ?f2 ?f2 ?f18 ?f19 Z N">
             <draw:equation draw:name="f0" draw:formula="if(0-$0 ,0,if(50000-$0 ,$0 ,50000))"/>
             <draw:equation draw:name="f1" draw:formula="min(logwidth,logheight)"/>
             <draw:equation draw:name="f2" draw:formula="?f1 *?f0 /100000"/>
@@ -7501,12 +7441,12 @@
             <draw:equation draw:name="f17" draw:formula="(5400000)/60000.0"/>
             <draw:equation draw:name="f18" draw:formula="(5400000)/60000.0"/>
             <draw:equation draw:name="f19" draw:formula="(5400000)/60000.0"/>
-            <draw:handle draw:handle-position="?f2 0" draw:handle-position-x="?f2" draw:handle-position-y="0" draw:handle-range-x-maximum="50000" draw:handle-range-x-minimum="0"/>
-          </draw:enhanced-geometry>
-        </draw:custom-shape>
-        <draw:custom-shape draw:name="Shape 19" draw:style-name="gr109" draw:text-style-name="P18" draw:layer="layout" svg:width="0.403cm" svg:height="0.403cm" svg:x="14.605cm" svg:y="6.502cm">
-          <text:p/>
-          <draw:enhanced-geometry draw:mirror-horizontal="false" draw:mirror-vertical="false" draw:glue-points="?f4 0 ?f5 ?f8 0 ?f7 ?f5 ?f9 ?f4 ?f10 ?f6 ?f9 ?f11 ?f7 ?f6 ?f8" draw:text-areas="?f5 ?f8 ?f6 ?f9" svg:viewBox="0 0 0 0" draw:type="ooxml-ellipse" draw:enhanced-path="M 0 ?f7 Z N" drawooo:enhanced-path="M 0 ?f7 G ?f0 ?f2 ?f12 ?f13 ?f0 ?f2 ?f14 ?f15 ?f0 ?f2 ?f16 ?f17 ?f0 ?f2 ?f18 ?f19 Z N">
+            <draw:handle draw:handle-range-x-maximum="50000" draw:handle-range-x-minimum="0" draw:handle-position="?f2 0" draw:handle-position-x="?f2" draw:handle-position-y="0"/>
+          </draw:enhanced-geometry>
+        </draw:custom-shape>
+        <draw:custom-shape draw:name="Shape 19" draw:style-name="gr109" draw:text-style-name="P20" draw:layer="layout" svg:width="0.403cm" svg:height="0.403cm" svg:x="14.605cm" svg:y="6.502cm">
+          <text:p/>
+          <draw:enhanced-geometry draw:mirror-horizontal="false" draw:mirror-vertical="false" svg:viewBox="0 0 0 0" draw:glue-points="?f4 0 ?f5 ?f8 0 ?f7 ?f5 ?f9 ?f4 ?f10 ?f6 ?f9 ?f11 ?f7 ?f6 ?f8" draw:text-areas="?f5 ?f8 ?f6 ?f9" draw:type="ooxml-ellipse" draw:enhanced-path="M 0 ?f7 Z N" drawooo:enhanced-path="M 0 ?f7 G ?f0 ?f2 ?f12 ?f13 ?f0 ?f2 ?f14 ?f15 ?f0 ?f2 ?f16 ?f17 ?f0 ?f2 ?f18 ?f19 Z N">
             <draw:equation draw:name="f0" draw:formula="logwidth/2"/>
             <draw:equation draw:name="f1" draw:formula="?f0 *cos(pi*(2700000)/10800000)"/>
             <draw:equation draw:name="f2" draw:formula="logheight/2"/>
@@ -7533,7 +7473,7 @@
           <text:p text:style-name="P2">
             <text:span text:style-name="T31">10.9% vs 6.3%</text:span>
           </text:p>
-          <draw:enhanced-geometry draw:mirror-horizontal="false" draw:mirror-vertical="false" draw:glue-points="?f0 0 0 ?f1 ?f0 ?f2 ?f3 ?f1" draw:text-areas="0 0 ?f3 ?f2" svg:viewBox="0 0 0 0" draw:type="ooxml-rect" draw:enhanced-path="M 0 0 L ?f3 0 ?f3 ?f2 0 ?f2 Z N">
+          <draw:enhanced-geometry draw:mirror-horizontal="false" draw:mirror-vertical="false" svg:viewBox="0 0 0 0" draw:glue-points="?f0 0 0 ?f1 ?f0 ?f2 ?f3 ?f1" draw:text-areas="0 0 ?f3 ?f2" draw:type="ooxml-rect" draw:enhanced-path="M 0 0 L ?f3 0 ?f3 ?f2 0 ?f2 Z N">
             <draw:equation draw:name="f0" draw:formula="logwidth/2"/>
             <draw:equation draw:name="f1" draw:formula="logheight/2"/>
             <draw:equation draw:name="f2" draw:formula="logheight"/>
@@ -7544,16 +7484,16 @@
           <text:p text:style-name="P2">
             <text:span text:style-name="T32">28-day readmission: high-risk vs everyone else</text:span>
           </text:p>
-          <draw:enhanced-geometry draw:mirror-horizontal="false" draw:mirror-vertical="false" draw:glue-points="?f0 0 0 ?f1 ?f0 ?f2 ?f3 ?f1" draw:text-areas="0 0 ?f3 ?f2" svg:viewBox="0 0 0 0" draw:type="ooxml-rect" draw:enhanced-path="M 0 0 L ?f3 0 ?f3 ?f2 0 ?f2 Z N">
-            <draw:equation draw:name="f0" draw:formula="logwidth/2"/>
-            <draw:equation draw:name="f1" draw:formula="logheight/2"/>
-            <draw:equation draw:name="f2" draw:formula="logheight"/>
-            <draw:equation draw:name="f3" draw:formula="logwidth"/>
-          </draw:enhanced-geometry>
-        </draw:custom-shape>
-        <draw:custom-shape draw:name="Shape 22" draw:style-name="gr20" draw:text-style-name="P16" draw:layer="layout" svg:width="9.903cm" svg:height="1.826cm" svg:x="14.224cm" svg:y="7.899cm">
-          <text:p/>
-          <draw:enhanced-geometry draw:mirror-horizontal="false" draw:mirror-vertical="false" draw:glue-points="?f8 0 0 ?f9 ?f8 ?f10 ?f11 ?f9" draw:text-areas="?f5 ?f5 ?f6 ?f7" svg:viewBox="0 0 0 0" draw:type="ooxml-roundRect" draw:modifiers="11111" draw:enhanced-path="M 0 ?f2 L ?f3 0 L ?f11 ?f4 L ?f2 ?f10 Z N" drawooo:enhanced-path="M 0 ?f2 G ?f2 ?f2 ?f12 ?f13 L ?f3 0 G ?f2 ?f2 ?f14 ?f15 L ?f11 ?f4 G ?f2 ?f2 ?f16 ?f17 L ?f2 ?f10 G ?f2 ?f2 ?f18 ?f19 Z N">
+          <draw:enhanced-geometry draw:mirror-horizontal="false" draw:mirror-vertical="false" svg:viewBox="0 0 0 0" draw:glue-points="?f0 0 0 ?f1 ?f0 ?f2 ?f3 ?f1" draw:text-areas="0 0 ?f3 ?f2" draw:type="ooxml-rect" draw:enhanced-path="M 0 0 L ?f3 0 ?f3 ?f2 0 ?f2 Z N">
+            <draw:equation draw:name="f0" draw:formula="logwidth/2"/>
+            <draw:equation draw:name="f1" draw:formula="logheight/2"/>
+            <draw:equation draw:name="f2" draw:formula="logheight"/>
+            <draw:equation draw:name="f3" draw:formula="logwidth"/>
+          </draw:enhanced-geometry>
+        </draw:custom-shape>
+        <draw:custom-shape draw:name="Shape 22" draw:style-name="gr20" draw:text-style-name="P18" draw:layer="layout" svg:width="9.903cm" svg:height="1.826cm" svg:x="14.224cm" svg:y="7.899cm">
+          <text:p/>
+          <draw:enhanced-geometry draw:mirror-horizontal="false" draw:mirror-vertical="false" svg:viewBox="0 0 0 0" draw:glue-points="?f8 0 0 ?f9 ?f8 ?f10 ?f11 ?f9" draw:text-areas="?f5 ?f5 ?f6 ?f7" draw:type="ooxml-roundRect" draw:modifiers="11111" draw:enhanced-path="M 0 ?f2 L ?f3 0 L ?f11 ?f4 L ?f2 ?f10 Z N" drawooo:enhanced-path="M 0 ?f2 G ?f2 ?f2 ?f12 ?f13 L ?f3 0 G ?f2 ?f2 ?f14 ?f15 L ?f11 ?f4 G ?f2 ?f2 ?f16 ?f17 L ?f2 ?f10 G ?f2 ?f2 ?f18 ?f19 Z N">
             <draw:equation draw:name="f0" draw:formula="if(0-$0 ,0,if(50000-$0 ,$0 ,50000))"/>
             <draw:equation draw:name="f1" draw:formula="min(logwidth,logheight)"/>
             <draw:equation draw:name="f2" draw:formula="?f1 *?f0 /100000"/>
@@ -7574,12 +7514,12 @@
             <draw:equation draw:name="f17" draw:formula="(5400000)/60000.0"/>
             <draw:equation draw:name="f18" draw:formula="(5400000)/60000.0"/>
             <draw:equation draw:name="f19" draw:formula="(5400000)/60000.0"/>
-            <draw:handle draw:handle-position="?f2 0" draw:handle-position-x="?f2" draw:handle-position-y="0" draw:handle-range-x-maximum="50000" draw:handle-range-x-minimum="0"/>
-          </draw:enhanced-geometry>
-        </draw:custom-shape>
-        <draw:custom-shape draw:name="Shape 23" draw:style-name="gr112" draw:text-style-name="P12" draw:layer="layout" svg:width="0.403cm" svg:height="0.403cm" svg:x="14.605cm" svg:y="8.611cm">
-          <text:p/>
-          <draw:enhanced-geometry draw:mirror-horizontal="false" draw:mirror-vertical="false" draw:glue-points="?f4 0 ?f5 ?f8 0 ?f7 ?f5 ?f9 ?f4 ?f10 ?f6 ?f9 ?f11 ?f7 ?f6 ?f8" draw:text-areas="?f5 ?f8 ?f6 ?f9" svg:viewBox="0 0 0 0" draw:type="ooxml-ellipse" draw:enhanced-path="M 0 ?f7 Z N" drawooo:enhanced-path="M 0 ?f7 G ?f0 ?f2 ?f12 ?f13 ?f0 ?f2 ?f14 ?f15 ?f0 ?f2 ?f16 ?f17 ?f0 ?f2 ?f18 ?f19 Z N">
+            <draw:handle draw:handle-range-x-maximum="50000" draw:handle-range-x-minimum="0" draw:handle-position="?f2 0" draw:handle-position-x="?f2" draw:handle-position-y="0"/>
+          </draw:enhanced-geometry>
+        </draw:custom-shape>
+        <draw:custom-shape draw:name="Shape 23" draw:style-name="gr112" draw:text-style-name="P14" draw:layer="layout" svg:width="0.403cm" svg:height="0.403cm" svg:x="14.605cm" svg:y="8.611cm">
+          <text:p/>
+          <draw:enhanced-geometry draw:mirror-horizontal="false" draw:mirror-vertical="false" svg:viewBox="0 0 0 0" draw:glue-points="?f4 0 ?f5 ?f8 0 ?f7 ?f5 ?f9 ?f4 ?f10 ?f6 ?f9 ?f11 ?f7 ?f6 ?f8" draw:text-areas="?f5 ?f8 ?f6 ?f9" draw:type="ooxml-ellipse" draw:enhanced-path="M 0 ?f7 Z N" drawooo:enhanced-path="M 0 ?f7 G ?f0 ?f2 ?f12 ?f13 ?f0 ?f2 ?f14 ?f15 ?f0 ?f2 ?f16 ?f17 ?f0 ?f2 ?f18 ?f19 Z N">
             <draw:equation draw:name="f0" draw:formula="logwidth/2"/>
             <draw:equation draw:name="f1" draw:formula="?f0 *cos(pi*(2700000)/10800000)"/>
             <draw:equation draw:name="f2" draw:formula="logheight/2"/>
@@ -7606,7 +7546,7 @@
           <text:p text:style-name="P2">
             <text:span text:style-name="T31">4.9% vs 1.3%</text:span>
           </text:p>
-          <draw:enhanced-geometry draw:mirror-horizontal="false" draw:mirror-vertical="false" draw:glue-points="?f0 0 0 ?f1 ?f0 ?f2 ?f3 ?f1" draw:text-areas="0 0 ?f3 ?f2" svg:viewBox="0 0 0 0" draw:type="ooxml-rect" draw:enhanced-path="M 0 0 L ?f3 0 ?f3 ?f2 0 ?f2 Z N">
+          <draw:enhanced-geometry draw:mirror-horizontal="false" draw:mirror-vertical="false" svg:viewBox="0 0 0 0" draw:glue-points="?f0 0 0 ?f1 ?f0 ?f2 ?f3 ?f1" draw:text-areas="0 0 ?f3 ?f2" draw:type="ooxml-rect" draw:enhanced-path="M 0 0 L ?f3 0 ?f3 ?f2 0 ?f2 Z N">
             <draw:equation draw:name="f0" draw:formula="logwidth/2"/>
             <draw:equation draw:name="f1" draw:formula="logheight/2"/>
             <draw:equation draw:name="f2" draw:formula="logheight"/>
@@ -7617,16 +7557,16 @@
           <text:p text:style-name="P2">
             <text:span text:style-name="T32">28-day mortality: high-risk vs everyone else</text:span>
           </text:p>
-          <draw:enhanced-geometry draw:mirror-horizontal="false" draw:mirror-vertical="false" draw:glue-points="?f0 0 0 ?f1 ?f0 ?f2 ?f3 ?f1" draw:text-areas="0 0 ?f3 ?f2" svg:viewBox="0 0 0 0" draw:type="ooxml-rect" draw:enhanced-path="M 0 0 L ?f3 0 ?f3 ?f2 0 ?f2 Z N">
-            <draw:equation draw:name="f0" draw:formula="logwidth/2"/>
-            <draw:equation draw:name="f1" draw:formula="logheight/2"/>
-            <draw:equation draw:name="f2" draw:formula="logheight"/>
-            <draw:equation draw:name="f3" draw:formula="logwidth"/>
-          </draw:enhanced-geometry>
-        </draw:custom-shape>
-        <draw:custom-shape draw:name="Shape 26" draw:style-name="gr20" draw:text-style-name="P16" draw:layer="layout" svg:width="11.173cm" svg:height="2.842cm" svg:x="1.27cm" svg:y="10.211cm">
-          <text:p/>
-          <draw:enhanced-geometry draw:mirror-horizontal="false" draw:mirror-vertical="false" draw:glue-points="?f8 0 0 ?f9 ?f8 ?f10 ?f11 ?f9" draw:text-areas="?f5 ?f5 ?f6 ?f7" svg:viewBox="0 0 0 0" draw:type="ooxml-roundRect" draw:modifiers="7143" draw:enhanced-path="M 0 ?f2 L ?f3 0 L ?f11 ?f4 L ?f2 ?f10 Z N" drawooo:enhanced-path="M 0 ?f2 G ?f2 ?f2 ?f12 ?f13 L ?f3 0 G ?f2 ?f2 ?f14 ?f15 L ?f11 ?f4 G ?f2 ?f2 ?f16 ?f17 L ?f2 ?f10 G ?f2 ?f2 ?f18 ?f19 Z N">
+          <draw:enhanced-geometry draw:mirror-horizontal="false" draw:mirror-vertical="false" svg:viewBox="0 0 0 0" draw:glue-points="?f0 0 0 ?f1 ?f0 ?f2 ?f3 ?f1" draw:text-areas="0 0 ?f3 ?f2" draw:type="ooxml-rect" draw:enhanced-path="M 0 0 L ?f3 0 ?f3 ?f2 0 ?f2 Z N">
+            <draw:equation draw:name="f0" draw:formula="logwidth/2"/>
+            <draw:equation draw:name="f1" draw:formula="logheight/2"/>
+            <draw:equation draw:name="f2" draw:formula="logheight"/>
+            <draw:equation draw:name="f3" draw:formula="logwidth"/>
+          </draw:enhanced-geometry>
+        </draw:custom-shape>
+        <draw:custom-shape draw:name="Shape 26" draw:style-name="gr20" draw:text-style-name="P18" draw:layer="layout" svg:width="11.173cm" svg:height="2.842cm" svg:x="1.27cm" svg:y="10.211cm">
+          <text:p/>
+          <draw:enhanced-geometry draw:mirror-horizontal="false" draw:mirror-vertical="false" svg:viewBox="0 0 0 0" draw:glue-points="?f8 0 0 ?f9 ?f8 ?f10 ?f11 ?f9" draw:text-areas="?f5 ?f5 ?f6 ?f7" draw:type="ooxml-roundRect" draw:modifiers="7143" draw:enhanced-path="M 0 ?f2 L ?f3 0 L ?f11 ?f4 L ?f2 ?f10 Z N" drawooo:enhanced-path="M 0 ?f2 G ?f2 ?f2 ?f12 ?f13 L ?f3 0 G ?f2 ?f2 ?f14 ?f15 L ?f11 ?f4 G ?f2 ?f2 ?f16 ?f17 L ?f2 ?f10 G ?f2 ?f2 ?f18 ?f19 Z N">
             <draw:equation draw:name="f0" draw:formula="if(0-$0 ,0,if(50000-$0 ,$0 ,50000))"/>
             <draw:equation draw:name="f1" draw:formula="min(logwidth,logheight)"/>
             <draw:equation draw:name="f2" draw:formula="?f1 *?f0 /100000"/>
@@ -7647,34 +7587,34 @@
             <draw:equation draw:name="f17" draw:formula="(5400000)/60000.0"/>
             <draw:equation draw:name="f18" draw:formula="(5400000)/60000.0"/>
             <draw:equation draw:name="f19" draw:formula="(5400000)/60000.0"/>
-            <draw:handle draw:handle-position="?f2 0" draw:handle-position-x="?f2" draw:handle-position-y="0" draw:handle-range-x-maximum="50000" draw:handle-range-x-minimum="0"/>
-          </draw:enhanced-geometry>
-        </draw:custom-shape>
-        <draw:custom-shape draw:name="Text 27" draw:style-name="gr115" draw:text-style-name="P29" draw:layer="layout" svg:width="10.411cm" svg:height="2.435cm" svg:x="1.651cm" svg:y="10.414cm">
-          <text:p text:style-name="P28">
+            <draw:handle draw:handle-range-x-maximum="50000" draw:handle-range-x-minimum="0" draw:handle-position="?f2 0" draw:handle-position-x="?f2" draw:handle-position-y="0"/>
+          </draw:enhanced-geometry>
+        </draw:custom-shape>
+        <draw:custom-shape draw:name="Text 27" draw:style-name="gr115" draw:text-style-name="P31" draw:layer="layout" svg:width="10.411cm" svg:height="2.435cm" svg:x="1.651cm" svg:y="10.414cm">
+          <text:p text:style-name="P30">
             <text:span text:style-name="T25">
               FINDING 
               <text:s/>
             </text:span>
             <text:span text:style-name="T23">Readmission rises with severity and is highest (10.9%) for emergency NYHA 4 admissions — the darkest cell.</text:span>
           </text:p>
-          <text:p text:style-name="P28">
+          <text:p text:style-name="P30">
             <text:span text:style-name="T25">
               SO WHAT 
               <text:s/>
             </text:span>
             <text:span text:style-name="T23">This group also dies almost 4× as often in the first 28 days.</text:span>
           </text:p>
-          <draw:enhanced-geometry draw:mirror-horizontal="false" draw:mirror-vertical="false" draw:glue-points="?f0 0 0 ?f1 ?f0 ?f2 ?f3 ?f1" draw:text-areas="0 0 ?f3 ?f2" svg:viewBox="0 0 0 0" draw:type="ooxml-rect" draw:enhanced-path="M 0 0 L ?f3 0 ?f3 ?f2 0 ?f2 Z N">
-            <draw:equation draw:name="f0" draw:formula="logwidth/2"/>
-            <draw:equation draw:name="f1" draw:formula="logheight/2"/>
-            <draw:equation draw:name="f2" draw:formula="logheight"/>
-            <draw:equation draw:name="f3" draw:formula="logwidth"/>
-          </draw:enhanced-geometry>
-        </draw:custom-shape>
-        <draw:custom-shape draw:name="Shape 28" draw:style-name="gr20" draw:text-style-name="P16" draw:layer="layout" svg:width="11.173cm" svg:height="2.842cm" svg:x="12.954cm" svg:y="10.211cm">
-          <text:p/>
-          <draw:enhanced-geometry draw:mirror-horizontal="false" draw:mirror-vertical="false" draw:glue-points="?f8 0 0 ?f9 ?f8 ?f10 ?f11 ?f9" draw:text-areas="?f5 ?f5 ?f6 ?f7" svg:viewBox="0 0 0 0" draw:type="ooxml-roundRect" draw:modifiers="7143" draw:enhanced-path="M 0 ?f2 L ?f3 0 L ?f11 ?f4 L ?f2 ?f10 Z N" drawooo:enhanced-path="M 0 ?f2 G ?f2 ?f2 ?f12 ?f13 L ?f3 0 G ?f2 ?f2 ?f14 ?f15 L ?f11 ?f4 G ?f2 ?f2 ?f16 ?f17 L ?f2 ?f10 G ?f2 ?f2 ?f18 ?f19 Z N">
+          <draw:enhanced-geometry draw:mirror-horizontal="false" draw:mirror-vertical="false" svg:viewBox="0 0 0 0" draw:glue-points="?f0 0 0 ?f1 ?f0 ?f2 ?f3 ?f1" draw:text-areas="0 0 ?f3 ?f2" draw:type="ooxml-rect" draw:enhanced-path="M 0 0 L ?f3 0 ?f3 ?f2 0 ?f2 Z N">
+            <draw:equation draw:name="f0" draw:formula="logwidth/2"/>
+            <draw:equation draw:name="f1" draw:formula="logheight/2"/>
+            <draw:equation draw:name="f2" draw:formula="logheight"/>
+            <draw:equation draw:name="f3" draw:formula="logwidth"/>
+          </draw:enhanced-geometry>
+        </draw:custom-shape>
+        <draw:custom-shape draw:name="Shape 28" draw:style-name="gr20" draw:text-style-name="P18" draw:layer="layout" svg:width="11.173cm" svg:height="2.842cm" svg:x="12.954cm" svg:y="10.211cm">
+          <text:p/>
+          <draw:enhanced-geometry draw:mirror-horizontal="false" draw:mirror-vertical="false" svg:viewBox="0 0 0 0" draw:glue-points="?f8 0 0 ?f9 ?f8 ?f10 ?f11 ?f9" draw:text-areas="?f5 ?f5 ?f6 ?f7" draw:type="ooxml-roundRect" draw:modifiers="7143" draw:enhanced-path="M 0 ?f2 L ?f3 0 L ?f11 ?f4 L ?f2 ?f10 Z N" drawooo:enhanced-path="M 0 ?f2 G ?f2 ?f2 ?f12 ?f13 L ?f3 0 G ?f2 ?f2 ?f14 ?f15 L ?f11 ?f4 G ?f2 ?f2 ?f16 ?f17 L ?f2 ?f10 G ?f2 ?f2 ?f18 ?f19 Z N">
             <draw:equation draw:name="f0" draw:formula="if(0-$0 ,0,if(50000-$0 ,$0 ,50000))"/>
             <draw:equation draw:name="f1" draw:formula="min(logwidth,logheight)"/>
             <draw:equation draw:name="f2" draw:formula="?f1 *?f0 /100000"/>
@@ -7695,34 +7635,34 @@
             <draw:equation draw:name="f17" draw:formula="(5400000)/60000.0"/>
             <draw:equation draw:name="f18" draw:formula="(5400000)/60000.0"/>
             <draw:equation draw:name="f19" draw:formula="(5400000)/60000.0"/>
-            <draw:handle draw:handle-position="?f2 0" draw:handle-position-x="?f2" draw:handle-position-y="0" draw:handle-range-x-maximum="50000" draw:handle-range-x-minimum="0"/>
-          </draw:enhanced-geometry>
-        </draw:custom-shape>
-        <draw:custom-shape draw:name="Text 29" draw:style-name="gr116" draw:text-style-name="P29" draw:layer="layout" svg:width="10.411cm" svg:height="2.435cm" svg:x="13.335cm" svg:y="10.414cm">
-          <text:p text:style-name="P28">
+            <draw:handle draw:handle-range-x-maximum="50000" draw:handle-range-x-minimum="0" draw:handle-position="?f2 0" draw:handle-position-x="?f2" draw:handle-position-y="0"/>
+          </draw:enhanced-geometry>
+        </draw:custom-shape>
+        <draw:custom-shape draw:name="Text 29" draw:style-name="gr116" draw:text-style-name="P31" draw:layer="layout" svg:width="10.411cm" svg:height="2.435cm" svg:x="13.335cm" svg:y="10.414cm">
+          <text:p text:style-name="P30">
             <text:span text:style-name="T25">
               ACTION 
               <text:s/>
             </text:span>
             <text:span text:style-name="T23">Tier 1 (Emergency + NYHA 4): call within 72 h and clinic within 7 days.</text:span>
           </text:p>
-          <text:p text:style-name="P28">
+          <text:p text:style-name="P30">
             <text:span text:style-name="T25">
               ACTION 
               <text:s/>
             </text:span>
             <text:span text:style-name="T23">Tier 2 (planned NYHA 4 or Emergency + NYHA 3): clinic within 14 days.</text:span>
           </text:p>
-          <draw:enhanced-geometry draw:mirror-horizontal="false" draw:mirror-vertical="false" draw:glue-points="?f0 0 0 ?f1 ?f0 ?f2 ?f3 ?f1" draw:text-areas="0 0 ?f3 ?f2" svg:viewBox="0 0 0 0" draw:type="ooxml-rect" draw:enhanced-path="M 0 0 L ?f3 0 ?f3 ?f2 0 ?f2 Z N">
-            <draw:equation draw:name="f0" draw:formula="logwidth/2"/>
-            <draw:equation draw:name="f1" draw:formula="logheight/2"/>
-            <draw:equation draw:name="f2" draw:formula="logheight"/>
-            <draw:equation draw:name="f3" draw:formula="logwidth"/>
-          </draw:enhanced-geometry>
-        </draw:custom-shape>
-        <draw:custom-shape draw:name="Freeform 4" draw:style-name="gr117" draw:text-style-name="P33" draw:layer="layout" svg:width="1.347cm" svg:height="2.221cm" svg:x="23.971cm" svg:y="0.085cm">
-          <text:p/>
-          <draw:enhanced-geometry draw:mirror-horizontal="false" draw:mirror-vertical="false" drawooo:sub-view-size="647700 1066800" draw:text-areas="?f0 ?f2 ?f1 ?f3" svg:viewBox="0 0 0 0" draw:type="ooxml-non-primitive" draw:enhanced-path="M 0 0 L 647700 0 647700 1066800 0 1066800 0 0 Z N">
+          <draw:enhanced-geometry draw:mirror-horizontal="false" draw:mirror-vertical="false" svg:viewBox="0 0 0 0" draw:glue-points="?f0 0 0 ?f1 ?f0 ?f2 ?f3 ?f1" draw:text-areas="0 0 ?f3 ?f2" draw:type="ooxml-rect" draw:enhanced-path="M 0 0 L ?f3 0 ?f3 ?f2 0 ?f2 Z N">
+            <draw:equation draw:name="f0" draw:formula="logwidth/2"/>
+            <draw:equation draw:name="f1" draw:formula="logheight/2"/>
+            <draw:equation draw:name="f2" draw:formula="logheight"/>
+            <draw:equation draw:name="f3" draw:formula="logwidth"/>
+          </draw:enhanced-geometry>
+        </draw:custom-shape>
+        <draw:custom-shape draw:name="Freeform 4" draw:style-name="gr117" draw:text-style-name="P36" draw:layer="layout" svg:width="1.347cm" svg:height="2.221cm" svg:x="23.971cm" svg:y="0.085cm">
+          <text:p/>
+          <draw:enhanced-geometry draw:mirror-horizontal="false" draw:mirror-vertical="false" svg:viewBox="0 0 0 0" drawooo:sub-view-size="647700 1066800" draw:text-areas="?f0 ?f2 ?f1 ?f3" draw:type="ooxml-non-primitive" draw:enhanced-path="M 0 0 L 647700 0 647700 1066800 0 1066800 0 0 Z N">
             <draw:equation draw:name="f0" draw:formula="0*logwidth/485280"/>
             <draw:equation draw:name="f1" draw:formula="485640*logwidth/485280"/>
             <draw:equation draw:name="f2" draw:formula="0*logheight/799920"/>
@@ -7731,16 +7671,16 @@
         </draw:custom-shape>
         <presentation:notes draw:style-name="dp2">
           <draw:page-thumbnail draw:name="PlaceHolder 1" draw:style-name="gr10" draw:layer="layout" svg:width="15.237cm" svg:height="8.57cm" svg:x="1.905cm" svg:y="3.175cm" draw:page-number="6" presentation:class="page"/>
-          <draw:frame draw:name="PlaceHolder 2" presentation:style-name="pr1" draw:text-style-name="P9" draw:layer="layout" svg:width="15.237cm" svg:height="9.998cm" svg:x="1.905cm" svg:y="12.224cm" presentation:class="notes" presentation:user-transformed="true">
+          <draw:frame draw:name="PlaceHolder 2" presentation:style-name="pr1" draw:text-style-name="P11" draw:layer="layout" svg:width="15.237cm" svg:height="9.998cm" svg:x="1.905cm" svg:y="12.224cm" presentation:class="notes" presentation:user-transformed="true">
             <draw:text-box>
-              <text:p text:style-name="P8">
+              <text:p text:style-name="P10">
                 <text:span text:style-name="T6">The heatmap shows 28-day readmission for each combination of heart-failure severity (rows) and admission type (columns); darker blue means more readmissions, and n is the number of patients in each cell. Risk climbs down the rows and is highest in the bottom-left cell. The tiles on the right compare this high-risk group with everyone else, which gives a simple two-tier follow-up plan.</text:span>
               </text:p>
             </draw:text-box>
           </draw:frame>
-          <draw:frame draw:name="PlaceHolder 3" presentation:style-name="pr2" draw:text-style-name="P11" draw:layer="layout" svg:width="8.252cm" svg:height="1.271cm" svg:x="10.791cm" svg:y="24.126cm" presentation:class="page-number" presentation:user-transformed="true">
+          <draw:frame draw:name="PlaceHolder 3" presentation:style-name="pr2" draw:text-style-name="P13" draw:layer="layout" svg:width="8.252cm" svg:height="1.271cm" svg:x="10.791cm" svg:y="24.126cm" presentation:class="page-number" presentation:user-transformed="true">
             <draw:text-box>
-              <text:p text:style-name="P10">
+              <text:p text:style-name="P12">
                 <text:span text:style-name="T7">
                   <text:page-number>&lt;number&gt;</text:page-number>
                 </text:span>
@@ -7750,9 +7690,9 @@
         </presentation:notes>
       </draw:page>
       <draw:page draw:name="page7" draw:style-name="dp8" draw:master-page-name="DEFAULT">
-        <draw:custom-shape draw:name="Shape 0" draw:style-name="gr83" draw:text-style-name="P31" draw:layer="layout" svg:width="3.426cm" svg:height="0.683cm" svg:x="1.27cm" svg:y="0.635cm">
-          <text:p/>
-          <draw:enhanced-geometry draw:mirror-horizontal="false" draw:mirror-vertical="false" draw:glue-points="?f8 0 0 ?f9 ?f8 ?f10 ?f11 ?f9" draw:text-areas="?f5 ?f5 ?f6 ?f7" svg:viewBox="0 0 0 0" draw:type="ooxml-roundRect" draw:modifiers="48148" draw:enhanced-path="M 0 ?f2 L ?f3 0 L ?f11 ?f4 L ?f2 ?f10 Z N" drawooo:enhanced-path="M 0 ?f2 G ?f2 ?f2 ?f12 ?f13 L ?f3 0 G ?f2 ?f2 ?f14 ?f15 L ?f11 ?f4 G ?f2 ?f2 ?f16 ?f17 L ?f2 ?f10 G ?f2 ?f2 ?f18 ?f19 Z N">
+        <draw:custom-shape draw:name="Shape 0" draw:style-name="gr83" draw:text-style-name="P33" draw:layer="layout" svg:width="3.426cm" svg:height="0.683cm" svg:x="1.27cm" svg:y="0.635cm">
+          <text:p/>
+          <draw:enhanced-geometry draw:mirror-horizontal="false" draw:mirror-vertical="false" svg:viewBox="0 0 0 0" draw:glue-points="?f8 0 0 ?f9 ?f8 ?f10 ?f11 ?f9" draw:text-areas="?f5 ?f5 ?f6 ?f7" draw:type="ooxml-roundRect" draw:modifiers="48148" draw:enhanced-path="M 0 ?f2 L ?f3 0 L ?f11 ?f4 L ?f2 ?f10 Z N" drawooo:enhanced-path="M 0 ?f2 G ?f2 ?f2 ?f12 ?f13 L ?f3 0 G ?f2 ?f2 ?f14 ?f15 L ?f11 ?f4 G ?f2 ?f2 ?f16 ?f17 L ?f2 ?f10 G ?f2 ?f2 ?f18 ?f19 Z N">
             <draw:equation draw:name="f0" draw:formula="if(0-$0 ,0,if(50000-$0 ,$0 ,50000))"/>
             <draw:equation draw:name="f1" draw:formula="min(logwidth,logheight)"/>
             <draw:equation draw:name="f2" draw:formula="?f1 *?f0 /100000"/>
@@ -7773,14 +7713,14 @@
             <draw:equation draw:name="f17" draw:formula="(5400000)/60000.0"/>
             <draw:equation draw:name="f18" draw:formula="(5400000)/60000.0"/>
             <draw:equation draw:name="f19" draw:formula="(5400000)/60000.0"/>
-            <draw:handle draw:handle-position="?f2 0" draw:handle-position-x="?f2" draw:handle-position-y="0" draw:handle-range-x-maximum="50000" draw:handle-range-x-minimum="0"/>
-          </draw:enhanced-geometry>
-        </draw:custom-shape>
-        <draw:custom-shape draw:name="Text 1" draw:style-name="gr118" draw:text-style-name="P14" draw:layer="layout" svg:width="3.426cm" svg:height="0.683cm" svg:x="1.27cm" svg:y="0.635cm">
-          <text:p text:style-name="P13">
+            <draw:handle draw:handle-range-x-maximum="50000" draw:handle-range-x-minimum="0" draw:handle-position="?f2 0" draw:handle-position-x="?f2" draw:handle-position-y="0"/>
+          </draw:enhanced-geometry>
+        </draw:custom-shape>
+        <draw:custom-shape draw:name="Text 1" draw:style-name="gr118" draw:text-style-name="P16" draw:layer="layout" svg:width="3.426cm" svg:height="0.683cm" svg:x="1.27cm" svg:y="0.635cm">
+          <text:p text:style-name="P15">
             <text:span text:style-name="T8">PRESCRIPTIVE</text:span>
           </text:p>
-          <draw:enhanced-geometry draw:mirror-horizontal="false" draw:mirror-vertical="false" draw:glue-points="?f0 0 0 ?f1 ?f0 ?f2 ?f3 ?f1" draw:text-areas="0 0 ?f3 ?f2" svg:viewBox="0 0 0 0" draw:type="ooxml-rect" draw:enhanced-path="M 0 0 L ?f3 0 ?f3 ?f2 0 ?f2 Z N">
+          <draw:enhanced-geometry draw:mirror-horizontal="false" draw:mirror-vertical="false" svg:viewBox="0 0 0 0" draw:glue-points="?f0 0 0 ?f1 ?f0 ?f2 ?f3 ?f1" draw:text-areas="0 0 ?f3 ?f2" draw:type="ooxml-rect" draw:enhanced-path="M 0 0 L ?f3 0 ?f3 ?f2 0 ?f2 Z N">
             <draw:equation draw:name="f0" draw:formula="logwidth/2"/>
             <draw:equation draw:name="f1" draw:formula="logheight/2"/>
             <draw:equation draw:name="f2" draw:formula="logheight"/>
@@ -7791,7 +7731,7 @@
           <text:p text:style-name="P2">
             <text:span text:style-name="T24">What should we do?</text:span>
           </text:p>
-          <draw:enhanced-geometry draw:mirror-horizontal="false" draw:mirror-vertical="false" draw:glue-points="?f0 0 0 ?f1 ?f0 ?f2 ?f3 ?f1" draw:text-areas="0 0 ?f3 ?f2" svg:viewBox="0 0 0 0" draw:type="ooxml-rect" draw:enhanced-path="M 0 0 L ?f3 0 ?f3 ?f2 0 ?f2 Z N">
+          <draw:enhanced-geometry draw:mirror-horizontal="false" draw:mirror-vertical="false" svg:viewBox="0 0 0 0" draw:glue-points="?f0 0 0 ?f1 ?f0 ?f2 ?f3 ?f1" draw:text-areas="0 0 ?f3 ?f2" draw:type="ooxml-rect" draw:enhanced-path="M 0 0 L ?f3 0 ?f3 ?f2 0 ?f2 Z N">
             <draw:equation draw:name="f0" draw:formula="logwidth/2"/>
             <draw:equation draw:name="f1" draw:formula="logheight/2"/>
             <draw:equation draw:name="f2" draw:formula="logheight"/>
@@ -7802,7 +7742,7 @@
           <text:p text:style-name="P2">
             <text:span text:style-name="T9">Biomarker Danger Zones</text:span>
           </text:p>
-          <draw:enhanced-geometry draw:mirror-horizontal="false" draw:mirror-vertical="false" draw:glue-points="?f0 0 0 ?f1 ?f0 ?f2 ?f3 ?f1" draw:text-areas="0 0 ?f3 ?f2" svg:viewBox="0 0 0 0" draw:type="ooxml-rect" draw:enhanced-path="M 0 0 L ?f3 0 ?f3 ?f2 0 ?f2 Z N">
+          <draw:enhanced-geometry draw:mirror-horizontal="false" draw:mirror-vertical="false" svg:viewBox="0 0 0 0" draw:glue-points="?f0 0 0 ?f1 ?f0 ?f2 ?f3 ?f1" draw:text-areas="0 0 ?f3 ?f2" draw:type="ooxml-rect" draw:enhanced-path="M 0 0 L ?f3 0 ?f3 ?f2 0 ?f2 Z N">
             <draw:equation draw:name="f0" draw:formula="logwidth/2"/>
             <draw:equation draw:name="f1" draw:formula="logheight/2"/>
             <draw:equation draw:name="f2" draw:formula="logheight"/>
@@ -7811,18 +7751,18 @@
         </draw:custom-shape>
         <draw:custom-shape draw:name="Text 4" draw:style-name="gr121" draw:text-style-name="P3" draw:layer="layout" svg:width="22.857cm" svg:height="0.657cm" svg:x="1.27cm" svg:y="2.692cm">
           <text:p text:style-name="P2">
-            <text:span text:style-name="T21">Dashboard charts: Cardio-renal risk (biventricular HF) · Mortality by potassium</text:span>
-          </text:p>
-          <draw:enhanced-geometry draw:mirror-horizontal="false" draw:mirror-vertical="false" draw:glue-points="?f0 0 0 ?f1 ?f0 ?f2 ?f3 ?f1" draw:text-areas="0 0 ?f3 ?f2" svg:viewBox="0 0 0 0" draw:type="ooxml-rect" draw:enhanced-path="M 0 0 L ?f3 0 ?f3 ?f2 0 ?f2 Z N">
-            <draw:equation draw:name="f0" draw:formula="logwidth/2"/>
-            <draw:equation draw:name="f1" draw:formula="logheight/2"/>
-            <draw:equation draw:name="f2" draw:formula="logheight"/>
-            <draw:equation draw:name="f3" draw:formula="logwidth"/>
-          </draw:enhanced-geometry>
-        </draw:custom-shape>
-        <draw:custom-shape draw:name="Shape 5" draw:style-name="gr16" draw:text-style-name="P16" draw:layer="layout" svg:width="2.283cm" svg:height="0.505cm" svg:x="14.224cm" svg:y="13.411cm">
-          <text:p/>
-          <draw:enhanced-geometry draw:mirror-horizontal="false" draw:mirror-vertical="false" draw:glue-points="?f8 0 0 ?f9 ?f8 ?f10 ?f11 ?f9" draw:text-areas="?f5 ?f5 ?f6 ?f7" svg:viewBox="0 0 0 0" draw:type="ooxml-roundRect" draw:modifiers="50000" draw:enhanced-path="M 0 ?f2 L ?f3 0 L ?f11 ?f4 L ?f2 ?f10 Z N" drawooo:enhanced-path="M 0 ?f2 G ?f2 ?f2 ?f12 ?f13 L ?f3 0 G ?f2 ?f2 ?f14 ?f15 L ?f11 ?f4 G ?f2 ?f2 ?f16 ?f17 L ?f2 ?f10 G ?f2 ?f2 ?f18 ?f19 Z N">
+            <text:span text:style-name="T21"/>
+          </text:p>
+          <draw:enhanced-geometry draw:mirror-horizontal="false" draw:mirror-vertical="false" svg:viewBox="0 0 0 0" draw:glue-points="?f0 0 0 ?f1 ?f0 ?f2 ?f3 ?f1" draw:text-areas="0 0 ?f3 ?f2" draw:type="ooxml-rect" draw:enhanced-path="M 0 0 L ?f3 0 ?f3 ?f2 0 ?f2 Z N">
+            <draw:equation draw:name="f0" draw:formula="logwidth/2"/>
+            <draw:equation draw:name="f1" draw:formula="logheight/2"/>
+            <draw:equation draw:name="f2" draw:formula="logheight"/>
+            <draw:equation draw:name="f3" draw:formula="logwidth"/>
+          </draw:enhanced-geometry>
+        </draw:custom-shape>
+        <draw:custom-shape draw:name="Shape 5" draw:style-name="gr16" draw:text-style-name="P18" draw:layer="layout" svg:width="2.283cm" svg:height="0.505cm" svg:x="14.224cm" svg:y="13.411cm">
+          <text:p/>
+          <draw:enhanced-geometry draw:mirror-horizontal="false" draw:mirror-vertical="false" svg:viewBox="0 0 0 0" draw:glue-points="?f8 0 0 ?f9 ?f8 ?f10 ?f11 ?f9" draw:text-areas="?f5 ?f5 ?f6 ?f7" draw:type="ooxml-roundRect" draw:modifiers="50000" draw:enhanced-path="M 0 ?f2 L ?f3 0 L ?f11 ?f4 L ?f2 ?f10 Z N" drawooo:enhanced-path="M 0 ?f2 G ?f2 ?f2 ?f12 ?f13 L ?f3 0 G ?f2 ?f2 ?f14 ?f15 L ?f11 ?f4 G ?f2 ?f2 ?f16 ?f17 L ?f2 ?f10 G ?f2 ?f2 ?f18 ?f19 Z N">
             <draw:equation draw:name="f0" draw:formula="if(0-$0 ,0,if(50000-$0 ,$0 ,50000))"/>
             <draw:equation draw:name="f1" draw:formula="min(logwidth,logheight)"/>
             <draw:equation draw:name="f2" draw:formula="?f1 *?f0 /100000"/>
@@ -7843,23 +7783,23 @@
             <draw:equation draw:name="f17" draw:formula="(5400000)/60000.0"/>
             <draw:equation draw:name="f18" draw:formula="(5400000)/60000.0"/>
             <draw:equation draw:name="f19" draw:formula="(5400000)/60000.0"/>
-            <draw:handle draw:handle-position="?f2 0" draw:handle-position-x="?f2" draw:handle-position-y="0" draw:handle-range-x-maximum="50000" draw:handle-range-x-minimum="0"/>
-          </draw:enhanced-geometry>
-        </draw:custom-shape>
-        <draw:custom-shape draw:name="Text 6" draw:style-name="gr122" draw:text-style-name="P14" draw:layer="layout" svg:width="2.283cm" svg:height="0.505cm" svg:x="14.224cm" svg:y="13.411cm">
-          <text:p text:style-name="P13">
+            <draw:handle draw:handle-range-x-maximum="50000" draw:handle-range-x-minimum="0" draw:handle-position="?f2 0" draw:handle-position-x="?f2" draw:handle-position-y="0"/>
+          </draw:enhanced-geometry>
+        </draw:custom-shape>
+        <draw:custom-shape draw:name="Text 6" draw:style-name="gr122" draw:text-style-name="P16" draw:layer="layout" svg:width="2.283cm" svg:height="0.505cm" svg:x="14.224cm" svg:y="13.411cm">
+          <text:p text:style-name="P15">
             <text:span text:style-name="T11">KPIs</text:span>
           </text:p>
-          <draw:enhanced-geometry draw:mirror-horizontal="false" draw:mirror-vertical="false" draw:glue-points="?f0 0 0 ?f1 ?f0 ?f2 ?f3 ?f1" draw:text-areas="0 0 ?f3 ?f2" svg:viewBox="0 0 0 0" draw:type="ooxml-rect" draw:enhanced-path="M 0 0 L ?f3 0 ?f3 ?f2 0 ?f2 Z N">
-            <draw:equation draw:name="f0" draw:formula="logwidth/2"/>
-            <draw:equation draw:name="f1" draw:formula="logheight/2"/>
-            <draw:equation draw:name="f2" draw:formula="logheight"/>
-            <draw:equation draw:name="f3" draw:formula="logwidth"/>
-          </draw:enhanced-geometry>
-        </draw:custom-shape>
-        <draw:custom-shape draw:name="Shape 7" draw:style-name="gr16" draw:text-style-name="P16" draw:layer="layout" svg:width="2.283cm" svg:height="0.505cm" svg:x="16.739cm" svg:y="13.411cm">
-          <text:p/>
-          <draw:enhanced-geometry draw:mirror-horizontal="false" draw:mirror-vertical="false" draw:glue-points="?f8 0 0 ?f9 ?f8 ?f10 ?f11 ?f9" draw:text-areas="?f5 ?f5 ?f6 ?f7" svg:viewBox="0 0 0 0" draw:type="ooxml-roundRect" draw:modifiers="50000" draw:enhanced-path="M 0 ?f2 L ?f3 0 L ?f11 ?f4 L ?f2 ?f10 Z N" drawooo:enhanced-path="M 0 ?f2 G ?f2 ?f2 ?f12 ?f13 L ?f3 0 G ?f2 ?f2 ?f14 ?f15 L ?f11 ?f4 G ?f2 ?f2 ?f16 ?f17 L ?f2 ?f10 G ?f2 ?f2 ?f18 ?f19 Z N">
+          <draw:enhanced-geometry draw:mirror-horizontal="false" draw:mirror-vertical="false" svg:viewBox="0 0 0 0" draw:glue-points="?f0 0 0 ?f1 ?f0 ?f2 ?f3 ?f1" draw:text-areas="0 0 ?f3 ?f2" draw:type="ooxml-rect" draw:enhanced-path="M 0 0 L ?f3 0 ?f3 ?f2 0 ?f2 Z N">
+            <draw:equation draw:name="f0" draw:formula="logwidth/2"/>
+            <draw:equation draw:name="f1" draw:formula="logheight/2"/>
+            <draw:equation draw:name="f2" draw:formula="logheight"/>
+            <draw:equation draw:name="f3" draw:formula="logwidth"/>
+          </draw:enhanced-geometry>
+        </draw:custom-shape>
+        <draw:custom-shape draw:name="Shape 7" draw:style-name="gr16" draw:text-style-name="P18" draw:layer="layout" svg:width="2.283cm" svg:height="0.505cm" svg:x="16.739cm" svg:y="13.411cm">
+          <text:p/>
+          <draw:enhanced-geometry draw:mirror-horizontal="false" draw:mirror-vertical="false" svg:viewBox="0 0 0 0" draw:glue-points="?f8 0 0 ?f9 ?f8 ?f10 ?f11 ?f9" draw:text-areas="?f5 ?f5 ?f6 ?f7" draw:type="ooxml-roundRect" draw:modifiers="50000" draw:enhanced-path="M 0 ?f2 L ?f3 0 L ?f11 ?f4 L ?f2 ?f10 Z N" drawooo:enhanced-path="M 0 ?f2 G ?f2 ?f2 ?f12 ?f13 L ?f3 0 G ?f2 ?f2 ?f14 ?f15 L ?f11 ?f4 G ?f2 ?f2 ?f16 ?f17 L ?f2 ?f10 G ?f2 ?f2 ?f18 ?f19 Z N">
             <draw:equation draw:name="f0" draw:formula="if(0-$0 ,0,if(50000-$0 ,$0 ,50000))"/>
             <draw:equation draw:name="f1" draw:formula="min(logwidth,logheight)"/>
             <draw:equation draw:name="f2" draw:formula="?f1 *?f0 /100000"/>
@@ -7880,23 +7820,23 @@
             <draw:equation draw:name="f17" draw:formula="(5400000)/60000.0"/>
             <draw:equation draw:name="f18" draw:formula="(5400000)/60000.0"/>
             <draw:equation draw:name="f19" draw:formula="(5400000)/60000.0"/>
-            <draw:handle draw:handle-position="?f2 0" draw:handle-position-x="?f2" draw:handle-position-y="0" draw:handle-range-x-maximum="50000" draw:handle-range-x-minimum="0"/>
-          </draw:enhanced-geometry>
-        </draw:custom-shape>
-        <draw:custom-shape draw:name="Text 8" draw:style-name="gr123" draw:text-style-name="P14" draw:layer="layout" svg:width="2.283cm" svg:height="0.505cm" svg:x="16.739cm" svg:y="13.411cm">
-          <text:p text:style-name="P13">
+            <draw:handle draw:handle-range-x-maximum="50000" draw:handle-range-x-minimum="0" draw:handle-position="?f2 0" draw:handle-position-x="?f2" draw:handle-position-y="0"/>
+          </draw:enhanced-geometry>
+        </draw:custom-shape>
+        <draw:custom-shape draw:name="Text 8" draw:style-name="gr123" draw:text-style-name="P16" draw:layer="layout" svg:width="2.283cm" svg:height="0.505cm" svg:x="16.739cm" svg:y="13.411cm">
+          <text:p text:style-name="P15">
             <text:span text:style-name="T11">Descriptive</text:span>
           </text:p>
-          <draw:enhanced-geometry draw:mirror-horizontal="false" draw:mirror-vertical="false" draw:glue-points="?f0 0 0 ?f1 ?f0 ?f2 ?f3 ?f1" draw:text-areas="0 0 ?f3 ?f2" svg:viewBox="0 0 0 0" draw:type="ooxml-rect" draw:enhanced-path="M 0 0 L ?f3 0 ?f3 ?f2 0 ?f2 Z N">
-            <draw:equation draw:name="f0" draw:formula="logwidth/2"/>
-            <draw:equation draw:name="f1" draw:formula="logheight/2"/>
-            <draw:equation draw:name="f2" draw:formula="logheight"/>
-            <draw:equation draw:name="f3" draw:formula="logwidth"/>
-          </draw:enhanced-geometry>
-        </draw:custom-shape>
-        <draw:custom-shape draw:name="Shape 9" draw:style-name="gr90" draw:text-style-name="P31" draw:layer="layout" svg:width="2.283cm" svg:height="0.505cm" svg:x="19.253cm" svg:y="13.411cm">
-          <text:p/>
-          <draw:enhanced-geometry draw:mirror-horizontal="false" draw:mirror-vertical="false" draw:glue-points="?f8 0 0 ?f9 ?f8 ?f10 ?f11 ?f9" draw:text-areas="?f5 ?f5 ?f6 ?f7" svg:viewBox="0 0 0 0" draw:type="ooxml-roundRect" draw:modifiers="50000" draw:enhanced-path="M 0 ?f2 L ?f3 0 L ?f11 ?f4 L ?f2 ?f10 Z N" drawooo:enhanced-path="M 0 ?f2 G ?f2 ?f2 ?f12 ?f13 L ?f3 0 G ?f2 ?f2 ?f14 ?f15 L ?f11 ?f4 G ?f2 ?f2 ?f16 ?f17 L ?f2 ?f10 G ?f2 ?f2 ?f18 ?f19 Z N">
+          <draw:enhanced-geometry draw:mirror-horizontal="false" draw:mirror-vertical="false" svg:viewBox="0 0 0 0" draw:glue-points="?f0 0 0 ?f1 ?f0 ?f2 ?f3 ?f1" draw:text-areas="0 0 ?f3 ?f2" draw:type="ooxml-rect" draw:enhanced-path="M 0 0 L ?f3 0 ?f3 ?f2 0 ?f2 Z N">
+            <draw:equation draw:name="f0" draw:formula="logwidth/2"/>
+            <draw:equation draw:name="f1" draw:formula="logheight/2"/>
+            <draw:equation draw:name="f2" draw:formula="logheight"/>
+            <draw:equation draw:name="f3" draw:formula="logwidth"/>
+          </draw:enhanced-geometry>
+        </draw:custom-shape>
+        <draw:custom-shape draw:name="Shape 9" draw:style-name="gr90" draw:text-style-name="P33" draw:layer="layout" svg:width="2.283cm" svg:height="0.505cm" svg:x="19.253cm" svg:y="13.411cm">
+          <text:p/>
+          <draw:enhanced-geometry draw:mirror-horizontal="false" draw:mirror-vertical="false" svg:viewBox="0 0 0 0" draw:glue-points="?f8 0 0 ?f9 ?f8 ?f10 ?f11 ?f9" draw:text-areas="?f5 ?f5 ?f6 ?f7" draw:type="ooxml-roundRect" draw:modifiers="50000" draw:enhanced-path="M 0 ?f2 L ?f3 0 L ?f11 ?f4 L ?f2 ?f10 Z N" drawooo:enhanced-path="M 0 ?f2 G ?f2 ?f2 ?f12 ?f13 L ?f3 0 G ?f2 ?f2 ?f14 ?f15 L ?f11 ?f4 G ?f2 ?f2 ?f16 ?f17 L ?f2 ?f10 G ?f2 ?f2 ?f18 ?f19 Z N">
             <draw:equation draw:name="f0" draw:formula="if(0-$0 ,0,if(50000-$0 ,$0 ,50000))"/>
             <draw:equation draw:name="f1" draw:formula="min(logwidth,logheight)"/>
             <draw:equation draw:name="f2" draw:formula="?f1 *?f0 /100000"/>
@@ -7917,23 +7857,23 @@
             <draw:equation draw:name="f17" draw:formula="(5400000)/60000.0"/>
             <draw:equation draw:name="f18" draw:formula="(5400000)/60000.0"/>
             <draw:equation draw:name="f19" draw:formula="(5400000)/60000.0"/>
-            <draw:handle draw:handle-position="?f2 0" draw:handle-position-x="?f2" draw:handle-position-y="0" draw:handle-range-x-maximum="50000" draw:handle-range-x-minimum="0"/>
-          </draw:enhanced-geometry>
-        </draw:custom-shape>
-        <draw:custom-shape draw:name="Text 10" draw:style-name="gr124" draw:text-style-name="P14" draw:layer="layout" svg:width="2.283cm" svg:height="0.505cm" svg:x="19.253cm" svg:y="13.411cm">
-          <text:p text:style-name="P13">
+            <draw:handle draw:handle-range-x-maximum="50000" draw:handle-range-x-minimum="0" draw:handle-position="?f2 0" draw:handle-position-x="?f2" draw:handle-position-y="0"/>
+          </draw:enhanced-geometry>
+        </draw:custom-shape>
+        <draw:custom-shape draw:name="Text 10" draw:style-name="gr124" draw:text-style-name="P16" draw:layer="layout" svg:width="2.283cm" svg:height="0.505cm" svg:x="19.253cm" svg:y="13.411cm">
+          <text:p text:style-name="P15">
             <text:span text:style-name="T10">Prescriptive</text:span>
           </text:p>
-          <draw:enhanced-geometry draw:mirror-horizontal="false" draw:mirror-vertical="false" draw:glue-points="?f0 0 0 ?f1 ?f0 ?f2 ?f3 ?f1" draw:text-areas="0 0 ?f3 ?f2" svg:viewBox="0 0 0 0" draw:type="ooxml-rect" draw:enhanced-path="M 0 0 L ?f3 0 ?f3 ?f2 0 ?f2 Z N">
-            <draw:equation draw:name="f0" draw:formula="logwidth/2"/>
-            <draw:equation draw:name="f1" draw:formula="logheight/2"/>
-            <draw:equation draw:name="f2" draw:formula="logheight"/>
-            <draw:equation draw:name="f3" draw:formula="logwidth"/>
-          </draw:enhanced-geometry>
-        </draw:custom-shape>
-        <draw:custom-shape draw:name="Shape 11" draw:style-name="gr16" draw:text-style-name="P16" draw:layer="layout" svg:width="2.283cm" svg:height="0.505cm" svg:x="21.768cm" svg:y="13.411cm">
-          <text:p/>
-          <draw:enhanced-geometry draw:mirror-horizontal="false" draw:mirror-vertical="false" draw:glue-points="?f8 0 0 ?f9 ?f8 ?f10 ?f11 ?f9" draw:text-areas="?f5 ?f5 ?f6 ?f7" svg:viewBox="0 0 0 0" draw:type="ooxml-roundRect" draw:modifiers="50000" draw:enhanced-path="M 0 ?f2 L ?f3 0 L ?f11 ?f4 L ?f2 ?f10 Z N" drawooo:enhanced-path="M 0 ?f2 G ?f2 ?f2 ?f12 ?f13 L ?f3 0 G ?f2 ?f2 ?f14 ?f15 L ?f11 ?f4 G ?f2 ?f2 ?f16 ?f17 L ?f2 ?f10 G ?f2 ?f2 ?f18 ?f19 Z N">
+          <draw:enhanced-geometry draw:mirror-horizontal="false" draw:mirror-vertical="false" svg:viewBox="0 0 0 0" draw:glue-points="?f0 0 0 ?f1 ?f0 ?f2 ?f3 ?f1" draw:text-areas="0 0 ?f3 ?f2" draw:type="ooxml-rect" draw:enhanced-path="M 0 0 L ?f3 0 ?f3 ?f2 0 ?f2 Z N">
+            <draw:equation draw:name="f0" draw:formula="logwidth/2"/>
+            <draw:equation draw:name="f1" draw:formula="logheight/2"/>
+            <draw:equation draw:name="f2" draw:formula="logheight"/>
+            <draw:equation draw:name="f3" draw:formula="logwidth"/>
+          </draw:enhanced-geometry>
+        </draw:custom-shape>
+        <draw:custom-shape draw:name="Shape 11" draw:style-name="gr16" draw:text-style-name="P18" draw:layer="layout" svg:width="2.283cm" svg:height="0.505cm" svg:x="21.768cm" svg:y="13.411cm">
+          <text:p/>
+          <draw:enhanced-geometry draw:mirror-horizontal="false" draw:mirror-vertical="false" svg:viewBox="0 0 0 0" draw:glue-points="?f8 0 0 ?f9 ?f8 ?f10 ?f11 ?f9" draw:text-areas="?f5 ?f5 ?f6 ?f7" draw:type="ooxml-roundRect" draw:modifiers="50000" draw:enhanced-path="M 0 ?f2 L ?f3 0 L ?f11 ?f4 L ?f2 ?f10 Z N" drawooo:enhanced-path="M 0 ?f2 G ?f2 ?f2 ?f12 ?f13 L ?f3 0 G ?f2 ?f2 ?f14 ?f15 L ?f11 ?f4 G ?f2 ?f2 ?f16 ?f17 L ?f2 ?f10 G ?f2 ?f2 ?f18 ?f19 Z N">
             <draw:equation draw:name="f0" draw:formula="if(0-$0 ,0,if(50000-$0 ,$0 ,50000))"/>
             <draw:equation draw:name="f1" draw:formula="min(logwidth,logheight)"/>
             <draw:equation draw:name="f2" draw:formula="?f1 *?f0 /100000"/>
@@ -7954,35 +7894,35 @@
             <draw:equation draw:name="f17" draw:formula="(5400000)/60000.0"/>
             <draw:equation draw:name="f18" draw:formula="(5400000)/60000.0"/>
             <draw:equation draw:name="f19" draw:formula="(5400000)/60000.0"/>
-            <draw:handle draw:handle-position="?f2 0" draw:handle-position-x="?f2" draw:handle-position-y="0" draw:handle-range-x-maximum="50000" draw:handle-range-x-minimum="0"/>
-          </draw:enhanced-geometry>
-        </draw:custom-shape>
-        <draw:custom-shape draw:name="Text 12" draw:style-name="gr125" draw:text-style-name="P14" draw:layer="layout" svg:width="2.283cm" svg:height="0.505cm" svg:x="21.768cm" svg:y="13.411cm">
-          <text:p text:style-name="P13">
+            <draw:handle draw:handle-range-x-maximum="50000" draw:handle-range-x-minimum="0" draw:handle-position="?f2 0" draw:handle-position-x="?f2" draw:handle-position-y="0"/>
+          </draw:enhanced-geometry>
+        </draw:custom-shape>
+        <draw:custom-shape draw:name="Text 12" draw:style-name="gr125" draw:text-style-name="P16" draw:layer="layout" svg:width="2.283cm" svg:height="0.505cm" svg:x="21.768cm" svg:y="13.411cm">
+          <text:p text:style-name="P15">
             <text:span text:style-name="T11">Predictive</text:span>
           </text:p>
-          <draw:enhanced-geometry draw:mirror-horizontal="false" draw:mirror-vertical="false" draw:glue-points="?f0 0 0 ?f1 ?f0 ?f2 ?f3 ?f1" draw:text-areas="0 0 ?f3 ?f2" svg:viewBox="0 0 0 0" draw:type="ooxml-rect" draw:enhanced-path="M 0 0 L ?f3 0 ?f3 ?f2 0 ?f2 Z N">
-            <draw:equation draw:name="f0" draw:formula="logwidth/2"/>
-            <draw:equation draw:name="f1" draw:formula="logheight/2"/>
-            <draw:equation draw:name="f2" draw:formula="logheight"/>
-            <draw:equation draw:name="f3" draw:formula="logwidth"/>
-          </draw:enhanced-geometry>
-        </draw:custom-shape>
-        <draw:frame draw:name="Chart 0" draw:style-name="gr69" draw:text-style-name="P6" draw:layer="layout" svg:width="11.681cm" svg:height="6.474cm" svg:x="1.016cm" svg:y="3.505cm">
+          <draw:enhanced-geometry draw:mirror-horizontal="false" draw:mirror-vertical="false" svg:viewBox="0 0 0 0" draw:glue-points="?f0 0 0 ?f1 ?f0 ?f2 ?f3 ?f1" draw:text-areas="0 0 ?f3 ?f2" draw:type="ooxml-rect" draw:enhanced-path="M 0 0 L ?f3 0 ?f3 ?f2 0 ?f2 Z N">
+            <draw:equation draw:name="f0" draw:formula="logwidth/2"/>
+            <draw:equation draw:name="f1" draw:formula="logheight/2"/>
+            <draw:equation draw:name="f2" draw:formula="logheight"/>
+            <draw:equation draw:name="f3" draw:formula="logwidth"/>
+          </draw:enhanced-geometry>
+        </draw:custom-shape>
+        <draw:frame draw:name="Chart 0" draw:style-name="gr69" draw:text-style-name="P8" draw:layer="layout" svg:width="11.681cm" svg:height="6.474cm" svg:x="1.016cm" svg:y="3.505cm">
           <draw:object xlink:href="./Object 7" xlink:type="simple" xlink:show="embed" xlink:actuate="onLoad">
             <loext:p/>
           </draw:object>
           <draw:image xlink:href="./ObjectReplacements/Object 7" xlink:type="simple" xlink:show="embed" xlink:actuate="onLoad"/>
         </draw:frame>
-        <draw:frame draw:name="Chart 1" draw:style-name="gr69" draw:text-style-name="P6" draw:layer="layout" svg:width="11.427cm" svg:height="6.474cm" svg:x="12.954cm" svg:y="3.505cm">
+        <draw:frame draw:name="Chart 1" draw:style-name="gr69" draw:text-style-name="P8" draw:layer="layout" svg:width="11.427cm" svg:height="6.474cm" svg:x="12.954cm" svg:y="3.505cm">
           <draw:object xlink:href="./Object 8" xlink:type="simple" xlink:show="embed" xlink:actuate="onLoad">
             <loext:p/>
           </draw:object>
           <draw:image xlink:href="./ObjectReplacements/Object 8" xlink:type="simple" xlink:show="embed" xlink:actuate="onLoad"/>
         </draw:frame>
-        <draw:custom-shape draw:name="Shape 13" draw:style-name="gr20" draw:text-style-name="P16" draw:layer="layout" svg:width="11.173cm" svg:height="2.842cm" svg:x="1.27cm" svg:y="10.211cm">
-          <text:p/>
-          <draw:enhanced-geometry draw:mirror-horizontal="false" draw:mirror-vertical="false" draw:glue-points="?f8 0 0 ?f9 ?f8 ?f10 ?f11 ?f9" draw:text-areas="?f5 ?f5 ?f6 ?f7" svg:viewBox="0 0 0 0" draw:type="ooxml-roundRect" draw:modifiers="7143" draw:enhanced-path="M 0 ?f2 L ?f3 0 L ?f11 ?f4 L ?f2 ?f10 Z N" drawooo:enhanced-path="M 0 ?f2 G ?f2 ?f2 ?f12 ?f13 L ?f3 0 G ?f2 ?f2 ?f14 ?f15 L ?f11 ?f4 G ?f2 ?f2 ?f16 ?f17 L ?f2 ?f10 G ?f2 ?f2 ?f18 ?f19 Z N">
+        <draw:custom-shape draw:name="Shape 13" draw:style-name="gr20" draw:text-style-name="P18" draw:layer="layout" svg:width="11.173cm" svg:height="2.842cm" svg:x="1.27cm" svg:y="10.211cm">
+          <text:p/>
+          <draw:enhanced-geometry draw:mirror-horizontal="false" draw:mirror-vertical="false" svg:viewBox="0 0 0 0" draw:glue-points="?f8 0 0 ?f9 ?f8 ?f10 ?f11 ?f9" draw:text-areas="?f5 ?f5 ?f6 ?f7" draw:type="ooxml-roundRect" draw:modifiers="7143" draw:enhanced-path="M 0 ?f2 L ?f3 0 L ?f11 ?f4 L ?f2 ?f10 Z N" drawooo:enhanced-path="M 0 ?f2 G ?f2 ?f2 ?f12 ?f13 L ?f3 0 G ?f2 ?f2 ?f14 ?f15 L ?f11 ?f4 G ?f2 ?f2 ?f16 ?f17 L ?f2 ?f10 G ?f2 ?f2 ?f18 ?f19 Z N">
             <draw:equation draw:name="f0" draw:formula="if(0-$0 ,0,if(50000-$0 ,$0 ,50000))"/>
             <draw:equation draw:name="f1" draw:formula="min(logwidth,logheight)"/>
             <draw:equation draw:name="f2" draw:formula="?f1 *?f0 /100000"/>
@@ -8003,34 +7943,34 @@
             <draw:equation draw:name="f17" draw:formula="(5400000)/60000.0"/>
             <draw:equation draw:name="f18" draw:formula="(5400000)/60000.0"/>
             <draw:equation draw:name="f19" draw:formula="(5400000)/60000.0"/>
-            <draw:handle draw:handle-position="?f2 0" draw:handle-position-x="?f2" draw:handle-position-y="0" draw:handle-range-x-maximum="50000" draw:handle-range-x-minimum="0"/>
-          </draw:enhanced-geometry>
-        </draw:custom-shape>
-        <draw:custom-shape draw:name="Text 14" draw:style-name="gr126" draw:text-style-name="P29" draw:layer="layout" svg:width="10.411cm" svg:height="2.435cm" svg:x="1.651cm" svg:y="10.414cm">
-          <text:p text:style-name="P28">
+            <draw:handle draw:handle-range-x-maximum="50000" draw:handle-range-x-minimum="0" draw:handle-position="?f2 0" draw:handle-position-x="?f2" draw:handle-position-y="0"/>
+          </draw:enhanced-geometry>
+        </draw:custom-shape>
+        <draw:custom-shape draw:name="Text 14" draw:style-name="gr126" draw:text-style-name="P31" draw:layer="layout" svg:width="10.411cm" svg:height="2.435cm" svg:x="1.651cm" svg:y="10.414cm">
+          <text:p text:style-name="P30">
             <text:span text:style-name="T25">
               FINDING 
               <text:s/>
             </text:span>
             <text:span text:style-name="T23">In biventricular HF, severe HF plus abnormal kidneys gives 14.2% mortality — 10× the 1.4% of patients with neither.</text:span>
           </text:p>
-          <text:p text:style-name="P28">
+          <text:p text:style-name="P30">
             <text:span text:style-name="T25">
               ACTION 
               <text:s/>
             </text:span>
             <text:span text:style-name="T23">Make this combination an automatic trigger for a nephrology consult.</text:span>
           </text:p>
-          <draw:enhanced-geometry draw:mirror-horizontal="false" draw:mirror-vertical="false" draw:glue-points="?f0 0 0 ?f1 ?f0 ?f2 ?f3 ?f1" draw:text-areas="0 0 ?f3 ?f2" svg:viewBox="0 0 0 0" draw:type="ooxml-rect" draw:enhanced-path="M 0 0 L ?f3 0 ?f3 ?f2 0 ?f2 Z N">
-            <draw:equation draw:name="f0" draw:formula="logwidth/2"/>
-            <draw:equation draw:name="f1" draw:formula="logheight/2"/>
-            <draw:equation draw:name="f2" draw:formula="logheight"/>
-            <draw:equation draw:name="f3" draw:formula="logwidth"/>
-          </draw:enhanced-geometry>
-        </draw:custom-shape>
-        <draw:custom-shape draw:name="Shape 15" draw:style-name="gr20" draw:text-style-name="P16" draw:layer="layout" svg:width="11.173cm" svg:height="2.842cm" svg:x="12.954cm" svg:y="10.211cm">
-          <text:p/>
-          <draw:enhanced-geometry draw:mirror-horizontal="false" draw:mirror-vertical="false" draw:glue-points="?f8 0 0 ?f9 ?f8 ?f10 ?f11 ?f9" draw:text-areas="?f5 ?f5 ?f6 ?f7" svg:viewBox="0 0 0 0" draw:type="ooxml-roundRect" draw:modifiers="7143" draw:enhanced-path="M 0 ?f2 L ?f3 0 L ?f11 ?f4 L ?f2 ?f10 Z N" drawooo:enhanced-path="M 0 ?f2 G ?f2 ?f2 ?f12 ?f13 L ?f3 0 G ?f2 ?f2 ?f14 ?f15 L ?f11 ?f4 G ?f2 ?f2 ?f16 ?f17 L ?f2 ?f10 G ?f2 ?f2 ?f18 ?f19 Z N">
+          <draw:enhanced-geometry draw:mirror-horizontal="false" draw:mirror-vertical="false" svg:viewBox="0 0 0 0" draw:glue-points="?f0 0 0 ?f1 ?f0 ?f2 ?f3 ?f1" draw:text-areas="0 0 ?f3 ?f2" draw:type="ooxml-rect" draw:enhanced-path="M 0 0 L ?f3 0 ?f3 ?f2 0 ?f2 Z N">
+            <draw:equation draw:name="f0" draw:formula="logwidth/2"/>
+            <draw:equation draw:name="f1" draw:formula="logheight/2"/>
+            <draw:equation draw:name="f2" draw:formula="logheight"/>
+            <draw:equation draw:name="f3" draw:formula="logwidth"/>
+          </draw:enhanced-geometry>
+        </draw:custom-shape>
+        <draw:custom-shape draw:name="Shape 15" draw:style-name="gr20" draw:text-style-name="P18" draw:layer="layout" svg:width="11.173cm" svg:height="2.842cm" svg:x="12.954cm" svg:y="10.211cm">
+          <text:p/>
+          <draw:enhanced-geometry draw:mirror-horizontal="false" draw:mirror-vertical="false" svg:viewBox="0 0 0 0" draw:glue-points="?f8 0 0 ?f9 ?f8 ?f10 ?f11 ?f9" draw:text-areas="?f5 ?f5 ?f6 ?f7" draw:type="ooxml-roundRect" draw:modifiers="7143" draw:enhanced-path="M 0 ?f2 L ?f3 0 L ?f11 ?f4 L ?f2 ?f10 Z N" drawooo:enhanced-path="M 0 ?f2 G ?f2 ?f2 ?f12 ?f13 L ?f3 0 G ?f2 ?f2 ?f14 ?f15 L ?f11 ?f4 G ?f2 ?f2 ?f16 ?f17 L ?f2 ?f10 G ?f2 ?f2 ?f18 ?f19 Z N">
             <draw:equation draw:name="f0" draw:formula="if(0-$0 ,0,if(50000-$0 ,$0 ,50000))"/>
             <draw:equation draw:name="f1" draw:formula="min(logwidth,logheight)"/>
             <draw:equation draw:name="f2" draw:formula="?f1 *?f0 /100000"/>
@@ -8051,34 +7991,34 @@
             <draw:equation draw:name="f17" draw:formula="(5400000)/60000.0"/>
             <draw:equation draw:name="f18" draw:formula="(5400000)/60000.0"/>
             <draw:equation draw:name="f19" draw:formula="(5400000)/60000.0"/>
-            <draw:handle draw:handle-position="?f2 0" draw:handle-position-x="?f2" draw:handle-position-y="0" draw:handle-range-x-maximum="50000" draw:handle-range-x-minimum="0"/>
-          </draw:enhanced-geometry>
-        </draw:custom-shape>
-        <draw:custom-shape draw:name="Text 16" draw:style-name="gr127" draw:text-style-name="P29" draw:layer="layout" svg:width="10.411cm" svg:height="2.435cm" svg:x="13.335cm" svg:y="10.414cm">
-          <text:p text:style-name="P28">
+            <draw:handle draw:handle-range-x-maximum="50000" draw:handle-range-x-minimum="0" draw:handle-position="?f2 0" draw:handle-position-x="?f2" draw:handle-position-y="0"/>
+          </draw:enhanced-geometry>
+        </draw:custom-shape>
+        <draw:custom-shape draw:name="Text 16" draw:style-name="gr127" draw:text-style-name="P31" draw:layer="layout" svg:width="10.411cm" svg:height="2.435cm" svg:x="13.335cm" svg:y="10.414cm">
+          <text:p text:style-name="P30">
             <text:span text:style-name="T25">
               FINDING 
               <text:s/>
             </text:span>
             <text:span text:style-name="T23">Risk climbs steadily above 5.0 mmol/L (2.3% → 14.8%), yet 78% of the &gt;6.0 group still get spironolactone.</text:span>
           </text:p>
-          <text:p text:style-name="P28">
+          <text:p text:style-name="P30">
             <text:span text:style-name="T25">
               ACTION 
               <text:s/>
             </text:span>
             <text:span text:style-name="T23">K⁺ &gt; 5.0: recheck in 48–72 h; ≥ 5.5: treat and reduce or hold spironolactone.</text:span>
           </text:p>
-          <draw:enhanced-geometry draw:mirror-horizontal="false" draw:mirror-vertical="false" draw:glue-points="?f0 0 0 ?f1 ?f0 ?f2 ?f3 ?f1" draw:text-areas="0 0 ?f3 ?f2" svg:viewBox="0 0 0 0" draw:type="ooxml-rect" draw:enhanced-path="M 0 0 L ?f3 0 ?f3 ?f2 0 ?f2 Z N">
-            <draw:equation draw:name="f0" draw:formula="logwidth/2"/>
-            <draw:equation draw:name="f1" draw:formula="logheight/2"/>
-            <draw:equation draw:name="f2" draw:formula="logheight"/>
-            <draw:equation draw:name="f3" draw:formula="logwidth"/>
-          </draw:enhanced-geometry>
-        </draw:custom-shape>
-        <draw:custom-shape draw:name="Freeform 6" draw:style-name="gr128" draw:text-style-name="P34" draw:layer="layout" svg:width="1.347cm" svg:height="2.221cm" svg:x="23.971cm" svg:y="0.085cm">
-          <text:p/>
-          <draw:enhanced-geometry draw:mirror-horizontal="false" draw:mirror-vertical="false" drawooo:sub-view-size="647700 1066800" draw:text-areas="?f0 ?f2 ?f1 ?f3" svg:viewBox="0 0 0 0" draw:type="ooxml-non-primitive" draw:enhanced-path="M 0 0 L 647700 0 647700 1066800 0 1066800 0 0 Z N">
+          <draw:enhanced-geometry draw:mirror-horizontal="false" draw:mirror-vertical="false" svg:viewBox="0 0 0 0" draw:glue-points="?f0 0 0 ?f1 ?f0 ?f2 ?f3 ?f1" draw:text-areas="0 0 ?f3 ?f2" draw:type="ooxml-rect" draw:enhanced-path="M 0 0 L ?f3 0 ?f3 ?f2 0 ?f2 Z N">
+            <draw:equation draw:name="f0" draw:formula="logwidth/2"/>
+            <draw:equation draw:name="f1" draw:formula="logheight/2"/>
+            <draw:equation draw:name="f2" draw:formula="logheight"/>
+            <draw:equation draw:name="f3" draw:formula="logwidth"/>
+          </draw:enhanced-geometry>
+        </draw:custom-shape>
+        <draw:custom-shape draw:name="Freeform 6" draw:style-name="gr128" draw:text-style-name="P37" draw:layer="layout" svg:width="1.347cm" svg:height="2.221cm" svg:x="23.971cm" svg:y="0.085cm">
+          <text:p/>
+          <draw:enhanced-geometry draw:mirror-horizontal="false" draw:mirror-vertical="false" svg:viewBox="0 0 0 0" drawooo:sub-view-size="647700 1066800" draw:text-areas="?f0 ?f2 ?f1 ?f3" draw:type="ooxml-non-primitive" draw:enhanced-path="M 0 0 L 647700 0 647700 1066800 0 1066800 0 0 Z N">
             <draw:equation draw:name="f0" draw:formula="0*logwidth/485280"/>
             <draw:equation draw:name="f1" draw:formula="485640*logwidth/485280"/>
             <draw:equation draw:name="f2" draw:formula="0*logheight/799920"/>
@@ -8087,16 +8027,16 @@
         </draw:custom-shape>
         <presentation:notes draw:style-name="dp2">
           <draw:page-thumbnail draw:name="PlaceHolder 1" draw:style-name="gr10" draw:layer="layout" svg:width="15.237cm" svg:height="8.57cm" svg:x="1.905cm" svg:y="3.175cm" draw:page-number="7" presentation:class="page"/>
-          <draw:frame draw:name="PlaceHolder 2" presentation:style-name="pr1" draw:text-style-name="P9" draw:layer="layout" svg:width="15.237cm" svg:height="9.998cm" svg:x="1.905cm" svg:y="12.224cm" presentation:class="notes" presentation:user-transformed="true">
+          <draw:frame draw:name="PlaceHolder 2" presentation:style-name="pr1" draw:text-style-name="P11" draw:layer="layout" svg:width="15.237cm" svg:height="9.998cm" svg:x="1.905cm" svg:y="12.224cm" presentation:class="notes" presentation:user-transformed="true">
             <draw:text-box>
-              <text:p text:style-name="P8">
+              <text:p text:style-name="P10">
                 <text:span text:style-name="T6">Left: 6-month mortality in biventricular heart failure, split by severe heart failure (cardiac) and abnormal kidney function (renal), with patient counts. Each problem alone adds little; together they multiply risk. Right: 6-month mortality by admission potassium band. Normal potassium is about 2%; the risk climbs step by step above 5.0. Spironolactone use stays high even in the highest band, which is a medication-safety flag.</text:span>
               </text:p>
             </draw:text-box>
           </draw:frame>
-          <draw:frame draw:name="PlaceHolder 3" presentation:style-name="pr2" draw:text-style-name="P11" draw:layer="layout" svg:width="8.252cm" svg:height="1.271cm" svg:x="10.791cm" svg:y="24.126cm" presentation:class="page-number" presentation:user-transformed="true">
+          <draw:frame draw:name="PlaceHolder 3" presentation:style-name="pr2" draw:text-style-name="P13" draw:layer="layout" svg:width="8.252cm" svg:height="1.271cm" svg:x="10.791cm" svg:y="24.126cm" presentation:class="page-number" presentation:user-transformed="true">
             <draw:text-box>
-              <text:p text:style-name="P10">
+              <text:p text:style-name="P12">
                 <text:span text:style-name="T7">
                   <text:page-number>&lt;number&gt;</text:page-number>
                 </text:span>
@@ -8106,9 +8046,9 @@
         </presentation:notes>
       </draw:page>
       <draw:page draw:name="page8" draw:style-name="dp9" draw:master-page-name="DEFAULT">
-        <draw:custom-shape draw:name="Shape 0" draw:style-name="gr83" draw:text-style-name="P31" draw:layer="layout" svg:width="3.426cm" svg:height="0.683cm" svg:x="1.27cm" svg:y="0.635cm">
-          <text:p/>
-          <draw:enhanced-geometry draw:mirror-horizontal="false" draw:mirror-vertical="false" draw:glue-points="?f8 0 0 ?f9 ?f8 ?f10 ?f11 ?f9" draw:text-areas="?f5 ?f5 ?f6 ?f7" svg:viewBox="0 0 0 0" draw:type="ooxml-roundRect" draw:modifiers="48148" draw:enhanced-path="M 0 ?f2 L ?f3 0 L ?f11 ?f4 L ?f2 ?f10 Z N" drawooo:enhanced-path="M 0 ?f2 G ?f2 ?f2 ?f12 ?f13 L ?f3 0 G ?f2 ?f2 ?f14 ?f15 L ?f11 ?f4 G ?f2 ?f2 ?f16 ?f17 L ?f2 ?f10 G ?f2 ?f2 ?f18 ?f19 Z N">
+        <draw:custom-shape draw:name="Shape 0" draw:style-name="gr83" draw:text-style-name="P33" draw:layer="layout" svg:width="3.426cm" svg:height="0.683cm" svg:x="1.27cm" svg:y="0.635cm">
+          <text:p/>
+          <draw:enhanced-geometry draw:mirror-horizontal="false" draw:mirror-vertical="false" svg:viewBox="0 0 0 0" draw:glue-points="?f8 0 0 ?f9 ?f8 ?f10 ?f11 ?f9" draw:text-areas="?f5 ?f5 ?f6 ?f7" draw:type="ooxml-roundRect" draw:modifiers="48148" draw:enhanced-path="M 0 ?f2 L ?f3 0 L ?f11 ?f4 L ?f2 ?f10 Z N" drawooo:enhanced-path="M 0 ?f2 G ?f2 ?f2 ?f12 ?f13 L ?f3 0 G ?f2 ?f2 ?f14 ?f15 L ?f11 ?f4 G ?f2 ?f2 ?f16 ?f17 L ?f2 ?f10 G ?f2 ?f2 ?f18 ?f19 Z N">
             <draw:equation draw:name="f0" draw:formula="if(0-$0 ,0,if(50000-$0 ,$0 ,50000))"/>
             <draw:equation draw:name="f1" draw:formula="min(logwidth,logheight)"/>
             <draw:equation draw:name="f2" draw:formula="?f1 *?f0 /100000"/>
@@ -8129,14 +8069,14 @@
             <draw:equation draw:name="f17" draw:formula="(5400000)/60000.0"/>
             <draw:equation draw:name="f18" draw:formula="(5400000)/60000.0"/>
             <draw:equation draw:name="f19" draw:formula="(5400000)/60000.0"/>
-            <draw:handle draw:handle-position="?f2 0" draw:handle-position-x="?f2" draw:handle-position-y="0" draw:handle-range-x-maximum="50000" draw:handle-range-x-minimum="0"/>
-          </draw:enhanced-geometry>
-        </draw:custom-shape>
-        <draw:custom-shape draw:name="Text 1" draw:style-name="gr129" draw:text-style-name="P14" draw:layer="layout" svg:width="3.426cm" svg:height="0.683cm" svg:x="1.27cm" svg:y="0.635cm">
-          <text:p text:style-name="P13">
+            <draw:handle draw:handle-range-x-maximum="50000" draw:handle-range-x-minimum="0" draw:handle-position="?f2 0" draw:handle-position-x="?f2" draw:handle-position-y="0"/>
+          </draw:enhanced-geometry>
+        </draw:custom-shape>
+        <draw:custom-shape draw:name="Text 1" draw:style-name="gr129" draw:text-style-name="P16" draw:layer="layout" svg:width="3.426cm" svg:height="0.683cm" svg:x="1.27cm" svg:y="0.635cm">
+          <text:p text:style-name="P15">
             <text:span text:style-name="T8">PRESCRIPTIVE</text:span>
           </text:p>
-          <draw:enhanced-geometry draw:mirror-horizontal="false" draw:mirror-vertical="false" draw:glue-points="?f0 0 0 ?f1 ?f0 ?f2 ?f3 ?f1" draw:text-areas="0 0 ?f3 ?f2" svg:viewBox="0 0 0 0" draw:type="ooxml-rect" draw:enhanced-path="M 0 0 L ?f3 0 ?f3 ?f2 0 ?f2 Z N">
+          <draw:enhanced-geometry draw:mirror-horizontal="false" draw:mirror-vertical="false" svg:viewBox="0 0 0 0" draw:glue-points="?f0 0 0 ?f1 ?f0 ?f2 ?f3 ?f1" draw:text-areas="0 0 ?f3 ?f2" draw:type="ooxml-rect" draw:enhanced-path="M 0 0 L ?f3 0 ?f3 ?f2 0 ?f2 Z N">
             <draw:equation draw:name="f0" draw:formula="logwidth/2"/>
             <draw:equation draw:name="f1" draw:formula="logheight/2"/>
             <draw:equation draw:name="f2" draw:formula="logheight"/>
@@ -8147,7 +8087,7 @@
           <text:p text:style-name="P2">
             <text:span text:style-name="T24">What should we do?</text:span>
           </text:p>
-          <draw:enhanced-geometry draw:mirror-horizontal="false" draw:mirror-vertical="false" draw:glue-points="?f0 0 0 ?f1 ?f0 ?f2 ?f3 ?f1" draw:text-areas="0 0 ?f3 ?f2" svg:viewBox="0 0 0 0" draw:type="ooxml-rect" draw:enhanced-path="M 0 0 L ?f3 0 ?f3 ?f2 0 ?f2 Z N">
+          <draw:enhanced-geometry draw:mirror-horizontal="false" draw:mirror-vertical="false" svg:viewBox="0 0 0 0" draw:glue-points="?f0 0 0 ?f1 ?f0 ?f2 ?f3 ?f1" draw:text-areas="0 0 ?f3 ?f2" draw:type="ooxml-rect" draw:enhanced-path="M 0 0 L ?f3 0 ?f3 ?f2 0 ?f2 Z N">
             <draw:equation draw:name="f0" draw:formula="logwidth/2"/>
             <draw:equation draw:name="f1" draw:formula="logheight/2"/>
             <draw:equation draw:name="f2" draw:formula="logheight"/>
@@ -8158,7 +8098,7 @@
           <text:p text:style-name="P2">
             <text:span text:style-name="T9">Care-Process Gaps</text:span>
           </text:p>
-          <draw:enhanced-geometry draw:mirror-horizontal="false" draw:mirror-vertical="false" draw:glue-points="?f0 0 0 ?f1 ?f0 ?f2 ?f3 ?f1" draw:text-areas="0 0 ?f3 ?f2" svg:viewBox="0 0 0 0" draw:type="ooxml-rect" draw:enhanced-path="M 0 0 L ?f3 0 ?f3 ?f2 0 ?f2 Z N">
+          <draw:enhanced-geometry draw:mirror-horizontal="false" draw:mirror-vertical="false" svg:viewBox="0 0 0 0" draw:glue-points="?f0 0 0 ?f1 ?f0 ?f2 ?f3 ?f1" draw:text-areas="0 0 ?f3 ?f2" draw:type="ooxml-rect" draw:enhanced-path="M 0 0 L ?f3 0 ?f3 ?f2 0 ?f2 Z N">
             <draw:equation draw:name="f0" draw:formula="logwidth/2"/>
             <draw:equation draw:name="f1" draw:formula="logheight/2"/>
             <draw:equation draw:name="f2" draw:formula="logheight"/>
@@ -8167,18 +8107,18 @@
         </draw:custom-shape>
         <draw:custom-shape draw:name="Text 4" draw:style-name="gr132" draw:text-style-name="P3" draw:layer="layout" svg:width="22.857cm" svg:height="0.657cm" svg:x="1.27cm" svg:y="2.692cm">
           <text:p text:style-name="P2">
-            <text:span text:style-name="T21">Dashboard charts: The echo gap · Leaving against medical advice</text:span>
-          </text:p>
-          <draw:enhanced-geometry draw:mirror-horizontal="false" draw:mirror-vertical="false" draw:glue-points="?f0 0 0 ?f1 ?f0 ?f2 ?f3 ?f1" draw:text-areas="0 0 ?f3 ?f2" svg:viewBox="0 0 0 0" draw:type="ooxml-rect" draw:enhanced-path="M 0 0 L ?f3 0 ?f3 ?f2 0 ?f2 Z N">
-            <draw:equation draw:name="f0" draw:formula="logwidth/2"/>
-            <draw:equation draw:name="f1" draw:formula="logheight/2"/>
-            <draw:equation draw:name="f2" draw:formula="logheight"/>
-            <draw:equation draw:name="f3" draw:formula="logwidth"/>
-          </draw:enhanced-geometry>
-        </draw:custom-shape>
-        <draw:custom-shape draw:name="Shape 5" draw:style-name="gr16" draw:text-style-name="P16" draw:layer="layout" svg:width="2.283cm" svg:height="0.505cm" svg:x="14.224cm" svg:y="13.411cm">
-          <text:p/>
-          <draw:enhanced-geometry draw:mirror-horizontal="false" draw:mirror-vertical="false" draw:glue-points="?f8 0 0 ?f9 ?f8 ?f10 ?f11 ?f9" draw:text-areas="?f5 ?f5 ?f6 ?f7" svg:viewBox="0 0 0 0" draw:type="ooxml-roundRect" draw:modifiers="50000" draw:enhanced-path="M 0 ?f2 L ?f3 0 L ?f11 ?f4 L ?f2 ?f10 Z N" drawooo:enhanced-path="M 0 ?f2 G ?f2 ?f2 ?f12 ?f13 L ?f3 0 G ?f2 ?f2 ?f14 ?f15 L ?f11 ?f4 G ?f2 ?f2 ?f16 ?f17 L ?f2 ?f10 G ?f2 ?f2 ?f18 ?f19 Z N">
+            <text:span text:style-name="T21"/>
+          </text:p>
+          <draw:enhanced-geometry draw:mirror-horizontal="false" draw:mirror-vertical="false" svg:viewBox="0 0 0 0" draw:glue-points="?f0 0 0 ?f1 ?f0 ?f2 ?f3 ?f1" draw:text-areas="0 0 ?f3 ?f2" draw:type="ooxml-rect" draw:enhanced-path="M 0 0 L ?f3 0 ?f3 ?f2 0 ?f2 Z N">
+            <draw:equation draw:name="f0" draw:formula="logwidth/2"/>
+            <draw:equation draw:name="f1" draw:formula="logheight/2"/>
+            <draw:equation draw:name="f2" draw:formula="logheight"/>
+            <draw:equation draw:name="f3" draw:formula="logwidth"/>
+          </draw:enhanced-geometry>
+        </draw:custom-shape>
+        <draw:custom-shape draw:name="Shape 5" draw:style-name="gr16" draw:text-style-name="P18" draw:layer="layout" svg:width="2.283cm" svg:height="0.505cm" svg:x="14.224cm" svg:y="13.411cm">
+          <text:p/>
+          <draw:enhanced-geometry draw:mirror-horizontal="false" draw:mirror-vertical="false" svg:viewBox="0 0 0 0" draw:glue-points="?f8 0 0 ?f9 ?f8 ?f10 ?f11 ?f9" draw:text-areas="?f5 ?f5 ?f6 ?f7" draw:type="ooxml-roundRect" draw:modifiers="50000" draw:enhanced-path="M 0 ?f2 L ?f3 0 L ?f11 ?f4 L ?f2 ?f10 Z N" drawooo:enhanced-path="M 0 ?f2 G ?f2 ?f2 ?f12 ?f13 L ?f3 0 G ?f2 ?f2 ?f14 ?f15 L ?f11 ?f4 G ?f2 ?f2 ?f16 ?f17 L ?f2 ?f10 G ?f2 ?f2 ?f18 ?f19 Z N">
             <draw:equation draw:name="f0" draw:formula="if(0-$0 ,0,if(50000-$0 ,$0 ,50000))"/>
             <draw:equation draw:name="f1" draw:formula="min(logwidth,logheight)"/>
             <draw:equation draw:name="f2" draw:formula="?f1 *?f0 /100000"/>
@@ -8199,23 +8139,23 @@
             <draw:equation draw:name="f17" draw:formula="(5400000)/60000.0"/>
             <draw:equation draw:name="f18" draw:formula="(5400000)/60000.0"/>
             <draw:equation draw:name="f19" draw:formula="(5400000)/60000.0"/>
-            <draw:handle draw:handle-position="?f2 0" draw:handle-position-x="?f2" draw:handle-position-y="0" draw:handle-range-x-maximum="50000" draw:handle-range-x-minimum="0"/>
-          </draw:enhanced-geometry>
-        </draw:custom-shape>
-        <draw:custom-shape draw:name="Text 6" draw:style-name="gr133" draw:text-style-name="P14" draw:layer="layout" svg:width="2.283cm" svg:height="0.505cm" svg:x="14.224cm" svg:y="13.411cm">
-          <text:p text:style-name="P13">
+            <draw:handle draw:handle-range-x-maximum="50000" draw:handle-range-x-minimum="0" draw:handle-position="?f2 0" draw:handle-position-x="?f2" draw:handle-position-y="0"/>
+          </draw:enhanced-geometry>
+        </draw:custom-shape>
+        <draw:custom-shape draw:name="Text 6" draw:style-name="gr133" draw:text-style-name="P16" draw:layer="layout" svg:width="2.283cm" svg:height="0.505cm" svg:x="14.224cm" svg:y="13.411cm">
+          <text:p text:style-name="P15">
             <text:span text:style-name="T11">KPIs</text:span>
           </text:p>
-          <draw:enhanced-geometry draw:mirror-horizontal="false" draw:mirror-vertical="false" draw:glue-points="?f0 0 0 ?f1 ?f0 ?f2 ?f3 ?f1" draw:text-areas="0 0 ?f3 ?f2" svg:viewBox="0 0 0 0" draw:type="ooxml-rect" draw:enhanced-path="M 0 0 L ?f3 0 ?f3 ?f2 0 ?f2 Z N">
-            <draw:equation draw:name="f0" draw:formula="logwidth/2"/>
-            <draw:equation draw:name="f1" draw:formula="logheight/2"/>
-            <draw:equation draw:name="f2" draw:formula="logheight"/>
-            <draw:equation draw:name="f3" draw:formula="logwidth"/>
-          </draw:enhanced-geometry>
-        </draw:custom-shape>
-        <draw:custom-shape draw:name="Shape 7" draw:style-name="gr16" draw:text-style-name="P16" draw:layer="layout" svg:width="2.283cm" svg:height="0.505cm" svg:x="16.739cm" svg:y="13.411cm">
-          <text:p/>
-          <draw:enhanced-geometry draw:mirror-horizontal="false" draw:mirror-vertical="false" draw:glue-points="?f8 0 0 ?f9 ?f8 ?f10 ?f11 ?f9" draw:text-areas="?f5 ?f5 ?f6 ?f7" svg:viewBox="0 0 0 0" draw:type="ooxml-roundRect" draw:modifiers="50000" draw:enhanced-path="M 0 ?f2 L ?f3 0 L ?f11 ?f4 L ?f2 ?f10 Z N" drawooo:enhanced-path="M 0 ?f2 G ?f2 ?f2 ?f12 ?f13 L ?f3 0 G ?f2 ?f2 ?f14 ?f15 L ?f11 ?f4 G ?f2 ?f2 ?f16 ?f17 L ?f2 ?f10 G ?f2 ?f2 ?f18 ?f19 Z N">
+          <draw:enhanced-geometry draw:mirror-horizontal="false" draw:mirror-vertical="false" svg:viewBox="0 0 0 0" draw:glue-points="?f0 0 0 ?f1 ?f0 ?f2 ?f3 ?f1" draw:text-areas="0 0 ?f3 ?f2" draw:type="ooxml-rect" draw:enhanced-path="M 0 0 L ?f3 0 ?f3 ?f2 0 ?f2 Z N">
+            <draw:equation draw:name="f0" draw:formula="logwidth/2"/>
+            <draw:equation draw:name="f1" draw:formula="logheight/2"/>
+            <draw:equation draw:name="f2" draw:formula="logheight"/>
+            <draw:equation draw:name="f3" draw:formula="logwidth"/>
+          </draw:enhanced-geometry>
+        </draw:custom-shape>
+        <draw:custom-shape draw:name="Shape 7" draw:style-name="gr16" draw:text-style-name="P18" draw:layer="layout" svg:width="2.283cm" svg:height="0.505cm" svg:x="16.739cm" svg:y="13.411cm">
+          <text:p/>
+          <draw:enhanced-geometry draw:mirror-horizontal="false" draw:mirror-vertical="false" svg:viewBox="0 0 0 0" draw:glue-points="?f8 0 0 ?f9 ?f8 ?f10 ?f11 ?f9" draw:text-areas="?f5 ?f5 ?f6 ?f7" draw:type="ooxml-roundRect" draw:modifiers="50000" draw:enhanced-path="M 0 ?f2 L ?f3 0 L ?f11 ?f4 L ?f2 ?f10 Z N" drawooo:enhanced-path="M 0 ?f2 G ?f2 ?f2 ?f12 ?f13 L ?f3 0 G ?f2 ?f2 ?f14 ?f15 L ?f11 ?f4 G ?f2 ?f2 ?f16 ?f17 L ?f2 ?f10 G ?f2 ?f2 ?f18 ?f19 Z N">
             <draw:equation draw:name="f0" draw:formula="if(0-$0 ,0,if(50000-$0 ,$0 ,50000))"/>
             <draw:equation draw:name="f1" draw:formula="min(logwidth,logheight)"/>
             <draw:equation draw:name="f2" draw:formula="?f1 *?f0 /100000"/>
@@ -8236,23 +8176,23 @@
             <draw:equation draw:name="f17" draw:formula="(5400000)/60000.0"/>
             <draw:equation draw:name="f18" draw:formula="(5400000)/60000.0"/>
             <draw:equation draw:name="f19" draw:formula="(5400000)/60000.0"/>
-            <draw:handle draw:handle-position="?f2 0" draw:handle-position-x="?f2" draw:handle-position-y="0" draw:handle-range-x-maximum="50000" draw:handle-range-x-minimum="0"/>
-          </draw:enhanced-geometry>
-        </draw:custom-shape>
-        <draw:custom-shape draw:name="Text 8" draw:style-name="gr134" draw:text-style-name="P14" draw:layer="layout" svg:width="2.283cm" svg:height="0.505cm" svg:x="16.739cm" svg:y="13.411cm">
-          <text:p text:style-name="P13">
+            <draw:handle draw:handle-range-x-maximum="50000" draw:handle-range-x-minimum="0" draw:handle-position="?f2 0" draw:handle-position-x="?f2" draw:handle-position-y="0"/>
+          </draw:enhanced-geometry>
+        </draw:custom-shape>
+        <draw:custom-shape draw:name="Text 8" draw:style-name="gr134" draw:text-style-name="P16" draw:layer="layout" svg:width="2.283cm" svg:height="0.505cm" svg:x="16.739cm" svg:y="13.411cm">
+          <text:p text:style-name="P15">
             <text:span text:style-name="T11">Descriptive</text:span>
           </text:p>
-          <draw:enhanced-geometry draw:mirror-horizontal="false" draw:mirror-vertical="false" draw:glue-points="?f0 0 0 ?f1 ?f0 ?f2 ?f3 ?f1" draw:text-areas="0 0 ?f3 ?f2" svg:viewBox="0 0 0 0" draw:type="ooxml-rect" draw:enhanced-path="M 0 0 L ?f3 0 ?f3 ?f2 0 ?f2 Z N">
-            <draw:equation draw:name="f0" draw:formula="logwidth/2"/>
-            <draw:equation draw:name="f1" draw:formula="logheight/2"/>
-            <draw:equation draw:name="f2" draw:formula="logheight"/>
-            <draw:equation draw:name="f3" draw:formula="logwidth"/>
-          </draw:enhanced-geometry>
-        </draw:custom-shape>
-        <draw:custom-shape draw:name="Shape 9" draw:style-name="gr90" draw:text-style-name="P31" draw:layer="layout" svg:width="2.283cm" svg:height="0.505cm" svg:x="19.253cm" svg:y="13.411cm">
-          <text:p/>
-          <draw:enhanced-geometry draw:mirror-horizontal="false" draw:mirror-vertical="false" draw:glue-points="?f8 0 0 ?f9 ?f8 ?f10 ?f11 ?f9" draw:text-areas="?f5 ?f5 ?f6 ?f7" svg:viewBox="0 0 0 0" draw:type="ooxml-roundRect" draw:modifiers="50000" draw:enhanced-path="M 0 ?f2 L ?f3 0 L ?f11 ?f4 L ?f2 ?f10 Z N" drawooo:enhanced-path="M 0 ?f2 G ?f2 ?f2 ?f12 ?f13 L ?f3 0 G ?f2 ?f2 ?f14 ?f15 L ?f11 ?f4 G ?f2 ?f2 ?f16 ?f17 L ?f2 ?f10 G ?f2 ?f2 ?f18 ?f19 Z N">
+          <draw:enhanced-geometry draw:mirror-horizontal="false" draw:mirror-vertical="false" svg:viewBox="0 0 0 0" draw:glue-points="?f0 0 0 ?f1 ?f0 ?f2 ?f3 ?f1" draw:text-areas="0 0 ?f3 ?f2" draw:type="ooxml-rect" draw:enhanced-path="M 0 0 L ?f3 0 ?f3 ?f2 0 ?f2 Z N">
+            <draw:equation draw:name="f0" draw:formula="logwidth/2"/>
+            <draw:equation draw:name="f1" draw:formula="logheight/2"/>
+            <draw:equation draw:name="f2" draw:formula="logheight"/>
+            <draw:equation draw:name="f3" draw:formula="logwidth"/>
+          </draw:enhanced-geometry>
+        </draw:custom-shape>
+        <draw:custom-shape draw:name="Shape 9" draw:style-name="gr90" draw:text-style-name="P33" draw:layer="layout" svg:width="2.283cm" svg:height="0.505cm" svg:x="19.253cm" svg:y="13.411cm">
+          <text:p/>
+          <draw:enhanced-geometry draw:mirror-horizontal="false" draw:mirror-vertical="false" svg:viewBox="0 0 0 0" draw:glue-points="?f8 0 0 ?f9 ?f8 ?f10 ?f11 ?f9" draw:text-areas="?f5 ?f5 ?f6 ?f7" draw:type="ooxml-roundRect" draw:modifiers="50000" draw:enhanced-path="M 0 ?f2 L ?f3 0 L ?f11 ?f4 L ?f2 ?f10 Z N" drawooo:enhanced-path="M 0 ?f2 G ?f2 ?f2 ?f12 ?f13 L ?f3 0 G ?f2 ?f2 ?f14 ?f15 L ?f11 ?f4 G ?f2 ?f2 ?f16 ?f17 L ?f2 ?f10 G ?f2 ?f2 ?f18 ?f19 Z N">
             <draw:equation draw:name="f0" draw:formula="if(0-$0 ,0,if(50000-$0 ,$0 ,50000))"/>
             <draw:equation draw:name="f1" draw:formula="min(logwidth,logheight)"/>
             <draw:equation draw:name="f2" draw:formula="?f1 *?f0 /100000"/>
@@ -8273,23 +8213,23 @@
             <draw:equation draw:name="f17" draw:formula="(5400000)/60000.0"/>
             <draw:equation draw:name="f18" draw:formula="(5400000)/60000.0"/>
             <draw:equation draw:name="f19" draw:formula="(5400000)/60000.0"/>
-            <draw:handle draw:handle-position="?f2 0" draw:handle-position-x="?f2" draw:handle-position-y="0" draw:handle-range-x-maximum="50000" draw:handle-range-x-minimum="0"/>
-          </draw:enhanced-geometry>
-        </draw:custom-shape>
-        <draw:custom-shape draw:name="Text 10" draw:style-name="gr135" draw:text-style-name="P14" draw:layer="layout" svg:width="2.283cm" svg:height="0.505cm" svg:x="19.253cm" svg:y="13.411cm">
-          <text:p text:style-name="P13">
+            <draw:handle draw:handle-range-x-maximum="50000" draw:handle-range-x-minimum="0" draw:handle-position="?f2 0" draw:handle-position-x="?f2" draw:handle-position-y="0"/>
+          </draw:enhanced-geometry>
+        </draw:custom-shape>
+        <draw:custom-shape draw:name="Text 10" draw:style-name="gr135" draw:text-style-name="P16" draw:layer="layout" svg:width="2.283cm" svg:height="0.505cm" svg:x="19.253cm" svg:y="13.411cm">
+          <text:p text:style-name="P15">
             <text:span text:style-name="T10">Prescriptive</text:span>
           </text:p>
-          <draw:enhanced-geometry draw:mirror-horizontal="false" draw:mirror-vertical="false" draw:glue-points="?f0 0 0 ?f1 ?f0 ?f2 ?f3 ?f1" draw:text-areas="0 0 ?f3 ?f2" svg:viewBox="0 0 0 0" draw:type="ooxml-rect" draw:enhanced-path="M 0 0 L ?f3 0 ?f3 ?f2 0 ?f2 Z N">
-            <draw:equation draw:name="f0" draw:formula="logwidth/2"/>
-            <draw:equation draw:name="f1" draw:formula="logheight/2"/>
-            <draw:equation draw:name="f2" draw:formula="logheight"/>
-            <draw:equation draw:name="f3" draw:formula="logwidth"/>
-          </draw:enhanced-geometry>
-        </draw:custom-shape>
-        <draw:custom-shape draw:name="Shape 11" draw:style-name="gr16" draw:text-style-name="P16" draw:layer="layout" svg:width="2.283cm" svg:height="0.505cm" svg:x="21.768cm" svg:y="13.411cm">
-          <text:p/>
-          <draw:enhanced-geometry draw:mirror-horizontal="false" draw:mirror-vertical="false" draw:glue-points="?f8 0 0 ?f9 ?f8 ?f10 ?f11 ?f9" draw:text-areas="?f5 ?f5 ?f6 ?f7" svg:viewBox="0 0 0 0" draw:type="ooxml-roundRect" draw:modifiers="50000" draw:enhanced-path="M 0 ?f2 L ?f3 0 L ?f11 ?f4 L ?f2 ?f10 Z N" drawooo:enhanced-path="M 0 ?f2 G ?f2 ?f2 ?f12 ?f13 L ?f3 0 G ?f2 ?f2 ?f14 ?f15 L ?f11 ?f4 G ?f2 ?f2 ?f16 ?f17 L ?f2 ?f10 G ?f2 ?f2 ?f18 ?f19 Z N">
+          <draw:enhanced-geometry draw:mirror-horizontal="false" draw:mirror-vertical="false" svg:viewBox="0 0 0 0" draw:glue-points="?f0 0 0 ?f1 ?f0 ?f2 ?f3 ?f1" draw:text-areas="0 0 ?f3 ?f2" draw:type="ooxml-rect" draw:enhanced-path="M 0 0 L ?f3 0 ?f3 ?f2 0 ?f2 Z N">
+            <draw:equation draw:name="f0" draw:formula="logwidth/2"/>
+            <draw:equation draw:name="f1" draw:formula="logheight/2"/>
+            <draw:equation draw:name="f2" draw:formula="logheight"/>
+            <draw:equation draw:name="f3" draw:formula="logwidth"/>
+          </draw:enhanced-geometry>
+        </draw:custom-shape>
+        <draw:custom-shape draw:name="Shape 11" draw:style-name="gr16" draw:text-style-name="P18" draw:layer="layout" svg:width="2.283cm" svg:height="0.505cm" svg:x="21.768cm" svg:y="13.411cm">
+          <text:p/>
+          <draw:enhanced-geometry draw:mirror-horizontal="false" draw:mirror-vertical="false" svg:viewBox="0 0 0 0" draw:glue-points="?f8 0 0 ?f9 ?f8 ?f10 ?f11 ?f9" draw:text-areas="?f5 ?f5 ?f6 ?f7" draw:type="ooxml-roundRect" draw:modifiers="50000" draw:enhanced-path="M 0 ?f2 L ?f3 0 L ?f11 ?f4 L ?f2 ?f10 Z N" drawooo:enhanced-path="M 0 ?f2 G ?f2 ?f2 ?f12 ?f13 L ?f3 0 G ?f2 ?f2 ?f14 ?f15 L ?f11 ?f4 G ?f2 ?f2 ?f16 ?f17 L ?f2 ?f10 G ?f2 ?f2 ?f18 ?f19 Z N">
             <draw:equation draw:name="f0" draw:formula="if(0-$0 ,0,if(50000-$0 ,$0 ,50000))"/>
             <draw:equation draw:name="f1" draw:formula="min(logwidth,logheight)"/>
             <draw:equation draw:name="f2" draw:formula="?f1 *?f0 /100000"/>
@@ -8310,35 +8250,35 @@
             <draw:equation draw:name="f17" draw:formula="(5400000)/60000.0"/>
             <draw:equation draw:name="f18" draw:formula="(5400000)/60000.0"/>
             <draw:equation draw:name="f19" draw:formula="(5400000)/60000.0"/>
-            <draw:handle draw:handle-position="?f2 0" draw:handle-position-x="?f2" draw:handle-position-y="0" draw:handle-range-x-maximum="50000" draw:handle-range-x-minimum="0"/>
-          </draw:enhanced-geometry>
-        </draw:custom-shape>
-        <draw:custom-shape draw:name="Text 12" draw:style-name="gr136" draw:text-style-name="P14" draw:layer="layout" svg:width="2.283cm" svg:height="0.505cm" svg:x="21.768cm" svg:y="13.411cm">
-          <text:p text:style-name="P13">
+            <draw:handle draw:handle-range-x-maximum="50000" draw:handle-range-x-minimum="0" draw:handle-position="?f2 0" draw:handle-position-x="?f2" draw:handle-position-y="0"/>
+          </draw:enhanced-geometry>
+        </draw:custom-shape>
+        <draw:custom-shape draw:name="Text 12" draw:style-name="gr136" draw:text-style-name="P16" draw:layer="layout" svg:width="2.283cm" svg:height="0.505cm" svg:x="21.768cm" svg:y="13.411cm">
+          <text:p text:style-name="P15">
             <text:span text:style-name="T11">Predictive</text:span>
           </text:p>
-          <draw:enhanced-geometry draw:mirror-horizontal="false" draw:mirror-vertical="false" draw:glue-points="?f0 0 0 ?f1 ?f0 ?f2 ?f3 ?f1" draw:text-areas="0 0 ?f3 ?f2" svg:viewBox="0 0 0 0" draw:type="ooxml-rect" draw:enhanced-path="M 0 0 L ?f3 0 ?f3 ?f2 0 ?f2 Z N">
-            <draw:equation draw:name="f0" draw:formula="logwidth/2"/>
-            <draw:equation draw:name="f1" draw:formula="logheight/2"/>
-            <draw:equation draw:name="f2" draw:formula="logheight"/>
-            <draw:equation draw:name="f3" draw:formula="logwidth"/>
-          </draw:enhanced-geometry>
-        </draw:custom-shape>
-        <draw:frame draw:name="Chart 0" draw:style-name="gr69" draw:text-style-name="P6" draw:layer="layout" svg:width="11.681cm" svg:height="6.474cm" svg:x="1.016cm" svg:y="3.505cm">
+          <draw:enhanced-geometry draw:mirror-horizontal="false" draw:mirror-vertical="false" svg:viewBox="0 0 0 0" draw:glue-points="?f0 0 0 ?f1 ?f0 ?f2 ?f3 ?f1" draw:text-areas="0 0 ?f3 ?f2" draw:type="ooxml-rect" draw:enhanced-path="M 0 0 L ?f3 0 ?f3 ?f2 0 ?f2 Z N">
+            <draw:equation draw:name="f0" draw:formula="logwidth/2"/>
+            <draw:equation draw:name="f1" draw:formula="logheight/2"/>
+            <draw:equation draw:name="f2" draw:formula="logheight"/>
+            <draw:equation draw:name="f3" draw:formula="logwidth"/>
+          </draw:enhanced-geometry>
+        </draw:custom-shape>
+        <draw:frame draw:name="Chart 0" draw:style-name="gr69" draw:text-style-name="P8" draw:layer="layout" svg:width="11.681cm" svg:height="6.474cm" svg:x="1.016cm" svg:y="3.505cm">
           <draw:object xlink:href="./Object 9" xlink:type="simple" xlink:show="embed" xlink:actuate="onLoad">
             <loext:p/>
           </draw:object>
           <draw:image xlink:href="./ObjectReplacements/Object 9" xlink:type="simple" xlink:show="embed" xlink:actuate="onLoad"/>
         </draw:frame>
-        <draw:frame draw:name="Chart 1" draw:style-name="gr69" draw:text-style-name="P6" draw:layer="layout" svg:width="11.427cm" svg:height="6.474cm" svg:x="12.954cm" svg:y="3.505cm">
+        <draw:frame draw:name="Chart 1" draw:style-name="gr69" draw:text-style-name="P8" draw:layer="layout" svg:width="11.427cm" svg:height="6.474cm" svg:x="12.954cm" svg:y="3.505cm">
           <draw:object xlink:href="./Object 10" xlink:type="simple" xlink:show="embed" xlink:actuate="onLoad">
             <loext:p/>
           </draw:object>
           <draw:image xlink:href="./ObjectReplacements/Object 10" xlink:type="simple" xlink:show="embed" xlink:actuate="onLoad"/>
         </draw:frame>
-        <draw:custom-shape draw:name="Shape 13" draw:style-name="gr20" draw:text-style-name="P16" draw:layer="layout" svg:width="11.173cm" svg:height="2.842cm" svg:x="1.27cm" svg:y="10.211cm">
-          <text:p/>
-          <draw:enhanced-geometry draw:mirror-horizontal="false" draw:mirror-vertical="false" draw:glue-points="?f8 0 0 ?f9 ?f8 ?f10 ?f11 ?f9" draw:text-areas="?f5 ?f5 ?f6 ?f7" svg:viewBox="0 0 0 0" draw:type="ooxml-roundRect" draw:modifiers="7143" draw:enhanced-path="M 0 ?f2 L ?f3 0 L ?f11 ?f4 L ?f2 ?f10 Z N" drawooo:enhanced-path="M 0 ?f2 G ?f2 ?f2 ?f12 ?f13 L ?f3 0 G ?f2 ?f2 ?f14 ?f15 L ?f11 ?f4 G ?f2 ?f2 ?f16 ?f17 L ?f2 ?f10 G ?f2 ?f2 ?f18 ?f19 Z N">
+        <draw:custom-shape draw:name="Shape 13" draw:style-name="gr20" draw:text-style-name="P18" draw:layer="layout" svg:width="11.173cm" svg:height="2.842cm" svg:x="1.27cm" svg:y="10.211cm">
+          <text:p/>
+          <draw:enhanced-geometry draw:mirror-horizontal="false" draw:mirror-vertical="false" svg:viewBox="0 0 0 0" draw:glue-points="?f8 0 0 ?f9 ?f8 ?f10 ?f11 ?f9" draw:text-areas="?f5 ?f5 ?f6 ?f7" draw:type="ooxml-roundRect" draw:modifiers="7143" draw:enhanced-path="M 0 ?f2 L ?f3 0 L ?f11 ?f4 L ?f2 ?f10 Z N" drawooo:enhanced-path="M 0 ?f2 G ?f2 ?f2 ?f12 ?f13 L ?f3 0 G ?f2 ?f2 ?f14 ?f15 L ?f11 ?f4 G ?f2 ?f2 ?f16 ?f17 L ?f2 ?f10 G ?f2 ?f2 ?f18 ?f19 Z N">
             <draw:equation draw:name="f0" draw:formula="if(0-$0 ,0,if(50000-$0 ,$0 ,50000))"/>
             <draw:equation draw:name="f1" draw:formula="min(logwidth,logheight)"/>
             <draw:equation draw:name="f2" draw:formula="?f1 *?f0 /100000"/>
@@ -8359,34 +8299,34 @@
             <draw:equation draw:name="f17" draw:formula="(5400000)/60000.0"/>
             <draw:equation draw:name="f18" draw:formula="(5400000)/60000.0"/>
             <draw:equation draw:name="f19" draw:formula="(5400000)/60000.0"/>
-            <draw:handle draw:handle-position="?f2 0" draw:handle-position-x="?f2" draw:handle-position-y="0" draw:handle-range-x-maximum="50000" draw:handle-range-x-minimum="0"/>
-          </draw:enhanced-geometry>
-        </draw:custom-shape>
-        <draw:custom-shape draw:name="Text 14" draw:style-name="gr137" draw:text-style-name="P29" draw:layer="layout" svg:width="10.411cm" svg:height="2.435cm" svg:x="1.651cm" svg:y="10.414cm">
-          <text:p text:style-name="P28">
+            <draw:handle draw:handle-range-x-maximum="50000" draw:handle-range-x-minimum="0" draw:handle-position="?f2 0" draw:handle-position-x="?f2" draw:handle-position-y="0"/>
+          </draw:enhanced-geometry>
+        </draw:custom-shape>
+        <draw:custom-shape draw:name="Text 14" draw:style-name="gr137" draw:text-style-name="P31" draw:layer="layout" svg:width="10.411cm" svg:height="2.435cm" svg:x="1.651cm" svg:y="10.414cm">
+          <text:p text:style-name="P30">
             <text:span text:style-name="T25">
               FINDING 
               <text:s/>
             </text:span>
             <text:span text:style-name="T23">32% have no echo on record, and they are readmitted far more often: 50.1% vs 33.1%.</text:span>
           </text:p>
-          <text:p text:style-name="P28">
+          <text:p text:style-name="P30">
             <text:span text:style-name="T25">
               ACTION 
               <text:s/>
             </text:span>
             <text:span text:style-name="T23">Make a completed echo a mandatory pre-discharge item.</text:span>
           </text:p>
-          <draw:enhanced-geometry draw:mirror-horizontal="false" draw:mirror-vertical="false" draw:glue-points="?f0 0 0 ?f1 ?f0 ?f2 ?f3 ?f1" draw:text-areas="0 0 ?f3 ?f2" svg:viewBox="0 0 0 0" draw:type="ooxml-rect" draw:enhanced-path="M 0 0 L ?f3 0 ?f3 ?f2 0 ?f2 Z N">
-            <draw:equation draw:name="f0" draw:formula="logwidth/2"/>
-            <draw:equation draw:name="f1" draw:formula="logheight/2"/>
-            <draw:equation draw:name="f2" draw:formula="logheight"/>
-            <draw:equation draw:name="f3" draw:formula="logwidth"/>
-          </draw:enhanced-geometry>
-        </draw:custom-shape>
-        <draw:custom-shape draw:name="Shape 15" draw:style-name="gr20" draw:text-style-name="P16" draw:layer="layout" svg:width="11.173cm" svg:height="2.842cm" svg:x="12.954cm" svg:y="10.211cm">
-          <text:p/>
-          <draw:enhanced-geometry draw:mirror-horizontal="false" draw:mirror-vertical="false" draw:glue-points="?f8 0 0 ?f9 ?f8 ?f10 ?f11 ?f9" draw:text-areas="?f5 ?f5 ?f6 ?f7" svg:viewBox="0 0 0 0" draw:type="ooxml-roundRect" draw:modifiers="7143" draw:enhanced-path="M 0 ?f2 L ?f3 0 L ?f11 ?f4 L ?f2 ?f10 Z N" drawooo:enhanced-path="M 0 ?f2 G ?f2 ?f2 ?f12 ?f13 L ?f3 0 G ?f2 ?f2 ?f14 ?f15 L ?f11 ?f4 G ?f2 ?f2 ?f16 ?f17 L ?f2 ?f10 G ?f2 ?f2 ?f18 ?f19 Z N">
+          <draw:enhanced-geometry draw:mirror-horizontal="false" draw:mirror-vertical="false" svg:viewBox="0 0 0 0" draw:glue-points="?f0 0 0 ?f1 ?f0 ?f2 ?f3 ?f1" draw:text-areas="0 0 ?f3 ?f2" draw:type="ooxml-rect" draw:enhanced-path="M 0 0 L ?f3 0 ?f3 ?f2 0 ?f2 Z N">
+            <draw:equation draw:name="f0" draw:formula="logwidth/2"/>
+            <draw:equation draw:name="f1" draw:formula="logheight/2"/>
+            <draw:equation draw:name="f2" draw:formula="logheight"/>
+            <draw:equation draw:name="f3" draw:formula="logwidth"/>
+          </draw:enhanced-geometry>
+        </draw:custom-shape>
+        <draw:custom-shape draw:name="Shape 15" draw:style-name="gr20" draw:text-style-name="P18" draw:layer="layout" svg:width="11.173cm" svg:height="2.842cm" svg:x="12.954cm" svg:y="10.211cm">
+          <text:p/>
+          <draw:enhanced-geometry draw:mirror-horizontal="false" draw:mirror-vertical="false" svg:viewBox="0 0 0 0" draw:glue-points="?f8 0 0 ?f9 ?f8 ?f10 ?f11 ?f9" draw:text-areas="?f5 ?f5 ?f6 ?f7" draw:type="ooxml-roundRect" draw:modifiers="7143" draw:enhanced-path="M 0 ?f2 L ?f3 0 L ?f11 ?f4 L ?f2 ?f10 Z N" drawooo:enhanced-path="M 0 ?f2 G ?f2 ?f2 ?f12 ?f13 L ?f3 0 G ?f2 ?f2 ?f14 ?f15 L ?f11 ?f4 G ?f2 ?f2 ?f16 ?f17 L ?f2 ?f10 G ?f2 ?f2 ?f18 ?f19 Z N">
             <draw:equation draw:name="f0" draw:formula="if(0-$0 ,0,if(50000-$0 ,$0 ,50000))"/>
             <draw:equation draw:name="f1" draw:formula="min(logwidth,logheight)"/>
             <draw:equation draw:name="f2" draw:formula="?f1 *?f0 /100000"/>
@@ -8407,34 +8347,34 @@
             <draw:equation draw:name="f17" draw:formula="(5400000)/60000.0"/>
             <draw:equation draw:name="f18" draw:formula="(5400000)/60000.0"/>
             <draw:equation draw:name="f19" draw:formula="(5400000)/60000.0"/>
-            <draw:handle draw:handle-position="?f2 0" draw:handle-position-x="?f2" draw:handle-position-y="0" draw:handle-range-x-maximum="50000" draw:handle-range-x-minimum="0"/>
-          </draw:enhanced-geometry>
-        </draw:custom-shape>
-        <draw:custom-shape draw:name="Text 16" draw:style-name="gr138" draw:text-style-name="P29" draw:layer="layout" svg:width="10.411cm" svg:height="2.435cm" svg:x="13.335cm" svg:y="10.414cm">
-          <text:p text:style-name="P28">
+            <draw:handle draw:handle-range-x-maximum="50000" draw:handle-range-x-minimum="0" draw:handle-position="?f2 0" draw:handle-position-x="?f2" draw:handle-position-y="0"/>
+          </draw:enhanced-geometry>
+        </draw:custom-shape>
+        <draw:custom-shape draw:name="Text 16" draw:style-name="gr138" draw:text-style-name="P31" draw:layer="layout" svg:width="10.411cm" svg:height="2.435cm" svg:x="13.335cm" svg:y="10.414cm">
+          <text:p text:style-name="P30">
             <text:span text:style-name="T25">
               FINDING 
               <text:s/>
             </text:span>
             <text:span text:style-name="T23">Patients who leave against advice are twice as often severely ill and 18.7% die within 28 days (vs 0.4%).</text:span>
           </text:p>
-          <text:p text:style-name="P28">
+          <text:p text:style-name="P30">
             <text:span text:style-name="T25">
               ACTION 
               <text:s/>
             </text:span>
             <text:span text:style-name="T23">Senior-doctor talk before they leave, address cost/family reasons, 48-hour follow-up call.</text:span>
           </text:p>
-          <draw:enhanced-geometry draw:mirror-horizontal="false" draw:mirror-vertical="false" draw:glue-points="?f0 0 0 ?f1 ?f0 ?f2 ?f3 ?f1" draw:text-areas="0 0 ?f3 ?f2" svg:viewBox="0 0 0 0" draw:type="ooxml-rect" draw:enhanced-path="M 0 0 L ?f3 0 ?f3 ?f2 0 ?f2 Z N">
-            <draw:equation draw:name="f0" draw:formula="logwidth/2"/>
-            <draw:equation draw:name="f1" draw:formula="logheight/2"/>
-            <draw:equation draw:name="f2" draw:formula="logheight"/>
-            <draw:equation draw:name="f3" draw:formula="logwidth"/>
-          </draw:enhanced-geometry>
-        </draw:custom-shape>
-        <draw:custom-shape draw:name="Freeform 7" draw:style-name="gr139" draw:text-style-name="P35" draw:layer="layout" svg:width="1.347cm" svg:height="2.221cm" svg:x="23.971cm" svg:y="0.085cm">
-          <text:p/>
-          <draw:enhanced-geometry draw:mirror-horizontal="false" draw:mirror-vertical="false" drawooo:sub-view-size="647700 1066800" draw:text-areas="?f0 ?f2 ?f1 ?f3" svg:viewBox="0 0 0 0" draw:type="ooxml-non-primitive" draw:enhanced-path="M 0 0 L 647700 0 647700 1066800 0 1066800 0 0 Z N">
+          <draw:enhanced-geometry draw:mirror-horizontal="false" draw:mirror-vertical="false" svg:viewBox="0 0 0 0" draw:glue-points="?f0 0 0 ?f1 ?f0 ?f2 ?f3 ?f1" draw:text-areas="0 0 ?f3 ?f2" draw:type="ooxml-rect" draw:enhanced-path="M 0 0 L ?f3 0 ?f3 ?f2 0 ?f2 Z N">
+            <draw:equation draw:name="f0" draw:formula="logwidth/2"/>
+            <draw:equation draw:name="f1" draw:formula="logheight/2"/>
+            <draw:equation draw:name="f2" draw:formula="logheight"/>
+            <draw:equation draw:name="f3" draw:formula="logwidth"/>
+          </draw:enhanced-geometry>
+        </draw:custom-shape>
+        <draw:custom-shape draw:name="Freeform 7" draw:style-name="gr139" draw:text-style-name="P38" draw:layer="layout" svg:width="1.347cm" svg:height="2.221cm" svg:x="23.971cm" svg:y="0.085cm">
+          <text:p/>
+          <draw:enhanced-geometry draw:mirror-horizontal="false" draw:mirror-vertical="false" svg:viewBox="0 0 0 0" drawooo:sub-view-size="647700 1066800" draw:text-areas="?f0 ?f2 ?f1 ?f3" draw:type="ooxml-non-primitive" draw:enhanced-path="M 0 0 L 647700 0 647700 1066800 0 1066800 0 0 Z N">
             <draw:equation draw:name="f0" draw:formula="0*logwidth/485280"/>
             <draw:equation draw:name="f1" draw:formula="485640*logwidth/485280"/>
             <draw:equation draw:name="f2" draw:formula="0*logheight/799920"/>
@@ -8443,16 +8383,16 @@
         </draw:custom-shape>
         <presentation:notes draw:style-name="dp2">
           <draw:page-thumbnail draw:name="PlaceHolder 1" draw:style-name="gr10" draw:layer="layout" svg:width="15.237cm" svg:height="8.57cm" svg:x="1.905cm" svg:y="3.175cm" draw:page-number="8" presentation:class="page"/>
-          <draw:frame draw:name="PlaceHolder 2" presentation:style-name="pr1" draw:text-style-name="P9" draw:layer="layout" svg:width="15.237cm" svg:height="9.998cm" svg:x="1.905cm" svg:y="12.224cm" presentation:class="notes" presentation:user-transformed="true">
+          <draw:frame draw:name="PlaceHolder 2" presentation:style-name="pr1" draw:text-style-name="P11" draw:layer="layout" svg:width="15.237cm" svg:height="9.998cm" svg:x="1.905cm" svg:y="12.224cm" presentation:class="notes" presentation:user-transformed="true">
             <draw:text-box>
-              <text:p text:style-name="P8">
+              <text:p text:style-name="P10">
                 <text:span text:style-name="T6">Left: 6-month readmission (blue) and death (red) for patients with and without an echocardiogram recorded. Right: patients who left against medical advice (orange) compared with regular discharges (aqua). They are sicker and far more likely to die early; their lower readmission rate partly reflects that many die before they can be readmitted. Both gaps are process fixes, not new treatments.</text:span>
               </text:p>
             </draw:text-box>
           </draw:frame>
-          <draw:frame draw:name="PlaceHolder 3" presentation:style-name="pr2" draw:text-style-name="P11" draw:layer="layout" svg:width="8.252cm" svg:height="1.271cm" svg:x="10.791cm" svg:y="24.126cm" presentation:class="page-number" presentation:user-transformed="true">
+          <draw:frame draw:name="PlaceHolder 3" presentation:style-name="pr2" draw:text-style-name="P13" draw:layer="layout" svg:width="8.252cm" svg:height="1.271cm" svg:x="10.791cm" svg:y="24.126cm" presentation:class="page-number" presentation:user-transformed="true">
             <draw:text-box>
-              <text:p text:style-name="P10">
+              <text:p text:style-name="P12">
                 <text:span text:style-name="T7">
                   <text:page-number>&lt;number&gt;</text:page-number>
                 </text:span>
@@ -8462,9 +8402,9 @@
         </presentation:notes>
       </draw:page>
       <draw:page draw:name="page9" draw:style-name="dp10" draw:master-page-name="DEFAULT">
-        <draw:custom-shape draw:name="Shape 0" draw:style-name="gr140" draw:text-style-name="P20" draw:layer="layout" svg:width="3.426cm" svg:height="0.683cm" svg:x="1.27cm" svg:y="0.635cm">
-          <text:p/>
-          <draw:enhanced-geometry draw:mirror-horizontal="false" draw:mirror-vertical="false" draw:glue-points="?f8 0 0 ?f9 ?f8 ?f10 ?f11 ?f9" draw:text-areas="?f5 ?f5 ?f6 ?f7" svg:viewBox="0 0 0 0" draw:type="ooxml-roundRect" draw:modifiers="48148" draw:enhanced-path="M 0 ?f2 L ?f3 0 L ?f11 ?f4 L ?f2 ?f10 Z N" drawooo:enhanced-path="M 0 ?f2 G ?f2 ?f2 ?f12 ?f13 L ?f3 0 G ?f2 ?f2 ?f14 ?f15 L ?f11 ?f4 G ?f2 ?f2 ?f16 ?f17 L ?f2 ?f10 G ?f2 ?f2 ?f18 ?f19 Z N">
+        <draw:custom-shape draw:name="Shape 0" draw:style-name="gr140" draw:text-style-name="P22" draw:layer="layout" svg:width="3.426cm" svg:height="0.683cm" svg:x="1.27cm" svg:y="0.635cm">
+          <text:p/>
+          <draw:enhanced-geometry draw:mirror-horizontal="false" draw:mirror-vertical="false" svg:viewBox="0 0 0 0" draw:glue-points="?f8 0 0 ?f9 ?f8 ?f10 ?f11 ?f9" draw:text-areas="?f5 ?f5 ?f6 ?f7" draw:type="ooxml-roundRect" draw:modifiers="48148" draw:enhanced-path="M 0 ?f2 L ?f3 0 L ?f11 ?f4 L ?f2 ?f10 Z N" drawooo:enhanced-path="M 0 ?f2 G ?f2 ?f2 ?f12 ?f13 L ?f3 0 G ?f2 ?f2 ?f14 ?f15 L ?f11 ?f4 G ?f2 ?f2 ?f16 ?f17 L ?f2 ?f10 G ?f2 ?f2 ?f18 ?f19 Z N">
             <draw:equation draw:name="f0" draw:formula="if(0-$0 ,0,if(50000-$0 ,$0 ,50000))"/>
             <draw:equation draw:name="f1" draw:formula="min(logwidth,logheight)"/>
             <draw:equation draw:name="f2" draw:formula="?f1 *?f0 /100000"/>
@@ -8485,14 +8425,14 @@
             <draw:equation draw:name="f17" draw:formula="(5400000)/60000.0"/>
             <draw:equation draw:name="f18" draw:formula="(5400000)/60000.0"/>
             <draw:equation draw:name="f19" draw:formula="(5400000)/60000.0"/>
-            <draw:handle draw:handle-position="?f2 0" draw:handle-position-x="?f2" draw:handle-position-y="0" draw:handle-range-x-maximum="50000" draw:handle-range-x-minimum="0"/>
-          </draw:enhanced-geometry>
-        </draw:custom-shape>
-        <draw:custom-shape draw:name="Text 1" draw:style-name="gr141" draw:text-style-name="P14" draw:layer="layout" svg:width="3.426cm" svg:height="0.683cm" svg:x="1.27cm" svg:y="0.635cm">
-          <text:p text:style-name="P13">
+            <draw:handle draw:handle-range-x-maximum="50000" draw:handle-range-x-minimum="0" draw:handle-position="?f2 0" draw:handle-position-x="?f2" draw:handle-position-y="0"/>
+          </draw:enhanced-geometry>
+        </draw:custom-shape>
+        <draw:custom-shape draw:name="Text 1" draw:style-name="gr141" draw:text-style-name="P16" draw:layer="layout" svg:width="3.426cm" svg:height="0.683cm" svg:x="1.27cm" svg:y="0.635cm">
+          <text:p text:style-name="P15">
             <text:span text:style-name="T8">PREDICTIVE</text:span>
           </text:p>
-          <draw:enhanced-geometry draw:mirror-horizontal="false" draw:mirror-vertical="false" draw:glue-points="?f0 0 0 ?f1 ?f0 ?f2 ?f3 ?f1" draw:text-areas="0 0 ?f3 ?f2" svg:viewBox="0 0 0 0" draw:type="ooxml-rect" draw:enhanced-path="M 0 0 L ?f3 0 ?f3 ?f2 0 ?f2 Z N">
+          <draw:enhanced-geometry draw:mirror-horizontal="false" draw:mirror-vertical="false" svg:viewBox="0 0 0 0" draw:glue-points="?f0 0 0 ?f1 ?f0 ?f2 ?f3 ?f1" draw:text-areas="0 0 ?f3 ?f2" draw:type="ooxml-rect" draw:enhanced-path="M 0 0 L ?f3 0 ?f3 ?f2 0 ?f2 Z N">
             <draw:equation draw:name="f0" draw:formula="logwidth/2"/>
             <draw:equation draw:name="f1" draw:formula="logheight/2"/>
             <draw:equation draw:name="f2" draw:formula="logheight"/>
@@ -8503,7 +8443,7 @@
           <text:p text:style-name="P2">
             <text:span text:style-name="T33">What will happen?</text:span>
           </text:p>
-          <draw:enhanced-geometry draw:mirror-horizontal="false" draw:mirror-vertical="false" draw:glue-points="?f0 0 0 ?f1 ?f0 ?f2 ?f3 ?f1" draw:text-areas="0 0 ?f3 ?f2" svg:viewBox="0 0 0 0" draw:type="ooxml-rect" draw:enhanced-path="M 0 0 L ?f3 0 ?f3 ?f2 0 ?f2 Z N">
+          <draw:enhanced-geometry draw:mirror-horizontal="false" draw:mirror-vertical="false" svg:viewBox="0 0 0 0" draw:glue-points="?f0 0 0 ?f1 ?f0 ?f2 ?f3 ?f1" draw:text-areas="0 0 ?f3 ?f2" draw:type="ooxml-rect" draw:enhanced-path="M 0 0 L ?f3 0 ?f3 ?f2 0 ?f2 Z N">
             <draw:equation draw:name="f0" draw:formula="logwidth/2"/>
             <draw:equation draw:name="f1" draw:formula="logheight/2"/>
             <draw:equation draw:name="f2" draw:formula="logheight"/>
@@ -8514,7 +8454,7 @@
           <text:p text:style-name="P2">
             <text:span text:style-name="T9">Death Is Predictable, Readmission Is Not</text:span>
           </text:p>
-          <draw:enhanced-geometry draw:mirror-horizontal="false" draw:mirror-vertical="false" draw:glue-points="?f0 0 0 ?f1 ?f0 ?f2 ?f3 ?f1" draw:text-areas="0 0 ?f3 ?f2" svg:viewBox="0 0 0 0" draw:type="ooxml-rect" draw:enhanced-path="M 0 0 L ?f3 0 ?f3 ?f2 0 ?f2 Z N">
+          <draw:enhanced-geometry draw:mirror-horizontal="false" draw:mirror-vertical="false" svg:viewBox="0 0 0 0" draw:glue-points="?f0 0 0 ?f1 ?f0 ?f2 ?f3 ?f1" draw:text-areas="0 0 ?f3 ?f2" draw:type="ooxml-rect" draw:enhanced-path="M 0 0 L ?f3 0 ?f3 ?f2 0 ?f2 Z N">
             <draw:equation draw:name="f0" draw:formula="logwidth/2"/>
             <draw:equation draw:name="f1" draw:formula="logheight/2"/>
             <draw:equation draw:name="f2" draw:formula="logheight"/>
@@ -8523,18 +8463,18 @@
         </draw:custom-shape>
         <draw:custom-shape draw:name="Text 4" draw:style-name="gr144" draw:text-style-name="P3" draw:layer="layout" svg:width="22.857cm" svg:height="0.657cm" svg:x="1.27cm" svg:y="2.692cm">
           <text:p text:style-name="P2">
-            <text:span text:style-name="T21">Dashboard charts: Model leaderboard (ROC-AUC) · Observed rate by risk decile (28-day death)</text:span>
-          </text:p>
-          <draw:enhanced-geometry draw:mirror-horizontal="false" draw:mirror-vertical="false" draw:glue-points="?f0 0 0 ?f1 ?f0 ?f2 ?f3 ?f1" draw:text-areas="0 0 ?f3 ?f2" svg:viewBox="0 0 0 0" draw:type="ooxml-rect" draw:enhanced-path="M 0 0 L ?f3 0 ?f3 ?f2 0 ?f2 Z N">
-            <draw:equation draw:name="f0" draw:formula="logwidth/2"/>
-            <draw:equation draw:name="f1" draw:formula="logheight/2"/>
-            <draw:equation draw:name="f2" draw:formula="logheight"/>
-            <draw:equation draw:name="f3" draw:formula="logwidth"/>
-          </draw:enhanced-geometry>
-        </draw:custom-shape>
-        <draw:custom-shape draw:name="Shape 5" draw:style-name="gr16" draw:text-style-name="P16" draw:layer="layout" svg:width="2.283cm" svg:height="0.505cm" svg:x="14.224cm" svg:y="13.411cm">
-          <text:p/>
-          <draw:enhanced-geometry draw:mirror-horizontal="false" draw:mirror-vertical="false" draw:glue-points="?f8 0 0 ?f9 ?f8 ?f10 ?f11 ?f9" draw:text-areas="?f5 ?f5 ?f6 ?f7" svg:viewBox="0 0 0 0" draw:type="ooxml-roundRect" draw:modifiers="50000" draw:enhanced-path="M 0 ?f2 L ?f3 0 L ?f11 ?f4 L ?f2 ?f10 Z N" drawooo:enhanced-path="M 0 ?f2 G ?f2 ?f2 ?f12 ?f13 L ?f3 0 G ?f2 ?f2 ?f14 ?f15 L ?f11 ?f4 G ?f2 ?f2 ?f16 ?f17 L ?f2 ?f10 G ?f2 ?f2 ?f18 ?f19 Z N">
+            <text:span text:style-name="T21"/>
+          </text:p>
+          <draw:enhanced-geometry draw:mirror-horizontal="false" draw:mirror-vertical="false" svg:viewBox="0 0 0 0" draw:glue-points="?f0 0 0 ?f1 ?f0 ?f2 ?f3 ?f1" draw:text-areas="0 0 ?f3 ?f2" draw:type="ooxml-rect" draw:enhanced-path="M 0 0 L ?f3 0 ?f3 ?f2 0 ?f2 Z N">
+            <draw:equation draw:name="f0" draw:formula="logwidth/2"/>
+            <draw:equation draw:name="f1" draw:formula="logheight/2"/>
+            <draw:equation draw:name="f2" draw:formula="logheight"/>
+            <draw:equation draw:name="f3" draw:formula="logwidth"/>
+          </draw:enhanced-geometry>
+        </draw:custom-shape>
+        <draw:custom-shape draw:name="Shape 5" draw:style-name="gr16" draw:text-style-name="P18" draw:layer="layout" svg:width="2.283cm" svg:height="0.505cm" svg:x="14.224cm" svg:y="13.411cm">
+          <text:p/>
+          <draw:enhanced-geometry draw:mirror-horizontal="false" draw:mirror-vertical="false" svg:viewBox="0 0 0 0" draw:glue-points="?f8 0 0 ?f9 ?f8 ?f10 ?f11 ?f9" draw:text-areas="?f5 ?f5 ?f6 ?f7" draw:type="ooxml-roundRect" draw:modifiers="50000" draw:enhanced-path="M 0 ?f2 L ?f3 0 L ?f11 ?f4 L ?f2 ?f10 Z N" drawooo:enhanced-path="M 0 ?f2 G ?f2 ?f2 ?f12 ?f13 L ?f3 0 G ?f2 ?f2 ?f14 ?f15 L ?f11 ?f4 G ?f2 ?f2 ?f16 ?f17 L ?f2 ?f10 G ?f2 ?f2 ?f18 ?f19 Z N">
             <draw:equation draw:name="f0" draw:formula="if(0-$0 ,0,if(50000-$0 ,$0 ,50000))"/>
             <draw:equation draw:name="f1" draw:formula="min(logwidth,logheight)"/>
             <draw:equation draw:name="f2" draw:formula="?f1 *?f0 /100000"/>
@@ -8555,23 +8495,23 @@
             <draw:equation draw:name="f17" draw:formula="(5400000)/60000.0"/>
             <draw:equation draw:name="f18" draw:formula="(5400000)/60000.0"/>
             <draw:equation draw:name="f19" draw:formula="(5400000)/60000.0"/>
-            <draw:handle draw:handle-position="?f2 0" draw:handle-position-x="?f2" draw:handle-position-y="0" draw:handle-range-x-maximum="50000" draw:handle-range-x-minimum="0"/>
-          </draw:enhanced-geometry>
-        </draw:custom-shape>
-        <draw:custom-shape draw:name="Text 6" draw:style-name="gr145" draw:text-style-name="P14" draw:layer="layout" svg:width="2.283cm" svg:height="0.505cm" svg:x="14.224cm" svg:y="13.411cm">
-          <text:p text:style-name="P13">
+            <draw:handle draw:handle-range-x-maximum="50000" draw:handle-range-x-minimum="0" draw:handle-position="?f2 0" draw:handle-position-x="?f2" draw:handle-position-y="0"/>
+          </draw:enhanced-geometry>
+        </draw:custom-shape>
+        <draw:custom-shape draw:name="Text 6" draw:style-name="gr145" draw:text-style-name="P16" draw:layer="layout" svg:width="2.283cm" svg:height="0.505cm" svg:x="14.224cm" svg:y="13.411cm">
+          <text:p text:style-name="P15">
             <text:span text:style-name="T11">KPIs</text:span>
           </text:p>
-          <draw:enhanced-geometry draw:mirror-horizontal="false" draw:mirror-vertical="false" draw:glue-points="?f0 0 0 ?f1 ?f0 ?f2 ?f3 ?f1" draw:text-areas="0 0 ?f3 ?f2" svg:viewBox="0 0 0 0" draw:type="ooxml-rect" draw:enhanced-path="M 0 0 L ?f3 0 ?f3 ?f2 0 ?f2 Z N">
-            <draw:equation draw:name="f0" draw:formula="logwidth/2"/>
-            <draw:equation draw:name="f1" draw:formula="logheight/2"/>
-            <draw:equation draw:name="f2" draw:formula="logheight"/>
-            <draw:equation draw:name="f3" draw:formula="logwidth"/>
-          </draw:enhanced-geometry>
-        </draw:custom-shape>
-        <draw:custom-shape draw:name="Shape 7" draw:style-name="gr16" draw:text-style-name="P16" draw:layer="layout" svg:width="2.283cm" svg:height="0.505cm" svg:x="16.739cm" svg:y="13.411cm">
-          <text:p/>
-          <draw:enhanced-geometry draw:mirror-horizontal="false" draw:mirror-vertical="false" draw:glue-points="?f8 0 0 ?f9 ?f8 ?f10 ?f11 ?f9" draw:text-areas="?f5 ?f5 ?f6 ?f7" svg:viewBox="0 0 0 0" draw:type="ooxml-roundRect" draw:modifiers="50000" draw:enhanced-path="M 0 ?f2 L ?f3 0 L ?f11 ?f4 L ?f2 ?f10 Z N" drawooo:enhanced-path="M 0 ?f2 G ?f2 ?f2 ?f12 ?f13 L ?f3 0 G ?f2 ?f2 ?f14 ?f15 L ?f11 ?f4 G ?f2 ?f2 ?f16 ?f17 L ?f2 ?f10 G ?f2 ?f2 ?f18 ?f19 Z N">
+          <draw:enhanced-geometry draw:mirror-horizontal="false" draw:mirror-vertical="false" svg:viewBox="0 0 0 0" draw:glue-points="?f0 0 0 ?f1 ?f0 ?f2 ?f3 ?f1" draw:text-areas="0 0 ?f3 ?f2" draw:type="ooxml-rect" draw:enhanced-path="M 0 0 L ?f3 0 ?f3 ?f2 0 ?f2 Z N">
+            <draw:equation draw:name="f0" draw:formula="logwidth/2"/>
+            <draw:equation draw:name="f1" draw:formula="logheight/2"/>
+            <draw:equation draw:name="f2" draw:formula="logheight"/>
+            <draw:equation draw:name="f3" draw:formula="logwidth"/>
+          </draw:enhanced-geometry>
+        </draw:custom-shape>
+        <draw:custom-shape draw:name="Shape 7" draw:style-name="gr16" draw:text-style-name="P18" draw:layer="layout" svg:width="2.283cm" svg:height="0.505cm" svg:x="16.739cm" svg:y="13.411cm">
+          <text:p/>
+          <draw:enhanced-geometry draw:mirror-horizontal="false" draw:mirror-vertical="false" svg:viewBox="0 0 0 0" draw:glue-points="?f8 0 0 ?f9 ?f8 ?f10 ?f11 ?f9" draw:text-areas="?f5 ?f5 ?f6 ?f7" draw:type="ooxml-roundRect" draw:modifiers="50000" draw:enhanced-path="M 0 ?f2 L ?f3 0 L ?f11 ?f4 L ?f2 ?f10 Z N" drawooo:enhanced-path="M 0 ?f2 G ?f2 ?f2 ?f12 ?f13 L ?f3 0 G ?f2 ?f2 ?f14 ?f15 L ?f11 ?f4 G ?f2 ?f2 ?f16 ?f17 L ?f2 ?f10 G ?f2 ?f2 ?f18 ?f19 Z N">
             <draw:equation draw:name="f0" draw:formula="if(0-$0 ,0,if(50000-$0 ,$0 ,50000))"/>
             <draw:equation draw:name="f1" draw:formula="min(logwidth,logheight)"/>
             <draw:equation draw:name="f2" draw:formula="?f1 *?f0 /100000"/>
@@ -8592,23 +8532,23 @@
             <draw:equation draw:name="f17" draw:formula="(5400000)/60000.0"/>
             <draw:equation draw:name="f18" draw:formula="(5400000)/60000.0"/>
             <draw:equation draw:name="f19" draw:formula="(5400000)/60000.0"/>
-            <draw:handle draw:handle-position="?f2 0" draw:handle-position-x="?f2" draw:handle-position-y="0" draw:handle-range-x-maximum="50000" draw:handle-range-x-minimum="0"/>
-          </draw:enhanced-geometry>
-        </draw:custom-shape>
-        <draw:custom-shape draw:name="Text 8" draw:style-name="gr146" draw:text-style-name="P14" draw:layer="layout" svg:width="2.283cm" svg:height="0.505cm" svg:x="16.739cm" svg:y="13.411cm">
-          <text:p text:style-name="P13">
+            <draw:handle draw:handle-range-x-maximum="50000" draw:handle-range-x-minimum="0" draw:handle-position="?f2 0" draw:handle-position-x="?f2" draw:handle-position-y="0"/>
+          </draw:enhanced-geometry>
+        </draw:custom-shape>
+        <draw:custom-shape draw:name="Text 8" draw:style-name="gr146" draw:text-style-name="P16" draw:layer="layout" svg:width="2.283cm" svg:height="0.505cm" svg:x="16.739cm" svg:y="13.411cm">
+          <text:p text:style-name="P15">
             <text:span text:style-name="T11">Descriptive</text:span>
           </text:p>
-          <draw:enhanced-geometry draw:mirror-horizontal="false" draw:mirror-vertical="false" draw:glue-points="?f0 0 0 ?f1 ?f0 ?f2 ?f3 ?f1" draw:text-areas="0 0 ?f3 ?f2" svg:viewBox="0 0 0 0" draw:type="ooxml-rect" draw:enhanced-path="M 0 0 L ?f3 0 ?f3 ?f2 0 ?f2 Z N">
-            <draw:equation draw:name="f0" draw:formula="logwidth/2"/>
-            <draw:equation draw:name="f1" draw:formula="logheight/2"/>
-            <draw:equation draw:name="f2" draw:formula="logheight"/>
-            <draw:equation draw:name="f3" draw:formula="logwidth"/>
-          </draw:enhanced-geometry>
-        </draw:custom-shape>
-        <draw:custom-shape draw:name="Shape 9" draw:style-name="gr16" draw:text-style-name="P16" draw:layer="layout" svg:width="2.283cm" svg:height="0.505cm" svg:x="19.253cm" svg:y="13.411cm">
-          <text:p/>
-          <draw:enhanced-geometry draw:mirror-horizontal="false" draw:mirror-vertical="false" draw:glue-points="?f8 0 0 ?f9 ?f8 ?f10 ?f11 ?f9" draw:text-areas="?f5 ?f5 ?f6 ?f7" svg:viewBox="0 0 0 0" draw:type="ooxml-roundRect" draw:modifiers="50000" draw:enhanced-path="M 0 ?f2 L ?f3 0 L ?f11 ?f4 L ?f2 ?f10 Z N" drawooo:enhanced-path="M 0 ?f2 G ?f2 ?f2 ?f12 ?f13 L ?f3 0 G ?f2 ?f2 ?f14 ?f15 L ?f11 ?f4 G ?f2 ?f2 ?f16 ?f17 L ?f2 ?f10 G ?f2 ?f2 ?f18 ?f19 Z N">
+          <draw:enhanced-geometry draw:mirror-horizontal="false" draw:mirror-vertical="false" svg:viewBox="0 0 0 0" draw:glue-points="?f0 0 0 ?f1 ?f0 ?f2 ?f3 ?f1" draw:text-areas="0 0 ?f3 ?f2" draw:type="ooxml-rect" draw:enhanced-path="M 0 0 L ?f3 0 ?f3 ?f2 0 ?f2 Z N">
+            <draw:equation draw:name="f0" draw:formula="logwidth/2"/>
+            <draw:equation draw:name="f1" draw:formula="logheight/2"/>
+            <draw:equation draw:name="f2" draw:formula="logheight"/>
+            <draw:equation draw:name="f3" draw:formula="logwidth"/>
+          </draw:enhanced-geometry>
+        </draw:custom-shape>
+        <draw:custom-shape draw:name="Shape 9" draw:style-name="gr16" draw:text-style-name="P18" draw:layer="layout" svg:width="2.283cm" svg:height="0.505cm" svg:x="19.253cm" svg:y="13.411cm">
+          <text:p/>
+          <draw:enhanced-geometry draw:mirror-horizontal="false" draw:mirror-vertical="false" svg:viewBox="0 0 0 0" draw:glue-points="?f8 0 0 ?f9 ?f8 ?f10 ?f11 ?f9" draw:text-areas="?f5 ?f5 ?f6 ?f7" draw:type="ooxml-roundRect" draw:modifiers="50000" draw:enhanced-path="M 0 ?f2 L ?f3 0 L ?f11 ?f4 L ?f2 ?f10 Z N" drawooo:enhanced-path="M 0 ?f2 G ?f2 ?f2 ?f12 ?f13 L ?f3 0 G ?f2 ?f2 ?f14 ?f15 L ?f11 ?f4 G ?f2 ?f2 ?f16 ?f17 L ?f2 ?f10 G ?f2 ?f2 ?f18 ?f19 Z N">
             <draw:equation draw:name="f0" draw:formula="if(0-$0 ,0,if(50000-$0 ,$0 ,50000))"/>
             <draw:equation draw:name="f1" draw:formula="min(logwidth,logheight)"/>
             <draw:equation draw:name="f2" draw:formula="?f1 *?f0 /100000"/>
@@ -8629,23 +8569,23 @@
             <draw:equation draw:name="f17" draw:formula="(5400000)/60000.0"/>
             <draw:equation draw:name="f18" draw:formula="(5400000)/60000.0"/>
             <draw:equation draw:name="f19" draw:formula="(5400000)/60000.0"/>
-            <draw:handle draw:handle-position="?f2 0" draw:handle-position-x="?f2" draw:handle-position-y="0" draw:handle-range-x-maximum="50000" draw:handle-range-x-minimum="0"/>
-          </draw:enhanced-geometry>
-        </draw:custom-shape>
-        <draw:custom-shape draw:name="Text 10" draw:style-name="gr147" draw:text-style-name="P14" draw:layer="layout" svg:width="2.283cm" svg:height="0.505cm" svg:x="19.253cm" svg:y="13.411cm">
-          <text:p text:style-name="P13">
+            <draw:handle draw:handle-range-x-maximum="50000" draw:handle-range-x-minimum="0" draw:handle-position="?f2 0" draw:handle-position-x="?f2" draw:handle-position-y="0"/>
+          </draw:enhanced-geometry>
+        </draw:custom-shape>
+        <draw:custom-shape draw:name="Text 10" draw:style-name="gr147" draw:text-style-name="P16" draw:layer="layout" svg:width="2.283cm" svg:height="0.505cm" svg:x="19.253cm" svg:y="13.411cm">
+          <text:p text:style-name="P15">
             <text:span text:style-name="T11">Prescriptive</text:span>
           </text:p>
-          <draw:enhanced-geometry draw:mirror-horizontal="false" draw:mirror-vertical="false" draw:glue-points="?f0 0 0 ?f1 ?f0 ?f2 ?f3 ?f1" draw:text-areas="0 0 ?f3 ?f2" svg:viewBox="0 0 0 0" draw:type="ooxml-rect" draw:enhanced-path="M 0 0 L ?f3 0 ?f3 ?f2 0 ?f2 Z N">
-            <draw:equation draw:name="f0" draw:formula="logwidth/2"/>
-            <draw:equation draw:name="f1" draw:formula="logheight/2"/>
-            <draw:equation draw:name="f2" draw:formula="logheight"/>
-            <draw:equation draw:name="f3" draw:formula="logwidth"/>
-          </draw:enhanced-geometry>
-        </draw:custom-shape>
-        <draw:custom-shape draw:name="Shape 11" draw:style-name="gr148" draw:text-style-name="P20" draw:layer="layout" svg:width="2.283cm" svg:height="0.505cm" svg:x="21.768cm" svg:y="13.411cm">
-          <text:p/>
-          <draw:enhanced-geometry draw:mirror-horizontal="false" draw:mirror-vertical="false" draw:glue-points="?f8 0 0 ?f9 ?f8 ?f10 ?f11 ?f9" draw:text-areas="?f5 ?f5 ?f6 ?f7" svg:viewBox="0 0 0 0" draw:type="ooxml-roundRect" draw:modifiers="50000" draw:enhanced-path="M 0 ?f2 L ?f3 0 L ?f11 ?f4 L ?f2 ?f10 Z N" drawooo:enhanced-path="M 0 ?f2 G ?f2 ?f2 ?f12 ?f13 L ?f3 0 G ?f2 ?f2 ?f14 ?f15 L ?f11 ?f4 G ?f2 ?f2 ?f16 ?f17 L ?f2 ?f10 G ?f2 ?f2 ?f18 ?f19 Z N">
+          <draw:enhanced-geometry draw:mirror-horizontal="false" draw:mirror-vertical="false" svg:viewBox="0 0 0 0" draw:glue-points="?f0 0 0 ?f1 ?f0 ?f2 ?f3 ?f1" draw:text-areas="0 0 ?f3 ?f2" draw:type="ooxml-rect" draw:enhanced-path="M 0 0 L ?f3 0 ?f3 ?f2 0 ?f2 Z N">
+            <draw:equation draw:name="f0" draw:formula="logwidth/2"/>
+            <draw:equation draw:name="f1" draw:formula="logheight/2"/>
+            <draw:equation draw:name="f2" draw:formula="logheight"/>
+            <draw:equation draw:name="f3" draw:formula="logwidth"/>
+          </draw:enhanced-geometry>
+        </draw:custom-shape>
+        <draw:custom-shape draw:name="Shape 11" draw:style-name="gr148" draw:text-style-name="P22" draw:layer="layout" svg:width="2.283cm" svg:height="0.505cm" svg:x="21.768cm" svg:y="13.411cm">
+          <text:p/>
+          <draw:enhanced-geometry draw:mirror-horizontal="false" draw:mirror-vertical="false" svg:viewBox="0 0 0 0" draw:glue-points="?f8 0 0 ?f9 ?f8 ?f10 ?f11 ?f9" draw:text-areas="?f5 ?f5 ?f6 ?f7" draw:type="ooxml-roundRect" draw:modifiers="50000" draw:enhanced-path="M 0 ?f2 L ?f3 0 L ?f11 ?f4 L ?f2 ?f10 Z N" drawooo:enhanced-path="M 0 ?f2 G ?f2 ?f2 ?f12 ?f13 L ?f3 0 G ?f2 ?f2 ?f14 ?f15 L ?f11 ?f4 G ?f2 ?f2 ?f16 ?f17 L ?f2 ?f10 G ?f2 ?f2 ?f18 ?f19 Z N">
             <draw:equation draw:name="f0" draw:formula="if(0-$0 ,0,if(50000-$0 ,$0 ,50000))"/>
             <draw:equation draw:name="f1" draw:formula="min(logwidth,logheight)"/>
             <draw:equation draw:name="f2" draw:formula="?f1 *?f0 /100000"/>
@@ -8666,35 +8606,35 @@
             <draw:equation draw:name="f17" draw:formula="(5400000)/60000.0"/>
             <draw:equation draw:name="f18" draw:formula="(5400000)/60000.0"/>
             <draw:equation draw:name="f19" draw:formula="(5400000)/60000.0"/>
-            <draw:handle draw:handle-position="?f2 0" draw:handle-position-x="?f2" draw:handle-position-y="0" draw:handle-range-x-maximum="50000" draw:handle-range-x-minimum="0"/>
-          </draw:enhanced-geometry>
-        </draw:custom-shape>
-        <draw:custom-shape draw:name="Text 12" draw:style-name="gr149" draw:text-style-name="P14" draw:layer="layout" svg:width="2.283cm" svg:height="0.505cm" svg:x="21.768cm" svg:y="13.411cm">
-          <text:p text:style-name="P13">
+            <draw:handle draw:handle-range-x-maximum="50000" draw:handle-range-x-minimum="0" draw:handle-position="?f2 0" draw:handle-position-x="?f2" draw:handle-position-y="0"/>
+          </draw:enhanced-geometry>
+        </draw:custom-shape>
+        <draw:custom-shape draw:name="Text 12" draw:style-name="gr149" draw:text-style-name="P16" draw:layer="layout" svg:width="2.283cm" svg:height="0.505cm" svg:x="21.768cm" svg:y="13.411cm">
+          <text:p text:style-name="P15">
             <text:span text:style-name="T10">Predictive</text:span>
           </text:p>
-          <draw:enhanced-geometry draw:mirror-horizontal="false" draw:mirror-vertical="false" draw:glue-points="?f0 0 0 ?f1 ?f0 ?f2 ?f3 ?f1" draw:text-areas="0 0 ?f3 ?f2" svg:viewBox="0 0 0 0" draw:type="ooxml-rect" draw:enhanced-path="M 0 0 L ?f3 0 ?f3 ?f2 0 ?f2 Z N">
-            <draw:equation draw:name="f0" draw:formula="logwidth/2"/>
-            <draw:equation draw:name="f1" draw:formula="logheight/2"/>
-            <draw:equation draw:name="f2" draw:formula="logheight"/>
-            <draw:equation draw:name="f3" draw:formula="logwidth"/>
-          </draw:enhanced-geometry>
-        </draw:custom-shape>
-        <draw:frame draw:name="Chart 0" draw:style-name="gr69" draw:text-style-name="P6" draw:layer="layout" svg:width="11.681cm" svg:height="6.474cm" svg:x="1.016cm" svg:y="3.505cm">
+          <draw:enhanced-geometry draw:mirror-horizontal="false" draw:mirror-vertical="false" svg:viewBox="0 0 0 0" draw:glue-points="?f0 0 0 ?f1 ?f0 ?f2 ?f3 ?f1" draw:text-areas="0 0 ?f3 ?f2" draw:type="ooxml-rect" draw:enhanced-path="M 0 0 L ?f3 0 ?f3 ?f2 0 ?f2 Z N">
+            <draw:equation draw:name="f0" draw:formula="logwidth/2"/>
+            <draw:equation draw:name="f1" draw:formula="logheight/2"/>
+            <draw:equation draw:name="f2" draw:formula="logheight"/>
+            <draw:equation draw:name="f3" draw:formula="logwidth"/>
+          </draw:enhanced-geometry>
+        </draw:custom-shape>
+        <draw:frame draw:name="Chart 0" draw:style-name="gr69" draw:text-style-name="P8" draw:layer="layout" svg:width="11.681cm" svg:height="6.474cm" svg:x="1.016cm" svg:y="3.505cm">
           <draw:object xlink:href="./Object 11" xlink:type="simple" xlink:show="embed" xlink:actuate="onLoad">
             <loext:p/>
           </draw:object>
           <draw:image xlink:href="./ObjectReplacements/Object 11" xlink:type="simple" xlink:show="embed" xlink:actuate="onLoad"/>
         </draw:frame>
-        <draw:frame draw:name="Chart 1" draw:style-name="gr69" draw:text-style-name="P6" draw:layer="layout" svg:width="11.427cm" svg:height="6.474cm" svg:x="12.954cm" svg:y="3.505cm">
+        <draw:frame draw:name="Chart 1" draw:style-name="gr69" draw:text-style-name="P8" draw:layer="layout" svg:width="11.427cm" svg:height="6.474cm" svg:x="12.954cm" svg:y="3.505cm">
           <draw:object xlink:href="./Object 12" xlink:type="simple" xlink:show="embed" xlink:actuate="onLoad">
             <loext:p/>
           </draw:object>
           <draw:image xlink:href="./ObjectReplacements/Object 12" xlink:type="simple" xlink:show="embed" xlink:actuate="onLoad"/>
         </draw:frame>
-        <draw:custom-shape draw:name="Shape 13" draw:style-name="gr20" draw:text-style-name="P16" draw:layer="layout" svg:width="11.173cm" svg:height="2.842cm" svg:x="1.27cm" svg:y="10.211cm">
-          <text:p/>
-          <draw:enhanced-geometry draw:mirror-horizontal="false" draw:mirror-vertical="false" draw:glue-points="?f8 0 0 ?f9 ?f8 ?f10 ?f11 ?f9" draw:text-areas="?f5 ?f5 ?f6 ?f7" svg:viewBox="0 0 0 0" draw:type="ooxml-roundRect" draw:modifiers="7143" draw:enhanced-path="M 0 ?f2 L ?f3 0 L ?f11 ?f4 L ?f2 ?f10 Z N" drawooo:enhanced-path="M 0 ?f2 G ?f2 ?f2 ?f12 ?f13 L ?f3 0 G ?f2 ?f2 ?f14 ?f15 L ?f11 ?f4 G ?f2 ?f2 ?f16 ?f17 L ?f2 ?f10 G ?f2 ?f2 ?f18 ?f19 Z N">
+        <draw:custom-shape draw:name="Shape 13" draw:style-name="gr20" draw:text-style-name="P18" draw:layer="layout" svg:width="11.173cm" svg:height="2.842cm" svg:x="1.27cm" svg:y="10.211cm">
+          <text:p/>
+          <draw:enhanced-geometry draw:mirror-horizontal="false" draw:mirror-vertical="false" svg:viewBox="0 0 0 0" draw:glue-points="?f8 0 0 ?f9 ?f8 ?f10 ?f11 ?f9" draw:text-areas="?f5 ?f5 ?f6 ?f7" draw:type="ooxml-roundRect" draw:modifiers="7143" draw:enhanced-path="M 0 ?f2 L ?f3 0 L ?f11 ?f4 L ?f2 ?f10 Z N" drawooo:enhanced-path="M 0 ?f2 G ?f2 ?f2 ?f12 ?f13 L ?f3 0 G ?f2 ?f2 ?f14 ?f15 L ?f11 ?f4 G ?f2 ?f2 ?f16 ?f17 L ?f2 ?f10 G ?f2 ?f2 ?f18 ?f19 Z N">
             <draw:equation draw:name="f0" draw:formula="if(0-$0 ,0,if(50000-$0 ,$0 ,50000))"/>
             <draw:equation draw:name="f1" draw:formula="min(logwidth,logheight)"/>
             <draw:equation draw:name="f2" draw:formula="?f1 *?f0 /100000"/>
@@ -8715,34 +8655,34 @@
             <draw:equation draw:name="f17" draw:formula="(5400000)/60000.0"/>
             <draw:equation draw:name="f18" draw:formula="(5400000)/60000.0"/>
             <draw:equation draw:name="f19" draw:formula="(5400000)/60000.0"/>
-            <draw:handle draw:handle-position="?f2 0" draw:handle-position-x="?f2" draw:handle-position-y="0" draw:handle-range-x-maximum="50000" draw:handle-range-x-minimum="0"/>
-          </draw:enhanced-geometry>
-        </draw:custom-shape>
-        <draw:custom-shape draw:name="Text 14" draw:style-name="gr150" draw:text-style-name="P29" draw:layer="layout" svg:width="10.411cm" svg:height="2.435cm" svg:x="1.651cm" svg:y="10.414cm">
-          <text:p text:style-name="P28">
+            <draw:handle draw:handle-range-x-maximum="50000" draw:handle-range-x-minimum="0" draw:handle-position="?f2 0" draw:handle-position-x="?f2" draw:handle-position-y="0"/>
+          </draw:enhanced-geometry>
+        </draw:custom-shape>
+        <draw:custom-shape draw:name="Text 14" draw:style-name="gr150" draw:text-style-name="P31" draw:layer="layout" svg:width="10.411cm" svg:height="2.435cm" svg:x="1.651cm" svg:y="10.414cm">
+          <text:p text:style-name="P30">
             <text:span text:style-name="T34">
               FINDING 
               <text:s/>
             </text:span>
             <text:span text:style-name="T23">Mortality models score 0.75–0.90 from admission data alone (best: 0.90 at 28 days). Readmission stays at 0.66.</text:span>
           </text:p>
-          <text:p text:style-name="P28">
+          <text:p text:style-name="P30">
             <text:span text:style-name="T34">
               WHY 
               <text:s/>
             </text:span>
             <text:span text:style-name="T23">Readmission depends on what happens after discharge, which this dataset does not record.</text:span>
           </text:p>
-          <draw:enhanced-geometry draw:mirror-horizontal="false" draw:mirror-vertical="false" draw:glue-points="?f0 0 0 ?f1 ?f0 ?f2 ?f3 ?f1" draw:text-areas="0 0 ?f3 ?f2" svg:viewBox="0 0 0 0" draw:type="ooxml-rect" draw:enhanced-path="M 0 0 L ?f3 0 ?f3 ?f2 0 ?f2 Z N">
-            <draw:equation draw:name="f0" draw:formula="logwidth/2"/>
-            <draw:equation draw:name="f1" draw:formula="logheight/2"/>
-            <draw:equation draw:name="f2" draw:formula="logheight"/>
-            <draw:equation draw:name="f3" draw:formula="logwidth"/>
-          </draw:enhanced-geometry>
-        </draw:custom-shape>
-        <draw:custom-shape draw:name="Shape 15" draw:style-name="gr20" draw:text-style-name="P16" draw:layer="layout" svg:width="11.173cm" svg:height="2.842cm" svg:x="12.954cm" svg:y="10.211cm">
-          <text:p/>
-          <draw:enhanced-geometry draw:mirror-horizontal="false" draw:mirror-vertical="false" draw:glue-points="?f8 0 0 ?f9 ?f8 ?f10 ?f11 ?f9" draw:text-areas="?f5 ?f5 ?f6 ?f7" svg:viewBox="0 0 0 0" draw:type="ooxml-roundRect" draw:modifiers="7143" draw:enhanced-path="M 0 ?f2 L ?f3 0 L ?f11 ?f4 L ?f2 ?f10 Z N" drawooo:enhanced-path="M 0 ?f2 G ?f2 ?f2 ?f12 ?f13 L ?f3 0 G ?f2 ?f2 ?f14 ?f15 L ?f11 ?f4 G ?f2 ?f2 ?f16 ?f17 L ?f2 ?f10 G ?f2 ?f2 ?f18 ?f19 Z N">
+          <draw:enhanced-geometry draw:mirror-horizontal="false" draw:mirror-vertical="false" svg:viewBox="0 0 0 0" draw:glue-points="?f0 0 0 ?f1 ?f0 ?f2 ?f3 ?f1" draw:text-areas="0 0 ?f3 ?f2" draw:type="ooxml-rect" draw:enhanced-path="M 0 0 L ?f3 0 ?f3 ?f2 0 ?f2 Z N">
+            <draw:equation draw:name="f0" draw:formula="logwidth/2"/>
+            <draw:equation draw:name="f1" draw:formula="logheight/2"/>
+            <draw:equation draw:name="f2" draw:formula="logheight"/>
+            <draw:equation draw:name="f3" draw:formula="logwidth"/>
+          </draw:enhanced-geometry>
+        </draw:custom-shape>
+        <draw:custom-shape draw:name="Shape 15" draw:style-name="gr20" draw:text-style-name="P18" draw:layer="layout" svg:width="11.173cm" svg:height="2.842cm" svg:x="12.954cm" svg:y="10.211cm">
+          <text:p/>
+          <draw:enhanced-geometry draw:mirror-horizontal="false" draw:mirror-vertical="false" svg:viewBox="0 0 0 0" draw:glue-points="?f8 0 0 ?f9 ?f8 ?f10 ?f11 ?f9" draw:text-areas="?f5 ?f5 ?f6 ?f7" draw:type="ooxml-roundRect" draw:modifiers="7143" draw:enhanced-path="M 0 ?f2 L ?f3 0 L ?f11 ?f4 L ?f2 ?f10 Z N" drawooo:enhanced-path="M 0 ?f2 G ?f2 ?f2 ?f12 ?f13 L ?f3 0 G ?f2 ?f2 ?f14 ?f15 L ?f11 ?f4 G ?f2 ?f2 ?f16 ?f17 L ?f2 ?f10 G ?f2 ?f2 ?f18 ?f19 Z N">
             <draw:equation draw:name="f0" draw:formula="if(0-$0 ,0,if(50000-$0 ,$0 ,50000))"/>
             <draw:equation draw:name="f1" draw:formula="min(logwidth,logheight)"/>
             <draw:equation draw:name="f2" draw:formula="?f1 *?f0 /100000"/>
@@ -8763,34 +8703,34 @@
             <draw:equation draw:name="f17" draw:formula="(5400000)/60000.0"/>
             <draw:equation draw:name="f18" draw:formula="(5400000)/60000.0"/>
             <draw:equation draw:name="f19" draw:formula="(5400000)/60000.0"/>
-            <draw:handle draw:handle-position="?f2 0" draw:handle-position-x="?f2" draw:handle-position-y="0" draw:handle-range-x-maximum="50000" draw:handle-range-x-minimum="0"/>
-          </draw:enhanced-geometry>
-        </draw:custom-shape>
-        <draw:custom-shape draw:name="Text 16" draw:style-name="gr151" draw:text-style-name="P29" draw:layer="layout" svg:width="10.411cm" svg:height="2.435cm" svg:x="13.335cm" svg:y="10.414cm">
-          <text:p text:style-name="P28">
+            <draw:handle draw:handle-range-x-maximum="50000" draw:handle-range-x-minimum="0" draw:handle-position="?f2 0" draw:handle-position-x="?f2" draw:handle-position-y="0"/>
+          </draw:enhanced-geometry>
+        </draw:custom-shape>
+        <draw:custom-shape draw:name="Text 16" draw:style-name="gr151" draw:text-style-name="P31" draw:layer="layout" svg:width="10.411cm" svg:height="2.435cm" svg:x="13.335cm" svg:y="10.414cm">
+          <text:p text:style-name="P30">
             <text:span text:style-name="T34">
               FINDING 
               <text:s/>
             </text:span>
             <text:span text:style-name="T23">12.4% of the top-risk decile die vs ≤ 3% elsewhere; flagging the top 10% catches 25 of 37 early deaths.</text:span>
           </text:p>
-          <text:p text:style-name="P28">
+          <text:p text:style-name="P30">
             <text:span text:style-name="T34">
               ACTION 
               <text:s/>
             </text:span>
             <text:span text:style-name="T23">Run the 28-day death-risk score on every admission; collect follow-up data for readmission.</text:span>
           </text:p>
-          <draw:enhanced-geometry draw:mirror-horizontal="false" draw:mirror-vertical="false" draw:glue-points="?f0 0 0 ?f1 ?f0 ?f2 ?f3 ?f1" draw:text-areas="0 0 ?f3 ?f2" svg:viewBox="0 0 0 0" draw:type="ooxml-rect" draw:enhanced-path="M 0 0 L ?f3 0 ?f3 ?f2 0 ?f2 Z N">
-            <draw:equation draw:name="f0" draw:formula="logwidth/2"/>
-            <draw:equation draw:name="f1" draw:formula="logheight/2"/>
-            <draw:equation draw:name="f2" draw:formula="logheight"/>
-            <draw:equation draw:name="f3" draw:formula="logwidth"/>
-          </draw:enhanced-geometry>
-        </draw:custom-shape>
-        <draw:custom-shape draw:name="Freeform 8" draw:style-name="gr152" draw:text-style-name="P36" draw:layer="layout" svg:width="1.347cm" svg:height="2.221cm" svg:x="23.971cm" svg:y="0.085cm">
-          <text:p/>
-          <draw:enhanced-geometry draw:mirror-horizontal="false" draw:mirror-vertical="false" drawooo:sub-view-size="647700 1066800" draw:text-areas="?f0 ?f2 ?f1 ?f3" svg:viewBox="0 0 0 0" draw:type="ooxml-non-primitive" draw:enhanced-path="M 0 0 L 647700 0 647700 1066800 0 1066800 0 0 Z N">
+          <draw:enhanced-geometry draw:mirror-horizontal="false" draw:mirror-vertical="false" svg:viewBox="0 0 0 0" draw:glue-points="?f0 0 0 ?f1 ?f0 ?f2 ?f3 ?f1" draw:text-areas="0 0 ?f3 ?f2" draw:type="ooxml-rect" draw:enhanced-path="M 0 0 L ?f3 0 ?f3 ?f2 0 ?f2 Z N">
+            <draw:equation draw:name="f0" draw:formula="logwidth/2"/>
+            <draw:equation draw:name="f1" draw:formula="logheight/2"/>
+            <draw:equation draw:name="f2" draw:formula="logheight"/>
+            <draw:equation draw:name="f3" draw:formula="logwidth"/>
+          </draw:enhanced-geometry>
+        </draw:custom-shape>
+        <draw:custom-shape draw:name="Freeform 8" draw:style-name="gr152" draw:text-style-name="P39" draw:layer="layout" svg:width="1.347cm" svg:height="2.221cm" svg:x="23.971cm" svg:y="0.085cm">
+          <text:p/>
+          <draw:enhanced-geometry draw:mirror-horizontal="false" draw:mirror-vertical="false" svg:viewBox="0 0 0 0" drawooo:sub-view-size="647700 1066800" draw:text-areas="?f0 ?f2 ?f1 ?f3" draw:type="ooxml-non-primitive" draw:enhanced-path="M 0 0 L 647700 0 647700 1066800 0 1066800 0 0 Z N">
             <draw:equation draw:name="f0" draw:formula="0*logwidth/485280"/>
             <draw:equation draw:name="f1" draw:formula="485640*logwidth/485280"/>
             <draw:equation draw:name="f2" draw:formula="0*logheight/799920"/>
@@ -8799,16 +8739,16 @@
         </draw:custom-shape>
         <presentation:notes draw:style-name="dp2">
           <draw:page-thumbnail draw:name="PlaceHolder 1" draw:style-name="gr10" draw:layer="layout" svg:width="15.237cm" svg:height="8.57cm" svg:x="1.905cm" svg:y="3.175cm" draw:page-number="9" presentation:class="page"/>
-          <draw:frame draw:name="PlaceHolder 2" presentation:style-name="pr1" draw:text-style-name="P9" draw:layer="layout" svg:width="15.237cm" svg:height="9.998cm" svg:x="1.905cm" svg:y="12.224cm" presentation:class="notes" presentation:user-transformed="true">
+          <draw:frame draw:name="PlaceHolder 2" presentation:style-name="pr1" draw:text-style-name="P11" draw:layer="layout" svg:width="15.237cm" svg:height="9.998cm" svg:x="1.905cm" svg:y="12.224cm" presentation:class="notes" presentation:user-transformed="true">
             <draw:text-box>
-              <text:p text:style-name="P8">
+              <text:p text:style-name="P10">
                 <text:span text:style-name="T6">Left: every model in the dashboard leaderboard, ranked by cross-validated ROC-AUC (0.5 = chance, 1 = perfect). Red = mortality, blue = treatment/phenotype, grey = readmission models, which stay below the 0.7 'acceptable' line. Right: from the interactive model explorer — patients sorted into 10 equal groups by predicted 28-day death risk. Almost all deaths fall in the highest-risk group, which is what a useful alert list needs. Main drivers are Killip class, severe HF, troponin, urea and consciousness.</text:span>
               </text:p>
             </draw:text-box>
           </draw:frame>
-          <draw:frame draw:name="PlaceHolder 3" presentation:style-name="pr2" draw:text-style-name="P11" draw:layer="layout" svg:width="8.252cm" svg:height="1.271cm" svg:x="10.791cm" svg:y="24.126cm" presentation:class="page-number" presentation:user-transformed="true">
+          <draw:frame draw:name="PlaceHolder 3" presentation:style-name="pr2" draw:text-style-name="P13" draw:layer="layout" svg:width="8.252cm" svg:height="1.271cm" svg:x="10.791cm" svg:y="24.126cm" presentation:class="page-number" presentation:user-transformed="true">
             <draw:text-box>
-              <text:p text:style-name="P10">
+              <text:p text:style-name="P12">
                 <text:span text:style-name="T7">
                   <text:page-number>&lt;number&gt;</text:page-number>
                 </text:span>
@@ -8822,16 +8762,16 @@
           <text:p text:style-name="P2">
             <text:span text:style-name="T35">Overall Dashboard Conclusion</text:span>
           </text:p>
-          <draw:enhanced-geometry draw:mirror-horizontal="false" draw:mirror-vertical="false" draw:glue-points="?f0 0 0 ?f1 ?f0 ?f2 ?f3 ?f1" draw:text-areas="0 0 ?f3 ?f2" svg:viewBox="0 0 0 0" draw:type="ooxml-rect" draw:enhanced-path="M 0 0 L ?f3 0 ?f3 ?f2 0 ?f2 Z N">
-            <draw:equation draw:name="f0" draw:formula="logwidth/2"/>
-            <draw:equation draw:name="f1" draw:formula="logheight/2"/>
-            <draw:equation draw:name="f2" draw:formula="logheight"/>
-            <draw:equation draw:name="f3" draw:formula="logwidth"/>
-          </draw:enhanced-geometry>
-        </draw:custom-shape>
-        <draw:custom-shape draw:name="Shape 1" draw:style-name="gr154" draw:text-style-name="P37" draw:layer="layout" svg:width="5.382cm" svg:height="6.474cm" svg:x="1.27cm" svg:y="3.394cm">
-          <text:p/>
-          <draw:enhanced-geometry draw:mirror-horizontal="false" draw:mirror-vertical="false" draw:glue-points="?f8 0 0 ?f9 ?f8 ?f10 ?f11 ?f9" draw:text-areas="?f5 ?f5 ?f6 ?f7" svg:viewBox="0 0 0 0" draw:type="ooxml-roundRect" draw:modifiers="4717" draw:enhanced-path="M 0 ?f2 L ?f3 0 L ?f11 ?f4 L ?f2 ?f10 Z N" drawooo:enhanced-path="M 0 ?f2 G ?f2 ?f2 ?f12 ?f13 L ?f3 0 G ?f2 ?f2 ?f14 ?f15 L ?f11 ?f4 G ?f2 ?f2 ?f16 ?f17 L ?f2 ?f10 G ?f2 ?f2 ?f18 ?f19 Z N">
+          <draw:enhanced-geometry draw:mirror-horizontal="false" draw:mirror-vertical="false" svg:viewBox="0 0 0 0" draw:glue-points="?f0 0 0 ?f1 ?f0 ?f2 ?f3 ?f1" draw:text-areas="0 0 ?f3 ?f2" draw:type="ooxml-rect" draw:enhanced-path="M 0 0 L ?f3 0 ?f3 ?f2 0 ?f2 Z N">
+            <draw:equation draw:name="f0" draw:formula="logwidth/2"/>
+            <draw:equation draw:name="f1" draw:formula="logheight/2"/>
+            <draw:equation draw:name="f2" draw:formula="logheight"/>
+            <draw:equation draw:name="f3" draw:formula="logwidth"/>
+          </draw:enhanced-geometry>
+        </draw:custom-shape>
+        <draw:custom-shape draw:name="Shape 1" draw:style-name="gr154" draw:text-style-name="P40" draw:layer="layout" svg:width="5.382cm" svg:height="6.474cm" svg:x="1.27cm" svg:y="3.394cm">
+          <text:p/>
+          <draw:enhanced-geometry draw:mirror-horizontal="false" draw:mirror-vertical="false" svg:viewBox="0 0 0 0" draw:glue-points="?f8 0 0 ?f9 ?f8 ?f10 ?f11 ?f9" draw:text-areas="?f5 ?f5 ?f6 ?f7" draw:type="ooxml-roundRect" draw:modifiers="4717" draw:enhanced-path="M 0 ?f2 L ?f3 0 L ?f11 ?f4 L ?f2 ?f10 Z N" drawooo:enhanced-path="M 0 ?f2 G ?f2 ?f2 ?f12 ?f13 L ?f3 0 G ?f2 ?f2 ?f14 ?f15 L ?f11 ?f4 G ?f2 ?f2 ?f16 ?f17 L ?f2 ?f10 G ?f2 ?f2 ?f18 ?f19 Z N">
             <draw:equation draw:name="f0" draw:formula="if(0-$0 ,0,if(50000-$0 ,$0 ,50000))"/>
             <draw:equation draw:name="f1" draw:formula="min(logwidth,logheight)"/>
             <draw:equation draw:name="f2" draw:formula="?f1 *?f0 /100000"/>
@@ -8852,12 +8792,12 @@
             <draw:equation draw:name="f17" draw:formula="(5400000)/60000.0"/>
             <draw:equation draw:name="f18" draw:formula="(5400000)/60000.0"/>
             <draw:equation draw:name="f19" draw:formula="(5400000)/60000.0"/>
-            <draw:handle draw:handle-position="?f2 0" draw:handle-position-x="?f2" draw:handle-position-y="0" draw:handle-range-x-maximum="50000" draw:handle-range-x-minimum="0"/>
-          </draw:enhanced-geometry>
-        </draw:custom-shape>
-        <draw:custom-shape draw:name="Shape 2" draw:style-name="gr11" draw:text-style-name="P12" draw:layer="layout" svg:width="1.267cm" svg:height="1.267cm" svg:x="1.727cm" svg:y="3.851cm">
-          <text:p/>
-          <draw:enhanced-geometry draw:mirror-horizontal="false" draw:mirror-vertical="false" draw:glue-points="?f4 0 ?f5 ?f8 0 ?f7 ?f5 ?f9 ?f4 ?f10 ?f6 ?f9 ?f11 ?f7 ?f6 ?f8" draw:text-areas="?f5 ?f8 ?f6 ?f9" svg:viewBox="0 0 0 0" draw:type="ooxml-ellipse" draw:enhanced-path="M 0 ?f7 Z N" drawooo:enhanced-path="M 0 ?f7 G ?f0 ?f2 ?f12 ?f13 ?f0 ?f2 ?f14 ?f15 ?f0 ?f2 ?f16 ?f17 ?f0 ?f2 ?f18 ?f19 Z N">
+            <draw:handle draw:handle-range-x-maximum="50000" draw:handle-range-x-minimum="0" draw:handle-position="?f2 0" draw:handle-position-x="?f2" draw:handle-position-y="0"/>
+          </draw:enhanced-geometry>
+        </draw:custom-shape>
+        <draw:custom-shape draw:name="Shape 2" draw:style-name="gr11" draw:text-style-name="P14" draw:layer="layout" svg:width="1.267cm" svg:height="1.267cm" svg:x="1.727cm" svg:y="3.851cm">
+          <text:p/>
+          <draw:enhanced-geometry draw:mirror-horizontal="false" draw:mirror-vertical="false" svg:viewBox="0 0 0 0" draw:glue-points="?f4 0 ?f5 ?f8 0 ?f7 ?f5 ?f9 ?f4 ?f10 ?f6 ?f9 ?f11 ?f7 ?f6 ?f8" draw:text-areas="?f5 ?f8 ?f6 ?f9" draw:type="ooxml-ellipse" draw:enhanced-path="M 0 ?f7 Z N" drawooo:enhanced-path="M 0 ?f7 G ?f0 ?f2 ?f12 ?f13 ?f0 ?f2 ?f14 ?f15 ?f0 ?f2 ?f16 ?f17 ?f0 ?f2 ?f18 ?f19 Z N">
             <draw:equation draw:name="f0" draw:formula="logwidth/2"/>
             <draw:equation draw:name="f1" draw:formula="?f0 *cos(pi*(2700000)/10800000)"/>
             <draw:equation draw:name="f2" draw:formula="logheight/2"/>
@@ -8880,7 +8820,7 @@
             <draw:equation draw:name="f19" draw:formula="(5400000)/60000.0"/>
           </draw:enhanced-geometry>
         </draw:custom-shape>
-        <draw:frame draw:name="Image 0" draw:style-name="gr8" draw:text-style-name="P6" draw:layer="layout" svg:width="0.607cm" svg:height="0.607cm" svg:x="2.057cm" svg:y="4.181cm">
+        <draw:frame draw:name="Image 0" draw:style-name="gr8" draw:text-style-name="P8" draw:layer="layout" svg:width="0.607cm" svg:height="0.607cm" svg:x="2.057cm" svg:y="4.181cm">
           <draw:image xlink:href="Pictures/100000010000010000000100C64FA165.png" xlink:type="simple" xlink:show="embed" xlink:actuate="onLoad" draw:mime-type="image/png">
             <text:p/>
           </draw:image>
@@ -8890,7 +8830,7 @@
           <text:p text:style-name="P2">
             <text:span text:style-name="T29">KPIs</text:span>
           </text:p>
-          <draw:enhanced-geometry draw:mirror-horizontal="false" draw:mirror-vertical="false" draw:glue-points="?f0 0 0 ?f1 ?f0 ?f2 ?f3 ?f1" draw:text-areas="0 0 ?f3 ?f2" svg:viewBox="0 0 0 0" draw:type="ooxml-rect" draw:enhanced-path="M 0 0 L ?f3 0 ?f3 ?f2 0 ?f2 Z N">
+          <draw:enhanced-geometry draw:mirror-horizontal="false" draw:mirror-vertical="false" svg:viewBox="0 0 0 0" draw:glue-points="?f0 0 0 ?f1 ?f0 ?f2 ?f3 ?f1" draw:text-areas="0 0 ?f3 ?f2" draw:type="ooxml-rect" draw:enhanced-path="M 0 0 L ?f3 0 ?f3 ?f2 0 ?f2 Z N">
             <draw:equation draw:name="f0" draw:formula="logwidth/2"/>
             <draw:equation draw:name="f1" draw:formula="logheight/2"/>
             <draw:equation draw:name="f2" draw:formula="logheight"/>
@@ -8901,7 +8841,7 @@
           <text:p text:style-name="P2">
             <text:span text:style-name="T36">38.5% readmitted vs 2.8% dead at 6 months; 1 in 3 has no echo.</text:span>
           </text:p>
-          <draw:enhanced-geometry draw:mirror-horizontal="false" draw:mirror-vertical="false" draw:glue-points="?f0 0 0 ?f1 ?f0 ?f2 ?f3 ?f1" draw:text-areas="0 0 ?f3 ?f2" svg:viewBox="0 0 0 0" draw:type="ooxml-rect" draw:enhanced-path="M 0 0 L ?f3 0 ?f3 ?f2 0 ?f2 Z N">
+          <draw:enhanced-geometry draw:mirror-horizontal="false" draw:mirror-vertical="false" svg:viewBox="0 0 0 0" draw:glue-points="?f0 0 0 ?f1 ?f0 ?f2 ?f3 ?f1" draw:text-areas="0 0 ?f3 ?f2" draw:type="ooxml-rect" draw:enhanced-path="M 0 0 L ?f3 0 ?f3 ?f2 0 ?f2 Z N">
             <draw:equation draw:name="f0" draw:formula="logwidth/2"/>
             <draw:equation draw:name="f1" draw:formula="logheight/2"/>
             <draw:equation draw:name="f2" draw:formula="logheight"/>
@@ -8912,16 +8852,16 @@
           <text:p text:style-name="P2">
             <text:span text:style-name="T37">→ Track readmission, not just mortality.</text:span>
           </text:p>
-          <draw:enhanced-geometry draw:mirror-horizontal="false" draw:mirror-vertical="false" draw:glue-points="?f0 0 0 ?f1 ?f0 ?f2 ?f3 ?f1" draw:text-areas="0 0 ?f3 ?f2" svg:viewBox="0 0 0 0" draw:type="ooxml-rect" draw:enhanced-path="M 0 0 L ?f3 0 ?f3 ?f2 0 ?f2 Z N">
-            <draw:equation draw:name="f0" draw:formula="logwidth/2"/>
-            <draw:equation draw:name="f1" draw:formula="logheight/2"/>
-            <draw:equation draw:name="f2" draw:formula="logheight"/>
-            <draw:equation draw:name="f3" draw:formula="logwidth"/>
-          </draw:enhanced-geometry>
-        </draw:custom-shape>
-        <draw:custom-shape draw:name="Shape 6" draw:style-name="gr154" draw:text-style-name="P37" draw:layer="layout" svg:width="5.382cm" svg:height="6.474cm" svg:x="7.061cm" svg:y="3.394cm">
-          <text:p/>
-          <draw:enhanced-geometry draw:mirror-horizontal="false" draw:mirror-vertical="false" draw:glue-points="?f8 0 0 ?f9 ?f8 ?f10 ?f11 ?f9" draw:text-areas="?f5 ?f5 ?f6 ?f7" svg:viewBox="0 0 0 0" draw:type="ooxml-roundRect" draw:modifiers="4717" draw:enhanced-path="M 0 ?f2 L ?f3 0 L ?f11 ?f4 L ?f2 ?f10 Z N" drawooo:enhanced-path="M 0 ?f2 G ?f2 ?f2 ?f12 ?f13 L ?f3 0 G ?f2 ?f2 ?f14 ?f15 L ?f11 ?f4 G ?f2 ?f2 ?f16 ?f17 L ?f2 ?f10 G ?f2 ?f2 ?f18 ?f19 Z N">
+          <draw:enhanced-geometry draw:mirror-horizontal="false" draw:mirror-vertical="false" svg:viewBox="0 0 0 0" draw:glue-points="?f0 0 0 ?f1 ?f0 ?f2 ?f3 ?f1" draw:text-areas="0 0 ?f3 ?f2" draw:type="ooxml-rect" draw:enhanced-path="M 0 0 L ?f3 0 ?f3 ?f2 0 ?f2 Z N">
+            <draw:equation draw:name="f0" draw:formula="logwidth/2"/>
+            <draw:equation draw:name="f1" draw:formula="logheight/2"/>
+            <draw:equation draw:name="f2" draw:formula="logheight"/>
+            <draw:equation draw:name="f3" draw:formula="logwidth"/>
+          </draw:enhanced-geometry>
+        </draw:custom-shape>
+        <draw:custom-shape draw:name="Shape 6" draw:style-name="gr154" draw:text-style-name="P40" draw:layer="layout" svg:width="5.382cm" svg:height="6.474cm" svg:x="7.061cm" svg:y="3.394cm">
+          <text:p/>
+          <draw:enhanced-geometry draw:mirror-horizontal="false" draw:mirror-vertical="false" svg:viewBox="0 0 0 0" draw:glue-points="?f8 0 0 ?f9 ?f8 ?f10 ?f11 ?f9" draw:text-areas="?f5 ?f5 ?f6 ?f7" draw:type="ooxml-roundRect" draw:modifiers="4717" draw:enhanced-path="M 0 ?f2 L ?f3 0 L ?f11 ?f4 L ?f2 ?f10 Z N" drawooo:enhanced-path="M 0 ?f2 G ?f2 ?f2 ?f12 ?f13 L ?f3 0 G ?f2 ?f2 ?f14 ?f15 L ?f11 ?f4 G ?f2 ?f2 ?f16 ?f17 L ?f2 ?f10 G ?f2 ?f2 ?f18 ?f19 Z N">
             <draw:equation draw:name="f0" draw:formula="if(0-$0 ,0,if(50000-$0 ,$0 ,50000))"/>
             <draw:equation draw:name="f1" draw:formula="min(logwidth,logheight)"/>
             <draw:equation draw:name="f2" draw:formula="?f1 *?f0 /100000"/>
@@ -8942,12 +8882,12 @@
             <draw:equation draw:name="f17" draw:formula="(5400000)/60000.0"/>
             <draw:equation draw:name="f18" draw:formula="(5400000)/60000.0"/>
             <draw:equation draw:name="f19" draw:formula="(5400000)/60000.0"/>
-            <draw:handle draw:handle-position="?f2 0" draw:handle-position-x="?f2" draw:handle-position-y="0" draw:handle-range-x-maximum="50000" draw:handle-range-x-minimum="0"/>
-          </draw:enhanced-geometry>
-        </draw:custom-shape>
-        <draw:custom-shape draw:name="Shape 7" draw:style-name="gr59" draw:text-style-name="P17" draw:layer="layout" svg:width="1.267cm" svg:height="1.267cm" svg:x="7.518cm" svg:y="3.851cm">
-          <text:p/>
-          <draw:enhanced-geometry draw:mirror-horizontal="false" draw:mirror-vertical="false" draw:glue-points="?f4 0 ?f5 ?f8 0 ?f7 ?f5 ?f9 ?f4 ?f10 ?f6 ?f9 ?f11 ?f7 ?f6 ?f8" draw:text-areas="?f5 ?f8 ?f6 ?f9" svg:viewBox="0 0 0 0" draw:type="ooxml-ellipse" draw:enhanced-path="M 0 ?f7 Z N" drawooo:enhanced-path="M 0 ?f7 G ?f0 ?f2 ?f12 ?f13 ?f0 ?f2 ?f14 ?f15 ?f0 ?f2 ?f16 ?f17 ?f0 ?f2 ?f18 ?f19 Z N">
+            <draw:handle draw:handle-range-x-maximum="50000" draw:handle-range-x-minimum="0" draw:handle-position="?f2 0" draw:handle-position-x="?f2" draw:handle-position-y="0"/>
+          </draw:enhanced-geometry>
+        </draw:custom-shape>
+        <draw:custom-shape draw:name="Shape 7" draw:style-name="gr59" draw:text-style-name="P19" draw:layer="layout" svg:width="1.267cm" svg:height="1.267cm" svg:x="7.518cm" svg:y="3.851cm">
+          <text:p/>
+          <draw:enhanced-geometry draw:mirror-horizontal="false" draw:mirror-vertical="false" svg:viewBox="0 0 0 0" draw:glue-points="?f4 0 ?f5 ?f8 0 ?f7 ?f5 ?f9 ?f4 ?f10 ?f6 ?f9 ?f11 ?f7 ?f6 ?f8" draw:text-areas="?f5 ?f8 ?f6 ?f9" draw:type="ooxml-ellipse" draw:enhanced-path="M 0 ?f7 Z N" drawooo:enhanced-path="M 0 ?f7 G ?f0 ?f2 ?f12 ?f13 ?f0 ?f2 ?f14 ?f15 ?f0 ?f2 ?f16 ?f17 ?f0 ?f2 ?f18 ?f19 Z N">
             <draw:equation draw:name="f0" draw:formula="logwidth/2"/>
             <draw:equation draw:name="f1" draw:formula="?f0 *cos(pi*(2700000)/10800000)"/>
             <draw:equation draw:name="f2" draw:formula="logheight/2"/>
@@ -8970,7 +8910,7 @@
             <draw:equation draw:name="f19" draw:formula="(5400000)/60000.0"/>
           </draw:enhanced-geometry>
         </draw:custom-shape>
-        <draw:frame draw:name="Image 1" draw:style-name="gr8" draw:text-style-name="P6" draw:layer="layout" svg:width="0.607cm" svg:height="0.607cm" svg:x="7.849cm" svg:y="4.181cm">
+        <draw:frame draw:name="Image 1" draw:style-name="gr8" draw:text-style-name="P8" draw:layer="layout" svg:width="0.607cm" svg:height="0.607cm" svg:x="7.849cm" svg:y="4.181cm">
           <draw:image xlink:href="Pictures/100000010000010000000100F7CA7750.png" xlink:type="simple" xlink:show="embed" xlink:actuate="onLoad" draw:mime-type="image/png">
             <text:p/>
           </draw:image>
@@ -8980,7 +8920,7 @@
           <text:p text:style-name="P2">
             <text:span text:style-name="T29">Descriptive</text:span>
           </text:p>
-          <draw:enhanced-geometry draw:mirror-horizontal="false" draw:mirror-vertical="false" draw:glue-points="?f0 0 0 ?f1 ?f0 ?f2 ?f3 ?f1" draw:text-areas="0 0 ?f3 ?f2" svg:viewBox="0 0 0 0" draw:type="ooxml-rect" draw:enhanced-path="M 0 0 L ?f3 0 ?f3 ?f2 0 ?f2 Z N">
+          <draw:enhanced-geometry draw:mirror-horizontal="false" draw:mirror-vertical="false" svg:viewBox="0 0 0 0" draw:glue-points="?f0 0 0 ?f1 ?f0 ?f2 ?f3 ?f1" draw:text-areas="0 0 ?f3 ?f2" draw:type="ooxml-rect" draw:enhanced-path="M 0 0 L ?f3 0 ?f3 ?f2 0 ?f2 Z N">
             <draw:equation draw:name="f0" draw:formula="logwidth/2"/>
             <draw:equation draw:name="f1" draw:formula="logheight/2"/>
             <draw:equation draw:name="f2" draw:formula="logheight"/>
@@ -8991,7 +8931,7 @@
           <text:p text:style-name="P2">
             <text:span text:style-name="T36">Elderly, frail cohort; readmission builds for 6 months, deaths cluster in week 1.</text:span>
           </text:p>
-          <draw:enhanced-geometry draw:mirror-horizontal="false" draw:mirror-vertical="false" draw:glue-points="?f0 0 0 ?f1 ?f0 ?f2 ?f3 ?f1" draw:text-areas="0 0 ?f3 ?f2" svg:viewBox="0 0 0 0" draw:type="ooxml-rect" draw:enhanced-path="M 0 0 L ?f3 0 ?f3 ?f2 0 ?f2 Z N">
+          <draw:enhanced-geometry draw:mirror-horizontal="false" draw:mirror-vertical="false" svg:viewBox="0 0 0 0" draw:glue-points="?f0 0 0 ?f1 ?f0 ?f2 ?f3 ?f1" draw:text-areas="0 0 ?f3 ?f2" draw:type="ooxml-rect" draw:enhanced-path="M 0 0 L ?f3 0 ?f3 ?f2 0 ?f2 Z N">
             <draw:equation draw:name="f0" draw:formula="logwidth/2"/>
             <draw:equation draw:name="f1" draw:formula="logheight/2"/>
             <draw:equation draw:name="f2" draw:formula="logheight"/>
@@ -9002,16 +8942,16 @@
           <text:p text:style-name="P2">
             <text:span text:style-name="T38">→ Design care around frail, elderly patients.</text:span>
           </text:p>
-          <draw:enhanced-geometry draw:mirror-horizontal="false" draw:mirror-vertical="false" draw:glue-points="?f0 0 0 ?f1 ?f0 ?f2 ?f3 ?f1" draw:text-areas="0 0 ?f3 ?f2" svg:viewBox="0 0 0 0" draw:type="ooxml-rect" draw:enhanced-path="M 0 0 L ?f3 0 ?f3 ?f2 0 ?f2 Z N">
-            <draw:equation draw:name="f0" draw:formula="logwidth/2"/>
-            <draw:equation draw:name="f1" draw:formula="logheight/2"/>
-            <draw:equation draw:name="f2" draw:formula="logheight"/>
-            <draw:equation draw:name="f3" draw:formula="logwidth"/>
-          </draw:enhanced-geometry>
-        </draw:custom-shape>
-        <draw:custom-shape draw:name="Shape 11" draw:style-name="gr154" draw:text-style-name="P37" draw:layer="layout" svg:width="5.382cm" svg:height="6.474cm" svg:x="12.852cm" svg:y="3.394cm">
-          <text:p/>
-          <draw:enhanced-geometry draw:mirror-horizontal="false" draw:mirror-vertical="false" draw:glue-points="?f8 0 0 ?f9 ?f8 ?f10 ?f11 ?f9" draw:text-areas="?f5 ?f5 ?f6 ?f7" svg:viewBox="0 0 0 0" draw:type="ooxml-roundRect" draw:modifiers="4717" draw:enhanced-path="M 0 ?f2 L ?f3 0 L ?f11 ?f4 L ?f2 ?f10 Z N" drawooo:enhanced-path="M 0 ?f2 G ?f2 ?f2 ?f12 ?f13 L ?f3 0 G ?f2 ?f2 ?f14 ?f15 L ?f11 ?f4 G ?f2 ?f2 ?f16 ?f17 L ?f2 ?f10 G ?f2 ?f2 ?f18 ?f19 Z N">
+          <draw:enhanced-geometry draw:mirror-horizontal="false" draw:mirror-vertical="false" svg:viewBox="0 0 0 0" draw:glue-points="?f0 0 0 ?f1 ?f0 ?f2 ?f3 ?f1" draw:text-areas="0 0 ?f3 ?f2" draw:type="ooxml-rect" draw:enhanced-path="M 0 0 L ?f3 0 ?f3 ?f2 0 ?f2 Z N">
+            <draw:equation draw:name="f0" draw:formula="logwidth/2"/>
+            <draw:equation draw:name="f1" draw:formula="logheight/2"/>
+            <draw:equation draw:name="f2" draw:formula="logheight"/>
+            <draw:equation draw:name="f3" draw:formula="logwidth"/>
+          </draw:enhanced-geometry>
+        </draw:custom-shape>
+        <draw:custom-shape draw:name="Shape 11" draw:style-name="gr154" draw:text-style-name="P40" draw:layer="layout" svg:width="5.382cm" svg:height="6.474cm" svg:x="12.852cm" svg:y="3.394cm">
+          <text:p/>
+          <draw:enhanced-geometry draw:mirror-horizontal="false" draw:mirror-vertical="false" svg:viewBox="0 0 0 0" draw:glue-points="?f8 0 0 ?f9 ?f8 ?f10 ?f11 ?f9" draw:text-areas="?f5 ?f5 ?f6 ?f7" draw:type="ooxml-roundRect" draw:modifiers="4717" draw:enhanced-path="M 0 ?f2 L ?f3 0 L ?f11 ?f4 L ?f2 ?f10 Z N" drawooo:enhanced-path="M 0 ?f2 G ?f2 ?f2 ?f12 ?f13 L ?f3 0 G ?f2 ?f2 ?f14 ?f15 L ?f11 ?f4 G ?f2 ?f2 ?f16 ?f17 L ?f2 ?f10 G ?f2 ?f2 ?f18 ?f19 Z N">
             <draw:equation draw:name="f0" draw:formula="if(0-$0 ,0,if(50000-$0 ,$0 ,50000))"/>
             <draw:equation draw:name="f1" draw:formula="min(logwidth,logheight)"/>
             <draw:equation draw:name="f2" draw:formula="?f1 *?f0 /100000"/>
@@ -9032,12 +8972,12 @@
             <draw:equation draw:name="f17" draw:formula="(5400000)/60000.0"/>
             <draw:equation draw:name="f18" draw:formula="(5400000)/60000.0"/>
             <draw:equation draw:name="f19" draw:formula="(5400000)/60000.0"/>
-            <draw:handle draw:handle-position="?f2 0" draw:handle-position-x="?f2" draw:handle-position-y="0" draw:handle-range-x-maximum="50000" draw:handle-range-x-minimum="0"/>
-          </draw:enhanced-geometry>
-        </draw:custom-shape>
-        <draw:custom-shape draw:name="Shape 12" draw:style-name="gr83" draw:text-style-name="P31" draw:layer="layout" svg:width="1.267cm" svg:height="1.267cm" svg:x="13.31cm" svg:y="3.851cm">
-          <text:p/>
-          <draw:enhanced-geometry draw:mirror-horizontal="false" draw:mirror-vertical="false" draw:glue-points="?f4 0 ?f5 ?f8 0 ?f7 ?f5 ?f9 ?f4 ?f10 ?f6 ?f9 ?f11 ?f7 ?f6 ?f8" draw:text-areas="?f5 ?f8 ?f6 ?f9" svg:viewBox="0 0 0 0" draw:type="ooxml-ellipse" draw:enhanced-path="M 0 ?f7 Z N" drawooo:enhanced-path="M 0 ?f7 G ?f0 ?f2 ?f12 ?f13 ?f0 ?f2 ?f14 ?f15 ?f0 ?f2 ?f16 ?f17 ?f0 ?f2 ?f18 ?f19 Z N">
+            <draw:handle draw:handle-range-x-maximum="50000" draw:handle-range-x-minimum="0" draw:handle-position="?f2 0" draw:handle-position-x="?f2" draw:handle-position-y="0"/>
+          </draw:enhanced-geometry>
+        </draw:custom-shape>
+        <draw:custom-shape draw:name="Shape 12" draw:style-name="gr83" draw:text-style-name="P33" draw:layer="layout" svg:width="1.267cm" svg:height="1.267cm" svg:x="13.31cm" svg:y="3.851cm">
+          <text:p/>
+          <draw:enhanced-geometry draw:mirror-horizontal="false" draw:mirror-vertical="false" svg:viewBox="0 0 0 0" draw:glue-points="?f4 0 ?f5 ?f8 0 ?f7 ?f5 ?f9 ?f4 ?f10 ?f6 ?f9 ?f11 ?f7 ?f6 ?f8" draw:text-areas="?f5 ?f8 ?f6 ?f9" draw:type="ooxml-ellipse" draw:enhanced-path="M 0 ?f7 Z N" drawooo:enhanced-path="M 0 ?f7 G ?f0 ?f2 ?f12 ?f13 ?f0 ?f2 ?f14 ?f15 ?f0 ?f2 ?f16 ?f17 ?f0 ?f2 ?f18 ?f19 Z N">
             <draw:equation draw:name="f0" draw:formula="logwidth/2"/>
             <draw:equation draw:name="f1" draw:formula="?f0 *cos(pi*(2700000)/10800000)"/>
             <draw:equation draw:name="f2" draw:formula="logheight/2"/>
@@ -9060,7 +9000,7 @@
             <draw:equation draw:name="f19" draw:formula="(5400000)/60000.0"/>
           </draw:enhanced-geometry>
         </draw:custom-shape>
-        <draw:frame draw:name="Image 2" draw:style-name="gr8" draw:text-style-name="P6" draw:layer="layout" svg:width="0.607cm" svg:height="0.607cm" svg:x="13.64cm" svg:y="4.181cm">
+        <draw:frame draw:name="Image 2" draw:style-name="gr8" draw:text-style-name="P8" draw:layer="layout" svg:width="0.607cm" svg:height="0.607cm" svg:x="13.64cm" svg:y="4.181cm">
           <draw:image xlink:href="Pictures/10000001000001000000010042A96640.png" xlink:type="simple" xlink:show="embed" xlink:actuate="onLoad" draw:mime-type="image/png">
             <text:p/>
           </draw:image>
@@ -9070,7 +9010,7 @@
           <text:p text:style-name="P2">
             <text:span text:style-name="T29">Prescriptive</text:span>
           </text:p>
-          <draw:enhanced-geometry draw:mirror-horizontal="false" draw:mirror-vertical="false" draw:glue-points="?f0 0 0 ?f1 ?f0 ?f2 ?f3 ?f1" draw:text-areas="0 0 ?f3 ?f2" svg:viewBox="0 0 0 0" draw:type="ooxml-rect" draw:enhanced-path="M 0 0 L ?f3 0 ?f3 ?f2 0 ?f2 Z N">
+          <draw:enhanced-geometry draw:mirror-horizontal="false" draw:mirror-vertical="false" svg:viewBox="0 0 0 0" draw:glue-points="?f0 0 0 ?f1 ?f0 ?f2 ?f3 ?f1" draw:text-areas="0 0 ?f3 ?f2" draw:type="ooxml-rect" draw:enhanced-path="M 0 0 L ?f3 0 ?f3 ?f2 0 ?f2 Z N">
             <draw:equation draw:name="f0" draw:formula="logwidth/2"/>
             <draw:equation draw:name="f1" draw:formula="logheight/2"/>
             <draw:equation draw:name="f2" draw:formula="logheight"/>
@@ -9081,7 +9021,7 @@
           <text:p text:style-name="P2">
             <text:span text:style-name="T36">Stage kidneys, tier follow-up, act on K⁺ &gt; 5.0, close echo &amp; leaving-early gaps.</text:span>
           </text:p>
-          <draw:enhanced-geometry draw:mirror-horizontal="false" draw:mirror-vertical="false" draw:glue-points="?f0 0 0 ?f1 ?f0 ?f2 ?f3 ?f1" draw:text-areas="0 0 ?f3 ?f2" svg:viewBox="0 0 0 0" draw:type="ooxml-rect" draw:enhanced-path="M 0 0 L ?f3 0 ?f3 ?f2 0 ?f2 Z N">
+          <draw:enhanced-geometry draw:mirror-horizontal="false" draw:mirror-vertical="false" svg:viewBox="0 0 0 0" draw:glue-points="?f0 0 0 ?f1 ?f0 ?f2 ?f3 ?f1" draw:text-areas="0 0 ?f3 ?f2" draw:type="ooxml-rect" draw:enhanced-path="M 0 0 L ?f3 0 ?f3 ?f2 0 ?f2 Z N">
             <draw:equation draw:name="f0" draw:formula="logwidth/2"/>
             <draw:equation draw:name="f1" draw:formula="logheight/2"/>
             <draw:equation draw:name="f2" draw:formula="logheight"/>
@@ -9092,16 +9032,16 @@
           <text:p text:style-name="P2">
             <text:span text:style-name="T39">→ Turn each risk group into a care pathway.</text:span>
           </text:p>
-          <draw:enhanced-geometry draw:mirror-horizontal="false" draw:mirror-vertical="false" draw:glue-points="?f0 0 0 ?f1 ?f0 ?f2 ?f3 ?f1" draw:text-areas="0 0 ?f3 ?f2" svg:viewBox="0 0 0 0" draw:type="ooxml-rect" draw:enhanced-path="M 0 0 L ?f3 0 ?f3 ?f2 0 ?f2 Z N">
-            <draw:equation draw:name="f0" draw:formula="logwidth/2"/>
-            <draw:equation draw:name="f1" draw:formula="logheight/2"/>
-            <draw:equation draw:name="f2" draw:formula="logheight"/>
-            <draw:equation draw:name="f3" draw:formula="logwidth"/>
-          </draw:enhanced-geometry>
-        </draw:custom-shape>
-        <draw:custom-shape draw:name="Shape 16" draw:style-name="gr154" draw:text-style-name="P37" draw:layer="layout" svg:width="5.382cm" svg:height="6.474cm" svg:x="18.644cm" svg:y="3.394cm">
-          <text:p/>
-          <draw:enhanced-geometry draw:mirror-horizontal="false" draw:mirror-vertical="false" draw:glue-points="?f8 0 0 ?f9 ?f8 ?f10 ?f11 ?f9" draw:text-areas="?f5 ?f5 ?f6 ?f7" svg:viewBox="0 0 0 0" draw:type="ooxml-roundRect" draw:modifiers="4717" draw:enhanced-path="M 0 ?f2 L ?f3 0 L ?f11 ?f4 L ?f2 ?f10 Z N" drawooo:enhanced-path="M 0 ?f2 G ?f2 ?f2 ?f12 ?f13 L ?f3 0 G ?f2 ?f2 ?f14 ?f15 L ?f11 ?f4 G ?f2 ?f2 ?f16 ?f17 L ?f2 ?f10 G ?f2 ?f2 ?f18 ?f19 Z N">
+          <draw:enhanced-geometry draw:mirror-horizontal="false" draw:mirror-vertical="false" svg:viewBox="0 0 0 0" draw:glue-points="?f0 0 0 ?f1 ?f0 ?f2 ?f3 ?f1" draw:text-areas="0 0 ?f3 ?f2" draw:type="ooxml-rect" draw:enhanced-path="M 0 0 L ?f3 0 ?f3 ?f2 0 ?f2 Z N">
+            <draw:equation draw:name="f0" draw:formula="logwidth/2"/>
+            <draw:equation draw:name="f1" draw:formula="logheight/2"/>
+            <draw:equation draw:name="f2" draw:formula="logheight"/>
+            <draw:equation draw:name="f3" draw:formula="logwidth"/>
+          </draw:enhanced-geometry>
+        </draw:custom-shape>
+        <draw:custom-shape draw:name="Shape 16" draw:style-name="gr154" draw:text-style-name="P40" draw:layer="layout" svg:width="5.382cm" svg:height="6.474cm" svg:x="18.644cm" svg:y="3.394cm">
+          <text:p/>
+          <draw:enhanced-geometry draw:mirror-horizontal="false" draw:mirror-vertical="false" svg:viewBox="0 0 0 0" draw:glue-points="?f8 0 0 ?f9 ?f8 ?f10 ?f11 ?f9" draw:text-areas="?f5 ?f5 ?f6 ?f7" draw:type="ooxml-roundRect" draw:modifiers="4717" draw:enhanced-path="M 0 ?f2 L ?f3 0 L ?f11 ?f4 L ?f2 ?f10 Z N" drawooo:enhanced-path="M 0 ?f2 G ?f2 ?f2 ?f12 ?f13 L ?f3 0 G ?f2 ?f2 ?f14 ?f15 L ?f11 ?f4 G ?f2 ?f2 ?f16 ?f17 L ?f2 ?f10 G ?f2 ?f2 ?f18 ?f19 Z N">
             <draw:equation draw:name="f0" draw:formula="if(0-$0 ,0,if(50000-$0 ,$0 ,50000))"/>
             <draw:equation draw:name="f1" draw:formula="min(logwidth,logheight)"/>
             <draw:equation draw:name="f2" draw:formula="?f1 *?f0 /100000"/>
@@ -9122,12 +9062,12 @@
             <draw:equation draw:name="f17" draw:formula="(5400000)/60000.0"/>
             <draw:equation draw:name="f18" draw:formula="(5400000)/60000.0"/>
             <draw:equation draw:name="f19" draw:formula="(5400000)/60000.0"/>
-            <draw:handle draw:handle-position="?f2 0" draw:handle-position-x="?f2" draw:handle-position-y="0" draw:handle-range-x-maximum="50000" draw:handle-range-x-minimum="0"/>
-          </draw:enhanced-geometry>
-        </draw:custom-shape>
-        <draw:custom-shape draw:name="Shape 17" draw:style-name="gr140" draw:text-style-name="P20" draw:layer="layout" svg:width="1.267cm" svg:height="1.267cm" svg:x="19.101cm" svg:y="3.851cm">
-          <text:p/>
-          <draw:enhanced-geometry draw:mirror-horizontal="false" draw:mirror-vertical="false" draw:glue-points="?f4 0 ?f5 ?f8 0 ?f7 ?f5 ?f9 ?f4 ?f10 ?f6 ?f9 ?f11 ?f7 ?f6 ?f8" draw:text-areas="?f5 ?f8 ?f6 ?f9" svg:viewBox="0 0 0 0" draw:type="ooxml-ellipse" draw:enhanced-path="M 0 ?f7 Z N" drawooo:enhanced-path="M 0 ?f7 G ?f0 ?f2 ?f12 ?f13 ?f0 ?f2 ?f14 ?f15 ?f0 ?f2 ?f16 ?f17 ?f0 ?f2 ?f18 ?f19 Z N">
+            <draw:handle draw:handle-range-x-maximum="50000" draw:handle-range-x-minimum="0" draw:handle-position="?f2 0" draw:handle-position-x="?f2" draw:handle-position-y="0"/>
+          </draw:enhanced-geometry>
+        </draw:custom-shape>
+        <draw:custom-shape draw:name="Shape 17" draw:style-name="gr140" draw:text-style-name="P22" draw:layer="layout" svg:width="1.267cm" svg:height="1.267cm" svg:x="19.101cm" svg:y="3.851cm">
+          <text:p/>
+          <draw:enhanced-geometry draw:mirror-horizontal="false" draw:mirror-vertical="false" svg:viewBox="0 0 0 0" draw:glue-points="?f4 0 ?f5 ?f8 0 ?f7 ?f5 ?f9 ?f4 ?f10 ?f6 ?f9 ?f11 ?f7 ?f6 ?f8" draw:text-areas="?f5 ?f8 ?f6 ?f9" draw:type="ooxml-ellipse" draw:enhanced-path="M 0 ?f7 Z N" drawooo:enhanced-path="M 0 ?f7 G ?f0 ?f2 ?f12 ?f13 ?f0 ?f2 ?f14 ?f15 ?f0 ?f2 ?f16 ?f17 ?f0 ?f2 ?f18 ?f19 Z N">
             <draw:equation draw:name="f0" draw:formula="logwidth/2"/>
             <draw:equation draw:name="f1" draw:formula="?f0 *cos(pi*(2700000)/10800000)"/>
             <draw:equation draw:name="f2" draw:formula="logheight/2"/>
@@ -9150,7 +9090,7 @@
             <draw:equation draw:name="f19" draw:formula="(5400000)/60000.0"/>
           </draw:enhanced-geometry>
         </draw:custom-shape>
-        <draw:frame draw:name="Image 3" draw:style-name="gr8" draw:text-style-name="P6" draw:layer="layout" svg:width="0.607cm" svg:height="0.607cm" svg:x="19.431cm" svg:y="4.181cm">
+        <draw:frame draw:name="Image 3" draw:style-name="gr8" draw:text-style-name="P8" draw:layer="layout" svg:width="0.607cm" svg:height="0.607cm" svg:x="19.431cm" svg:y="4.181cm">
           <draw:image xlink:href="Pictures/10000001000001000000010012CA5EAB.png" xlink:type="simple" xlink:show="embed" xlink:actuate="onLoad" draw:mime-type="image/png">
             <text:p/>
           </draw:image>
@@ -9160,7 +9100,7 @@
           <text:p text:style-name="P2">
             <text:span text:style-name="T29">Predictive</text:span>
           </text:p>
-          <draw:enhanced-geometry draw:mirror-horizontal="false" draw:mirror-vertical="false" draw:glue-points="?f0 0 0 ?f1 ?f0 ?f2 ?f3 ?f1" draw:text-areas="0 0 ?f3 ?f2" svg:viewBox="0 0 0 0" draw:type="ooxml-rect" draw:enhanced-path="M 0 0 L ?f3 0 ?f3 ?f2 0 ?f2 Z N">
+          <draw:enhanced-geometry draw:mirror-horizontal="false" draw:mirror-vertical="false" svg:viewBox="0 0 0 0" draw:glue-points="?f0 0 0 ?f1 ?f0 ?f2 ?f3 ?f1" draw:text-areas="0 0 ?f3 ?f2" draw:type="ooxml-rect" draw:enhanced-path="M 0 0 L ?f3 0 ?f3 ?f2 0 ?f2 Z N">
             <draw:equation draw:name="f0" draw:formula="logwidth/2"/>
             <draw:equation draw:name="f1" draw:formula="logheight/2"/>
             <draw:equation draw:name="f2" draw:formula="logheight"/>
@@ -9171,7 +9111,7 @@
           <text:p text:style-name="P2">
             <text:span text:style-name="T36">Early death is predictable (AUC 0.90); readmission needs post-discharge data.</text:span>
           </text:p>
-          <draw:enhanced-geometry draw:mirror-horizontal="false" draw:mirror-vertical="false" draw:glue-points="?f0 0 0 ?f1 ?f0 ?f2 ?f3 ?f1" draw:text-areas="0 0 ?f3 ?f2" svg:viewBox="0 0 0 0" draw:type="ooxml-rect" draw:enhanced-path="M 0 0 L ?f3 0 ?f3 ?f2 0 ?f2 Z N">
+          <draw:enhanced-geometry draw:mirror-horizontal="false" draw:mirror-vertical="false" svg:viewBox="0 0 0 0" draw:glue-points="?f0 0 0 ?f1 ?f0 ?f2 ?f3 ?f1" draw:text-areas="0 0 ?f3 ?f2" draw:type="ooxml-rect" draw:enhanced-path="M 0 0 L ?f3 0 ?f3 ?f2 0 ?f2 Z N">
             <draw:equation draw:name="f0" draw:formula="logwidth/2"/>
             <draw:equation draw:name="f1" draw:formula="logheight/2"/>
             <draw:equation draw:name="f2" draw:formula="logheight"/>
@@ -9182,16 +9122,16 @@
           <text:p text:style-name="P2">
             <text:span text:style-name="T40">→ Score every admission for early-death risk.</text:span>
           </text:p>
-          <draw:enhanced-geometry draw:mirror-horizontal="false" draw:mirror-vertical="false" draw:glue-points="?f0 0 0 ?f1 ?f0 ?f2 ?f3 ?f1" draw:text-areas="0 0 ?f3 ?f2" svg:viewBox="0 0 0 0" draw:type="ooxml-rect" draw:enhanced-path="M 0 0 L ?f3 0 ?f3 ?f2 0 ?f2 Z N">
-            <draw:equation draw:name="f0" draw:formula="logwidth/2"/>
-            <draw:equation draw:name="f1" draw:formula="logheight/2"/>
-            <draw:equation draw:name="f2" draw:formula="logheight"/>
-            <draw:equation draw:name="f3" draw:formula="logwidth"/>
-          </draw:enhanced-geometry>
-        </draw:custom-shape>
-        <draw:custom-shape draw:name="Shape 21" draw:style-name="gr167" draw:text-style-name="P25" draw:layer="layout" svg:width="22.857cm" svg:height="1.267cm" svg:x="1.27cm" svg:y="10.379cm">
-          <text:p/>
-          <draw:enhanced-geometry draw:mirror-horizontal="false" draw:mirror-vertical="false" draw:glue-points="?f8 0 0 ?f9 ?f8 ?f10 ?f11 ?f9" draw:text-areas="?f5 ?f5 ?f6 ?f7" svg:viewBox="0 0 0 0" draw:type="ooxml-roundRect" draw:modifiers="20000" draw:enhanced-path="M 0 ?f2 L ?f3 0 L ?f11 ?f4 L ?f2 ?f10 Z N" drawooo:enhanced-path="M 0 ?f2 G ?f2 ?f2 ?f12 ?f13 L ?f3 0 G ?f2 ?f2 ?f14 ?f15 L ?f11 ?f4 G ?f2 ?f2 ?f16 ?f17 L ?f2 ?f10 G ?f2 ?f2 ?f18 ?f19 Z N">
+          <draw:enhanced-geometry draw:mirror-horizontal="false" draw:mirror-vertical="false" svg:viewBox="0 0 0 0" draw:glue-points="?f0 0 0 ?f1 ?f0 ?f2 ?f3 ?f1" draw:text-areas="0 0 ?f3 ?f2" draw:type="ooxml-rect" draw:enhanced-path="M 0 0 L ?f3 0 ?f3 ?f2 0 ?f2 Z N">
+            <draw:equation draw:name="f0" draw:formula="logwidth/2"/>
+            <draw:equation draw:name="f1" draw:formula="logheight/2"/>
+            <draw:equation draw:name="f2" draw:formula="logheight"/>
+            <draw:equation draw:name="f3" draw:formula="logwidth"/>
+          </draw:enhanced-geometry>
+        </draw:custom-shape>
+        <draw:custom-shape draw:name="Shape 21" draw:style-name="gr167" draw:text-style-name="P27" draw:layer="layout" svg:width="22.857cm" svg:height="1.267cm" svg:x="1.27cm" svg:y="10.379cm">
+          <text:p/>
+          <draw:enhanced-geometry draw:mirror-horizontal="false" draw:mirror-vertical="false" svg:viewBox="0 0 0 0" draw:glue-points="?f8 0 0 ?f9 ?f8 ?f10 ?f11 ?f9" draw:text-areas="?f5 ?f5 ?f6 ?f7" draw:type="ooxml-roundRect" draw:modifiers="20000" draw:enhanced-path="M 0 ?f2 L ?f3 0 L ?f11 ?f4 L ?f2 ?f10 Z N" drawooo:enhanced-path="M 0 ?f2 G ?f2 ?f2 ?f12 ?f13 L ?f3 0 G ?f2 ?f2 ?f14 ?f15 L ?f11 ?f4 G ?f2 ?f2 ?f16 ?f17 L ?f2 ?f10 G ?f2 ?f2 ?f18 ?f19 Z N">
             <draw:equation draw:name="f0" draw:formula="if(0-$0 ,0,if(50000-$0 ,$0 ,50000))"/>
             <draw:equation draw:name="f1" draw:formula="min(logwidth,logheight)"/>
             <draw:equation draw:name="f2" draw:formula="?f1 *?f0 /100000"/>
@@ -9212,7 +9152,7 @@
             <draw:equation draw:name="f17" draw:formula="(5400000)/60000.0"/>
             <draw:equation draw:name="f18" draw:formula="(5400000)/60000.0"/>
             <draw:equation draw:name="f19" draw:formula="(5400000)/60000.0"/>
-            <draw:handle draw:handle-position="?f2 0" draw:handle-position-x="?f2" draw:handle-position-y="0" draw:handle-range-x-maximum="50000" draw:handle-range-x-minimum="0"/>
+            <draw:handle draw:handle-range-x-maximum="50000" draw:handle-range-x-minimum="0" draw:handle-position="?f2 0" draw:handle-position-x="?f2" draw:handle-position-y="0"/>
           </draw:enhanced-geometry>
         </draw:custom-shape>
         <draw:custom-shape draw:name="Text 22" draw:style-name="gr168" draw:text-style-name="P3" draw:layer="layout" svg:width="21.841cm" svg:height="1.267cm" svg:x="1.778cm" svg:y="10.379cm">
@@ -9225,7 +9165,7 @@
               <text:a xlink:href="http://localhost:8501/" xlink:type="simple">Hospitalized HF Patients Analytics · Team05 PyCraft</text:a>
             </text:span>
           </text:p>
-          <draw:enhanced-geometry draw:mirror-horizontal="false" draw:mirror-vertical="false" draw:glue-points="?f0 0 0 ?f1 ?f0 ?f2 ?f3 ?f1" draw:text-areas="0 0 ?f3 ?f2" svg:viewBox="0 0 0 0" draw:type="ooxml-rect" draw:enhanced-path="M 0 0 L ?f3 0 ?f3 ?f2 0 ?f2 Z N">
+          <draw:enhanced-geometry draw:mirror-horizontal="false" draw:mirror-vertical="false" svg:viewBox="0 0 0 0" draw:glue-points="?f0 0 0 ?f1 ?f0 ?f2 ?f3 ?f1" draw:text-areas="0 0 ?f3 ?f2" draw:type="ooxml-rect" draw:enhanced-path="M 0 0 L ?f3 0 ?f3 ?f2 0 ?f2 Z N">
             <draw:equation draw:name="f0" draw:formula="logwidth/2"/>
             <draw:equation draw:name="f1" draw:formula="logheight/2"/>
             <draw:equation draw:name="f2" draw:formula="logheight"/>
@@ -9234,16 +9174,16 @@
         </draw:custom-shape>
         <draw:custom-shape draw:name="Text 24" draw:style-name="gr1" draw:text-style-name="P1" draw:layer="layout" svg:width="22.857cm" svg:height="0.759cm" svg:x="1.27cm" svg:y="12.751cm">
           <text:p/>
-          <draw:enhanced-geometry draw:mirror-horizontal="false" draw:mirror-vertical="false" draw:glue-points="?f0 0 0 ?f1 ?f0 ?f2 ?f3 ?f1" draw:text-areas="0 0 ?f3 ?f2" svg:viewBox="0 0 0 0" draw:type="ooxml-rect" draw:enhanced-path="M 0 0 L ?f3 0 ?f3 ?f2 0 ?f2 Z N">
-            <draw:equation draw:name="f0" draw:formula="logwidth/2"/>
-            <draw:equation draw:name="f1" draw:formula="logheight/2"/>
-            <draw:equation draw:name="f2" draw:formula="logheight"/>
-            <draw:equation draw:name="f3" draw:formula="logwidth"/>
-          </draw:enhanced-geometry>
-        </draw:custom-shape>
-        <draw:custom-shape draw:name="Freeform 9" draw:style-name="gr169" draw:text-style-name="P38" draw:layer="layout" svg:width="1.347cm" svg:height="2.221cm" svg:x="23.971cm" svg:y="0.085cm">
-          <text:p/>
-          <draw:enhanced-geometry draw:mirror-horizontal="false" draw:mirror-vertical="false" drawooo:sub-view-size="647700 1066800" draw:text-areas="?f0 ?f2 ?f1 ?f3" svg:viewBox="0 0 0 0" draw:type="ooxml-non-primitive" draw:enhanced-path="M 0 0 L 647700 0 647700 1066800 0 1066800 0 0 Z N">
+          <draw:enhanced-geometry draw:mirror-horizontal="false" draw:mirror-vertical="false" svg:viewBox="0 0 0 0" draw:glue-points="?f0 0 0 ?f1 ?f0 ?f2 ?f3 ?f1" draw:text-areas="0 0 ?f3 ?f2" draw:type="ooxml-rect" draw:enhanced-path="M 0 0 L ?f3 0 ?f3 ?f2 0 ?f2 Z N">
+            <draw:equation draw:name="f0" draw:formula="logwidth/2"/>
+            <draw:equation draw:name="f1" draw:formula="logheight/2"/>
+            <draw:equation draw:name="f2" draw:formula="logheight"/>
+            <draw:equation draw:name="f3" draw:formula="logwidth"/>
+          </draw:enhanced-geometry>
+        </draw:custom-shape>
+        <draw:custom-shape draw:name="Freeform 9" draw:style-name="gr169" draw:text-style-name="P41" draw:layer="layout" svg:width="1.347cm" svg:height="2.221cm" svg:x="23.971cm" svg:y="0.085cm">
+          <text:p/>
+          <draw:enhanced-geometry draw:mirror-horizontal="false" draw:mirror-vertical="false" svg:viewBox="0 0 0 0" drawooo:sub-view-size="647700 1066800" draw:text-areas="?f0 ?f2 ?f1 ?f3" draw:type="ooxml-non-primitive" draw:enhanced-path="M 0 0 L 647700 0 647700 1066800 0 1066800 0 0 Z N">
             <draw:equation draw:name="f0" draw:formula="0*logwidth/485280"/>
             <draw:equation draw:name="f1" draw:formula="485640*logwidth/485280"/>
             <draw:equation draw:name="f2" draw:formula="0*logheight/799920"/>
@@ -9252,16 +9192,16 @@
         </draw:custom-shape>
         <presentation:notes draw:style-name="dp2">
           <draw:page-thumbnail draw:name="PlaceHolder 1" draw:style-name="gr10" draw:layer="layout" svg:width="15.237cm" svg:height="8.57cm" svg:x="1.905cm" svg:y="3.175cm" draw:page-number="10" presentation:class="page"/>
-          <draw:frame draw:name="PlaceHolder 2" presentation:style-name="pr1" draw:text-style-name="P9" draw:layer="layout" svg:width="15.237cm" svg:height="9.998cm" svg:x="1.905cm" svg:y="12.224cm" presentation:class="notes" presentation:user-transformed="true">
+          <draw:frame draw:name="PlaceHolder 2" presentation:style-name="pr1" draw:text-style-name="P11" draw:layer="layout" svg:width="15.237cm" svg:height="9.998cm" svg:x="1.905cm" svg:y="12.224cm" presentation:class="notes" presentation:user-transformed="true">
             <draw:text-box>
-              <text:p text:style-name="P8">
+              <text:p text:style-name="P10">
                 <text:span text:style-name="T6">Close with one line per category: the KPIs show readmission is the main burden; the descriptive tab shows who the patients are and when outcomes happen; the prescriptive tab turns each risk group into a concrete action; the predictive tab shows early death can be flagged at admission. Invite questions and point to the live dashboard.</text:span>
               </text:p>
             </draw:text-box>
           </draw:frame>
-          <draw:frame draw:name="PlaceHolder 3" presentation:style-name="pr2" draw:text-style-name="P11" draw:layer="layout" svg:width="8.252cm" svg:height="1.271cm" svg:x="10.791cm" svg:y="24.126cm" presentation:class="page-number" presentation:user-transformed="true">
+          <draw:frame draw:name="PlaceHolder 3" presentation:style-name="pr2" draw:text-style-name="P13" draw:layer="layout" svg:width="8.252cm" svg:height="1.271cm" svg:x="10.791cm" svg:y="24.126cm" presentation:class="page-number" presentation:user-transformed="true">
             <draw:text-box>
-              <text:p text:style-name="P10">
+              <text:p text:style-name="P12">
                 <text:span text:style-name="T7">
                   <text:page-number>&lt;number&gt;</text:page-number>
                 </text:span>
@@ -9271,11 +9211,11 @@
         </presentation:notes>
       </draw:page>
       <draw:page draw:name="page11" draw:style-name="dp11" draw:master-page-name="DEFAULT">
-        <draw:custom-shape draw:name="Text 59" draw:style-name="gr170" draw:text-style-name="P14" draw:layer="layout" svg:width="22.857cm" svg:height="1.394cm" svg:x="1.5cm" svg:y="6cm">
-          <text:p text:style-name="P13">
+        <draw:custom-shape draw:name="Text 59" draw:style-name="gr170" draw:text-style-name="P16" draw:layer="layout" svg:width="22.857cm" svg:height="1.394cm" svg:x="1.5cm" svg:y="6cm">
+          <text:p text:style-name="P15">
             <text:span text:style-name="T43">Thank you!</text:span>
           </text:p>
-          <draw:enhanced-geometry draw:mirror-horizontal="false" draw:mirror-vertical="false" draw:glue-points="?f0 0 0 ?f1 ?f0 ?f2 ?f3 ?f1" draw:text-areas="0 0 ?f3 ?f2" svg:viewBox="0 0 0 0" draw:type="ooxml-rect" draw:enhanced-path="M 0 0 L ?f3 0 ?f3 ?f2 0 ?f2 Z N">
+          <draw:enhanced-geometry draw:mirror-horizontal="false" draw:mirror-vertical="false" svg:viewBox="0 0 0 0" draw:glue-points="?f0 0 0 ?f1 ?f0 ?f2 ?f3 ?f1" draw:text-areas="0 0 ?f3 ?f2" draw:type="ooxml-rect" draw:enhanced-path="M 0 0 L ?f3 0 ?f3 ?f2 0 ?f2 Z N">
             <draw:equation draw:name="f0" draw:formula="logwidth/2"/>
             <draw:equation draw:name="f1" draw:formula="logheight/2"/>
             <draw:equation draw:name="f2" draw:formula="logheight"/>
@@ -9284,16 +9224,16 @@
         </draw:custom-shape>
         <draw:custom-shape draw:name="Text 60" draw:style-name="gr171" draw:text-style-name="P1" draw:layer="layout" svg:width="22.857cm" svg:height="0.759cm" svg:x="1.27cm" svg:y="12.751cm">
           <text:p/>
-          <draw:enhanced-geometry draw:mirror-horizontal="false" draw:mirror-vertical="false" draw:glue-points="?f0 0 0 ?f1 ?f0 ?f2 ?f3 ?f1" draw:text-areas="0 0 ?f3 ?f2" svg:viewBox="0 0 0 0" draw:type="ooxml-rect" draw:enhanced-path="M 0 0 L ?f3 0 ?f3 ?f2 0 ?f2 Z N">
-            <draw:equation draw:name="f0" draw:formula="logwidth/2"/>
-            <draw:equation draw:name="f1" draw:formula="logheight/2"/>
-            <draw:equation draw:name="f2" draw:formula="logheight"/>
-            <draw:equation draw:name="f3" draw:formula="logwidth"/>
-          </draw:enhanced-geometry>
-        </draw:custom-shape>
-        <draw:custom-shape draw:name="Freeform 9" draw:style-name="gr172" draw:text-style-name="P38" draw:layer="layout" svg:width="1.347cm" svg:height="2.221cm" svg:x="23.971cm" svg:y="0.085cm">
-          <text:p/>
-          <draw:enhanced-geometry draw:mirror-horizontal="false" draw:mirror-vertical="false" drawooo:sub-view-size="647700 1066800" draw:text-areas="?f0 ?f2 ?f1 ?f3" svg:viewBox="0 0 0 0" draw:type="ooxml-non-primitive" draw:enhanced-path="M 0 0 L 647700 0 647700 1066800 0 1066800 0 0 Z N">
+          <draw:enhanced-geometry draw:mirror-horizontal="false" draw:mirror-vertical="false" svg:viewBox="0 0 0 0" draw:glue-points="?f0 0 0 ?f1 ?f0 ?f2 ?f3 ?f1" draw:text-areas="0 0 ?f3 ?f2" draw:type="ooxml-rect" draw:enhanced-path="M 0 0 L ?f3 0 ?f3 ?f2 0 ?f2 Z N">
+            <draw:equation draw:name="f0" draw:formula="logwidth/2"/>
+            <draw:equation draw:name="f1" draw:formula="logheight/2"/>
+            <draw:equation draw:name="f2" draw:formula="logheight"/>
+            <draw:equation draw:name="f3" draw:formula="logwidth"/>
+          </draw:enhanced-geometry>
+        </draw:custom-shape>
+        <draw:custom-shape draw:name="Freeform 9" draw:style-name="gr172" draw:text-style-name="P41" draw:layer="layout" svg:width="1.347cm" svg:height="2.221cm" svg:x="23.971cm" svg:y="0.085cm">
+          <text:p/>
+          <draw:enhanced-geometry draw:mirror-horizontal="false" draw:mirror-vertical="false" svg:viewBox="0 0 0 0" drawooo:sub-view-size="647700 1066800" draw:text-areas="?f0 ?f2 ?f1 ?f3" draw:type="ooxml-non-primitive" draw:enhanced-path="M 0 0 L 647700 0 647700 1066800 0 1066800 0 0 Z N">
             <draw:equation draw:name="f0" draw:formula="0*logwidth/485280"/>
             <draw:equation draw:name="f1" draw:formula="485640*logwidth/485280"/>
             <draw:equation draw:name="f2" draw:formula="0*logheight/799920"/>
@@ -9302,16 +9242,16 @@
         </draw:custom-shape>
         <presentation:notes draw:style-name="dp12">
           <draw:page-thumbnail draw:name="PlaceHolder 4" draw:style-name="gr10" draw:layer="layout" svg:width="15.237cm" svg:height="8.57cm" svg:x="1.905cm" svg:y="3.175cm" draw:page-number="11" presentation:class="page"/>
-          <draw:frame draw:name="PlaceHolder 5" presentation:style-name="pr1" draw:text-style-name="P9" draw:layer="layout" svg:width="15.237cm" svg:height="9.998cm" svg:x="1.905cm" svg:y="12.224cm" presentation:class="notes" presentation:user-transformed="true">
+          <draw:frame draw:name="PlaceHolder 5" presentation:style-name="pr1" draw:text-style-name="P11" draw:layer="layout" svg:width="15.237cm" svg:height="9.998cm" svg:x="1.905cm" svg:y="12.224cm" presentation:class="notes" presentation:user-transformed="true">
             <draw:text-box>
-              <text:p text:style-name="P8">
+              <text:p text:style-name="P10">
                 <text:span text:style-name="T6">Close with one line per category: the KPIs show readmission is the main burden; the descriptive tab shows who the patients are and when outcomes happen; the prescriptive tab turns each risk group into a concrete action; the predictive tab shows early death can be flagged at admission. Invite questions and point to the live dashboard.</text:span>
               </text:p>
             </draw:text-box>
           </draw:frame>
-          <draw:frame draw:name="PlaceHolder 6" presentation:style-name="pr2" draw:text-style-name="P11" draw:layer="layout" svg:width="8.252cm" svg:height="1.271cm" svg:x="10.791cm" svg:y="24.126cm" presentation:class="page-number" presentation:user-transformed="true">
+          <draw:frame draw:name="PlaceHolder 6" presentation:style-name="pr2" draw:text-style-name="P13" draw:layer="layout" svg:width="8.252cm" svg:height="1.271cm" svg:x="10.791cm" svg:y="24.126cm" presentation:class="page-number" presentation:user-transformed="true">
             <draw:text-box>
-              <text:p text:style-name="P10">
+              <text:p text:style-name="P12">
                 <text:span text:style-name="T7">
                   <text:page-number>&lt;number&gt;</text:page-number>
                 </text:span>
@@ -9332,12 +9272,12 @@
     <meta:creation-date>2026-09-28T23:47:11</meta:creation-date>
     <meta:initial-creator>Team05 PyCraft</meta:initial-creator>
     <dc:language>en-US</dc:language>
-    <dc:date>2026-09-28T20:35:49.599003000</dc:date>
-    <meta:editing-cycles>4</meta:editing-cycles>
+    <dc:date>2026-09-29T10:35:33.441170600</dc:date>
+    <meta:editing-cycles>6</meta:editing-cycles>
     <dc:subject>PptxGenJS Presentation</dc:subject>
     <dc:title>Hospitalized Heart Failure Patients Analytics</dc:title>
-    <meta:editing-duration>PT14M17S</meta:editing-duration>
-    <meta:generator>LibreOffice/26.8.0.3$Windows_X86_64 LibreOffice_project/bce0998afefdbc355585ca324285661a2170ba77</meta:generator>
+    <meta:editing-duration>PT18M53S</meta:editing-duration>
+    <meta:generator>LibreOffice/26.2.0.3$Windows_X86_64 LibreOffice_project/620$Build-3</meta:generator>
     <meta:document-statistic meta:object-count="303"/>
     <meta:user-defined meta:name="AppVersion">15.0000</meta:user-defined>
     <meta:user-defined meta:name="Company">PptxGenJS</meta:user-defined>
@@ -9352,13 +9292,13 @@
 <office:document-settings xmlns:office="urn:oasis:names:tc:opendocument:xmlns:office:1.0" xmlns:ooo="http://openoffice.org/2004/office" xmlns:xlink="http://www.w3.org/1999/xlink" xmlns:config="urn:oasis:names:tc:opendocument:xmlns:config:1.0" xmlns:presentation="urn:oasis:names:tc:opendocument:xmlns:presentation:1.0" xmlns:smil="urn:oasis:names:tc:opendocument:xmlns:smil-compatible:1.0" xmlns:anim="urn:oasis:names:tc:opendocument:xmlns:animation:1.0" xmlns:officeooo="http://openoffice.org/2009/office" office:version="1.4">
   <office:settings>
     <config:config-item-set config:name="ooo:view-settings">
-      <config:config-item config:name="VisibleAreaTop" config:type="int">-185</config:config-item>
-      <config:config-item config:name="VisibleAreaLeft" config:type="int">-2223</config:config-item>
-      <config:config-item config:name="VisibleAreaWidth" config:type="int">29871</config:config-item>
-      <config:config-item config:name="VisibleAreaHeight" config:type="int">14711</config:config-item>
+      <config:config-item config:name="VisibleAreaTop" config:type="int">-2692</config:config-item>
+      <config:config-item config:name="VisibleAreaLeft" config:type="int">-390</config:config-item>
+      <config:config-item config:name="VisibleAreaWidth" config:type="int">26181</config:config-item>
+      <config:config-item config:name="VisibleAreaHeight" config:type="int">19687</config:config-item>
       <config:config-item-map-indexed config:name="Views">
         <config:config-item-map-entry>
-          <config:config-item config:name="WindowState" config:type="string">0,23,1366,697;4;,,,;</config:config-item>
+          <config:config-item config:name="WindowState" config:type="string">0,29,1920,1111;4;,,,;</config:config-item>
           <config:config-item config:name="GridIsVisible" config:type="boolean">false</config:config-item>
           <config:config-item config:name="GridIsFront" config:type="boolean">false</config:config-item>
           <config:config-item config:name="IsSnapToGrid" config:type="boolean">true</config:config-item>
@@ -9377,16 +9317,16 @@
           <config:config-item config:name="NoColors" config:type="boolean">true</config:config-item>
           <config:config-item config:name="RulerIsVisible" config:type="boolean">false</config:config-item>
           <config:config-item config:name="PageKind" config:type="short">0</config:config-item>
-          <config:config-item config:name="SelectedPage" config:type="short">6</config:config-item>
+          <config:config-item config:name="SelectedPage" config:type="short">9</config:config-item>
           <config:config-item config:name="IsLayerMode" config:type="boolean">false</config:config-item>
           <config:config-item config:name="IsDoubleClickTextEdit" config:type="boolean">true</config:config-item>
           <config:config-item config:name="IsClickChangeRotation" config:type="boolean">true</config:config-item>
           <config:config-item config:name="SlidesPerRow" config:type="short">4</config:config-item>
           <config:config-item config:name="EditMode" config:type="int">0</config:config-item>
-          <config:config-item config:name="VisibleAreaTop" config:type="int">-185</config:config-item>
-          <config:config-item config:name="VisibleAreaLeft" config:type="int">-2223</config:config-item>
-          <config:config-item config:name="VisibleAreaWidth" config:type="int">29872</config:config-item>
-          <config:config-item config:name="VisibleAreaHeight" config:type="int">14712</config:config-item>
+          <config:config-item config:name="VisibleAreaTop" config:type="int">-2692</config:config-item>
+          <config:config-item config:name="VisibleAreaLeft" config:type="int">-390</config:config-item>
+          <config:config-item config:name="VisibleAreaWidth" config:type="int">26182</config:config-item>
+          <config:config-item config:name="VisibleAreaHeight" config:type="int">19688</config:config-item>
           <config:config-item config:name="GridCoarseWidth" config:type="int">2000</config:config-item>
           <config:config-item config:name="GridCoarseHeight" config:type="int">2000</config:config-item>
           <config:config-item config:name="GridFineWidth" config:type="int">500</config:config-item>
@@ -9397,7 +9337,6 @@
           <config:config-item config:name="GridSnapWidthYDenominator" config:type="int">1</config:config-item>
           <config:config-item config:name="IsAngleSnapEnabled" config:type="boolean">false</config:config-item>
           <config:config-item config:name="SnapAngle" config:type="int">1500</config:config-item>
-          <config:config-item config:name="HasCanvasPage" config:type="boolean">false</config:config-item>
           <config:config-item config:name="ZoomOnPage" config:type="boolean">true</config:config-item>
           <config:config-item config:name="AnchoredTextOverflowLegacy" config:type="boolean">false</config:config-item>
           <config:config-item config:name="LegacySingleLineFontwork" config:type="boolean">false</config:config-item>
@@ -9416,11 +9355,18 @@
           <config:config-item config:name="BeginLine" config:type="string"/>
           <config:config-item config:name="EndLine" config:type="string"/>
         </config:config-item-map-entry>
+        <config:config-item-map-entry>
+          <config:config-item config:name="Language" config:type="string">en</config:config-item>
+          <config:config-item config:name="Country" config:type="string">IN</config:config-item>
+          <config:config-item config:name="Variant" config:type="string"/>
+          <config:config-item config:name="BeginLine" config:type="string"/>
+          <config:config-item config:name="EndLine" config:type="string"/>
+        </config:config-item-map-entry>
       </config:config-item-map-indexed>
       <config:config-item config:name="DefaultTabStop" config:type="int">2540</config:config-item>
       <config:config-item config:name="ImagePreferredDPI" config:type="int">0</config:config-item>
-      <config:config-item config:name="PrinterName" config:type="string"/>
-      <config:config-item config:name="PrinterSetup" config:type="base64Binary"/>
+      <config:config-item config:name="PrinterName" config:type="string">Microsoft Print to PDF</config:config-item>
+      <config:config-item config:name="PrinterSetup" config:type="base64Binary">bBb+/01pY3Jvc29mdCBQcmludCB0byBQREYAAAAAAAAAAAAAAAAAAAAAAAAAAAAAAAAAAAAAAAAAAAAAAAAAAAAAAAAAAAAAAAAAAAAAAAAAAAAAAAAAAAAAAAAAAAAAAAAAAAAAAAAAAAAAAAAAAAAAAAAAAAAAAAAAAAAAAAAAAAAATWljcm9zb2Z0IFByaW50IFRvIFBERgAAAAAAAAAAAAAWAAEAPhUAAAAAAAAIAFZUAAAkbQAAM1ROVwAAAAAKAE0AaQBjAHIAbwBzAG8AZgB0ACAAUAByAGkAbgB0ACAAdABvACAAUABEAEYAAAAAAAAAAAAAAAAAAAAAAAAAAAABBAMG3ABYFAMtAQABAAEA6gpvCGQAAQAPAFgCAgABAFgCAwABAEwAZQB0AHQAZQByAAAAAAAAAAAAAAAAAAAAAAAAAAAAAAAAAAAAAAAAAAAAAAAAAAAAAAAAAAAAAAAAAAAAAAAAAAAAAAAAAAAAAAAAAAEAAAAAAAAAAQAAAAIAAAABAAAA/////0dJUzQAAAAAAAAAAAAAAABESU5VIgDQACwDLBHiXo1TAAAAAAAAAAAAAAAAAAAAAAAAAAAAAAAAAAAAAAUAAAAAAC8AAQAAAAAAAAAAAAAAAAAAAAAAAAAAAAAAAAAAAAAAAAAAAAAAAAAAAAAAAAAAAAAAAAAAAAAAAAAAAAAAAAAAAAAAAAAAAAAAAAAAAAAAAAAAAAAAAAAAAAAAAAAAAAAAAAAAAAAAAAAAAAAAAAAAAAAAAAAAAAAAAAAAAAAAAAAAAAAAAAAAAAAAAAAAAAAAAAAAAAAAAAAAAAAAAAAAAAAAAAAAAAAAAAAAAAAAAAAAAAAAAAAAAAAAAAAAAAAAAAAAAAAAAAAAAAAAAAAAAAAAAAAAAAAAAAAAAAAAAAAAAAAAAAAAAAAAAAAAAAAAAAAAAAAAAAAAAAAAAAAAAAAAAAAAAAAAAAAAAAAAAAAAAAAAAAAAAAAAAAAAAAAAAAAAAAAAAAAAAAAAAAAAAAAAAAAAAAAAAAAAAAAAAAAAAAAAAAAAAAAAAAAAAAAAAAAAAAAAAAAAAAAAAAAAAAAAAAAAAAAAAAAAAAAAAAAAAAAAAAAAAAAAAAAAAAAAAAAAAAAAAAAAAAAAAAAAAAAAAAAAAAAAAAAAAAAAAAAAAAAAAAAAAAAAAAAAAAAAAAAAAAAAAAAAAAAAAAAAAAAAAAAAAAAAAAAAAAAAAAAAAAAAAAAAAAAAAAAAAAAAAAAAAAAAAAAAAAAAAAAAAAAAAAAAAAAAAAAAAAEAAAAAAAAAAAAAAAAAAAAAAAAAAAAAAAAAAAAAAAAAAAAAAAAAAAAAAAAA0AAAAFNNVEoAAAAAEADAAHsAMAA4ADQARgAwADEARgBBAC0ARQA2ADMANAAtADQARAA3ADcALQA4ADMARQBFAC0AMAA3ADQAOAAxADcAQwAwADMANQA4ADEAfQAAAFJFU0RMTABVbmlyZXNETEwAUGFwZXJTaXplAExFVFRFUgBPcmllbnRhdGlvbgBQT1JUUkFJVABSZXNvbHV0aW9uAFJlc09wdGlvbjEAQ29sb3JNb2RlAENvbG9yAAAAAAAAAAAAAAAAAAAAAAAAAAAAACwRAABWNERNAQAAAAAAAACcCnAiHAAAAOwAAAADAAAA+gFPCDTmd02D7gdIF8A1gdAAAABMAAAAAwAAAAAIAAAAAAAAAAAAAAMAAAAACAAAKgAAAAAIAAADAAAAQAAAAFYAAAAAEAAARABvAGMAdQBtAGUAbgB0AFUAcwBlAHIAUABhAHMAcwB3AG8AcgBkAAAARABvAGMAdQBtAGUAbgB0AE8AdwBuAGUAcgBQAGEAcwBzAHcAbwByAGQAAABEAG8AYwB1AG0AZQBuAHQAQwByAHkAcAB0AFMAZQBjAHUAcgBpAHQAeQAAAAAAAAAAAAAAAAAAAAAAAAAAAAAAAAAAAAAAAAAAAAAAAAAAAAAAAAAAAAAAAAAAAAAAAAAAAAAAAAAAAAAAAAAAAAAAAAAAAAAAAAAAAAAAAAAAAAAAAAAAAAAAAAAAAAAAAAAAAAAAAAAAAAAAAAAAAAAAAAAAAAAAAAAAAAAAAAAAAAAAAAAAAAAAAAAAAAAAAAAAAAAAAAAAAAAAAAAAAAAAAAAAAAAAAAAAAAAAAAAAAAAAAAAAAAAAAAAAAAAAAAAAAAAAAAAAAAAAAAAAAAAAAAAAAAAAAAAAAAAAAAAAAAAAAAAAAAAAAAAAAAAAAAAAAAAAAAAAAAAAAAAAAAAAAAAAAAAAAAAAAAAAAAAAAAAAAAAAAAAAAAAAAAAAAAAAAAAAAAAAAAAAAAAAAAAAAAAAAAAAAAAAAAAAAAAAAAAAAAAAAAAAAAAAAAAAAAAAAAAAAAAAAAAAAAAAAAAAAAAAAAAAAAAAAAAAAAAAAAAAAAAAAAAAAAAAAAAAAAAAAAAAAAAAAAAAAAAAAAAAAAAAAAAAAAAAAAAAAAAAAAAAAAAAAAAAAAAAAAAAAAAAAAAAAAAAAAAAAAAAAAAAAAAAAAAAAAAAAAAAAAAAAAAAAAAAAAAAAAAAAAAAAAAAAAAAAAAAAAAAAAAAAAAAAAAAAAAAAAAAAAAAAAAAAAAAAAAAAAAAAAAAAAAAAAAAAAAAAAAAAAAAAAAAAAAAAAAAAAAAAAAAAAAAAAAAAAAAAAAAAAAAAAAAAAAAAAAAAAAAAAAAAAAAAAAAAAAAAAAAAAAAAAAAAAAAAAAAAAAAAAAAAAAAAAAAAAAAAAAAAAAAAAAAAAAAAAAAAAAAAAAAAAAAAAAAAAAAAAAAAAAAAAAAAAAAAAAAAAAAAAAAAAAAAAAAAAAAAAAAAAAAAAAAAAAAAAAAAAAAAAAAAAAAAAAAAAAAAAAAAAAAAAAAAAAAAAAAAAAAAAAAAAAAAAAAAAAAAAAAAAAAAAAAAAAAAAAAAAAAAAAAAAAAAAAAAAAAAAAAAAAAAAAAAAAAAAAAAAAAAAAAAAAAAAAAAAAAAAAAAAAAAAAAAAAAAAAAAAAAAAAAAAAAAAAAAAAAAAAAAAAAAAAAAAAAAAAAAAAAAAAAAAAAAAAAAAAAAAAAAAAAAAAAAAAAAAAAAAAAAAAAAAAAAAAAAAAAAAAAAAAAAAAAAAAAAAAAAAAAAAAAAAAAAAAAAAAAAAAAAAAAAAAAAAAAAAAAAAAAAAAAAAAAAAAAAAAAAAAAAAAAAAAAAAAAAAAAAAAAAAAAAAAAAAAAAAAAAAAAAAAAAAAAAAAAAAAAAAAAAAAAAAAAAAAAAAAAAAAAAAAAAAAAAAAAAAAAAAAAAAAAAAAAAAAAAAAAAAAAAAAAAAAAAAAAAAAAAAAAAAAAAAAAAAAAAAAAAAAAAAAAAAAAAAAAAAAAAAAAAAAAAAAAAAAAAAAAAAAAAAAAAAAAAAAAAAAAAAAAAAAAAAAAAAAAAAAAAAAAAAAAAAAAAAAAAAAAAAAAAAAAAAAAAAAAAAAAAAAAAAAAAAAAAAAAAAAAAAAAAAAAAAAAAAAAAAAAAAAAAAAAAAAAAAAAAAAAAAAAAAAAAAAAAAAAAAAAAAAAAAAAAAAAAAAAAAAAAAAAAAAAAAAAAAAAAAAAAAAAAAAAAAAAAAAAAAAAAAAAAAAAAAAAAAAAAAAAAAAAAAAAAAAAAAAAAAAAAAAAAAAAAAAAAAAAAAAAAAAAAAAAAAAAAAAAAAAAAAAAAAAAAAAAAAAAAAAAAAAAAAAAAAAAAAAAAAAAAAAAAAAAAAAAAAAAAAAAAAAAAAAAAAAAAAAAAAAAAAAAAAAAAAAAAAAAAAAAAAAAAAAAAAAAAAAAAAAAAAAAAAAAAAAAAAAAAAAAAAAAAAAAAAAAAAAAAAAAAAAAAAAAAAAAAAAAAAAAAAAAAAAAAAAAAAAAAAAAAAAAAAAAAAAAAAAAAAAAAAAAAAAAAAAAAAAAAAAAAAAAAAAAAAAAAAAAAAAAAAAAAAAAAAAAAAAAAAAAAAAAAAAAAAAAAAAAAAAAAAAAAAAAAAAAAAAAAAAAAAAAAAAAAAAAAAAAAAAAAAAAAAAAAAAAAAAAAAAAAAAAAAAAAAAAAAAAAAAAAAAAAAAAAAAAAAAAAAAAAAAAAAAAAAAAAAAAAAAAAAAAAAAAAAAAAAAAAAAAAAAAAAAAAAAAAAAAAAAAAAAAAAAAAAAAAAAAAAAAAAAAAAAAAAAAAAAAAAAAAAAAAAAAAAAAAAAAAAAAAAAAAAAAAAAAAAAAAAAAAAAAAAAAAAAAAAAAAAAAAAAAAAAAAAAAAAAAAAAAAAAAAAAAAAAAAAAAAAAAAAAAAAAAAAAAAAAAAAAAAAAAAAAAAAAAAAAAAAAAAAAAAAAAAAAAAAAAAAAAAAAAAAAAAAAAAAAAAAAAAAAAAAAAAAAAAAAAAAAAAAAAAAAAAAAAAAAAAAAAAAAAAAAAAAAAAAAAAAAAAAAAAAAAAAAAAAAAAAAAAAAAAAAAAAAAAAAAAAAAAAAAAAAAAAAAAAAAAAAAAAAAAAAAAAAAAAAAAAAAAAAAAAAAAAAAAAAAAAAAAAAAAAAAAAAAAAAAAAAAAAAAAAAAAAAAAAAAAAAAAAAAAAAAAAAAAAAAAAAAAAAAAAAAAAAAAAAAAAAAAAAAAAAAAAAAAAAAAAAAAAAAAAAAAAAAAAAAAAAAAAAAAAAAAAAAAAAAAAAAAAAAAAAAAAAAAAAAAAAAAAAAAAAAAAAAAAAAAAAAAAAAAAAAAAAAAAAAAAAAAAAAAAAAAAAAAAAAAAAAAAAAAAAAAAAAAAAAAAAAAAAAAAAAAAAAAAAAAAAAAAAAAAAAAAAAAAAAAAAAAAAAAAAAAAAAAAAAAAAAAAAAAAAAAAAAAAAAAAAAAAAAAAAAAAAAAAAAAAAAAAAAAAAAAAAAAAAAAAAAAAAAAAAAAAAAAAAAAAAAAAAAAAAAAAAAAAAAAAAAAAAAAAAAAAAAAAAAAAAAAAAAAAAAAAAAAAAAAAAAAAAAAAAAAAAAAAAAAAAAAAAAAAAAAAAAAAAAAAAAAAAAAAAAAAAAAAAAAAAAAAAAAAAAAAAAAAAAAAAAAAAAAAAAAAAAAAAAAAAAAAAAAAAAAAAAAAAAAAAAAAAAAAAAAAAAAAAAAAAAAAAAAAAAAAAAAAAAAAAAAAAAAAAAAAAAAAAAAAAAAAAAAAAAAAAAAAAAAAAAAAAAAAAAAAAAAAAAAAAAAAAAAAAAAAAAAAAAAAAAAAAAAAAAAAAAAAAAAAAAAAAAAAAAAAAAAAAAAAAAAAAAAAAAAAAAAAAAAAAAAAAAAAAAAAAAAAAAAAAAAAAAAAAAAAAAAAAAAAAAAAAAAAAAAAAAAAAAAAAAAAAAAAAAAAAAAAAAAAAAAAAAAAAAAAAAAAAAAAAAAAAAAAAAAAAAAAAAAAAAAAAAAAAAAAAAAAAAAAAAAAAAAAAAAAAAAAAAAAAAAAAAAAAAAAAAAAAAAAAAAAAAAAAAAAAAAAAAAAAAAAAAAAAAAAAAAAAAAAAAAAAAAAAAAAAAAAAAAAAAAAAAAAAAAAAAAAAAAAAAAAAAAAAAAAAAAAAAAAAAAAAAAAAAAAAAAAAAAAAAAAAAAAAAAAAAAAAAAAAAAAAAAAAAAAAAAAAAAAAAAAAAAAAAAAAAAAAAAAAAAAAAAAAAAAAAAAAAAAAAAAAAAAAAAAAAAAAAAAAAAAAAAAAAAAAAAAAAAAAAAAAAAAAAAAAAAAAAAAAAAAAAAAAAAAAAAAAAAAAAAAAAAAAAAAAAAAAAAAAAAAAAAAAAAAAAAAAAAAAAAAAAAAAAAAAAAAAAAAAAAAAAAAAAAAAAAAAAAAAAAAAAAAAAAAAAAAAAAAAAAAAAAAAAAAAAAAAAAAAAAAAAAAAAAAAAAAAAAAAAAAAAAAAAAAAAAAAAAAAAAAAAAAAAAAAAAAAAAAAAAAAAAAAAAAAAAAAAAAAAAAAAAAAAAAAAAAAAAAAAAAAAAAAAAAAAAAAAAAAAAAAAAAAAAAAAAAAAAAAAAAAAAAAAAAAAAAAAAAAAAAAAAAAAAAAAAAAAAAAAAAAAAAAAAAAAAAAAAAAAAAAAAAAAAAAAAAAAAAAAAAAAAAAAAAAAAAAAAAAAAAAAAAAAAAAAAAAAAAAAAAAAAAAAAAAAAAAAAAAAAAAAAAAAAAAAAAAAAAAAAAAAAAAAAAAAAAAAAAAAAAAAAAAAAAAAAAAAAAAAAAAAAAAAAAAAAAAAAAAAAAAAAAAAAAAAAAAAAAAAAAAAAAAAAAAAAAAAAAAAAAAAAAAAAAAAAAAAAAAAAAAAAAAAAAAAAAAAAAAAAAAAAAAAAAAAAAAAAAAAAAAAAAAAAAAAAAAAAAAAAAAAAAAAAAAAAAAAAAAAAAAAAAAAAAAAAAAAAAAAAAAAAAAAAAAAAAAAAAAAAAAAAAAAAAAAAAAAAAAAAAAAAAAAAAAAAAAAAAAAAAAAAAAAAAAAAAAAAAAAAAAAAAAAAAAAAAAAAAAAAAAAAAAAAAAAAAAAAAAAAAAAAAAAAAAAAAAAAAAAAAAAAAAAAAAAAAAAAAAAAAAAAAAAAAAAAAAAAAAAAAAAAAAAAAAAAAAAAAAAAAAAAAAAAAAAAAAAAAAAAAAAAAAAAAAAAAAAAAAAAAAAAAAAAAAAAAAAAAAAAAAAAAAAAAAAAAAAAAAAAAAAAAAAAAAAAAAAAAAAAAAAAAAAAAAAAAAAAAAAAAAAAAAAAAAAAAAAAAAAAAAAAAAAAAAAAAAAAAAAAAAAAAAAAAAAAAAAAAAAAAAAAAAAAAAAAAAAAAAAAAAAAAAAAAAAAAAAAAAAAAAAAAAAAAAAAAAAAAAAAAAAAAAAAAAAAAAAAAAAAAAAAAAAAAAAAAAAAAAAAAAAAAAAAAAAAAAAAAAAAAAAAAAAAAAAAAAAAAAAAAAAAAAAAAAAAAAAAAAAAAAAAAAAAAAAAAAAAAAAAAAAAAAAAAAAAAAAAAAAAAAAAAAAAAAAAAAAAAAAAAAAAAAAAAAAAAAAAAAAAAAAAAAAAAAAAAAAAAAAAAAAAAAAAAAAAAAAAAAAAAAAAAAAAAAAAAAAAAAAAAAAAAAAAAAAAAAAAAAAAAAAAAAAAAAAAAAAAAAAAAAAAAAAAAAAAAAAAAAAAAAAAAAAAAAAAAAAAAAAAAAAAAAAAAAAAAAAAAAAAAAAAAAAAAAAAAAAAAAAAAAAAAAAAAAAAAAAAAAAAAAAAAAAAAAAAAAAAAAAAAAAAAAAAAAAAAAAAAAAAAAAAAAAAAAAAAAAAAAAAAAAAAAAAAAAAAAAAAAAAAAAAAAAAAAAAAAAAAAAAAAAAAAAAAAAAAAAAAAAAAAAAAAAAAAAAAAAAAAAAAAAAAAAAAAAAAAAAAAAAAAAAAAAAAAAAAAAAAAAAAAAAAAAAAAAAAAAAAAAAAAAAAAAAAAAAAAAAAAAAAAAAAAAAAAAAAAAAAAAAAAAAAAAAAAAAAAAAAAAAAAAAAAAAAAAAAASAENPTVBBVF9EVVBMRVhfTU9ERRMARHVwbGV4TW9kZTo6VW5rbm93bgwAUFJJTlRFUl9OQU1FFgBNaWNyb3NvZnQgUHJpbnQgdG8gUERGCwBEUklWRVJfTkFNRRYATWljcm9zb2Z0IFByaW50IFRvIFBERg==</config:config-item>
       <config:config-item config:name="IsPrintHandout" config:type="boolean">false</config:config-item>
       <config:config-item config:name="PrinterPaperFromSetup" config:type="boolean">false</config:config-item>
       <config:config-item config:name="IsPrintPageName" config:type="boolean">false</config:config-item>
@@ -9465,7 +9411,7 @@
 </file>
 
 <file path=styles.xml><?xml version="1.0" encoding="utf-8"?>
-<office:document-styles xmlns:office="urn:oasis:names:tc:opendocument:xmlns:office:1.0" xmlns:ooo="http://openoffice.org/2004/office" xmlns:fo="urn:oasis:names:tc:opendocument:xmlns:xsl-fo-compatible:1.0" xmlns:xlink="http://www.w3.org/1999/xlink" xmlns:dc="http://purl.org/dc/elements/1.1/" xmlns:meta="urn:oasis:names:tc:opendocument:xmlns:meta:1.0" xmlns:style="urn:oasis:names:tc:opendocument:xmlns:style:1.0" xmlns:text="urn:oasis:names:tc:opendocument:xmlns:text:1.0" xmlns:rpt="http://openoffice.org/2005/report" xmlns:draw="urn:oasis:names:tc:opendocument:xmlns:drawing:1.0" xmlns:dr3d="urn:oasis:names:tc:opendocument:xmlns:dr3d:1.0" xmlns:svg="urn:oasis:names:tc:opendocument:xmlns:svg-compatible:1.0" xmlns:chart="urn:oasis:names:tc:opendocument:xmlns:chart:1.0" xmlns:table="urn:oasis:names:tc:opendocument:xmlns:table:1.0" xmlns:number="urn:oasis:names:tc:opendocument:xmlns:datastyle:1.0" xmlns:ooow="http://openoffice.org/2004/writer" xmlns:oooc="http://openoffice.org/2004/calc" xmlns:field="urn:openoffice:names:experimental:ooo-ms-interop:xmlns:field:1.0" xmlns:of="urn:oasis:names:tc:opendocument:xmlns:of:1.2" xmlns:tableooo="http://openoffice.org/2009/table" xmlns:calcext="urn:org:documentfoundation:names:experimental:calc:xmlns:calcext:1.0" xmlns:drawooo="http://openoffice.org/2010/draw" xmlns:xhtml="http://www.w3.org/1999/xhtml" xmlns:loext="urn:org:documentfoundation:names:experimental:office:xmlns:loext:1.0" xmlns:math="http://www.w3.org/1998/Math/MathML" xmlns:form="urn:oasis:names:tc:opendocument:xmlns:form:1.0" xmlns:script="urn:oasis:names:tc:opendocument:xmlns:script:1.0" xmlns:css3t="http://www.w3.org/TR/css3-text/" xmlns:dom="http://www.w3.org/2001/xml-events" xmlns:grddl="http://www.w3.org/2003/g/data-view#" xmlns:presentation="urn:oasis:names:tc:opendocument:xmlns:presentation:1.0" xmlns:smil="urn:oasis:names:tc:opendocument:xmlns:smil-compatible:1.0" xmlns:anim="urn:oasis:names:tc:opendocument:xmlns:animation:1.0" xmlns:officeooo="http://openoffice.org/2009/office" office:version="1.4">
+<office:document-styles xmlns:office="urn:oasis:names:tc:opendocument:xmlns:office:1.0" xmlns:ooo="http://openoffice.org/2004/office" xmlns:fo="urn:oasis:names:tc:opendocument:xmlns:xsl-fo-compatible:1.0" xmlns:xlink="http://www.w3.org/1999/xlink" xmlns:dc="http://purl.org/dc/elements/1.1/" xmlns:meta="urn:oasis:names:tc:opendocument:xmlns:meta:1.0" xmlns:style="urn:oasis:names:tc:opendocument:xmlns:style:1.0" xmlns:text="urn:oasis:names:tc:opendocument:xmlns:text:1.0" xmlns:rpt="http://openoffice.org/2005/report" xmlns:draw="urn:oasis:names:tc:opendocument:xmlns:drawing:1.0" xmlns:dr3d="urn:oasis:names:tc:opendocument:xmlns:dr3d:1.0" xmlns:svg="urn:oasis:names:tc:opendocument:xmlns:svg-compatible:1.0" xmlns:chart="urn:oasis:names:tc:opendocument:xmlns:chart:1.0" xmlns:table="urn:oasis:names:tc:opendocument:xmlns:table:1.0" xmlns:number="urn:oasis:names:tc:opendocument:xmlns:datastyle:1.0" xmlns:ooow="http://openoffice.org/2004/writer" xmlns:oooc="http://openoffice.org/2004/calc" xmlns:css3t="http://www.w3.org/TR/css3-text/" xmlns:of="urn:oasis:names:tc:opendocument:xmlns:of:1.2" xmlns:tableooo="http://openoffice.org/2009/table" xmlns:calcext="urn:org:documentfoundation:names:experimental:calc:xmlns:calcext:1.0" xmlns:drawooo="http://openoffice.org/2010/draw" xmlns:xhtml="http://www.w3.org/1999/xhtml" xmlns:loext="urn:org:documentfoundation:names:experimental:office:xmlns:loext:1.0" xmlns:grddl="http://www.w3.org/2003/g/data-view#" xmlns:field="urn:openoffice:names:experimental:ooo-ms-interop:xmlns:field:1.0" xmlns:math="http://www.w3.org/1998/Math/MathML" xmlns:form="urn:oasis:names:tc:opendocument:xmlns:form:1.0" xmlns:script="urn:oasis:names:tc:opendocument:xmlns:script:1.0" xmlns:dom="http://www.w3.org/2001/xml-events" xmlns:presentation="urn:oasis:names:tc:opendocument:xmlns:presentation:1.0" xmlns:smil="urn:oasis:names:tc:opendocument:xmlns:smil-compatible:1.0" xmlns:anim="urn:oasis:names:tc:opendocument:xmlns:animation:1.0" xmlns:officeooo="http://openoffice.org/2009/office" office:version="1.4">
   <office:font-face-decls>
     <style:font-face style:name="+mn-ea" svg:font-family="+mn-ea"/>
     <style:font-face style:name="+mn-lt" svg:font-family="+mn-lt"/>
@@ -9525,8 +9471,8 @@
     <draw:fill-image draw:name="msFillBitmap_20_9" draw:display-name="msFillBitmap 9" xlink:href="Pictures/10000001000000410000006C77E53E5F.png" xlink:type="simple" xlink:show="embed" xlink:actuate="onLoad"/>
     <draw:marker draw:name="Arrow" svg:viewBox="0 0 20 30" svg:d="M10 0l-10 30h20z"/>
     <style:default-style style:family="graphic">
-      <style:graphic-properties svg:stroke-color="#3465a4" draw:fill-color="#729fcf" fo:wrap-option="no-wrap"/>
-      <style:paragraph-properties style:text-autospace="ideograph-alpha" style:punctuation-wrap="simple" style:line-break="strict" style:writing-mode="lr-tb" style:font-independent-line-spacing="false">
+      <style:graphic-properties svg:stroke-color="#3465a4" draw:fill-color="#729fcf" fo:wrap-option="no-wrap" style:writing-mode="lr-tb"/>
+      <style:paragraph-properties style:text-autospace="ideograph-alpha" style:punctuation-wrap="simple" style:line-break="strict" loext:tab-stop-distance="0cm" style:font-independent-line-spacing="false">
         <style:tab-stops/>
       </style:paragraph-properties>
       <style:text-properties style:use-window-font-color="true" loext:opacity="0%" style:font-name="Liberation Serif" fo:font-size="24pt" fo:language="en" fo:country="IN" style:font-name-asian="Segoe UI" style:font-size-asian="24pt" style:language-asian="zh" style:country-asian="CN" style:font-name-complex="Tahoma" style:font-size-complex="24pt" style:language-complex="hi" style:country-complex="IN"/>
@@ -9582,7 +9528,7 @@
         </text:list-style>
       </style:graphic-properties>
       <style:paragraph-properties fo:margin-left="0cm" fo:margin-right="0cm" fo:margin-top="0cm" fo:margin-bottom="0cm" fo:line-height="100%" fo:text-indent="0cm"/>
-      <style:text-properties fo:font-variant="normal" fo:text-transform="none" style:use-window-font-color="true" loext:opacity="0%" style:text-outline="false" style:text-line-through-style="none" style:text-line-through-type="none" style:font-name="Liberation Sans" fo:font-family="'Liberation Sans'" style:font-family-generic="roman" style:font-pitch="variable" fo:font-size="18pt" fo:font-style="normal" fo:text-shadow="none" style:text-underline-style="none" fo:font-weight="normal" style:letter-kerning="true" style:font-name-asian="Microsoft YaHei" style:font-family-asian="'Microsoft YaHei'" style:font-family-generic-asian="system" style:font-pitch-asian="variable" style:font-size-asian="18pt" style:font-style-asian="normal" style:font-weight-asian="normal" style:font-name-complex="Lucida Sans" style:font-family-complex="'Lucida Sans'" style:font-family-generic-complex="system" style:font-pitch-complex="variable" style:font-size-complex="18pt" style:font-style-complex="normal" style:font-weight-complex="normal" style:text-emphasize="none" style:font-relief="none" loext:font-optical-sizing="auto" style:text-overline-style="none" style:text-overline-color="font-color"/>
+      <style:text-properties fo:font-variant="normal" fo:text-transform="none" style:use-window-font-color="true" loext:opacity="0%" style:text-outline="false" style:text-line-through-style="none" style:text-line-through-type="none" style:font-name="Liberation Sans" fo:font-family="'Liberation Sans'" style:font-family-generic="roman" style:font-pitch="variable" fo:font-size="18pt" fo:font-style="normal" fo:text-shadow="none" style:text-underline-style="none" fo:font-weight="normal" style:letter-kerning="true" style:font-name-asian="Microsoft YaHei" style:font-family-asian="'Microsoft YaHei'" style:font-family-generic-asian="system" style:font-pitch-asian="variable" style:font-size-asian="18pt" style:font-style-asian="normal" style:font-weight-asian="normal" style:font-name-complex="Lucida Sans" style:font-family-complex="'Lucida Sans'" style:font-family-generic-complex="system" style:font-pitch-complex="variable" style:font-size-complex="18pt" style:font-style-complex="normal" style:font-weight-complex="normal" style:text-emphasize="none" style:font-relief="none" style:text-overline-style="none" style:text-overline-color="font-color"/>
     </style:style>
     <style:style style:name="objectwithoutfill" style:family="graphic" style:parent-style-name="standard">
       <style:graphic-properties draw:fill="none"/>
@@ -9681,16 +9627,16 @@
     </style:style>
     <style:style style:name="DEFAULT-background" style:family="presentation">
       <style:graphic-properties draw:stroke="none" draw:fill="solid" draw:fill-color="#ffffff"/>
-      <style:text-properties style:letter-kerning="true" loext:font-optical-sizing="auto"/>
+      <style:text-properties style:letter-kerning="true"/>
     </style:style>
     <style:style style:name="DEFAULT-backgroundobjects" style:family="presentation">
       <style:graphic-properties draw:textarea-horizontal-align="justify" draw:shadow="hidden" draw:shadow-offset-x="0.2cm" draw:shadow-offset-y="0.2cm" draw:shadow-color="#808080"/>
-      <style:text-properties style:letter-kerning="true" loext:font-optical-sizing="auto"/>
+      <style:text-properties style:letter-kerning="true"/>
     </style:style>
     <style:style style:name="DEFAULT-notes" style:family="presentation">
       <style:graphic-properties draw:stroke="none" draw:fill="none"/>
       <style:paragraph-properties fo:margin-left="0cm" fo:margin-right="0cm" fo:text-indent="-0.6cm"/>
-      <style:text-properties fo:font-variant="normal" fo:text-transform="none" style:use-window-font-color="true" loext:opacity="0%" style:text-outline="false" style:text-line-through-style="none" style:text-line-through-type="none" style:font-name="Liberation Sans" fo:font-family="'Liberation Sans'" style:font-family-generic="roman" style:font-pitch="variable" fo:font-size="20pt" fo:font-style="normal" fo:text-shadow="none" style:text-underline-style="none" fo:font-weight="normal" style:letter-kerning="true" fo:background-color="transparent" style:font-name-asian="Microsoft YaHei" style:font-family-asian="'Microsoft YaHei'" style:font-family-generic-asian="system" style:font-pitch-asian="variable" style:font-size-asian="20pt" style:font-style-asian="normal" style:font-weight-asian="normal" style:font-name-complex="Lucida Sans" style:font-family-complex="'Lucida Sans'" style:font-family-generic-complex="system" style:font-pitch-complex="variable" style:font-size-complex="20pt" style:font-style-complex="normal" style:font-weight-complex="normal" style:text-emphasize="none" style:font-relief="none" loext:font-optical-sizing="auto" style:text-overline-style="none" style:text-overline-color="font-color"/>
+      <style:text-properties fo:font-variant="normal" fo:text-transform="none" style:use-window-font-color="true" loext:opacity="0%" style:text-outline="false" style:text-line-through-style="none" style:text-line-through-type="none" style:font-name="Liberation Sans" fo:font-family="'Liberation Sans'" style:font-family-generic="roman" style:font-pitch="variable" fo:font-size="20pt" fo:font-style="normal" fo:text-shadow="none" style:text-underline-style="none" fo:font-weight="normal" style:letter-kerning="true" fo:background-color="transparent" style:font-name-asian="Microsoft YaHei" style:font-family-asian="'Microsoft YaHei'" style:font-family-generic-asian="system" style:font-pitch-asian="variable" style:font-size-asian="20pt" style:font-style-asian="normal" style:font-weight-asian="normal" style:font-name-complex="Lucida Sans" style:font-family-complex="'Lucida Sans'" style:font-family-generic-complex="system" style:font-pitch-complex="variable" style:font-size-complex="20pt" style:font-style-complex="normal" style:font-weight-complex="normal" style:text-emphasize="none" style:font-relief="none" style:text-overline-style="none" style:text-overline-color="font-color"/>
     </style:style>
     <style:style style:name="DEFAULT-outline1" style:family="presentation">
       <style:graphic-properties draw:stroke="none" draw:fill="none" draw:auto-grow-height="false" draw:fit-to-size="false" style:shrink-to-fit="true">
@@ -9737,31 +9683,31 @@
           </text:list-level-style-bullet>
         </text:list-style>
       </style:graphic-properties>
-      <style:paragraph-properties fo:margin-left="0cm" fo:margin-right="0cm" fo:margin-top="0.5cm" fo:margin-bottom="0cm" fo:line-height="100%" fo:text-align="left" fo:text-indent="0cm" loext:paragraph-composer="false"/>
-      <style:text-properties fo:font-variant="normal" fo:text-transform="none" fo:color="#000000" loext:opacity="100%" style:text-outline="false" style:text-line-through-style="none" style:text-line-through-type="none" style:text-position="0% 100%" style:font-name="Arial" fo:font-family="Arial" fo:font-size="32pt" fo:letter-spacing="normal" fo:language="en" fo:country="US" fo:font-style="normal" fo:text-shadow="none" style:text-underline-style="none" fo:font-weight="normal" style:letter-kerning="true" fo:background-color="transparent" style:font-name-asian="Microsoft YaHei" style:font-family-asian="'Microsoft YaHei'" style:font-family-generic-asian="system" style:font-pitch-asian="variable" style:font-size-asian="32pt" style:font-style-asian="normal" style:font-weight-asian="normal" style:font-name-complex="Lucida Sans" style:font-family-complex="'Lucida Sans'" style:font-family-generic-complex="system" style:font-pitch-complex="variable" style:font-size-complex="32pt" style:font-style-complex="normal" style:font-weight-complex="normal" style:text-emphasize="none" style:font-relief="none" loext:font-optical-sizing="auto" style:text-overline-style="none" style:text-overline-color="font-color"/>
+      <style:paragraph-properties fo:margin-left="0cm" fo:margin-right="0cm" fo:margin-top="0.5cm" fo:margin-bottom="0cm" fo:line-height="100%" fo:text-align="left" fo:text-indent="0cm"/>
+      <style:text-properties fo:font-variant="normal" fo:text-transform="none" fo:color="#000000" loext:opacity="100%" style:text-outline="false" style:text-line-through-style="none" style:text-line-through-type="none" style:text-position="0% 100%" style:font-name="Arial" fo:font-family="Arial" fo:font-size="32pt" fo:letter-spacing="normal" fo:language="en" fo:country="US" fo:font-style="normal" fo:text-shadow="none" style:text-underline-style="none" fo:font-weight="normal" style:letter-kerning="true" fo:background-color="transparent" style:font-name-asian="Microsoft YaHei" style:font-family-asian="'Microsoft YaHei'" style:font-family-generic-asian="system" style:font-pitch-asian="variable" style:font-size-asian="32pt" style:font-style-asian="normal" style:font-weight-asian="normal" style:font-name-complex="Lucida Sans" style:font-family-complex="'Lucida Sans'" style:font-family-generic-complex="system" style:font-pitch-complex="variable" style:font-size-complex="32pt" style:font-style-complex="normal" style:font-weight-complex="normal" style:text-emphasize="none" style:font-relief="none" style:text-overline-style="none" style:text-overline-color="font-color"/>
     </style:style>
     <style:style style:name="DEFAULT-outline2" style:family="presentation" style:parent-style-name="DEFAULT-outline1">
-      <style:paragraph-properties fo:margin-left="0cm" fo:margin-right="0cm" fo:margin-top="0.4cm" fo:margin-bottom="0cm" fo:line-height="100%" fo:text-align="left" fo:text-indent="0cm" loext:paragraph-composer="false"/>
+      <style:paragraph-properties fo:margin-left="0cm" fo:margin-right="0cm" fo:margin-top="0.4cm" fo:margin-bottom="0cm" fo:line-height="100%" fo:text-align="left" fo:text-indent="0cm"/>
       <style:text-properties fo:font-variant="normal" fo:text-transform="none" fo:color="#000000" loext:opacity="100%" style:text-outline="false" style:text-line-through-style="none" style:text-line-through-type="none" style:text-position="0% 100%" style:font-name="Arial" fo:font-family="Arial" fo:font-size="28pt" fo:letter-spacing="normal" fo:language="en" fo:country="US" fo:font-style="normal" style:text-underline-style="none" fo:font-weight="normal" fo:background-color="transparent" style:font-size-asian="28pt" style:font-style-asian="normal" style:font-weight-asian="normal" style:font-size-complex="28pt" style:font-style-complex="normal" style:font-weight-complex="normal"/>
     </style:style>
     <style:style style:name="DEFAULT-outline3" style:family="presentation" style:parent-style-name="DEFAULT-outline2">
-      <style:paragraph-properties fo:margin-left="0cm" fo:margin-right="0cm" fo:margin-top="0.3cm" fo:margin-bottom="0cm" fo:line-height="100%" fo:text-align="left" fo:text-indent="0cm" loext:paragraph-composer="false"/>
+      <style:paragraph-properties fo:margin-left="0cm" fo:margin-right="0cm" fo:margin-top="0.3cm" fo:margin-bottom="0cm" fo:line-height="100%" fo:text-align="left" fo:text-indent="0cm"/>
       <style:text-properties fo:font-variant="normal" fo:text-transform="none" fo:color="#000000" loext:opacity="100%" style:text-outline="false" style:text-line-through-style="none" style:text-line-through-type="none" style:text-position="0% 100%" style:font-name="Arial" fo:font-family="Arial" fo:font-size="24pt" fo:letter-spacing="normal" fo:language="en" fo:country="US" fo:font-style="normal" style:text-underline-style="none" fo:font-weight="normal" fo:background-color="transparent" style:font-size-asian="24pt" style:font-style-asian="normal" style:font-weight-asian="normal" style:font-size-complex="24pt" style:font-style-complex="normal" style:font-weight-complex="normal"/>
     </style:style>
     <style:style style:name="DEFAULT-outline4" style:family="presentation" style:parent-style-name="DEFAULT-outline3">
-      <style:paragraph-properties fo:margin-left="0cm" fo:margin-right="0cm" fo:margin-top="0.2cm" fo:margin-bottom="0cm" fo:line-height="100%" fo:text-align="left" fo:text-indent="0cm" loext:paragraph-composer="false"/>
+      <style:paragraph-properties fo:margin-left="0cm" fo:margin-right="0cm" fo:margin-top="0.2cm" fo:margin-bottom="0cm" fo:line-height="100%" fo:text-align="left" fo:text-indent="0cm"/>
       <style:text-properties fo:font-variant="normal" fo:text-transform="none" fo:color="#000000" loext:opacity="100%" style:text-outline="false" style:text-line-through-style="none" style:text-line-through-type="none" style:text-position="0% 100%" style:font-name="Arial" fo:font-family="Arial" fo:font-size="20pt" fo:letter-spacing="normal" fo:language="en" fo:country="US" fo:font-style="normal" style:text-underline-style="none" fo:font-weight="normal" fo:background-color="transparent" style:font-size-asian="20pt" style:font-style-asian="normal" style:font-weight-asian="normal" style:font-size-complex="20pt" style:font-style-complex="normal" style:font-weight-complex="normal"/>
     </style:style>
     <style:style style:name="DEFAULT-outline5" style:family="presentation" style:parent-style-name="DEFAULT-outline4">
-      <style:paragraph-properties fo:margin-left="0cm" fo:margin-right="0cm" fo:margin-top="0.1cm" fo:margin-bottom="0cm" fo:line-height="100%" fo:text-align="left" fo:text-indent="0cm" loext:paragraph-composer="false"/>
+      <style:paragraph-properties fo:margin-left="0cm" fo:margin-right="0cm" fo:margin-top="0.1cm" fo:margin-bottom="0cm" fo:line-height="100%" fo:text-align="left" fo:text-indent="0cm"/>
       <style:text-properties fo:font-variant="normal" fo:text-transform="none" fo:color="#000000" loext:opacity="100%" style:text-outline="false" style:text-line-through-style="none" style:text-line-through-type="none" style:text-position="0% 100%" style:font-name="Arial" fo:font-family="Arial" fo:font-size="20pt" fo:letter-spacing="normal" fo:language="en" fo:country="US" fo:font-style="normal" style:text-underline-style="none" fo:font-weight="normal" fo:background-color="transparent" style:font-size-asian="20pt" style:font-style-asian="normal" style:font-weight-asian="normal" style:font-size-complex="20pt" style:font-style-complex="normal" style:font-weight-complex="normal"/>
     </style:style>
     <style:style style:name="DEFAULT-outline6" style:family="presentation" style:parent-style-name="DEFAULT-outline5">
-      <style:paragraph-properties fo:margin-left="0cm" fo:margin-right="0cm" fo:margin-top="0.1cm" fo:margin-bottom="0cm" fo:line-height="100%" fo:text-align="left" fo:text-indent="0cm" loext:paragraph-composer="false"/>
+      <style:paragraph-properties fo:margin-left="0cm" fo:margin-right="0cm" fo:margin-top="0.1cm" fo:margin-bottom="0cm" fo:line-height="100%" fo:text-align="left" fo:text-indent="0cm"/>
       <style:text-properties fo:font-variant="normal" fo:text-transform="none" fo:color="#000000" loext:opacity="100%" style:text-outline="false" style:text-line-through-style="none" style:text-line-through-type="none" style:text-position="0% 100%" style:font-name="Arial" fo:font-family="Arial" fo:font-size="20pt" fo:letter-spacing="normal" fo:language="en" fo:country="US" fo:font-style="normal" style:text-underline-style="none" fo:font-weight="normal" fo:background-color="transparent" style:font-size-asian="20pt" style:font-style-asian="normal" style:font-weight-asian="normal" style:font-size-complex="20pt" style:font-style-complex="normal" style:font-weight-complex="normal"/>
     </style:style>
     <style:style style:name="DEFAULT-outline7" style:family="presentation" style:parent-style-name="DEFAULT-outline6">
-      <style:paragraph-properties fo:margin-left="0cm" fo:margin-right="0cm" fo:margin-top="0.1cm" fo:margin-bottom="0cm" fo:line-height="100%" fo:text-align="left" fo:text-indent="0cm" loext:paragraph-composer="false"/>
+      <style:paragraph-properties fo:margin-left="0cm" fo:margin-right="0cm" fo:margin-top="0.1cm" fo:margin-bottom="0cm" fo:line-height="100%" fo:text-align="left" fo:text-indent="0cm"/>
       <style:text-properties fo:font-variant="normal" fo:text-transform="none" fo:color="#000000" loext:opacity="100%" style:text-outline="false" style:text-line-through-style="none" style:text-line-through-type="none" style:text-position="0% 100%" style:font-name="Arial" fo:font-family="Arial" fo:font-size="20pt" fo:letter-spacing="normal" fo:language="en" fo:country="US" fo:font-style="normal" style:text-underline-style="none" fo:font-weight="normal" fo:background-color="transparent" style:font-size-asian="20pt" style:font-style-asian="normal" style:font-weight-asian="normal" style:font-size-complex="20pt" style:font-style-complex="normal" style:font-weight-complex="normal"/>
     </style:style>
     <style:style style:name="DEFAULT-outline8" style:family="presentation" style:parent-style-name="DEFAULT-outline7">
@@ -9817,8 +9763,8 @@
           </text:list-level-style-bullet>
         </text:list-style>
       </style:graphic-properties>
-      <style:paragraph-properties fo:margin-left="0cm" fo:margin-right="0cm" fo:text-align="center" fo:text-indent="0cm" loext:paragraph-composer="false"/>
-      <style:text-properties fo:font-variant="normal" fo:text-transform="none" style:use-window-font-color="true" loext:opacity="0%" style:text-outline="false" style:text-line-through-style="none" style:text-line-through-type="none" style:font-name="Liberation Sans" fo:font-family="'Liberation Sans'" style:font-family-generic="roman" style:font-pitch="variable" fo:font-size="32pt" fo:font-style="normal" fo:text-shadow="none" style:text-underline-style="none" fo:font-weight="normal" style:letter-kerning="true" fo:background-color="transparent" style:font-name-asian="Microsoft YaHei" style:font-family-asian="'Microsoft YaHei'" style:font-family-generic-asian="system" style:font-pitch-asian="variable" style:font-size-asian="32pt" style:font-style-asian="normal" style:font-weight-asian="normal" style:font-name-complex="Lucida Sans" style:font-family-complex="'Lucida Sans'" style:font-family-generic-complex="system" style:font-pitch-complex="variable" style:font-size-complex="32pt" style:font-style-complex="normal" style:font-weight-complex="normal" style:text-emphasize="none" style:font-relief="none" loext:font-optical-sizing="auto" style:text-overline-style="none" style:text-overline-color="font-color"/>
+      <style:paragraph-properties fo:margin-left="0cm" fo:margin-right="0cm" fo:text-align="center" fo:text-indent="0cm"/>
+      <style:text-properties fo:font-variant="normal" fo:text-transform="none" style:use-window-font-color="true" loext:opacity="0%" style:text-outline="false" style:text-line-through-style="none" style:text-line-through-type="none" style:font-name="Liberation Sans" fo:font-family="'Liberation Sans'" style:font-family-generic="roman" style:font-pitch="variable" fo:font-size="32pt" fo:font-style="normal" fo:text-shadow="none" style:text-underline-style="none" fo:font-weight="normal" style:letter-kerning="true" fo:background-color="transparent" style:font-name-asian="Microsoft YaHei" style:font-family-asian="'Microsoft YaHei'" style:font-family-generic-asian="system" style:font-pitch-asian="variable" style:font-size-asian="32pt" style:font-style-asian="normal" style:font-weight-asian="normal" style:font-name-complex="Lucida Sans" style:font-family-complex="'Lucida Sans'" style:font-family-generic-complex="system" style:font-pitch-complex="variable" style:font-size-complex="32pt" style:font-style-complex="normal" style:font-weight-complex="normal" style:text-emphasize="none" style:font-relief="none" style:text-overline-style="none" style:text-overline-color="font-color"/>
     </style:style>
     <style:style style:name="DEFAULT-title" style:family="presentation">
       <style:graphic-properties draw:stroke="none" draw:fill="none" draw:textarea-vertical-align="middle">
@@ -9865,12 +9811,12 @@
           </text:list-level-style-bullet>
         </text:list-style>
       </style:graphic-properties>
-      <style:paragraph-properties fo:margin-left="0cm" fo:margin-right="0cm" fo:margin-top="0cm" fo:margin-bottom="0cm" fo:line-height="100%" fo:text-align="center" fo:text-indent="0cm" loext:tab-stop-distance="0cm" loext:paragraph-composer="false">
+      <style:paragraph-properties fo:margin-left="0cm" fo:margin-right="0cm" fo:margin-top="0cm" fo:margin-bottom="0cm" fo:line-height="100%" fo:text-align="center" fo:text-indent="0cm" loext:tab-stop-distance="0cm">
         <style:tab-stops>
           <style:tab-stop style:position="0cm"/>
         </style:tab-stops>
       </style:paragraph-properties>
-      <style:text-properties fo:font-variant="normal" fo:text-transform="none" fo:color="#000000" loext:opacity="100%" style:text-outline="false" style:text-line-through-style="none" style:text-line-through-type="none" style:text-position="0% 100%" style:font-name="Arial" fo:font-family="Arial" fo:font-size="44pt" fo:letter-spacing="normal" fo:language="en" fo:country="US" fo:font-style="normal" fo:text-shadow="none" style:text-underline-style="none" fo:font-weight="normal" style:letter-kerning="true" fo:background-color="transparent" style:font-name-asian="Microsoft YaHei" style:font-family-asian="'Microsoft YaHei'" style:font-family-generic-asian="system" style:font-pitch-asian="variable" style:font-size-asian="44pt" style:font-style-asian="normal" style:font-weight-asian="normal" style:font-name-complex="Lucida Sans" style:font-family-complex="'Lucida Sans'" style:font-family-generic-complex="system" style:font-pitch-complex="variable" style:font-size-complex="44pt" style:font-style-complex="normal" style:font-weight-complex="normal" style:text-emphasize="none" style:font-relief="none" loext:font-optical-sizing="auto" style:text-overline-style="none" style:text-overline-color="font-color"/>
+      <style:text-properties fo:font-variant="normal" fo:text-transform="none" fo:color="#000000" loext:opacity="100%" style:text-outline="false" style:text-line-through-style="none" style:text-line-through-type="none" style:text-position="0% 100%" style:font-name="Arial" fo:font-family="Arial" fo:font-size="44pt" fo:letter-spacing="normal" fo:language="en" fo:country="US" fo:font-style="normal" fo:text-shadow="none" style:text-underline-style="none" fo:font-weight="normal" style:letter-kerning="true" fo:background-color="transparent" style:font-name-asian="Microsoft YaHei" style:font-family-asian="'Microsoft YaHei'" style:font-family-generic-asian="system" style:font-pitch-asian="variable" style:font-size-asian="44pt" style:font-style-asian="normal" style:font-weight-asian="normal" style:font-name-complex="Lucida Sans" style:font-family-complex="'Lucida Sans'" style:font-family-generic-complex="system" style:font-pitch-complex="variable" style:font-size-complex="44pt" style:font-style-complex="normal" style:font-weight-complex="normal" style:text-emphasize="none" style:font-relief="none" style:text-overline-style="none" style:text-overline-color="font-color"/>
     </style:style>
     <style:presentation-page-layout style:name="AL0T26">
       <presentation:placeholder presentation:object="handout" svg:x="2.058cm" svg:y="1.743cm" svg:width="10.556cm" svg:height="-0.231cm"/>
@@ -9879,6 +9825,10 @@
       <presentation:placeholder presentation:object="handout" svg:x="15.414cm" svg:y="3.612cm" svg:width="10.556cm" svg:height="-0.231cm"/>
       <presentation:placeholder presentation:object="handout" svg:x="2.058cm" svg:y="5.481cm" svg:width="10.556cm" svg:height="-0.231cm"/>
       <presentation:placeholder presentation:object="handout" svg:x="15.414cm" svg:y="5.481cm" svg:width="10.556cm" svg:height="-0.231cm"/>
+    </style:presentation-page-layout>
+    <style:presentation-page-layout style:name="AL1T0">
+      <presentation:placeholder presentation:object="title" svg:x="2.058cm" svg:y="1.743cm" svg:width="23.912cm" svg:height="3.507cm"/>
+      <presentation:placeholder presentation:object="subtitle" svg:x="2.058cm" svg:y="5.838cm" svg:width="23.912cm" svg:height="13.23cm"/>
     </style:presentation-page-layout>
   </office:styles>
   <office:automatic-styles>
@@ -9898,11 +9848,15 @@
       <style:drawing-page-properties presentation:display-header="true" presentation:display-footer="true" presentation:display-page-number="false" presentation:display-date-time="true"/>
     </style:style>
     <style:style style:name="Mgr1" style:family="graphic" style:parent-style-name="standard">
-      <style:graphic-properties draw:stroke="none" draw:fill="none" draw:fill-color="#ffffff" draw:auto-grow-height="false" fo:min-height="1.485cm" loext:decorative="false"/>
+      <style:graphic-properties draw:stroke="none" draw:fill="none" draw:fill-color="#ffffff" draw:auto-grow-height="false" fo:min-height="1.485cm" loext:decorative="false">
+        <loext:fill-complex-color loext:theme-type="accent1" loext:color-type="theme"/>
+      </style:graphic-properties>
       <style:paragraph-properties style:writing-mode="lr-tb"/>
     </style:style>
     <style:style style:name="Mgr2" style:family="graphic" style:parent-style-name="standard">
-      <style:graphic-properties draw:stroke="none" draw:fill="none" draw:fill-color="#ffffff" draw:textarea-vertical-align="bottom" draw:auto-grow-height="false" fo:min-height="1.485cm" loext:decorative="false"/>
+      <style:graphic-properties draw:stroke="none" draw:fill="none" draw:fill-color="#ffffff" draw:textarea-vertical-align="bottom" draw:auto-grow-height="false" fo:min-height="1.485cm" loext:decorative="false">
+        <loext:fill-complex-color loext:theme-type="accent1" loext:color-type="theme"/>
+      </style:graphic-properties>
       <style:paragraph-properties style:writing-mode="lr-tb"/>
     </style:style>
     <style:style style:name="Mpr1" style:family="presentation" style:parent-style-name="DEFAULT-backgroundobjects">
@@ -9921,12 +9875,15 @@
       <style:text-properties fo:font-size="14pt" style:font-size-asian="14pt" style:font-size-complex="14pt"/>
     </style:style>
     <style:style style:name="MP3" style:family="paragraph">
-      <style:paragraph-properties fo:text-align="end" loext:paragraph-composer="false"/>
+      <style:paragraph-properties fo:text-align="end"/>
       <style:text-properties fo:font-size="14pt" style:font-size-asian="14pt" style:font-size-complex="14pt"/>
     </style:style>
     <style:style style:name="MP4" style:family="paragraph">
       <loext:graphic-properties draw:fill="none" draw:fill-color="#ffffff"/>
-      <style:paragraph-properties fo:text-align="end" loext:paragraph-composer="false"/>
+      <style:paragraph-properties fo:text-align="end"/>
+      <style:text-properties fo:font-size="14pt" style:font-size-asian="14pt" style:font-size-complex="14pt"/>
+    </style:style>
+    <style:style style:name="MT1" style:family="text">
       <style:text-properties fo:font-size="14pt" style:font-size-asian="14pt" style:font-size-complex="14pt"/>
     </style:style>
     <text:list-style style:name="ML1">
@@ -10032,28 +9989,36 @@
       <draw:frame draw:style-name="Mgr1" draw:text-style-name="MP2" draw:layer="backgroundobjects" svg:width="9.113cm" svg:height="1.484cm" svg:x="0cm" svg:y="0cm" presentation:class="header">
         <draw:text-box>
           <text:p text:style-name="MP1">
-            <presentation:header/>
+            <text:span text:style-name="MT1">
+              <presentation:header/>
+            </text:span>
           </text:p>
         </draw:text-box>
       </draw:frame>
       <draw:frame draw:style-name="Mgr1" draw:text-style-name="MP4" draw:layer="backgroundobjects" svg:width="9.113cm" svg:height="1.484cm" svg:x="11.886cm" svg:y="0cm" presentation:class="date-time">
         <draw:text-box>
           <text:p text:style-name="MP3">
-            <presentation:date-time/>
+            <text:span text:style-name="MT1">
+              <presentation:date-time/>
+            </text:span>
           </text:p>
         </draw:text-box>
       </draw:frame>
       <draw:frame draw:style-name="Mgr2" draw:text-style-name="MP2" draw:layer="backgroundobjects" svg:width="9.113cm" svg:height="1.484cm" svg:x="0cm" svg:y="28.215cm" presentation:class="footer">
         <draw:text-box>
           <text:p text:style-name="MP1">
-            <presentation:footer/>
+            <text:span text:style-name="MT1">
+              <presentation:footer/>
+            </text:span>
           </text:p>
         </draw:text-box>
       </draw:frame>
       <draw:frame draw:style-name="Mgr2" draw:text-style-name="MP4" draw:layer="backgroundobjects" svg:width="9.113cm" svg:height="1.484cm" svg:x="11.886cm" svg:y="28.215cm" presentation:class="page-number">
         <draw:text-box>
           <text:p text:style-name="MP3">
-            <text:page-number>&lt;number&gt;</text:page-number>
+            <text:span text:style-name="MT1">
+              <text:page-number>&lt;number&gt;</text:page-number>
+            </text:span>
           </text:p>
         </draw:text-box>
       </draw:frame>
@@ -10089,28 +10054,36 @@
         <draw:frame presentation:style-name="Mpr1" draw:text-style-name="MP2" draw:layer="backgroundobjects" svg:width="9.113cm" svg:height="1.484cm" svg:x="0cm" svg:y="0cm" presentation:class="header">
           <draw:text-box>
             <text:p text:style-name="MP1">
-              <presentation:header/>
+              <text:span text:style-name="MT1">
+                <presentation:header/>
+              </text:span>
             </text:p>
           </draw:text-box>
         </draw:frame>
         <draw:frame presentation:style-name="Mpr1" draw:text-style-name="MP4" draw:layer="backgroundobjects" svg:width="9.113cm" svg:height="1.484cm" svg:x="11.886cm" svg:y="0cm" presentation:class="date-time">
           <draw:text-box>
             <text:p text:style-name="MP3">
-              <presentation:date-time/>
+              <text:span text:style-name="MT1">
+                <presentation:date-time/>
+              </text:span>
             </text:p>
           </draw:text-box>
         </draw:frame>
         <draw:frame presentation:style-name="Mpr2" draw:text-style-name="MP2" draw:layer="backgroundobjects" svg:width="9.113cm" svg:height="1.484cm" svg:x="0cm" svg:y="28.215cm" presentation:class="footer">
           <draw:text-box>
             <text:p text:style-name="MP1">
-              <presentation:footer/>
+              <text:span text:style-name="MT1">
+                <presentation:footer/>
+              </text:span>
             </text:p>
           </draw:text-box>
         </draw:frame>
         <draw:frame presentation:style-name="Mpr2" draw:text-style-name="MP4" draw:layer="backgroundobjects" svg:width="9.113cm" svg:height="1.484cm" svg:x="11.886cm" svg:y="28.215cm" presentation:class="page-number">
           <draw:text-box>
             <text:p text:style-name="MP3">
-              <text:page-number>&lt;number&gt;</text:page-number>
+              <text:span text:style-name="MT1">
+                <text:page-number>&lt;number&gt;</text:page-number>
+              </text:span>
             </text:p>
           </draw:text-box>
         </draw:frame>
